--- a/納品レポート/ホテル別レポート/apa_kamata_口コミ分析レポート.pptx
+++ b/納品レポート/ホテル別レポート/apa_kamata_口コミ分析レポート.pptx
@@ -183,10 +183,10 @@
                     <c:v>Google</c:v>
                   </c:pt>
                   <c:pt idx="1">
-                    <c:v>Booking.com</c:v>
+                    <c:v>じゃらん</c:v>
                   </c:pt>
                   <c:pt idx="2">
-                    <c:v>じゃらん</c:v>
+                    <c:v>Booking.com</c:v>
                   </c:pt>
                   <c:pt idx="3">
                     <c:v>楽天トラベル</c:v>
@@ -211,13 +211,13 @@
                   <c:v>7.5</c:v>
                 </c:pt>
                 <c:pt idx="2">
-                  <c:v>7.5</c:v>
+                  <c:v>7.23</c:v>
                 </c:pt>
                 <c:pt idx="3">
                   <c:v>7</c:v>
                 </c:pt>
                 <c:pt idx="4">
-                  <c:v>6.9</c:v>
+                  <c:v>6.82</c:v>
                 </c:pt>
               </c:numCache>
             </c:numRef>
@@ -563,10 +563,10 @@
                   <c:v>29</c:v>
                 </c:pt>
                 <c:pt idx="1">
-                  <c:v>12</c:v>
+                  <c:v>13</c:v>
                 </c:pt>
                 <c:pt idx="2">
-                  <c:v>4</c:v>
+                  <c:v>5</c:v>
                 </c:pt>
               </c:numCache>
             </c:numRef>
@@ -815,13 +815,13 @@
                   <c:v>4</c:v>
                 </c:pt>
                 <c:pt idx="4">
-                  <c:v>7</c:v>
+                  <c:v>8</c:v>
                 </c:pt>
                 <c:pt idx="5">
                   <c:v>1</c:v>
                 </c:pt>
                 <c:pt idx="6">
-                  <c:v>3</c:v>
+                  <c:v>4</c:v>
                 </c:pt>
                 <c:pt idx="7">
                   <c:v>1</c:v>
@@ -2775,7 +2775,7 @@
                 <a:ea typeface="Arial" pitchFamily="34" charset="-122"/>
                 <a:cs typeface="Arial" pitchFamily="34" charset="-120"/>
               </a:rPr>
-              <a:t>レビュー総数：45件（5サイト）</a:t>
+              <a:t>レビュー総数：47件（5サイト）</a:t>
             </a:r>
             <a:endParaRPr lang="en-US" sz="1000" dirty="0"/>
           </a:p>
@@ -2795,7 +2795,7 @@
                 <a:ea typeface="Arial" pitchFamily="34" charset="-122"/>
                 <a:cs typeface="Arial" pitchFamily="34" charset="-120"/>
               </a:rPr>
-              <a:t>作成日：2026年3月17日</a:t>
+              <a:t>作成日：2026年3月18日</a:t>
             </a:r>
             <a:endParaRPr lang="en-US" sz="1000" dirty="0"/>
           </a:p>
@@ -3341,7 +3341,7 @@
                           <a:ea typeface="Arial" pitchFamily="34" charset="-122"/>
                           <a:cs typeface="Arial" pitchFamily="34" charset="-120"/>
                         </a:rPr>
-                        <a:t>7.44点</a:t>
+                        <a:t>7.34点</a:t>
                       </a:r>
                       <a:endParaRPr lang="en-US" sz="1000" dirty="0">
                         <a:latin typeface="Arial" charset="0"/>
@@ -3409,7 +3409,7 @@
                           <a:ea typeface="Arial" pitchFamily="34" charset="-122"/>
                           <a:cs typeface="Arial" pitchFamily="34" charset="-120"/>
                         </a:rPr>
-                        <a:t>7.9点以上</a:t>
+                        <a:t>7.8点以上</a:t>
                       </a:r>
                       <a:endParaRPr lang="en-US" sz="1000" dirty="0">
                         <a:latin typeface="Arial" charset="0"/>
@@ -3615,7 +3615,7 @@
                           <a:ea typeface="Arial" pitchFamily="34" charset="-122"/>
                           <a:cs typeface="Arial" pitchFamily="34" charset="-120"/>
                         </a:rPr>
-                        <a:t>64.4%</a:t>
+                        <a:t>61.7%</a:t>
                       </a:r>
                       <a:endParaRPr lang="en-US" sz="1000" dirty="0">
                         <a:latin typeface="Arial" charset="0"/>
@@ -3683,7 +3683,7 @@
                           <a:ea typeface="Arial" pitchFamily="34" charset="-122"/>
                           <a:cs typeface="Arial" pitchFamily="34" charset="-120"/>
                         </a:rPr>
-                        <a:t>74%以上</a:t>
+                        <a:t>72%以上</a:t>
                       </a:r>
                       <a:endParaRPr lang="en-US" sz="1000" dirty="0">
                         <a:latin typeface="Arial" charset="0"/>
@@ -3889,7 +3889,7 @@
                           <a:ea typeface="Arial" pitchFamily="34" charset="-122"/>
                           <a:cs typeface="Arial" pitchFamily="34" charset="-120"/>
                         </a:rPr>
-                        <a:t>8.9%</a:t>
+                        <a:t>10.6%</a:t>
                       </a:r>
                       <a:endParaRPr lang="en-US" sz="1000" dirty="0">
                         <a:latin typeface="Arial" charset="0"/>
@@ -4163,7 +4163,7 @@
                           <a:ea typeface="Arial" pitchFamily="34" charset="-122"/>
                           <a:cs typeface="Arial" pitchFamily="34" charset="-120"/>
                         </a:rPr>
-                        <a:t>6.9点</a:t>
+                        <a:t>6.8点</a:t>
                       </a:r>
                       <a:endParaRPr lang="en-US" sz="1000" dirty="0">
                         <a:latin typeface="Arial" charset="0"/>
@@ -4231,7 +4231,7 @@
                           <a:ea typeface="Arial" pitchFamily="34" charset="-122"/>
                           <a:cs typeface="Arial" pitchFamily="34" charset="-120"/>
                         </a:rPr>
-                        <a:t>7.9点以上</a:t>
+                        <a:t>7.8点以上</a:t>
                       </a:r>
                       <a:endParaRPr lang="en-US" sz="1000" dirty="0">
                         <a:latin typeface="Arial" charset="0"/>
@@ -5350,7 +5350,7 @@
                 <a:ea typeface="Arial" pitchFamily="34" charset="-122"/>
                 <a:cs typeface="Arial" pitchFamily="34" charset="-120"/>
               </a:rPr>
-              <a:t>7.44</a:t>
+              <a:t>7.34</a:t>
             </a:r>
             <a:endParaRPr lang="en-US" sz="3200" dirty="0"/>
           </a:p>
@@ -5475,7 +5475,7 @@
                 <a:ea typeface="Arial" pitchFamily="34" charset="-122"/>
                 <a:cs typeface="Arial" pitchFamily="34" charset="-120"/>
               </a:rPr>
-              <a:t>64.4%</a:t>
+              <a:t>61.7%</a:t>
             </a:r>
             <a:endParaRPr lang="en-US" sz="3200" dirty="0"/>
           </a:p>
@@ -5600,7 +5600,7 @@
                 <a:ea typeface="Arial" pitchFamily="34" charset="-122"/>
                 <a:cs typeface="Arial" pitchFamily="34" charset="-120"/>
               </a:rPr>
-              <a:t>8.9%</a:t>
+              <a:t>10.6%</a:t>
             </a:r>
             <a:endParaRPr lang="en-US" sz="3200" dirty="0"/>
           </a:p>
@@ -5725,7 +5725,7 @@
                 <a:ea typeface="Arial" pitchFamily="34" charset="-122"/>
                 <a:cs typeface="Arial" pitchFamily="34" charset="-120"/>
               </a:rPr>
-              <a:t>45件</a:t>
+              <a:t>47件</a:t>
             </a:r>
             <a:endParaRPr lang="en-US" sz="3200" dirty="0"/>
           </a:p>
@@ -5873,7 +5873,7 @@
                 <a:ea typeface="Arial" pitchFamily="34" charset="-122"/>
                 <a:cs typeface="Arial" pitchFamily="34" charset="-120"/>
               </a:rPr>
-              <a:t>  羽田空港早朝便利用の為、京急蒲田駅へのアクセスが良い</a:t>
+              <a:t>  立地はJRと京急のどちらからでも同じくらいの距離で遠くもないし、食事をするところも多いので困ることはないです</a:t>
             </a:r>
             <a:endParaRPr lang="en-US" sz="1100" dirty="0"/>
           </a:p>
@@ -5913,7 +5913,7 @@
                 <a:ea typeface="Arial" pitchFamily="34" charset="-122"/>
                 <a:cs typeface="Arial" pitchFamily="34" charset="-120"/>
               </a:rPr>
-              <a:t>  ただ、少しガッカリしたのは、フロントへのTEL、外線からのTELで、相手に対する親身な寄り添い方が無かったところで...</a:t>
+              <a:t>  フロントの愛想がない</a:t>
             </a:r>
             <a:endParaRPr lang="en-US" sz="1100" dirty="0"/>
           </a:p>
@@ -5953,7 +5953,7 @@
                 <a:ea typeface="Arial" pitchFamily="34" charset="-122"/>
                 <a:cs typeface="Arial" pitchFamily="34" charset="-120"/>
               </a:rPr>
-              <a:t>  アメニティも揃ってるし、きれい</a:t>
+              <a:t>  歯ブラシでこすれば、パッと見はもっときれいになりそうなので、ちょっと残念なところ</a:t>
             </a:r>
             <a:endParaRPr lang="en-US" sz="1100" dirty="0"/>
           </a:p>
@@ -6141,7 +6141,7 @@
                 <a:ea typeface="Arial" pitchFamily="34" charset="-122"/>
                 <a:cs typeface="Arial" pitchFamily="34" charset="-120"/>
               </a:rPr>
-              <a:t>  シャワーも水がたっぷり出るし、水はけがよくて湯船につかれるので癒される</a:t>
+              <a:t>  水回りはもう少し掃除がされているといいなと感じました</a:t>
             </a:r>
             <a:endParaRPr lang="en-US" sz="1100" dirty="0"/>
           </a:p>
@@ -6161,7 +6161,7 @@
                 <a:ea typeface="Arial" pitchFamily="34" charset="-122"/>
                 <a:cs typeface="Arial" pitchFamily="34" charset="-120"/>
               </a:rPr>
-              <a:t>臭い・匂い </a:t>
+              <a:t>防音性能 </a:t>
             </a:r>
             <a:endParaRPr lang="en-US" sz="1100" dirty="0"/>
           </a:p>
@@ -6181,7 +6181,7 @@
                 <a:ea typeface="Arial" pitchFamily="34" charset="-122"/>
                 <a:cs typeface="Arial" pitchFamily="34" charset="-120"/>
               </a:rPr>
-              <a:t>  禁煙の部屋を予約しましたが、かなり強いタバコの匂いがしました</a:t>
+              <a:t>  道路沿いだったけど防音がしっかりされていて外の音は聞こえない</a:t>
             </a:r>
             <a:endParaRPr lang="en-US" sz="1100" dirty="0"/>
           </a:p>
@@ -6534,7 +6534,7 @@
                 <a:ea typeface="Arial" pitchFamily="34" charset="-122"/>
                 <a:cs typeface="Arial" pitchFamily="34" charset="-120"/>
               </a:rPr>
-              <a:t>7.44</a:t>
+              <a:t>7.34</a:t>
             </a:r>
             <a:endParaRPr lang="en-US" sz="3200" dirty="0"/>
           </a:p>
@@ -6659,7 +6659,7 @@
                 <a:ea typeface="Arial" pitchFamily="34" charset="-122"/>
                 <a:cs typeface="Arial" pitchFamily="34" charset="-120"/>
               </a:rPr>
-              <a:t>64.4%</a:t>
+              <a:t>61.7%</a:t>
             </a:r>
             <a:endParaRPr lang="en-US" sz="3200" dirty="0"/>
           </a:p>
@@ -6784,7 +6784,7 @@
                 <a:ea typeface="Arial" pitchFamily="34" charset="-122"/>
                 <a:cs typeface="Arial" pitchFamily="34" charset="-120"/>
               </a:rPr>
-              <a:t>8.9%</a:t>
+              <a:t>10.6%</a:t>
             </a:r>
             <a:endParaRPr lang="en-US" sz="3200" dirty="0"/>
           </a:p>
@@ -6909,7 +6909,7 @@
                 <a:ea typeface="Arial" pitchFamily="34" charset="-122"/>
                 <a:cs typeface="Arial" pitchFamily="34" charset="-120"/>
               </a:rPr>
-              <a:t>45件</a:t>
+              <a:t>47件</a:t>
             </a:r>
             <a:endParaRPr lang="en-US" sz="3200" dirty="0"/>
           </a:p>
@@ -7379,7 +7379,7 @@
                 <a:ea typeface="Arial" pitchFamily="34" charset="-122"/>
                 <a:cs typeface="Arial" pitchFamily="34" charset="-120"/>
               </a:rPr>
-              <a:t>Agoda(6.9)が相対的に低い。口コミ返信の強化が急務</a:t>
+              <a:t>Agoda(6.8)が相対的に低い。口コミ返信の強化が急務</a:t>
             </a:r>
             <a:endParaRPr lang="en-US" sz="1100" dirty="0"/>
           </a:p>
@@ -8162,7 +8162,7 @@
                           <a:ea typeface="Arial" pitchFamily="34" charset="-122"/>
                           <a:cs typeface="Arial" pitchFamily="34" charset="-120"/>
                         </a:rPr>
-                        <a:t>Booking.com</a:t>
+                        <a:t>じゃらん</a:t>
                       </a:r>
                       <a:endParaRPr lang="en-US" sz="900" dirty="0">
                         <a:latin typeface="Arial" charset="0"/>
@@ -8230,7 +8230,143 @@
                           <a:ea typeface="Arial" pitchFamily="34" charset="-122"/>
                           <a:cs typeface="Arial" pitchFamily="34" charset="-120"/>
                         </a:rPr>
-                        <a:t>12</a:t>
+                        <a:t>4</a:t>
+                      </a:r>
+                      <a:endParaRPr lang="en-US" sz="900" dirty="0">
+                        <a:latin typeface="Arial" charset="0"/>
+                        <a:ea typeface="Arial" charset="0"/>
+                        <a:cs typeface="Arial" charset="0"/>
+                      </a:endParaRPr>
+                    </a:p>
+                  </a:txBody>
+                  <a:tcPr marL="91440" marR="91440" marT="45720" marB="45720">
+                    <a:lnL w="6350" cap="flat" cmpd="sng" algn="ctr">
+                      <a:solidFill>
+                        <a:srgbClr val="CBD5E1"/>
+                      </a:solidFill>
+                      <a:prstDash val="solid"/>
+                      <a:round/>
+                      <a:headEnd type="none" w="med" len="med"/>
+                      <a:tailEnd type="none" w="med" len="med"/>
+                    </a:lnL>
+                    <a:lnR w="6350" cap="flat" cmpd="sng" algn="ctr">
+                      <a:solidFill>
+                        <a:srgbClr val="CBD5E1"/>
+                      </a:solidFill>
+                      <a:prstDash val="solid"/>
+                      <a:round/>
+                      <a:headEnd type="none" w="med" len="med"/>
+                      <a:tailEnd type="none" w="med" len="med"/>
+                    </a:lnR>
+                    <a:lnT w="6350" cap="flat" cmpd="sng" algn="ctr">
+                      <a:solidFill>
+                        <a:srgbClr val="CBD5E1"/>
+                      </a:solidFill>
+                      <a:prstDash val="solid"/>
+                      <a:round/>
+                      <a:headEnd type="none" w="med" len="med"/>
+                      <a:tailEnd type="none" w="med" len="med"/>
+                    </a:lnT>
+                    <a:lnB w="6350" cap="flat" cmpd="sng" algn="ctr">
+                      <a:solidFill>
+                        <a:srgbClr val="CBD5E1"/>
+                      </a:solidFill>
+                      <a:prstDash val="solid"/>
+                      <a:round/>
+                      <a:headEnd type="none" w="med" len="med"/>
+                      <a:tailEnd type="none" w="med" len="med"/>
+                    </a:lnB>
+                    <a:solidFill>
+                      <a:srgbClr val="FFFFFF"/>
+                    </a:solidFill>
+                  </a:tcPr>
+                </a:tc>
+                <a:tc>
+                  <a:txBody>
+                    <a:bodyPr/>
+                    <a:lstStyle/>
+                    <a:p>
+                      <a:pPr algn="ctr" indent="0" marL="0">
+                        <a:buNone/>
+                      </a:pPr>
+                      <a:r>
+                        <a:rPr lang="en-US" sz="900" dirty="0">
+                          <a:solidFill>
+                            <a:srgbClr val="000000"/>
+                          </a:solidFill>
+                          <a:latin typeface="Arial" pitchFamily="34" charset="0"/>
+                          <a:ea typeface="Arial" pitchFamily="34" charset="-122"/>
+                          <a:cs typeface="Arial" pitchFamily="34" charset="-120"/>
+                        </a:rPr>
+                        <a:t>3.75</a:t>
+                      </a:r>
+                      <a:endParaRPr lang="en-US" sz="900" dirty="0">
+                        <a:latin typeface="Arial" charset="0"/>
+                        <a:ea typeface="Arial" charset="0"/>
+                        <a:cs typeface="Arial" charset="0"/>
+                      </a:endParaRPr>
+                    </a:p>
+                  </a:txBody>
+                  <a:tcPr marL="91440" marR="91440" marT="45720" marB="45720">
+                    <a:lnL w="6350" cap="flat" cmpd="sng" algn="ctr">
+                      <a:solidFill>
+                        <a:srgbClr val="CBD5E1"/>
+                      </a:solidFill>
+                      <a:prstDash val="solid"/>
+                      <a:round/>
+                      <a:headEnd type="none" w="med" len="med"/>
+                      <a:tailEnd type="none" w="med" len="med"/>
+                    </a:lnL>
+                    <a:lnR w="6350" cap="flat" cmpd="sng" algn="ctr">
+                      <a:solidFill>
+                        <a:srgbClr val="CBD5E1"/>
+                      </a:solidFill>
+                      <a:prstDash val="solid"/>
+                      <a:round/>
+                      <a:headEnd type="none" w="med" len="med"/>
+                      <a:tailEnd type="none" w="med" len="med"/>
+                    </a:lnR>
+                    <a:lnT w="6350" cap="flat" cmpd="sng" algn="ctr">
+                      <a:solidFill>
+                        <a:srgbClr val="CBD5E1"/>
+                      </a:solidFill>
+                      <a:prstDash val="solid"/>
+                      <a:round/>
+                      <a:headEnd type="none" w="med" len="med"/>
+                      <a:tailEnd type="none" w="med" len="med"/>
+                    </a:lnT>
+                    <a:lnB w="6350" cap="flat" cmpd="sng" algn="ctr">
+                      <a:solidFill>
+                        <a:srgbClr val="CBD5E1"/>
+                      </a:solidFill>
+                      <a:prstDash val="solid"/>
+                      <a:round/>
+                      <a:headEnd type="none" w="med" len="med"/>
+                      <a:tailEnd type="none" w="med" len="med"/>
+                    </a:lnB>
+                    <a:solidFill>
+                      <a:srgbClr val="FFFFFF"/>
+                    </a:solidFill>
+                  </a:tcPr>
+                </a:tc>
+                <a:tc>
+                  <a:txBody>
+                    <a:bodyPr/>
+                    <a:lstStyle/>
+                    <a:p>
+                      <a:pPr algn="ctr" indent="0" marL="0">
+                        <a:buNone/>
+                      </a:pPr>
+                      <a:r>
+                        <a:rPr lang="en-US" sz="900" dirty="0">
+                          <a:solidFill>
+                            <a:srgbClr val="000000"/>
+                          </a:solidFill>
+                          <a:latin typeface="Arial" pitchFamily="34" charset="0"/>
+                          <a:ea typeface="Arial" pitchFamily="34" charset="-122"/>
+                          <a:cs typeface="Arial" pitchFamily="34" charset="-120"/>
+                        </a:rPr>
+                        <a:t>/5 (×2)</a:t>
                       </a:r>
                       <a:endParaRPr lang="en-US" sz="900" dirty="0">
                         <a:latin typeface="Arial" charset="0"/>
@@ -8349,6 +8485,212 @@
                     </a:solidFill>
                   </a:tcPr>
                 </a:tc>
+              </a:tr>
+              <a:tr h="201168">
+                <a:tc>
+                  <a:txBody>
+                    <a:bodyPr/>
+                    <a:lstStyle/>
+                    <a:p>
+                      <a:pPr algn="ctr" indent="0" marL="0">
+                        <a:buNone/>
+                      </a:pPr>
+                      <a:r>
+                        <a:rPr lang="en-US" sz="900" dirty="0">
+                          <a:solidFill>
+                            <a:srgbClr val="000000"/>
+                          </a:solidFill>
+                          <a:latin typeface="Arial" pitchFamily="34" charset="0"/>
+                          <a:ea typeface="Arial" pitchFamily="34" charset="-122"/>
+                          <a:cs typeface="Arial" pitchFamily="34" charset="-120"/>
+                        </a:rPr>
+                        <a:t>Booking.com</a:t>
+                      </a:r>
+                      <a:endParaRPr lang="en-US" sz="900" dirty="0">
+                        <a:latin typeface="Arial" charset="0"/>
+                        <a:ea typeface="Arial" charset="0"/>
+                        <a:cs typeface="Arial" charset="0"/>
+                      </a:endParaRPr>
+                    </a:p>
+                  </a:txBody>
+                  <a:tcPr marL="91440" marR="91440" marT="45720" marB="45720">
+                    <a:lnL w="6350" cap="flat" cmpd="sng" algn="ctr">
+                      <a:solidFill>
+                        <a:srgbClr val="CBD5E1"/>
+                      </a:solidFill>
+                      <a:prstDash val="solid"/>
+                      <a:round/>
+                      <a:headEnd type="none" w="med" len="med"/>
+                      <a:tailEnd type="none" w="med" len="med"/>
+                    </a:lnL>
+                    <a:lnR w="6350" cap="flat" cmpd="sng" algn="ctr">
+                      <a:solidFill>
+                        <a:srgbClr val="CBD5E1"/>
+                      </a:solidFill>
+                      <a:prstDash val="solid"/>
+                      <a:round/>
+                      <a:headEnd type="none" w="med" len="med"/>
+                      <a:tailEnd type="none" w="med" len="med"/>
+                    </a:lnR>
+                    <a:lnT w="6350" cap="flat" cmpd="sng" algn="ctr">
+                      <a:solidFill>
+                        <a:srgbClr val="CBD5E1"/>
+                      </a:solidFill>
+                      <a:prstDash val="solid"/>
+                      <a:round/>
+                      <a:headEnd type="none" w="med" len="med"/>
+                      <a:tailEnd type="none" w="med" len="med"/>
+                    </a:lnT>
+                    <a:lnB w="6350" cap="flat" cmpd="sng" algn="ctr">
+                      <a:solidFill>
+                        <a:srgbClr val="CBD5E1"/>
+                      </a:solidFill>
+                      <a:prstDash val="solid"/>
+                      <a:round/>
+                      <a:headEnd type="none" w="med" len="med"/>
+                      <a:tailEnd type="none" w="med" len="med"/>
+                    </a:lnB>
+                    <a:solidFill>
+                      <a:srgbClr val="E8EFF8"/>
+                    </a:solidFill>
+                  </a:tcPr>
+                </a:tc>
+                <a:tc>
+                  <a:txBody>
+                    <a:bodyPr/>
+                    <a:lstStyle/>
+                    <a:p>
+                      <a:pPr algn="ctr" indent="0" marL="0">
+                        <a:buNone/>
+                      </a:pPr>
+                      <a:r>
+                        <a:rPr lang="en-US" sz="900" dirty="0">
+                          <a:solidFill>
+                            <a:srgbClr val="000000"/>
+                          </a:solidFill>
+                          <a:latin typeface="Arial" pitchFamily="34" charset="0"/>
+                          <a:ea typeface="Arial" pitchFamily="34" charset="-122"/>
+                          <a:cs typeface="Arial" pitchFamily="34" charset="-120"/>
+                        </a:rPr>
+                        <a:t>13</a:t>
+                      </a:r>
+                      <a:endParaRPr lang="en-US" sz="900" dirty="0">
+                        <a:latin typeface="Arial" charset="0"/>
+                        <a:ea typeface="Arial" charset="0"/>
+                        <a:cs typeface="Arial" charset="0"/>
+                      </a:endParaRPr>
+                    </a:p>
+                  </a:txBody>
+                  <a:tcPr marL="91440" marR="91440" marT="45720" marB="45720">
+                    <a:lnL w="6350" cap="flat" cmpd="sng" algn="ctr">
+                      <a:solidFill>
+                        <a:srgbClr val="CBD5E1"/>
+                      </a:solidFill>
+                      <a:prstDash val="solid"/>
+                      <a:round/>
+                      <a:headEnd type="none" w="med" len="med"/>
+                      <a:tailEnd type="none" w="med" len="med"/>
+                    </a:lnL>
+                    <a:lnR w="6350" cap="flat" cmpd="sng" algn="ctr">
+                      <a:solidFill>
+                        <a:srgbClr val="CBD5E1"/>
+                      </a:solidFill>
+                      <a:prstDash val="solid"/>
+                      <a:round/>
+                      <a:headEnd type="none" w="med" len="med"/>
+                      <a:tailEnd type="none" w="med" len="med"/>
+                    </a:lnR>
+                    <a:lnT w="6350" cap="flat" cmpd="sng" algn="ctr">
+                      <a:solidFill>
+                        <a:srgbClr val="CBD5E1"/>
+                      </a:solidFill>
+                      <a:prstDash val="solid"/>
+                      <a:round/>
+                      <a:headEnd type="none" w="med" len="med"/>
+                      <a:tailEnd type="none" w="med" len="med"/>
+                    </a:lnT>
+                    <a:lnB w="6350" cap="flat" cmpd="sng" algn="ctr">
+                      <a:solidFill>
+                        <a:srgbClr val="CBD5E1"/>
+                      </a:solidFill>
+                      <a:prstDash val="solid"/>
+                      <a:round/>
+                      <a:headEnd type="none" w="med" len="med"/>
+                      <a:tailEnd type="none" w="med" len="med"/>
+                    </a:lnB>
+                    <a:solidFill>
+                      <a:srgbClr val="E8EFF8"/>
+                    </a:solidFill>
+                  </a:tcPr>
+                </a:tc>
+                <a:tc>
+                  <a:txBody>
+                    <a:bodyPr/>
+                    <a:lstStyle/>
+                    <a:p>
+                      <a:pPr algn="ctr" indent="0" marL="0">
+                        <a:buNone/>
+                      </a:pPr>
+                      <a:r>
+                        <a:rPr lang="en-US" sz="900" dirty="0">
+                          <a:solidFill>
+                            <a:srgbClr val="000000"/>
+                          </a:solidFill>
+                          <a:latin typeface="Arial" pitchFamily="34" charset="0"/>
+                          <a:ea typeface="Arial" pitchFamily="34" charset="-122"/>
+                          <a:cs typeface="Arial" pitchFamily="34" charset="-120"/>
+                        </a:rPr>
+                        <a:t>7.23</a:t>
+                      </a:r>
+                      <a:endParaRPr lang="en-US" sz="900" dirty="0">
+                        <a:latin typeface="Arial" charset="0"/>
+                        <a:ea typeface="Arial" charset="0"/>
+                        <a:cs typeface="Arial" charset="0"/>
+                      </a:endParaRPr>
+                    </a:p>
+                  </a:txBody>
+                  <a:tcPr marL="91440" marR="91440" marT="45720" marB="45720">
+                    <a:lnL w="6350" cap="flat" cmpd="sng" algn="ctr">
+                      <a:solidFill>
+                        <a:srgbClr val="CBD5E1"/>
+                      </a:solidFill>
+                      <a:prstDash val="solid"/>
+                      <a:round/>
+                      <a:headEnd type="none" w="med" len="med"/>
+                      <a:tailEnd type="none" w="med" len="med"/>
+                    </a:lnL>
+                    <a:lnR w="6350" cap="flat" cmpd="sng" algn="ctr">
+                      <a:solidFill>
+                        <a:srgbClr val="CBD5E1"/>
+                      </a:solidFill>
+                      <a:prstDash val="solid"/>
+                      <a:round/>
+                      <a:headEnd type="none" w="med" len="med"/>
+                      <a:tailEnd type="none" w="med" len="med"/>
+                    </a:lnR>
+                    <a:lnT w="6350" cap="flat" cmpd="sng" algn="ctr">
+                      <a:solidFill>
+                        <a:srgbClr val="CBD5E1"/>
+                      </a:solidFill>
+                      <a:prstDash val="solid"/>
+                      <a:round/>
+                      <a:headEnd type="none" w="med" len="med"/>
+                      <a:tailEnd type="none" w="med" len="med"/>
+                    </a:lnT>
+                    <a:lnB w="6350" cap="flat" cmpd="sng" algn="ctr">
+                      <a:solidFill>
+                        <a:srgbClr val="CBD5E1"/>
+                      </a:solidFill>
+                      <a:prstDash val="solid"/>
+                      <a:round/>
+                      <a:headEnd type="none" w="med" len="med"/>
+                      <a:tailEnd type="none" w="med" len="med"/>
+                    </a:lnB>
+                    <a:solidFill>
+                      <a:srgbClr val="E8EFF8"/>
+                    </a:solidFill>
+                  </a:tcPr>
+                </a:tc>
                 <a:tc>
                   <a:txBody>
                     <a:bodyPr/>
@@ -8413,144 +8755,6 @@
                       <a:tailEnd type="none" w="med" len="med"/>
                     </a:lnB>
                     <a:solidFill>
-                      <a:srgbClr val="FFFFFF"/>
-                    </a:solidFill>
-                  </a:tcPr>
-                </a:tc>
-                <a:tc>
-                  <a:txBody>
-                    <a:bodyPr/>
-                    <a:lstStyle/>
-                    <a:p>
-                      <a:pPr algn="ctr" indent="0" marL="0">
-                        <a:buNone/>
-                      </a:pPr>
-                      <a:r>
-                        <a:rPr lang="en-US" sz="900" dirty="0">
-                          <a:solidFill>
-                            <a:srgbClr val="000000"/>
-                          </a:solidFill>
-                          <a:latin typeface="Arial" pitchFamily="34" charset="0"/>
-                          <a:ea typeface="Arial" pitchFamily="34" charset="-122"/>
-                          <a:cs typeface="Arial" pitchFamily="34" charset="-120"/>
-                        </a:rPr>
-                        <a:t>7.5</a:t>
-                      </a:r>
-                      <a:endParaRPr lang="en-US" sz="900" dirty="0">
-                        <a:latin typeface="Arial" charset="0"/>
-                        <a:ea typeface="Arial" charset="0"/>
-                        <a:cs typeface="Arial" charset="0"/>
-                      </a:endParaRPr>
-                    </a:p>
-                  </a:txBody>
-                  <a:tcPr marL="91440" marR="91440" marT="45720" marB="45720">
-                    <a:lnL w="6350" cap="flat" cmpd="sng" algn="ctr">
-                      <a:solidFill>
-                        <a:srgbClr val="CBD5E1"/>
-                      </a:solidFill>
-                      <a:prstDash val="solid"/>
-                      <a:round/>
-                      <a:headEnd type="none" w="med" len="med"/>
-                      <a:tailEnd type="none" w="med" len="med"/>
-                    </a:lnL>
-                    <a:lnR w="6350" cap="flat" cmpd="sng" algn="ctr">
-                      <a:solidFill>
-                        <a:srgbClr val="CBD5E1"/>
-                      </a:solidFill>
-                      <a:prstDash val="solid"/>
-                      <a:round/>
-                      <a:headEnd type="none" w="med" len="med"/>
-                      <a:tailEnd type="none" w="med" len="med"/>
-                    </a:lnR>
-                    <a:lnT w="6350" cap="flat" cmpd="sng" algn="ctr">
-                      <a:solidFill>
-                        <a:srgbClr val="CBD5E1"/>
-                      </a:solidFill>
-                      <a:prstDash val="solid"/>
-                      <a:round/>
-                      <a:headEnd type="none" w="med" len="med"/>
-                      <a:tailEnd type="none" w="med" len="med"/>
-                    </a:lnT>
-                    <a:lnB w="6350" cap="flat" cmpd="sng" algn="ctr">
-                      <a:solidFill>
-                        <a:srgbClr val="CBD5E1"/>
-                      </a:solidFill>
-                      <a:prstDash val="solid"/>
-                      <a:round/>
-                      <a:headEnd type="none" w="med" len="med"/>
-                      <a:tailEnd type="none" w="med" len="med"/>
-                    </a:lnB>
-                    <a:solidFill>
-                      <a:srgbClr val="FFFFFF"/>
-                    </a:solidFill>
-                  </a:tcPr>
-                </a:tc>
-              </a:tr>
-              <a:tr h="201168">
-                <a:tc>
-                  <a:txBody>
-                    <a:bodyPr/>
-                    <a:lstStyle/>
-                    <a:p>
-                      <a:pPr algn="ctr" indent="0" marL="0">
-                        <a:buNone/>
-                      </a:pPr>
-                      <a:r>
-                        <a:rPr lang="en-US" sz="900" dirty="0">
-                          <a:solidFill>
-                            <a:srgbClr val="000000"/>
-                          </a:solidFill>
-                          <a:latin typeface="Arial" pitchFamily="34" charset="0"/>
-                          <a:ea typeface="Arial" pitchFamily="34" charset="-122"/>
-                          <a:cs typeface="Arial" pitchFamily="34" charset="-120"/>
-                        </a:rPr>
-                        <a:t>じゃらん</a:t>
-                      </a:r>
-                      <a:endParaRPr lang="en-US" sz="900" dirty="0">
-                        <a:latin typeface="Arial" charset="0"/>
-                        <a:ea typeface="Arial" charset="0"/>
-                        <a:cs typeface="Arial" charset="0"/>
-                      </a:endParaRPr>
-                    </a:p>
-                  </a:txBody>
-                  <a:tcPr marL="91440" marR="91440" marT="45720" marB="45720">
-                    <a:lnL w="6350" cap="flat" cmpd="sng" algn="ctr">
-                      <a:solidFill>
-                        <a:srgbClr val="CBD5E1"/>
-                      </a:solidFill>
-                      <a:prstDash val="solid"/>
-                      <a:round/>
-                      <a:headEnd type="none" w="med" len="med"/>
-                      <a:tailEnd type="none" w="med" len="med"/>
-                    </a:lnL>
-                    <a:lnR w="6350" cap="flat" cmpd="sng" algn="ctr">
-                      <a:solidFill>
-                        <a:srgbClr val="CBD5E1"/>
-                      </a:solidFill>
-                      <a:prstDash val="solid"/>
-                      <a:round/>
-                      <a:headEnd type="none" w="med" len="med"/>
-                      <a:tailEnd type="none" w="med" len="med"/>
-                    </a:lnR>
-                    <a:lnT w="6350" cap="flat" cmpd="sng" algn="ctr">
-                      <a:solidFill>
-                        <a:srgbClr val="CBD5E1"/>
-                      </a:solidFill>
-                      <a:prstDash val="solid"/>
-                      <a:round/>
-                      <a:headEnd type="none" w="med" len="med"/>
-                      <a:tailEnd type="none" w="med" len="med"/>
-                    </a:lnT>
-                    <a:lnB w="6350" cap="flat" cmpd="sng" algn="ctr">
-                      <a:solidFill>
-                        <a:srgbClr val="CBD5E1"/>
-                      </a:solidFill>
-                      <a:prstDash val="solid"/>
-                      <a:round/>
-                      <a:headEnd type="none" w="med" len="med"/>
-                      <a:tailEnd type="none" w="med" len="med"/>
-                    </a:lnB>
-                    <a:solidFill>
                       <a:srgbClr val="E8EFF8"/>
                     </a:solidFill>
                   </a:tcPr>
@@ -8572,211 +8776,7 @@
                           <a:ea typeface="Arial" pitchFamily="34" charset="-122"/>
                           <a:cs typeface="Arial" pitchFamily="34" charset="-120"/>
                         </a:rPr>
-                        <a:t>4</a:t>
-                      </a:r>
-                      <a:endParaRPr lang="en-US" sz="900" dirty="0">
-                        <a:latin typeface="Arial" charset="0"/>
-                        <a:ea typeface="Arial" charset="0"/>
-                        <a:cs typeface="Arial" charset="0"/>
-                      </a:endParaRPr>
-                    </a:p>
-                  </a:txBody>
-                  <a:tcPr marL="91440" marR="91440" marT="45720" marB="45720">
-                    <a:lnL w="6350" cap="flat" cmpd="sng" algn="ctr">
-                      <a:solidFill>
-                        <a:srgbClr val="CBD5E1"/>
-                      </a:solidFill>
-                      <a:prstDash val="solid"/>
-                      <a:round/>
-                      <a:headEnd type="none" w="med" len="med"/>
-                      <a:tailEnd type="none" w="med" len="med"/>
-                    </a:lnL>
-                    <a:lnR w="6350" cap="flat" cmpd="sng" algn="ctr">
-                      <a:solidFill>
-                        <a:srgbClr val="CBD5E1"/>
-                      </a:solidFill>
-                      <a:prstDash val="solid"/>
-                      <a:round/>
-                      <a:headEnd type="none" w="med" len="med"/>
-                      <a:tailEnd type="none" w="med" len="med"/>
-                    </a:lnR>
-                    <a:lnT w="6350" cap="flat" cmpd="sng" algn="ctr">
-                      <a:solidFill>
-                        <a:srgbClr val="CBD5E1"/>
-                      </a:solidFill>
-                      <a:prstDash val="solid"/>
-                      <a:round/>
-                      <a:headEnd type="none" w="med" len="med"/>
-                      <a:tailEnd type="none" w="med" len="med"/>
-                    </a:lnT>
-                    <a:lnB w="6350" cap="flat" cmpd="sng" algn="ctr">
-                      <a:solidFill>
-                        <a:srgbClr val="CBD5E1"/>
-                      </a:solidFill>
-                      <a:prstDash val="solid"/>
-                      <a:round/>
-                      <a:headEnd type="none" w="med" len="med"/>
-                      <a:tailEnd type="none" w="med" len="med"/>
-                    </a:lnB>
-                    <a:solidFill>
-                      <a:srgbClr val="E8EFF8"/>
-                    </a:solidFill>
-                  </a:tcPr>
-                </a:tc>
-                <a:tc>
-                  <a:txBody>
-                    <a:bodyPr/>
-                    <a:lstStyle/>
-                    <a:p>
-                      <a:pPr algn="ctr" indent="0" marL="0">
-                        <a:buNone/>
-                      </a:pPr>
-                      <a:r>
-                        <a:rPr lang="en-US" sz="900" dirty="0">
-                          <a:solidFill>
-                            <a:srgbClr val="000000"/>
-                          </a:solidFill>
-                          <a:latin typeface="Arial" pitchFamily="34" charset="0"/>
-                          <a:ea typeface="Arial" pitchFamily="34" charset="-122"/>
-                          <a:cs typeface="Arial" pitchFamily="34" charset="-120"/>
-                        </a:rPr>
-                        <a:t>3.75</a:t>
-                      </a:r>
-                      <a:endParaRPr lang="en-US" sz="900" dirty="0">
-                        <a:latin typeface="Arial" charset="0"/>
-                        <a:ea typeface="Arial" charset="0"/>
-                        <a:cs typeface="Arial" charset="0"/>
-                      </a:endParaRPr>
-                    </a:p>
-                  </a:txBody>
-                  <a:tcPr marL="91440" marR="91440" marT="45720" marB="45720">
-                    <a:lnL w="6350" cap="flat" cmpd="sng" algn="ctr">
-                      <a:solidFill>
-                        <a:srgbClr val="CBD5E1"/>
-                      </a:solidFill>
-                      <a:prstDash val="solid"/>
-                      <a:round/>
-                      <a:headEnd type="none" w="med" len="med"/>
-                      <a:tailEnd type="none" w="med" len="med"/>
-                    </a:lnL>
-                    <a:lnR w="6350" cap="flat" cmpd="sng" algn="ctr">
-                      <a:solidFill>
-                        <a:srgbClr val="CBD5E1"/>
-                      </a:solidFill>
-                      <a:prstDash val="solid"/>
-                      <a:round/>
-                      <a:headEnd type="none" w="med" len="med"/>
-                      <a:tailEnd type="none" w="med" len="med"/>
-                    </a:lnR>
-                    <a:lnT w="6350" cap="flat" cmpd="sng" algn="ctr">
-                      <a:solidFill>
-                        <a:srgbClr val="CBD5E1"/>
-                      </a:solidFill>
-                      <a:prstDash val="solid"/>
-                      <a:round/>
-                      <a:headEnd type="none" w="med" len="med"/>
-                      <a:tailEnd type="none" w="med" len="med"/>
-                    </a:lnT>
-                    <a:lnB w="6350" cap="flat" cmpd="sng" algn="ctr">
-                      <a:solidFill>
-                        <a:srgbClr val="CBD5E1"/>
-                      </a:solidFill>
-                      <a:prstDash val="solid"/>
-                      <a:round/>
-                      <a:headEnd type="none" w="med" len="med"/>
-                      <a:tailEnd type="none" w="med" len="med"/>
-                    </a:lnB>
-                    <a:solidFill>
-                      <a:srgbClr val="E8EFF8"/>
-                    </a:solidFill>
-                  </a:tcPr>
-                </a:tc>
-                <a:tc>
-                  <a:txBody>
-                    <a:bodyPr/>
-                    <a:lstStyle/>
-                    <a:p>
-                      <a:pPr algn="ctr" indent="0" marL="0">
-                        <a:buNone/>
-                      </a:pPr>
-                      <a:r>
-                        <a:rPr lang="en-US" sz="900" dirty="0">
-                          <a:solidFill>
-                            <a:srgbClr val="000000"/>
-                          </a:solidFill>
-                          <a:latin typeface="Arial" pitchFamily="34" charset="0"/>
-                          <a:ea typeface="Arial" pitchFamily="34" charset="-122"/>
-                          <a:cs typeface="Arial" pitchFamily="34" charset="-120"/>
-                        </a:rPr>
-                        <a:t>/5 (×2)</a:t>
-                      </a:r>
-                      <a:endParaRPr lang="en-US" sz="900" dirty="0">
-                        <a:latin typeface="Arial" charset="0"/>
-                        <a:ea typeface="Arial" charset="0"/>
-                        <a:cs typeface="Arial" charset="0"/>
-                      </a:endParaRPr>
-                    </a:p>
-                  </a:txBody>
-                  <a:tcPr marL="91440" marR="91440" marT="45720" marB="45720">
-                    <a:lnL w="6350" cap="flat" cmpd="sng" algn="ctr">
-                      <a:solidFill>
-                        <a:srgbClr val="CBD5E1"/>
-                      </a:solidFill>
-                      <a:prstDash val="solid"/>
-                      <a:round/>
-                      <a:headEnd type="none" w="med" len="med"/>
-                      <a:tailEnd type="none" w="med" len="med"/>
-                    </a:lnL>
-                    <a:lnR w="6350" cap="flat" cmpd="sng" algn="ctr">
-                      <a:solidFill>
-                        <a:srgbClr val="CBD5E1"/>
-                      </a:solidFill>
-                      <a:prstDash val="solid"/>
-                      <a:round/>
-                      <a:headEnd type="none" w="med" len="med"/>
-                      <a:tailEnd type="none" w="med" len="med"/>
-                    </a:lnR>
-                    <a:lnT w="6350" cap="flat" cmpd="sng" algn="ctr">
-                      <a:solidFill>
-                        <a:srgbClr val="CBD5E1"/>
-                      </a:solidFill>
-                      <a:prstDash val="solid"/>
-                      <a:round/>
-                      <a:headEnd type="none" w="med" len="med"/>
-                      <a:tailEnd type="none" w="med" len="med"/>
-                    </a:lnT>
-                    <a:lnB w="6350" cap="flat" cmpd="sng" algn="ctr">
-                      <a:solidFill>
-                        <a:srgbClr val="CBD5E1"/>
-                      </a:solidFill>
-                      <a:prstDash val="solid"/>
-                      <a:round/>
-                      <a:headEnd type="none" w="med" len="med"/>
-                      <a:tailEnd type="none" w="med" len="med"/>
-                    </a:lnB>
-                    <a:solidFill>
-                      <a:srgbClr val="E8EFF8"/>
-                    </a:solidFill>
-                  </a:tcPr>
-                </a:tc>
-                <a:tc>
-                  <a:txBody>
-                    <a:bodyPr/>
-                    <a:lstStyle/>
-                    <a:p>
-                      <a:pPr algn="ctr" indent="0" marL="0">
-                        <a:buNone/>
-                      </a:pPr>
-                      <a:r>
-                        <a:rPr lang="en-US" sz="900" dirty="0">
-                          <a:solidFill>
-                            <a:srgbClr val="000000"/>
-                          </a:solidFill>
-                          <a:latin typeface="Arial" pitchFamily="34" charset="0"/>
-                          <a:ea typeface="Arial" pitchFamily="34" charset="-122"/>
-                          <a:cs typeface="Arial" pitchFamily="34" charset="-120"/>
-                        </a:rPr>
-                        <a:t>7.5</a:t>
+                        <a:t>7.23</a:t>
                       </a:r>
                       <a:endParaRPr lang="en-US" sz="900" dirty="0">
                         <a:latin typeface="Arial" charset="0"/>
@@ -9256,7 +9256,7 @@
                           <a:ea typeface="Arial" pitchFamily="34" charset="-122"/>
                           <a:cs typeface="Arial" pitchFamily="34" charset="-120"/>
                         </a:rPr>
-                        <a:t>10</a:t>
+                        <a:t>11</a:t>
                       </a:r>
                       <a:endParaRPr lang="en-US" sz="900" dirty="0">
                         <a:latin typeface="Arial" charset="0"/>
@@ -9324,7 +9324,7 @@
                           <a:ea typeface="Arial" pitchFamily="34" charset="-122"/>
                           <a:cs typeface="Arial" pitchFamily="34" charset="-120"/>
                         </a:rPr>
-                        <a:t>6.9</a:t>
+                        <a:t>6.82</a:t>
                       </a:r>
                       <a:endParaRPr lang="en-US" sz="900" dirty="0">
                         <a:latin typeface="Arial" charset="0"/>
@@ -9460,7 +9460,7 @@
                           <a:ea typeface="Arial" pitchFamily="34" charset="-122"/>
                           <a:cs typeface="Arial" pitchFamily="34" charset="-120"/>
                         </a:rPr>
-                        <a:t>6.9</a:t>
+                        <a:t>6.82</a:t>
                       </a:r>
                       <a:endParaRPr lang="en-US" sz="900" dirty="0">
                         <a:latin typeface="Arial" charset="0"/>
@@ -9868,7 +9868,7 @@
                 <a:ea typeface="Arial" pitchFamily="34" charset="-122"/>
                 <a:cs typeface="Arial" pitchFamily="34" charset="-120"/>
               </a:rPr>
-              <a:t>29件（64.4%）</a:t>
+              <a:t>29件（61.7%）</a:t>
             </a:r>
             <a:endParaRPr lang="en-US" sz="1100" dirty="0"/>
           </a:p>
@@ -9966,7 +9966,7 @@
                 <a:ea typeface="Arial" pitchFamily="34" charset="-122"/>
                 <a:cs typeface="Arial" pitchFamily="34" charset="-120"/>
               </a:rPr>
-              <a:t>12件（26.7%）</a:t>
+              <a:t>13件（27.7%）</a:t>
             </a:r>
             <a:endParaRPr lang="en-US" sz="1100" dirty="0"/>
           </a:p>
@@ -10064,7 +10064,7 @@
                 <a:ea typeface="Arial" pitchFamily="34" charset="-122"/>
                 <a:cs typeface="Arial" pitchFamily="34" charset="-120"/>
               </a:rPr>
-              <a:t>4件（8.9%）</a:t>
+              <a:t>5件（10.6%）</a:t>
             </a:r>
             <a:endParaRPr lang="en-US" sz="1100" dirty="0"/>
           </a:p>
@@ -10476,7 +10476,7 @@
                 <a:ea typeface="Arial" pitchFamily="34" charset="-122"/>
                 <a:cs typeface="Arial" pitchFamily="34" charset="-120"/>
               </a:rPr>
-              <a:t>羽田空港早朝便利用の為、京急蒲田駅へのアクセスが良い</a:t>
+              <a:t>立地はJRと京急のどちらからでも同じくらいの距離で遠くもないし、食事をするところも多いので困ることはないです</a:t>
             </a:r>
             <a:endParaRPr lang="en-US" sz="900" dirty="0"/>
           </a:p>
@@ -10515,7 +10515,7 @@
                 <a:ea typeface="Arial" pitchFamily="34" charset="-122"/>
                 <a:cs typeface="Arial" pitchFamily="34" charset="-120"/>
               </a:rPr>
-              <a:t>「京急蒲田　JR蒲田の中間にあって非常に便利 京急蒲田　JR蒲田の中間にあって非常に便利」</a:t>
+              <a:t>「駅近で周りにスーパー、コンビニがあるところ」</a:t>
             </a:r>
             <a:endParaRPr lang="en-US" sz="900" dirty="0"/>
           </a:p>
@@ -10699,7 +10699,7 @@
                 <a:ea typeface="Arial" pitchFamily="34" charset="-122"/>
                 <a:cs typeface="Arial" pitchFamily="34" charset="-120"/>
               </a:rPr>
-              <a:t>ただ、少しガッカリしたのは、フロントへのTEL、外線からのTELで、相手に対する親身な寄り添い方が無かったところで...</a:t>
+              <a:t>フロントの愛想がない</a:t>
             </a:r>
             <a:endParaRPr lang="en-US" sz="900" dirty="0"/>
           </a:p>
@@ -10738,7 +10738,7 @@
                 <a:ea typeface="Arial" pitchFamily="34" charset="-122"/>
                 <a:cs typeface="Arial" pitchFamily="34" charset="-120"/>
               </a:rPr>
-              <a:t>「Well maintained and very supportive stafff There is nothi...」</a:t>
+              <a:t>「ただ、少しガッカリしたのは、フロントへのTEL、外線からのTELで、相手に対する親身な寄り添い方が無かったところで...」</a:t>
             </a:r>
             <a:endParaRPr lang="en-US" sz="900" dirty="0"/>
           </a:p>
@@ -10844,7 +10844,7 @@
                 <a:ea typeface="Arial" pitchFamily="34" charset="-122"/>
                 <a:cs typeface="Arial" pitchFamily="34" charset="-120"/>
               </a:rPr>
-              <a:t>5件</a:t>
+              <a:t>7件</a:t>
             </a:r>
             <a:endParaRPr lang="en-US" sz="900" dirty="0"/>
           </a:p>
@@ -10922,7 +10922,7 @@
                 <a:ea typeface="Arial" pitchFamily="34" charset="-122"/>
                 <a:cs typeface="Arial" pitchFamily="34" charset="-120"/>
               </a:rPr>
-              <a:t>アメニティも揃ってるし、きれい</a:t>
+              <a:t>歯ブラシでこすれば、パッと見はもっときれいになりそうなので、ちょっと残念なところ</a:t>
             </a:r>
             <a:endParaRPr lang="en-US" sz="900" dirty="0"/>
           </a:p>
@@ -10961,7 +10961,7 @@
                 <a:ea typeface="Arial" pitchFamily="34" charset="-122"/>
                 <a:cs typeface="Arial" pitchFamily="34" charset="-120"/>
               </a:rPr>
-              <a:t>「部屋は狭いが、掃除も特に不満もなく小綺麗」</a:t>
+              <a:t>「ホテル自体は綺麗であった」</a:t>
             </a:r>
             <a:endParaRPr lang="en-US" sz="900" dirty="0"/>
           </a:p>
@@ -11067,7 +11067,7 @@
                 <a:ea typeface="Arial" pitchFamily="34" charset="-122"/>
                 <a:cs typeface="Arial" pitchFamily="34" charset="-120"/>
               </a:rPr>
-              <a:t>5件</a:t>
+              <a:t>6件</a:t>
             </a:r>
             <a:endParaRPr lang="en-US" sz="900" dirty="0"/>
           </a:p>
@@ -11145,7 +11145,7 @@
                 <a:ea typeface="Arial" pitchFamily="34" charset="-122"/>
                 <a:cs typeface="Arial" pitchFamily="34" charset="-120"/>
               </a:rPr>
-              <a:t>アメニティも揃ってるし、きれい</a:t>
+              <a:t>寝るだけなので、狭くても問題なく、ベッドは快適に睡眠をとることができました</a:t>
             </a:r>
             <a:endParaRPr lang="en-US" sz="900" dirty="0"/>
           </a:p>
@@ -11184,7 +11184,7 @@
                 <a:ea typeface="Arial" pitchFamily="34" charset="-122"/>
                 <a:cs typeface="Arial" pitchFamily="34" charset="-120"/>
               </a:rPr>
-              <a:t>「皆さんも快適空間なので気を付けてください」</a:t>
+              <a:t>「アメニティも揃ってるし、きれい」</a:t>
             </a:r>
             <a:endParaRPr lang="en-US" sz="900" dirty="0"/>
           </a:p>
@@ -12594,7 +12594,7 @@
                           <a:ea typeface="Arial" pitchFamily="34" charset="-122"/>
                           <a:cs typeface="Arial" pitchFamily="34" charset="-120"/>
                         </a:rPr>
-                        <a:t>シャワーも水がたっぷり出るし、水はけがよくて湯船につかれるので癒される</a:t>
+                        <a:t>水回りはもう少し掃除がされているといいなと感じました</a:t>
                       </a:r>
                       <a:endParaRPr lang="en-US" sz="900" dirty="0">
                         <a:latin typeface="Arial" charset="0"/>
@@ -12662,7 +12662,7 @@
                           <a:ea typeface="Arial" pitchFamily="34" charset="-122"/>
                           <a:cs typeface="Arial" pitchFamily="34" charset="-120"/>
                         </a:rPr>
-                        <a:t>2件</a:t>
+                        <a:t>3件</a:t>
                       </a:r>
                       <a:endParaRPr lang="en-US" sz="900" dirty="0">
                         <a:latin typeface="Arial" charset="0"/>
@@ -12800,7 +12800,7 @@
                           <a:ea typeface="Arial" pitchFamily="34" charset="-122"/>
                           <a:cs typeface="Arial" pitchFamily="34" charset="-120"/>
                         </a:rPr>
-                        <a:t>臭い・匂い</a:t>
+                        <a:t>防音性能</a:t>
                       </a:r>
                       <a:endParaRPr lang="en-US" sz="900" dirty="0">
                         <a:latin typeface="Arial" charset="0"/>
@@ -12868,7 +12868,7 @@
                           <a:ea typeface="Arial" pitchFamily="34" charset="-122"/>
                           <a:cs typeface="Arial" pitchFamily="34" charset="-120"/>
                         </a:rPr>
-                        <a:t>禁煙の部屋を予約しましたが、かなり強いタバコの匂いがしました</a:t>
+                        <a:t>道路沿いだったけど防音がしっかりされていて外の音は聞こえない</a:t>
                       </a:r>
                       <a:endParaRPr lang="en-US" sz="900" dirty="0">
                         <a:latin typeface="Arial" charset="0"/>
@@ -13074,7 +13074,7 @@
                           <a:ea typeface="Arial" pitchFamily="34" charset="-122"/>
                           <a:cs typeface="Arial" pitchFamily="34" charset="-120"/>
                         </a:rPr>
-                        <a:t>エアコン・空調</a:t>
+                        <a:t>臭い・匂い</a:t>
                       </a:r>
                       <a:endParaRPr lang="en-US" sz="900" dirty="0">
                         <a:latin typeface="Arial" charset="0"/>
@@ -13142,7 +13142,7 @@
                           <a:ea typeface="Arial" pitchFamily="34" charset="-122"/>
                           <a:cs typeface="Arial" pitchFamily="34" charset="-120"/>
                         </a:rPr>
-                        <a:t>エアコンが壊れてる エアコンが壊れてる</a:t>
+                        <a:t>禁煙の部屋を予約しましたが、かなり強いタバコの匂いがしました</a:t>
                       </a:r>
                       <a:endParaRPr lang="en-US" sz="900" dirty="0">
                         <a:latin typeface="Arial" charset="0"/>
@@ -13348,6 +13348,554 @@
                           <a:ea typeface="Arial" pitchFamily="34" charset="-122"/>
                           <a:cs typeface="Arial" pitchFamily="34" charset="-120"/>
                         </a:rPr>
+                        <a:t>エアコン・空調</a:t>
+                      </a:r>
+                      <a:endParaRPr lang="en-US" sz="900" dirty="0">
+                        <a:latin typeface="Arial" charset="0"/>
+                        <a:ea typeface="Arial" charset="0"/>
+                        <a:cs typeface="Arial" charset="0"/>
+                      </a:endParaRPr>
+                    </a:p>
+                  </a:txBody>
+                  <a:tcPr marL="91440" marR="91440" marT="45720" marB="45720">
+                    <a:lnL w="6350" cap="flat" cmpd="sng" algn="ctr">
+                      <a:solidFill>
+                        <a:srgbClr val="CBD5E1"/>
+                      </a:solidFill>
+                      <a:prstDash val="solid"/>
+                      <a:round/>
+                      <a:headEnd type="none" w="med" len="med"/>
+                      <a:tailEnd type="none" w="med" len="med"/>
+                    </a:lnL>
+                    <a:lnR w="6350" cap="flat" cmpd="sng" algn="ctr">
+                      <a:solidFill>
+                        <a:srgbClr val="CBD5E1"/>
+                      </a:solidFill>
+                      <a:prstDash val="solid"/>
+                      <a:round/>
+                      <a:headEnd type="none" w="med" len="med"/>
+                      <a:tailEnd type="none" w="med" len="med"/>
+                    </a:lnR>
+                    <a:lnT w="6350" cap="flat" cmpd="sng" algn="ctr">
+                      <a:solidFill>
+                        <a:srgbClr val="CBD5E1"/>
+                      </a:solidFill>
+                      <a:prstDash val="solid"/>
+                      <a:round/>
+                      <a:headEnd type="none" w="med" len="med"/>
+                      <a:tailEnd type="none" w="med" len="med"/>
+                    </a:lnT>
+                    <a:lnB w="6350" cap="flat" cmpd="sng" algn="ctr">
+                      <a:solidFill>
+                        <a:srgbClr val="CBD5E1"/>
+                      </a:solidFill>
+                      <a:prstDash val="solid"/>
+                      <a:round/>
+                      <a:headEnd type="none" w="med" len="med"/>
+                      <a:tailEnd type="none" w="med" len="med"/>
+                    </a:lnB>
+                    <a:solidFill>
+                      <a:srgbClr val="E8EFF8"/>
+                    </a:solidFill>
+                  </a:tcPr>
+                </a:tc>
+                <a:tc>
+                  <a:txBody>
+                    <a:bodyPr/>
+                    <a:lstStyle/>
+                    <a:p>
+                      <a:pPr indent="0" marL="0">
+                        <a:buNone/>
+                      </a:pPr>
+                      <a:r>
+                        <a:rPr lang="en-US" sz="900" dirty="0">
+                          <a:solidFill>
+                            <a:srgbClr val="64748B"/>
+                          </a:solidFill>
+                          <a:latin typeface="Arial" pitchFamily="34" charset="0"/>
+                          <a:ea typeface="Arial" pitchFamily="34" charset="-122"/>
+                          <a:cs typeface="Arial" pitchFamily="34" charset="-120"/>
+                        </a:rPr>
+                        <a:t>エアコンが壊れてる エアコンが壊れてる</a:t>
+                      </a:r>
+                      <a:endParaRPr lang="en-US" sz="900" dirty="0">
+                        <a:latin typeface="Arial" charset="0"/>
+                        <a:ea typeface="Arial" charset="0"/>
+                        <a:cs typeface="Arial" charset="0"/>
+                      </a:endParaRPr>
+                    </a:p>
+                  </a:txBody>
+                  <a:tcPr marL="91440" marR="91440" marT="45720" marB="45720">
+                    <a:lnL w="6350" cap="flat" cmpd="sng" algn="ctr">
+                      <a:solidFill>
+                        <a:srgbClr val="CBD5E1"/>
+                      </a:solidFill>
+                      <a:prstDash val="solid"/>
+                      <a:round/>
+                      <a:headEnd type="none" w="med" len="med"/>
+                      <a:tailEnd type="none" w="med" len="med"/>
+                    </a:lnL>
+                    <a:lnR w="6350" cap="flat" cmpd="sng" algn="ctr">
+                      <a:solidFill>
+                        <a:srgbClr val="CBD5E1"/>
+                      </a:solidFill>
+                      <a:prstDash val="solid"/>
+                      <a:round/>
+                      <a:headEnd type="none" w="med" len="med"/>
+                      <a:tailEnd type="none" w="med" len="med"/>
+                    </a:lnR>
+                    <a:lnT w="6350" cap="flat" cmpd="sng" algn="ctr">
+                      <a:solidFill>
+                        <a:srgbClr val="CBD5E1"/>
+                      </a:solidFill>
+                      <a:prstDash val="solid"/>
+                      <a:round/>
+                      <a:headEnd type="none" w="med" len="med"/>
+                      <a:tailEnd type="none" w="med" len="med"/>
+                    </a:lnT>
+                    <a:lnB w="6350" cap="flat" cmpd="sng" algn="ctr">
+                      <a:solidFill>
+                        <a:srgbClr val="CBD5E1"/>
+                      </a:solidFill>
+                      <a:prstDash val="solid"/>
+                      <a:round/>
+                      <a:headEnd type="none" w="med" len="med"/>
+                      <a:tailEnd type="none" w="med" len="med"/>
+                    </a:lnB>
+                    <a:solidFill>
+                      <a:srgbClr val="E8EFF8"/>
+                    </a:solidFill>
+                  </a:tcPr>
+                </a:tc>
+                <a:tc>
+                  <a:txBody>
+                    <a:bodyPr/>
+                    <a:lstStyle/>
+                    <a:p>
+                      <a:pPr algn="ctr" indent="0" marL="0">
+                        <a:buNone/>
+                      </a:pPr>
+                      <a:r>
+                        <a:rPr lang="en-US" sz="900" dirty="0">
+                          <a:solidFill>
+                            <a:srgbClr val="334155"/>
+                          </a:solidFill>
+                          <a:latin typeface="Arial" pitchFamily="34" charset="0"/>
+                          <a:ea typeface="Arial" pitchFamily="34" charset="-122"/>
+                          <a:cs typeface="Arial" pitchFamily="34" charset="-120"/>
+                        </a:rPr>
+                        <a:t>1件</a:t>
+                      </a:r>
+                      <a:endParaRPr lang="en-US" sz="900" dirty="0">
+                        <a:latin typeface="Arial" charset="0"/>
+                        <a:ea typeface="Arial" charset="0"/>
+                        <a:cs typeface="Arial" charset="0"/>
+                      </a:endParaRPr>
+                    </a:p>
+                  </a:txBody>
+                  <a:tcPr marL="91440" marR="91440" marT="45720" marB="45720">
+                    <a:lnL w="6350" cap="flat" cmpd="sng" algn="ctr">
+                      <a:solidFill>
+                        <a:srgbClr val="CBD5E1"/>
+                      </a:solidFill>
+                      <a:prstDash val="solid"/>
+                      <a:round/>
+                      <a:headEnd type="none" w="med" len="med"/>
+                      <a:tailEnd type="none" w="med" len="med"/>
+                    </a:lnL>
+                    <a:lnR w="6350" cap="flat" cmpd="sng" algn="ctr">
+                      <a:solidFill>
+                        <a:srgbClr val="CBD5E1"/>
+                      </a:solidFill>
+                      <a:prstDash val="solid"/>
+                      <a:round/>
+                      <a:headEnd type="none" w="med" len="med"/>
+                      <a:tailEnd type="none" w="med" len="med"/>
+                    </a:lnR>
+                    <a:lnT w="6350" cap="flat" cmpd="sng" algn="ctr">
+                      <a:solidFill>
+                        <a:srgbClr val="CBD5E1"/>
+                      </a:solidFill>
+                      <a:prstDash val="solid"/>
+                      <a:round/>
+                      <a:headEnd type="none" w="med" len="med"/>
+                      <a:tailEnd type="none" w="med" len="med"/>
+                    </a:lnT>
+                    <a:lnB w="6350" cap="flat" cmpd="sng" algn="ctr">
+                      <a:solidFill>
+                        <a:srgbClr val="CBD5E1"/>
+                      </a:solidFill>
+                      <a:prstDash val="solid"/>
+                      <a:round/>
+                      <a:headEnd type="none" w="med" len="med"/>
+                      <a:tailEnd type="none" w="med" len="med"/>
+                    </a:lnB>
+                    <a:solidFill>
+                      <a:srgbClr val="E8EFF8"/>
+                    </a:solidFill>
+                  </a:tcPr>
+                </a:tc>
+              </a:tr>
+              <a:tr h="320040">
+                <a:tc>
+                  <a:txBody>
+                    <a:bodyPr/>
+                    <a:lstStyle/>
+                    <a:p>
+                      <a:pPr algn="ctr" indent="0" marL="0">
+                        <a:buNone/>
+                      </a:pPr>
+                      <a:r>
+                        <a:rPr lang="en-US" sz="1200" b="1" dirty="0">
+                          <a:solidFill>
+                            <a:srgbClr val="94A3B8"/>
+                          </a:solidFill>
+                          <a:latin typeface="Arial" pitchFamily="34" charset="0"/>
+                          <a:ea typeface="Arial" pitchFamily="34" charset="-122"/>
+                          <a:cs typeface="Arial" pitchFamily="34" charset="-120"/>
+                        </a:rPr>
+                        <a:t>C</a:t>
+                      </a:r>
+                      <a:endParaRPr lang="en-US" sz="1200" dirty="0">
+                        <a:latin typeface="Arial" charset="0"/>
+                        <a:ea typeface="Arial" charset="0"/>
+                        <a:cs typeface="Arial" charset="0"/>
+                      </a:endParaRPr>
+                    </a:p>
+                  </a:txBody>
+                  <a:tcPr marL="91440" marR="91440" marT="45720" marB="45720">
+                    <a:lnL w="6350" cap="flat" cmpd="sng" algn="ctr">
+                      <a:solidFill>
+                        <a:srgbClr val="CBD5E1"/>
+                      </a:solidFill>
+                      <a:prstDash val="solid"/>
+                      <a:round/>
+                      <a:headEnd type="none" w="med" len="med"/>
+                      <a:tailEnd type="none" w="med" len="med"/>
+                    </a:lnL>
+                    <a:lnR w="6350" cap="flat" cmpd="sng" algn="ctr">
+                      <a:solidFill>
+                        <a:srgbClr val="CBD5E1"/>
+                      </a:solidFill>
+                      <a:prstDash val="solid"/>
+                      <a:round/>
+                      <a:headEnd type="none" w="med" len="med"/>
+                      <a:tailEnd type="none" w="med" len="med"/>
+                    </a:lnR>
+                    <a:lnT w="6350" cap="flat" cmpd="sng" algn="ctr">
+                      <a:solidFill>
+                        <a:srgbClr val="CBD5E1"/>
+                      </a:solidFill>
+                      <a:prstDash val="solid"/>
+                      <a:round/>
+                      <a:headEnd type="none" w="med" len="med"/>
+                      <a:tailEnd type="none" w="med" len="med"/>
+                    </a:lnT>
+                    <a:lnB w="6350" cap="flat" cmpd="sng" algn="ctr">
+                      <a:solidFill>
+                        <a:srgbClr val="CBD5E1"/>
+                      </a:solidFill>
+                      <a:prstDash val="solid"/>
+                      <a:round/>
+                      <a:headEnd type="none" w="med" len="med"/>
+                      <a:tailEnd type="none" w="med" len="med"/>
+                    </a:lnB>
+                    <a:solidFill>
+                      <a:srgbClr val="FFFFFF"/>
+                    </a:solidFill>
+                  </a:tcPr>
+                </a:tc>
+                <a:tc>
+                  <a:txBody>
+                    <a:bodyPr/>
+                    <a:lstStyle/>
+                    <a:p>
+                      <a:pPr indent="0" marL="0">
+                        <a:buNone/>
+                      </a:pPr>
+                      <a:r>
+                        <a:rPr lang="en-US" sz="900" b="1" dirty="0">
+                          <a:solidFill>
+                            <a:srgbClr val="334155"/>
+                          </a:solidFill>
+                          <a:latin typeface="Arial" pitchFamily="34" charset="0"/>
+                          <a:ea typeface="Arial" pitchFamily="34" charset="-122"/>
+                          <a:cs typeface="Arial" pitchFamily="34" charset="-120"/>
+                        </a:rPr>
+                        <a:t>対応・サービスの不満</a:t>
+                      </a:r>
+                      <a:endParaRPr lang="en-US" sz="900" dirty="0">
+                        <a:latin typeface="Arial" charset="0"/>
+                        <a:ea typeface="Arial" charset="0"/>
+                        <a:cs typeface="Arial" charset="0"/>
+                      </a:endParaRPr>
+                    </a:p>
+                  </a:txBody>
+                  <a:tcPr marL="91440" marR="91440" marT="45720" marB="45720">
+                    <a:lnL w="6350" cap="flat" cmpd="sng" algn="ctr">
+                      <a:solidFill>
+                        <a:srgbClr val="CBD5E1"/>
+                      </a:solidFill>
+                      <a:prstDash val="solid"/>
+                      <a:round/>
+                      <a:headEnd type="none" w="med" len="med"/>
+                      <a:tailEnd type="none" w="med" len="med"/>
+                    </a:lnL>
+                    <a:lnR w="6350" cap="flat" cmpd="sng" algn="ctr">
+                      <a:solidFill>
+                        <a:srgbClr val="CBD5E1"/>
+                      </a:solidFill>
+                      <a:prstDash val="solid"/>
+                      <a:round/>
+                      <a:headEnd type="none" w="med" len="med"/>
+                      <a:tailEnd type="none" w="med" len="med"/>
+                    </a:lnR>
+                    <a:lnT w="6350" cap="flat" cmpd="sng" algn="ctr">
+                      <a:solidFill>
+                        <a:srgbClr val="CBD5E1"/>
+                      </a:solidFill>
+                      <a:prstDash val="solid"/>
+                      <a:round/>
+                      <a:headEnd type="none" w="med" len="med"/>
+                      <a:tailEnd type="none" w="med" len="med"/>
+                    </a:lnT>
+                    <a:lnB w="6350" cap="flat" cmpd="sng" algn="ctr">
+                      <a:solidFill>
+                        <a:srgbClr val="CBD5E1"/>
+                      </a:solidFill>
+                      <a:prstDash val="solid"/>
+                      <a:round/>
+                      <a:headEnd type="none" w="med" len="med"/>
+                      <a:tailEnd type="none" w="med" len="med"/>
+                    </a:lnB>
+                    <a:solidFill>
+                      <a:srgbClr val="FFFFFF"/>
+                    </a:solidFill>
+                  </a:tcPr>
+                </a:tc>
+                <a:tc>
+                  <a:txBody>
+                    <a:bodyPr/>
+                    <a:lstStyle/>
+                    <a:p>
+                      <a:pPr indent="0" marL="0">
+                        <a:buNone/>
+                      </a:pPr>
+                      <a:r>
+                        <a:rPr lang="en-US" sz="900" dirty="0">
+                          <a:solidFill>
+                            <a:srgbClr val="64748B"/>
+                          </a:solidFill>
+                          <a:latin typeface="Arial" pitchFamily="34" charset="0"/>
+                          <a:ea typeface="Arial" pitchFamily="34" charset="-122"/>
+                          <a:cs typeface="Arial" pitchFamily="34" charset="-120"/>
+                        </a:rPr>
+                        <a:t>歯ブラシでこすれば、パッと見はもっときれいになりそうなので、ちょっと残念なところ</a:t>
+                      </a:r>
+                      <a:endParaRPr lang="en-US" sz="900" dirty="0">
+                        <a:latin typeface="Arial" charset="0"/>
+                        <a:ea typeface="Arial" charset="0"/>
+                        <a:cs typeface="Arial" charset="0"/>
+                      </a:endParaRPr>
+                    </a:p>
+                  </a:txBody>
+                  <a:tcPr marL="91440" marR="91440" marT="45720" marB="45720">
+                    <a:lnL w="6350" cap="flat" cmpd="sng" algn="ctr">
+                      <a:solidFill>
+                        <a:srgbClr val="CBD5E1"/>
+                      </a:solidFill>
+                      <a:prstDash val="solid"/>
+                      <a:round/>
+                      <a:headEnd type="none" w="med" len="med"/>
+                      <a:tailEnd type="none" w="med" len="med"/>
+                    </a:lnL>
+                    <a:lnR w="6350" cap="flat" cmpd="sng" algn="ctr">
+                      <a:solidFill>
+                        <a:srgbClr val="CBD5E1"/>
+                      </a:solidFill>
+                      <a:prstDash val="solid"/>
+                      <a:round/>
+                      <a:headEnd type="none" w="med" len="med"/>
+                      <a:tailEnd type="none" w="med" len="med"/>
+                    </a:lnR>
+                    <a:lnT w="6350" cap="flat" cmpd="sng" algn="ctr">
+                      <a:solidFill>
+                        <a:srgbClr val="CBD5E1"/>
+                      </a:solidFill>
+                      <a:prstDash val="solid"/>
+                      <a:round/>
+                      <a:headEnd type="none" w="med" len="med"/>
+                      <a:tailEnd type="none" w="med" len="med"/>
+                    </a:lnT>
+                    <a:lnB w="6350" cap="flat" cmpd="sng" algn="ctr">
+                      <a:solidFill>
+                        <a:srgbClr val="CBD5E1"/>
+                      </a:solidFill>
+                      <a:prstDash val="solid"/>
+                      <a:round/>
+                      <a:headEnd type="none" w="med" len="med"/>
+                      <a:tailEnd type="none" w="med" len="med"/>
+                    </a:lnB>
+                    <a:solidFill>
+                      <a:srgbClr val="FFFFFF"/>
+                    </a:solidFill>
+                  </a:tcPr>
+                </a:tc>
+                <a:tc>
+                  <a:txBody>
+                    <a:bodyPr/>
+                    <a:lstStyle/>
+                    <a:p>
+                      <a:pPr algn="ctr" indent="0" marL="0">
+                        <a:buNone/>
+                      </a:pPr>
+                      <a:r>
+                        <a:rPr lang="en-US" sz="900" dirty="0">
+                          <a:solidFill>
+                            <a:srgbClr val="334155"/>
+                          </a:solidFill>
+                          <a:latin typeface="Arial" pitchFamily="34" charset="0"/>
+                          <a:ea typeface="Arial" pitchFamily="34" charset="-122"/>
+                          <a:cs typeface="Arial" pitchFamily="34" charset="-120"/>
+                        </a:rPr>
+                        <a:t>1件</a:t>
+                      </a:r>
+                      <a:endParaRPr lang="en-US" sz="900" dirty="0">
+                        <a:latin typeface="Arial" charset="0"/>
+                        <a:ea typeface="Arial" charset="0"/>
+                        <a:cs typeface="Arial" charset="0"/>
+                      </a:endParaRPr>
+                    </a:p>
+                  </a:txBody>
+                  <a:tcPr marL="91440" marR="91440" marT="45720" marB="45720">
+                    <a:lnL w="6350" cap="flat" cmpd="sng" algn="ctr">
+                      <a:solidFill>
+                        <a:srgbClr val="CBD5E1"/>
+                      </a:solidFill>
+                      <a:prstDash val="solid"/>
+                      <a:round/>
+                      <a:headEnd type="none" w="med" len="med"/>
+                      <a:tailEnd type="none" w="med" len="med"/>
+                    </a:lnL>
+                    <a:lnR w="6350" cap="flat" cmpd="sng" algn="ctr">
+                      <a:solidFill>
+                        <a:srgbClr val="CBD5E1"/>
+                      </a:solidFill>
+                      <a:prstDash val="solid"/>
+                      <a:round/>
+                      <a:headEnd type="none" w="med" len="med"/>
+                      <a:tailEnd type="none" w="med" len="med"/>
+                    </a:lnR>
+                    <a:lnT w="6350" cap="flat" cmpd="sng" algn="ctr">
+                      <a:solidFill>
+                        <a:srgbClr val="CBD5E1"/>
+                      </a:solidFill>
+                      <a:prstDash val="solid"/>
+                      <a:round/>
+                      <a:headEnd type="none" w="med" len="med"/>
+                      <a:tailEnd type="none" w="med" len="med"/>
+                    </a:lnT>
+                    <a:lnB w="6350" cap="flat" cmpd="sng" algn="ctr">
+                      <a:solidFill>
+                        <a:srgbClr val="CBD5E1"/>
+                      </a:solidFill>
+                      <a:prstDash val="solid"/>
+                      <a:round/>
+                      <a:headEnd type="none" w="med" len="med"/>
+                      <a:tailEnd type="none" w="med" len="med"/>
+                    </a:lnB>
+                    <a:solidFill>
+                      <a:srgbClr val="FFFFFF"/>
+                    </a:solidFill>
+                  </a:tcPr>
+                </a:tc>
+              </a:tr>
+              <a:tr h="320040">
+                <a:tc>
+                  <a:txBody>
+                    <a:bodyPr/>
+                    <a:lstStyle/>
+                    <a:p>
+                      <a:pPr algn="ctr" indent="0" marL="0">
+                        <a:buNone/>
+                      </a:pPr>
+                      <a:r>
+                        <a:rPr lang="en-US" sz="1200" b="1" dirty="0">
+                          <a:solidFill>
+                            <a:srgbClr val="94A3B8"/>
+                          </a:solidFill>
+                          <a:latin typeface="Arial" pitchFamily="34" charset="0"/>
+                          <a:ea typeface="Arial" pitchFamily="34" charset="-122"/>
+                          <a:cs typeface="Arial" pitchFamily="34" charset="-120"/>
+                        </a:rPr>
+                        <a:t>C</a:t>
+                      </a:r>
+                      <a:endParaRPr lang="en-US" sz="1200" dirty="0">
+                        <a:latin typeface="Arial" charset="0"/>
+                        <a:ea typeface="Arial" charset="0"/>
+                        <a:cs typeface="Arial" charset="0"/>
+                      </a:endParaRPr>
+                    </a:p>
+                  </a:txBody>
+                  <a:tcPr marL="91440" marR="91440" marT="45720" marB="45720">
+                    <a:lnL w="6350" cap="flat" cmpd="sng" algn="ctr">
+                      <a:solidFill>
+                        <a:srgbClr val="CBD5E1"/>
+                      </a:solidFill>
+                      <a:prstDash val="solid"/>
+                      <a:round/>
+                      <a:headEnd type="none" w="med" len="med"/>
+                      <a:tailEnd type="none" w="med" len="med"/>
+                    </a:lnL>
+                    <a:lnR w="6350" cap="flat" cmpd="sng" algn="ctr">
+                      <a:solidFill>
+                        <a:srgbClr val="CBD5E1"/>
+                      </a:solidFill>
+                      <a:prstDash val="solid"/>
+                      <a:round/>
+                      <a:headEnd type="none" w="med" len="med"/>
+                      <a:tailEnd type="none" w="med" len="med"/>
+                    </a:lnR>
+                    <a:lnT w="6350" cap="flat" cmpd="sng" algn="ctr">
+                      <a:solidFill>
+                        <a:srgbClr val="CBD5E1"/>
+                      </a:solidFill>
+                      <a:prstDash val="solid"/>
+                      <a:round/>
+                      <a:headEnd type="none" w="med" len="med"/>
+                      <a:tailEnd type="none" w="med" len="med"/>
+                    </a:lnT>
+                    <a:lnB w="6350" cap="flat" cmpd="sng" algn="ctr">
+                      <a:solidFill>
+                        <a:srgbClr val="CBD5E1"/>
+                      </a:solidFill>
+                      <a:prstDash val="solid"/>
+                      <a:round/>
+                      <a:headEnd type="none" w="med" len="med"/>
+                      <a:tailEnd type="none" w="med" len="med"/>
+                    </a:lnB>
+                    <a:solidFill>
+                      <a:srgbClr val="E8EFF8"/>
+                    </a:solidFill>
+                  </a:tcPr>
+                </a:tc>
+                <a:tc>
+                  <a:txBody>
+                    <a:bodyPr/>
+                    <a:lstStyle/>
+                    <a:p>
+                      <a:pPr indent="0" marL="0">
+                        <a:buNone/>
+                      </a:pPr>
+                      <a:r>
+                        <a:rPr lang="en-US" sz="900" b="1" dirty="0">
+                          <a:solidFill>
+                            <a:srgbClr val="334155"/>
+                          </a:solidFill>
+                          <a:latin typeface="Arial" pitchFamily="34" charset="0"/>
+                          <a:ea typeface="Arial" pitchFamily="34" charset="-122"/>
+                          <a:cs typeface="Arial" pitchFamily="34" charset="-120"/>
+                        </a:rPr>
                         <a:t>清掃不備</a:t>
                       </a:r>
                       <a:endParaRPr lang="en-US" sz="900" dirty="0">
@@ -14465,6 +15013,177 @@
         </p:nvSpPr>
         <p:spPr>
           <a:xfrm>
+            <a:off x="4663440" y="3017520"/>
+            <a:ext cx="3977640" cy="1600200"/>
+          </a:xfrm>
+          <a:prstGeom prst="rect">
+            <a:avLst/>
+          </a:prstGeom>
+          <a:solidFill>
+            <a:srgbClr val="FFFFFF"/>
+          </a:solidFill>
+          <a:ln/>
+          <a:effectLst>
+            <a:outerShdw sx="100000" sy="100000" kx="0" ky="0" algn="bl" rotWithShape="0" blurRad="50800" dist="25400" dir="8100000">
+              <a:srgbClr val="000000">
+                <a:alpha val="10000"/>
+              </a:srgbClr>
+            </a:outerShdw>
+          </a:effectLst>
+        </p:spPr>
+      </p:sp>
+      <p:sp>
+        <p:nvSpPr>
+          <p:cNvPr id="19" name="Shape 17"/>
+          <p:cNvSpPr/>
+          <p:nvPr/>
+        </p:nvSpPr>
+        <p:spPr>
+          <a:xfrm>
+            <a:off x="4663440" y="3017520"/>
+            <a:ext cx="54864" cy="1600200"/>
+          </a:xfrm>
+          <a:prstGeom prst="rect">
+            <a:avLst/>
+          </a:prstGeom>
+          <a:solidFill>
+            <a:srgbClr val="3B7DD8"/>
+          </a:solidFill>
+          <a:ln/>
+        </p:spPr>
+      </p:sp>
+      <p:sp>
+        <p:nvSpPr>
+          <p:cNvPr id="20" name="Text 18"/>
+          <p:cNvSpPr/>
+          <p:nvPr/>
+        </p:nvSpPr>
+        <p:spPr>
+          <a:xfrm>
+            <a:off x="4800600" y="3063240"/>
+            <a:ext cx="3657600" cy="320040"/>
+          </a:xfrm>
+          <a:prstGeom prst="rect">
+            <a:avLst/>
+          </a:prstGeom>
+          <a:noFill/>
+          <a:ln/>
+        </p:spPr>
+        <p:txBody>
+          <a:bodyPr wrap="square" lIns="0" tIns="0" rIns="0" bIns="0" rtlCol="0" anchor="ctr"/>
+          <a:lstStyle/>
+          <a:p>
+            <a:pPr indent="0" marL="0">
+              <a:buNone/>
+            </a:pPr>
+            <a:r>
+              <a:rPr lang="en-US" sz="1200" b="1" dirty="0">
+                <a:solidFill>
+                  <a:srgbClr val="1A2744"/>
+                </a:solidFill>
+                <a:latin typeface="Arial" pitchFamily="34" charset="0"/>
+                <a:ea typeface="Arial" pitchFamily="34" charset="-122"/>
+                <a:cs typeface="Arial" pitchFamily="34" charset="-120"/>
+              </a:rPr>
+              <a:t>スタッフ対応品質の統一</a:t>
+            </a:r>
+            <a:endParaRPr lang="en-US" sz="1200" dirty="0"/>
+          </a:p>
+        </p:txBody>
+      </p:sp>
+      <p:sp>
+        <p:nvSpPr>
+          <p:cNvPr id="21" name="Text 19"/>
+          <p:cNvSpPr/>
+          <p:nvPr/>
+        </p:nvSpPr>
+        <p:spPr>
+          <a:xfrm>
+            <a:off x="4800600" y="3383280"/>
+            <a:ext cx="3657600" cy="1188720"/>
+          </a:xfrm>
+          <a:prstGeom prst="rect">
+            <a:avLst/>
+          </a:prstGeom>
+          <a:noFill/>
+          <a:ln/>
+        </p:spPr>
+        <p:txBody>
+          <a:bodyPr wrap="square" lIns="0" tIns="0" rIns="0" bIns="0" rtlCol="0" anchor="ctr"/>
+          <a:lstStyle/>
+          <a:p>
+            <a:pPr marL="342900" indent="-342900">
+              <a:spcAft>
+                <a:spcPts val="300"/>
+              </a:spcAft>
+              <a:buSzPct val="100000"/>
+              <a:buChar char="•"/>
+            </a:pPr>
+            <a:r>
+              <a:rPr lang="en-US" sz="900" dirty="0">
+                <a:solidFill>
+                  <a:srgbClr val="334155"/>
+                </a:solidFill>
+                <a:latin typeface="Arial" pitchFamily="34" charset="0"/>
+                <a:ea typeface="Arial" pitchFamily="34" charset="-122"/>
+                <a:cs typeface="Arial" pitchFamily="34" charset="-120"/>
+              </a:rPr>
+              <a:t>接客マニュアルの見直しと全スタッフへの周知</a:t>
+            </a:r>
+            <a:endParaRPr lang="en-US" sz="900" dirty="0"/>
+          </a:p>
+          <a:p>
+            <a:pPr marL="342900" indent="-342900">
+              <a:spcAft>
+                <a:spcPts val="300"/>
+              </a:spcAft>
+              <a:buSzPct val="100000"/>
+              <a:buChar char="•"/>
+            </a:pPr>
+            <a:r>
+              <a:rPr lang="en-US" sz="900" dirty="0">
+                <a:solidFill>
+                  <a:srgbClr val="334155"/>
+                </a:solidFill>
+                <a:latin typeface="Arial" pitchFamily="34" charset="0"/>
+                <a:ea typeface="Arial" pitchFamily="34" charset="-122"/>
+                <a:cs typeface="Arial" pitchFamily="34" charset="-120"/>
+              </a:rPr>
+              <a:t>ゲストからのクレーム対応フローの明確化</a:t>
+            </a:r>
+            <a:endParaRPr lang="en-US" sz="900" dirty="0"/>
+          </a:p>
+          <a:p>
+            <a:pPr marL="342900" indent="-342900">
+              <a:spcAft>
+                <a:spcPts val="300"/>
+              </a:spcAft>
+              <a:buSzPct val="100000"/>
+              <a:buChar char="•"/>
+            </a:pPr>
+            <a:r>
+              <a:rPr lang="en-US" sz="900" dirty="0">
+                <a:solidFill>
+                  <a:srgbClr val="334155"/>
+                </a:solidFill>
+                <a:latin typeface="Arial" pitchFamily="34" charset="0"/>
+                <a:ea typeface="Arial" pitchFamily="34" charset="-122"/>
+                <a:cs typeface="Arial" pitchFamily="34" charset="-120"/>
+              </a:rPr>
+              <a:t>定期的なCS研修の実施</a:t>
+            </a:r>
+            <a:endParaRPr lang="en-US" sz="900" dirty="0"/>
+          </a:p>
+        </p:txBody>
+      </p:sp>
+      <p:sp>
+        <p:nvSpPr>
+          <p:cNvPr id="22" name="Shape 20"/>
+          <p:cNvSpPr/>
+          <p:nvPr/>
+        </p:nvSpPr>
+        <p:spPr>
+          <a:xfrm>
             <a:off x="0" y="4800600"/>
             <a:ext cx="9144000" cy="342900"/>
           </a:xfrm>
@@ -14479,7 +15198,7 @@
       </p:sp>
       <p:sp>
         <p:nvSpPr>
-          <p:cNvPr id="19" name="Text 17"/>
+          <p:cNvPr id="23" name="Text 21"/>
           <p:cNvSpPr/>
           <p:nvPr/>
         </p:nvSpPr>
@@ -14518,7 +15237,7 @@
       </p:sp>
       <p:sp>
         <p:nvSpPr>
-          <p:cNvPr id="20" name="Text 18"/>
+          <p:cNvPr id="24" name="Text 22"/>
           <p:cNvSpPr/>
           <p:nvPr/>
         </p:nvSpPr>
@@ -14928,6 +15647,130 @@
                 <a:ea typeface="Arial" pitchFamily="34" charset="-122"/>
                 <a:cs typeface="Arial" pitchFamily="34" charset="-120"/>
               </a:rPr>
+              <a:t>防音対策の強化</a:t>
+            </a:r>
+            <a:endParaRPr lang="en-US" sz="1000" dirty="0"/>
+          </a:p>
+        </p:txBody>
+      </p:sp>
+      <p:sp>
+        <p:nvSpPr>
+          <p:cNvPr id="11" name="Text 9"/>
+          <p:cNvSpPr/>
+          <p:nvPr/>
+        </p:nvSpPr>
+        <p:spPr>
+          <a:xfrm>
+            <a:off x="640080" y="2761488"/>
+            <a:ext cx="3474720" cy="694944"/>
+          </a:xfrm>
+          <a:prstGeom prst="rect">
+            <a:avLst/>
+          </a:prstGeom>
+          <a:noFill/>
+          <a:ln/>
+        </p:spPr>
+        <p:txBody>
+          <a:bodyPr wrap="square" lIns="0" tIns="0" rIns="0" bIns="0" rtlCol="0" anchor="ctr"/>
+          <a:lstStyle/>
+          <a:p>
+            <a:pPr marL="342900" indent="-342900">
+              <a:spcAft>
+                <a:spcPts val="200"/>
+              </a:spcAft>
+              <a:buSzPct val="100000"/>
+              <a:buChar char="•"/>
+            </a:pPr>
+            <a:r>
+              <a:rPr lang="en-US" sz="900" dirty="0">
+                <a:solidFill>
+                  <a:srgbClr val="64748B"/>
+                </a:solidFill>
+                <a:latin typeface="Arial" pitchFamily="34" charset="0"/>
+                <a:ea typeface="Arial" pitchFamily="34" charset="-122"/>
+                <a:cs typeface="Arial" pitchFamily="34" charset="-120"/>
+              </a:rPr>
+              <a:t>窓際への防音カーテン導入（外部騒音対策）</a:t>
+            </a:r>
+            <a:endParaRPr lang="en-US" sz="900" dirty="0"/>
+          </a:p>
+          <a:p>
+            <a:pPr marL="342900" indent="-342900">
+              <a:spcAft>
+                <a:spcPts val="200"/>
+              </a:spcAft>
+              <a:buSzPct val="100000"/>
+              <a:buChar char="•"/>
+            </a:pPr>
+            <a:r>
+              <a:rPr lang="en-US" sz="900" dirty="0">
+                <a:solidFill>
+                  <a:srgbClr val="64748B"/>
+                </a:solidFill>
+                <a:latin typeface="Arial" pitchFamily="34" charset="0"/>
+                <a:ea typeface="Arial" pitchFamily="34" charset="-122"/>
+                <a:cs typeface="Arial" pitchFamily="34" charset="-120"/>
+              </a:rPr>
+              <a:t>ドア下部への隙間テープ設置（廊下・隣室からの音漏れ軽減）</a:t>
+            </a:r>
+            <a:endParaRPr lang="en-US" sz="900" dirty="0"/>
+          </a:p>
+          <a:p>
+            <a:pPr marL="342900" indent="-342900">
+              <a:spcAft>
+                <a:spcPts val="200"/>
+              </a:spcAft>
+              <a:buSzPct val="100000"/>
+              <a:buChar char="•"/>
+            </a:pPr>
+            <a:r>
+              <a:rPr lang="en-US" sz="900" dirty="0">
+                <a:solidFill>
+                  <a:srgbClr val="64748B"/>
+                </a:solidFill>
+                <a:latin typeface="Arial" pitchFamily="34" charset="0"/>
+                <a:ea typeface="Arial" pitchFamily="34" charset="-122"/>
+                <a:cs typeface="Arial" pitchFamily="34" charset="-120"/>
+              </a:rPr>
+              <a:t>騒音の少ない客室への優先案内の仕組み化</a:t>
+            </a:r>
+            <a:endParaRPr lang="en-US" sz="900" dirty="0"/>
+          </a:p>
+        </p:txBody>
+      </p:sp>
+      <p:sp>
+        <p:nvSpPr>
+          <p:cNvPr id="12" name="Text 10"/>
+          <p:cNvSpPr/>
+          <p:nvPr/>
+        </p:nvSpPr>
+        <p:spPr>
+          <a:xfrm>
+            <a:off x="640080" y="3547872"/>
+            <a:ext cx="3474720" cy="274320"/>
+          </a:xfrm>
+          <a:prstGeom prst="rect">
+            <a:avLst/>
+          </a:prstGeom>
+          <a:noFill/>
+          <a:ln/>
+        </p:spPr>
+        <p:txBody>
+          <a:bodyPr wrap="square" lIns="0" tIns="0" rIns="0" bIns="0" rtlCol="0" anchor="ctr"/>
+          <a:lstStyle/>
+          <a:p>
+            <a:pPr indent="0" marL="0">
+              <a:buNone/>
+            </a:pPr>
+            <a:r>
+              <a:rPr lang="en-US" sz="1000" b="1" dirty="0">
+                <a:solidFill>
+                  <a:srgbClr val="1A2744"/>
+                </a:solidFill>
+                <a:latin typeface="Arial" pitchFamily="34" charset="0"/>
+                <a:ea typeface="Arial" pitchFamily="34" charset="-122"/>
+                <a:cs typeface="Arial" pitchFamily="34" charset="-120"/>
+              </a:rPr>
               <a:t>口コミ返信体制の構築</a:t>
             </a:r>
             <a:endParaRPr lang="en-US" sz="1000" dirty="0"/>
@@ -14936,13 +15779,13 @@
       </p:sp>
       <p:sp>
         <p:nvSpPr>
-          <p:cNvPr id="11" name="Text 9"/>
-          <p:cNvSpPr/>
-          <p:nvPr/>
-        </p:nvSpPr>
-        <p:spPr>
-          <a:xfrm>
-            <a:off x="640080" y="2761488"/>
+          <p:cNvPr id="13" name="Text 11"/>
+          <p:cNvSpPr/>
+          <p:nvPr/>
+        </p:nvSpPr>
+        <p:spPr>
+          <a:xfrm>
+            <a:off x="640080" y="3803904"/>
             <a:ext cx="3474720" cy="493776"/>
           </a:xfrm>
           <a:prstGeom prst="rect">
@@ -15000,7 +15843,7 @@
       </p:sp>
       <p:sp>
         <p:nvSpPr>
-          <p:cNvPr id="12" name="Shape 10"/>
+          <p:cNvPr id="14" name="Shape 12"/>
           <p:cNvSpPr/>
           <p:nvPr/>
         </p:nvSpPr>
@@ -15027,7 +15870,7 @@
       </p:sp>
       <p:sp>
         <p:nvSpPr>
-          <p:cNvPr id="13" name="Shape 11"/>
+          <p:cNvPr id="15" name="Shape 13"/>
           <p:cNvSpPr/>
           <p:nvPr/>
         </p:nvSpPr>
@@ -15047,7 +15890,7 @@
       </p:sp>
       <p:sp>
         <p:nvSpPr>
-          <p:cNvPr id="14" name="Text 12"/>
+          <p:cNvPr id="16" name="Text 14"/>
           <p:cNvSpPr/>
           <p:nvPr/>
         </p:nvSpPr>
@@ -15086,7 +15929,7 @@
       </p:sp>
       <p:sp>
         <p:nvSpPr>
-          <p:cNvPr id="15" name="Text 13"/>
+          <p:cNvPr id="17" name="Text 15"/>
           <p:cNvSpPr/>
           <p:nvPr/>
         </p:nvSpPr>
@@ -15125,7 +15968,7 @@
       </p:sp>
       <p:sp>
         <p:nvSpPr>
-          <p:cNvPr id="16" name="Text 14"/>
+          <p:cNvPr id="18" name="Text 16"/>
           <p:cNvSpPr/>
           <p:nvPr/>
         </p:nvSpPr>
@@ -15210,7 +16053,7 @@
       </p:sp>
       <p:sp>
         <p:nvSpPr>
-          <p:cNvPr id="17" name="Text 15"/>
+          <p:cNvPr id="19" name="Text 17"/>
           <p:cNvSpPr/>
           <p:nvPr/>
         </p:nvSpPr>
@@ -15249,7 +16092,7 @@
       </p:sp>
       <p:sp>
         <p:nvSpPr>
-          <p:cNvPr id="18" name="Text 16"/>
+          <p:cNvPr id="20" name="Text 18"/>
           <p:cNvSpPr/>
           <p:nvPr/>
         </p:nvSpPr>
@@ -15313,7 +16156,7 @@
       </p:sp>
       <p:sp>
         <p:nvSpPr>
-          <p:cNvPr id="19" name="Text 17"/>
+          <p:cNvPr id="21" name="Text 19"/>
           <p:cNvSpPr/>
           <p:nvPr/>
         </p:nvSpPr>
@@ -15344,7 +16187,7 @@
                 <a:ea typeface="Arial" pitchFamily="34" charset="-122"/>
                 <a:cs typeface="Arial" pitchFamily="34" charset="-120"/>
               </a:rPr>
-              <a:t>客室レイアウトの見直し</a:t>
+              <a:t>防音工事</a:t>
             </a:r>
             <a:endParaRPr lang="en-US" sz="1000" dirty="0"/>
           </a:p>
@@ -15352,14 +16195,14 @@
       </p:sp>
       <p:sp>
         <p:nvSpPr>
-          <p:cNvPr id="20" name="Text 18"/>
+          <p:cNvPr id="22" name="Text 20"/>
           <p:cNvSpPr/>
           <p:nvPr/>
         </p:nvSpPr>
         <p:spPr>
           <a:xfrm>
             <a:off x="4892040" y="3602736"/>
-            <a:ext cx="3474720" cy="694944"/>
+            <a:ext cx="3474720" cy="493776"/>
           </a:xfrm>
           <a:prstGeom prst="rect">
             <a:avLst/>
@@ -15387,7 +16230,7 @@
                 <a:ea typeface="Arial" pitchFamily="34" charset="-122"/>
                 <a:cs typeface="Arial" pitchFamily="34" charset="-120"/>
               </a:rPr>
-              <a:t>家具配置の最適化による体感スペースの拡大</a:t>
+              <a:t>騒音源側客室の窓を二重サッシに交換</a:t>
             </a:r>
             <a:endParaRPr lang="en-US" sz="900" dirty="0"/>
           </a:p>
@@ -15408,36 +16251,15 @@
                 <a:ea typeface="Arial" pitchFamily="34" charset="-122"/>
                 <a:cs typeface="Arial" pitchFamily="34" charset="-120"/>
               </a:rPr>
-              <a:t>コンパクト家具への入替検討</a:t>
+              <a:t>隣室との壁面に遮音材を追加する改修工事の検討</a:t>
             </a:r>
             <a:endParaRPr lang="en-US" sz="900" dirty="0"/>
           </a:p>
-          <a:p>
-            <a:pPr marL="342900" indent="-342900">
-              <a:spcAft>
-                <a:spcPts val="200"/>
-              </a:spcAft>
-              <a:buSzPct val="100000"/>
-              <a:buChar char="•"/>
-            </a:pPr>
-            <a:r>
-              <a:rPr lang="en-US" sz="900" dirty="0">
-                <a:solidFill>
-                  <a:srgbClr val="64748B"/>
-                </a:solidFill>
-                <a:latin typeface="Arial" pitchFamily="34" charset="0"/>
-                <a:ea typeface="Arial" pitchFamily="34" charset="-122"/>
-                <a:cs typeface="Arial" pitchFamily="34" charset="-120"/>
-              </a:rPr>
-              <a:t>収納スペースの効率化</a:t>
-            </a:r>
-            <a:endParaRPr lang="en-US" sz="900" dirty="0"/>
-          </a:p>
         </p:txBody>
       </p:sp>
       <p:sp>
         <p:nvSpPr>
-          <p:cNvPr id="21" name="Shape 19"/>
+          <p:cNvPr id="23" name="Shape 21"/>
           <p:cNvSpPr/>
           <p:nvPr/>
         </p:nvSpPr>
@@ -15457,7 +16279,7 @@
       </p:sp>
       <p:sp>
         <p:nvSpPr>
-          <p:cNvPr id="22" name="Text 20"/>
+          <p:cNvPr id="24" name="Text 22"/>
           <p:cNvSpPr/>
           <p:nvPr/>
         </p:nvSpPr>
@@ -15496,7 +16318,7 @@
       </p:sp>
       <p:sp>
         <p:nvSpPr>
-          <p:cNvPr id="23" name="Text 21"/>
+          <p:cNvPr id="25" name="Text 23"/>
           <p:cNvSpPr/>
           <p:nvPr/>
         </p:nvSpPr>

--- a/納品レポート/ホテル別レポート/apa_kamata_口コミ分析レポート.pptx
+++ b/納品レポート/ホテル別レポート/apa_kamata_口コミ分析レポート.pptx
@@ -217,7 +217,7 @@
                   <c:v>7</c:v>
                 </c:pt>
                 <c:pt idx="4">
-                  <c:v>6.82</c:v>
+                  <c:v>6.92</c:v>
                 </c:pt>
               </c:numCache>
             </c:numRef>
@@ -560,7 +560,7 @@
               <c:numCache>
                 <c:ptCount val="3"/>
                 <c:pt idx="0">
-                  <c:v>29</c:v>
+                  <c:v>30</c:v>
                 </c:pt>
                 <c:pt idx="1">
                   <c:v>13</c:v>
@@ -809,7 +809,7 @@
                   <c:v>2</c:v>
                 </c:pt>
                 <c:pt idx="2">
-                  <c:v>21</c:v>
+                  <c:v>22</c:v>
                 </c:pt>
                 <c:pt idx="3">
                   <c:v>4</c:v>
@@ -2775,7 +2775,7 @@
                 <a:ea typeface="Arial" pitchFamily="34" charset="-122"/>
                 <a:cs typeface="Arial" pitchFamily="34" charset="-120"/>
               </a:rPr>
-              <a:t>レビュー総数：47件（5サイト）</a:t>
+              <a:t>レビュー総数：48件（5サイト）</a:t>
             </a:r>
             <a:endParaRPr lang="en-US" sz="1000" dirty="0"/>
           </a:p>
@@ -2795,7 +2795,7 @@
                 <a:ea typeface="Arial" pitchFamily="34" charset="-122"/>
                 <a:cs typeface="Arial" pitchFamily="34" charset="-120"/>
               </a:rPr>
-              <a:t>作成日：2026年3月18日</a:t>
+              <a:t>作成日：2026年3月19日</a:t>
             </a:r>
             <a:endParaRPr lang="en-US" sz="1000" dirty="0"/>
           </a:p>
@@ -3341,7 +3341,7 @@
                           <a:ea typeface="Arial" pitchFamily="34" charset="-122"/>
                           <a:cs typeface="Arial" pitchFamily="34" charset="-120"/>
                         </a:rPr>
-                        <a:t>7.34点</a:t>
+                        <a:t>7.35点</a:t>
                       </a:r>
                       <a:endParaRPr lang="en-US" sz="1000" dirty="0">
                         <a:latin typeface="Arial" charset="0"/>
@@ -3615,7 +3615,7 @@
                           <a:ea typeface="Arial" pitchFamily="34" charset="-122"/>
                           <a:cs typeface="Arial" pitchFamily="34" charset="-120"/>
                         </a:rPr>
-                        <a:t>61.7%</a:t>
+                        <a:t>62.5%</a:t>
                       </a:r>
                       <a:endParaRPr lang="en-US" sz="1000" dirty="0">
                         <a:latin typeface="Arial" charset="0"/>
@@ -3683,7 +3683,7 @@
                           <a:ea typeface="Arial" pitchFamily="34" charset="-122"/>
                           <a:cs typeface="Arial" pitchFamily="34" charset="-120"/>
                         </a:rPr>
-                        <a:t>72%以上</a:t>
+                        <a:t>73%以上</a:t>
                       </a:r>
                       <a:endParaRPr lang="en-US" sz="1000" dirty="0">
                         <a:latin typeface="Arial" charset="0"/>
@@ -3889,7 +3889,7 @@
                           <a:ea typeface="Arial" pitchFamily="34" charset="-122"/>
                           <a:cs typeface="Arial" pitchFamily="34" charset="-120"/>
                         </a:rPr>
-                        <a:t>10.6%</a:t>
+                        <a:t>10.4%</a:t>
                       </a:r>
                       <a:endParaRPr lang="en-US" sz="1000" dirty="0">
                         <a:latin typeface="Arial" charset="0"/>
@@ -3957,7 +3957,7 @@
                           <a:ea typeface="Arial" pitchFamily="34" charset="-122"/>
                           <a:cs typeface="Arial" pitchFamily="34" charset="-120"/>
                         </a:rPr>
-                        <a:t>6%以下</a:t>
+                        <a:t>5%以下</a:t>
                       </a:r>
                       <a:endParaRPr lang="en-US" sz="1000" dirty="0">
                         <a:latin typeface="Arial" charset="0"/>
@@ -4095,280 +4095,6 @@
                           <a:ea typeface="Arial" pitchFamily="34" charset="-122"/>
                           <a:cs typeface="Arial" pitchFamily="34" charset="-120"/>
                         </a:rPr>
-                        <a:t>Agoda平均評価</a:t>
-                      </a:r>
-                      <a:endParaRPr lang="en-US" sz="1000" dirty="0">
-                        <a:latin typeface="Arial" charset="0"/>
-                        <a:ea typeface="Arial" charset="0"/>
-                        <a:cs typeface="Arial" charset="0"/>
-                      </a:endParaRPr>
-                    </a:p>
-                  </a:txBody>
-                  <a:tcPr marL="91440" marR="91440" marT="45720" marB="45720">
-                    <a:lnL w="6350" cap="flat" cmpd="sng" algn="ctr">
-                      <a:solidFill>
-                        <a:srgbClr val="CBD5E1"/>
-                      </a:solidFill>
-                      <a:prstDash val="solid"/>
-                      <a:round/>
-                      <a:headEnd type="none" w="med" len="med"/>
-                      <a:tailEnd type="none" w="med" len="med"/>
-                    </a:lnL>
-                    <a:lnR w="6350" cap="flat" cmpd="sng" algn="ctr">
-                      <a:solidFill>
-                        <a:srgbClr val="CBD5E1"/>
-                      </a:solidFill>
-                      <a:prstDash val="solid"/>
-                      <a:round/>
-                      <a:headEnd type="none" w="med" len="med"/>
-                      <a:tailEnd type="none" w="med" len="med"/>
-                    </a:lnR>
-                    <a:lnT w="6350" cap="flat" cmpd="sng" algn="ctr">
-                      <a:solidFill>
-                        <a:srgbClr val="CBD5E1"/>
-                      </a:solidFill>
-                      <a:prstDash val="solid"/>
-                      <a:round/>
-                      <a:headEnd type="none" w="med" len="med"/>
-                      <a:tailEnd type="none" w="med" len="med"/>
-                    </a:lnT>
-                    <a:lnB w="6350" cap="flat" cmpd="sng" algn="ctr">
-                      <a:solidFill>
-                        <a:srgbClr val="CBD5E1"/>
-                      </a:solidFill>
-                      <a:prstDash val="solid"/>
-                      <a:round/>
-                      <a:headEnd type="none" w="med" len="med"/>
-                      <a:tailEnd type="none" w="med" len="med"/>
-                    </a:lnB>
-                    <a:solidFill>
-                      <a:srgbClr val="FFFFFF"/>
-                    </a:solidFill>
-                  </a:tcPr>
-                </a:tc>
-                <a:tc>
-                  <a:txBody>
-                    <a:bodyPr/>
-                    <a:lstStyle/>
-                    <a:p>
-                      <a:pPr algn="ctr" indent="0" marL="0">
-                        <a:buNone/>
-                      </a:pPr>
-                      <a:r>
-                        <a:rPr lang="en-US" sz="1000" dirty="0">
-                          <a:solidFill>
-                            <a:srgbClr val="64748B"/>
-                          </a:solidFill>
-                          <a:latin typeface="Arial" pitchFamily="34" charset="0"/>
-                          <a:ea typeface="Arial" pitchFamily="34" charset="-122"/>
-                          <a:cs typeface="Arial" pitchFamily="34" charset="-120"/>
-                        </a:rPr>
-                        <a:t>6.8点</a:t>
-                      </a:r>
-                      <a:endParaRPr lang="en-US" sz="1000" dirty="0">
-                        <a:latin typeface="Arial" charset="0"/>
-                        <a:ea typeface="Arial" charset="0"/>
-                        <a:cs typeface="Arial" charset="0"/>
-                      </a:endParaRPr>
-                    </a:p>
-                  </a:txBody>
-                  <a:tcPr marL="91440" marR="91440" marT="45720" marB="45720">
-                    <a:lnL w="6350" cap="flat" cmpd="sng" algn="ctr">
-                      <a:solidFill>
-                        <a:srgbClr val="CBD5E1"/>
-                      </a:solidFill>
-                      <a:prstDash val="solid"/>
-                      <a:round/>
-                      <a:headEnd type="none" w="med" len="med"/>
-                      <a:tailEnd type="none" w="med" len="med"/>
-                    </a:lnL>
-                    <a:lnR w="6350" cap="flat" cmpd="sng" algn="ctr">
-                      <a:solidFill>
-                        <a:srgbClr val="CBD5E1"/>
-                      </a:solidFill>
-                      <a:prstDash val="solid"/>
-                      <a:round/>
-                      <a:headEnd type="none" w="med" len="med"/>
-                      <a:tailEnd type="none" w="med" len="med"/>
-                    </a:lnR>
-                    <a:lnT w="6350" cap="flat" cmpd="sng" algn="ctr">
-                      <a:solidFill>
-                        <a:srgbClr val="CBD5E1"/>
-                      </a:solidFill>
-                      <a:prstDash val="solid"/>
-                      <a:round/>
-                      <a:headEnd type="none" w="med" len="med"/>
-                      <a:tailEnd type="none" w="med" len="med"/>
-                    </a:lnT>
-                    <a:lnB w="6350" cap="flat" cmpd="sng" algn="ctr">
-                      <a:solidFill>
-                        <a:srgbClr val="CBD5E1"/>
-                      </a:solidFill>
-                      <a:prstDash val="solid"/>
-                      <a:round/>
-                      <a:headEnd type="none" w="med" len="med"/>
-                      <a:tailEnd type="none" w="med" len="med"/>
-                    </a:lnB>
-                    <a:solidFill>
-                      <a:srgbClr val="FFFFFF"/>
-                    </a:solidFill>
-                  </a:tcPr>
-                </a:tc>
-                <a:tc>
-                  <a:txBody>
-                    <a:bodyPr/>
-                    <a:lstStyle/>
-                    <a:p>
-                      <a:pPr algn="ctr" indent="0" marL="0">
-                        <a:buNone/>
-                      </a:pPr>
-                      <a:r>
-                        <a:rPr lang="en-US" sz="1000" b="1" dirty="0">
-                          <a:solidFill>
-                            <a:srgbClr val="16A34A"/>
-                          </a:solidFill>
-                          <a:latin typeface="Arial" pitchFamily="34" charset="0"/>
-                          <a:ea typeface="Arial" pitchFamily="34" charset="-122"/>
-                          <a:cs typeface="Arial" pitchFamily="34" charset="-120"/>
-                        </a:rPr>
-                        <a:t>7.8点以上</a:t>
-                      </a:r>
-                      <a:endParaRPr lang="en-US" sz="1000" dirty="0">
-                        <a:latin typeface="Arial" charset="0"/>
-                        <a:ea typeface="Arial" charset="0"/>
-                        <a:cs typeface="Arial" charset="0"/>
-                      </a:endParaRPr>
-                    </a:p>
-                  </a:txBody>
-                  <a:tcPr marL="91440" marR="91440" marT="45720" marB="45720">
-                    <a:lnL w="6350" cap="flat" cmpd="sng" algn="ctr">
-                      <a:solidFill>
-                        <a:srgbClr val="CBD5E1"/>
-                      </a:solidFill>
-                      <a:prstDash val="solid"/>
-                      <a:round/>
-                      <a:headEnd type="none" w="med" len="med"/>
-                      <a:tailEnd type="none" w="med" len="med"/>
-                    </a:lnL>
-                    <a:lnR w="6350" cap="flat" cmpd="sng" algn="ctr">
-                      <a:solidFill>
-                        <a:srgbClr val="CBD5E1"/>
-                      </a:solidFill>
-                      <a:prstDash val="solid"/>
-                      <a:round/>
-                      <a:headEnd type="none" w="med" len="med"/>
-                      <a:tailEnd type="none" w="med" len="med"/>
-                    </a:lnR>
-                    <a:lnT w="6350" cap="flat" cmpd="sng" algn="ctr">
-                      <a:solidFill>
-                        <a:srgbClr val="CBD5E1"/>
-                      </a:solidFill>
-                      <a:prstDash val="solid"/>
-                      <a:round/>
-                      <a:headEnd type="none" w="med" len="med"/>
-                      <a:tailEnd type="none" w="med" len="med"/>
-                    </a:lnT>
-                    <a:lnB w="6350" cap="flat" cmpd="sng" algn="ctr">
-                      <a:solidFill>
-                        <a:srgbClr val="CBD5E1"/>
-                      </a:solidFill>
-                      <a:prstDash val="solid"/>
-                      <a:round/>
-                      <a:headEnd type="none" w="med" len="med"/>
-                      <a:tailEnd type="none" w="med" len="med"/>
-                    </a:lnB>
-                    <a:solidFill>
-                      <a:srgbClr val="FFFFFF"/>
-                    </a:solidFill>
-                  </a:tcPr>
-                </a:tc>
-                <a:tc>
-                  <a:txBody>
-                    <a:bodyPr/>
-                    <a:lstStyle/>
-                    <a:p>
-                      <a:pPr algn="ctr" indent="0" marL="0">
-                        <a:buNone/>
-                      </a:pPr>
-                      <a:r>
-                        <a:rPr lang="en-US" sz="1000" dirty="0">
-                          <a:solidFill>
-                            <a:srgbClr val="64748B"/>
-                          </a:solidFill>
-                          <a:latin typeface="Arial" pitchFamily="34" charset="0"/>
-                          <a:ea typeface="Arial" pitchFamily="34" charset="-122"/>
-                          <a:cs typeface="Arial" pitchFamily="34" charset="-120"/>
-                        </a:rPr>
-                        <a:t>2026年9月</a:t>
-                      </a:r>
-                      <a:endParaRPr lang="en-US" sz="1000" dirty="0">
-                        <a:latin typeface="Arial" charset="0"/>
-                        <a:ea typeface="Arial" charset="0"/>
-                        <a:cs typeface="Arial" charset="0"/>
-                      </a:endParaRPr>
-                    </a:p>
-                  </a:txBody>
-                  <a:tcPr marL="91440" marR="91440" marT="45720" marB="45720">
-                    <a:lnL w="6350" cap="flat" cmpd="sng" algn="ctr">
-                      <a:solidFill>
-                        <a:srgbClr val="CBD5E1"/>
-                      </a:solidFill>
-                      <a:prstDash val="solid"/>
-                      <a:round/>
-                      <a:headEnd type="none" w="med" len="med"/>
-                      <a:tailEnd type="none" w="med" len="med"/>
-                    </a:lnL>
-                    <a:lnR w="6350" cap="flat" cmpd="sng" algn="ctr">
-                      <a:solidFill>
-                        <a:srgbClr val="CBD5E1"/>
-                      </a:solidFill>
-                      <a:prstDash val="solid"/>
-                      <a:round/>
-                      <a:headEnd type="none" w="med" len="med"/>
-                      <a:tailEnd type="none" w="med" len="med"/>
-                    </a:lnR>
-                    <a:lnT w="6350" cap="flat" cmpd="sng" algn="ctr">
-                      <a:solidFill>
-                        <a:srgbClr val="CBD5E1"/>
-                      </a:solidFill>
-                      <a:prstDash val="solid"/>
-                      <a:round/>
-                      <a:headEnd type="none" w="med" len="med"/>
-                      <a:tailEnd type="none" w="med" len="med"/>
-                    </a:lnT>
-                    <a:lnB w="6350" cap="flat" cmpd="sng" algn="ctr">
-                      <a:solidFill>
-                        <a:srgbClr val="CBD5E1"/>
-                      </a:solidFill>
-                      <a:prstDash val="solid"/>
-                      <a:round/>
-                      <a:headEnd type="none" w="med" len="med"/>
-                      <a:tailEnd type="none" w="med" len="med"/>
-                    </a:lnB>
-                    <a:solidFill>
-                      <a:srgbClr val="FFFFFF"/>
-                    </a:solidFill>
-                  </a:tcPr>
-                </a:tc>
-              </a:tr>
-              <a:tr h="320040">
-                <a:tc>
-                  <a:txBody>
-                    <a:bodyPr/>
-                    <a:lstStyle/>
-                    <a:p>
-                      <a:pPr indent="0" marL="0">
-                        <a:buNone/>
-                      </a:pPr>
-                      <a:r>
-                        <a:rPr lang="en-US" sz="1000" b="1" dirty="0">
-                          <a:solidFill>
-                            <a:srgbClr val="334155"/>
-                          </a:solidFill>
-                          <a:latin typeface="Arial" pitchFamily="34" charset="0"/>
-                          <a:ea typeface="Arial" pitchFamily="34" charset="-122"/>
-                          <a:cs typeface="Arial" pitchFamily="34" charset="-120"/>
-                        </a:rPr>
                         <a:t>口コミ返信率</a:t>
                       </a:r>
                       <a:endParaRPr lang="en-US" sz="1000" dirty="0">
@@ -4416,7 +4142,7 @@
                       <a:tailEnd type="none" w="med" len="med"/>
                     </a:lnB>
                     <a:solidFill>
-                      <a:srgbClr val="E8EFF8"/>
+                      <a:srgbClr val="FFFFFF"/>
                     </a:solidFill>
                   </a:tcPr>
                 </a:tc>
@@ -4484,7 +4210,7 @@
                       <a:tailEnd type="none" w="med" len="med"/>
                     </a:lnB>
                     <a:solidFill>
-                      <a:srgbClr val="E8EFF8"/>
+                      <a:srgbClr val="FFFFFF"/>
                     </a:solidFill>
                   </a:tcPr>
                 </a:tc>
@@ -4552,7 +4278,7 @@
                       <a:tailEnd type="none" w="med" len="med"/>
                     </a:lnB>
                     <a:solidFill>
-                      <a:srgbClr val="E8EFF8"/>
+                      <a:srgbClr val="FFFFFF"/>
                     </a:solidFill>
                   </a:tcPr>
                 </a:tc>
@@ -4620,7 +4346,7 @@
                       <a:tailEnd type="none" w="med" len="med"/>
                     </a:lnB>
                     <a:solidFill>
-                      <a:srgbClr val="E8EFF8"/>
+                      <a:srgbClr val="FFFFFF"/>
                     </a:solidFill>
                   </a:tcPr>
                 </a:tc>
@@ -4690,7 +4416,7 @@
                       <a:tailEnd type="none" w="med" len="med"/>
                     </a:lnB>
                     <a:solidFill>
-                      <a:srgbClr val="FFFFFF"/>
+                      <a:srgbClr val="E8EFF8"/>
                     </a:solidFill>
                   </a:tcPr>
                 </a:tc>
@@ -4758,7 +4484,7 @@
                       <a:tailEnd type="none" w="med" len="med"/>
                     </a:lnB>
                     <a:solidFill>
-                      <a:srgbClr val="FFFFFF"/>
+                      <a:srgbClr val="E8EFF8"/>
                     </a:solidFill>
                   </a:tcPr>
                 </a:tc>
@@ -4826,7 +4552,7 @@
                       <a:tailEnd type="none" w="med" len="med"/>
                     </a:lnB>
                     <a:solidFill>
-                      <a:srgbClr val="FFFFFF"/>
+                      <a:srgbClr val="E8EFF8"/>
                     </a:solidFill>
                   </a:tcPr>
                 </a:tc>
@@ -4894,7 +4620,7 @@
                       <a:tailEnd type="none" w="med" len="med"/>
                     </a:lnB>
                     <a:solidFill>
-                      <a:srgbClr val="FFFFFF"/>
+                      <a:srgbClr val="E8EFF8"/>
                     </a:solidFill>
                   </a:tcPr>
                 </a:tc>
@@ -4911,7 +4637,7 @@
         </p:nvSpPr>
         <p:spPr>
           <a:xfrm>
-            <a:off x="457200" y="3429000"/>
+            <a:off x="457200" y="3108960"/>
             <a:ext cx="8229600" cy="640080"/>
           </a:xfrm>
           <a:prstGeom prst="rect">
@@ -4938,7 +4664,7 @@
         </p:nvSpPr>
         <p:spPr>
           <a:xfrm>
-            <a:off x="457200" y="3429000"/>
+            <a:off x="457200" y="3108960"/>
             <a:ext cx="54864" cy="640080"/>
           </a:xfrm>
           <a:prstGeom prst="rect">
@@ -4958,7 +4684,7 @@
         </p:nvSpPr>
         <p:spPr>
           <a:xfrm>
-            <a:off x="640080" y="3429000"/>
+            <a:off x="640080" y="3108960"/>
             <a:ext cx="7863840" cy="640080"/>
           </a:xfrm>
           <a:prstGeom prst="rect">
@@ -5350,7 +5076,7 @@
                 <a:ea typeface="Arial" pitchFamily="34" charset="-122"/>
                 <a:cs typeface="Arial" pitchFamily="34" charset="-120"/>
               </a:rPr>
-              <a:t>7.34</a:t>
+              <a:t>7.35</a:t>
             </a:r>
             <a:endParaRPr lang="en-US" sz="3200" dirty="0"/>
           </a:p>
@@ -5475,7 +5201,7 @@
                 <a:ea typeface="Arial" pitchFamily="34" charset="-122"/>
                 <a:cs typeface="Arial" pitchFamily="34" charset="-120"/>
               </a:rPr>
-              <a:t>61.7%</a:t>
+              <a:t>62.5%</a:t>
             </a:r>
             <a:endParaRPr lang="en-US" sz="3200" dirty="0"/>
           </a:p>
@@ -5600,7 +5326,7 @@
                 <a:ea typeface="Arial" pitchFamily="34" charset="-122"/>
                 <a:cs typeface="Arial" pitchFamily="34" charset="-120"/>
               </a:rPr>
-              <a:t>10.6%</a:t>
+              <a:t>10.4%</a:t>
             </a:r>
             <a:endParaRPr lang="en-US" sz="3200" dirty="0"/>
           </a:p>
@@ -5725,7 +5451,7 @@
                 <a:ea typeface="Arial" pitchFamily="34" charset="-122"/>
                 <a:cs typeface="Arial" pitchFamily="34" charset="-120"/>
               </a:rPr>
-              <a:t>47件</a:t>
+              <a:t>48件</a:t>
             </a:r>
             <a:endParaRPr lang="en-US" sz="3200" dirty="0"/>
           </a:p>
@@ -6534,7 +6260,7 @@
                 <a:ea typeface="Arial" pitchFamily="34" charset="-122"/>
                 <a:cs typeface="Arial" pitchFamily="34" charset="-120"/>
               </a:rPr>
-              <a:t>7.34</a:t>
+              <a:t>7.35</a:t>
             </a:r>
             <a:endParaRPr lang="en-US" sz="3200" dirty="0"/>
           </a:p>
@@ -6659,7 +6385,7 @@
                 <a:ea typeface="Arial" pitchFamily="34" charset="-122"/>
                 <a:cs typeface="Arial" pitchFamily="34" charset="-120"/>
               </a:rPr>
-              <a:t>61.7%</a:t>
+              <a:t>62.5%</a:t>
             </a:r>
             <a:endParaRPr lang="en-US" sz="3200" dirty="0"/>
           </a:p>
@@ -6784,7 +6510,7 @@
                 <a:ea typeface="Arial" pitchFamily="34" charset="-122"/>
                 <a:cs typeface="Arial" pitchFamily="34" charset="-120"/>
               </a:rPr>
-              <a:t>10.6%</a:t>
+              <a:t>10.4%</a:t>
             </a:r>
             <a:endParaRPr lang="en-US" sz="3200" dirty="0"/>
           </a:p>
@@ -6909,7 +6635,7 @@
                 <a:ea typeface="Arial" pitchFamily="34" charset="-122"/>
                 <a:cs typeface="Arial" pitchFamily="34" charset="-120"/>
               </a:rPr>
-              <a:t>47件</a:t>
+              <a:t>48件</a:t>
             </a:r>
             <a:endParaRPr lang="en-US" sz="3200" dirty="0"/>
           </a:p>
@@ -7331,55 +7057,6 @@
                 <a:cs typeface="Arial" pitchFamily="34" charset="-120"/>
               </a:rPr>
               <a:t>Google(7.87)が最高スコア。</a:t>
-            </a:r>
-            <a:endParaRPr lang="en-US" sz="1100" dirty="0"/>
-          </a:p>
-          <a:p>
-            <a:pPr indent="0" marL="0">
-              <a:spcAft>
-                <a:spcPts val="200"/>
-              </a:spcAft>
-              <a:buNone/>
-            </a:pPr>
-            <a:endParaRPr lang="en-US" sz="1100" dirty="0"/>
-          </a:p>
-          <a:p>
-            <a:pPr indent="0" marL="0">
-              <a:spcAft>
-                <a:spcPts val="200"/>
-              </a:spcAft>
-              <a:buNone/>
-            </a:pPr>
-            <a:r>
-              <a:rPr lang="en-US" sz="1100" b="1" dirty="0">
-                <a:solidFill>
-                  <a:srgbClr val="DC2626"/>
-                </a:solidFill>
-                <a:latin typeface="Arial" pitchFamily="34" charset="0"/>
-                <a:ea typeface="Arial" pitchFamily="34" charset="-122"/>
-                <a:cs typeface="Arial" pitchFamily="34" charset="-120"/>
-              </a:rPr>
-              <a:t>改善対象サイト</a:t>
-            </a:r>
-            <a:endParaRPr lang="en-US" sz="1100" dirty="0"/>
-          </a:p>
-          <a:p>
-            <a:pPr indent="0" marL="0">
-              <a:spcAft>
-                <a:spcPts val="200"/>
-              </a:spcAft>
-              <a:buNone/>
-            </a:pPr>
-            <a:r>
-              <a:rPr lang="en-US" sz="900" dirty="0">
-                <a:solidFill>
-                  <a:srgbClr val="64748B"/>
-                </a:solidFill>
-                <a:latin typeface="Arial" pitchFamily="34" charset="0"/>
-                <a:ea typeface="Arial" pitchFamily="34" charset="-122"/>
-                <a:cs typeface="Arial" pitchFamily="34" charset="-120"/>
-              </a:rPr>
-              <a:t>Agoda(6.8)が相対的に低い。口コミ返信の強化が急務</a:t>
             </a:r>
             <a:endParaRPr lang="en-US" sz="1100" dirty="0"/>
           </a:p>
@@ -9256,7 +8933,7 @@
                           <a:ea typeface="Arial" pitchFamily="34" charset="-122"/>
                           <a:cs typeface="Arial" pitchFamily="34" charset="-120"/>
                         </a:rPr>
-                        <a:t>11</a:t>
+                        <a:t>12</a:t>
                       </a:r>
                       <a:endParaRPr lang="en-US" sz="900" dirty="0">
                         <a:latin typeface="Arial" charset="0"/>
@@ -9324,7 +9001,7 @@
                           <a:ea typeface="Arial" pitchFamily="34" charset="-122"/>
                           <a:cs typeface="Arial" pitchFamily="34" charset="-120"/>
                         </a:rPr>
-                        <a:t>6.82</a:t>
+                        <a:t>6.92</a:t>
                       </a:r>
                       <a:endParaRPr lang="en-US" sz="900" dirty="0">
                         <a:latin typeface="Arial" charset="0"/>
@@ -9460,7 +9137,7 @@
                           <a:ea typeface="Arial" pitchFamily="34" charset="-122"/>
                           <a:cs typeface="Arial" pitchFamily="34" charset="-120"/>
                         </a:rPr>
-                        <a:t>6.82</a:t>
+                        <a:t>6.92</a:t>
                       </a:r>
                       <a:endParaRPr lang="en-US" sz="900" dirty="0">
                         <a:latin typeface="Arial" charset="0"/>
@@ -9868,7 +9545,7 @@
                 <a:ea typeface="Arial" pitchFamily="34" charset="-122"/>
                 <a:cs typeface="Arial" pitchFamily="34" charset="-120"/>
               </a:rPr>
-              <a:t>29件（61.7%）</a:t>
+              <a:t>30件（62.5%）</a:t>
             </a:r>
             <a:endParaRPr lang="en-US" sz="1100" dirty="0"/>
           </a:p>
@@ -9966,7 +9643,7 @@
                 <a:ea typeface="Arial" pitchFamily="34" charset="-122"/>
                 <a:cs typeface="Arial" pitchFamily="34" charset="-120"/>
               </a:rPr>
-              <a:t>13件（27.7%）</a:t>
+              <a:t>13件（27.1%）</a:t>
             </a:r>
             <a:endParaRPr lang="en-US" sz="1100" dirty="0"/>
           </a:p>
@@ -10064,7 +9741,7 @@
                 <a:ea typeface="Arial" pitchFamily="34" charset="-122"/>
                 <a:cs typeface="Arial" pitchFamily="34" charset="-120"/>
               </a:rPr>
-              <a:t>5件（10.6%）</a:t>
+              <a:t>5件（10.4%）</a:t>
             </a:r>
             <a:endParaRPr lang="en-US" sz="1100" dirty="0"/>
           </a:p>

--- a/納品レポート/ホテル別レポート/apa_kamata_口コミ分析レポート.pptx
+++ b/納品レポート/ホテル別レポート/apa_kamata_口コミ分析レポート.pptx
@@ -189,10 +189,10 @@
                     <c:v>Booking.com</c:v>
                   </c:pt>
                   <c:pt idx="3">
-                    <c:v>楽天トラベル</c:v>
+                    <c:v>Agoda</c:v>
                   </c:pt>
                   <c:pt idx="4">
-                    <c:v>Agoda</c:v>
+                    <c:v>楽天トラベル</c:v>
                   </c:pt>
                 </c:lvl>
               </c:multiLvlStrCache>
@@ -214,10 +214,10 @@
                   <c:v>7.23</c:v>
                 </c:pt>
                 <c:pt idx="3">
-                  <c:v>7</c:v>
+                  <c:v>7.08</c:v>
                 </c:pt>
                 <c:pt idx="4">
-                  <c:v>6.92</c:v>
+                  <c:v>7</c:v>
                 </c:pt>
               </c:numCache>
             </c:numRef>
@@ -560,7 +560,7 @@
               <c:numCache>
                 <c:ptCount val="3"/>
                 <c:pt idx="0">
-                  <c:v>30</c:v>
+                  <c:v>31</c:v>
                 </c:pt>
                 <c:pt idx="1">
                   <c:v>13</c:v>
@@ -806,7 +806,7 @@
                   <c:v>6</c:v>
                 </c:pt>
                 <c:pt idx="1">
-                  <c:v>2</c:v>
+                  <c:v>3</c:v>
                 </c:pt>
                 <c:pt idx="2">
                   <c:v>22</c:v>
@@ -2775,7 +2775,7 @@
                 <a:ea typeface="Arial" pitchFamily="34" charset="-122"/>
                 <a:cs typeface="Arial" pitchFamily="34" charset="-120"/>
               </a:rPr>
-              <a:t>レビュー総数：48件（5サイト）</a:t>
+              <a:t>レビュー総数：49件（5サイト）</a:t>
             </a:r>
             <a:endParaRPr lang="en-US" sz="1000" dirty="0"/>
           </a:p>
@@ -2795,7 +2795,7 @@
                 <a:ea typeface="Arial" pitchFamily="34" charset="-122"/>
                 <a:cs typeface="Arial" pitchFamily="34" charset="-120"/>
               </a:rPr>
-              <a:t>作成日：2026年3月19日</a:t>
+              <a:t>作成日：2026年3月20日</a:t>
             </a:r>
             <a:endParaRPr lang="en-US" sz="1000" dirty="0"/>
           </a:p>
@@ -3341,7 +3341,7 @@
                           <a:ea typeface="Arial" pitchFamily="34" charset="-122"/>
                           <a:cs typeface="Arial" pitchFamily="34" charset="-120"/>
                         </a:rPr>
-                        <a:t>7.35点</a:t>
+                        <a:t>7.39点</a:t>
                       </a:r>
                       <a:endParaRPr lang="en-US" sz="1000" dirty="0">
                         <a:latin typeface="Arial" charset="0"/>
@@ -3409,7 +3409,7 @@
                           <a:ea typeface="Arial" pitchFamily="34" charset="-122"/>
                           <a:cs typeface="Arial" pitchFamily="34" charset="-120"/>
                         </a:rPr>
-                        <a:t>7.8点以上</a:t>
+                        <a:t>7.9点以上</a:t>
                       </a:r>
                       <a:endParaRPr lang="en-US" sz="1000" dirty="0">
                         <a:latin typeface="Arial" charset="0"/>
@@ -3615,7 +3615,7 @@
                           <a:ea typeface="Arial" pitchFamily="34" charset="-122"/>
                           <a:cs typeface="Arial" pitchFamily="34" charset="-120"/>
                         </a:rPr>
-                        <a:t>62.5%</a:t>
+                        <a:t>63.3%</a:t>
                       </a:r>
                       <a:endParaRPr lang="en-US" sz="1000" dirty="0">
                         <a:latin typeface="Arial" charset="0"/>
@@ -3889,7 +3889,7 @@
                           <a:ea typeface="Arial" pitchFamily="34" charset="-122"/>
                           <a:cs typeface="Arial" pitchFamily="34" charset="-120"/>
                         </a:rPr>
-                        <a:t>10.4%</a:t>
+                        <a:t>10.2%</a:t>
                       </a:r>
                       <a:endParaRPr lang="en-US" sz="1000" dirty="0">
                         <a:latin typeface="Arial" charset="0"/>
@@ -5076,7 +5076,7 @@
                 <a:ea typeface="Arial" pitchFamily="34" charset="-122"/>
                 <a:cs typeface="Arial" pitchFamily="34" charset="-120"/>
               </a:rPr>
-              <a:t>7.35</a:t>
+              <a:t>7.39</a:t>
             </a:r>
             <a:endParaRPr lang="en-US" sz="3200" dirty="0"/>
           </a:p>
@@ -5201,7 +5201,7 @@
                 <a:ea typeface="Arial" pitchFamily="34" charset="-122"/>
                 <a:cs typeface="Arial" pitchFamily="34" charset="-120"/>
               </a:rPr>
-              <a:t>62.5%</a:t>
+              <a:t>63.3%</a:t>
             </a:r>
             <a:endParaRPr lang="en-US" sz="3200" dirty="0"/>
           </a:p>
@@ -5326,7 +5326,7 @@
                 <a:ea typeface="Arial" pitchFamily="34" charset="-122"/>
                 <a:cs typeface="Arial" pitchFamily="34" charset="-120"/>
               </a:rPr>
-              <a:t>10.4%</a:t>
+              <a:t>10.2%</a:t>
             </a:r>
             <a:endParaRPr lang="en-US" sz="3200" dirty="0"/>
           </a:p>
@@ -5451,7 +5451,7 @@
                 <a:ea typeface="Arial" pitchFamily="34" charset="-122"/>
                 <a:cs typeface="Arial" pitchFamily="34" charset="-120"/>
               </a:rPr>
-              <a:t>48件</a:t>
+              <a:t>49件</a:t>
             </a:r>
             <a:endParaRPr lang="en-US" sz="3200" dirty="0"/>
           </a:p>
@@ -5599,7 +5599,7 @@
                 <a:ea typeface="Arial" pitchFamily="34" charset="-122"/>
                 <a:cs typeface="Arial" pitchFamily="34" charset="-120"/>
               </a:rPr>
-              <a:t>  立地はJRと京急のどちらからでも同じくらいの距離で遠くもないし、食事をするところも多いので困ることはないです</a:t>
+              <a:t>  駅からすぐの場所にあり、電車移動も便利 ホテルには駐車場が3台分有りますが予約はできません</a:t>
             </a:r>
             <a:endParaRPr lang="en-US" sz="1100" dirty="0"/>
           </a:p>
@@ -6260,7 +6260,7 @@
                 <a:ea typeface="Arial" pitchFamily="34" charset="-122"/>
                 <a:cs typeface="Arial" pitchFamily="34" charset="-120"/>
               </a:rPr>
-              <a:t>7.35</a:t>
+              <a:t>7.39</a:t>
             </a:r>
             <a:endParaRPr lang="en-US" sz="3200" dirty="0"/>
           </a:p>
@@ -6385,7 +6385,7 @@
                 <a:ea typeface="Arial" pitchFamily="34" charset="-122"/>
                 <a:cs typeface="Arial" pitchFamily="34" charset="-120"/>
               </a:rPr>
-              <a:t>62.5%</a:t>
+              <a:t>63.3%</a:t>
             </a:r>
             <a:endParaRPr lang="en-US" sz="3200" dirty="0"/>
           </a:p>
@@ -6510,7 +6510,7 @@
                 <a:ea typeface="Arial" pitchFamily="34" charset="-122"/>
                 <a:cs typeface="Arial" pitchFamily="34" charset="-120"/>
               </a:rPr>
-              <a:t>10.4%</a:t>
+              <a:t>10.2%</a:t>
             </a:r>
             <a:endParaRPr lang="en-US" sz="3200" dirty="0"/>
           </a:p>
@@ -6635,7 +6635,7 @@
                 <a:ea typeface="Arial" pitchFamily="34" charset="-122"/>
                 <a:cs typeface="Arial" pitchFamily="34" charset="-120"/>
               </a:rPr>
-              <a:t>48件</a:t>
+              <a:t>49件</a:t>
             </a:r>
             <a:endParaRPr lang="en-US" sz="3200" dirty="0"/>
           </a:p>
@@ -8523,6 +8523,348 @@
                           <a:ea typeface="Arial" pitchFamily="34" charset="-122"/>
                           <a:cs typeface="Arial" pitchFamily="34" charset="-120"/>
                         </a:rPr>
+                        <a:t>Agoda</a:t>
+                      </a:r>
+                      <a:endParaRPr lang="en-US" sz="900" dirty="0">
+                        <a:latin typeface="Arial" charset="0"/>
+                        <a:ea typeface="Arial" charset="0"/>
+                        <a:cs typeface="Arial" charset="0"/>
+                      </a:endParaRPr>
+                    </a:p>
+                  </a:txBody>
+                  <a:tcPr marL="91440" marR="91440" marT="45720" marB="45720">
+                    <a:lnL w="6350" cap="flat" cmpd="sng" algn="ctr">
+                      <a:solidFill>
+                        <a:srgbClr val="CBD5E1"/>
+                      </a:solidFill>
+                      <a:prstDash val="solid"/>
+                      <a:round/>
+                      <a:headEnd type="none" w="med" len="med"/>
+                      <a:tailEnd type="none" w="med" len="med"/>
+                    </a:lnL>
+                    <a:lnR w="6350" cap="flat" cmpd="sng" algn="ctr">
+                      <a:solidFill>
+                        <a:srgbClr val="CBD5E1"/>
+                      </a:solidFill>
+                      <a:prstDash val="solid"/>
+                      <a:round/>
+                      <a:headEnd type="none" w="med" len="med"/>
+                      <a:tailEnd type="none" w="med" len="med"/>
+                    </a:lnR>
+                    <a:lnT w="6350" cap="flat" cmpd="sng" algn="ctr">
+                      <a:solidFill>
+                        <a:srgbClr val="CBD5E1"/>
+                      </a:solidFill>
+                      <a:prstDash val="solid"/>
+                      <a:round/>
+                      <a:headEnd type="none" w="med" len="med"/>
+                      <a:tailEnd type="none" w="med" len="med"/>
+                    </a:lnT>
+                    <a:lnB w="6350" cap="flat" cmpd="sng" algn="ctr">
+                      <a:solidFill>
+                        <a:srgbClr val="CBD5E1"/>
+                      </a:solidFill>
+                      <a:prstDash val="solid"/>
+                      <a:round/>
+                      <a:headEnd type="none" w="med" len="med"/>
+                      <a:tailEnd type="none" w="med" len="med"/>
+                    </a:lnB>
+                    <a:solidFill>
+                      <a:srgbClr val="FFFFFF"/>
+                    </a:solidFill>
+                  </a:tcPr>
+                </a:tc>
+                <a:tc>
+                  <a:txBody>
+                    <a:bodyPr/>
+                    <a:lstStyle/>
+                    <a:p>
+                      <a:pPr algn="ctr" indent="0" marL="0">
+                        <a:buNone/>
+                      </a:pPr>
+                      <a:r>
+                        <a:rPr lang="en-US" sz="900" dirty="0">
+                          <a:solidFill>
+                            <a:srgbClr val="000000"/>
+                          </a:solidFill>
+                          <a:latin typeface="Arial" pitchFamily="34" charset="0"/>
+                          <a:ea typeface="Arial" pitchFamily="34" charset="-122"/>
+                          <a:cs typeface="Arial" pitchFamily="34" charset="-120"/>
+                        </a:rPr>
+                        <a:t>13</a:t>
+                      </a:r>
+                      <a:endParaRPr lang="en-US" sz="900" dirty="0">
+                        <a:latin typeface="Arial" charset="0"/>
+                        <a:ea typeface="Arial" charset="0"/>
+                        <a:cs typeface="Arial" charset="0"/>
+                      </a:endParaRPr>
+                    </a:p>
+                  </a:txBody>
+                  <a:tcPr marL="91440" marR="91440" marT="45720" marB="45720">
+                    <a:lnL w="6350" cap="flat" cmpd="sng" algn="ctr">
+                      <a:solidFill>
+                        <a:srgbClr val="CBD5E1"/>
+                      </a:solidFill>
+                      <a:prstDash val="solid"/>
+                      <a:round/>
+                      <a:headEnd type="none" w="med" len="med"/>
+                      <a:tailEnd type="none" w="med" len="med"/>
+                    </a:lnL>
+                    <a:lnR w="6350" cap="flat" cmpd="sng" algn="ctr">
+                      <a:solidFill>
+                        <a:srgbClr val="CBD5E1"/>
+                      </a:solidFill>
+                      <a:prstDash val="solid"/>
+                      <a:round/>
+                      <a:headEnd type="none" w="med" len="med"/>
+                      <a:tailEnd type="none" w="med" len="med"/>
+                    </a:lnR>
+                    <a:lnT w="6350" cap="flat" cmpd="sng" algn="ctr">
+                      <a:solidFill>
+                        <a:srgbClr val="CBD5E1"/>
+                      </a:solidFill>
+                      <a:prstDash val="solid"/>
+                      <a:round/>
+                      <a:headEnd type="none" w="med" len="med"/>
+                      <a:tailEnd type="none" w="med" len="med"/>
+                    </a:lnT>
+                    <a:lnB w="6350" cap="flat" cmpd="sng" algn="ctr">
+                      <a:solidFill>
+                        <a:srgbClr val="CBD5E1"/>
+                      </a:solidFill>
+                      <a:prstDash val="solid"/>
+                      <a:round/>
+                      <a:headEnd type="none" w="med" len="med"/>
+                      <a:tailEnd type="none" w="med" len="med"/>
+                    </a:lnB>
+                    <a:solidFill>
+                      <a:srgbClr val="FFFFFF"/>
+                    </a:solidFill>
+                  </a:tcPr>
+                </a:tc>
+                <a:tc>
+                  <a:txBody>
+                    <a:bodyPr/>
+                    <a:lstStyle/>
+                    <a:p>
+                      <a:pPr algn="ctr" indent="0" marL="0">
+                        <a:buNone/>
+                      </a:pPr>
+                      <a:r>
+                        <a:rPr lang="en-US" sz="900" dirty="0">
+                          <a:solidFill>
+                            <a:srgbClr val="000000"/>
+                          </a:solidFill>
+                          <a:latin typeface="Arial" pitchFamily="34" charset="0"/>
+                          <a:ea typeface="Arial" pitchFamily="34" charset="-122"/>
+                          <a:cs typeface="Arial" pitchFamily="34" charset="-120"/>
+                        </a:rPr>
+                        <a:t>7.08</a:t>
+                      </a:r>
+                      <a:endParaRPr lang="en-US" sz="900" dirty="0">
+                        <a:latin typeface="Arial" charset="0"/>
+                        <a:ea typeface="Arial" charset="0"/>
+                        <a:cs typeface="Arial" charset="0"/>
+                      </a:endParaRPr>
+                    </a:p>
+                  </a:txBody>
+                  <a:tcPr marL="91440" marR="91440" marT="45720" marB="45720">
+                    <a:lnL w="6350" cap="flat" cmpd="sng" algn="ctr">
+                      <a:solidFill>
+                        <a:srgbClr val="CBD5E1"/>
+                      </a:solidFill>
+                      <a:prstDash val="solid"/>
+                      <a:round/>
+                      <a:headEnd type="none" w="med" len="med"/>
+                      <a:tailEnd type="none" w="med" len="med"/>
+                    </a:lnL>
+                    <a:lnR w="6350" cap="flat" cmpd="sng" algn="ctr">
+                      <a:solidFill>
+                        <a:srgbClr val="CBD5E1"/>
+                      </a:solidFill>
+                      <a:prstDash val="solid"/>
+                      <a:round/>
+                      <a:headEnd type="none" w="med" len="med"/>
+                      <a:tailEnd type="none" w="med" len="med"/>
+                    </a:lnR>
+                    <a:lnT w="6350" cap="flat" cmpd="sng" algn="ctr">
+                      <a:solidFill>
+                        <a:srgbClr val="CBD5E1"/>
+                      </a:solidFill>
+                      <a:prstDash val="solid"/>
+                      <a:round/>
+                      <a:headEnd type="none" w="med" len="med"/>
+                      <a:tailEnd type="none" w="med" len="med"/>
+                    </a:lnT>
+                    <a:lnB w="6350" cap="flat" cmpd="sng" algn="ctr">
+                      <a:solidFill>
+                        <a:srgbClr val="CBD5E1"/>
+                      </a:solidFill>
+                      <a:prstDash val="solid"/>
+                      <a:round/>
+                      <a:headEnd type="none" w="med" len="med"/>
+                      <a:tailEnd type="none" w="med" len="med"/>
+                    </a:lnB>
+                    <a:solidFill>
+                      <a:srgbClr val="FFFFFF"/>
+                    </a:solidFill>
+                  </a:tcPr>
+                </a:tc>
+                <a:tc>
+                  <a:txBody>
+                    <a:bodyPr/>
+                    <a:lstStyle/>
+                    <a:p>
+                      <a:pPr algn="ctr" indent="0" marL="0">
+                        <a:buNone/>
+                      </a:pPr>
+                      <a:r>
+                        <a:rPr lang="en-US" sz="900" dirty="0">
+                          <a:solidFill>
+                            <a:srgbClr val="000000"/>
+                          </a:solidFill>
+                          <a:latin typeface="Arial" pitchFamily="34" charset="0"/>
+                          <a:ea typeface="Arial" pitchFamily="34" charset="-122"/>
+                          <a:cs typeface="Arial" pitchFamily="34" charset="-120"/>
+                        </a:rPr>
+                        <a:t>/10</a:t>
+                      </a:r>
+                      <a:endParaRPr lang="en-US" sz="900" dirty="0">
+                        <a:latin typeface="Arial" charset="0"/>
+                        <a:ea typeface="Arial" charset="0"/>
+                        <a:cs typeface="Arial" charset="0"/>
+                      </a:endParaRPr>
+                    </a:p>
+                  </a:txBody>
+                  <a:tcPr marL="91440" marR="91440" marT="45720" marB="45720">
+                    <a:lnL w="6350" cap="flat" cmpd="sng" algn="ctr">
+                      <a:solidFill>
+                        <a:srgbClr val="CBD5E1"/>
+                      </a:solidFill>
+                      <a:prstDash val="solid"/>
+                      <a:round/>
+                      <a:headEnd type="none" w="med" len="med"/>
+                      <a:tailEnd type="none" w="med" len="med"/>
+                    </a:lnL>
+                    <a:lnR w="6350" cap="flat" cmpd="sng" algn="ctr">
+                      <a:solidFill>
+                        <a:srgbClr val="CBD5E1"/>
+                      </a:solidFill>
+                      <a:prstDash val="solid"/>
+                      <a:round/>
+                      <a:headEnd type="none" w="med" len="med"/>
+                      <a:tailEnd type="none" w="med" len="med"/>
+                    </a:lnR>
+                    <a:lnT w="6350" cap="flat" cmpd="sng" algn="ctr">
+                      <a:solidFill>
+                        <a:srgbClr val="CBD5E1"/>
+                      </a:solidFill>
+                      <a:prstDash val="solid"/>
+                      <a:round/>
+                      <a:headEnd type="none" w="med" len="med"/>
+                      <a:tailEnd type="none" w="med" len="med"/>
+                    </a:lnT>
+                    <a:lnB w="6350" cap="flat" cmpd="sng" algn="ctr">
+                      <a:solidFill>
+                        <a:srgbClr val="CBD5E1"/>
+                      </a:solidFill>
+                      <a:prstDash val="solid"/>
+                      <a:round/>
+                      <a:headEnd type="none" w="med" len="med"/>
+                      <a:tailEnd type="none" w="med" len="med"/>
+                    </a:lnB>
+                    <a:solidFill>
+                      <a:srgbClr val="FFFFFF"/>
+                    </a:solidFill>
+                  </a:tcPr>
+                </a:tc>
+                <a:tc>
+                  <a:txBody>
+                    <a:bodyPr/>
+                    <a:lstStyle/>
+                    <a:p>
+                      <a:pPr algn="ctr" indent="0" marL="0">
+                        <a:buNone/>
+                      </a:pPr>
+                      <a:r>
+                        <a:rPr lang="en-US" sz="900" dirty="0">
+                          <a:solidFill>
+                            <a:srgbClr val="000000"/>
+                          </a:solidFill>
+                          <a:latin typeface="Arial" pitchFamily="34" charset="0"/>
+                          <a:ea typeface="Arial" pitchFamily="34" charset="-122"/>
+                          <a:cs typeface="Arial" pitchFamily="34" charset="-120"/>
+                        </a:rPr>
+                        <a:t>7.08</a:t>
+                      </a:r>
+                      <a:endParaRPr lang="en-US" sz="900" dirty="0">
+                        <a:latin typeface="Arial" charset="0"/>
+                        <a:ea typeface="Arial" charset="0"/>
+                        <a:cs typeface="Arial" charset="0"/>
+                      </a:endParaRPr>
+                    </a:p>
+                  </a:txBody>
+                  <a:tcPr marL="91440" marR="91440" marT="45720" marB="45720">
+                    <a:lnL w="6350" cap="flat" cmpd="sng" algn="ctr">
+                      <a:solidFill>
+                        <a:srgbClr val="CBD5E1"/>
+                      </a:solidFill>
+                      <a:prstDash val="solid"/>
+                      <a:round/>
+                      <a:headEnd type="none" w="med" len="med"/>
+                      <a:tailEnd type="none" w="med" len="med"/>
+                    </a:lnL>
+                    <a:lnR w="6350" cap="flat" cmpd="sng" algn="ctr">
+                      <a:solidFill>
+                        <a:srgbClr val="CBD5E1"/>
+                      </a:solidFill>
+                      <a:prstDash val="solid"/>
+                      <a:round/>
+                      <a:headEnd type="none" w="med" len="med"/>
+                      <a:tailEnd type="none" w="med" len="med"/>
+                    </a:lnR>
+                    <a:lnT w="6350" cap="flat" cmpd="sng" algn="ctr">
+                      <a:solidFill>
+                        <a:srgbClr val="CBD5E1"/>
+                      </a:solidFill>
+                      <a:prstDash val="solid"/>
+                      <a:round/>
+                      <a:headEnd type="none" w="med" len="med"/>
+                      <a:tailEnd type="none" w="med" len="med"/>
+                    </a:lnT>
+                    <a:lnB w="6350" cap="flat" cmpd="sng" algn="ctr">
+                      <a:solidFill>
+                        <a:srgbClr val="CBD5E1"/>
+                      </a:solidFill>
+                      <a:prstDash val="solid"/>
+                      <a:round/>
+                      <a:headEnd type="none" w="med" len="med"/>
+                      <a:tailEnd type="none" w="med" len="med"/>
+                    </a:lnB>
+                    <a:solidFill>
+                      <a:srgbClr val="FFFFFF"/>
+                    </a:solidFill>
+                  </a:tcPr>
+                </a:tc>
+              </a:tr>
+              <a:tr h="201168">
+                <a:tc>
+                  <a:txBody>
+                    <a:bodyPr/>
+                    <a:lstStyle/>
+                    <a:p>
+                      <a:pPr algn="ctr" indent="0" marL="0">
+                        <a:buNone/>
+                      </a:pPr>
+                      <a:r>
+                        <a:rPr lang="en-US" sz="900" dirty="0">
+                          <a:solidFill>
+                            <a:srgbClr val="000000"/>
+                          </a:solidFill>
+                          <a:latin typeface="Arial" pitchFamily="34" charset="0"/>
+                          <a:ea typeface="Arial" pitchFamily="34" charset="-122"/>
+                          <a:cs typeface="Arial" pitchFamily="34" charset="-120"/>
+                        </a:rPr>
                         <a:t>楽天トラベル</a:t>
                       </a:r>
                       <a:endParaRPr lang="en-US" sz="900" dirty="0">
@@ -8570,7 +8912,7 @@
                       <a:tailEnd type="none" w="med" len="med"/>
                     </a:lnB>
                     <a:solidFill>
-                      <a:srgbClr val="FFFFFF"/>
+                      <a:srgbClr val="E8EFF8"/>
                     </a:solidFill>
                   </a:tcPr>
                 </a:tc>
@@ -8638,7 +8980,7 @@
                       <a:tailEnd type="none" w="med" len="med"/>
                     </a:lnB>
                     <a:solidFill>
-                      <a:srgbClr val="FFFFFF"/>
+                      <a:srgbClr val="E8EFF8"/>
                     </a:solidFill>
                   </a:tcPr>
                 </a:tc>
@@ -8706,7 +9048,7 @@
                       <a:tailEnd type="none" w="med" len="med"/>
                     </a:lnB>
                     <a:solidFill>
-                      <a:srgbClr val="FFFFFF"/>
+                      <a:srgbClr val="E8EFF8"/>
                     </a:solidFill>
                   </a:tcPr>
                 </a:tc>
@@ -8774,7 +9116,7 @@
                       <a:tailEnd type="none" w="med" len="med"/>
                     </a:lnB>
                     <a:solidFill>
-                      <a:srgbClr val="FFFFFF"/>
+                      <a:srgbClr val="E8EFF8"/>
                     </a:solidFill>
                   </a:tcPr>
                 </a:tc>
@@ -8796,348 +9138,6 @@
                           <a:cs typeface="Arial" pitchFamily="34" charset="-120"/>
                         </a:rPr>
                         <a:t>7</a:t>
-                      </a:r>
-                      <a:endParaRPr lang="en-US" sz="900" dirty="0">
-                        <a:latin typeface="Arial" charset="0"/>
-                        <a:ea typeface="Arial" charset="0"/>
-                        <a:cs typeface="Arial" charset="0"/>
-                      </a:endParaRPr>
-                    </a:p>
-                  </a:txBody>
-                  <a:tcPr marL="91440" marR="91440" marT="45720" marB="45720">
-                    <a:lnL w="6350" cap="flat" cmpd="sng" algn="ctr">
-                      <a:solidFill>
-                        <a:srgbClr val="CBD5E1"/>
-                      </a:solidFill>
-                      <a:prstDash val="solid"/>
-                      <a:round/>
-                      <a:headEnd type="none" w="med" len="med"/>
-                      <a:tailEnd type="none" w="med" len="med"/>
-                    </a:lnL>
-                    <a:lnR w="6350" cap="flat" cmpd="sng" algn="ctr">
-                      <a:solidFill>
-                        <a:srgbClr val="CBD5E1"/>
-                      </a:solidFill>
-                      <a:prstDash val="solid"/>
-                      <a:round/>
-                      <a:headEnd type="none" w="med" len="med"/>
-                      <a:tailEnd type="none" w="med" len="med"/>
-                    </a:lnR>
-                    <a:lnT w="6350" cap="flat" cmpd="sng" algn="ctr">
-                      <a:solidFill>
-                        <a:srgbClr val="CBD5E1"/>
-                      </a:solidFill>
-                      <a:prstDash val="solid"/>
-                      <a:round/>
-                      <a:headEnd type="none" w="med" len="med"/>
-                      <a:tailEnd type="none" w="med" len="med"/>
-                    </a:lnT>
-                    <a:lnB w="6350" cap="flat" cmpd="sng" algn="ctr">
-                      <a:solidFill>
-                        <a:srgbClr val="CBD5E1"/>
-                      </a:solidFill>
-                      <a:prstDash val="solid"/>
-                      <a:round/>
-                      <a:headEnd type="none" w="med" len="med"/>
-                      <a:tailEnd type="none" w="med" len="med"/>
-                    </a:lnB>
-                    <a:solidFill>
-                      <a:srgbClr val="FFFFFF"/>
-                    </a:solidFill>
-                  </a:tcPr>
-                </a:tc>
-              </a:tr>
-              <a:tr h="201168">
-                <a:tc>
-                  <a:txBody>
-                    <a:bodyPr/>
-                    <a:lstStyle/>
-                    <a:p>
-                      <a:pPr algn="ctr" indent="0" marL="0">
-                        <a:buNone/>
-                      </a:pPr>
-                      <a:r>
-                        <a:rPr lang="en-US" sz="900" dirty="0">
-                          <a:solidFill>
-                            <a:srgbClr val="000000"/>
-                          </a:solidFill>
-                          <a:latin typeface="Arial" pitchFamily="34" charset="0"/>
-                          <a:ea typeface="Arial" pitchFamily="34" charset="-122"/>
-                          <a:cs typeface="Arial" pitchFamily="34" charset="-120"/>
-                        </a:rPr>
-                        <a:t>Agoda</a:t>
-                      </a:r>
-                      <a:endParaRPr lang="en-US" sz="900" dirty="0">
-                        <a:latin typeface="Arial" charset="0"/>
-                        <a:ea typeface="Arial" charset="0"/>
-                        <a:cs typeface="Arial" charset="0"/>
-                      </a:endParaRPr>
-                    </a:p>
-                  </a:txBody>
-                  <a:tcPr marL="91440" marR="91440" marT="45720" marB="45720">
-                    <a:lnL w="6350" cap="flat" cmpd="sng" algn="ctr">
-                      <a:solidFill>
-                        <a:srgbClr val="CBD5E1"/>
-                      </a:solidFill>
-                      <a:prstDash val="solid"/>
-                      <a:round/>
-                      <a:headEnd type="none" w="med" len="med"/>
-                      <a:tailEnd type="none" w="med" len="med"/>
-                    </a:lnL>
-                    <a:lnR w="6350" cap="flat" cmpd="sng" algn="ctr">
-                      <a:solidFill>
-                        <a:srgbClr val="CBD5E1"/>
-                      </a:solidFill>
-                      <a:prstDash val="solid"/>
-                      <a:round/>
-                      <a:headEnd type="none" w="med" len="med"/>
-                      <a:tailEnd type="none" w="med" len="med"/>
-                    </a:lnR>
-                    <a:lnT w="6350" cap="flat" cmpd="sng" algn="ctr">
-                      <a:solidFill>
-                        <a:srgbClr val="CBD5E1"/>
-                      </a:solidFill>
-                      <a:prstDash val="solid"/>
-                      <a:round/>
-                      <a:headEnd type="none" w="med" len="med"/>
-                      <a:tailEnd type="none" w="med" len="med"/>
-                    </a:lnT>
-                    <a:lnB w="6350" cap="flat" cmpd="sng" algn="ctr">
-                      <a:solidFill>
-                        <a:srgbClr val="CBD5E1"/>
-                      </a:solidFill>
-                      <a:prstDash val="solid"/>
-                      <a:round/>
-                      <a:headEnd type="none" w="med" len="med"/>
-                      <a:tailEnd type="none" w="med" len="med"/>
-                    </a:lnB>
-                    <a:solidFill>
-                      <a:srgbClr val="E8EFF8"/>
-                    </a:solidFill>
-                  </a:tcPr>
-                </a:tc>
-                <a:tc>
-                  <a:txBody>
-                    <a:bodyPr/>
-                    <a:lstStyle/>
-                    <a:p>
-                      <a:pPr algn="ctr" indent="0" marL="0">
-                        <a:buNone/>
-                      </a:pPr>
-                      <a:r>
-                        <a:rPr lang="en-US" sz="900" dirty="0">
-                          <a:solidFill>
-                            <a:srgbClr val="000000"/>
-                          </a:solidFill>
-                          <a:latin typeface="Arial" pitchFamily="34" charset="0"/>
-                          <a:ea typeface="Arial" pitchFamily="34" charset="-122"/>
-                          <a:cs typeface="Arial" pitchFamily="34" charset="-120"/>
-                        </a:rPr>
-                        <a:t>12</a:t>
-                      </a:r>
-                      <a:endParaRPr lang="en-US" sz="900" dirty="0">
-                        <a:latin typeface="Arial" charset="0"/>
-                        <a:ea typeface="Arial" charset="0"/>
-                        <a:cs typeface="Arial" charset="0"/>
-                      </a:endParaRPr>
-                    </a:p>
-                  </a:txBody>
-                  <a:tcPr marL="91440" marR="91440" marT="45720" marB="45720">
-                    <a:lnL w="6350" cap="flat" cmpd="sng" algn="ctr">
-                      <a:solidFill>
-                        <a:srgbClr val="CBD5E1"/>
-                      </a:solidFill>
-                      <a:prstDash val="solid"/>
-                      <a:round/>
-                      <a:headEnd type="none" w="med" len="med"/>
-                      <a:tailEnd type="none" w="med" len="med"/>
-                    </a:lnL>
-                    <a:lnR w="6350" cap="flat" cmpd="sng" algn="ctr">
-                      <a:solidFill>
-                        <a:srgbClr val="CBD5E1"/>
-                      </a:solidFill>
-                      <a:prstDash val="solid"/>
-                      <a:round/>
-                      <a:headEnd type="none" w="med" len="med"/>
-                      <a:tailEnd type="none" w="med" len="med"/>
-                    </a:lnR>
-                    <a:lnT w="6350" cap="flat" cmpd="sng" algn="ctr">
-                      <a:solidFill>
-                        <a:srgbClr val="CBD5E1"/>
-                      </a:solidFill>
-                      <a:prstDash val="solid"/>
-                      <a:round/>
-                      <a:headEnd type="none" w="med" len="med"/>
-                      <a:tailEnd type="none" w="med" len="med"/>
-                    </a:lnT>
-                    <a:lnB w="6350" cap="flat" cmpd="sng" algn="ctr">
-                      <a:solidFill>
-                        <a:srgbClr val="CBD5E1"/>
-                      </a:solidFill>
-                      <a:prstDash val="solid"/>
-                      <a:round/>
-                      <a:headEnd type="none" w="med" len="med"/>
-                      <a:tailEnd type="none" w="med" len="med"/>
-                    </a:lnB>
-                    <a:solidFill>
-                      <a:srgbClr val="E8EFF8"/>
-                    </a:solidFill>
-                  </a:tcPr>
-                </a:tc>
-                <a:tc>
-                  <a:txBody>
-                    <a:bodyPr/>
-                    <a:lstStyle/>
-                    <a:p>
-                      <a:pPr algn="ctr" indent="0" marL="0">
-                        <a:buNone/>
-                      </a:pPr>
-                      <a:r>
-                        <a:rPr lang="en-US" sz="900" dirty="0">
-                          <a:solidFill>
-                            <a:srgbClr val="000000"/>
-                          </a:solidFill>
-                          <a:latin typeface="Arial" pitchFamily="34" charset="0"/>
-                          <a:ea typeface="Arial" pitchFamily="34" charset="-122"/>
-                          <a:cs typeface="Arial" pitchFamily="34" charset="-120"/>
-                        </a:rPr>
-                        <a:t>6.92</a:t>
-                      </a:r>
-                      <a:endParaRPr lang="en-US" sz="900" dirty="0">
-                        <a:latin typeface="Arial" charset="0"/>
-                        <a:ea typeface="Arial" charset="0"/>
-                        <a:cs typeface="Arial" charset="0"/>
-                      </a:endParaRPr>
-                    </a:p>
-                  </a:txBody>
-                  <a:tcPr marL="91440" marR="91440" marT="45720" marB="45720">
-                    <a:lnL w="6350" cap="flat" cmpd="sng" algn="ctr">
-                      <a:solidFill>
-                        <a:srgbClr val="CBD5E1"/>
-                      </a:solidFill>
-                      <a:prstDash val="solid"/>
-                      <a:round/>
-                      <a:headEnd type="none" w="med" len="med"/>
-                      <a:tailEnd type="none" w="med" len="med"/>
-                    </a:lnL>
-                    <a:lnR w="6350" cap="flat" cmpd="sng" algn="ctr">
-                      <a:solidFill>
-                        <a:srgbClr val="CBD5E1"/>
-                      </a:solidFill>
-                      <a:prstDash val="solid"/>
-                      <a:round/>
-                      <a:headEnd type="none" w="med" len="med"/>
-                      <a:tailEnd type="none" w="med" len="med"/>
-                    </a:lnR>
-                    <a:lnT w="6350" cap="flat" cmpd="sng" algn="ctr">
-                      <a:solidFill>
-                        <a:srgbClr val="CBD5E1"/>
-                      </a:solidFill>
-                      <a:prstDash val="solid"/>
-                      <a:round/>
-                      <a:headEnd type="none" w="med" len="med"/>
-                      <a:tailEnd type="none" w="med" len="med"/>
-                    </a:lnT>
-                    <a:lnB w="6350" cap="flat" cmpd="sng" algn="ctr">
-                      <a:solidFill>
-                        <a:srgbClr val="CBD5E1"/>
-                      </a:solidFill>
-                      <a:prstDash val="solid"/>
-                      <a:round/>
-                      <a:headEnd type="none" w="med" len="med"/>
-                      <a:tailEnd type="none" w="med" len="med"/>
-                    </a:lnB>
-                    <a:solidFill>
-                      <a:srgbClr val="E8EFF8"/>
-                    </a:solidFill>
-                  </a:tcPr>
-                </a:tc>
-                <a:tc>
-                  <a:txBody>
-                    <a:bodyPr/>
-                    <a:lstStyle/>
-                    <a:p>
-                      <a:pPr algn="ctr" indent="0" marL="0">
-                        <a:buNone/>
-                      </a:pPr>
-                      <a:r>
-                        <a:rPr lang="en-US" sz="900" dirty="0">
-                          <a:solidFill>
-                            <a:srgbClr val="000000"/>
-                          </a:solidFill>
-                          <a:latin typeface="Arial" pitchFamily="34" charset="0"/>
-                          <a:ea typeface="Arial" pitchFamily="34" charset="-122"/>
-                          <a:cs typeface="Arial" pitchFamily="34" charset="-120"/>
-                        </a:rPr>
-                        <a:t>/10</a:t>
-                      </a:r>
-                      <a:endParaRPr lang="en-US" sz="900" dirty="0">
-                        <a:latin typeface="Arial" charset="0"/>
-                        <a:ea typeface="Arial" charset="0"/>
-                        <a:cs typeface="Arial" charset="0"/>
-                      </a:endParaRPr>
-                    </a:p>
-                  </a:txBody>
-                  <a:tcPr marL="91440" marR="91440" marT="45720" marB="45720">
-                    <a:lnL w="6350" cap="flat" cmpd="sng" algn="ctr">
-                      <a:solidFill>
-                        <a:srgbClr val="CBD5E1"/>
-                      </a:solidFill>
-                      <a:prstDash val="solid"/>
-                      <a:round/>
-                      <a:headEnd type="none" w="med" len="med"/>
-                      <a:tailEnd type="none" w="med" len="med"/>
-                    </a:lnL>
-                    <a:lnR w="6350" cap="flat" cmpd="sng" algn="ctr">
-                      <a:solidFill>
-                        <a:srgbClr val="CBD5E1"/>
-                      </a:solidFill>
-                      <a:prstDash val="solid"/>
-                      <a:round/>
-                      <a:headEnd type="none" w="med" len="med"/>
-                      <a:tailEnd type="none" w="med" len="med"/>
-                    </a:lnR>
-                    <a:lnT w="6350" cap="flat" cmpd="sng" algn="ctr">
-                      <a:solidFill>
-                        <a:srgbClr val="CBD5E1"/>
-                      </a:solidFill>
-                      <a:prstDash val="solid"/>
-                      <a:round/>
-                      <a:headEnd type="none" w="med" len="med"/>
-                      <a:tailEnd type="none" w="med" len="med"/>
-                    </a:lnT>
-                    <a:lnB w="6350" cap="flat" cmpd="sng" algn="ctr">
-                      <a:solidFill>
-                        <a:srgbClr val="CBD5E1"/>
-                      </a:solidFill>
-                      <a:prstDash val="solid"/>
-                      <a:round/>
-                      <a:headEnd type="none" w="med" len="med"/>
-                      <a:tailEnd type="none" w="med" len="med"/>
-                    </a:lnB>
-                    <a:solidFill>
-                      <a:srgbClr val="E8EFF8"/>
-                    </a:solidFill>
-                  </a:tcPr>
-                </a:tc>
-                <a:tc>
-                  <a:txBody>
-                    <a:bodyPr/>
-                    <a:lstStyle/>
-                    <a:p>
-                      <a:pPr algn="ctr" indent="0" marL="0">
-                        <a:buNone/>
-                      </a:pPr>
-                      <a:r>
-                        <a:rPr lang="en-US" sz="900" dirty="0">
-                          <a:solidFill>
-                            <a:srgbClr val="000000"/>
-                          </a:solidFill>
-                          <a:latin typeface="Arial" pitchFamily="34" charset="0"/>
-                          <a:ea typeface="Arial" pitchFamily="34" charset="-122"/>
-                          <a:cs typeface="Arial" pitchFamily="34" charset="-120"/>
-                        </a:rPr>
-                        <a:t>6.92</a:t>
                       </a:r>
                       <a:endParaRPr lang="en-US" sz="900" dirty="0">
                         <a:latin typeface="Arial" charset="0"/>
@@ -9545,7 +9545,7 @@
                 <a:ea typeface="Arial" pitchFamily="34" charset="-122"/>
                 <a:cs typeface="Arial" pitchFamily="34" charset="-120"/>
               </a:rPr>
-              <a:t>30件（62.5%）</a:t>
+              <a:t>31件（63.3%）</a:t>
             </a:r>
             <a:endParaRPr lang="en-US" sz="1100" dirty="0"/>
           </a:p>
@@ -9643,7 +9643,7 @@
                 <a:ea typeface="Arial" pitchFamily="34" charset="-122"/>
                 <a:cs typeface="Arial" pitchFamily="34" charset="-120"/>
               </a:rPr>
-              <a:t>13件（27.1%）</a:t>
+              <a:t>13件（26.5%）</a:t>
             </a:r>
             <a:endParaRPr lang="en-US" sz="1100" dirty="0"/>
           </a:p>
@@ -9741,7 +9741,7 @@
                 <a:ea typeface="Arial" pitchFamily="34" charset="-122"/>
                 <a:cs typeface="Arial" pitchFamily="34" charset="-120"/>
               </a:rPr>
-              <a:t>5件（10.4%）</a:t>
+              <a:t>5件（10.2%）</a:t>
             </a:r>
             <a:endParaRPr lang="en-US" sz="1100" dirty="0"/>
           </a:p>
@@ -10153,7 +10153,7 @@
                 <a:ea typeface="Arial" pitchFamily="34" charset="-122"/>
                 <a:cs typeface="Arial" pitchFamily="34" charset="-120"/>
               </a:rPr>
-              <a:t>立地はJRと京急のどちらからでも同じくらいの距離で遠くもないし、食事をするところも多いので困ることはないです</a:t>
+              <a:t>駅からすぐの場所にあり、電車移動も便利 ホテルには駐車場が3台分有りますが予約はできません</a:t>
             </a:r>
             <a:endParaRPr lang="en-US" sz="900" dirty="0"/>
           </a:p>
@@ -10192,7 +10192,7 @@
                 <a:ea typeface="Arial" pitchFamily="34" charset="-122"/>
                 <a:cs typeface="Arial" pitchFamily="34" charset="-120"/>
               </a:rPr>
-              <a:t>「駅近で周りにスーパー、コンビニがあるところ」</a:t>
+              <a:t>「立地はJRと京急のどちらからでも同じくらいの距離で遠くもないし、食事をするところも多いので困ることはないです」</a:t>
             </a:r>
             <a:endParaRPr lang="en-US" sz="900" dirty="0"/>
           </a:p>

--- a/納品レポート/ホテル別レポート/apa_kamata_口コミ分析レポート.pptx
+++ b/納品レポート/ホテル別レポート/apa_kamata_口コミ分析レポート.pptx
@@ -205,13 +205,13 @@
                 <c:formatCode>General</c:formatCode>
                 <c:ptCount val="5"/>
                 <c:pt idx="0">
-                  <c:v>7.87</c:v>
+                  <c:v>7.88</c:v>
                 </c:pt>
                 <c:pt idx="1">
                   <c:v>7.5</c:v>
                 </c:pt>
                 <c:pt idx="2">
-                  <c:v>7.23</c:v>
+                  <c:v>7.43</c:v>
                 </c:pt>
                 <c:pt idx="3">
                   <c:v>7.08</c:v>
@@ -560,7 +560,7 @@
               <c:numCache>
                 <c:ptCount val="3"/>
                 <c:pt idx="0">
-                  <c:v>31</c:v>
+                  <c:v>33</c:v>
                 </c:pt>
                 <c:pt idx="1">
                   <c:v>13</c:v>
@@ -803,13 +803,13 @@
                 <c:formatCode>General</c:formatCode>
                 <c:ptCount val="8"/>
                 <c:pt idx="0">
-                  <c:v>6</c:v>
+                  <c:v>7</c:v>
                 </c:pt>
                 <c:pt idx="1">
                   <c:v>3</c:v>
                 </c:pt>
                 <c:pt idx="2">
-                  <c:v>22</c:v>
+                  <c:v>23</c:v>
                 </c:pt>
                 <c:pt idx="3">
                   <c:v>4</c:v>
@@ -2775,7 +2775,7 @@
                 <a:ea typeface="Arial" pitchFamily="34" charset="-122"/>
                 <a:cs typeface="Arial" pitchFamily="34" charset="-120"/>
               </a:rPr>
-              <a:t>レビュー総数：49件（5サイト）</a:t>
+              <a:t>レビュー総数：51件（5サイト）</a:t>
             </a:r>
             <a:endParaRPr lang="en-US" sz="1000" dirty="0"/>
           </a:p>
@@ -2795,7 +2795,7 @@
                 <a:ea typeface="Arial" pitchFamily="34" charset="-122"/>
                 <a:cs typeface="Arial" pitchFamily="34" charset="-120"/>
               </a:rPr>
-              <a:t>作成日：2026年3月20日</a:t>
+              <a:t>作成日：2026年3月21日</a:t>
             </a:r>
             <a:endParaRPr lang="en-US" sz="1000" dirty="0"/>
           </a:p>
@@ -3341,7 +3341,7 @@
                           <a:ea typeface="Arial" pitchFamily="34" charset="-122"/>
                           <a:cs typeface="Arial" pitchFamily="34" charset="-120"/>
                         </a:rPr>
-                        <a:t>7.39点</a:t>
+                        <a:t>7.45点</a:t>
                       </a:r>
                       <a:endParaRPr lang="en-US" sz="1000" dirty="0">
                         <a:latin typeface="Arial" charset="0"/>
@@ -3409,7 +3409,7 @@
                           <a:ea typeface="Arial" pitchFamily="34" charset="-122"/>
                           <a:cs typeface="Arial" pitchFamily="34" charset="-120"/>
                         </a:rPr>
-                        <a:t>7.9点以上</a:t>
+                        <a:t>8.0点以上</a:t>
                       </a:r>
                       <a:endParaRPr lang="en-US" sz="1000" dirty="0">
                         <a:latin typeface="Arial" charset="0"/>
@@ -3615,7 +3615,7 @@
                           <a:ea typeface="Arial" pitchFamily="34" charset="-122"/>
                           <a:cs typeface="Arial" pitchFamily="34" charset="-120"/>
                         </a:rPr>
-                        <a:t>63.3%</a:t>
+                        <a:t>64.7%</a:t>
                       </a:r>
                       <a:endParaRPr lang="en-US" sz="1000" dirty="0">
                         <a:latin typeface="Arial" charset="0"/>
@@ -3683,7 +3683,7 @@
                           <a:ea typeface="Arial" pitchFamily="34" charset="-122"/>
                           <a:cs typeface="Arial" pitchFamily="34" charset="-120"/>
                         </a:rPr>
-                        <a:t>73%以上</a:t>
+                        <a:t>75%以上</a:t>
                       </a:r>
                       <a:endParaRPr lang="en-US" sz="1000" dirty="0">
                         <a:latin typeface="Arial" charset="0"/>
@@ -3889,7 +3889,7 @@
                           <a:ea typeface="Arial" pitchFamily="34" charset="-122"/>
                           <a:cs typeface="Arial" pitchFamily="34" charset="-120"/>
                         </a:rPr>
-                        <a:t>10.2%</a:t>
+                        <a:t>9.8%</a:t>
                       </a:r>
                       <a:endParaRPr lang="en-US" sz="1000" dirty="0">
                         <a:latin typeface="Arial" charset="0"/>
@@ -3957,7 +3957,7 @@
                           <a:ea typeface="Arial" pitchFamily="34" charset="-122"/>
                           <a:cs typeface="Arial" pitchFamily="34" charset="-120"/>
                         </a:rPr>
-                        <a:t>5%以下</a:t>
+                        <a:t>7%以下</a:t>
                       </a:r>
                       <a:endParaRPr lang="en-US" sz="1000" dirty="0">
                         <a:latin typeface="Arial" charset="0"/>
@@ -5076,7 +5076,7 @@
                 <a:ea typeface="Arial" pitchFamily="34" charset="-122"/>
                 <a:cs typeface="Arial" pitchFamily="34" charset="-120"/>
               </a:rPr>
-              <a:t>7.39</a:t>
+              <a:t>7.45</a:t>
             </a:r>
             <a:endParaRPr lang="en-US" sz="3200" dirty="0"/>
           </a:p>
@@ -5201,7 +5201,7 @@
                 <a:ea typeface="Arial" pitchFamily="34" charset="-122"/>
                 <a:cs typeface="Arial" pitchFamily="34" charset="-120"/>
               </a:rPr>
-              <a:t>63.3%</a:t>
+              <a:t>64.7%</a:t>
             </a:r>
             <a:endParaRPr lang="en-US" sz="3200" dirty="0"/>
           </a:p>
@@ -5326,7 +5326,7 @@
                 <a:ea typeface="Arial" pitchFamily="34" charset="-122"/>
                 <a:cs typeface="Arial" pitchFamily="34" charset="-120"/>
               </a:rPr>
-              <a:t>10.2%</a:t>
+              <a:t>9.8%</a:t>
             </a:r>
             <a:endParaRPr lang="en-US" sz="3200" dirty="0"/>
           </a:p>
@@ -5451,7 +5451,7 @@
                 <a:ea typeface="Arial" pitchFamily="34" charset="-122"/>
                 <a:cs typeface="Arial" pitchFamily="34" charset="-120"/>
               </a:rPr>
-              <a:t>49件</a:t>
+              <a:t>51件</a:t>
             </a:r>
             <a:endParaRPr lang="en-US" sz="3200" dirty="0"/>
           </a:p>
@@ -5679,7 +5679,7 @@
                 <a:ea typeface="Arial" pitchFamily="34" charset="-122"/>
                 <a:cs typeface="Arial" pitchFamily="34" charset="-120"/>
               </a:rPr>
-              <a:t>  歯ブラシでこすれば、パッと見はもっときれいになりそうなので、ちょっと残念なところ</a:t>
+              <a:t>  清潔 なし なし</a:t>
             </a:r>
             <a:endParaRPr lang="en-US" sz="1100" dirty="0"/>
           </a:p>
@@ -6260,7 +6260,7 @@
                 <a:ea typeface="Arial" pitchFamily="34" charset="-122"/>
                 <a:cs typeface="Arial" pitchFamily="34" charset="-120"/>
               </a:rPr>
-              <a:t>7.39</a:t>
+              <a:t>7.45</a:t>
             </a:r>
             <a:endParaRPr lang="en-US" sz="3200" dirty="0"/>
           </a:p>
@@ -6385,7 +6385,7 @@
                 <a:ea typeface="Arial" pitchFamily="34" charset="-122"/>
                 <a:cs typeface="Arial" pitchFamily="34" charset="-120"/>
               </a:rPr>
-              <a:t>63.3%</a:t>
+              <a:t>64.7%</a:t>
             </a:r>
             <a:endParaRPr lang="en-US" sz="3200" dirty="0"/>
           </a:p>
@@ -6510,7 +6510,7 @@
                 <a:ea typeface="Arial" pitchFamily="34" charset="-122"/>
                 <a:cs typeface="Arial" pitchFamily="34" charset="-120"/>
               </a:rPr>
-              <a:t>10.2%</a:t>
+              <a:t>9.8%</a:t>
             </a:r>
             <a:endParaRPr lang="en-US" sz="3200" dirty="0"/>
           </a:p>
@@ -6635,7 +6635,7 @@
                 <a:ea typeface="Arial" pitchFamily="34" charset="-122"/>
                 <a:cs typeface="Arial" pitchFamily="34" charset="-120"/>
               </a:rPr>
-              <a:t>49件</a:t>
+              <a:t>51件</a:t>
             </a:r>
             <a:endParaRPr lang="en-US" sz="3200" dirty="0"/>
           </a:p>
@@ -7056,7 +7056,7 @@
                 <a:ea typeface="Arial" pitchFamily="34" charset="-122"/>
                 <a:cs typeface="Arial" pitchFamily="34" charset="-120"/>
               </a:rPr>
-              <a:t>Google(7.87)が最高スコア。</a:t>
+              <a:t>Google(7.88)が最高スコア。</a:t>
             </a:r>
             <a:endParaRPr lang="en-US" sz="1100" dirty="0"/>
           </a:p>
@@ -7565,7 +7565,7 @@
                           <a:ea typeface="Arial" pitchFamily="34" charset="-122"/>
                           <a:cs typeface="Arial" pitchFamily="34" charset="-120"/>
                         </a:rPr>
-                        <a:t>15</a:t>
+                        <a:t>16</a:t>
                       </a:r>
                       <a:endParaRPr lang="en-US" sz="900" dirty="0">
                         <a:latin typeface="Arial" charset="0"/>
@@ -7633,7 +7633,7 @@
                           <a:ea typeface="Arial" pitchFamily="34" charset="-122"/>
                           <a:cs typeface="Arial" pitchFamily="34" charset="-120"/>
                         </a:rPr>
-                        <a:t>3.93</a:t>
+                        <a:t>3.94</a:t>
                       </a:r>
                       <a:endParaRPr lang="en-US" sz="900" dirty="0">
                         <a:latin typeface="Arial" charset="0"/>
@@ -7769,7 +7769,7 @@
                           <a:ea typeface="Arial" pitchFamily="34" charset="-122"/>
                           <a:cs typeface="Arial" pitchFamily="34" charset="-120"/>
                         </a:rPr>
-                        <a:t>7.87</a:t>
+                        <a:t>7.88</a:t>
                       </a:r>
                       <a:endParaRPr lang="en-US" sz="900" dirty="0">
                         <a:latin typeface="Arial" charset="0"/>
@@ -8249,7 +8249,7 @@
                           <a:ea typeface="Arial" pitchFamily="34" charset="-122"/>
                           <a:cs typeface="Arial" pitchFamily="34" charset="-120"/>
                         </a:rPr>
-                        <a:t>13</a:t>
+                        <a:t>14</a:t>
                       </a:r>
                       <a:endParaRPr lang="en-US" sz="900" dirty="0">
                         <a:latin typeface="Arial" charset="0"/>
@@ -8317,7 +8317,7 @@
                           <a:ea typeface="Arial" pitchFamily="34" charset="-122"/>
                           <a:cs typeface="Arial" pitchFamily="34" charset="-120"/>
                         </a:rPr>
-                        <a:t>7.23</a:t>
+                        <a:t>7.43</a:t>
                       </a:r>
                       <a:endParaRPr lang="en-US" sz="900" dirty="0">
                         <a:latin typeface="Arial" charset="0"/>
@@ -8453,7 +8453,7 @@
                           <a:ea typeface="Arial" pitchFamily="34" charset="-122"/>
                           <a:cs typeface="Arial" pitchFamily="34" charset="-120"/>
                         </a:rPr>
-                        <a:t>7.23</a:t>
+                        <a:t>7.43</a:t>
                       </a:r>
                       <a:endParaRPr lang="en-US" sz="900" dirty="0">
                         <a:latin typeface="Arial" charset="0"/>
@@ -9545,7 +9545,7 @@
                 <a:ea typeface="Arial" pitchFamily="34" charset="-122"/>
                 <a:cs typeface="Arial" pitchFamily="34" charset="-120"/>
               </a:rPr>
-              <a:t>31件（63.3%）</a:t>
+              <a:t>33件（64.7%）</a:t>
             </a:r>
             <a:endParaRPr lang="en-US" sz="1100" dirty="0"/>
           </a:p>
@@ -9643,7 +9643,7 @@
                 <a:ea typeface="Arial" pitchFamily="34" charset="-122"/>
                 <a:cs typeface="Arial" pitchFamily="34" charset="-120"/>
               </a:rPr>
-              <a:t>13件（26.5%）</a:t>
+              <a:t>13件（25.5%）</a:t>
             </a:r>
             <a:endParaRPr lang="en-US" sz="1100" dirty="0"/>
           </a:p>
@@ -9741,7 +9741,7 @@
                 <a:ea typeface="Arial" pitchFamily="34" charset="-122"/>
                 <a:cs typeface="Arial" pitchFamily="34" charset="-120"/>
               </a:rPr>
-              <a:t>5件（10.2%）</a:t>
+              <a:t>5件（9.8%）</a:t>
             </a:r>
             <a:endParaRPr lang="en-US" sz="1100" dirty="0"/>
           </a:p>
@@ -10521,7 +10521,7 @@
                 <a:ea typeface="Arial" pitchFamily="34" charset="-122"/>
                 <a:cs typeface="Arial" pitchFamily="34" charset="-120"/>
               </a:rPr>
-              <a:t>7件</a:t>
+              <a:t>8件</a:t>
             </a:r>
             <a:endParaRPr lang="en-US" sz="900" dirty="0"/>
           </a:p>
@@ -10599,7 +10599,7 @@
                 <a:ea typeface="Arial" pitchFamily="34" charset="-122"/>
                 <a:cs typeface="Arial" pitchFamily="34" charset="-120"/>
               </a:rPr>
-              <a:t>歯ブラシでこすれば、パッと見はもっときれいになりそうなので、ちょっと残念なところ</a:t>
+              <a:t>清潔 なし なし</a:t>
             </a:r>
             <a:endParaRPr lang="en-US" sz="900" dirty="0"/>
           </a:p>
@@ -10638,7 +10638,7 @@
                 <a:ea typeface="Arial" pitchFamily="34" charset="-122"/>
                 <a:cs typeface="Arial" pitchFamily="34" charset="-120"/>
               </a:rPr>
-              <a:t>「ホテル自体は綺麗であった」</a:t>
+              <a:t>「歯ブラシでこすれば、パッと見はもっときれいになりそうなので、ちょっと残念なところ」</a:t>
             </a:r>
             <a:endParaRPr lang="en-US" sz="900" dirty="0"/>
           </a:p>

--- a/納品レポート/ホテル別レポート/apa_kamata_口コミ分析レポート.pptx
+++ b/納品レポート/ホテル別レポート/apa_kamata_口コミ分析レポート.pptx
@@ -183,16 +183,16 @@
                     <c:v>Google</c:v>
                   </c:pt>
                   <c:pt idx="1">
+                    <c:v>Booking.com</c:v>
+                  </c:pt>
+                  <c:pt idx="2">
                     <c:v>じゃらん</c:v>
                   </c:pt>
-                  <c:pt idx="2">
-                    <c:v>Booking.com</c:v>
-                  </c:pt>
                   <c:pt idx="3">
-                    <c:v>Agoda</c:v>
+                    <c:v>楽天トラベル</c:v>
                   </c:pt>
                   <c:pt idx="4">
-                    <c:v>楽天トラベル</c:v>
+                    <c:v>Agoda</c:v>
                   </c:pt>
                 </c:lvl>
               </c:multiLvlStrCache>
@@ -208,16 +208,16 @@
                   <c:v>7.88</c:v>
                 </c:pt>
                 <c:pt idx="1">
+                  <c:v>7.6</c:v>
+                </c:pt>
+                <c:pt idx="2">
                   <c:v>7.5</c:v>
                 </c:pt>
-                <c:pt idx="2">
-                  <c:v>7.43</c:v>
-                </c:pt>
                 <c:pt idx="3">
-                  <c:v>7.08</c:v>
+                  <c:v>7</c:v>
                 </c:pt>
                 <c:pt idx="4">
-                  <c:v>7</c:v>
+                  <c:v>6.79</c:v>
                 </c:pt>
               </c:numCache>
             </c:numRef>
@@ -560,13 +560,13 @@
               <c:numCache>
                 <c:ptCount val="3"/>
                 <c:pt idx="0">
-                  <c:v>33</c:v>
+                  <c:v>35</c:v>
                 </c:pt>
                 <c:pt idx="1">
                   <c:v>13</c:v>
                 </c:pt>
                 <c:pt idx="2">
-                  <c:v>5</c:v>
+                  <c:v>6</c:v>
                 </c:pt>
               </c:numCache>
             </c:numRef>
@@ -762,11 +762,22 @@
               <a:effectLst/>
             </c:spPr>
           </c:dPt>
+          <c:dPt>
+            <c:idx val="8"/>
+            <c:invertIfNegative val="0"/>
+            <c:bubble3D val="0"/>
+            <c:spPr>
+              <a:solidFill>
+                <a:srgbClr val="DC2626"/>
+              </a:solidFill>
+              <a:effectLst/>
+            </c:spPr>
+          </c:dPt>
           <c:cat>
             <c:multiLvlStrRef>
-              <c:f>Sheet1!$A$2:$A$9</c:f>
+              <c:f>Sheet1!$A$2:$A$10</c:f>
               <c:multiLvlStrCache>
-                <c:ptCount val="8"/>
+                <c:ptCount val="9"/>
                 <c:lvl>
                   <c:pt idx="0">
                     <c:v>10点</c:v>
@@ -790,6 +801,9 @@
                     <c:v>4点</c:v>
                   </c:pt>
                   <c:pt idx="7">
+                    <c:v>3点</c:v>
+                  </c:pt>
+                  <c:pt idx="8">
                     <c:v>2点</c:v>
                   </c:pt>
                 </c:lvl>
@@ -798,18 +812,18 @@
           </c:cat>
           <c:val>
             <c:numRef>
-              <c:f>Sheet1!$B$2:$B$9</c:f>
+              <c:f>Sheet1!$B$2:$B$10</c:f>
               <c:numCache>
                 <c:formatCode>General</c:formatCode>
-                <c:ptCount val="8"/>
+                <c:ptCount val="9"/>
                 <c:pt idx="0">
-                  <c:v>7</c:v>
+                  <c:v>8</c:v>
                 </c:pt>
                 <c:pt idx="1">
                   <c:v>3</c:v>
                 </c:pt>
                 <c:pt idx="2">
-                  <c:v>23</c:v>
+                  <c:v>24</c:v>
                 </c:pt>
                 <c:pt idx="3">
                   <c:v>4</c:v>
@@ -824,6 +838,9 @@
                   <c:v>4</c:v>
                 </c:pt>
                 <c:pt idx="7">
+                  <c:v>1</c:v>
+                </c:pt>
+                <c:pt idx="8">
                   <c:v>1</c:v>
                 </c:pt>
               </c:numCache>
@@ -2775,7 +2792,7 @@
                 <a:ea typeface="Arial" pitchFamily="34" charset="-122"/>
                 <a:cs typeface="Arial" pitchFamily="34" charset="-120"/>
               </a:rPr>
-              <a:t>レビュー総数：51件（5サイト）</a:t>
+              <a:t>レビュー総数：54件（5サイト）</a:t>
             </a:r>
             <a:endParaRPr lang="en-US" sz="1000" dirty="0"/>
           </a:p>
@@ -2795,7 +2812,7 @@
                 <a:ea typeface="Arial" pitchFamily="34" charset="-122"/>
                 <a:cs typeface="Arial" pitchFamily="34" charset="-120"/>
               </a:rPr>
-              <a:t>作成日：2026年3月21日</a:t>
+              <a:t>作成日：2026年3月23日</a:t>
             </a:r>
             <a:endParaRPr lang="en-US" sz="1000" dirty="0"/>
           </a:p>
@@ -3341,7 +3358,7 @@
                           <a:ea typeface="Arial" pitchFamily="34" charset="-122"/>
                           <a:cs typeface="Arial" pitchFamily="34" charset="-120"/>
                         </a:rPr>
-                        <a:t>7.45点</a:t>
+                        <a:t>7.43点</a:t>
                       </a:r>
                       <a:endParaRPr lang="en-US" sz="1000" dirty="0">
                         <a:latin typeface="Arial" charset="0"/>
@@ -3409,7 +3426,7 @@
                           <a:ea typeface="Arial" pitchFamily="34" charset="-122"/>
                           <a:cs typeface="Arial" pitchFamily="34" charset="-120"/>
                         </a:rPr>
-                        <a:t>8.0点以上</a:t>
+                        <a:t>7.9点以上</a:t>
                       </a:r>
                       <a:endParaRPr lang="en-US" sz="1000" dirty="0">
                         <a:latin typeface="Arial" charset="0"/>
@@ -3615,7 +3632,7 @@
                           <a:ea typeface="Arial" pitchFamily="34" charset="-122"/>
                           <a:cs typeface="Arial" pitchFamily="34" charset="-120"/>
                         </a:rPr>
-                        <a:t>64.7%</a:t>
+                        <a:t>64.8%</a:t>
                       </a:r>
                       <a:endParaRPr lang="en-US" sz="1000" dirty="0">
                         <a:latin typeface="Arial" charset="0"/>
@@ -3889,7 +3906,7 @@
                           <a:ea typeface="Arial" pitchFamily="34" charset="-122"/>
                           <a:cs typeface="Arial" pitchFamily="34" charset="-120"/>
                         </a:rPr>
-                        <a:t>9.8%</a:t>
+                        <a:t>11.1%</a:t>
                       </a:r>
                       <a:endParaRPr lang="en-US" sz="1000" dirty="0">
                         <a:latin typeface="Arial" charset="0"/>
@@ -3957,7 +3974,7 @@
                           <a:ea typeface="Arial" pitchFamily="34" charset="-122"/>
                           <a:cs typeface="Arial" pitchFamily="34" charset="-120"/>
                         </a:rPr>
-                        <a:t>7%以下</a:t>
+                        <a:t>6%以下</a:t>
                       </a:r>
                       <a:endParaRPr lang="en-US" sz="1000" dirty="0">
                         <a:latin typeface="Arial" charset="0"/>
@@ -4095,6 +4112,280 @@
                           <a:ea typeface="Arial" pitchFamily="34" charset="-122"/>
                           <a:cs typeface="Arial" pitchFamily="34" charset="-120"/>
                         </a:rPr>
+                        <a:t>Agoda平均評価</a:t>
+                      </a:r>
+                      <a:endParaRPr lang="en-US" sz="1000" dirty="0">
+                        <a:latin typeface="Arial" charset="0"/>
+                        <a:ea typeface="Arial" charset="0"/>
+                        <a:cs typeface="Arial" charset="0"/>
+                      </a:endParaRPr>
+                    </a:p>
+                  </a:txBody>
+                  <a:tcPr marL="91440" marR="91440" marT="45720" marB="45720">
+                    <a:lnL w="6350" cap="flat" cmpd="sng" algn="ctr">
+                      <a:solidFill>
+                        <a:srgbClr val="CBD5E1"/>
+                      </a:solidFill>
+                      <a:prstDash val="solid"/>
+                      <a:round/>
+                      <a:headEnd type="none" w="med" len="med"/>
+                      <a:tailEnd type="none" w="med" len="med"/>
+                    </a:lnL>
+                    <a:lnR w="6350" cap="flat" cmpd="sng" algn="ctr">
+                      <a:solidFill>
+                        <a:srgbClr val="CBD5E1"/>
+                      </a:solidFill>
+                      <a:prstDash val="solid"/>
+                      <a:round/>
+                      <a:headEnd type="none" w="med" len="med"/>
+                      <a:tailEnd type="none" w="med" len="med"/>
+                    </a:lnR>
+                    <a:lnT w="6350" cap="flat" cmpd="sng" algn="ctr">
+                      <a:solidFill>
+                        <a:srgbClr val="CBD5E1"/>
+                      </a:solidFill>
+                      <a:prstDash val="solid"/>
+                      <a:round/>
+                      <a:headEnd type="none" w="med" len="med"/>
+                      <a:tailEnd type="none" w="med" len="med"/>
+                    </a:lnT>
+                    <a:lnB w="6350" cap="flat" cmpd="sng" algn="ctr">
+                      <a:solidFill>
+                        <a:srgbClr val="CBD5E1"/>
+                      </a:solidFill>
+                      <a:prstDash val="solid"/>
+                      <a:round/>
+                      <a:headEnd type="none" w="med" len="med"/>
+                      <a:tailEnd type="none" w="med" len="med"/>
+                    </a:lnB>
+                    <a:solidFill>
+                      <a:srgbClr val="FFFFFF"/>
+                    </a:solidFill>
+                  </a:tcPr>
+                </a:tc>
+                <a:tc>
+                  <a:txBody>
+                    <a:bodyPr/>
+                    <a:lstStyle/>
+                    <a:p>
+                      <a:pPr algn="ctr" indent="0" marL="0">
+                        <a:buNone/>
+                      </a:pPr>
+                      <a:r>
+                        <a:rPr lang="en-US" sz="1000" dirty="0">
+                          <a:solidFill>
+                            <a:srgbClr val="64748B"/>
+                          </a:solidFill>
+                          <a:latin typeface="Arial" pitchFamily="34" charset="0"/>
+                          <a:ea typeface="Arial" pitchFamily="34" charset="-122"/>
+                          <a:cs typeface="Arial" pitchFamily="34" charset="-120"/>
+                        </a:rPr>
+                        <a:t>6.8点</a:t>
+                      </a:r>
+                      <a:endParaRPr lang="en-US" sz="1000" dirty="0">
+                        <a:latin typeface="Arial" charset="0"/>
+                        <a:ea typeface="Arial" charset="0"/>
+                        <a:cs typeface="Arial" charset="0"/>
+                      </a:endParaRPr>
+                    </a:p>
+                  </a:txBody>
+                  <a:tcPr marL="91440" marR="91440" marT="45720" marB="45720">
+                    <a:lnL w="6350" cap="flat" cmpd="sng" algn="ctr">
+                      <a:solidFill>
+                        <a:srgbClr val="CBD5E1"/>
+                      </a:solidFill>
+                      <a:prstDash val="solid"/>
+                      <a:round/>
+                      <a:headEnd type="none" w="med" len="med"/>
+                      <a:tailEnd type="none" w="med" len="med"/>
+                    </a:lnL>
+                    <a:lnR w="6350" cap="flat" cmpd="sng" algn="ctr">
+                      <a:solidFill>
+                        <a:srgbClr val="CBD5E1"/>
+                      </a:solidFill>
+                      <a:prstDash val="solid"/>
+                      <a:round/>
+                      <a:headEnd type="none" w="med" len="med"/>
+                      <a:tailEnd type="none" w="med" len="med"/>
+                    </a:lnR>
+                    <a:lnT w="6350" cap="flat" cmpd="sng" algn="ctr">
+                      <a:solidFill>
+                        <a:srgbClr val="CBD5E1"/>
+                      </a:solidFill>
+                      <a:prstDash val="solid"/>
+                      <a:round/>
+                      <a:headEnd type="none" w="med" len="med"/>
+                      <a:tailEnd type="none" w="med" len="med"/>
+                    </a:lnT>
+                    <a:lnB w="6350" cap="flat" cmpd="sng" algn="ctr">
+                      <a:solidFill>
+                        <a:srgbClr val="CBD5E1"/>
+                      </a:solidFill>
+                      <a:prstDash val="solid"/>
+                      <a:round/>
+                      <a:headEnd type="none" w="med" len="med"/>
+                      <a:tailEnd type="none" w="med" len="med"/>
+                    </a:lnB>
+                    <a:solidFill>
+                      <a:srgbClr val="FFFFFF"/>
+                    </a:solidFill>
+                  </a:tcPr>
+                </a:tc>
+                <a:tc>
+                  <a:txBody>
+                    <a:bodyPr/>
+                    <a:lstStyle/>
+                    <a:p>
+                      <a:pPr algn="ctr" indent="0" marL="0">
+                        <a:buNone/>
+                      </a:pPr>
+                      <a:r>
+                        <a:rPr lang="en-US" sz="1000" b="1" dirty="0">
+                          <a:solidFill>
+                            <a:srgbClr val="16A34A"/>
+                          </a:solidFill>
+                          <a:latin typeface="Arial" pitchFamily="34" charset="0"/>
+                          <a:ea typeface="Arial" pitchFamily="34" charset="-122"/>
+                          <a:cs typeface="Arial" pitchFamily="34" charset="-120"/>
+                        </a:rPr>
+                        <a:t>7.8点以上</a:t>
+                      </a:r>
+                      <a:endParaRPr lang="en-US" sz="1000" dirty="0">
+                        <a:latin typeface="Arial" charset="0"/>
+                        <a:ea typeface="Arial" charset="0"/>
+                        <a:cs typeface="Arial" charset="0"/>
+                      </a:endParaRPr>
+                    </a:p>
+                  </a:txBody>
+                  <a:tcPr marL="91440" marR="91440" marT="45720" marB="45720">
+                    <a:lnL w="6350" cap="flat" cmpd="sng" algn="ctr">
+                      <a:solidFill>
+                        <a:srgbClr val="CBD5E1"/>
+                      </a:solidFill>
+                      <a:prstDash val="solid"/>
+                      <a:round/>
+                      <a:headEnd type="none" w="med" len="med"/>
+                      <a:tailEnd type="none" w="med" len="med"/>
+                    </a:lnL>
+                    <a:lnR w="6350" cap="flat" cmpd="sng" algn="ctr">
+                      <a:solidFill>
+                        <a:srgbClr val="CBD5E1"/>
+                      </a:solidFill>
+                      <a:prstDash val="solid"/>
+                      <a:round/>
+                      <a:headEnd type="none" w="med" len="med"/>
+                      <a:tailEnd type="none" w="med" len="med"/>
+                    </a:lnR>
+                    <a:lnT w="6350" cap="flat" cmpd="sng" algn="ctr">
+                      <a:solidFill>
+                        <a:srgbClr val="CBD5E1"/>
+                      </a:solidFill>
+                      <a:prstDash val="solid"/>
+                      <a:round/>
+                      <a:headEnd type="none" w="med" len="med"/>
+                      <a:tailEnd type="none" w="med" len="med"/>
+                    </a:lnT>
+                    <a:lnB w="6350" cap="flat" cmpd="sng" algn="ctr">
+                      <a:solidFill>
+                        <a:srgbClr val="CBD5E1"/>
+                      </a:solidFill>
+                      <a:prstDash val="solid"/>
+                      <a:round/>
+                      <a:headEnd type="none" w="med" len="med"/>
+                      <a:tailEnd type="none" w="med" len="med"/>
+                    </a:lnB>
+                    <a:solidFill>
+                      <a:srgbClr val="FFFFFF"/>
+                    </a:solidFill>
+                  </a:tcPr>
+                </a:tc>
+                <a:tc>
+                  <a:txBody>
+                    <a:bodyPr/>
+                    <a:lstStyle/>
+                    <a:p>
+                      <a:pPr algn="ctr" indent="0" marL="0">
+                        <a:buNone/>
+                      </a:pPr>
+                      <a:r>
+                        <a:rPr lang="en-US" sz="1000" dirty="0">
+                          <a:solidFill>
+                            <a:srgbClr val="64748B"/>
+                          </a:solidFill>
+                          <a:latin typeface="Arial" pitchFamily="34" charset="0"/>
+                          <a:ea typeface="Arial" pitchFamily="34" charset="-122"/>
+                          <a:cs typeface="Arial" pitchFamily="34" charset="-120"/>
+                        </a:rPr>
+                        <a:t>2026年9月</a:t>
+                      </a:r>
+                      <a:endParaRPr lang="en-US" sz="1000" dirty="0">
+                        <a:latin typeface="Arial" charset="0"/>
+                        <a:ea typeface="Arial" charset="0"/>
+                        <a:cs typeface="Arial" charset="0"/>
+                      </a:endParaRPr>
+                    </a:p>
+                  </a:txBody>
+                  <a:tcPr marL="91440" marR="91440" marT="45720" marB="45720">
+                    <a:lnL w="6350" cap="flat" cmpd="sng" algn="ctr">
+                      <a:solidFill>
+                        <a:srgbClr val="CBD5E1"/>
+                      </a:solidFill>
+                      <a:prstDash val="solid"/>
+                      <a:round/>
+                      <a:headEnd type="none" w="med" len="med"/>
+                      <a:tailEnd type="none" w="med" len="med"/>
+                    </a:lnL>
+                    <a:lnR w="6350" cap="flat" cmpd="sng" algn="ctr">
+                      <a:solidFill>
+                        <a:srgbClr val="CBD5E1"/>
+                      </a:solidFill>
+                      <a:prstDash val="solid"/>
+                      <a:round/>
+                      <a:headEnd type="none" w="med" len="med"/>
+                      <a:tailEnd type="none" w="med" len="med"/>
+                    </a:lnR>
+                    <a:lnT w="6350" cap="flat" cmpd="sng" algn="ctr">
+                      <a:solidFill>
+                        <a:srgbClr val="CBD5E1"/>
+                      </a:solidFill>
+                      <a:prstDash val="solid"/>
+                      <a:round/>
+                      <a:headEnd type="none" w="med" len="med"/>
+                      <a:tailEnd type="none" w="med" len="med"/>
+                    </a:lnT>
+                    <a:lnB w="6350" cap="flat" cmpd="sng" algn="ctr">
+                      <a:solidFill>
+                        <a:srgbClr val="CBD5E1"/>
+                      </a:solidFill>
+                      <a:prstDash val="solid"/>
+                      <a:round/>
+                      <a:headEnd type="none" w="med" len="med"/>
+                      <a:tailEnd type="none" w="med" len="med"/>
+                    </a:lnB>
+                    <a:solidFill>
+                      <a:srgbClr val="FFFFFF"/>
+                    </a:solidFill>
+                  </a:tcPr>
+                </a:tc>
+              </a:tr>
+              <a:tr h="320040">
+                <a:tc>
+                  <a:txBody>
+                    <a:bodyPr/>
+                    <a:lstStyle/>
+                    <a:p>
+                      <a:pPr indent="0" marL="0">
+                        <a:buNone/>
+                      </a:pPr>
+                      <a:r>
+                        <a:rPr lang="en-US" sz="1000" b="1" dirty="0">
+                          <a:solidFill>
+                            <a:srgbClr val="334155"/>
+                          </a:solidFill>
+                          <a:latin typeface="Arial" pitchFamily="34" charset="0"/>
+                          <a:ea typeface="Arial" pitchFamily="34" charset="-122"/>
+                          <a:cs typeface="Arial" pitchFamily="34" charset="-120"/>
+                        </a:rPr>
                         <a:t>口コミ返信率</a:t>
                       </a:r>
                       <a:endParaRPr lang="en-US" sz="1000" dirty="0">
@@ -4142,7 +4433,7 @@
                       <a:tailEnd type="none" w="med" len="med"/>
                     </a:lnB>
                     <a:solidFill>
-                      <a:srgbClr val="FFFFFF"/>
+                      <a:srgbClr val="E8EFF8"/>
                     </a:solidFill>
                   </a:tcPr>
                 </a:tc>
@@ -4210,7 +4501,7 @@
                       <a:tailEnd type="none" w="med" len="med"/>
                     </a:lnB>
                     <a:solidFill>
-                      <a:srgbClr val="FFFFFF"/>
+                      <a:srgbClr val="E8EFF8"/>
                     </a:solidFill>
                   </a:tcPr>
                 </a:tc>
@@ -4278,7 +4569,7 @@
                       <a:tailEnd type="none" w="med" len="med"/>
                     </a:lnB>
                     <a:solidFill>
-                      <a:srgbClr val="FFFFFF"/>
+                      <a:srgbClr val="E8EFF8"/>
                     </a:solidFill>
                   </a:tcPr>
                 </a:tc>
@@ -4346,7 +4637,7 @@
                       <a:tailEnd type="none" w="med" len="med"/>
                     </a:lnB>
                     <a:solidFill>
-                      <a:srgbClr val="FFFFFF"/>
+                      <a:srgbClr val="E8EFF8"/>
                     </a:solidFill>
                   </a:tcPr>
                 </a:tc>
@@ -4416,7 +4707,7 @@
                       <a:tailEnd type="none" w="med" len="med"/>
                     </a:lnB>
                     <a:solidFill>
-                      <a:srgbClr val="E8EFF8"/>
+                      <a:srgbClr val="FFFFFF"/>
                     </a:solidFill>
                   </a:tcPr>
                 </a:tc>
@@ -4484,7 +4775,7 @@
                       <a:tailEnd type="none" w="med" len="med"/>
                     </a:lnB>
                     <a:solidFill>
-                      <a:srgbClr val="E8EFF8"/>
+                      <a:srgbClr val="FFFFFF"/>
                     </a:solidFill>
                   </a:tcPr>
                 </a:tc>
@@ -4552,7 +4843,7 @@
                       <a:tailEnd type="none" w="med" len="med"/>
                     </a:lnB>
                     <a:solidFill>
-                      <a:srgbClr val="E8EFF8"/>
+                      <a:srgbClr val="FFFFFF"/>
                     </a:solidFill>
                   </a:tcPr>
                 </a:tc>
@@ -4620,7 +4911,7 @@
                       <a:tailEnd type="none" w="med" len="med"/>
                     </a:lnB>
                     <a:solidFill>
-                      <a:srgbClr val="E8EFF8"/>
+                      <a:srgbClr val="FFFFFF"/>
                     </a:solidFill>
                   </a:tcPr>
                 </a:tc>
@@ -4637,7 +4928,7 @@
         </p:nvSpPr>
         <p:spPr>
           <a:xfrm>
-            <a:off x="457200" y="3108960"/>
+            <a:off x="457200" y="3429000"/>
             <a:ext cx="8229600" cy="640080"/>
           </a:xfrm>
           <a:prstGeom prst="rect">
@@ -4664,7 +4955,7 @@
         </p:nvSpPr>
         <p:spPr>
           <a:xfrm>
-            <a:off x="457200" y="3108960"/>
+            <a:off x="457200" y="3429000"/>
             <a:ext cx="54864" cy="640080"/>
           </a:xfrm>
           <a:prstGeom prst="rect">
@@ -4684,7 +4975,7 @@
         </p:nvSpPr>
         <p:spPr>
           <a:xfrm>
-            <a:off x="640080" y="3108960"/>
+            <a:off x="640080" y="3429000"/>
             <a:ext cx="7863840" cy="640080"/>
           </a:xfrm>
           <a:prstGeom prst="rect">
@@ -5076,7 +5367,7 @@
                 <a:ea typeface="Arial" pitchFamily="34" charset="-122"/>
                 <a:cs typeface="Arial" pitchFamily="34" charset="-120"/>
               </a:rPr>
-              <a:t>7.45</a:t>
+              <a:t>7.43</a:t>
             </a:r>
             <a:endParaRPr lang="en-US" sz="3200" dirty="0"/>
           </a:p>
@@ -5201,7 +5492,7 @@
                 <a:ea typeface="Arial" pitchFamily="34" charset="-122"/>
                 <a:cs typeface="Arial" pitchFamily="34" charset="-120"/>
               </a:rPr>
-              <a:t>64.7%</a:t>
+              <a:t>64.8%</a:t>
             </a:r>
             <a:endParaRPr lang="en-US" sz="3200" dirty="0"/>
           </a:p>
@@ -5326,7 +5617,7 @@
                 <a:ea typeface="Arial" pitchFamily="34" charset="-122"/>
                 <a:cs typeface="Arial" pitchFamily="34" charset="-120"/>
               </a:rPr>
-              <a:t>9.8%</a:t>
+              <a:t>11.1%</a:t>
             </a:r>
             <a:endParaRPr lang="en-US" sz="3200" dirty="0"/>
           </a:p>
@@ -5451,7 +5742,7 @@
                 <a:ea typeface="Arial" pitchFamily="34" charset="-122"/>
                 <a:cs typeface="Arial" pitchFamily="34" charset="-120"/>
               </a:rPr>
-              <a:t>51件</a:t>
+              <a:t>54件</a:t>
             </a:r>
             <a:endParaRPr lang="en-US" sz="3200" dirty="0"/>
           </a:p>
@@ -6260,7 +6551,7 @@
                 <a:ea typeface="Arial" pitchFamily="34" charset="-122"/>
                 <a:cs typeface="Arial" pitchFamily="34" charset="-120"/>
               </a:rPr>
-              <a:t>7.45</a:t>
+              <a:t>7.43</a:t>
             </a:r>
             <a:endParaRPr lang="en-US" sz="3200" dirty="0"/>
           </a:p>
@@ -6385,7 +6676,7 @@
                 <a:ea typeface="Arial" pitchFamily="34" charset="-122"/>
                 <a:cs typeface="Arial" pitchFamily="34" charset="-120"/>
               </a:rPr>
-              <a:t>64.7%</a:t>
+              <a:t>64.8%</a:t>
             </a:r>
             <a:endParaRPr lang="en-US" sz="3200" dirty="0"/>
           </a:p>
@@ -6510,7 +6801,7 @@
                 <a:ea typeface="Arial" pitchFamily="34" charset="-122"/>
                 <a:cs typeface="Arial" pitchFamily="34" charset="-120"/>
               </a:rPr>
-              <a:t>9.8%</a:t>
+              <a:t>11.1%</a:t>
             </a:r>
             <a:endParaRPr lang="en-US" sz="3200" dirty="0"/>
           </a:p>
@@ -6635,7 +6926,7 @@
                 <a:ea typeface="Arial" pitchFamily="34" charset="-122"/>
                 <a:cs typeface="Arial" pitchFamily="34" charset="-120"/>
               </a:rPr>
-              <a:t>51件</a:t>
+              <a:t>54件</a:t>
             </a:r>
             <a:endParaRPr lang="en-US" sz="3200" dirty="0"/>
           </a:p>
@@ -7057,6 +7348,55 @@
                 <a:cs typeface="Arial" pitchFamily="34" charset="-120"/>
               </a:rPr>
               <a:t>Google(7.88)が最高スコア。</a:t>
+            </a:r>
+            <a:endParaRPr lang="en-US" sz="1100" dirty="0"/>
+          </a:p>
+          <a:p>
+            <a:pPr indent="0" marL="0">
+              <a:spcAft>
+                <a:spcPts val="200"/>
+              </a:spcAft>
+              <a:buNone/>
+            </a:pPr>
+            <a:endParaRPr lang="en-US" sz="1100" dirty="0"/>
+          </a:p>
+          <a:p>
+            <a:pPr indent="0" marL="0">
+              <a:spcAft>
+                <a:spcPts val="200"/>
+              </a:spcAft>
+              <a:buNone/>
+            </a:pPr>
+            <a:r>
+              <a:rPr lang="en-US" sz="1100" b="1" dirty="0">
+                <a:solidFill>
+                  <a:srgbClr val="DC2626"/>
+                </a:solidFill>
+                <a:latin typeface="Arial" pitchFamily="34" charset="0"/>
+                <a:ea typeface="Arial" pitchFamily="34" charset="-122"/>
+                <a:cs typeface="Arial" pitchFamily="34" charset="-120"/>
+              </a:rPr>
+              <a:t>改善対象サイト</a:t>
+            </a:r>
+            <a:endParaRPr lang="en-US" sz="1100" dirty="0"/>
+          </a:p>
+          <a:p>
+            <a:pPr indent="0" marL="0">
+              <a:spcAft>
+                <a:spcPts val="200"/>
+              </a:spcAft>
+              <a:buNone/>
+            </a:pPr>
+            <a:r>
+              <a:rPr lang="en-US" sz="900" dirty="0">
+                <a:solidFill>
+                  <a:srgbClr val="64748B"/>
+                </a:solidFill>
+                <a:latin typeface="Arial" pitchFamily="34" charset="0"/>
+                <a:ea typeface="Arial" pitchFamily="34" charset="-122"/>
+                <a:cs typeface="Arial" pitchFamily="34" charset="-120"/>
+              </a:rPr>
+              <a:t>Agoda(6.8)が相対的に低い。口コミ返信の強化が急務</a:t>
             </a:r>
             <a:endParaRPr lang="en-US" sz="1100" dirty="0"/>
           </a:p>
@@ -7565,7 +7905,7 @@
                           <a:ea typeface="Arial" pitchFamily="34" charset="-122"/>
                           <a:cs typeface="Arial" pitchFamily="34" charset="-120"/>
                         </a:rPr>
-                        <a:t>16</a:t>
+                        <a:t>17</a:t>
                       </a:r>
                       <a:endParaRPr lang="en-US" sz="900" dirty="0">
                         <a:latin typeface="Arial" charset="0"/>
@@ -7839,7 +8179,691 @@
                           <a:ea typeface="Arial" pitchFamily="34" charset="-122"/>
                           <a:cs typeface="Arial" pitchFamily="34" charset="-120"/>
                         </a:rPr>
+                        <a:t>Booking.com</a:t>
+                      </a:r>
+                      <a:endParaRPr lang="en-US" sz="900" dirty="0">
+                        <a:latin typeface="Arial" charset="0"/>
+                        <a:ea typeface="Arial" charset="0"/>
+                        <a:cs typeface="Arial" charset="0"/>
+                      </a:endParaRPr>
+                    </a:p>
+                  </a:txBody>
+                  <a:tcPr marL="91440" marR="91440" marT="45720" marB="45720">
+                    <a:lnL w="6350" cap="flat" cmpd="sng" algn="ctr">
+                      <a:solidFill>
+                        <a:srgbClr val="CBD5E1"/>
+                      </a:solidFill>
+                      <a:prstDash val="solid"/>
+                      <a:round/>
+                      <a:headEnd type="none" w="med" len="med"/>
+                      <a:tailEnd type="none" w="med" len="med"/>
+                    </a:lnL>
+                    <a:lnR w="6350" cap="flat" cmpd="sng" algn="ctr">
+                      <a:solidFill>
+                        <a:srgbClr val="CBD5E1"/>
+                      </a:solidFill>
+                      <a:prstDash val="solid"/>
+                      <a:round/>
+                      <a:headEnd type="none" w="med" len="med"/>
+                      <a:tailEnd type="none" w="med" len="med"/>
+                    </a:lnR>
+                    <a:lnT w="6350" cap="flat" cmpd="sng" algn="ctr">
+                      <a:solidFill>
+                        <a:srgbClr val="CBD5E1"/>
+                      </a:solidFill>
+                      <a:prstDash val="solid"/>
+                      <a:round/>
+                      <a:headEnd type="none" w="med" len="med"/>
+                      <a:tailEnd type="none" w="med" len="med"/>
+                    </a:lnT>
+                    <a:lnB w="6350" cap="flat" cmpd="sng" algn="ctr">
+                      <a:solidFill>
+                        <a:srgbClr val="CBD5E1"/>
+                      </a:solidFill>
+                      <a:prstDash val="solid"/>
+                      <a:round/>
+                      <a:headEnd type="none" w="med" len="med"/>
+                      <a:tailEnd type="none" w="med" len="med"/>
+                    </a:lnB>
+                    <a:solidFill>
+                      <a:srgbClr val="FFFFFF"/>
+                    </a:solidFill>
+                  </a:tcPr>
+                </a:tc>
+                <a:tc>
+                  <a:txBody>
+                    <a:bodyPr/>
+                    <a:lstStyle/>
+                    <a:p>
+                      <a:pPr algn="ctr" indent="0" marL="0">
+                        <a:buNone/>
+                      </a:pPr>
+                      <a:r>
+                        <a:rPr lang="en-US" sz="900" dirty="0">
+                          <a:solidFill>
+                            <a:srgbClr val="000000"/>
+                          </a:solidFill>
+                          <a:latin typeface="Arial" pitchFamily="34" charset="0"/>
+                          <a:ea typeface="Arial" pitchFamily="34" charset="-122"/>
+                          <a:cs typeface="Arial" pitchFamily="34" charset="-120"/>
+                        </a:rPr>
+                        <a:t>15</a:t>
+                      </a:r>
+                      <a:endParaRPr lang="en-US" sz="900" dirty="0">
+                        <a:latin typeface="Arial" charset="0"/>
+                        <a:ea typeface="Arial" charset="0"/>
+                        <a:cs typeface="Arial" charset="0"/>
+                      </a:endParaRPr>
+                    </a:p>
+                  </a:txBody>
+                  <a:tcPr marL="91440" marR="91440" marT="45720" marB="45720">
+                    <a:lnL w="6350" cap="flat" cmpd="sng" algn="ctr">
+                      <a:solidFill>
+                        <a:srgbClr val="CBD5E1"/>
+                      </a:solidFill>
+                      <a:prstDash val="solid"/>
+                      <a:round/>
+                      <a:headEnd type="none" w="med" len="med"/>
+                      <a:tailEnd type="none" w="med" len="med"/>
+                    </a:lnL>
+                    <a:lnR w="6350" cap="flat" cmpd="sng" algn="ctr">
+                      <a:solidFill>
+                        <a:srgbClr val="CBD5E1"/>
+                      </a:solidFill>
+                      <a:prstDash val="solid"/>
+                      <a:round/>
+                      <a:headEnd type="none" w="med" len="med"/>
+                      <a:tailEnd type="none" w="med" len="med"/>
+                    </a:lnR>
+                    <a:lnT w="6350" cap="flat" cmpd="sng" algn="ctr">
+                      <a:solidFill>
+                        <a:srgbClr val="CBD5E1"/>
+                      </a:solidFill>
+                      <a:prstDash val="solid"/>
+                      <a:round/>
+                      <a:headEnd type="none" w="med" len="med"/>
+                      <a:tailEnd type="none" w="med" len="med"/>
+                    </a:lnT>
+                    <a:lnB w="6350" cap="flat" cmpd="sng" algn="ctr">
+                      <a:solidFill>
+                        <a:srgbClr val="CBD5E1"/>
+                      </a:solidFill>
+                      <a:prstDash val="solid"/>
+                      <a:round/>
+                      <a:headEnd type="none" w="med" len="med"/>
+                      <a:tailEnd type="none" w="med" len="med"/>
+                    </a:lnB>
+                    <a:solidFill>
+                      <a:srgbClr val="FFFFFF"/>
+                    </a:solidFill>
+                  </a:tcPr>
+                </a:tc>
+                <a:tc>
+                  <a:txBody>
+                    <a:bodyPr/>
+                    <a:lstStyle/>
+                    <a:p>
+                      <a:pPr algn="ctr" indent="0" marL="0">
+                        <a:buNone/>
+                      </a:pPr>
+                      <a:r>
+                        <a:rPr lang="en-US" sz="900" dirty="0">
+                          <a:solidFill>
+                            <a:srgbClr val="000000"/>
+                          </a:solidFill>
+                          <a:latin typeface="Arial" pitchFamily="34" charset="0"/>
+                          <a:ea typeface="Arial" pitchFamily="34" charset="-122"/>
+                          <a:cs typeface="Arial" pitchFamily="34" charset="-120"/>
+                        </a:rPr>
+                        <a:t>7.6</a:t>
+                      </a:r>
+                      <a:endParaRPr lang="en-US" sz="900" dirty="0">
+                        <a:latin typeface="Arial" charset="0"/>
+                        <a:ea typeface="Arial" charset="0"/>
+                        <a:cs typeface="Arial" charset="0"/>
+                      </a:endParaRPr>
+                    </a:p>
+                  </a:txBody>
+                  <a:tcPr marL="91440" marR="91440" marT="45720" marB="45720">
+                    <a:lnL w="6350" cap="flat" cmpd="sng" algn="ctr">
+                      <a:solidFill>
+                        <a:srgbClr val="CBD5E1"/>
+                      </a:solidFill>
+                      <a:prstDash val="solid"/>
+                      <a:round/>
+                      <a:headEnd type="none" w="med" len="med"/>
+                      <a:tailEnd type="none" w="med" len="med"/>
+                    </a:lnL>
+                    <a:lnR w="6350" cap="flat" cmpd="sng" algn="ctr">
+                      <a:solidFill>
+                        <a:srgbClr val="CBD5E1"/>
+                      </a:solidFill>
+                      <a:prstDash val="solid"/>
+                      <a:round/>
+                      <a:headEnd type="none" w="med" len="med"/>
+                      <a:tailEnd type="none" w="med" len="med"/>
+                    </a:lnR>
+                    <a:lnT w="6350" cap="flat" cmpd="sng" algn="ctr">
+                      <a:solidFill>
+                        <a:srgbClr val="CBD5E1"/>
+                      </a:solidFill>
+                      <a:prstDash val="solid"/>
+                      <a:round/>
+                      <a:headEnd type="none" w="med" len="med"/>
+                      <a:tailEnd type="none" w="med" len="med"/>
+                    </a:lnT>
+                    <a:lnB w="6350" cap="flat" cmpd="sng" algn="ctr">
+                      <a:solidFill>
+                        <a:srgbClr val="CBD5E1"/>
+                      </a:solidFill>
+                      <a:prstDash val="solid"/>
+                      <a:round/>
+                      <a:headEnd type="none" w="med" len="med"/>
+                      <a:tailEnd type="none" w="med" len="med"/>
+                    </a:lnB>
+                    <a:solidFill>
+                      <a:srgbClr val="FFFFFF"/>
+                    </a:solidFill>
+                  </a:tcPr>
+                </a:tc>
+                <a:tc>
+                  <a:txBody>
+                    <a:bodyPr/>
+                    <a:lstStyle/>
+                    <a:p>
+                      <a:pPr algn="ctr" indent="0" marL="0">
+                        <a:buNone/>
+                      </a:pPr>
+                      <a:r>
+                        <a:rPr lang="en-US" sz="900" dirty="0">
+                          <a:solidFill>
+                            <a:srgbClr val="000000"/>
+                          </a:solidFill>
+                          <a:latin typeface="Arial" pitchFamily="34" charset="0"/>
+                          <a:ea typeface="Arial" pitchFamily="34" charset="-122"/>
+                          <a:cs typeface="Arial" pitchFamily="34" charset="-120"/>
+                        </a:rPr>
+                        <a:t>/10</a:t>
+                      </a:r>
+                      <a:endParaRPr lang="en-US" sz="900" dirty="0">
+                        <a:latin typeface="Arial" charset="0"/>
+                        <a:ea typeface="Arial" charset="0"/>
+                        <a:cs typeface="Arial" charset="0"/>
+                      </a:endParaRPr>
+                    </a:p>
+                  </a:txBody>
+                  <a:tcPr marL="91440" marR="91440" marT="45720" marB="45720">
+                    <a:lnL w="6350" cap="flat" cmpd="sng" algn="ctr">
+                      <a:solidFill>
+                        <a:srgbClr val="CBD5E1"/>
+                      </a:solidFill>
+                      <a:prstDash val="solid"/>
+                      <a:round/>
+                      <a:headEnd type="none" w="med" len="med"/>
+                      <a:tailEnd type="none" w="med" len="med"/>
+                    </a:lnL>
+                    <a:lnR w="6350" cap="flat" cmpd="sng" algn="ctr">
+                      <a:solidFill>
+                        <a:srgbClr val="CBD5E1"/>
+                      </a:solidFill>
+                      <a:prstDash val="solid"/>
+                      <a:round/>
+                      <a:headEnd type="none" w="med" len="med"/>
+                      <a:tailEnd type="none" w="med" len="med"/>
+                    </a:lnR>
+                    <a:lnT w="6350" cap="flat" cmpd="sng" algn="ctr">
+                      <a:solidFill>
+                        <a:srgbClr val="CBD5E1"/>
+                      </a:solidFill>
+                      <a:prstDash val="solid"/>
+                      <a:round/>
+                      <a:headEnd type="none" w="med" len="med"/>
+                      <a:tailEnd type="none" w="med" len="med"/>
+                    </a:lnT>
+                    <a:lnB w="6350" cap="flat" cmpd="sng" algn="ctr">
+                      <a:solidFill>
+                        <a:srgbClr val="CBD5E1"/>
+                      </a:solidFill>
+                      <a:prstDash val="solid"/>
+                      <a:round/>
+                      <a:headEnd type="none" w="med" len="med"/>
+                      <a:tailEnd type="none" w="med" len="med"/>
+                    </a:lnB>
+                    <a:solidFill>
+                      <a:srgbClr val="FFFFFF"/>
+                    </a:solidFill>
+                  </a:tcPr>
+                </a:tc>
+                <a:tc>
+                  <a:txBody>
+                    <a:bodyPr/>
+                    <a:lstStyle/>
+                    <a:p>
+                      <a:pPr algn="ctr" indent="0" marL="0">
+                        <a:buNone/>
+                      </a:pPr>
+                      <a:r>
+                        <a:rPr lang="en-US" sz="900" dirty="0">
+                          <a:solidFill>
+                            <a:srgbClr val="000000"/>
+                          </a:solidFill>
+                          <a:latin typeface="Arial" pitchFamily="34" charset="0"/>
+                          <a:ea typeface="Arial" pitchFamily="34" charset="-122"/>
+                          <a:cs typeface="Arial" pitchFamily="34" charset="-120"/>
+                        </a:rPr>
+                        <a:t>7.6</a:t>
+                      </a:r>
+                      <a:endParaRPr lang="en-US" sz="900" dirty="0">
+                        <a:latin typeface="Arial" charset="0"/>
+                        <a:ea typeface="Arial" charset="0"/>
+                        <a:cs typeface="Arial" charset="0"/>
+                      </a:endParaRPr>
+                    </a:p>
+                  </a:txBody>
+                  <a:tcPr marL="91440" marR="91440" marT="45720" marB="45720">
+                    <a:lnL w="6350" cap="flat" cmpd="sng" algn="ctr">
+                      <a:solidFill>
+                        <a:srgbClr val="CBD5E1"/>
+                      </a:solidFill>
+                      <a:prstDash val="solid"/>
+                      <a:round/>
+                      <a:headEnd type="none" w="med" len="med"/>
+                      <a:tailEnd type="none" w="med" len="med"/>
+                    </a:lnL>
+                    <a:lnR w="6350" cap="flat" cmpd="sng" algn="ctr">
+                      <a:solidFill>
+                        <a:srgbClr val="CBD5E1"/>
+                      </a:solidFill>
+                      <a:prstDash val="solid"/>
+                      <a:round/>
+                      <a:headEnd type="none" w="med" len="med"/>
+                      <a:tailEnd type="none" w="med" len="med"/>
+                    </a:lnR>
+                    <a:lnT w="6350" cap="flat" cmpd="sng" algn="ctr">
+                      <a:solidFill>
+                        <a:srgbClr val="CBD5E1"/>
+                      </a:solidFill>
+                      <a:prstDash val="solid"/>
+                      <a:round/>
+                      <a:headEnd type="none" w="med" len="med"/>
+                      <a:tailEnd type="none" w="med" len="med"/>
+                    </a:lnT>
+                    <a:lnB w="6350" cap="flat" cmpd="sng" algn="ctr">
+                      <a:solidFill>
+                        <a:srgbClr val="CBD5E1"/>
+                      </a:solidFill>
+                      <a:prstDash val="solid"/>
+                      <a:round/>
+                      <a:headEnd type="none" w="med" len="med"/>
+                      <a:tailEnd type="none" w="med" len="med"/>
+                    </a:lnB>
+                    <a:solidFill>
+                      <a:srgbClr val="FFFFFF"/>
+                    </a:solidFill>
+                  </a:tcPr>
+                </a:tc>
+              </a:tr>
+              <a:tr h="201168">
+                <a:tc>
+                  <a:txBody>
+                    <a:bodyPr/>
+                    <a:lstStyle/>
+                    <a:p>
+                      <a:pPr algn="ctr" indent="0" marL="0">
+                        <a:buNone/>
+                      </a:pPr>
+                      <a:r>
+                        <a:rPr lang="en-US" sz="900" dirty="0">
+                          <a:solidFill>
+                            <a:srgbClr val="000000"/>
+                          </a:solidFill>
+                          <a:latin typeface="Arial" pitchFamily="34" charset="0"/>
+                          <a:ea typeface="Arial" pitchFamily="34" charset="-122"/>
+                          <a:cs typeface="Arial" pitchFamily="34" charset="-120"/>
+                        </a:rPr>
                         <a:t>じゃらん</a:t>
+                      </a:r>
+                      <a:endParaRPr lang="en-US" sz="900" dirty="0">
+                        <a:latin typeface="Arial" charset="0"/>
+                        <a:ea typeface="Arial" charset="0"/>
+                        <a:cs typeface="Arial" charset="0"/>
+                      </a:endParaRPr>
+                    </a:p>
+                  </a:txBody>
+                  <a:tcPr marL="91440" marR="91440" marT="45720" marB="45720">
+                    <a:lnL w="6350" cap="flat" cmpd="sng" algn="ctr">
+                      <a:solidFill>
+                        <a:srgbClr val="CBD5E1"/>
+                      </a:solidFill>
+                      <a:prstDash val="solid"/>
+                      <a:round/>
+                      <a:headEnd type="none" w="med" len="med"/>
+                      <a:tailEnd type="none" w="med" len="med"/>
+                    </a:lnL>
+                    <a:lnR w="6350" cap="flat" cmpd="sng" algn="ctr">
+                      <a:solidFill>
+                        <a:srgbClr val="CBD5E1"/>
+                      </a:solidFill>
+                      <a:prstDash val="solid"/>
+                      <a:round/>
+                      <a:headEnd type="none" w="med" len="med"/>
+                      <a:tailEnd type="none" w="med" len="med"/>
+                    </a:lnR>
+                    <a:lnT w="6350" cap="flat" cmpd="sng" algn="ctr">
+                      <a:solidFill>
+                        <a:srgbClr val="CBD5E1"/>
+                      </a:solidFill>
+                      <a:prstDash val="solid"/>
+                      <a:round/>
+                      <a:headEnd type="none" w="med" len="med"/>
+                      <a:tailEnd type="none" w="med" len="med"/>
+                    </a:lnT>
+                    <a:lnB w="6350" cap="flat" cmpd="sng" algn="ctr">
+                      <a:solidFill>
+                        <a:srgbClr val="CBD5E1"/>
+                      </a:solidFill>
+                      <a:prstDash val="solid"/>
+                      <a:round/>
+                      <a:headEnd type="none" w="med" len="med"/>
+                      <a:tailEnd type="none" w="med" len="med"/>
+                    </a:lnB>
+                    <a:solidFill>
+                      <a:srgbClr val="E8EFF8"/>
+                    </a:solidFill>
+                  </a:tcPr>
+                </a:tc>
+                <a:tc>
+                  <a:txBody>
+                    <a:bodyPr/>
+                    <a:lstStyle/>
+                    <a:p>
+                      <a:pPr algn="ctr" indent="0" marL="0">
+                        <a:buNone/>
+                      </a:pPr>
+                      <a:r>
+                        <a:rPr lang="en-US" sz="900" dirty="0">
+                          <a:solidFill>
+                            <a:srgbClr val="000000"/>
+                          </a:solidFill>
+                          <a:latin typeface="Arial" pitchFamily="34" charset="0"/>
+                          <a:ea typeface="Arial" pitchFamily="34" charset="-122"/>
+                          <a:cs typeface="Arial" pitchFamily="34" charset="-120"/>
+                        </a:rPr>
+                        <a:t>4</a:t>
+                      </a:r>
+                      <a:endParaRPr lang="en-US" sz="900" dirty="0">
+                        <a:latin typeface="Arial" charset="0"/>
+                        <a:ea typeface="Arial" charset="0"/>
+                        <a:cs typeface="Arial" charset="0"/>
+                      </a:endParaRPr>
+                    </a:p>
+                  </a:txBody>
+                  <a:tcPr marL="91440" marR="91440" marT="45720" marB="45720">
+                    <a:lnL w="6350" cap="flat" cmpd="sng" algn="ctr">
+                      <a:solidFill>
+                        <a:srgbClr val="CBD5E1"/>
+                      </a:solidFill>
+                      <a:prstDash val="solid"/>
+                      <a:round/>
+                      <a:headEnd type="none" w="med" len="med"/>
+                      <a:tailEnd type="none" w="med" len="med"/>
+                    </a:lnL>
+                    <a:lnR w="6350" cap="flat" cmpd="sng" algn="ctr">
+                      <a:solidFill>
+                        <a:srgbClr val="CBD5E1"/>
+                      </a:solidFill>
+                      <a:prstDash val="solid"/>
+                      <a:round/>
+                      <a:headEnd type="none" w="med" len="med"/>
+                      <a:tailEnd type="none" w="med" len="med"/>
+                    </a:lnR>
+                    <a:lnT w="6350" cap="flat" cmpd="sng" algn="ctr">
+                      <a:solidFill>
+                        <a:srgbClr val="CBD5E1"/>
+                      </a:solidFill>
+                      <a:prstDash val="solid"/>
+                      <a:round/>
+                      <a:headEnd type="none" w="med" len="med"/>
+                      <a:tailEnd type="none" w="med" len="med"/>
+                    </a:lnT>
+                    <a:lnB w="6350" cap="flat" cmpd="sng" algn="ctr">
+                      <a:solidFill>
+                        <a:srgbClr val="CBD5E1"/>
+                      </a:solidFill>
+                      <a:prstDash val="solid"/>
+                      <a:round/>
+                      <a:headEnd type="none" w="med" len="med"/>
+                      <a:tailEnd type="none" w="med" len="med"/>
+                    </a:lnB>
+                    <a:solidFill>
+                      <a:srgbClr val="E8EFF8"/>
+                    </a:solidFill>
+                  </a:tcPr>
+                </a:tc>
+                <a:tc>
+                  <a:txBody>
+                    <a:bodyPr/>
+                    <a:lstStyle/>
+                    <a:p>
+                      <a:pPr algn="ctr" indent="0" marL="0">
+                        <a:buNone/>
+                      </a:pPr>
+                      <a:r>
+                        <a:rPr lang="en-US" sz="900" dirty="0">
+                          <a:solidFill>
+                            <a:srgbClr val="000000"/>
+                          </a:solidFill>
+                          <a:latin typeface="Arial" pitchFamily="34" charset="0"/>
+                          <a:ea typeface="Arial" pitchFamily="34" charset="-122"/>
+                          <a:cs typeface="Arial" pitchFamily="34" charset="-120"/>
+                        </a:rPr>
+                        <a:t>3.75</a:t>
+                      </a:r>
+                      <a:endParaRPr lang="en-US" sz="900" dirty="0">
+                        <a:latin typeface="Arial" charset="0"/>
+                        <a:ea typeface="Arial" charset="0"/>
+                        <a:cs typeface="Arial" charset="0"/>
+                      </a:endParaRPr>
+                    </a:p>
+                  </a:txBody>
+                  <a:tcPr marL="91440" marR="91440" marT="45720" marB="45720">
+                    <a:lnL w="6350" cap="flat" cmpd="sng" algn="ctr">
+                      <a:solidFill>
+                        <a:srgbClr val="CBD5E1"/>
+                      </a:solidFill>
+                      <a:prstDash val="solid"/>
+                      <a:round/>
+                      <a:headEnd type="none" w="med" len="med"/>
+                      <a:tailEnd type="none" w="med" len="med"/>
+                    </a:lnL>
+                    <a:lnR w="6350" cap="flat" cmpd="sng" algn="ctr">
+                      <a:solidFill>
+                        <a:srgbClr val="CBD5E1"/>
+                      </a:solidFill>
+                      <a:prstDash val="solid"/>
+                      <a:round/>
+                      <a:headEnd type="none" w="med" len="med"/>
+                      <a:tailEnd type="none" w="med" len="med"/>
+                    </a:lnR>
+                    <a:lnT w="6350" cap="flat" cmpd="sng" algn="ctr">
+                      <a:solidFill>
+                        <a:srgbClr val="CBD5E1"/>
+                      </a:solidFill>
+                      <a:prstDash val="solid"/>
+                      <a:round/>
+                      <a:headEnd type="none" w="med" len="med"/>
+                      <a:tailEnd type="none" w="med" len="med"/>
+                    </a:lnT>
+                    <a:lnB w="6350" cap="flat" cmpd="sng" algn="ctr">
+                      <a:solidFill>
+                        <a:srgbClr val="CBD5E1"/>
+                      </a:solidFill>
+                      <a:prstDash val="solid"/>
+                      <a:round/>
+                      <a:headEnd type="none" w="med" len="med"/>
+                      <a:tailEnd type="none" w="med" len="med"/>
+                    </a:lnB>
+                    <a:solidFill>
+                      <a:srgbClr val="E8EFF8"/>
+                    </a:solidFill>
+                  </a:tcPr>
+                </a:tc>
+                <a:tc>
+                  <a:txBody>
+                    <a:bodyPr/>
+                    <a:lstStyle/>
+                    <a:p>
+                      <a:pPr algn="ctr" indent="0" marL="0">
+                        <a:buNone/>
+                      </a:pPr>
+                      <a:r>
+                        <a:rPr lang="en-US" sz="900" dirty="0">
+                          <a:solidFill>
+                            <a:srgbClr val="000000"/>
+                          </a:solidFill>
+                          <a:latin typeface="Arial" pitchFamily="34" charset="0"/>
+                          <a:ea typeface="Arial" pitchFamily="34" charset="-122"/>
+                          <a:cs typeface="Arial" pitchFamily="34" charset="-120"/>
+                        </a:rPr>
+                        <a:t>/5 (×2)</a:t>
+                      </a:r>
+                      <a:endParaRPr lang="en-US" sz="900" dirty="0">
+                        <a:latin typeface="Arial" charset="0"/>
+                        <a:ea typeface="Arial" charset="0"/>
+                        <a:cs typeface="Arial" charset="0"/>
+                      </a:endParaRPr>
+                    </a:p>
+                  </a:txBody>
+                  <a:tcPr marL="91440" marR="91440" marT="45720" marB="45720">
+                    <a:lnL w="6350" cap="flat" cmpd="sng" algn="ctr">
+                      <a:solidFill>
+                        <a:srgbClr val="CBD5E1"/>
+                      </a:solidFill>
+                      <a:prstDash val="solid"/>
+                      <a:round/>
+                      <a:headEnd type="none" w="med" len="med"/>
+                      <a:tailEnd type="none" w="med" len="med"/>
+                    </a:lnL>
+                    <a:lnR w="6350" cap="flat" cmpd="sng" algn="ctr">
+                      <a:solidFill>
+                        <a:srgbClr val="CBD5E1"/>
+                      </a:solidFill>
+                      <a:prstDash val="solid"/>
+                      <a:round/>
+                      <a:headEnd type="none" w="med" len="med"/>
+                      <a:tailEnd type="none" w="med" len="med"/>
+                    </a:lnR>
+                    <a:lnT w="6350" cap="flat" cmpd="sng" algn="ctr">
+                      <a:solidFill>
+                        <a:srgbClr val="CBD5E1"/>
+                      </a:solidFill>
+                      <a:prstDash val="solid"/>
+                      <a:round/>
+                      <a:headEnd type="none" w="med" len="med"/>
+                      <a:tailEnd type="none" w="med" len="med"/>
+                    </a:lnT>
+                    <a:lnB w="6350" cap="flat" cmpd="sng" algn="ctr">
+                      <a:solidFill>
+                        <a:srgbClr val="CBD5E1"/>
+                      </a:solidFill>
+                      <a:prstDash val="solid"/>
+                      <a:round/>
+                      <a:headEnd type="none" w="med" len="med"/>
+                      <a:tailEnd type="none" w="med" len="med"/>
+                    </a:lnB>
+                    <a:solidFill>
+                      <a:srgbClr val="E8EFF8"/>
+                    </a:solidFill>
+                  </a:tcPr>
+                </a:tc>
+                <a:tc>
+                  <a:txBody>
+                    <a:bodyPr/>
+                    <a:lstStyle/>
+                    <a:p>
+                      <a:pPr algn="ctr" indent="0" marL="0">
+                        <a:buNone/>
+                      </a:pPr>
+                      <a:r>
+                        <a:rPr lang="en-US" sz="900" dirty="0">
+                          <a:solidFill>
+                            <a:srgbClr val="000000"/>
+                          </a:solidFill>
+                          <a:latin typeface="Arial" pitchFamily="34" charset="0"/>
+                          <a:ea typeface="Arial" pitchFamily="34" charset="-122"/>
+                          <a:cs typeface="Arial" pitchFamily="34" charset="-120"/>
+                        </a:rPr>
+                        <a:t>7.5</a:t>
+                      </a:r>
+                      <a:endParaRPr lang="en-US" sz="900" dirty="0">
+                        <a:latin typeface="Arial" charset="0"/>
+                        <a:ea typeface="Arial" charset="0"/>
+                        <a:cs typeface="Arial" charset="0"/>
+                      </a:endParaRPr>
+                    </a:p>
+                  </a:txBody>
+                  <a:tcPr marL="91440" marR="91440" marT="45720" marB="45720">
+                    <a:lnL w="6350" cap="flat" cmpd="sng" algn="ctr">
+                      <a:solidFill>
+                        <a:srgbClr val="CBD5E1"/>
+                      </a:solidFill>
+                      <a:prstDash val="solid"/>
+                      <a:round/>
+                      <a:headEnd type="none" w="med" len="med"/>
+                      <a:tailEnd type="none" w="med" len="med"/>
+                    </a:lnL>
+                    <a:lnR w="6350" cap="flat" cmpd="sng" algn="ctr">
+                      <a:solidFill>
+                        <a:srgbClr val="CBD5E1"/>
+                      </a:solidFill>
+                      <a:prstDash val="solid"/>
+                      <a:round/>
+                      <a:headEnd type="none" w="med" len="med"/>
+                      <a:tailEnd type="none" w="med" len="med"/>
+                    </a:lnR>
+                    <a:lnT w="6350" cap="flat" cmpd="sng" algn="ctr">
+                      <a:solidFill>
+                        <a:srgbClr val="CBD5E1"/>
+                      </a:solidFill>
+                      <a:prstDash val="solid"/>
+                      <a:round/>
+                      <a:headEnd type="none" w="med" len="med"/>
+                      <a:tailEnd type="none" w="med" len="med"/>
+                    </a:lnT>
+                    <a:lnB w="6350" cap="flat" cmpd="sng" algn="ctr">
+                      <a:solidFill>
+                        <a:srgbClr val="CBD5E1"/>
+                      </a:solidFill>
+                      <a:prstDash val="solid"/>
+                      <a:round/>
+                      <a:headEnd type="none" w="med" len="med"/>
+                      <a:tailEnd type="none" w="med" len="med"/>
+                    </a:lnB>
+                    <a:solidFill>
+                      <a:srgbClr val="E8EFF8"/>
+                    </a:solidFill>
+                  </a:tcPr>
+                </a:tc>
+              </a:tr>
+              <a:tr h="201168">
+                <a:tc>
+                  <a:txBody>
+                    <a:bodyPr/>
+                    <a:lstStyle/>
+                    <a:p>
+                      <a:pPr algn="ctr" indent="0" marL="0">
+                        <a:buNone/>
+                      </a:pPr>
+                      <a:r>
+                        <a:rPr lang="en-US" sz="900" dirty="0">
+                          <a:solidFill>
+                            <a:srgbClr val="000000"/>
+                          </a:solidFill>
+                          <a:latin typeface="Arial" pitchFamily="34" charset="0"/>
+                          <a:ea typeface="Arial" pitchFamily="34" charset="-122"/>
+                          <a:cs typeface="Arial" pitchFamily="34" charset="-120"/>
+                        </a:rPr>
+                        <a:t>楽天トラベル</a:t>
                       </a:r>
                       <a:endParaRPr lang="en-US" sz="900" dirty="0">
                         <a:latin typeface="Arial" charset="0"/>
@@ -7975,7 +8999,7 @@
                           <a:ea typeface="Arial" pitchFamily="34" charset="-122"/>
                           <a:cs typeface="Arial" pitchFamily="34" charset="-120"/>
                         </a:rPr>
-                        <a:t>3.75</a:t>
+                        <a:t>3.5</a:t>
                       </a:r>
                       <a:endParaRPr lang="en-US" sz="900" dirty="0">
                         <a:latin typeface="Arial" charset="0"/>
@@ -8111,7 +9135,7 @@
                           <a:ea typeface="Arial" pitchFamily="34" charset="-122"/>
                           <a:cs typeface="Arial" pitchFamily="34" charset="-120"/>
                         </a:rPr>
-                        <a:t>7.5</a:t>
+                        <a:t>7</a:t>
                       </a:r>
                       <a:endParaRPr lang="en-US" sz="900" dirty="0">
                         <a:latin typeface="Arial" charset="0"/>
@@ -8181,7 +9205,7 @@
                           <a:ea typeface="Arial" pitchFamily="34" charset="-122"/>
                           <a:cs typeface="Arial" pitchFamily="34" charset="-120"/>
                         </a:rPr>
-                        <a:t>Booking.com</a:t>
+                        <a:t>Agoda</a:t>
                       </a:r>
                       <a:endParaRPr lang="en-US" sz="900" dirty="0">
                         <a:latin typeface="Arial" charset="0"/>
@@ -8317,7 +9341,7 @@
                           <a:ea typeface="Arial" pitchFamily="34" charset="-122"/>
                           <a:cs typeface="Arial" pitchFamily="34" charset="-120"/>
                         </a:rPr>
-                        <a:t>7.43</a:t>
+                        <a:t>6.79</a:t>
                       </a:r>
                       <a:endParaRPr lang="en-US" sz="900" dirty="0">
                         <a:latin typeface="Arial" charset="0"/>
@@ -8453,691 +9477,7 @@
                           <a:ea typeface="Arial" pitchFamily="34" charset="-122"/>
                           <a:cs typeface="Arial" pitchFamily="34" charset="-120"/>
                         </a:rPr>
-                        <a:t>7.43</a:t>
-                      </a:r>
-                      <a:endParaRPr lang="en-US" sz="900" dirty="0">
-                        <a:latin typeface="Arial" charset="0"/>
-                        <a:ea typeface="Arial" charset="0"/>
-                        <a:cs typeface="Arial" charset="0"/>
-                      </a:endParaRPr>
-                    </a:p>
-                  </a:txBody>
-                  <a:tcPr marL="91440" marR="91440" marT="45720" marB="45720">
-                    <a:lnL w="6350" cap="flat" cmpd="sng" algn="ctr">
-                      <a:solidFill>
-                        <a:srgbClr val="CBD5E1"/>
-                      </a:solidFill>
-                      <a:prstDash val="solid"/>
-                      <a:round/>
-                      <a:headEnd type="none" w="med" len="med"/>
-                      <a:tailEnd type="none" w="med" len="med"/>
-                    </a:lnL>
-                    <a:lnR w="6350" cap="flat" cmpd="sng" algn="ctr">
-                      <a:solidFill>
-                        <a:srgbClr val="CBD5E1"/>
-                      </a:solidFill>
-                      <a:prstDash val="solid"/>
-                      <a:round/>
-                      <a:headEnd type="none" w="med" len="med"/>
-                      <a:tailEnd type="none" w="med" len="med"/>
-                    </a:lnR>
-                    <a:lnT w="6350" cap="flat" cmpd="sng" algn="ctr">
-                      <a:solidFill>
-                        <a:srgbClr val="CBD5E1"/>
-                      </a:solidFill>
-                      <a:prstDash val="solid"/>
-                      <a:round/>
-                      <a:headEnd type="none" w="med" len="med"/>
-                      <a:tailEnd type="none" w="med" len="med"/>
-                    </a:lnT>
-                    <a:lnB w="6350" cap="flat" cmpd="sng" algn="ctr">
-                      <a:solidFill>
-                        <a:srgbClr val="CBD5E1"/>
-                      </a:solidFill>
-                      <a:prstDash val="solid"/>
-                      <a:round/>
-                      <a:headEnd type="none" w="med" len="med"/>
-                      <a:tailEnd type="none" w="med" len="med"/>
-                    </a:lnB>
-                    <a:solidFill>
-                      <a:srgbClr val="E8EFF8"/>
-                    </a:solidFill>
-                  </a:tcPr>
-                </a:tc>
-              </a:tr>
-              <a:tr h="201168">
-                <a:tc>
-                  <a:txBody>
-                    <a:bodyPr/>
-                    <a:lstStyle/>
-                    <a:p>
-                      <a:pPr algn="ctr" indent="0" marL="0">
-                        <a:buNone/>
-                      </a:pPr>
-                      <a:r>
-                        <a:rPr lang="en-US" sz="900" dirty="0">
-                          <a:solidFill>
-                            <a:srgbClr val="000000"/>
-                          </a:solidFill>
-                          <a:latin typeface="Arial" pitchFamily="34" charset="0"/>
-                          <a:ea typeface="Arial" pitchFamily="34" charset="-122"/>
-                          <a:cs typeface="Arial" pitchFamily="34" charset="-120"/>
-                        </a:rPr>
-                        <a:t>Agoda</a:t>
-                      </a:r>
-                      <a:endParaRPr lang="en-US" sz="900" dirty="0">
-                        <a:latin typeface="Arial" charset="0"/>
-                        <a:ea typeface="Arial" charset="0"/>
-                        <a:cs typeface="Arial" charset="0"/>
-                      </a:endParaRPr>
-                    </a:p>
-                  </a:txBody>
-                  <a:tcPr marL="91440" marR="91440" marT="45720" marB="45720">
-                    <a:lnL w="6350" cap="flat" cmpd="sng" algn="ctr">
-                      <a:solidFill>
-                        <a:srgbClr val="CBD5E1"/>
-                      </a:solidFill>
-                      <a:prstDash val="solid"/>
-                      <a:round/>
-                      <a:headEnd type="none" w="med" len="med"/>
-                      <a:tailEnd type="none" w="med" len="med"/>
-                    </a:lnL>
-                    <a:lnR w="6350" cap="flat" cmpd="sng" algn="ctr">
-                      <a:solidFill>
-                        <a:srgbClr val="CBD5E1"/>
-                      </a:solidFill>
-                      <a:prstDash val="solid"/>
-                      <a:round/>
-                      <a:headEnd type="none" w="med" len="med"/>
-                      <a:tailEnd type="none" w="med" len="med"/>
-                    </a:lnR>
-                    <a:lnT w="6350" cap="flat" cmpd="sng" algn="ctr">
-                      <a:solidFill>
-                        <a:srgbClr val="CBD5E1"/>
-                      </a:solidFill>
-                      <a:prstDash val="solid"/>
-                      <a:round/>
-                      <a:headEnd type="none" w="med" len="med"/>
-                      <a:tailEnd type="none" w="med" len="med"/>
-                    </a:lnT>
-                    <a:lnB w="6350" cap="flat" cmpd="sng" algn="ctr">
-                      <a:solidFill>
-                        <a:srgbClr val="CBD5E1"/>
-                      </a:solidFill>
-                      <a:prstDash val="solid"/>
-                      <a:round/>
-                      <a:headEnd type="none" w="med" len="med"/>
-                      <a:tailEnd type="none" w="med" len="med"/>
-                    </a:lnB>
-                    <a:solidFill>
-                      <a:srgbClr val="FFFFFF"/>
-                    </a:solidFill>
-                  </a:tcPr>
-                </a:tc>
-                <a:tc>
-                  <a:txBody>
-                    <a:bodyPr/>
-                    <a:lstStyle/>
-                    <a:p>
-                      <a:pPr algn="ctr" indent="0" marL="0">
-                        <a:buNone/>
-                      </a:pPr>
-                      <a:r>
-                        <a:rPr lang="en-US" sz="900" dirty="0">
-                          <a:solidFill>
-                            <a:srgbClr val="000000"/>
-                          </a:solidFill>
-                          <a:latin typeface="Arial" pitchFamily="34" charset="0"/>
-                          <a:ea typeface="Arial" pitchFamily="34" charset="-122"/>
-                          <a:cs typeface="Arial" pitchFamily="34" charset="-120"/>
-                        </a:rPr>
-                        <a:t>13</a:t>
-                      </a:r>
-                      <a:endParaRPr lang="en-US" sz="900" dirty="0">
-                        <a:latin typeface="Arial" charset="0"/>
-                        <a:ea typeface="Arial" charset="0"/>
-                        <a:cs typeface="Arial" charset="0"/>
-                      </a:endParaRPr>
-                    </a:p>
-                  </a:txBody>
-                  <a:tcPr marL="91440" marR="91440" marT="45720" marB="45720">
-                    <a:lnL w="6350" cap="flat" cmpd="sng" algn="ctr">
-                      <a:solidFill>
-                        <a:srgbClr val="CBD5E1"/>
-                      </a:solidFill>
-                      <a:prstDash val="solid"/>
-                      <a:round/>
-                      <a:headEnd type="none" w="med" len="med"/>
-                      <a:tailEnd type="none" w="med" len="med"/>
-                    </a:lnL>
-                    <a:lnR w="6350" cap="flat" cmpd="sng" algn="ctr">
-                      <a:solidFill>
-                        <a:srgbClr val="CBD5E1"/>
-                      </a:solidFill>
-                      <a:prstDash val="solid"/>
-                      <a:round/>
-                      <a:headEnd type="none" w="med" len="med"/>
-                      <a:tailEnd type="none" w="med" len="med"/>
-                    </a:lnR>
-                    <a:lnT w="6350" cap="flat" cmpd="sng" algn="ctr">
-                      <a:solidFill>
-                        <a:srgbClr val="CBD5E1"/>
-                      </a:solidFill>
-                      <a:prstDash val="solid"/>
-                      <a:round/>
-                      <a:headEnd type="none" w="med" len="med"/>
-                      <a:tailEnd type="none" w="med" len="med"/>
-                    </a:lnT>
-                    <a:lnB w="6350" cap="flat" cmpd="sng" algn="ctr">
-                      <a:solidFill>
-                        <a:srgbClr val="CBD5E1"/>
-                      </a:solidFill>
-                      <a:prstDash val="solid"/>
-                      <a:round/>
-                      <a:headEnd type="none" w="med" len="med"/>
-                      <a:tailEnd type="none" w="med" len="med"/>
-                    </a:lnB>
-                    <a:solidFill>
-                      <a:srgbClr val="FFFFFF"/>
-                    </a:solidFill>
-                  </a:tcPr>
-                </a:tc>
-                <a:tc>
-                  <a:txBody>
-                    <a:bodyPr/>
-                    <a:lstStyle/>
-                    <a:p>
-                      <a:pPr algn="ctr" indent="0" marL="0">
-                        <a:buNone/>
-                      </a:pPr>
-                      <a:r>
-                        <a:rPr lang="en-US" sz="900" dirty="0">
-                          <a:solidFill>
-                            <a:srgbClr val="000000"/>
-                          </a:solidFill>
-                          <a:latin typeface="Arial" pitchFamily="34" charset="0"/>
-                          <a:ea typeface="Arial" pitchFamily="34" charset="-122"/>
-                          <a:cs typeface="Arial" pitchFamily="34" charset="-120"/>
-                        </a:rPr>
-                        <a:t>7.08</a:t>
-                      </a:r>
-                      <a:endParaRPr lang="en-US" sz="900" dirty="0">
-                        <a:latin typeface="Arial" charset="0"/>
-                        <a:ea typeface="Arial" charset="0"/>
-                        <a:cs typeface="Arial" charset="0"/>
-                      </a:endParaRPr>
-                    </a:p>
-                  </a:txBody>
-                  <a:tcPr marL="91440" marR="91440" marT="45720" marB="45720">
-                    <a:lnL w="6350" cap="flat" cmpd="sng" algn="ctr">
-                      <a:solidFill>
-                        <a:srgbClr val="CBD5E1"/>
-                      </a:solidFill>
-                      <a:prstDash val="solid"/>
-                      <a:round/>
-                      <a:headEnd type="none" w="med" len="med"/>
-                      <a:tailEnd type="none" w="med" len="med"/>
-                    </a:lnL>
-                    <a:lnR w="6350" cap="flat" cmpd="sng" algn="ctr">
-                      <a:solidFill>
-                        <a:srgbClr val="CBD5E1"/>
-                      </a:solidFill>
-                      <a:prstDash val="solid"/>
-                      <a:round/>
-                      <a:headEnd type="none" w="med" len="med"/>
-                      <a:tailEnd type="none" w="med" len="med"/>
-                    </a:lnR>
-                    <a:lnT w="6350" cap="flat" cmpd="sng" algn="ctr">
-                      <a:solidFill>
-                        <a:srgbClr val="CBD5E1"/>
-                      </a:solidFill>
-                      <a:prstDash val="solid"/>
-                      <a:round/>
-                      <a:headEnd type="none" w="med" len="med"/>
-                      <a:tailEnd type="none" w="med" len="med"/>
-                    </a:lnT>
-                    <a:lnB w="6350" cap="flat" cmpd="sng" algn="ctr">
-                      <a:solidFill>
-                        <a:srgbClr val="CBD5E1"/>
-                      </a:solidFill>
-                      <a:prstDash val="solid"/>
-                      <a:round/>
-                      <a:headEnd type="none" w="med" len="med"/>
-                      <a:tailEnd type="none" w="med" len="med"/>
-                    </a:lnB>
-                    <a:solidFill>
-                      <a:srgbClr val="FFFFFF"/>
-                    </a:solidFill>
-                  </a:tcPr>
-                </a:tc>
-                <a:tc>
-                  <a:txBody>
-                    <a:bodyPr/>
-                    <a:lstStyle/>
-                    <a:p>
-                      <a:pPr algn="ctr" indent="0" marL="0">
-                        <a:buNone/>
-                      </a:pPr>
-                      <a:r>
-                        <a:rPr lang="en-US" sz="900" dirty="0">
-                          <a:solidFill>
-                            <a:srgbClr val="000000"/>
-                          </a:solidFill>
-                          <a:latin typeface="Arial" pitchFamily="34" charset="0"/>
-                          <a:ea typeface="Arial" pitchFamily="34" charset="-122"/>
-                          <a:cs typeface="Arial" pitchFamily="34" charset="-120"/>
-                        </a:rPr>
-                        <a:t>/10</a:t>
-                      </a:r>
-                      <a:endParaRPr lang="en-US" sz="900" dirty="0">
-                        <a:latin typeface="Arial" charset="0"/>
-                        <a:ea typeface="Arial" charset="0"/>
-                        <a:cs typeface="Arial" charset="0"/>
-                      </a:endParaRPr>
-                    </a:p>
-                  </a:txBody>
-                  <a:tcPr marL="91440" marR="91440" marT="45720" marB="45720">
-                    <a:lnL w="6350" cap="flat" cmpd="sng" algn="ctr">
-                      <a:solidFill>
-                        <a:srgbClr val="CBD5E1"/>
-                      </a:solidFill>
-                      <a:prstDash val="solid"/>
-                      <a:round/>
-                      <a:headEnd type="none" w="med" len="med"/>
-                      <a:tailEnd type="none" w="med" len="med"/>
-                    </a:lnL>
-                    <a:lnR w="6350" cap="flat" cmpd="sng" algn="ctr">
-                      <a:solidFill>
-                        <a:srgbClr val="CBD5E1"/>
-                      </a:solidFill>
-                      <a:prstDash val="solid"/>
-                      <a:round/>
-                      <a:headEnd type="none" w="med" len="med"/>
-                      <a:tailEnd type="none" w="med" len="med"/>
-                    </a:lnR>
-                    <a:lnT w="6350" cap="flat" cmpd="sng" algn="ctr">
-                      <a:solidFill>
-                        <a:srgbClr val="CBD5E1"/>
-                      </a:solidFill>
-                      <a:prstDash val="solid"/>
-                      <a:round/>
-                      <a:headEnd type="none" w="med" len="med"/>
-                      <a:tailEnd type="none" w="med" len="med"/>
-                    </a:lnT>
-                    <a:lnB w="6350" cap="flat" cmpd="sng" algn="ctr">
-                      <a:solidFill>
-                        <a:srgbClr val="CBD5E1"/>
-                      </a:solidFill>
-                      <a:prstDash val="solid"/>
-                      <a:round/>
-                      <a:headEnd type="none" w="med" len="med"/>
-                      <a:tailEnd type="none" w="med" len="med"/>
-                    </a:lnB>
-                    <a:solidFill>
-                      <a:srgbClr val="FFFFFF"/>
-                    </a:solidFill>
-                  </a:tcPr>
-                </a:tc>
-                <a:tc>
-                  <a:txBody>
-                    <a:bodyPr/>
-                    <a:lstStyle/>
-                    <a:p>
-                      <a:pPr algn="ctr" indent="0" marL="0">
-                        <a:buNone/>
-                      </a:pPr>
-                      <a:r>
-                        <a:rPr lang="en-US" sz="900" dirty="0">
-                          <a:solidFill>
-                            <a:srgbClr val="000000"/>
-                          </a:solidFill>
-                          <a:latin typeface="Arial" pitchFamily="34" charset="0"/>
-                          <a:ea typeface="Arial" pitchFamily="34" charset="-122"/>
-                          <a:cs typeface="Arial" pitchFamily="34" charset="-120"/>
-                        </a:rPr>
-                        <a:t>7.08</a:t>
-                      </a:r>
-                      <a:endParaRPr lang="en-US" sz="900" dirty="0">
-                        <a:latin typeface="Arial" charset="0"/>
-                        <a:ea typeface="Arial" charset="0"/>
-                        <a:cs typeface="Arial" charset="0"/>
-                      </a:endParaRPr>
-                    </a:p>
-                  </a:txBody>
-                  <a:tcPr marL="91440" marR="91440" marT="45720" marB="45720">
-                    <a:lnL w="6350" cap="flat" cmpd="sng" algn="ctr">
-                      <a:solidFill>
-                        <a:srgbClr val="CBD5E1"/>
-                      </a:solidFill>
-                      <a:prstDash val="solid"/>
-                      <a:round/>
-                      <a:headEnd type="none" w="med" len="med"/>
-                      <a:tailEnd type="none" w="med" len="med"/>
-                    </a:lnL>
-                    <a:lnR w="6350" cap="flat" cmpd="sng" algn="ctr">
-                      <a:solidFill>
-                        <a:srgbClr val="CBD5E1"/>
-                      </a:solidFill>
-                      <a:prstDash val="solid"/>
-                      <a:round/>
-                      <a:headEnd type="none" w="med" len="med"/>
-                      <a:tailEnd type="none" w="med" len="med"/>
-                    </a:lnR>
-                    <a:lnT w="6350" cap="flat" cmpd="sng" algn="ctr">
-                      <a:solidFill>
-                        <a:srgbClr val="CBD5E1"/>
-                      </a:solidFill>
-                      <a:prstDash val="solid"/>
-                      <a:round/>
-                      <a:headEnd type="none" w="med" len="med"/>
-                      <a:tailEnd type="none" w="med" len="med"/>
-                    </a:lnT>
-                    <a:lnB w="6350" cap="flat" cmpd="sng" algn="ctr">
-                      <a:solidFill>
-                        <a:srgbClr val="CBD5E1"/>
-                      </a:solidFill>
-                      <a:prstDash val="solid"/>
-                      <a:round/>
-                      <a:headEnd type="none" w="med" len="med"/>
-                      <a:tailEnd type="none" w="med" len="med"/>
-                    </a:lnB>
-                    <a:solidFill>
-                      <a:srgbClr val="FFFFFF"/>
-                    </a:solidFill>
-                  </a:tcPr>
-                </a:tc>
-              </a:tr>
-              <a:tr h="201168">
-                <a:tc>
-                  <a:txBody>
-                    <a:bodyPr/>
-                    <a:lstStyle/>
-                    <a:p>
-                      <a:pPr algn="ctr" indent="0" marL="0">
-                        <a:buNone/>
-                      </a:pPr>
-                      <a:r>
-                        <a:rPr lang="en-US" sz="900" dirty="0">
-                          <a:solidFill>
-                            <a:srgbClr val="000000"/>
-                          </a:solidFill>
-                          <a:latin typeface="Arial" pitchFamily="34" charset="0"/>
-                          <a:ea typeface="Arial" pitchFamily="34" charset="-122"/>
-                          <a:cs typeface="Arial" pitchFamily="34" charset="-120"/>
-                        </a:rPr>
-                        <a:t>楽天トラベル</a:t>
-                      </a:r>
-                      <a:endParaRPr lang="en-US" sz="900" dirty="0">
-                        <a:latin typeface="Arial" charset="0"/>
-                        <a:ea typeface="Arial" charset="0"/>
-                        <a:cs typeface="Arial" charset="0"/>
-                      </a:endParaRPr>
-                    </a:p>
-                  </a:txBody>
-                  <a:tcPr marL="91440" marR="91440" marT="45720" marB="45720">
-                    <a:lnL w="6350" cap="flat" cmpd="sng" algn="ctr">
-                      <a:solidFill>
-                        <a:srgbClr val="CBD5E1"/>
-                      </a:solidFill>
-                      <a:prstDash val="solid"/>
-                      <a:round/>
-                      <a:headEnd type="none" w="med" len="med"/>
-                      <a:tailEnd type="none" w="med" len="med"/>
-                    </a:lnL>
-                    <a:lnR w="6350" cap="flat" cmpd="sng" algn="ctr">
-                      <a:solidFill>
-                        <a:srgbClr val="CBD5E1"/>
-                      </a:solidFill>
-                      <a:prstDash val="solid"/>
-                      <a:round/>
-                      <a:headEnd type="none" w="med" len="med"/>
-                      <a:tailEnd type="none" w="med" len="med"/>
-                    </a:lnR>
-                    <a:lnT w="6350" cap="flat" cmpd="sng" algn="ctr">
-                      <a:solidFill>
-                        <a:srgbClr val="CBD5E1"/>
-                      </a:solidFill>
-                      <a:prstDash val="solid"/>
-                      <a:round/>
-                      <a:headEnd type="none" w="med" len="med"/>
-                      <a:tailEnd type="none" w="med" len="med"/>
-                    </a:lnT>
-                    <a:lnB w="6350" cap="flat" cmpd="sng" algn="ctr">
-                      <a:solidFill>
-                        <a:srgbClr val="CBD5E1"/>
-                      </a:solidFill>
-                      <a:prstDash val="solid"/>
-                      <a:round/>
-                      <a:headEnd type="none" w="med" len="med"/>
-                      <a:tailEnd type="none" w="med" len="med"/>
-                    </a:lnB>
-                    <a:solidFill>
-                      <a:srgbClr val="E8EFF8"/>
-                    </a:solidFill>
-                  </a:tcPr>
-                </a:tc>
-                <a:tc>
-                  <a:txBody>
-                    <a:bodyPr/>
-                    <a:lstStyle/>
-                    <a:p>
-                      <a:pPr algn="ctr" indent="0" marL="0">
-                        <a:buNone/>
-                      </a:pPr>
-                      <a:r>
-                        <a:rPr lang="en-US" sz="900" dirty="0">
-                          <a:solidFill>
-                            <a:srgbClr val="000000"/>
-                          </a:solidFill>
-                          <a:latin typeface="Arial" pitchFamily="34" charset="0"/>
-                          <a:ea typeface="Arial" pitchFamily="34" charset="-122"/>
-                          <a:cs typeface="Arial" pitchFamily="34" charset="-120"/>
-                        </a:rPr>
-                        <a:t>4</a:t>
-                      </a:r>
-                      <a:endParaRPr lang="en-US" sz="900" dirty="0">
-                        <a:latin typeface="Arial" charset="0"/>
-                        <a:ea typeface="Arial" charset="0"/>
-                        <a:cs typeface="Arial" charset="0"/>
-                      </a:endParaRPr>
-                    </a:p>
-                  </a:txBody>
-                  <a:tcPr marL="91440" marR="91440" marT="45720" marB="45720">
-                    <a:lnL w="6350" cap="flat" cmpd="sng" algn="ctr">
-                      <a:solidFill>
-                        <a:srgbClr val="CBD5E1"/>
-                      </a:solidFill>
-                      <a:prstDash val="solid"/>
-                      <a:round/>
-                      <a:headEnd type="none" w="med" len="med"/>
-                      <a:tailEnd type="none" w="med" len="med"/>
-                    </a:lnL>
-                    <a:lnR w="6350" cap="flat" cmpd="sng" algn="ctr">
-                      <a:solidFill>
-                        <a:srgbClr val="CBD5E1"/>
-                      </a:solidFill>
-                      <a:prstDash val="solid"/>
-                      <a:round/>
-                      <a:headEnd type="none" w="med" len="med"/>
-                      <a:tailEnd type="none" w="med" len="med"/>
-                    </a:lnR>
-                    <a:lnT w="6350" cap="flat" cmpd="sng" algn="ctr">
-                      <a:solidFill>
-                        <a:srgbClr val="CBD5E1"/>
-                      </a:solidFill>
-                      <a:prstDash val="solid"/>
-                      <a:round/>
-                      <a:headEnd type="none" w="med" len="med"/>
-                      <a:tailEnd type="none" w="med" len="med"/>
-                    </a:lnT>
-                    <a:lnB w="6350" cap="flat" cmpd="sng" algn="ctr">
-                      <a:solidFill>
-                        <a:srgbClr val="CBD5E1"/>
-                      </a:solidFill>
-                      <a:prstDash val="solid"/>
-                      <a:round/>
-                      <a:headEnd type="none" w="med" len="med"/>
-                      <a:tailEnd type="none" w="med" len="med"/>
-                    </a:lnB>
-                    <a:solidFill>
-                      <a:srgbClr val="E8EFF8"/>
-                    </a:solidFill>
-                  </a:tcPr>
-                </a:tc>
-                <a:tc>
-                  <a:txBody>
-                    <a:bodyPr/>
-                    <a:lstStyle/>
-                    <a:p>
-                      <a:pPr algn="ctr" indent="0" marL="0">
-                        <a:buNone/>
-                      </a:pPr>
-                      <a:r>
-                        <a:rPr lang="en-US" sz="900" dirty="0">
-                          <a:solidFill>
-                            <a:srgbClr val="000000"/>
-                          </a:solidFill>
-                          <a:latin typeface="Arial" pitchFamily="34" charset="0"/>
-                          <a:ea typeface="Arial" pitchFamily="34" charset="-122"/>
-                          <a:cs typeface="Arial" pitchFamily="34" charset="-120"/>
-                        </a:rPr>
-                        <a:t>3.5</a:t>
-                      </a:r>
-                      <a:endParaRPr lang="en-US" sz="900" dirty="0">
-                        <a:latin typeface="Arial" charset="0"/>
-                        <a:ea typeface="Arial" charset="0"/>
-                        <a:cs typeface="Arial" charset="0"/>
-                      </a:endParaRPr>
-                    </a:p>
-                  </a:txBody>
-                  <a:tcPr marL="91440" marR="91440" marT="45720" marB="45720">
-                    <a:lnL w="6350" cap="flat" cmpd="sng" algn="ctr">
-                      <a:solidFill>
-                        <a:srgbClr val="CBD5E1"/>
-                      </a:solidFill>
-                      <a:prstDash val="solid"/>
-                      <a:round/>
-                      <a:headEnd type="none" w="med" len="med"/>
-                      <a:tailEnd type="none" w="med" len="med"/>
-                    </a:lnL>
-                    <a:lnR w="6350" cap="flat" cmpd="sng" algn="ctr">
-                      <a:solidFill>
-                        <a:srgbClr val="CBD5E1"/>
-                      </a:solidFill>
-                      <a:prstDash val="solid"/>
-                      <a:round/>
-                      <a:headEnd type="none" w="med" len="med"/>
-                      <a:tailEnd type="none" w="med" len="med"/>
-                    </a:lnR>
-                    <a:lnT w="6350" cap="flat" cmpd="sng" algn="ctr">
-                      <a:solidFill>
-                        <a:srgbClr val="CBD5E1"/>
-                      </a:solidFill>
-                      <a:prstDash val="solid"/>
-                      <a:round/>
-                      <a:headEnd type="none" w="med" len="med"/>
-                      <a:tailEnd type="none" w="med" len="med"/>
-                    </a:lnT>
-                    <a:lnB w="6350" cap="flat" cmpd="sng" algn="ctr">
-                      <a:solidFill>
-                        <a:srgbClr val="CBD5E1"/>
-                      </a:solidFill>
-                      <a:prstDash val="solid"/>
-                      <a:round/>
-                      <a:headEnd type="none" w="med" len="med"/>
-                      <a:tailEnd type="none" w="med" len="med"/>
-                    </a:lnB>
-                    <a:solidFill>
-                      <a:srgbClr val="E8EFF8"/>
-                    </a:solidFill>
-                  </a:tcPr>
-                </a:tc>
-                <a:tc>
-                  <a:txBody>
-                    <a:bodyPr/>
-                    <a:lstStyle/>
-                    <a:p>
-                      <a:pPr algn="ctr" indent="0" marL="0">
-                        <a:buNone/>
-                      </a:pPr>
-                      <a:r>
-                        <a:rPr lang="en-US" sz="900" dirty="0">
-                          <a:solidFill>
-                            <a:srgbClr val="000000"/>
-                          </a:solidFill>
-                          <a:latin typeface="Arial" pitchFamily="34" charset="0"/>
-                          <a:ea typeface="Arial" pitchFamily="34" charset="-122"/>
-                          <a:cs typeface="Arial" pitchFamily="34" charset="-120"/>
-                        </a:rPr>
-                        <a:t>/5 (×2)</a:t>
-                      </a:r>
-                      <a:endParaRPr lang="en-US" sz="900" dirty="0">
-                        <a:latin typeface="Arial" charset="0"/>
-                        <a:ea typeface="Arial" charset="0"/>
-                        <a:cs typeface="Arial" charset="0"/>
-                      </a:endParaRPr>
-                    </a:p>
-                  </a:txBody>
-                  <a:tcPr marL="91440" marR="91440" marT="45720" marB="45720">
-                    <a:lnL w="6350" cap="flat" cmpd="sng" algn="ctr">
-                      <a:solidFill>
-                        <a:srgbClr val="CBD5E1"/>
-                      </a:solidFill>
-                      <a:prstDash val="solid"/>
-                      <a:round/>
-                      <a:headEnd type="none" w="med" len="med"/>
-                      <a:tailEnd type="none" w="med" len="med"/>
-                    </a:lnL>
-                    <a:lnR w="6350" cap="flat" cmpd="sng" algn="ctr">
-                      <a:solidFill>
-                        <a:srgbClr val="CBD5E1"/>
-                      </a:solidFill>
-                      <a:prstDash val="solid"/>
-                      <a:round/>
-                      <a:headEnd type="none" w="med" len="med"/>
-                      <a:tailEnd type="none" w="med" len="med"/>
-                    </a:lnR>
-                    <a:lnT w="6350" cap="flat" cmpd="sng" algn="ctr">
-                      <a:solidFill>
-                        <a:srgbClr val="CBD5E1"/>
-                      </a:solidFill>
-                      <a:prstDash val="solid"/>
-                      <a:round/>
-                      <a:headEnd type="none" w="med" len="med"/>
-                      <a:tailEnd type="none" w="med" len="med"/>
-                    </a:lnT>
-                    <a:lnB w="6350" cap="flat" cmpd="sng" algn="ctr">
-                      <a:solidFill>
-                        <a:srgbClr val="CBD5E1"/>
-                      </a:solidFill>
-                      <a:prstDash val="solid"/>
-                      <a:round/>
-                      <a:headEnd type="none" w="med" len="med"/>
-                      <a:tailEnd type="none" w="med" len="med"/>
-                    </a:lnB>
-                    <a:solidFill>
-                      <a:srgbClr val="E8EFF8"/>
-                    </a:solidFill>
-                  </a:tcPr>
-                </a:tc>
-                <a:tc>
-                  <a:txBody>
-                    <a:bodyPr/>
-                    <a:lstStyle/>
-                    <a:p>
-                      <a:pPr algn="ctr" indent="0" marL="0">
-                        <a:buNone/>
-                      </a:pPr>
-                      <a:r>
-                        <a:rPr lang="en-US" sz="900" dirty="0">
-                          <a:solidFill>
-                            <a:srgbClr val="000000"/>
-                          </a:solidFill>
-                          <a:latin typeface="Arial" pitchFamily="34" charset="0"/>
-                          <a:ea typeface="Arial" pitchFamily="34" charset="-122"/>
-                          <a:cs typeface="Arial" pitchFamily="34" charset="-120"/>
-                        </a:rPr>
-                        <a:t>7</a:t>
+                        <a:t>6.79</a:t>
                       </a:r>
                       <a:endParaRPr lang="en-US" sz="900" dirty="0">
                         <a:latin typeface="Arial" charset="0"/>
@@ -9545,7 +9885,7 @@
                 <a:ea typeface="Arial" pitchFamily="34" charset="-122"/>
                 <a:cs typeface="Arial" pitchFamily="34" charset="-120"/>
               </a:rPr>
-              <a:t>33件（64.7%）</a:t>
+              <a:t>35件（64.8%）</a:t>
             </a:r>
             <a:endParaRPr lang="en-US" sz="1100" dirty="0"/>
           </a:p>
@@ -9643,7 +9983,7 @@
                 <a:ea typeface="Arial" pitchFamily="34" charset="-122"/>
                 <a:cs typeface="Arial" pitchFamily="34" charset="-120"/>
               </a:rPr>
-              <a:t>13件（25.5%）</a:t>
+              <a:t>13件（24.1%）</a:t>
             </a:r>
             <a:endParaRPr lang="en-US" sz="1100" dirty="0"/>
           </a:p>
@@ -9741,7 +10081,7 @@
                 <a:ea typeface="Arial" pitchFamily="34" charset="-122"/>
                 <a:cs typeface="Arial" pitchFamily="34" charset="-120"/>
               </a:rPr>
-              <a:t>5件（9.8%）</a:t>
+              <a:t>6件（11.1%）</a:t>
             </a:r>
             <a:endParaRPr lang="en-US" sz="1100" dirty="0"/>
           </a:p>

--- a/納品レポート/ホテル別レポート/apa_kamata_口コミ分析レポート.pptx
+++ b/納品レポート/ホテル別レポート/apa_kamata_口コミ分析レポート.pptx
@@ -183,10 +183,10 @@
                     <c:v>Google</c:v>
                   </c:pt>
                   <c:pt idx="1">
-                    <c:v>Booking.com</c:v>
+                    <c:v>じゃらん</c:v>
                   </c:pt>
                   <c:pt idx="2">
-                    <c:v>じゃらん</c:v>
+                    <c:v>Booking.com</c:v>
                   </c:pt>
                   <c:pt idx="3">
                     <c:v>楽天トラベル</c:v>
@@ -208,16 +208,16 @@
                   <c:v>7.88</c:v>
                 </c:pt>
                 <c:pt idx="1">
-                  <c:v>7.6</c:v>
+                  <c:v>7.5</c:v>
                 </c:pt>
                 <c:pt idx="2">
-                  <c:v>7.5</c:v>
+                  <c:v>7.44</c:v>
                 </c:pt>
                 <c:pt idx="3">
                   <c:v>7</c:v>
                 </c:pt>
                 <c:pt idx="4">
-                  <c:v>6.79</c:v>
+                  <c:v>6.8</c:v>
                 </c:pt>
               </c:numCache>
             </c:numRef>
@@ -563,7 +563,7 @@
                   <c:v>35</c:v>
                 </c:pt>
                 <c:pt idx="1">
-                  <c:v>13</c:v>
+                  <c:v>15</c:v>
                 </c:pt>
                 <c:pt idx="2">
                   <c:v>6</c:v>
@@ -826,13 +826,13 @@
                   <c:v>24</c:v>
                 </c:pt>
                 <c:pt idx="3">
-                  <c:v>4</c:v>
+                  <c:v>5</c:v>
                 </c:pt>
                 <c:pt idx="4">
                   <c:v>8</c:v>
                 </c:pt>
                 <c:pt idx="5">
-                  <c:v>1</c:v>
+                  <c:v>2</c:v>
                 </c:pt>
                 <c:pt idx="6">
                   <c:v>4</c:v>
@@ -2792,7 +2792,7 @@
                 <a:ea typeface="Arial" pitchFamily="34" charset="-122"/>
                 <a:cs typeface="Arial" pitchFamily="34" charset="-120"/>
               </a:rPr>
-              <a:t>レビュー総数：54件（5サイト）</a:t>
+              <a:t>レビュー総数：56件（5サイト）</a:t>
             </a:r>
             <a:endParaRPr lang="en-US" sz="1000" dirty="0"/>
           </a:p>
@@ -2812,7 +2812,7 @@
                 <a:ea typeface="Arial" pitchFamily="34" charset="-122"/>
                 <a:cs typeface="Arial" pitchFamily="34" charset="-120"/>
               </a:rPr>
-              <a:t>作成日：2026年3月23日</a:t>
+              <a:t>作成日：2026年3月24日</a:t>
             </a:r>
             <a:endParaRPr lang="en-US" sz="1000" dirty="0"/>
           </a:p>
@@ -3358,7 +3358,7 @@
                           <a:ea typeface="Arial" pitchFamily="34" charset="-122"/>
                           <a:cs typeface="Arial" pitchFamily="34" charset="-120"/>
                         </a:rPr>
-                        <a:t>7.43点</a:t>
+                        <a:t>7.38点</a:t>
                       </a:r>
                       <a:endParaRPr lang="en-US" sz="1000" dirty="0">
                         <a:latin typeface="Arial" charset="0"/>
@@ -3632,7 +3632,7 @@
                           <a:ea typeface="Arial" pitchFamily="34" charset="-122"/>
                           <a:cs typeface="Arial" pitchFamily="34" charset="-120"/>
                         </a:rPr>
-                        <a:t>64.8%</a:t>
+                        <a:t>62.5%</a:t>
                       </a:r>
                       <a:endParaRPr lang="en-US" sz="1000" dirty="0">
                         <a:latin typeface="Arial" charset="0"/>
@@ -3700,7 +3700,7 @@
                           <a:ea typeface="Arial" pitchFamily="34" charset="-122"/>
                           <a:cs typeface="Arial" pitchFamily="34" charset="-120"/>
                         </a:rPr>
-                        <a:t>75%以上</a:t>
+                        <a:t>73%以上</a:t>
                       </a:r>
                       <a:endParaRPr lang="en-US" sz="1000" dirty="0">
                         <a:latin typeface="Arial" charset="0"/>
@@ -3906,7 +3906,7 @@
                           <a:ea typeface="Arial" pitchFamily="34" charset="-122"/>
                           <a:cs typeface="Arial" pitchFamily="34" charset="-120"/>
                         </a:rPr>
-                        <a:t>11.1%</a:t>
+                        <a:t>10.7%</a:t>
                       </a:r>
                       <a:endParaRPr lang="en-US" sz="1000" dirty="0">
                         <a:latin typeface="Arial" charset="0"/>
@@ -5367,7 +5367,7 @@
                 <a:ea typeface="Arial" pitchFamily="34" charset="-122"/>
                 <a:cs typeface="Arial" pitchFamily="34" charset="-120"/>
               </a:rPr>
-              <a:t>7.43</a:t>
+              <a:t>7.38</a:t>
             </a:r>
             <a:endParaRPr lang="en-US" sz="3200" dirty="0"/>
           </a:p>
@@ -5492,7 +5492,7 @@
                 <a:ea typeface="Arial" pitchFamily="34" charset="-122"/>
                 <a:cs typeface="Arial" pitchFamily="34" charset="-120"/>
               </a:rPr>
-              <a:t>64.8%</a:t>
+              <a:t>62.5%</a:t>
             </a:r>
             <a:endParaRPr lang="en-US" sz="3200" dirty="0"/>
           </a:p>
@@ -5617,7 +5617,7 @@
                 <a:ea typeface="Arial" pitchFamily="34" charset="-122"/>
                 <a:cs typeface="Arial" pitchFamily="34" charset="-120"/>
               </a:rPr>
-              <a:t>11.1%</a:t>
+              <a:t>10.7%</a:t>
             </a:r>
             <a:endParaRPr lang="en-US" sz="3200" dirty="0"/>
           </a:p>
@@ -5742,7 +5742,7 @@
                 <a:ea typeface="Arial" pitchFamily="34" charset="-122"/>
                 <a:cs typeface="Arial" pitchFamily="34" charset="-120"/>
               </a:rPr>
-              <a:t>54件</a:t>
+              <a:t>56件</a:t>
             </a:r>
             <a:endParaRPr lang="en-US" sz="3200" dirty="0"/>
           </a:p>
@@ -5890,7 +5890,7 @@
                 <a:ea typeface="Arial" pitchFamily="34" charset="-122"/>
                 <a:cs typeface="Arial" pitchFamily="34" charset="-120"/>
               </a:rPr>
-              <a:t>  駅からすぐの場所にあり、電車移動も便利 ホテルには駐車場が3台分有りますが予約はできません</a:t>
+              <a:t>  都心から少し離れていますが、羽田空港からの交通の便が良く、かつ京急とJRの両方からアクセスできる点がお勧めです</a:t>
             </a:r>
             <a:endParaRPr lang="en-US" sz="1100" dirty="0"/>
           </a:p>
@@ -5970,7 +5970,7 @@
                 <a:ea typeface="Arial" pitchFamily="34" charset="-122"/>
                 <a:cs typeface="Arial" pitchFamily="34" charset="-120"/>
               </a:rPr>
-              <a:t>  清潔 なし なし</a:t>
+              <a:t>  清潔感もありお勧めできます</a:t>
             </a:r>
             <a:endParaRPr lang="en-US" sz="1100" dirty="0"/>
           </a:p>
@@ -6178,7 +6178,7 @@
                 <a:ea typeface="Arial" pitchFamily="34" charset="-122"/>
                 <a:cs typeface="Arial" pitchFamily="34" charset="-120"/>
               </a:rPr>
-              <a:t>防音性能 </a:t>
+              <a:t>清掃不備 </a:t>
             </a:r>
             <a:endParaRPr lang="en-US" sz="1100" dirty="0"/>
           </a:p>
@@ -6198,7 +6198,7 @@
                 <a:ea typeface="Arial" pitchFamily="34" charset="-122"/>
                 <a:cs typeface="Arial" pitchFamily="34" charset="-120"/>
               </a:rPr>
-              <a:t>  道路沿いだったけど防音がしっかりされていて外の音は聞こえない</a:t>
+              <a:t>  そこは汚くて埃っぽく、以前の訪問時の残骸も散乱していた</a:t>
             </a:r>
             <a:endParaRPr lang="en-US" sz="1100" dirty="0"/>
           </a:p>
@@ -6551,7 +6551,7 @@
                 <a:ea typeface="Arial" pitchFamily="34" charset="-122"/>
                 <a:cs typeface="Arial" pitchFamily="34" charset="-120"/>
               </a:rPr>
-              <a:t>7.43</a:t>
+              <a:t>7.38</a:t>
             </a:r>
             <a:endParaRPr lang="en-US" sz="3200" dirty="0"/>
           </a:p>
@@ -6676,7 +6676,7 @@
                 <a:ea typeface="Arial" pitchFamily="34" charset="-122"/>
                 <a:cs typeface="Arial" pitchFamily="34" charset="-120"/>
               </a:rPr>
-              <a:t>64.8%</a:t>
+              <a:t>62.5%</a:t>
             </a:r>
             <a:endParaRPr lang="en-US" sz="3200" dirty="0"/>
           </a:p>
@@ -6801,7 +6801,7 @@
                 <a:ea typeface="Arial" pitchFamily="34" charset="-122"/>
                 <a:cs typeface="Arial" pitchFamily="34" charset="-120"/>
               </a:rPr>
-              <a:t>11.1%</a:t>
+              <a:t>10.7%</a:t>
             </a:r>
             <a:endParaRPr lang="en-US" sz="3200" dirty="0"/>
           </a:p>
@@ -6926,7 +6926,7 @@
                 <a:ea typeface="Arial" pitchFamily="34" charset="-122"/>
                 <a:cs typeface="Arial" pitchFamily="34" charset="-120"/>
               </a:rPr>
-              <a:t>54件</a:t>
+              <a:t>56件</a:t>
             </a:r>
             <a:endParaRPr lang="en-US" sz="3200" dirty="0"/>
           </a:p>
@@ -8179,7 +8179,7 @@
                           <a:ea typeface="Arial" pitchFamily="34" charset="-122"/>
                           <a:cs typeface="Arial" pitchFamily="34" charset="-120"/>
                         </a:rPr>
-                        <a:t>Booking.com</a:t>
+                        <a:t>じゃらん</a:t>
                       </a:r>
                       <a:endParaRPr lang="en-US" sz="900" dirty="0">
                         <a:latin typeface="Arial" charset="0"/>
@@ -8247,7 +8247,7 @@
                           <a:ea typeface="Arial" pitchFamily="34" charset="-122"/>
                           <a:cs typeface="Arial" pitchFamily="34" charset="-120"/>
                         </a:rPr>
-                        <a:t>15</a:t>
+                        <a:t>4</a:t>
                       </a:r>
                       <a:endParaRPr lang="en-US" sz="900" dirty="0">
                         <a:latin typeface="Arial" charset="0"/>
@@ -8315,7 +8315,7 @@
                           <a:ea typeface="Arial" pitchFamily="34" charset="-122"/>
                           <a:cs typeface="Arial" pitchFamily="34" charset="-120"/>
                         </a:rPr>
-                        <a:t>7.6</a:t>
+                        <a:t>3.75</a:t>
                       </a:r>
                       <a:endParaRPr lang="en-US" sz="900" dirty="0">
                         <a:latin typeface="Arial" charset="0"/>
@@ -8363,6 +8363,348 @@
                     </a:lnB>
                     <a:solidFill>
                       <a:srgbClr val="FFFFFF"/>
+                    </a:solidFill>
+                  </a:tcPr>
+                </a:tc>
+                <a:tc>
+                  <a:txBody>
+                    <a:bodyPr/>
+                    <a:lstStyle/>
+                    <a:p>
+                      <a:pPr algn="ctr" indent="0" marL="0">
+                        <a:buNone/>
+                      </a:pPr>
+                      <a:r>
+                        <a:rPr lang="en-US" sz="900" dirty="0">
+                          <a:solidFill>
+                            <a:srgbClr val="000000"/>
+                          </a:solidFill>
+                          <a:latin typeface="Arial" pitchFamily="34" charset="0"/>
+                          <a:ea typeface="Arial" pitchFamily="34" charset="-122"/>
+                          <a:cs typeface="Arial" pitchFamily="34" charset="-120"/>
+                        </a:rPr>
+                        <a:t>/5 (×2)</a:t>
+                      </a:r>
+                      <a:endParaRPr lang="en-US" sz="900" dirty="0">
+                        <a:latin typeface="Arial" charset="0"/>
+                        <a:ea typeface="Arial" charset="0"/>
+                        <a:cs typeface="Arial" charset="0"/>
+                      </a:endParaRPr>
+                    </a:p>
+                  </a:txBody>
+                  <a:tcPr marL="91440" marR="91440" marT="45720" marB="45720">
+                    <a:lnL w="6350" cap="flat" cmpd="sng" algn="ctr">
+                      <a:solidFill>
+                        <a:srgbClr val="CBD5E1"/>
+                      </a:solidFill>
+                      <a:prstDash val="solid"/>
+                      <a:round/>
+                      <a:headEnd type="none" w="med" len="med"/>
+                      <a:tailEnd type="none" w="med" len="med"/>
+                    </a:lnL>
+                    <a:lnR w="6350" cap="flat" cmpd="sng" algn="ctr">
+                      <a:solidFill>
+                        <a:srgbClr val="CBD5E1"/>
+                      </a:solidFill>
+                      <a:prstDash val="solid"/>
+                      <a:round/>
+                      <a:headEnd type="none" w="med" len="med"/>
+                      <a:tailEnd type="none" w="med" len="med"/>
+                    </a:lnR>
+                    <a:lnT w="6350" cap="flat" cmpd="sng" algn="ctr">
+                      <a:solidFill>
+                        <a:srgbClr val="CBD5E1"/>
+                      </a:solidFill>
+                      <a:prstDash val="solid"/>
+                      <a:round/>
+                      <a:headEnd type="none" w="med" len="med"/>
+                      <a:tailEnd type="none" w="med" len="med"/>
+                    </a:lnT>
+                    <a:lnB w="6350" cap="flat" cmpd="sng" algn="ctr">
+                      <a:solidFill>
+                        <a:srgbClr val="CBD5E1"/>
+                      </a:solidFill>
+                      <a:prstDash val="solid"/>
+                      <a:round/>
+                      <a:headEnd type="none" w="med" len="med"/>
+                      <a:tailEnd type="none" w="med" len="med"/>
+                    </a:lnB>
+                    <a:solidFill>
+                      <a:srgbClr val="FFFFFF"/>
+                    </a:solidFill>
+                  </a:tcPr>
+                </a:tc>
+                <a:tc>
+                  <a:txBody>
+                    <a:bodyPr/>
+                    <a:lstStyle/>
+                    <a:p>
+                      <a:pPr algn="ctr" indent="0" marL="0">
+                        <a:buNone/>
+                      </a:pPr>
+                      <a:r>
+                        <a:rPr lang="en-US" sz="900" dirty="0">
+                          <a:solidFill>
+                            <a:srgbClr val="000000"/>
+                          </a:solidFill>
+                          <a:latin typeface="Arial" pitchFamily="34" charset="0"/>
+                          <a:ea typeface="Arial" pitchFamily="34" charset="-122"/>
+                          <a:cs typeface="Arial" pitchFamily="34" charset="-120"/>
+                        </a:rPr>
+                        <a:t>7.5</a:t>
+                      </a:r>
+                      <a:endParaRPr lang="en-US" sz="900" dirty="0">
+                        <a:latin typeface="Arial" charset="0"/>
+                        <a:ea typeface="Arial" charset="0"/>
+                        <a:cs typeface="Arial" charset="0"/>
+                      </a:endParaRPr>
+                    </a:p>
+                  </a:txBody>
+                  <a:tcPr marL="91440" marR="91440" marT="45720" marB="45720">
+                    <a:lnL w="6350" cap="flat" cmpd="sng" algn="ctr">
+                      <a:solidFill>
+                        <a:srgbClr val="CBD5E1"/>
+                      </a:solidFill>
+                      <a:prstDash val="solid"/>
+                      <a:round/>
+                      <a:headEnd type="none" w="med" len="med"/>
+                      <a:tailEnd type="none" w="med" len="med"/>
+                    </a:lnL>
+                    <a:lnR w="6350" cap="flat" cmpd="sng" algn="ctr">
+                      <a:solidFill>
+                        <a:srgbClr val="CBD5E1"/>
+                      </a:solidFill>
+                      <a:prstDash val="solid"/>
+                      <a:round/>
+                      <a:headEnd type="none" w="med" len="med"/>
+                      <a:tailEnd type="none" w="med" len="med"/>
+                    </a:lnR>
+                    <a:lnT w="6350" cap="flat" cmpd="sng" algn="ctr">
+                      <a:solidFill>
+                        <a:srgbClr val="CBD5E1"/>
+                      </a:solidFill>
+                      <a:prstDash val="solid"/>
+                      <a:round/>
+                      <a:headEnd type="none" w="med" len="med"/>
+                      <a:tailEnd type="none" w="med" len="med"/>
+                    </a:lnT>
+                    <a:lnB w="6350" cap="flat" cmpd="sng" algn="ctr">
+                      <a:solidFill>
+                        <a:srgbClr val="CBD5E1"/>
+                      </a:solidFill>
+                      <a:prstDash val="solid"/>
+                      <a:round/>
+                      <a:headEnd type="none" w="med" len="med"/>
+                      <a:tailEnd type="none" w="med" len="med"/>
+                    </a:lnB>
+                    <a:solidFill>
+                      <a:srgbClr val="FFFFFF"/>
+                    </a:solidFill>
+                  </a:tcPr>
+                </a:tc>
+              </a:tr>
+              <a:tr h="201168">
+                <a:tc>
+                  <a:txBody>
+                    <a:bodyPr/>
+                    <a:lstStyle/>
+                    <a:p>
+                      <a:pPr algn="ctr" indent="0" marL="0">
+                        <a:buNone/>
+                      </a:pPr>
+                      <a:r>
+                        <a:rPr lang="en-US" sz="900" dirty="0">
+                          <a:solidFill>
+                            <a:srgbClr val="000000"/>
+                          </a:solidFill>
+                          <a:latin typeface="Arial" pitchFamily="34" charset="0"/>
+                          <a:ea typeface="Arial" pitchFamily="34" charset="-122"/>
+                          <a:cs typeface="Arial" pitchFamily="34" charset="-120"/>
+                        </a:rPr>
+                        <a:t>Booking.com</a:t>
+                      </a:r>
+                      <a:endParaRPr lang="en-US" sz="900" dirty="0">
+                        <a:latin typeface="Arial" charset="0"/>
+                        <a:ea typeface="Arial" charset="0"/>
+                        <a:cs typeface="Arial" charset="0"/>
+                      </a:endParaRPr>
+                    </a:p>
+                  </a:txBody>
+                  <a:tcPr marL="91440" marR="91440" marT="45720" marB="45720">
+                    <a:lnL w="6350" cap="flat" cmpd="sng" algn="ctr">
+                      <a:solidFill>
+                        <a:srgbClr val="CBD5E1"/>
+                      </a:solidFill>
+                      <a:prstDash val="solid"/>
+                      <a:round/>
+                      <a:headEnd type="none" w="med" len="med"/>
+                      <a:tailEnd type="none" w="med" len="med"/>
+                    </a:lnL>
+                    <a:lnR w="6350" cap="flat" cmpd="sng" algn="ctr">
+                      <a:solidFill>
+                        <a:srgbClr val="CBD5E1"/>
+                      </a:solidFill>
+                      <a:prstDash val="solid"/>
+                      <a:round/>
+                      <a:headEnd type="none" w="med" len="med"/>
+                      <a:tailEnd type="none" w="med" len="med"/>
+                    </a:lnR>
+                    <a:lnT w="6350" cap="flat" cmpd="sng" algn="ctr">
+                      <a:solidFill>
+                        <a:srgbClr val="CBD5E1"/>
+                      </a:solidFill>
+                      <a:prstDash val="solid"/>
+                      <a:round/>
+                      <a:headEnd type="none" w="med" len="med"/>
+                      <a:tailEnd type="none" w="med" len="med"/>
+                    </a:lnT>
+                    <a:lnB w="6350" cap="flat" cmpd="sng" algn="ctr">
+                      <a:solidFill>
+                        <a:srgbClr val="CBD5E1"/>
+                      </a:solidFill>
+                      <a:prstDash val="solid"/>
+                      <a:round/>
+                      <a:headEnd type="none" w="med" len="med"/>
+                      <a:tailEnd type="none" w="med" len="med"/>
+                    </a:lnB>
+                    <a:solidFill>
+                      <a:srgbClr val="E8EFF8"/>
+                    </a:solidFill>
+                  </a:tcPr>
+                </a:tc>
+                <a:tc>
+                  <a:txBody>
+                    <a:bodyPr/>
+                    <a:lstStyle/>
+                    <a:p>
+                      <a:pPr algn="ctr" indent="0" marL="0">
+                        <a:buNone/>
+                      </a:pPr>
+                      <a:r>
+                        <a:rPr lang="en-US" sz="900" dirty="0">
+                          <a:solidFill>
+                            <a:srgbClr val="000000"/>
+                          </a:solidFill>
+                          <a:latin typeface="Arial" pitchFamily="34" charset="0"/>
+                          <a:ea typeface="Arial" pitchFamily="34" charset="-122"/>
+                          <a:cs typeface="Arial" pitchFamily="34" charset="-120"/>
+                        </a:rPr>
+                        <a:t>16</a:t>
+                      </a:r>
+                      <a:endParaRPr lang="en-US" sz="900" dirty="0">
+                        <a:latin typeface="Arial" charset="0"/>
+                        <a:ea typeface="Arial" charset="0"/>
+                        <a:cs typeface="Arial" charset="0"/>
+                      </a:endParaRPr>
+                    </a:p>
+                  </a:txBody>
+                  <a:tcPr marL="91440" marR="91440" marT="45720" marB="45720">
+                    <a:lnL w="6350" cap="flat" cmpd="sng" algn="ctr">
+                      <a:solidFill>
+                        <a:srgbClr val="CBD5E1"/>
+                      </a:solidFill>
+                      <a:prstDash val="solid"/>
+                      <a:round/>
+                      <a:headEnd type="none" w="med" len="med"/>
+                      <a:tailEnd type="none" w="med" len="med"/>
+                    </a:lnL>
+                    <a:lnR w="6350" cap="flat" cmpd="sng" algn="ctr">
+                      <a:solidFill>
+                        <a:srgbClr val="CBD5E1"/>
+                      </a:solidFill>
+                      <a:prstDash val="solid"/>
+                      <a:round/>
+                      <a:headEnd type="none" w="med" len="med"/>
+                      <a:tailEnd type="none" w="med" len="med"/>
+                    </a:lnR>
+                    <a:lnT w="6350" cap="flat" cmpd="sng" algn="ctr">
+                      <a:solidFill>
+                        <a:srgbClr val="CBD5E1"/>
+                      </a:solidFill>
+                      <a:prstDash val="solid"/>
+                      <a:round/>
+                      <a:headEnd type="none" w="med" len="med"/>
+                      <a:tailEnd type="none" w="med" len="med"/>
+                    </a:lnT>
+                    <a:lnB w="6350" cap="flat" cmpd="sng" algn="ctr">
+                      <a:solidFill>
+                        <a:srgbClr val="CBD5E1"/>
+                      </a:solidFill>
+                      <a:prstDash val="solid"/>
+                      <a:round/>
+                      <a:headEnd type="none" w="med" len="med"/>
+                      <a:tailEnd type="none" w="med" len="med"/>
+                    </a:lnB>
+                    <a:solidFill>
+                      <a:srgbClr val="E8EFF8"/>
+                    </a:solidFill>
+                  </a:tcPr>
+                </a:tc>
+                <a:tc>
+                  <a:txBody>
+                    <a:bodyPr/>
+                    <a:lstStyle/>
+                    <a:p>
+                      <a:pPr algn="ctr" indent="0" marL="0">
+                        <a:buNone/>
+                      </a:pPr>
+                      <a:r>
+                        <a:rPr lang="en-US" sz="900" dirty="0">
+                          <a:solidFill>
+                            <a:srgbClr val="000000"/>
+                          </a:solidFill>
+                          <a:latin typeface="Arial" pitchFamily="34" charset="0"/>
+                          <a:ea typeface="Arial" pitchFamily="34" charset="-122"/>
+                          <a:cs typeface="Arial" pitchFamily="34" charset="-120"/>
+                        </a:rPr>
+                        <a:t>7.44</a:t>
+                      </a:r>
+                      <a:endParaRPr lang="en-US" sz="900" dirty="0">
+                        <a:latin typeface="Arial" charset="0"/>
+                        <a:ea typeface="Arial" charset="0"/>
+                        <a:cs typeface="Arial" charset="0"/>
+                      </a:endParaRPr>
+                    </a:p>
+                  </a:txBody>
+                  <a:tcPr marL="91440" marR="91440" marT="45720" marB="45720">
+                    <a:lnL w="6350" cap="flat" cmpd="sng" algn="ctr">
+                      <a:solidFill>
+                        <a:srgbClr val="CBD5E1"/>
+                      </a:solidFill>
+                      <a:prstDash val="solid"/>
+                      <a:round/>
+                      <a:headEnd type="none" w="med" len="med"/>
+                      <a:tailEnd type="none" w="med" len="med"/>
+                    </a:lnL>
+                    <a:lnR w="6350" cap="flat" cmpd="sng" algn="ctr">
+                      <a:solidFill>
+                        <a:srgbClr val="CBD5E1"/>
+                      </a:solidFill>
+                      <a:prstDash val="solid"/>
+                      <a:round/>
+                      <a:headEnd type="none" w="med" len="med"/>
+                      <a:tailEnd type="none" w="med" len="med"/>
+                    </a:lnR>
+                    <a:lnT w="6350" cap="flat" cmpd="sng" algn="ctr">
+                      <a:solidFill>
+                        <a:srgbClr val="CBD5E1"/>
+                      </a:solidFill>
+                      <a:prstDash val="solid"/>
+                      <a:round/>
+                      <a:headEnd type="none" w="med" len="med"/>
+                      <a:tailEnd type="none" w="med" len="med"/>
+                    </a:lnT>
+                    <a:lnB w="6350" cap="flat" cmpd="sng" algn="ctr">
+                      <a:solidFill>
+                        <a:srgbClr val="CBD5E1"/>
+                      </a:solidFill>
+                      <a:prstDash val="solid"/>
+                      <a:round/>
+                      <a:headEnd type="none" w="med" len="med"/>
+                      <a:tailEnd type="none" w="med" len="med"/>
+                    </a:lnB>
+                    <a:solidFill>
+                      <a:srgbClr val="E8EFF8"/>
                     </a:solidFill>
                   </a:tcPr>
                 </a:tc>
@@ -8430,144 +8772,6 @@
                       <a:tailEnd type="none" w="med" len="med"/>
                     </a:lnB>
                     <a:solidFill>
-                      <a:srgbClr val="FFFFFF"/>
-                    </a:solidFill>
-                  </a:tcPr>
-                </a:tc>
-                <a:tc>
-                  <a:txBody>
-                    <a:bodyPr/>
-                    <a:lstStyle/>
-                    <a:p>
-                      <a:pPr algn="ctr" indent="0" marL="0">
-                        <a:buNone/>
-                      </a:pPr>
-                      <a:r>
-                        <a:rPr lang="en-US" sz="900" dirty="0">
-                          <a:solidFill>
-                            <a:srgbClr val="000000"/>
-                          </a:solidFill>
-                          <a:latin typeface="Arial" pitchFamily="34" charset="0"/>
-                          <a:ea typeface="Arial" pitchFamily="34" charset="-122"/>
-                          <a:cs typeface="Arial" pitchFamily="34" charset="-120"/>
-                        </a:rPr>
-                        <a:t>7.6</a:t>
-                      </a:r>
-                      <a:endParaRPr lang="en-US" sz="900" dirty="0">
-                        <a:latin typeface="Arial" charset="0"/>
-                        <a:ea typeface="Arial" charset="0"/>
-                        <a:cs typeface="Arial" charset="0"/>
-                      </a:endParaRPr>
-                    </a:p>
-                  </a:txBody>
-                  <a:tcPr marL="91440" marR="91440" marT="45720" marB="45720">
-                    <a:lnL w="6350" cap="flat" cmpd="sng" algn="ctr">
-                      <a:solidFill>
-                        <a:srgbClr val="CBD5E1"/>
-                      </a:solidFill>
-                      <a:prstDash val="solid"/>
-                      <a:round/>
-                      <a:headEnd type="none" w="med" len="med"/>
-                      <a:tailEnd type="none" w="med" len="med"/>
-                    </a:lnL>
-                    <a:lnR w="6350" cap="flat" cmpd="sng" algn="ctr">
-                      <a:solidFill>
-                        <a:srgbClr val="CBD5E1"/>
-                      </a:solidFill>
-                      <a:prstDash val="solid"/>
-                      <a:round/>
-                      <a:headEnd type="none" w="med" len="med"/>
-                      <a:tailEnd type="none" w="med" len="med"/>
-                    </a:lnR>
-                    <a:lnT w="6350" cap="flat" cmpd="sng" algn="ctr">
-                      <a:solidFill>
-                        <a:srgbClr val="CBD5E1"/>
-                      </a:solidFill>
-                      <a:prstDash val="solid"/>
-                      <a:round/>
-                      <a:headEnd type="none" w="med" len="med"/>
-                      <a:tailEnd type="none" w="med" len="med"/>
-                    </a:lnT>
-                    <a:lnB w="6350" cap="flat" cmpd="sng" algn="ctr">
-                      <a:solidFill>
-                        <a:srgbClr val="CBD5E1"/>
-                      </a:solidFill>
-                      <a:prstDash val="solid"/>
-                      <a:round/>
-                      <a:headEnd type="none" w="med" len="med"/>
-                      <a:tailEnd type="none" w="med" len="med"/>
-                    </a:lnB>
-                    <a:solidFill>
-                      <a:srgbClr val="FFFFFF"/>
-                    </a:solidFill>
-                  </a:tcPr>
-                </a:tc>
-              </a:tr>
-              <a:tr h="201168">
-                <a:tc>
-                  <a:txBody>
-                    <a:bodyPr/>
-                    <a:lstStyle/>
-                    <a:p>
-                      <a:pPr algn="ctr" indent="0" marL="0">
-                        <a:buNone/>
-                      </a:pPr>
-                      <a:r>
-                        <a:rPr lang="en-US" sz="900" dirty="0">
-                          <a:solidFill>
-                            <a:srgbClr val="000000"/>
-                          </a:solidFill>
-                          <a:latin typeface="Arial" pitchFamily="34" charset="0"/>
-                          <a:ea typeface="Arial" pitchFamily="34" charset="-122"/>
-                          <a:cs typeface="Arial" pitchFamily="34" charset="-120"/>
-                        </a:rPr>
-                        <a:t>じゃらん</a:t>
-                      </a:r>
-                      <a:endParaRPr lang="en-US" sz="900" dirty="0">
-                        <a:latin typeface="Arial" charset="0"/>
-                        <a:ea typeface="Arial" charset="0"/>
-                        <a:cs typeface="Arial" charset="0"/>
-                      </a:endParaRPr>
-                    </a:p>
-                  </a:txBody>
-                  <a:tcPr marL="91440" marR="91440" marT="45720" marB="45720">
-                    <a:lnL w="6350" cap="flat" cmpd="sng" algn="ctr">
-                      <a:solidFill>
-                        <a:srgbClr val="CBD5E1"/>
-                      </a:solidFill>
-                      <a:prstDash val="solid"/>
-                      <a:round/>
-                      <a:headEnd type="none" w="med" len="med"/>
-                      <a:tailEnd type="none" w="med" len="med"/>
-                    </a:lnL>
-                    <a:lnR w="6350" cap="flat" cmpd="sng" algn="ctr">
-                      <a:solidFill>
-                        <a:srgbClr val="CBD5E1"/>
-                      </a:solidFill>
-                      <a:prstDash val="solid"/>
-                      <a:round/>
-                      <a:headEnd type="none" w="med" len="med"/>
-                      <a:tailEnd type="none" w="med" len="med"/>
-                    </a:lnR>
-                    <a:lnT w="6350" cap="flat" cmpd="sng" algn="ctr">
-                      <a:solidFill>
-                        <a:srgbClr val="CBD5E1"/>
-                      </a:solidFill>
-                      <a:prstDash val="solid"/>
-                      <a:round/>
-                      <a:headEnd type="none" w="med" len="med"/>
-                      <a:tailEnd type="none" w="med" len="med"/>
-                    </a:lnT>
-                    <a:lnB w="6350" cap="flat" cmpd="sng" algn="ctr">
-                      <a:solidFill>
-                        <a:srgbClr val="CBD5E1"/>
-                      </a:solidFill>
-                      <a:prstDash val="solid"/>
-                      <a:round/>
-                      <a:headEnd type="none" w="med" len="med"/>
-                      <a:tailEnd type="none" w="med" len="med"/>
-                    </a:lnB>
-                    <a:solidFill>
                       <a:srgbClr val="E8EFF8"/>
                     </a:solidFill>
                   </a:tcPr>
@@ -8589,211 +8793,7 @@
                           <a:ea typeface="Arial" pitchFamily="34" charset="-122"/>
                           <a:cs typeface="Arial" pitchFamily="34" charset="-120"/>
                         </a:rPr>
-                        <a:t>4</a:t>
-                      </a:r>
-                      <a:endParaRPr lang="en-US" sz="900" dirty="0">
-                        <a:latin typeface="Arial" charset="0"/>
-                        <a:ea typeface="Arial" charset="0"/>
-                        <a:cs typeface="Arial" charset="0"/>
-                      </a:endParaRPr>
-                    </a:p>
-                  </a:txBody>
-                  <a:tcPr marL="91440" marR="91440" marT="45720" marB="45720">
-                    <a:lnL w="6350" cap="flat" cmpd="sng" algn="ctr">
-                      <a:solidFill>
-                        <a:srgbClr val="CBD5E1"/>
-                      </a:solidFill>
-                      <a:prstDash val="solid"/>
-                      <a:round/>
-                      <a:headEnd type="none" w="med" len="med"/>
-                      <a:tailEnd type="none" w="med" len="med"/>
-                    </a:lnL>
-                    <a:lnR w="6350" cap="flat" cmpd="sng" algn="ctr">
-                      <a:solidFill>
-                        <a:srgbClr val="CBD5E1"/>
-                      </a:solidFill>
-                      <a:prstDash val="solid"/>
-                      <a:round/>
-                      <a:headEnd type="none" w="med" len="med"/>
-                      <a:tailEnd type="none" w="med" len="med"/>
-                    </a:lnR>
-                    <a:lnT w="6350" cap="flat" cmpd="sng" algn="ctr">
-                      <a:solidFill>
-                        <a:srgbClr val="CBD5E1"/>
-                      </a:solidFill>
-                      <a:prstDash val="solid"/>
-                      <a:round/>
-                      <a:headEnd type="none" w="med" len="med"/>
-                      <a:tailEnd type="none" w="med" len="med"/>
-                    </a:lnT>
-                    <a:lnB w="6350" cap="flat" cmpd="sng" algn="ctr">
-                      <a:solidFill>
-                        <a:srgbClr val="CBD5E1"/>
-                      </a:solidFill>
-                      <a:prstDash val="solid"/>
-                      <a:round/>
-                      <a:headEnd type="none" w="med" len="med"/>
-                      <a:tailEnd type="none" w="med" len="med"/>
-                    </a:lnB>
-                    <a:solidFill>
-                      <a:srgbClr val="E8EFF8"/>
-                    </a:solidFill>
-                  </a:tcPr>
-                </a:tc>
-                <a:tc>
-                  <a:txBody>
-                    <a:bodyPr/>
-                    <a:lstStyle/>
-                    <a:p>
-                      <a:pPr algn="ctr" indent="0" marL="0">
-                        <a:buNone/>
-                      </a:pPr>
-                      <a:r>
-                        <a:rPr lang="en-US" sz="900" dirty="0">
-                          <a:solidFill>
-                            <a:srgbClr val="000000"/>
-                          </a:solidFill>
-                          <a:latin typeface="Arial" pitchFamily="34" charset="0"/>
-                          <a:ea typeface="Arial" pitchFamily="34" charset="-122"/>
-                          <a:cs typeface="Arial" pitchFamily="34" charset="-120"/>
-                        </a:rPr>
-                        <a:t>3.75</a:t>
-                      </a:r>
-                      <a:endParaRPr lang="en-US" sz="900" dirty="0">
-                        <a:latin typeface="Arial" charset="0"/>
-                        <a:ea typeface="Arial" charset="0"/>
-                        <a:cs typeface="Arial" charset="0"/>
-                      </a:endParaRPr>
-                    </a:p>
-                  </a:txBody>
-                  <a:tcPr marL="91440" marR="91440" marT="45720" marB="45720">
-                    <a:lnL w="6350" cap="flat" cmpd="sng" algn="ctr">
-                      <a:solidFill>
-                        <a:srgbClr val="CBD5E1"/>
-                      </a:solidFill>
-                      <a:prstDash val="solid"/>
-                      <a:round/>
-                      <a:headEnd type="none" w="med" len="med"/>
-                      <a:tailEnd type="none" w="med" len="med"/>
-                    </a:lnL>
-                    <a:lnR w="6350" cap="flat" cmpd="sng" algn="ctr">
-                      <a:solidFill>
-                        <a:srgbClr val="CBD5E1"/>
-                      </a:solidFill>
-                      <a:prstDash val="solid"/>
-                      <a:round/>
-                      <a:headEnd type="none" w="med" len="med"/>
-                      <a:tailEnd type="none" w="med" len="med"/>
-                    </a:lnR>
-                    <a:lnT w="6350" cap="flat" cmpd="sng" algn="ctr">
-                      <a:solidFill>
-                        <a:srgbClr val="CBD5E1"/>
-                      </a:solidFill>
-                      <a:prstDash val="solid"/>
-                      <a:round/>
-                      <a:headEnd type="none" w="med" len="med"/>
-                      <a:tailEnd type="none" w="med" len="med"/>
-                    </a:lnT>
-                    <a:lnB w="6350" cap="flat" cmpd="sng" algn="ctr">
-                      <a:solidFill>
-                        <a:srgbClr val="CBD5E1"/>
-                      </a:solidFill>
-                      <a:prstDash val="solid"/>
-                      <a:round/>
-                      <a:headEnd type="none" w="med" len="med"/>
-                      <a:tailEnd type="none" w="med" len="med"/>
-                    </a:lnB>
-                    <a:solidFill>
-                      <a:srgbClr val="E8EFF8"/>
-                    </a:solidFill>
-                  </a:tcPr>
-                </a:tc>
-                <a:tc>
-                  <a:txBody>
-                    <a:bodyPr/>
-                    <a:lstStyle/>
-                    <a:p>
-                      <a:pPr algn="ctr" indent="0" marL="0">
-                        <a:buNone/>
-                      </a:pPr>
-                      <a:r>
-                        <a:rPr lang="en-US" sz="900" dirty="0">
-                          <a:solidFill>
-                            <a:srgbClr val="000000"/>
-                          </a:solidFill>
-                          <a:latin typeface="Arial" pitchFamily="34" charset="0"/>
-                          <a:ea typeface="Arial" pitchFamily="34" charset="-122"/>
-                          <a:cs typeface="Arial" pitchFamily="34" charset="-120"/>
-                        </a:rPr>
-                        <a:t>/5 (×2)</a:t>
-                      </a:r>
-                      <a:endParaRPr lang="en-US" sz="900" dirty="0">
-                        <a:latin typeface="Arial" charset="0"/>
-                        <a:ea typeface="Arial" charset="0"/>
-                        <a:cs typeface="Arial" charset="0"/>
-                      </a:endParaRPr>
-                    </a:p>
-                  </a:txBody>
-                  <a:tcPr marL="91440" marR="91440" marT="45720" marB="45720">
-                    <a:lnL w="6350" cap="flat" cmpd="sng" algn="ctr">
-                      <a:solidFill>
-                        <a:srgbClr val="CBD5E1"/>
-                      </a:solidFill>
-                      <a:prstDash val="solid"/>
-                      <a:round/>
-                      <a:headEnd type="none" w="med" len="med"/>
-                      <a:tailEnd type="none" w="med" len="med"/>
-                    </a:lnL>
-                    <a:lnR w="6350" cap="flat" cmpd="sng" algn="ctr">
-                      <a:solidFill>
-                        <a:srgbClr val="CBD5E1"/>
-                      </a:solidFill>
-                      <a:prstDash val="solid"/>
-                      <a:round/>
-                      <a:headEnd type="none" w="med" len="med"/>
-                      <a:tailEnd type="none" w="med" len="med"/>
-                    </a:lnR>
-                    <a:lnT w="6350" cap="flat" cmpd="sng" algn="ctr">
-                      <a:solidFill>
-                        <a:srgbClr val="CBD5E1"/>
-                      </a:solidFill>
-                      <a:prstDash val="solid"/>
-                      <a:round/>
-                      <a:headEnd type="none" w="med" len="med"/>
-                      <a:tailEnd type="none" w="med" len="med"/>
-                    </a:lnT>
-                    <a:lnB w="6350" cap="flat" cmpd="sng" algn="ctr">
-                      <a:solidFill>
-                        <a:srgbClr val="CBD5E1"/>
-                      </a:solidFill>
-                      <a:prstDash val="solid"/>
-                      <a:round/>
-                      <a:headEnd type="none" w="med" len="med"/>
-                      <a:tailEnd type="none" w="med" len="med"/>
-                    </a:lnB>
-                    <a:solidFill>
-                      <a:srgbClr val="E8EFF8"/>
-                    </a:solidFill>
-                  </a:tcPr>
-                </a:tc>
-                <a:tc>
-                  <a:txBody>
-                    <a:bodyPr/>
-                    <a:lstStyle/>
-                    <a:p>
-                      <a:pPr algn="ctr" indent="0" marL="0">
-                        <a:buNone/>
-                      </a:pPr>
-                      <a:r>
-                        <a:rPr lang="en-US" sz="900" dirty="0">
-                          <a:solidFill>
-                            <a:srgbClr val="000000"/>
-                          </a:solidFill>
-                          <a:latin typeface="Arial" pitchFamily="34" charset="0"/>
-                          <a:ea typeface="Arial" pitchFamily="34" charset="-122"/>
-                          <a:cs typeface="Arial" pitchFamily="34" charset="-120"/>
-                        </a:rPr>
-                        <a:t>7.5</a:t>
+                        <a:t>7.44</a:t>
                       </a:r>
                       <a:endParaRPr lang="en-US" sz="900" dirty="0">
                         <a:latin typeface="Arial" charset="0"/>
@@ -9273,7 +9273,7 @@
                           <a:ea typeface="Arial" pitchFamily="34" charset="-122"/>
                           <a:cs typeface="Arial" pitchFamily="34" charset="-120"/>
                         </a:rPr>
-                        <a:t>14</a:t>
+                        <a:t>15</a:t>
                       </a:r>
                       <a:endParaRPr lang="en-US" sz="900" dirty="0">
                         <a:latin typeface="Arial" charset="0"/>
@@ -9341,7 +9341,7 @@
                           <a:ea typeface="Arial" pitchFamily="34" charset="-122"/>
                           <a:cs typeface="Arial" pitchFamily="34" charset="-120"/>
                         </a:rPr>
-                        <a:t>6.79</a:t>
+                        <a:t>6.8</a:t>
                       </a:r>
                       <a:endParaRPr lang="en-US" sz="900" dirty="0">
                         <a:latin typeface="Arial" charset="0"/>
@@ -9477,7 +9477,7 @@
                           <a:ea typeface="Arial" pitchFamily="34" charset="-122"/>
                           <a:cs typeface="Arial" pitchFamily="34" charset="-120"/>
                         </a:rPr>
-                        <a:t>6.79</a:t>
+                        <a:t>6.8</a:t>
                       </a:r>
                       <a:endParaRPr lang="en-US" sz="900" dirty="0">
                         <a:latin typeface="Arial" charset="0"/>
@@ -9885,7 +9885,7 @@
                 <a:ea typeface="Arial" pitchFamily="34" charset="-122"/>
                 <a:cs typeface="Arial" pitchFamily="34" charset="-120"/>
               </a:rPr>
-              <a:t>35件（64.8%）</a:t>
+              <a:t>35件（62.5%）</a:t>
             </a:r>
             <a:endParaRPr lang="en-US" sz="1100" dirty="0"/>
           </a:p>
@@ -9983,7 +9983,7 @@
                 <a:ea typeface="Arial" pitchFamily="34" charset="-122"/>
                 <a:cs typeface="Arial" pitchFamily="34" charset="-120"/>
               </a:rPr>
-              <a:t>13件（24.1%）</a:t>
+              <a:t>15件（26.8%）</a:t>
             </a:r>
             <a:endParaRPr lang="en-US" sz="1100" dirty="0"/>
           </a:p>
@@ -10081,7 +10081,7 @@
                 <a:ea typeface="Arial" pitchFamily="34" charset="-122"/>
                 <a:cs typeface="Arial" pitchFamily="34" charset="-120"/>
               </a:rPr>
-              <a:t>6件（11.1%）</a:t>
+              <a:t>6件（10.7%）</a:t>
             </a:r>
             <a:endParaRPr lang="en-US" sz="1100" dirty="0"/>
           </a:p>
@@ -10493,7 +10493,7 @@
                 <a:ea typeface="Arial" pitchFamily="34" charset="-122"/>
                 <a:cs typeface="Arial" pitchFamily="34" charset="-120"/>
               </a:rPr>
-              <a:t>駅からすぐの場所にあり、電車移動も便利 ホテルには駐車場が3台分有りますが予約はできません</a:t>
+              <a:t>都心から少し離れていますが、羽田空港からの交通の便が良く、かつ京急とJRの両方からアクセスできる点がお勧めです</a:t>
             </a:r>
             <a:endParaRPr lang="en-US" sz="900" dirty="0"/>
           </a:p>
@@ -10532,7 +10532,7 @@
                 <a:ea typeface="Arial" pitchFamily="34" charset="-122"/>
                 <a:cs typeface="Arial" pitchFamily="34" charset="-120"/>
               </a:rPr>
-              <a:t>「立地はJRと京急のどちらからでも同じくらいの距離で遠くもないし、食事をするところも多いので困ることはないです」</a:t>
+              <a:t>「駅からすぐの場所にあり、電車移動も便利 ホテルには駐車場が3台分有りますが予約はできません」</a:t>
             </a:r>
             <a:endParaRPr lang="en-US" sz="900" dirty="0"/>
           </a:p>
@@ -10861,7 +10861,7 @@
                 <a:ea typeface="Arial" pitchFamily="34" charset="-122"/>
                 <a:cs typeface="Arial" pitchFamily="34" charset="-120"/>
               </a:rPr>
-              <a:t>8件</a:t>
+              <a:t>9件</a:t>
             </a:r>
             <a:endParaRPr lang="en-US" sz="900" dirty="0"/>
           </a:p>
@@ -10939,7 +10939,7 @@
                 <a:ea typeface="Arial" pitchFamily="34" charset="-122"/>
                 <a:cs typeface="Arial" pitchFamily="34" charset="-120"/>
               </a:rPr>
-              <a:t>清潔 なし なし</a:t>
+              <a:t>清潔感もありお勧めできます</a:t>
             </a:r>
             <a:endParaRPr lang="en-US" sz="900" dirty="0"/>
           </a:p>
@@ -10978,7 +10978,7 @@
                 <a:ea typeface="Arial" pitchFamily="34" charset="-122"/>
                 <a:cs typeface="Arial" pitchFamily="34" charset="-120"/>
               </a:rPr>
-              <a:t>「歯ブラシでこすれば、パッと見はもっときれいになりそうなので、ちょっと残念なところ」</a:t>
+              <a:t>「清潔 なし なし」</a:t>
             </a:r>
             <a:endParaRPr lang="en-US" sz="900" dirty="0"/>
           </a:p>
@@ -11084,7 +11084,7 @@
                 <a:ea typeface="Arial" pitchFamily="34" charset="-122"/>
                 <a:cs typeface="Arial" pitchFamily="34" charset="-120"/>
               </a:rPr>
-              <a:t>6件</a:t>
+              <a:t>7件</a:t>
             </a:r>
             <a:endParaRPr lang="en-US" sz="900" dirty="0"/>
           </a:p>
@@ -11162,7 +11162,7 @@
                 <a:ea typeface="Arial" pitchFamily="34" charset="-122"/>
                 <a:cs typeface="Arial" pitchFamily="34" charset="-120"/>
               </a:rPr>
-              <a:t>寝るだけなので、狭くても問題なく、ベッドは快適に睡眠をとることができました</a:t>
+              <a:t>設備は必要なものはすべてそろっていて、必要十分です</a:t>
             </a:r>
             <a:endParaRPr lang="en-US" sz="900" dirty="0"/>
           </a:p>
@@ -11201,7 +11201,7 @@
                 <a:ea typeface="Arial" pitchFamily="34" charset="-122"/>
                 <a:cs typeface="Arial" pitchFamily="34" charset="-120"/>
               </a:rPr>
-              <a:t>「アメニティも揃ってるし、きれい」</a:t>
+              <a:t>「寝るだけなので、狭くても問題なく、ベッドは快適に睡眠をとることができました」</a:t>
             </a:r>
             <a:endParaRPr lang="en-US" sz="900" dirty="0"/>
           </a:p>
@@ -12817,7 +12817,7 @@
                           <a:ea typeface="Arial" pitchFamily="34" charset="-122"/>
                           <a:cs typeface="Arial" pitchFamily="34" charset="-120"/>
                         </a:rPr>
-                        <a:t>防音性能</a:t>
+                        <a:t>清掃不備</a:t>
                       </a:r>
                       <a:endParaRPr lang="en-US" sz="900" dirty="0">
                         <a:latin typeface="Arial" charset="0"/>
@@ -12885,7 +12885,7 @@
                           <a:ea typeface="Arial" pitchFamily="34" charset="-122"/>
                           <a:cs typeface="Arial" pitchFamily="34" charset="-120"/>
                         </a:rPr>
-                        <a:t>道路沿いだったけど防音がしっかりされていて外の音は聞こえない</a:t>
+                        <a:t>そこは汚くて埃っぽく、以前の訪問時の残骸も散乱していた</a:t>
                       </a:r>
                       <a:endParaRPr lang="en-US" sz="900" dirty="0">
                         <a:latin typeface="Arial" charset="0"/>
@@ -12953,7 +12953,7 @@
                           <a:ea typeface="Arial" pitchFamily="34" charset="-122"/>
                           <a:cs typeface="Arial" pitchFamily="34" charset="-120"/>
                         </a:rPr>
-                        <a:t>1件</a:t>
+                        <a:t>2件</a:t>
                       </a:r>
                       <a:endParaRPr lang="en-US" sz="900" dirty="0">
                         <a:latin typeface="Arial" charset="0"/>
@@ -13091,7 +13091,7 @@
                           <a:ea typeface="Arial" pitchFamily="34" charset="-122"/>
                           <a:cs typeface="Arial" pitchFamily="34" charset="-120"/>
                         </a:rPr>
-                        <a:t>臭い・匂い</a:t>
+                        <a:t>防音性能</a:t>
                       </a:r>
                       <a:endParaRPr lang="en-US" sz="900" dirty="0">
                         <a:latin typeface="Arial" charset="0"/>
@@ -13159,7 +13159,7 @@
                           <a:ea typeface="Arial" pitchFamily="34" charset="-122"/>
                           <a:cs typeface="Arial" pitchFamily="34" charset="-120"/>
                         </a:rPr>
-                        <a:t>禁煙の部屋を予約しましたが、かなり強いタバコの匂いがしました</a:t>
+                        <a:t>道路沿いだったけど防音がしっかりされていて外の音は聞こえない</a:t>
                       </a:r>
                       <a:endParaRPr lang="en-US" sz="900" dirty="0">
                         <a:latin typeface="Arial" charset="0"/>
@@ -13365,7 +13365,7 @@
                           <a:ea typeface="Arial" pitchFamily="34" charset="-122"/>
                           <a:cs typeface="Arial" pitchFamily="34" charset="-120"/>
                         </a:rPr>
-                        <a:t>エアコン・空調</a:t>
+                        <a:t>臭い・匂い</a:t>
                       </a:r>
                       <a:endParaRPr lang="en-US" sz="900" dirty="0">
                         <a:latin typeface="Arial" charset="0"/>
@@ -13433,7 +13433,7 @@
                           <a:ea typeface="Arial" pitchFamily="34" charset="-122"/>
                           <a:cs typeface="Arial" pitchFamily="34" charset="-120"/>
                         </a:rPr>
-                        <a:t>エアコンが壊れてる エアコンが壊れてる</a:t>
+                        <a:t>禁煙の部屋を予約しましたが、かなり強いタバコの匂いがしました</a:t>
                       </a:r>
                       <a:endParaRPr lang="en-US" sz="900" dirty="0">
                         <a:latin typeface="Arial" charset="0"/>
@@ -13639,7 +13639,7 @@
                           <a:ea typeface="Arial" pitchFamily="34" charset="-122"/>
                           <a:cs typeface="Arial" pitchFamily="34" charset="-120"/>
                         </a:rPr>
-                        <a:t>対応・サービスの不満</a:t>
+                        <a:t>エアコン・空調</a:t>
                       </a:r>
                       <a:endParaRPr lang="en-US" sz="900" dirty="0">
                         <a:latin typeface="Arial" charset="0"/>
@@ -13707,7 +13707,7 @@
                           <a:ea typeface="Arial" pitchFamily="34" charset="-122"/>
                           <a:cs typeface="Arial" pitchFamily="34" charset="-120"/>
                         </a:rPr>
-                        <a:t>歯ブラシでこすれば、パッと見はもっときれいになりそうなので、ちょっと残念なところ</a:t>
+                        <a:t>エアコンが壊れてる エアコンが壊れてる</a:t>
                       </a:r>
                       <a:endParaRPr lang="en-US" sz="900" dirty="0">
                         <a:latin typeface="Arial" charset="0"/>
@@ -13913,7 +13913,7 @@
                           <a:ea typeface="Arial" pitchFamily="34" charset="-122"/>
                           <a:cs typeface="Arial" pitchFamily="34" charset="-120"/>
                         </a:rPr>
-                        <a:t>清掃不備</a:t>
+                        <a:t>対応・サービスの不満</a:t>
                       </a:r>
                       <a:endParaRPr lang="en-US" sz="900" dirty="0">
                         <a:latin typeface="Arial" charset="0"/>
@@ -13981,7 +13981,7 @@
                           <a:ea typeface="Arial" pitchFamily="34" charset="-122"/>
                           <a:cs typeface="Arial" pitchFamily="34" charset="-120"/>
                         </a:rPr>
-                        <a:t>部屋は狭いが、掃除も特に不満もなく小綺麗。不満はないです。 一般的なビジネスホテル、必要最低限は揃っているので不便...</a:t>
+                        <a:t>歯ブラシでこすれば、パッと見はもっときれいになりそうなので、ちょっと残念なところ</a:t>
                       </a:r>
                       <a:endParaRPr lang="en-US" sz="900" dirty="0">
                         <a:latin typeface="Arial" charset="0"/>

--- a/納品レポート/ホテル別レポート/apa_kamata_口コミ分析レポート.pptx
+++ b/納品レポート/ホテル別レポート/apa_kamata_口コミ分析レポート.pptx
@@ -211,7 +211,7 @@
                   <c:v>7.5</c:v>
                 </c:pt>
                 <c:pt idx="2">
-                  <c:v>7.44</c:v>
+                  <c:v>7.47</c:v>
                 </c:pt>
                 <c:pt idx="3">
                   <c:v>7</c:v>
@@ -560,7 +560,7 @@
               <c:numCache>
                 <c:ptCount val="3"/>
                 <c:pt idx="0">
-                  <c:v>35</c:v>
+                  <c:v>36</c:v>
                 </c:pt>
                 <c:pt idx="1">
                   <c:v>15</c:v>
@@ -823,7 +823,7 @@
                   <c:v>3</c:v>
                 </c:pt>
                 <c:pt idx="2">
-                  <c:v>24</c:v>
+                  <c:v>25</c:v>
                 </c:pt>
                 <c:pt idx="3">
                   <c:v>5</c:v>
@@ -2792,7 +2792,7 @@
                 <a:ea typeface="Arial" pitchFamily="34" charset="-122"/>
                 <a:cs typeface="Arial" pitchFamily="34" charset="-120"/>
               </a:rPr>
-              <a:t>レビュー総数：56件（5サイト）</a:t>
+              <a:t>レビュー総数：57件（5サイト）</a:t>
             </a:r>
             <a:endParaRPr lang="en-US" sz="1000" dirty="0"/>
           </a:p>
@@ -2812,7 +2812,7 @@
                 <a:ea typeface="Arial" pitchFamily="34" charset="-122"/>
                 <a:cs typeface="Arial" pitchFamily="34" charset="-120"/>
               </a:rPr>
-              <a:t>作成日：2026年3月24日</a:t>
+              <a:t>作成日：2026年3月25日</a:t>
             </a:r>
             <a:endParaRPr lang="en-US" sz="1000" dirty="0"/>
           </a:p>
@@ -3358,7 +3358,7 @@
                           <a:ea typeface="Arial" pitchFamily="34" charset="-122"/>
                           <a:cs typeface="Arial" pitchFamily="34" charset="-120"/>
                         </a:rPr>
-                        <a:t>7.38点</a:t>
+                        <a:t>7.39点</a:t>
                       </a:r>
                       <a:endParaRPr lang="en-US" sz="1000" dirty="0">
                         <a:latin typeface="Arial" charset="0"/>
@@ -3632,7 +3632,7 @@
                           <a:ea typeface="Arial" pitchFamily="34" charset="-122"/>
                           <a:cs typeface="Arial" pitchFamily="34" charset="-120"/>
                         </a:rPr>
-                        <a:t>62.5%</a:t>
+                        <a:t>63.2%</a:t>
                       </a:r>
                       <a:endParaRPr lang="en-US" sz="1000" dirty="0">
                         <a:latin typeface="Arial" charset="0"/>
@@ -3906,7 +3906,7 @@
                           <a:ea typeface="Arial" pitchFamily="34" charset="-122"/>
                           <a:cs typeface="Arial" pitchFamily="34" charset="-120"/>
                         </a:rPr>
-                        <a:t>10.7%</a:t>
+                        <a:t>10.5%</a:t>
                       </a:r>
                       <a:endParaRPr lang="en-US" sz="1000" dirty="0">
                         <a:latin typeface="Arial" charset="0"/>
@@ -4728,7 +4728,7 @@
                           <a:ea typeface="Arial" pitchFamily="34" charset="-122"/>
                           <a:cs typeface="Arial" pitchFamily="34" charset="-120"/>
                         </a:rPr>
-                        <a:t>約4件/期間</a:t>
+                        <a:t>約5件/期間</a:t>
                       </a:r>
                       <a:endParaRPr lang="en-US" sz="1000" dirty="0">
                         <a:latin typeface="Arial" charset="0"/>
@@ -5367,7 +5367,7 @@
                 <a:ea typeface="Arial" pitchFamily="34" charset="-122"/>
                 <a:cs typeface="Arial" pitchFamily="34" charset="-120"/>
               </a:rPr>
-              <a:t>7.38</a:t>
+              <a:t>7.39</a:t>
             </a:r>
             <a:endParaRPr lang="en-US" sz="3200" dirty="0"/>
           </a:p>
@@ -5492,7 +5492,7 @@
                 <a:ea typeface="Arial" pitchFamily="34" charset="-122"/>
                 <a:cs typeface="Arial" pitchFamily="34" charset="-120"/>
               </a:rPr>
-              <a:t>62.5%</a:t>
+              <a:t>63.2%</a:t>
             </a:r>
             <a:endParaRPr lang="en-US" sz="3200" dirty="0"/>
           </a:p>
@@ -5617,7 +5617,7 @@
                 <a:ea typeface="Arial" pitchFamily="34" charset="-122"/>
                 <a:cs typeface="Arial" pitchFamily="34" charset="-120"/>
               </a:rPr>
-              <a:t>10.7%</a:t>
+              <a:t>10.5%</a:t>
             </a:r>
             <a:endParaRPr lang="en-US" sz="3200" dirty="0"/>
           </a:p>
@@ -5742,7 +5742,7 @@
                 <a:ea typeface="Arial" pitchFamily="34" charset="-122"/>
                 <a:cs typeface="Arial" pitchFamily="34" charset="-120"/>
               </a:rPr>
-              <a:t>56件</a:t>
+              <a:t>57件</a:t>
             </a:r>
             <a:endParaRPr lang="en-US" sz="3200" dirty="0"/>
           </a:p>
@@ -5890,7 +5890,7 @@
                 <a:ea typeface="Arial" pitchFamily="34" charset="-122"/>
                 <a:cs typeface="Arial" pitchFamily="34" charset="-120"/>
               </a:rPr>
-              <a:t>  都心から少し離れていますが、羽田空港からの交通の便が良く、かつ京急とJRの両方からアクセスできる点がお勧めです</a:t>
+              <a:t>  The location was great, located right halfway between JR ...</a:t>
             </a:r>
             <a:endParaRPr lang="en-US" sz="1100" dirty="0"/>
           </a:p>
@@ -5930,7 +5930,7 @@
                 <a:ea typeface="Arial" pitchFamily="34" charset="-122"/>
                 <a:cs typeface="Arial" pitchFamily="34" charset="-120"/>
               </a:rPr>
-              <a:t>  フロントの愛想がない</a:t>
+              <a:t>  フロントロビーは非常に狭かったですが、これはどうしようもない点です</a:t>
             </a:r>
             <a:endParaRPr lang="en-US" sz="1100" dirty="0"/>
           </a:p>
@@ -5970,7 +5970,7 @@
                 <a:ea typeface="Arial" pitchFamily="34" charset="-122"/>
                 <a:cs typeface="Arial" pitchFamily="34" charset="-120"/>
               </a:rPr>
-              <a:t>  清潔感もありお勧めできます</a:t>
+              <a:t>  And even if they do not clean your room on a certain day,...</a:t>
             </a:r>
             <a:endParaRPr lang="en-US" sz="1100" dirty="0"/>
           </a:p>
@@ -6118,7 +6118,7 @@
                 <a:ea typeface="Arial" pitchFamily="34" charset="-122"/>
                 <a:cs typeface="Arial" pitchFamily="34" charset="-120"/>
               </a:rPr>
-              <a:t>  部屋は狭いけれど、ほぼ寝るだけだから問題なし</a:t>
+              <a:t>  The room itself was decent -- small, but standard for APA...</a:t>
             </a:r>
             <a:endParaRPr lang="en-US" sz="1100" dirty="0"/>
           </a:p>
@@ -6158,7 +6158,7 @@
                 <a:ea typeface="Arial" pitchFamily="34" charset="-122"/>
                 <a:cs typeface="Arial" pitchFamily="34" charset="-120"/>
               </a:rPr>
-              <a:t>  水回りはもう少し掃除がされているといいなと感じました</a:t>
+              <a:t>  The room itself was decent -- small, but standard for APA...</a:t>
             </a:r>
             <a:endParaRPr lang="en-US" sz="1100" dirty="0"/>
           </a:p>
@@ -6178,7 +6178,7 @@
                 <a:ea typeface="Arial" pitchFamily="34" charset="-122"/>
                 <a:cs typeface="Arial" pitchFamily="34" charset="-120"/>
               </a:rPr>
-              <a:t>清掃不備 </a:t>
+              <a:t>エアコン・空調 </a:t>
             </a:r>
             <a:endParaRPr lang="en-US" sz="1100" dirty="0"/>
           </a:p>
@@ -6198,7 +6198,7 @@
                 <a:ea typeface="Arial" pitchFamily="34" charset="-122"/>
                 <a:cs typeface="Arial" pitchFamily="34" charset="-120"/>
               </a:rPr>
-              <a:t>  そこは汚くて埃っぽく、以前の訪問時の残骸も散乱していた</a:t>
+              <a:t>  Coming from Keikyu-Kamata there was a shoutengai giving p...</a:t>
             </a:r>
             <a:endParaRPr lang="en-US" sz="1100" dirty="0"/>
           </a:p>
@@ -6551,7 +6551,7 @@
                 <a:ea typeface="Arial" pitchFamily="34" charset="-122"/>
                 <a:cs typeface="Arial" pitchFamily="34" charset="-120"/>
               </a:rPr>
-              <a:t>7.38</a:t>
+              <a:t>7.39</a:t>
             </a:r>
             <a:endParaRPr lang="en-US" sz="3200" dirty="0"/>
           </a:p>
@@ -6676,7 +6676,7 @@
                 <a:ea typeface="Arial" pitchFamily="34" charset="-122"/>
                 <a:cs typeface="Arial" pitchFamily="34" charset="-120"/>
               </a:rPr>
-              <a:t>62.5%</a:t>
+              <a:t>63.2%</a:t>
             </a:r>
             <a:endParaRPr lang="en-US" sz="3200" dirty="0"/>
           </a:p>
@@ -6801,7 +6801,7 @@
                 <a:ea typeface="Arial" pitchFamily="34" charset="-122"/>
                 <a:cs typeface="Arial" pitchFamily="34" charset="-120"/>
               </a:rPr>
-              <a:t>10.7%</a:t>
+              <a:t>10.5%</a:t>
             </a:r>
             <a:endParaRPr lang="en-US" sz="3200" dirty="0"/>
           </a:p>
@@ -6926,7 +6926,7 @@
                 <a:ea typeface="Arial" pitchFamily="34" charset="-122"/>
                 <a:cs typeface="Arial" pitchFamily="34" charset="-120"/>
               </a:rPr>
-              <a:t>56件</a:t>
+              <a:t>57件</a:t>
             </a:r>
             <a:endParaRPr lang="en-US" sz="3200" dirty="0"/>
           </a:p>
@@ -8589,7 +8589,7 @@
                           <a:ea typeface="Arial" pitchFamily="34" charset="-122"/>
                           <a:cs typeface="Arial" pitchFamily="34" charset="-120"/>
                         </a:rPr>
-                        <a:t>16</a:t>
+                        <a:t>17</a:t>
                       </a:r>
                       <a:endParaRPr lang="en-US" sz="900" dirty="0">
                         <a:latin typeface="Arial" charset="0"/>
@@ -8657,7 +8657,7 @@
                           <a:ea typeface="Arial" pitchFamily="34" charset="-122"/>
                           <a:cs typeface="Arial" pitchFamily="34" charset="-120"/>
                         </a:rPr>
-                        <a:t>7.44</a:t>
+                        <a:t>7.47</a:t>
                       </a:r>
                       <a:endParaRPr lang="en-US" sz="900" dirty="0">
                         <a:latin typeface="Arial" charset="0"/>
@@ -8793,7 +8793,7 @@
                           <a:ea typeface="Arial" pitchFamily="34" charset="-122"/>
                           <a:cs typeface="Arial" pitchFamily="34" charset="-120"/>
                         </a:rPr>
-                        <a:t>7.44</a:t>
+                        <a:t>7.47</a:t>
                       </a:r>
                       <a:endParaRPr lang="en-US" sz="900" dirty="0">
                         <a:latin typeface="Arial" charset="0"/>
@@ -9885,7 +9885,7 @@
                 <a:ea typeface="Arial" pitchFamily="34" charset="-122"/>
                 <a:cs typeface="Arial" pitchFamily="34" charset="-120"/>
               </a:rPr>
-              <a:t>35件（62.5%）</a:t>
+              <a:t>36件（63.2%）</a:t>
             </a:r>
             <a:endParaRPr lang="en-US" sz="1100" dirty="0"/>
           </a:p>
@@ -9983,7 +9983,7 @@
                 <a:ea typeface="Arial" pitchFamily="34" charset="-122"/>
                 <a:cs typeface="Arial" pitchFamily="34" charset="-120"/>
               </a:rPr>
-              <a:t>15件（26.8%）</a:t>
+              <a:t>15件（26.3%）</a:t>
             </a:r>
             <a:endParaRPr lang="en-US" sz="1100" dirty="0"/>
           </a:p>
@@ -10081,7 +10081,7 @@
                 <a:ea typeface="Arial" pitchFamily="34" charset="-122"/>
                 <a:cs typeface="Arial" pitchFamily="34" charset="-120"/>
               </a:rPr>
-              <a:t>6件（10.7%）</a:t>
+              <a:t>6件（10.5%）</a:t>
             </a:r>
             <a:endParaRPr lang="en-US" sz="1100" dirty="0"/>
           </a:p>
@@ -10493,7 +10493,7 @@
                 <a:ea typeface="Arial" pitchFamily="34" charset="-122"/>
                 <a:cs typeface="Arial" pitchFamily="34" charset="-120"/>
               </a:rPr>
-              <a:t>都心から少し離れていますが、羽田空港からの交通の便が良く、かつ京急とJRの両方からアクセスできる点がお勧めです</a:t>
+              <a:t>The location was great, located right halfway between JR ...</a:t>
             </a:r>
             <a:endParaRPr lang="en-US" sz="900" dirty="0"/>
           </a:p>
@@ -10532,7 +10532,7 @@
                 <a:ea typeface="Arial" pitchFamily="34" charset="-122"/>
                 <a:cs typeface="Arial" pitchFamily="34" charset="-120"/>
               </a:rPr>
-              <a:t>「駅からすぐの場所にあり、電車移動も便利 ホテルには駐車場が3台分有りますが予約はできません」</a:t>
+              <a:t>「都心から少し離れていますが、羽田空港からの交通の便が良く、かつ京急とJRの両方からアクセスできる点がお勧めです」</a:t>
             </a:r>
             <a:endParaRPr lang="en-US" sz="900" dirty="0"/>
           </a:p>
@@ -10716,7 +10716,7 @@
                 <a:ea typeface="Arial" pitchFamily="34" charset="-122"/>
                 <a:cs typeface="Arial" pitchFamily="34" charset="-120"/>
               </a:rPr>
-              <a:t>フロントの愛想がない</a:t>
+              <a:t>フロントロビーは非常に狭かったですが、これはどうしようもない点です</a:t>
             </a:r>
             <a:endParaRPr lang="en-US" sz="900" dirty="0"/>
           </a:p>
@@ -10755,7 +10755,7 @@
                 <a:ea typeface="Arial" pitchFamily="34" charset="-122"/>
                 <a:cs typeface="Arial" pitchFamily="34" charset="-120"/>
               </a:rPr>
-              <a:t>「ただ、少しガッカリしたのは、フロントへのTEL、外線からのTELで、相手に対する親身な寄り添い方が無かったところで...」</a:t>
+              <a:t>「フロントの愛想がない」</a:t>
             </a:r>
             <a:endParaRPr lang="en-US" sz="900" dirty="0"/>
           </a:p>
@@ -10861,7 +10861,7 @@
                 <a:ea typeface="Arial" pitchFamily="34" charset="-122"/>
                 <a:cs typeface="Arial" pitchFamily="34" charset="-120"/>
               </a:rPr>
-              <a:t>9件</a:t>
+              <a:t>10件+</a:t>
             </a:r>
             <a:endParaRPr lang="en-US" sz="900" dirty="0"/>
           </a:p>
@@ -10939,7 +10939,7 @@
                 <a:ea typeface="Arial" pitchFamily="34" charset="-122"/>
                 <a:cs typeface="Arial" pitchFamily="34" charset="-120"/>
               </a:rPr>
-              <a:t>清潔感もありお勧めできます</a:t>
+              <a:t>And even if they do not clean your room on a certain day,...</a:t>
             </a:r>
             <a:endParaRPr lang="en-US" sz="900" dirty="0"/>
           </a:p>
@@ -10978,7 +10978,7 @@
                 <a:ea typeface="Arial" pitchFamily="34" charset="-122"/>
                 <a:cs typeface="Arial" pitchFamily="34" charset="-120"/>
               </a:rPr>
-              <a:t>「清潔 なし なし」</a:t>
+              <a:t>「清潔感もありお勧めできます」</a:t>
             </a:r>
             <a:endParaRPr lang="en-US" sz="900" dirty="0"/>
           </a:p>
@@ -11084,7 +11084,7 @@
                 <a:ea typeface="Arial" pitchFamily="34" charset="-122"/>
                 <a:cs typeface="Arial" pitchFamily="34" charset="-120"/>
               </a:rPr>
-              <a:t>7件</a:t>
+              <a:t>8件</a:t>
             </a:r>
             <a:endParaRPr lang="en-US" sz="900" dirty="0"/>
           </a:p>
@@ -11162,7 +11162,7 @@
                 <a:ea typeface="Arial" pitchFamily="34" charset="-122"/>
                 <a:cs typeface="Arial" pitchFamily="34" charset="-120"/>
               </a:rPr>
-              <a:t>設備は必要なものはすべてそろっていて、必要十分です</a:t>
+              <a:t>ベッドはまあまあでしたが、枕は薄くてひどかったです</a:t>
             </a:r>
             <a:endParaRPr lang="en-US" sz="900" dirty="0"/>
           </a:p>
@@ -11201,7 +11201,7 @@
                 <a:ea typeface="Arial" pitchFamily="34" charset="-122"/>
                 <a:cs typeface="Arial" pitchFamily="34" charset="-120"/>
               </a:rPr>
-              <a:t>「寝るだけなので、狭くても問題なく、ベッドは快適に睡眠をとることができました」</a:t>
+              <a:t>「設備は必要なものはすべてそろっていて、必要十分です」</a:t>
             </a:r>
             <a:endParaRPr lang="en-US" sz="900" dirty="0"/>
           </a:p>
@@ -11307,7 +11307,7 @@
                 <a:ea typeface="Arial" pitchFamily="34" charset="-122"/>
                 <a:cs typeface="Arial" pitchFamily="34" charset="-120"/>
               </a:rPr>
-              <a:t>1件</a:t>
+              <a:t>2件</a:t>
             </a:r>
             <a:endParaRPr lang="en-US" sz="900" dirty="0"/>
           </a:p>
@@ -11346,7 +11346,7 @@
                 <a:ea typeface="Arial" pitchFamily="34" charset="-122"/>
                 <a:cs typeface="Arial" pitchFamily="34" charset="-120"/>
               </a:rPr>
-              <a:t>部屋の広さ</a:t>
+              <a:t>朝食</a:t>
             </a:r>
             <a:endParaRPr lang="en-US" sz="1300" dirty="0"/>
           </a:p>
@@ -11385,7 +11385,7 @@
                 <a:ea typeface="Arial" pitchFamily="34" charset="-122"/>
                 <a:cs typeface="Arial" pitchFamily="34" charset="-120"/>
               </a:rPr>
-              <a:t>なお、ベッドの下に大型荷物を収納できるスペースがないので、大きい荷物をご持参の方は注意する必要がありそうです</a:t>
+              <a:t>ビュッフェ式の朝食は1日あたり12～16カナダドルも追加料金がかかるので、近くにスーパーやコンビニがあることを考え...</a:t>
             </a:r>
             <a:endParaRPr lang="en-US" sz="900" dirty="0"/>
           </a:p>
@@ -11424,7 +11424,7 @@
                 <a:ea typeface="Arial" pitchFamily="34" charset="-122"/>
                 <a:cs typeface="Arial" pitchFamily="34" charset="-120"/>
               </a:rPr>
-              <a:t>「なお、ベッドの下に大型荷物を収納できるスペースがないので、大きい荷物をご持参の方は注意する必要がありそうです」</a:t>
+              <a:t>「食事の値段も当日に朝食券を買うと1800円になって結構割高なのですが、クオリティとしては個人的にはお値段に見合った...」</a:t>
             </a:r>
             <a:endParaRPr lang="en-US" sz="900" dirty="0"/>
           </a:p>
@@ -11530,7 +11530,7 @@
                 <a:ea typeface="Arial" pitchFamily="34" charset="-122"/>
                 <a:cs typeface="Arial" pitchFamily="34" charset="-120"/>
               </a:rPr>
-              <a:t>1件</a:t>
+              <a:t>2件</a:t>
             </a:r>
             <a:endParaRPr lang="en-US" sz="900" dirty="0"/>
           </a:p>
@@ -11569,7 +11569,7 @@
                 <a:ea typeface="Arial" pitchFamily="34" charset="-122"/>
                 <a:cs typeface="Arial" pitchFamily="34" charset="-120"/>
               </a:rPr>
-              <a:t>コストパフォーマンス</a:t>
+              <a:t>コンビニ・周辺施設</a:t>
             </a:r>
             <a:endParaRPr lang="en-US" sz="1300" dirty="0"/>
           </a:p>
@@ -11608,7 +11608,7 @@
                 <a:ea typeface="Arial" pitchFamily="34" charset="-122"/>
                 <a:cs typeface="Arial" pitchFamily="34" charset="-120"/>
               </a:rPr>
-              <a:t>何と言ってもお値段がお手頃なのでねるだけなら充分です チェックアウトスムーズに出来るのも良い</a:t>
+              <a:t>ビュッフェ式の朝食は1日あたり12～16カナダドルも追加料金がかかるので、近くにスーパーやコンビニがあることを考え...</a:t>
             </a:r>
             <a:endParaRPr lang="en-US" sz="900" dirty="0"/>
           </a:p>
@@ -11647,7 +11647,7 @@
                 <a:ea typeface="Arial" pitchFamily="34" charset="-122"/>
                 <a:cs typeface="Arial" pitchFamily="34" charset="-120"/>
               </a:rPr>
-              <a:t>「何と言ってもお値段がお手頃なのでねるだけなら充分です チェックアウトスムーズに出来るのも良い」</a:t>
+              <a:t>「駅近で周りにスーパー、コンビニがあるところ」</a:t>
             </a:r>
             <a:endParaRPr lang="en-US" sz="900" dirty="0"/>
           </a:p>
@@ -12337,7 +12337,7 @@
                           <a:ea typeface="Arial" pitchFamily="34" charset="-122"/>
                           <a:cs typeface="Arial" pitchFamily="34" charset="-120"/>
                         </a:rPr>
-                        <a:t>部屋は狭いけれど、ほぼ寝るだけだから問題なし</a:t>
+                        <a:t>The room itself was decent -- small, but standard for APA...</a:t>
                       </a:r>
                       <a:endParaRPr lang="en-US" sz="900" dirty="0">
                         <a:latin typeface="Arial" charset="0"/>
@@ -12405,7 +12405,7 @@
                           <a:ea typeface="Arial" pitchFamily="34" charset="-122"/>
                           <a:cs typeface="Arial" pitchFamily="34" charset="-120"/>
                         </a:rPr>
-                        <a:t>4件</a:t>
+                        <a:t>5件</a:t>
                       </a:r>
                       <a:endParaRPr lang="en-US" sz="900" dirty="0">
                         <a:latin typeface="Arial" charset="0"/>
@@ -12611,7 +12611,7 @@
                           <a:ea typeface="Arial" pitchFamily="34" charset="-122"/>
                           <a:cs typeface="Arial" pitchFamily="34" charset="-120"/>
                         </a:rPr>
-                        <a:t>水回りはもう少し掃除がされているといいなと感じました</a:t>
+                        <a:t>The room itself was decent -- small, but standard for APA...</a:t>
                       </a:r>
                       <a:endParaRPr lang="en-US" sz="900" dirty="0">
                         <a:latin typeface="Arial" charset="0"/>
@@ -12679,7 +12679,7 @@
                           <a:ea typeface="Arial" pitchFamily="34" charset="-122"/>
                           <a:cs typeface="Arial" pitchFamily="34" charset="-120"/>
                         </a:rPr>
-                        <a:t>3件</a:t>
+                        <a:t>4件</a:t>
                       </a:r>
                       <a:endParaRPr lang="en-US" sz="900" dirty="0">
                         <a:latin typeface="Arial" charset="0"/>
@@ -12817,7 +12817,7 @@
                           <a:ea typeface="Arial" pitchFamily="34" charset="-122"/>
                           <a:cs typeface="Arial" pitchFamily="34" charset="-120"/>
                         </a:rPr>
-                        <a:t>清掃不備</a:t>
+                        <a:t>エアコン・空調</a:t>
                       </a:r>
                       <a:endParaRPr lang="en-US" sz="900" dirty="0">
                         <a:latin typeface="Arial" charset="0"/>
@@ -12885,7 +12885,7 @@
                           <a:ea typeface="Arial" pitchFamily="34" charset="-122"/>
                           <a:cs typeface="Arial" pitchFamily="34" charset="-120"/>
                         </a:rPr>
-                        <a:t>そこは汚くて埃っぽく、以前の訪問時の残骸も散乱していた</a:t>
+                        <a:t>Coming from Keikyu-Kamata there was a shoutengai giving p...</a:t>
                       </a:r>
                       <a:endParaRPr lang="en-US" sz="900" dirty="0">
                         <a:latin typeface="Arial" charset="0"/>
@@ -13091,7 +13091,7 @@
                           <a:ea typeface="Arial" pitchFamily="34" charset="-122"/>
                           <a:cs typeface="Arial" pitchFamily="34" charset="-120"/>
                         </a:rPr>
-                        <a:t>防音性能</a:t>
+                        <a:t>清掃不備</a:t>
                       </a:r>
                       <a:endParaRPr lang="en-US" sz="900" dirty="0">
                         <a:latin typeface="Arial" charset="0"/>
@@ -13159,7 +13159,7 @@
                           <a:ea typeface="Arial" pitchFamily="34" charset="-122"/>
                           <a:cs typeface="Arial" pitchFamily="34" charset="-120"/>
                         </a:rPr>
-                        <a:t>道路沿いだったけど防音がしっかりされていて外の音は聞こえない</a:t>
+                        <a:t>そこは汚くて埃っぽく、以前の訪問時の残骸も散乱していた</a:t>
                       </a:r>
                       <a:endParaRPr lang="en-US" sz="900" dirty="0">
                         <a:latin typeface="Arial" charset="0"/>
@@ -13227,7 +13227,7 @@
                           <a:ea typeface="Arial" pitchFamily="34" charset="-122"/>
                           <a:cs typeface="Arial" pitchFamily="34" charset="-120"/>
                         </a:rPr>
-                        <a:t>1件</a:t>
+                        <a:t>2件</a:t>
                       </a:r>
                       <a:endParaRPr lang="en-US" sz="900" dirty="0">
                         <a:latin typeface="Arial" charset="0"/>
@@ -13365,7 +13365,7 @@
                           <a:ea typeface="Arial" pitchFamily="34" charset="-122"/>
                           <a:cs typeface="Arial" pitchFamily="34" charset="-120"/>
                         </a:rPr>
-                        <a:t>臭い・匂い</a:t>
+                        <a:t>防音性能</a:t>
                       </a:r>
                       <a:endParaRPr lang="en-US" sz="900" dirty="0">
                         <a:latin typeface="Arial" charset="0"/>
@@ -13433,7 +13433,7 @@
                           <a:ea typeface="Arial" pitchFamily="34" charset="-122"/>
                           <a:cs typeface="Arial" pitchFamily="34" charset="-120"/>
                         </a:rPr>
-                        <a:t>禁煙の部屋を予約しましたが、かなり強いタバコの匂いがしました</a:t>
+                        <a:t>道路沿いだったけど防音がしっかりされていて外の音は聞こえない</a:t>
                       </a:r>
                       <a:endParaRPr lang="en-US" sz="900" dirty="0">
                         <a:latin typeface="Arial" charset="0"/>
@@ -13639,7 +13639,7 @@
                           <a:ea typeface="Arial" pitchFamily="34" charset="-122"/>
                           <a:cs typeface="Arial" pitchFamily="34" charset="-120"/>
                         </a:rPr>
-                        <a:t>エアコン・空調</a:t>
+                        <a:t>臭い・匂い</a:t>
                       </a:r>
                       <a:endParaRPr lang="en-US" sz="900" dirty="0">
                         <a:latin typeface="Arial" charset="0"/>
@@ -13707,7 +13707,7 @@
                           <a:ea typeface="Arial" pitchFamily="34" charset="-122"/>
                           <a:cs typeface="Arial" pitchFamily="34" charset="-120"/>
                         </a:rPr>
-                        <a:t>エアコンが壊れてる エアコンが壊れてる</a:t>
+                        <a:t>禁煙の部屋を予約しましたが、かなり強いタバコの匂いがしました</a:t>
                       </a:r>
                       <a:endParaRPr lang="en-US" sz="900" dirty="0">
                         <a:latin typeface="Arial" charset="0"/>

--- a/納品レポート/ホテル別レポート/apa_kamata_口コミ分析レポート.pptx
+++ b/納品レポート/ホテル別レポート/apa_kamata_口コミ分析レポート.pptx
@@ -2812,7 +2812,7 @@
                 <a:ea typeface="Arial" pitchFamily="34" charset="-122"/>
                 <a:cs typeface="Arial" pitchFamily="34" charset="-120"/>
               </a:rPr>
-              <a:t>作成日：2026年3月25日</a:t>
+              <a:t>作成日：2026年3月26日</a:t>
             </a:r>
             <a:endParaRPr lang="en-US" sz="1000" dirty="0"/>
           </a:p>

--- a/納品レポート/ホテル別レポート/apa_kamata_口コミ分析レポート.pptx
+++ b/納品レポート/ホテル別レポート/apa_kamata_口コミ分析レポート.pptx
@@ -2812,7 +2812,7 @@
                 <a:ea typeface="Arial" pitchFamily="34" charset="-122"/>
                 <a:cs typeface="Arial" pitchFamily="34" charset="-120"/>
               </a:rPr>
-              <a:t>作成日：2026年3月26日</a:t>
+              <a:t>作成日：2026年3月27日</a:t>
             </a:r>
             <a:endParaRPr lang="en-US" sz="1000" dirty="0"/>
           </a:p>

--- a/納品レポート/ホテル別レポート/apa_kamata_口コミ分析レポート.pptx
+++ b/納品レポート/ホテル別レポート/apa_kamata_口コミ分析レポート.pptx
@@ -217,7 +217,7 @@
                   <c:v>7</c:v>
                 </c:pt>
                 <c:pt idx="4">
-                  <c:v>6.8</c:v>
+                  <c:v>6.69</c:v>
                 </c:pt>
               </c:numCache>
             </c:numRef>
@@ -563,7 +563,7 @@
                   <c:v>36</c:v>
                 </c:pt>
                 <c:pt idx="1">
-                  <c:v>15</c:v>
+                  <c:v>16</c:v>
                 </c:pt>
                 <c:pt idx="2">
                   <c:v>6</c:v>
@@ -832,7 +832,7 @@
                   <c:v>8</c:v>
                 </c:pt>
                 <c:pt idx="5">
-                  <c:v>2</c:v>
+                  <c:v>3</c:v>
                 </c:pt>
                 <c:pt idx="6">
                   <c:v>4</c:v>
@@ -2792,7 +2792,7 @@
                 <a:ea typeface="Arial" pitchFamily="34" charset="-122"/>
                 <a:cs typeface="Arial" pitchFamily="34" charset="-120"/>
               </a:rPr>
-              <a:t>レビュー総数：57件（5サイト）</a:t>
+              <a:t>レビュー総数：58件（5サイト）</a:t>
             </a:r>
             <a:endParaRPr lang="en-US" sz="1000" dirty="0"/>
           </a:p>
@@ -2812,7 +2812,7 @@
                 <a:ea typeface="Arial" pitchFamily="34" charset="-122"/>
                 <a:cs typeface="Arial" pitchFamily="34" charset="-120"/>
               </a:rPr>
-              <a:t>作成日：2026年3月27日</a:t>
+              <a:t>作成日：2026年3月28日</a:t>
             </a:r>
             <a:endParaRPr lang="en-US" sz="1000" dirty="0"/>
           </a:p>
@@ -3358,7 +3358,7 @@
                           <a:ea typeface="Arial" pitchFamily="34" charset="-122"/>
                           <a:cs typeface="Arial" pitchFamily="34" charset="-120"/>
                         </a:rPr>
-                        <a:t>7.39点</a:t>
+                        <a:t>7.34点</a:t>
                       </a:r>
                       <a:endParaRPr lang="en-US" sz="1000" dirty="0">
                         <a:latin typeface="Arial" charset="0"/>
@@ -3426,7 +3426,7 @@
                           <a:ea typeface="Arial" pitchFamily="34" charset="-122"/>
                           <a:cs typeface="Arial" pitchFamily="34" charset="-120"/>
                         </a:rPr>
-                        <a:t>7.9点以上</a:t>
+                        <a:t>7.8点以上</a:t>
                       </a:r>
                       <a:endParaRPr lang="en-US" sz="1000" dirty="0">
                         <a:latin typeface="Arial" charset="0"/>
@@ -3632,7 +3632,7 @@
                           <a:ea typeface="Arial" pitchFamily="34" charset="-122"/>
                           <a:cs typeface="Arial" pitchFamily="34" charset="-120"/>
                         </a:rPr>
-                        <a:t>63.2%</a:t>
+                        <a:t>62.1%</a:t>
                       </a:r>
                       <a:endParaRPr lang="en-US" sz="1000" dirty="0">
                         <a:latin typeface="Arial" charset="0"/>
@@ -3700,7 +3700,7 @@
                           <a:ea typeface="Arial" pitchFamily="34" charset="-122"/>
                           <a:cs typeface="Arial" pitchFamily="34" charset="-120"/>
                         </a:rPr>
-                        <a:t>73%以上</a:t>
+                        <a:t>72%以上</a:t>
                       </a:r>
                       <a:endParaRPr lang="en-US" sz="1000" dirty="0">
                         <a:latin typeface="Arial" charset="0"/>
@@ -3906,7 +3906,7 @@
                           <a:ea typeface="Arial" pitchFamily="34" charset="-122"/>
                           <a:cs typeface="Arial" pitchFamily="34" charset="-120"/>
                         </a:rPr>
-                        <a:t>10.5%</a:t>
+                        <a:t>10.3%</a:t>
                       </a:r>
                       <a:endParaRPr lang="en-US" sz="1000" dirty="0">
                         <a:latin typeface="Arial" charset="0"/>
@@ -3974,7 +3974,7 @@
                           <a:ea typeface="Arial" pitchFamily="34" charset="-122"/>
                           <a:cs typeface="Arial" pitchFamily="34" charset="-120"/>
                         </a:rPr>
-                        <a:t>6%以下</a:t>
+                        <a:t>5%以下</a:t>
                       </a:r>
                       <a:endParaRPr lang="en-US" sz="1000" dirty="0">
                         <a:latin typeface="Arial" charset="0"/>
@@ -4180,7 +4180,7 @@
                           <a:ea typeface="Arial" pitchFamily="34" charset="-122"/>
                           <a:cs typeface="Arial" pitchFamily="34" charset="-120"/>
                         </a:rPr>
-                        <a:t>6.8点</a:t>
+                        <a:t>6.7点</a:t>
                       </a:r>
                       <a:endParaRPr lang="en-US" sz="1000" dirty="0">
                         <a:latin typeface="Arial" charset="0"/>
@@ -4248,7 +4248,7 @@
                           <a:ea typeface="Arial" pitchFamily="34" charset="-122"/>
                           <a:cs typeface="Arial" pitchFamily="34" charset="-120"/>
                         </a:rPr>
-                        <a:t>7.8点以上</a:t>
+                        <a:t>7.7点以上</a:t>
                       </a:r>
                       <a:endParaRPr lang="en-US" sz="1000" dirty="0">
                         <a:latin typeface="Arial" charset="0"/>
@@ -4728,7 +4728,7 @@
                           <a:ea typeface="Arial" pitchFamily="34" charset="-122"/>
                           <a:cs typeface="Arial" pitchFamily="34" charset="-120"/>
                         </a:rPr>
-                        <a:t>約5件/期間</a:t>
+                        <a:t>約6件/期間</a:t>
                       </a:r>
                       <a:endParaRPr lang="en-US" sz="1000" dirty="0">
                         <a:latin typeface="Arial" charset="0"/>
@@ -4796,7 +4796,7 @@
                           <a:ea typeface="Arial" pitchFamily="34" charset="-122"/>
                           <a:cs typeface="Arial" pitchFamily="34" charset="-120"/>
                         </a:rPr>
-                        <a:t>2件以下</a:t>
+                        <a:t>3件以下</a:t>
                       </a:r>
                       <a:endParaRPr lang="en-US" sz="1000" dirty="0">
                         <a:latin typeface="Arial" charset="0"/>
@@ -5367,7 +5367,7 @@
                 <a:ea typeface="Arial" pitchFamily="34" charset="-122"/>
                 <a:cs typeface="Arial" pitchFamily="34" charset="-120"/>
               </a:rPr>
-              <a:t>7.39</a:t>
+              <a:t>7.34</a:t>
             </a:r>
             <a:endParaRPr lang="en-US" sz="3200" dirty="0"/>
           </a:p>
@@ -5492,7 +5492,7 @@
                 <a:ea typeface="Arial" pitchFamily="34" charset="-122"/>
                 <a:cs typeface="Arial" pitchFamily="34" charset="-120"/>
               </a:rPr>
-              <a:t>63.2%</a:t>
+              <a:t>62.1%</a:t>
             </a:r>
             <a:endParaRPr lang="en-US" sz="3200" dirty="0"/>
           </a:p>
@@ -5617,7 +5617,7 @@
                 <a:ea typeface="Arial" pitchFamily="34" charset="-122"/>
                 <a:cs typeface="Arial" pitchFamily="34" charset="-120"/>
               </a:rPr>
-              <a:t>10.5%</a:t>
+              <a:t>10.3%</a:t>
             </a:r>
             <a:endParaRPr lang="en-US" sz="3200" dirty="0"/>
           </a:p>
@@ -5742,7 +5742,7 @@
                 <a:ea typeface="Arial" pitchFamily="34" charset="-122"/>
                 <a:cs typeface="Arial" pitchFamily="34" charset="-120"/>
               </a:rPr>
-              <a:t>57件</a:t>
+              <a:t>58件</a:t>
             </a:r>
             <a:endParaRPr lang="en-US" sz="3200" dirty="0"/>
           </a:p>
@@ -5890,7 +5890,7 @@
                 <a:ea typeface="Arial" pitchFamily="34" charset="-122"/>
                 <a:cs typeface="Arial" pitchFamily="34" charset="-120"/>
               </a:rPr>
-              <a:t>  The location was great, located right halfway between JR ...</a:t>
+              <a:t>  他のアバよりも狭い 駅からは遠いが、その分比較的安い 羽田空港の乗り継ぎに利用するなら十分か 他のアバよりも狭い ...</a:t>
             </a:r>
             <a:endParaRPr lang="en-US" sz="1100" dirty="0"/>
           </a:p>
@@ -6118,7 +6118,7 @@
                 <a:ea typeface="Arial" pitchFamily="34" charset="-122"/>
                 <a:cs typeface="Arial" pitchFamily="34" charset="-120"/>
               </a:rPr>
-              <a:t>  The room itself was decent -- small, but standard for APA...</a:t>
+              <a:t>  他のアバよりも狭い 駅からは遠いが、その分比較的安い 羽田空港の乗り継ぎに利用するなら十分か 他のアバよりも狭い ...</a:t>
             </a:r>
             <a:endParaRPr lang="en-US" sz="1100" dirty="0"/>
           </a:p>
@@ -6551,7 +6551,7 @@
                 <a:ea typeface="Arial" pitchFamily="34" charset="-122"/>
                 <a:cs typeface="Arial" pitchFamily="34" charset="-120"/>
               </a:rPr>
-              <a:t>7.39</a:t>
+              <a:t>7.34</a:t>
             </a:r>
             <a:endParaRPr lang="en-US" sz="3200" dirty="0"/>
           </a:p>
@@ -6676,7 +6676,7 @@
                 <a:ea typeface="Arial" pitchFamily="34" charset="-122"/>
                 <a:cs typeface="Arial" pitchFamily="34" charset="-120"/>
               </a:rPr>
-              <a:t>63.2%</a:t>
+              <a:t>62.1%</a:t>
             </a:r>
             <a:endParaRPr lang="en-US" sz="3200" dirty="0"/>
           </a:p>
@@ -6801,7 +6801,7 @@
                 <a:ea typeface="Arial" pitchFamily="34" charset="-122"/>
                 <a:cs typeface="Arial" pitchFamily="34" charset="-120"/>
               </a:rPr>
-              <a:t>10.5%</a:t>
+              <a:t>10.3%</a:t>
             </a:r>
             <a:endParaRPr lang="en-US" sz="3200" dirty="0"/>
           </a:p>
@@ -6926,7 +6926,7 @@
                 <a:ea typeface="Arial" pitchFamily="34" charset="-122"/>
                 <a:cs typeface="Arial" pitchFamily="34" charset="-120"/>
               </a:rPr>
-              <a:t>57件</a:t>
+              <a:t>58件</a:t>
             </a:r>
             <a:endParaRPr lang="en-US" sz="3200" dirty="0"/>
           </a:p>
@@ -7396,7 +7396,7 @@
                 <a:ea typeface="Arial" pitchFamily="34" charset="-122"/>
                 <a:cs typeface="Arial" pitchFamily="34" charset="-120"/>
               </a:rPr>
-              <a:t>Agoda(6.8)が相対的に低い。口コミ返信の強化が急務</a:t>
+              <a:t>Agoda(6.7)が相対的に低い。口コミ返信の強化が急務</a:t>
             </a:r>
             <a:endParaRPr lang="en-US" sz="1100" dirty="0"/>
           </a:p>
@@ -9273,7 +9273,7 @@
                           <a:ea typeface="Arial" pitchFamily="34" charset="-122"/>
                           <a:cs typeface="Arial" pitchFamily="34" charset="-120"/>
                         </a:rPr>
-                        <a:t>15</a:t>
+                        <a:t>16</a:t>
                       </a:r>
                       <a:endParaRPr lang="en-US" sz="900" dirty="0">
                         <a:latin typeface="Arial" charset="0"/>
@@ -9341,7 +9341,7 @@
                           <a:ea typeface="Arial" pitchFamily="34" charset="-122"/>
                           <a:cs typeface="Arial" pitchFamily="34" charset="-120"/>
                         </a:rPr>
-                        <a:t>6.8</a:t>
+                        <a:t>6.69</a:t>
                       </a:r>
                       <a:endParaRPr lang="en-US" sz="900" dirty="0">
                         <a:latin typeface="Arial" charset="0"/>
@@ -9477,7 +9477,7 @@
                           <a:ea typeface="Arial" pitchFamily="34" charset="-122"/>
                           <a:cs typeface="Arial" pitchFamily="34" charset="-120"/>
                         </a:rPr>
-                        <a:t>6.8</a:t>
+                        <a:t>6.69</a:t>
                       </a:r>
                       <a:endParaRPr lang="en-US" sz="900" dirty="0">
                         <a:latin typeface="Arial" charset="0"/>
@@ -9885,7 +9885,7 @@
                 <a:ea typeface="Arial" pitchFamily="34" charset="-122"/>
                 <a:cs typeface="Arial" pitchFamily="34" charset="-120"/>
               </a:rPr>
-              <a:t>36件（63.2%）</a:t>
+              <a:t>36件（62.1%）</a:t>
             </a:r>
             <a:endParaRPr lang="en-US" sz="1100" dirty="0"/>
           </a:p>
@@ -9983,7 +9983,7 @@
                 <a:ea typeface="Arial" pitchFamily="34" charset="-122"/>
                 <a:cs typeface="Arial" pitchFamily="34" charset="-120"/>
               </a:rPr>
-              <a:t>15件（26.3%）</a:t>
+              <a:t>16件（27.6%）</a:t>
             </a:r>
             <a:endParaRPr lang="en-US" sz="1100" dirty="0"/>
           </a:p>
@@ -10081,7 +10081,7 @@
                 <a:ea typeface="Arial" pitchFamily="34" charset="-122"/>
                 <a:cs typeface="Arial" pitchFamily="34" charset="-120"/>
               </a:rPr>
-              <a:t>6件（10.5%）</a:t>
+              <a:t>6件（10.3%）</a:t>
             </a:r>
             <a:endParaRPr lang="en-US" sz="1100" dirty="0"/>
           </a:p>
@@ -10493,7 +10493,7 @@
                 <a:ea typeface="Arial" pitchFamily="34" charset="-122"/>
                 <a:cs typeface="Arial" pitchFamily="34" charset="-120"/>
               </a:rPr>
-              <a:t>The location was great, located right halfway between JR ...</a:t>
+              <a:t>他のアバよりも狭い 駅からは遠いが、その分比較的安い 羽田空港の乗り継ぎに利用するなら十分か 他のアバよりも狭い ...</a:t>
             </a:r>
             <a:endParaRPr lang="en-US" sz="900" dirty="0"/>
           </a:p>
@@ -10532,7 +10532,7 @@
                 <a:ea typeface="Arial" pitchFamily="34" charset="-122"/>
                 <a:cs typeface="Arial" pitchFamily="34" charset="-120"/>
               </a:rPr>
-              <a:t>「都心から少し離れていますが、羽田空港からの交通の便が良く、かつ京急とJRの両方からアクセスできる点がお勧めです」</a:t>
+              <a:t>「The location was great, located right halfway between JR ...」</a:t>
             </a:r>
             <a:endParaRPr lang="en-US" sz="900" dirty="0"/>
           </a:p>
@@ -11346,6 +11346,229 @@
                 <a:ea typeface="Arial" pitchFamily="34" charset="-122"/>
                 <a:cs typeface="Arial" pitchFamily="34" charset="-120"/>
               </a:rPr>
+              <a:t>コストパフォーマンス</a:t>
+            </a:r>
+            <a:endParaRPr lang="en-US" sz="1300" dirty="0"/>
+          </a:p>
+        </p:txBody>
+      </p:sp>
+      <p:sp>
+        <p:nvSpPr>
+          <p:cNvPr id="38" name="Text 36"/>
+          <p:cNvSpPr/>
+          <p:nvPr/>
+        </p:nvSpPr>
+        <p:spPr>
+          <a:xfrm>
+            <a:off x="3429000" y="3246120"/>
+            <a:ext cx="2377440" cy="365760"/>
+          </a:xfrm>
+          <a:prstGeom prst="rect">
+            <a:avLst/>
+          </a:prstGeom>
+          <a:noFill/>
+          <a:ln/>
+        </p:spPr>
+        <p:txBody>
+          <a:bodyPr wrap="square" lIns="0" tIns="0" rIns="0" bIns="0" rtlCol="0" anchor="ctr"/>
+          <a:lstStyle/>
+          <a:p>
+            <a:pPr indent="0" marL="0">
+              <a:buNone/>
+            </a:pPr>
+            <a:r>
+              <a:rPr lang="en-US" sz="900" dirty="0">
+                <a:solidFill>
+                  <a:srgbClr val="64748B"/>
+                </a:solidFill>
+                <a:latin typeface="Arial" pitchFamily="34" charset="0"/>
+                <a:ea typeface="Arial" pitchFamily="34" charset="-122"/>
+                <a:cs typeface="Arial" pitchFamily="34" charset="-120"/>
+              </a:rPr>
+              <a:t>他のアバよりも狭い 駅からは遠いが、その分比較的安い 羽田空港の乗り継ぎに利用するなら十分か 他のアバよりも狭い ...</a:t>
+            </a:r>
+            <a:endParaRPr lang="en-US" sz="900" dirty="0"/>
+          </a:p>
+        </p:txBody>
+      </p:sp>
+      <p:sp>
+        <p:nvSpPr>
+          <p:cNvPr id="39" name="Text 37"/>
+          <p:cNvSpPr/>
+          <p:nvPr/>
+        </p:nvSpPr>
+        <p:spPr>
+          <a:xfrm>
+            <a:off x="3429000" y="3657600"/>
+            <a:ext cx="2377440" cy="640080"/>
+          </a:xfrm>
+          <a:prstGeom prst="rect">
+            <a:avLst/>
+          </a:prstGeom>
+          <a:noFill/>
+          <a:ln/>
+        </p:spPr>
+        <p:txBody>
+          <a:bodyPr wrap="square" lIns="0" tIns="0" rIns="0" bIns="0" rtlCol="0" anchor="ctr"/>
+          <a:lstStyle/>
+          <a:p>
+            <a:pPr indent="0" marL="0">
+              <a:buNone/>
+            </a:pPr>
+            <a:r>
+              <a:rPr lang="en-US" sz="900" i="1" dirty="0">
+                <a:solidFill>
+                  <a:srgbClr val="3B7DD8"/>
+                </a:solidFill>
+                <a:latin typeface="Arial" pitchFamily="34" charset="0"/>
+                <a:ea typeface="Arial" pitchFamily="34" charset="-122"/>
+                <a:cs typeface="Arial" pitchFamily="34" charset="-120"/>
+              </a:rPr>
+              <a:t>「何と言ってもお値段がお手頃なのでねるだけなら充分です チェックアウトスムーズに出来るのも良い」</a:t>
+            </a:r>
+            <a:endParaRPr lang="en-US" sz="900" dirty="0"/>
+          </a:p>
+        </p:txBody>
+      </p:sp>
+      <p:sp>
+        <p:nvSpPr>
+          <p:cNvPr id="40" name="Shape 38"/>
+          <p:cNvSpPr/>
+          <p:nvPr/>
+        </p:nvSpPr>
+        <p:spPr>
+          <a:xfrm>
+            <a:off x="6126480" y="2880360"/>
+            <a:ext cx="2651760" cy="1600200"/>
+          </a:xfrm>
+          <a:prstGeom prst="rect">
+            <a:avLst/>
+          </a:prstGeom>
+          <a:solidFill>
+            <a:srgbClr val="FFFFFF"/>
+          </a:solidFill>
+          <a:ln/>
+          <a:effectLst>
+            <a:outerShdw sx="100000" sy="100000" kx="0" ky="0" algn="bl" rotWithShape="0" blurRad="50800" dist="25400" dir="8100000">
+              <a:srgbClr val="000000">
+                <a:alpha val="10000"/>
+              </a:srgbClr>
+            </a:outerShdw>
+          </a:effectLst>
+        </p:spPr>
+      </p:sp>
+      <p:sp>
+        <p:nvSpPr>
+          <p:cNvPr id="41" name="Shape 39"/>
+          <p:cNvSpPr/>
+          <p:nvPr/>
+        </p:nvSpPr>
+        <p:spPr>
+          <a:xfrm>
+            <a:off x="6126480" y="2880360"/>
+            <a:ext cx="54864" cy="1600200"/>
+          </a:xfrm>
+          <a:prstGeom prst="rect">
+            <a:avLst/>
+          </a:prstGeom>
+          <a:solidFill>
+            <a:srgbClr val="16A34A"/>
+          </a:solidFill>
+          <a:ln/>
+        </p:spPr>
+      </p:sp>
+      <p:sp>
+        <p:nvSpPr>
+          <p:cNvPr id="42" name="Shape 40"/>
+          <p:cNvSpPr/>
+          <p:nvPr/>
+        </p:nvSpPr>
+        <p:spPr>
+          <a:xfrm>
+            <a:off x="7955280" y="2953512"/>
+            <a:ext cx="658368" cy="228600"/>
+          </a:xfrm>
+          <a:prstGeom prst="rect">
+            <a:avLst/>
+          </a:prstGeom>
+          <a:solidFill>
+            <a:srgbClr val="DCFCE7"/>
+          </a:solidFill>
+          <a:ln/>
+        </p:spPr>
+      </p:sp>
+      <p:sp>
+        <p:nvSpPr>
+          <p:cNvPr id="43" name="Text 41"/>
+          <p:cNvSpPr/>
+          <p:nvPr/>
+        </p:nvSpPr>
+        <p:spPr>
+          <a:xfrm>
+            <a:off x="7955280" y="2953512"/>
+            <a:ext cx="658368" cy="228600"/>
+          </a:xfrm>
+          <a:prstGeom prst="rect">
+            <a:avLst/>
+          </a:prstGeom>
+          <a:noFill/>
+          <a:ln/>
+        </p:spPr>
+        <p:txBody>
+          <a:bodyPr wrap="square" lIns="0" tIns="0" rIns="0" bIns="0" rtlCol="0" anchor="ctr"/>
+          <a:lstStyle/>
+          <a:p>
+            <a:pPr algn="ctr" indent="0" marL="0">
+              <a:buNone/>
+            </a:pPr>
+            <a:r>
+              <a:rPr lang="en-US" sz="900" b="1" dirty="0">
+                <a:solidFill>
+                  <a:srgbClr val="16A34A"/>
+                </a:solidFill>
+                <a:latin typeface="Arial" pitchFamily="34" charset="0"/>
+                <a:ea typeface="Arial" pitchFamily="34" charset="-122"/>
+                <a:cs typeface="Arial" pitchFamily="34" charset="-120"/>
+              </a:rPr>
+              <a:t>2件</a:t>
+            </a:r>
+            <a:endParaRPr lang="en-US" sz="900" dirty="0"/>
+          </a:p>
+        </p:txBody>
+      </p:sp>
+      <p:sp>
+        <p:nvSpPr>
+          <p:cNvPr id="44" name="Text 42"/>
+          <p:cNvSpPr/>
+          <p:nvPr/>
+        </p:nvSpPr>
+        <p:spPr>
+          <a:xfrm>
+            <a:off x="6263640" y="2953512"/>
+            <a:ext cx="1645920" cy="274320"/>
+          </a:xfrm>
+          <a:prstGeom prst="rect">
+            <a:avLst/>
+          </a:prstGeom>
+          <a:noFill/>
+          <a:ln/>
+        </p:spPr>
+        <p:txBody>
+          <a:bodyPr wrap="square" lIns="0" tIns="0" rIns="0" bIns="0" rtlCol="0" anchor="ctr"/>
+          <a:lstStyle/>
+          <a:p>
+            <a:pPr indent="0" marL="0">
+              <a:buNone/>
+            </a:pPr>
+            <a:r>
+              <a:rPr lang="en-US" sz="1300" b="1" dirty="0">
+                <a:solidFill>
+                  <a:srgbClr val="1A2744"/>
+                </a:solidFill>
+                <a:latin typeface="Arial" pitchFamily="34" charset="0"/>
+                <a:ea typeface="Arial" pitchFamily="34" charset="-122"/>
+                <a:cs typeface="Arial" pitchFamily="34" charset="-120"/>
+              </a:rPr>
               <a:t>朝食</a:t>
             </a:r>
             <a:endParaRPr lang="en-US" sz="1300" dirty="0"/>
@@ -11354,13 +11577,13 @@
       </p:sp>
       <p:sp>
         <p:nvSpPr>
-          <p:cNvPr id="38" name="Text 36"/>
-          <p:cNvSpPr/>
-          <p:nvPr/>
-        </p:nvSpPr>
-        <p:spPr>
-          <a:xfrm>
-            <a:off x="3429000" y="3246120"/>
+          <p:cNvPr id="45" name="Text 43"/>
+          <p:cNvSpPr/>
+          <p:nvPr/>
+        </p:nvSpPr>
+        <p:spPr>
+          <a:xfrm>
+            <a:off x="6263640" y="3246120"/>
             <a:ext cx="2377440" cy="365760"/>
           </a:xfrm>
           <a:prstGeom prst="rect">
@@ -11393,13 +11616,13 @@
       </p:sp>
       <p:sp>
         <p:nvSpPr>
-          <p:cNvPr id="39" name="Text 37"/>
-          <p:cNvSpPr/>
-          <p:nvPr/>
-        </p:nvSpPr>
-        <p:spPr>
-          <a:xfrm>
-            <a:off x="3429000" y="3657600"/>
+          <p:cNvPr id="46" name="Text 44"/>
+          <p:cNvSpPr/>
+          <p:nvPr/>
+        </p:nvSpPr>
+        <p:spPr>
+          <a:xfrm>
+            <a:off x="6263640" y="3657600"/>
             <a:ext cx="2377440" cy="640080"/>
           </a:xfrm>
           <a:prstGeom prst="rect">
@@ -11425,229 +11648,6 @@
                 <a:cs typeface="Arial" pitchFamily="34" charset="-120"/>
               </a:rPr>
               <a:t>「食事の値段も当日に朝食券を買うと1800円になって結構割高なのですが、クオリティとしては個人的にはお値段に見合った...」</a:t>
-            </a:r>
-            <a:endParaRPr lang="en-US" sz="900" dirty="0"/>
-          </a:p>
-        </p:txBody>
-      </p:sp>
-      <p:sp>
-        <p:nvSpPr>
-          <p:cNvPr id="40" name="Shape 38"/>
-          <p:cNvSpPr/>
-          <p:nvPr/>
-        </p:nvSpPr>
-        <p:spPr>
-          <a:xfrm>
-            <a:off x="6126480" y="2880360"/>
-            <a:ext cx="2651760" cy="1600200"/>
-          </a:xfrm>
-          <a:prstGeom prst="rect">
-            <a:avLst/>
-          </a:prstGeom>
-          <a:solidFill>
-            <a:srgbClr val="FFFFFF"/>
-          </a:solidFill>
-          <a:ln/>
-          <a:effectLst>
-            <a:outerShdw sx="100000" sy="100000" kx="0" ky="0" algn="bl" rotWithShape="0" blurRad="50800" dist="25400" dir="8100000">
-              <a:srgbClr val="000000">
-                <a:alpha val="10000"/>
-              </a:srgbClr>
-            </a:outerShdw>
-          </a:effectLst>
-        </p:spPr>
-      </p:sp>
-      <p:sp>
-        <p:nvSpPr>
-          <p:cNvPr id="41" name="Shape 39"/>
-          <p:cNvSpPr/>
-          <p:nvPr/>
-        </p:nvSpPr>
-        <p:spPr>
-          <a:xfrm>
-            <a:off x="6126480" y="2880360"/>
-            <a:ext cx="54864" cy="1600200"/>
-          </a:xfrm>
-          <a:prstGeom prst="rect">
-            <a:avLst/>
-          </a:prstGeom>
-          <a:solidFill>
-            <a:srgbClr val="16A34A"/>
-          </a:solidFill>
-          <a:ln/>
-        </p:spPr>
-      </p:sp>
-      <p:sp>
-        <p:nvSpPr>
-          <p:cNvPr id="42" name="Shape 40"/>
-          <p:cNvSpPr/>
-          <p:nvPr/>
-        </p:nvSpPr>
-        <p:spPr>
-          <a:xfrm>
-            <a:off x="7955280" y="2953512"/>
-            <a:ext cx="658368" cy="228600"/>
-          </a:xfrm>
-          <a:prstGeom prst="rect">
-            <a:avLst/>
-          </a:prstGeom>
-          <a:solidFill>
-            <a:srgbClr val="DCFCE7"/>
-          </a:solidFill>
-          <a:ln/>
-        </p:spPr>
-      </p:sp>
-      <p:sp>
-        <p:nvSpPr>
-          <p:cNvPr id="43" name="Text 41"/>
-          <p:cNvSpPr/>
-          <p:nvPr/>
-        </p:nvSpPr>
-        <p:spPr>
-          <a:xfrm>
-            <a:off x="7955280" y="2953512"/>
-            <a:ext cx="658368" cy="228600"/>
-          </a:xfrm>
-          <a:prstGeom prst="rect">
-            <a:avLst/>
-          </a:prstGeom>
-          <a:noFill/>
-          <a:ln/>
-        </p:spPr>
-        <p:txBody>
-          <a:bodyPr wrap="square" lIns="0" tIns="0" rIns="0" bIns="0" rtlCol="0" anchor="ctr"/>
-          <a:lstStyle/>
-          <a:p>
-            <a:pPr algn="ctr" indent="0" marL="0">
-              <a:buNone/>
-            </a:pPr>
-            <a:r>
-              <a:rPr lang="en-US" sz="900" b="1" dirty="0">
-                <a:solidFill>
-                  <a:srgbClr val="16A34A"/>
-                </a:solidFill>
-                <a:latin typeface="Arial" pitchFamily="34" charset="0"/>
-                <a:ea typeface="Arial" pitchFamily="34" charset="-122"/>
-                <a:cs typeface="Arial" pitchFamily="34" charset="-120"/>
-              </a:rPr>
-              <a:t>2件</a:t>
-            </a:r>
-            <a:endParaRPr lang="en-US" sz="900" dirty="0"/>
-          </a:p>
-        </p:txBody>
-      </p:sp>
-      <p:sp>
-        <p:nvSpPr>
-          <p:cNvPr id="44" name="Text 42"/>
-          <p:cNvSpPr/>
-          <p:nvPr/>
-        </p:nvSpPr>
-        <p:spPr>
-          <a:xfrm>
-            <a:off x="6263640" y="2953512"/>
-            <a:ext cx="1645920" cy="274320"/>
-          </a:xfrm>
-          <a:prstGeom prst="rect">
-            <a:avLst/>
-          </a:prstGeom>
-          <a:noFill/>
-          <a:ln/>
-        </p:spPr>
-        <p:txBody>
-          <a:bodyPr wrap="square" lIns="0" tIns="0" rIns="0" bIns="0" rtlCol="0" anchor="ctr"/>
-          <a:lstStyle/>
-          <a:p>
-            <a:pPr indent="0" marL="0">
-              <a:buNone/>
-            </a:pPr>
-            <a:r>
-              <a:rPr lang="en-US" sz="1300" b="1" dirty="0">
-                <a:solidFill>
-                  <a:srgbClr val="1A2744"/>
-                </a:solidFill>
-                <a:latin typeface="Arial" pitchFamily="34" charset="0"/>
-                <a:ea typeface="Arial" pitchFamily="34" charset="-122"/>
-                <a:cs typeface="Arial" pitchFamily="34" charset="-120"/>
-              </a:rPr>
-              <a:t>コンビニ・周辺施設</a:t>
-            </a:r>
-            <a:endParaRPr lang="en-US" sz="1300" dirty="0"/>
-          </a:p>
-        </p:txBody>
-      </p:sp>
-      <p:sp>
-        <p:nvSpPr>
-          <p:cNvPr id="45" name="Text 43"/>
-          <p:cNvSpPr/>
-          <p:nvPr/>
-        </p:nvSpPr>
-        <p:spPr>
-          <a:xfrm>
-            <a:off x="6263640" y="3246120"/>
-            <a:ext cx="2377440" cy="365760"/>
-          </a:xfrm>
-          <a:prstGeom prst="rect">
-            <a:avLst/>
-          </a:prstGeom>
-          <a:noFill/>
-          <a:ln/>
-        </p:spPr>
-        <p:txBody>
-          <a:bodyPr wrap="square" lIns="0" tIns="0" rIns="0" bIns="0" rtlCol="0" anchor="ctr"/>
-          <a:lstStyle/>
-          <a:p>
-            <a:pPr indent="0" marL="0">
-              <a:buNone/>
-            </a:pPr>
-            <a:r>
-              <a:rPr lang="en-US" sz="900" dirty="0">
-                <a:solidFill>
-                  <a:srgbClr val="64748B"/>
-                </a:solidFill>
-                <a:latin typeface="Arial" pitchFamily="34" charset="0"/>
-                <a:ea typeface="Arial" pitchFamily="34" charset="-122"/>
-                <a:cs typeface="Arial" pitchFamily="34" charset="-120"/>
-              </a:rPr>
-              <a:t>ビュッフェ式の朝食は1日あたり12～16カナダドルも追加料金がかかるので、近くにスーパーやコンビニがあることを考え...</a:t>
-            </a:r>
-            <a:endParaRPr lang="en-US" sz="900" dirty="0"/>
-          </a:p>
-        </p:txBody>
-      </p:sp>
-      <p:sp>
-        <p:nvSpPr>
-          <p:cNvPr id="46" name="Text 44"/>
-          <p:cNvSpPr/>
-          <p:nvPr/>
-        </p:nvSpPr>
-        <p:spPr>
-          <a:xfrm>
-            <a:off x="6263640" y="3657600"/>
-            <a:ext cx="2377440" cy="640080"/>
-          </a:xfrm>
-          <a:prstGeom prst="rect">
-            <a:avLst/>
-          </a:prstGeom>
-          <a:noFill/>
-          <a:ln/>
-        </p:spPr>
-        <p:txBody>
-          <a:bodyPr wrap="square" lIns="0" tIns="0" rIns="0" bIns="0" rtlCol="0" anchor="ctr"/>
-          <a:lstStyle/>
-          <a:p>
-            <a:pPr indent="0" marL="0">
-              <a:buNone/>
-            </a:pPr>
-            <a:r>
-              <a:rPr lang="en-US" sz="900" i="1" dirty="0">
-                <a:solidFill>
-                  <a:srgbClr val="3B7DD8"/>
-                </a:solidFill>
-                <a:latin typeface="Arial" pitchFamily="34" charset="0"/>
-                <a:ea typeface="Arial" pitchFamily="34" charset="-122"/>
-                <a:cs typeface="Arial" pitchFamily="34" charset="-120"/>
-              </a:rPr>
-              <a:t>「駅近で周りにスーパー、コンビニがあるところ」</a:t>
             </a:r>
             <a:endParaRPr lang="en-US" sz="900" dirty="0"/>
           </a:p>
@@ -12337,7 +12337,7 @@
                           <a:ea typeface="Arial" pitchFamily="34" charset="-122"/>
                           <a:cs typeface="Arial" pitchFamily="34" charset="-120"/>
                         </a:rPr>
-                        <a:t>The room itself was decent -- small, but standard for APA...</a:t>
+                        <a:t>他のアバよりも狭い 駅からは遠いが、その分比較的安い 羽田空港の乗り継ぎに利用するなら十分か 他のアバよりも狭い ...</a:t>
                       </a:r>
                       <a:endParaRPr lang="en-US" sz="900" dirty="0">
                         <a:latin typeface="Arial" charset="0"/>
@@ -12405,7 +12405,7 @@
                           <a:ea typeface="Arial" pitchFamily="34" charset="-122"/>
                           <a:cs typeface="Arial" pitchFamily="34" charset="-120"/>
                         </a:rPr>
-                        <a:t>5件</a:t>
+                        <a:t>6件</a:t>
                       </a:r>
                       <a:endParaRPr lang="en-US" sz="900" dirty="0">
                         <a:latin typeface="Arial" charset="0"/>

--- a/納品レポート/ホテル別レポート/apa_kamata_口コミ分析レポート.pptx
+++ b/納品レポート/ホテル別レポート/apa_kamata_口コミ分析レポート.pptx
@@ -238,10 +238,10 @@
                     <c:v>Google</c:v>
                   </c:pt>
                   <c:pt idx="1">
-                    <c:v>じゃらん</c:v>
+                    <c:v>Booking.com</c:v>
                   </c:pt>
                   <c:pt idx="2">
-                    <c:v>Booking.com</c:v>
+                    <c:v>じゃらん</c:v>
                   </c:pt>
                   <c:pt idx="3">
                     <c:v>楽天トラベル</c:v>
@@ -263,10 +263,10 @@
                   <c:v>7.88</c:v>
                 </c:pt>
                 <c:pt idx="1">
-                  <c:v>7.5</c:v>
+                  <c:v>7.56</c:v>
                 </c:pt>
                 <c:pt idx="2">
-                  <c:v>7.47</c:v>
+                  <c:v>7.5</c:v>
                 </c:pt>
                 <c:pt idx="3">
                   <c:v>7</c:v>
@@ -628,7 +628,7 @@
                   <c:v>8</c:v>
                 </c:pt>
                 <c:pt idx="1">
-                  <c:v>3</c:v>
+                  <c:v>4</c:v>
                 </c:pt>
                 <c:pt idx="2">
                   <c:v>25</c:v>
@@ -2537,7 +2537,7 @@
                 <a:ea typeface="Arial" pitchFamily="34" charset="-122"/>
                 <a:cs typeface="Arial" pitchFamily="34" charset="-120"/>
               </a:rPr>
-              <a:t>レビュー総数：58件</a:t>
+              <a:t>レビュー総数：59件</a:t>
             </a:r>
             <a:endParaRPr lang="en-US" sz="1000" dirty="0"/>
           </a:p>
@@ -2817,7 +2817,7 @@
                 <a:ea typeface="Arial" pitchFamily="34" charset="-122"/>
                 <a:cs typeface="Arial" pitchFamily="34" charset="-120"/>
               </a:rPr>
-              <a:t>アパホテル蒲田駅東は全体平均7.34点（10pt換算）、高評価率62.1%を達成しています。本レポートで示した改善施策を段階的に実施することで、さらなる顧客満足度向上が期待できます。</a:t>
+              <a:t>アパホテル蒲田駅東は全体平均7.37点（10pt換算）、高評価率62.7%を達成しています。本レポートで示した改善施策を段階的に実施することで、さらなる顧客満足度向上が期待できます。</a:t>
             </a:r>
             <a:endParaRPr lang="en-US" sz="1200" dirty="0"/>
           </a:p>
@@ -3254,7 +3254,7 @@
                 <a:ea typeface="Arial" pitchFamily="34" charset="-122"/>
                 <a:cs typeface="Arial" pitchFamily="34" charset="-120"/>
               </a:rPr>
-              <a:t>7.34</a:t>
+              <a:t>7.37</a:t>
             </a:r>
             <a:endParaRPr lang="en-US" sz="2800" dirty="0"/>
           </a:p>
@@ -3372,7 +3372,7 @@
                 <a:ea typeface="Arial" pitchFamily="34" charset="-122"/>
                 <a:cs typeface="Arial" pitchFamily="34" charset="-120"/>
               </a:rPr>
-              <a:t>62.1%</a:t>
+              <a:t>62.7%</a:t>
             </a:r>
             <a:endParaRPr lang="en-US" sz="2800" dirty="0"/>
           </a:p>
@@ -3490,7 +3490,7 @@
                 <a:ea typeface="Arial" pitchFamily="34" charset="-122"/>
                 <a:cs typeface="Arial" pitchFamily="34" charset="-120"/>
               </a:rPr>
-              <a:t>10.3%</a:t>
+              <a:t>10.2%</a:t>
             </a:r>
             <a:endParaRPr lang="en-US" sz="2800" dirty="0"/>
           </a:p>
@@ -3608,7 +3608,7 @@
                 <a:ea typeface="Arial" pitchFamily="34" charset="-122"/>
                 <a:cs typeface="Arial" pitchFamily="34" charset="-120"/>
               </a:rPr>
-              <a:t>58件</a:t>
+              <a:t>59件</a:t>
             </a:r>
             <a:endParaRPr lang="en-US" sz="2800" dirty="0"/>
           </a:p>
@@ -4621,6 +4621,348 @@
                           <a:ea typeface="Arial" pitchFamily="34" charset="-122"/>
                           <a:cs typeface="Arial" pitchFamily="34" charset="-120"/>
                         </a:rPr>
+                        <a:t>Booking.com</a:t>
+                      </a:r>
+                      <a:endParaRPr lang="en-US" sz="800" dirty="0">
+                        <a:latin typeface="Arial" charset="0"/>
+                        <a:ea typeface="Arial" charset="0"/>
+                        <a:cs typeface="Arial" charset="0"/>
+                      </a:endParaRPr>
+                    </a:p>
+                  </a:txBody>
+                  <a:tcPr marL="91440" marR="91440" marT="45720" marB="45720">
+                    <a:lnL w="6350" cap="flat" cmpd="sng" algn="ctr">
+                      <a:solidFill>
+                        <a:srgbClr val="CCCCCC"/>
+                      </a:solidFill>
+                      <a:prstDash val="solid"/>
+                      <a:round/>
+                      <a:headEnd type="none" w="med" len="med"/>
+                      <a:tailEnd type="none" w="med" len="med"/>
+                    </a:lnL>
+                    <a:lnR w="6350" cap="flat" cmpd="sng" algn="ctr">
+                      <a:solidFill>
+                        <a:srgbClr val="CCCCCC"/>
+                      </a:solidFill>
+                      <a:prstDash val="solid"/>
+                      <a:round/>
+                      <a:headEnd type="none" w="med" len="med"/>
+                      <a:tailEnd type="none" w="med" len="med"/>
+                    </a:lnR>
+                    <a:lnT w="6350" cap="flat" cmpd="sng" algn="ctr">
+                      <a:solidFill>
+                        <a:srgbClr val="CCCCCC"/>
+                      </a:solidFill>
+                      <a:prstDash val="solid"/>
+                      <a:round/>
+                      <a:headEnd type="none" w="med" len="med"/>
+                      <a:tailEnd type="none" w="med" len="med"/>
+                    </a:lnT>
+                    <a:lnB w="6350" cap="flat" cmpd="sng" algn="ctr">
+                      <a:solidFill>
+                        <a:srgbClr val="CCCCCC"/>
+                      </a:solidFill>
+                      <a:prstDash val="solid"/>
+                      <a:round/>
+                      <a:headEnd type="none" w="med" len="med"/>
+                      <a:tailEnd type="none" w="med" len="med"/>
+                    </a:lnB>
+                    <a:solidFill>
+                      <a:srgbClr val="FFFFFF"/>
+                    </a:solidFill>
+                  </a:tcPr>
+                </a:tc>
+                <a:tc>
+                  <a:txBody>
+                    <a:bodyPr/>
+                    <a:lstStyle/>
+                    <a:p>
+                      <a:pPr algn="ctr" indent="0" marL="0">
+                        <a:buNone/>
+                      </a:pPr>
+                      <a:r>
+                        <a:rPr lang="en-US" sz="800" dirty="0">
+                          <a:solidFill>
+                            <a:srgbClr val="000000"/>
+                          </a:solidFill>
+                          <a:latin typeface="Arial" pitchFamily="34" charset="0"/>
+                          <a:ea typeface="Arial" pitchFamily="34" charset="-122"/>
+                          <a:cs typeface="Arial" pitchFamily="34" charset="-120"/>
+                        </a:rPr>
+                        <a:t>18</a:t>
+                      </a:r>
+                      <a:endParaRPr lang="en-US" sz="800" dirty="0">
+                        <a:latin typeface="Arial" charset="0"/>
+                        <a:ea typeface="Arial" charset="0"/>
+                        <a:cs typeface="Arial" charset="0"/>
+                      </a:endParaRPr>
+                    </a:p>
+                  </a:txBody>
+                  <a:tcPr marL="91440" marR="91440" marT="45720" marB="45720">
+                    <a:lnL w="6350" cap="flat" cmpd="sng" algn="ctr">
+                      <a:solidFill>
+                        <a:srgbClr val="CCCCCC"/>
+                      </a:solidFill>
+                      <a:prstDash val="solid"/>
+                      <a:round/>
+                      <a:headEnd type="none" w="med" len="med"/>
+                      <a:tailEnd type="none" w="med" len="med"/>
+                    </a:lnL>
+                    <a:lnR w="6350" cap="flat" cmpd="sng" algn="ctr">
+                      <a:solidFill>
+                        <a:srgbClr val="CCCCCC"/>
+                      </a:solidFill>
+                      <a:prstDash val="solid"/>
+                      <a:round/>
+                      <a:headEnd type="none" w="med" len="med"/>
+                      <a:tailEnd type="none" w="med" len="med"/>
+                    </a:lnR>
+                    <a:lnT w="6350" cap="flat" cmpd="sng" algn="ctr">
+                      <a:solidFill>
+                        <a:srgbClr val="CCCCCC"/>
+                      </a:solidFill>
+                      <a:prstDash val="solid"/>
+                      <a:round/>
+                      <a:headEnd type="none" w="med" len="med"/>
+                      <a:tailEnd type="none" w="med" len="med"/>
+                    </a:lnT>
+                    <a:lnB w="6350" cap="flat" cmpd="sng" algn="ctr">
+                      <a:solidFill>
+                        <a:srgbClr val="CCCCCC"/>
+                      </a:solidFill>
+                      <a:prstDash val="solid"/>
+                      <a:round/>
+                      <a:headEnd type="none" w="med" len="med"/>
+                      <a:tailEnd type="none" w="med" len="med"/>
+                    </a:lnB>
+                    <a:solidFill>
+                      <a:srgbClr val="FFFFFF"/>
+                    </a:solidFill>
+                  </a:tcPr>
+                </a:tc>
+                <a:tc>
+                  <a:txBody>
+                    <a:bodyPr/>
+                    <a:lstStyle/>
+                    <a:p>
+                      <a:pPr algn="ctr" indent="0" marL="0">
+                        <a:buNone/>
+                      </a:pPr>
+                      <a:r>
+                        <a:rPr lang="en-US" sz="800" dirty="0">
+                          <a:solidFill>
+                            <a:srgbClr val="000000"/>
+                          </a:solidFill>
+                          <a:latin typeface="Arial" pitchFamily="34" charset="0"/>
+                          <a:ea typeface="Arial" pitchFamily="34" charset="-122"/>
+                          <a:cs typeface="Arial" pitchFamily="34" charset="-120"/>
+                        </a:rPr>
+                        <a:t>7.56/10</a:t>
+                      </a:r>
+                      <a:endParaRPr lang="en-US" sz="800" dirty="0">
+                        <a:latin typeface="Arial" charset="0"/>
+                        <a:ea typeface="Arial" charset="0"/>
+                        <a:cs typeface="Arial" charset="0"/>
+                      </a:endParaRPr>
+                    </a:p>
+                  </a:txBody>
+                  <a:tcPr marL="91440" marR="91440" marT="45720" marB="45720">
+                    <a:lnL w="6350" cap="flat" cmpd="sng" algn="ctr">
+                      <a:solidFill>
+                        <a:srgbClr val="CCCCCC"/>
+                      </a:solidFill>
+                      <a:prstDash val="solid"/>
+                      <a:round/>
+                      <a:headEnd type="none" w="med" len="med"/>
+                      <a:tailEnd type="none" w="med" len="med"/>
+                    </a:lnL>
+                    <a:lnR w="6350" cap="flat" cmpd="sng" algn="ctr">
+                      <a:solidFill>
+                        <a:srgbClr val="CCCCCC"/>
+                      </a:solidFill>
+                      <a:prstDash val="solid"/>
+                      <a:round/>
+                      <a:headEnd type="none" w="med" len="med"/>
+                      <a:tailEnd type="none" w="med" len="med"/>
+                    </a:lnR>
+                    <a:lnT w="6350" cap="flat" cmpd="sng" algn="ctr">
+                      <a:solidFill>
+                        <a:srgbClr val="CCCCCC"/>
+                      </a:solidFill>
+                      <a:prstDash val="solid"/>
+                      <a:round/>
+                      <a:headEnd type="none" w="med" len="med"/>
+                      <a:tailEnd type="none" w="med" len="med"/>
+                    </a:lnT>
+                    <a:lnB w="6350" cap="flat" cmpd="sng" algn="ctr">
+                      <a:solidFill>
+                        <a:srgbClr val="CCCCCC"/>
+                      </a:solidFill>
+                      <a:prstDash val="solid"/>
+                      <a:round/>
+                      <a:headEnd type="none" w="med" len="med"/>
+                      <a:tailEnd type="none" w="med" len="med"/>
+                    </a:lnB>
+                    <a:solidFill>
+                      <a:srgbClr val="FFFFFF"/>
+                    </a:solidFill>
+                  </a:tcPr>
+                </a:tc>
+                <a:tc>
+                  <a:txBody>
+                    <a:bodyPr/>
+                    <a:lstStyle/>
+                    <a:p>
+                      <a:pPr algn="ctr" indent="0" marL="0">
+                        <a:buNone/>
+                      </a:pPr>
+                      <a:r>
+                        <a:rPr lang="en-US" sz="800" dirty="0">
+                          <a:solidFill>
+                            <a:srgbClr val="000000"/>
+                          </a:solidFill>
+                          <a:latin typeface="Arial" pitchFamily="34" charset="0"/>
+                          <a:ea typeface="Arial" pitchFamily="34" charset="-122"/>
+                          <a:cs typeface="Arial" pitchFamily="34" charset="-120"/>
+                        </a:rPr>
+                        <a:t>7.56</a:t>
+                      </a:r>
+                      <a:endParaRPr lang="en-US" sz="800" dirty="0">
+                        <a:latin typeface="Arial" charset="0"/>
+                        <a:ea typeface="Arial" charset="0"/>
+                        <a:cs typeface="Arial" charset="0"/>
+                      </a:endParaRPr>
+                    </a:p>
+                  </a:txBody>
+                  <a:tcPr marL="91440" marR="91440" marT="45720" marB="45720">
+                    <a:lnL w="6350" cap="flat" cmpd="sng" algn="ctr">
+                      <a:solidFill>
+                        <a:srgbClr val="CCCCCC"/>
+                      </a:solidFill>
+                      <a:prstDash val="solid"/>
+                      <a:round/>
+                      <a:headEnd type="none" w="med" len="med"/>
+                      <a:tailEnd type="none" w="med" len="med"/>
+                    </a:lnL>
+                    <a:lnR w="6350" cap="flat" cmpd="sng" algn="ctr">
+                      <a:solidFill>
+                        <a:srgbClr val="CCCCCC"/>
+                      </a:solidFill>
+                      <a:prstDash val="solid"/>
+                      <a:round/>
+                      <a:headEnd type="none" w="med" len="med"/>
+                      <a:tailEnd type="none" w="med" len="med"/>
+                    </a:lnR>
+                    <a:lnT w="6350" cap="flat" cmpd="sng" algn="ctr">
+                      <a:solidFill>
+                        <a:srgbClr val="CCCCCC"/>
+                      </a:solidFill>
+                      <a:prstDash val="solid"/>
+                      <a:round/>
+                      <a:headEnd type="none" w="med" len="med"/>
+                      <a:tailEnd type="none" w="med" len="med"/>
+                    </a:lnT>
+                    <a:lnB w="6350" cap="flat" cmpd="sng" algn="ctr">
+                      <a:solidFill>
+                        <a:srgbClr val="CCCCCC"/>
+                      </a:solidFill>
+                      <a:prstDash val="solid"/>
+                      <a:round/>
+                      <a:headEnd type="none" w="med" len="med"/>
+                      <a:tailEnd type="none" w="med" len="med"/>
+                    </a:lnB>
+                    <a:solidFill>
+                      <a:srgbClr val="FFFFFF"/>
+                    </a:solidFill>
+                  </a:tcPr>
+                </a:tc>
+                <a:tc>
+                  <a:txBody>
+                    <a:bodyPr/>
+                    <a:lstStyle/>
+                    <a:p>
+                      <a:pPr algn="ctr" indent="0" marL="0">
+                        <a:buNone/>
+                      </a:pPr>
+                      <a:r>
+                        <a:rPr lang="en-US" sz="800" dirty="0">
+                          <a:solidFill>
+                            <a:srgbClr val="000000"/>
+                          </a:solidFill>
+                          <a:latin typeface="Arial" pitchFamily="34" charset="0"/>
+                          <a:ea typeface="Arial" pitchFamily="34" charset="-122"/>
+                          <a:cs typeface="Arial" pitchFamily="34" charset="-120"/>
+                        </a:rPr>
+                        <a:t>概ね良好</a:t>
+                      </a:r>
+                      <a:endParaRPr lang="en-US" sz="800" dirty="0">
+                        <a:latin typeface="Arial" charset="0"/>
+                        <a:ea typeface="Arial" charset="0"/>
+                        <a:cs typeface="Arial" charset="0"/>
+                      </a:endParaRPr>
+                    </a:p>
+                  </a:txBody>
+                  <a:tcPr marL="91440" marR="91440" marT="45720" marB="45720">
+                    <a:lnL w="6350" cap="flat" cmpd="sng" algn="ctr">
+                      <a:solidFill>
+                        <a:srgbClr val="CCCCCC"/>
+                      </a:solidFill>
+                      <a:prstDash val="solid"/>
+                      <a:round/>
+                      <a:headEnd type="none" w="med" len="med"/>
+                      <a:tailEnd type="none" w="med" len="med"/>
+                    </a:lnL>
+                    <a:lnR w="6350" cap="flat" cmpd="sng" algn="ctr">
+                      <a:solidFill>
+                        <a:srgbClr val="CCCCCC"/>
+                      </a:solidFill>
+                      <a:prstDash val="solid"/>
+                      <a:round/>
+                      <a:headEnd type="none" w="med" len="med"/>
+                      <a:tailEnd type="none" w="med" len="med"/>
+                    </a:lnR>
+                    <a:lnT w="6350" cap="flat" cmpd="sng" algn="ctr">
+                      <a:solidFill>
+                        <a:srgbClr val="CCCCCC"/>
+                      </a:solidFill>
+                      <a:prstDash val="solid"/>
+                      <a:round/>
+                      <a:headEnd type="none" w="med" len="med"/>
+                      <a:tailEnd type="none" w="med" len="med"/>
+                    </a:lnT>
+                    <a:lnB w="6350" cap="flat" cmpd="sng" algn="ctr">
+                      <a:solidFill>
+                        <a:srgbClr val="CCCCCC"/>
+                      </a:solidFill>
+                      <a:prstDash val="solid"/>
+                      <a:round/>
+                      <a:headEnd type="none" w="med" len="med"/>
+                      <a:tailEnd type="none" w="med" len="med"/>
+                    </a:lnB>
+                    <a:solidFill>
+                      <a:srgbClr val="FFFFFF"/>
+                    </a:solidFill>
+                  </a:tcPr>
+                </a:tc>
+              </a:tr>
+              <a:tr h="0">
+                <a:tc>
+                  <a:txBody>
+                    <a:bodyPr/>
+                    <a:lstStyle/>
+                    <a:p>
+                      <a:pPr algn="ctr" indent="0" marL="0">
+                        <a:buNone/>
+                      </a:pPr>
+                      <a:r>
+                        <a:rPr lang="en-US" sz="800" dirty="0">
+                          <a:solidFill>
+                            <a:srgbClr val="000000"/>
+                          </a:solidFill>
+                          <a:latin typeface="Arial" pitchFamily="34" charset="0"/>
+                          <a:ea typeface="Arial" pitchFamily="34" charset="-122"/>
+                          <a:cs typeface="Arial" pitchFamily="34" charset="-120"/>
+                        </a:rPr>
                         <a:t>じゃらん</a:t>
                       </a:r>
                       <a:endParaRPr lang="en-US" sz="800" dirty="0">
@@ -4826,348 +5168,6 @@
                           <a:cs typeface="Arial" pitchFamily="34" charset="-120"/>
                         </a:rPr>
                         <a:t>7.50</a:t>
-                      </a:r>
-                      <a:endParaRPr lang="en-US" sz="800" dirty="0">
-                        <a:latin typeface="Arial" charset="0"/>
-                        <a:ea typeface="Arial" charset="0"/>
-                        <a:cs typeface="Arial" charset="0"/>
-                      </a:endParaRPr>
-                    </a:p>
-                  </a:txBody>
-                  <a:tcPr marL="91440" marR="91440" marT="45720" marB="45720">
-                    <a:lnL w="6350" cap="flat" cmpd="sng" algn="ctr">
-                      <a:solidFill>
-                        <a:srgbClr val="CCCCCC"/>
-                      </a:solidFill>
-                      <a:prstDash val="solid"/>
-                      <a:round/>
-                      <a:headEnd type="none" w="med" len="med"/>
-                      <a:tailEnd type="none" w="med" len="med"/>
-                    </a:lnL>
-                    <a:lnR w="6350" cap="flat" cmpd="sng" algn="ctr">
-                      <a:solidFill>
-                        <a:srgbClr val="CCCCCC"/>
-                      </a:solidFill>
-                      <a:prstDash val="solid"/>
-                      <a:round/>
-                      <a:headEnd type="none" w="med" len="med"/>
-                      <a:tailEnd type="none" w="med" len="med"/>
-                    </a:lnR>
-                    <a:lnT w="6350" cap="flat" cmpd="sng" algn="ctr">
-                      <a:solidFill>
-                        <a:srgbClr val="CCCCCC"/>
-                      </a:solidFill>
-                      <a:prstDash val="solid"/>
-                      <a:round/>
-                      <a:headEnd type="none" w="med" len="med"/>
-                      <a:tailEnd type="none" w="med" len="med"/>
-                    </a:lnT>
-                    <a:lnB w="6350" cap="flat" cmpd="sng" algn="ctr">
-                      <a:solidFill>
-                        <a:srgbClr val="CCCCCC"/>
-                      </a:solidFill>
-                      <a:prstDash val="solid"/>
-                      <a:round/>
-                      <a:headEnd type="none" w="med" len="med"/>
-                      <a:tailEnd type="none" w="med" len="med"/>
-                    </a:lnB>
-                    <a:solidFill>
-                      <a:srgbClr val="FFFFFF"/>
-                    </a:solidFill>
-                  </a:tcPr>
-                </a:tc>
-                <a:tc>
-                  <a:txBody>
-                    <a:bodyPr/>
-                    <a:lstStyle/>
-                    <a:p>
-                      <a:pPr algn="ctr" indent="0" marL="0">
-                        <a:buNone/>
-                      </a:pPr>
-                      <a:r>
-                        <a:rPr lang="en-US" sz="800" dirty="0">
-                          <a:solidFill>
-                            <a:srgbClr val="000000"/>
-                          </a:solidFill>
-                          <a:latin typeface="Arial" pitchFamily="34" charset="0"/>
-                          <a:ea typeface="Arial" pitchFamily="34" charset="-122"/>
-                          <a:cs typeface="Arial" pitchFamily="34" charset="-120"/>
-                        </a:rPr>
-                        <a:t>概ね良好</a:t>
-                      </a:r>
-                      <a:endParaRPr lang="en-US" sz="800" dirty="0">
-                        <a:latin typeface="Arial" charset="0"/>
-                        <a:ea typeface="Arial" charset="0"/>
-                        <a:cs typeface="Arial" charset="0"/>
-                      </a:endParaRPr>
-                    </a:p>
-                  </a:txBody>
-                  <a:tcPr marL="91440" marR="91440" marT="45720" marB="45720">
-                    <a:lnL w="6350" cap="flat" cmpd="sng" algn="ctr">
-                      <a:solidFill>
-                        <a:srgbClr val="CCCCCC"/>
-                      </a:solidFill>
-                      <a:prstDash val="solid"/>
-                      <a:round/>
-                      <a:headEnd type="none" w="med" len="med"/>
-                      <a:tailEnd type="none" w="med" len="med"/>
-                    </a:lnL>
-                    <a:lnR w="6350" cap="flat" cmpd="sng" algn="ctr">
-                      <a:solidFill>
-                        <a:srgbClr val="CCCCCC"/>
-                      </a:solidFill>
-                      <a:prstDash val="solid"/>
-                      <a:round/>
-                      <a:headEnd type="none" w="med" len="med"/>
-                      <a:tailEnd type="none" w="med" len="med"/>
-                    </a:lnR>
-                    <a:lnT w="6350" cap="flat" cmpd="sng" algn="ctr">
-                      <a:solidFill>
-                        <a:srgbClr val="CCCCCC"/>
-                      </a:solidFill>
-                      <a:prstDash val="solid"/>
-                      <a:round/>
-                      <a:headEnd type="none" w="med" len="med"/>
-                      <a:tailEnd type="none" w="med" len="med"/>
-                    </a:lnT>
-                    <a:lnB w="6350" cap="flat" cmpd="sng" algn="ctr">
-                      <a:solidFill>
-                        <a:srgbClr val="CCCCCC"/>
-                      </a:solidFill>
-                      <a:prstDash val="solid"/>
-                      <a:round/>
-                      <a:headEnd type="none" w="med" len="med"/>
-                      <a:tailEnd type="none" w="med" len="med"/>
-                    </a:lnB>
-                    <a:solidFill>
-                      <a:srgbClr val="FFFFFF"/>
-                    </a:solidFill>
-                  </a:tcPr>
-                </a:tc>
-              </a:tr>
-              <a:tr h="0">
-                <a:tc>
-                  <a:txBody>
-                    <a:bodyPr/>
-                    <a:lstStyle/>
-                    <a:p>
-                      <a:pPr algn="ctr" indent="0" marL="0">
-                        <a:buNone/>
-                      </a:pPr>
-                      <a:r>
-                        <a:rPr lang="en-US" sz="800" dirty="0">
-                          <a:solidFill>
-                            <a:srgbClr val="000000"/>
-                          </a:solidFill>
-                          <a:latin typeface="Arial" pitchFamily="34" charset="0"/>
-                          <a:ea typeface="Arial" pitchFamily="34" charset="-122"/>
-                          <a:cs typeface="Arial" pitchFamily="34" charset="-120"/>
-                        </a:rPr>
-                        <a:t>Booking.com</a:t>
-                      </a:r>
-                      <a:endParaRPr lang="en-US" sz="800" dirty="0">
-                        <a:latin typeface="Arial" charset="0"/>
-                        <a:ea typeface="Arial" charset="0"/>
-                        <a:cs typeface="Arial" charset="0"/>
-                      </a:endParaRPr>
-                    </a:p>
-                  </a:txBody>
-                  <a:tcPr marL="91440" marR="91440" marT="45720" marB="45720">
-                    <a:lnL w="6350" cap="flat" cmpd="sng" algn="ctr">
-                      <a:solidFill>
-                        <a:srgbClr val="CCCCCC"/>
-                      </a:solidFill>
-                      <a:prstDash val="solid"/>
-                      <a:round/>
-                      <a:headEnd type="none" w="med" len="med"/>
-                      <a:tailEnd type="none" w="med" len="med"/>
-                    </a:lnL>
-                    <a:lnR w="6350" cap="flat" cmpd="sng" algn="ctr">
-                      <a:solidFill>
-                        <a:srgbClr val="CCCCCC"/>
-                      </a:solidFill>
-                      <a:prstDash val="solid"/>
-                      <a:round/>
-                      <a:headEnd type="none" w="med" len="med"/>
-                      <a:tailEnd type="none" w="med" len="med"/>
-                    </a:lnR>
-                    <a:lnT w="6350" cap="flat" cmpd="sng" algn="ctr">
-                      <a:solidFill>
-                        <a:srgbClr val="CCCCCC"/>
-                      </a:solidFill>
-                      <a:prstDash val="solid"/>
-                      <a:round/>
-                      <a:headEnd type="none" w="med" len="med"/>
-                      <a:tailEnd type="none" w="med" len="med"/>
-                    </a:lnT>
-                    <a:lnB w="6350" cap="flat" cmpd="sng" algn="ctr">
-                      <a:solidFill>
-                        <a:srgbClr val="CCCCCC"/>
-                      </a:solidFill>
-                      <a:prstDash val="solid"/>
-                      <a:round/>
-                      <a:headEnd type="none" w="med" len="med"/>
-                      <a:tailEnd type="none" w="med" len="med"/>
-                    </a:lnB>
-                    <a:solidFill>
-                      <a:srgbClr val="FFFFFF"/>
-                    </a:solidFill>
-                  </a:tcPr>
-                </a:tc>
-                <a:tc>
-                  <a:txBody>
-                    <a:bodyPr/>
-                    <a:lstStyle/>
-                    <a:p>
-                      <a:pPr algn="ctr" indent="0" marL="0">
-                        <a:buNone/>
-                      </a:pPr>
-                      <a:r>
-                        <a:rPr lang="en-US" sz="800" dirty="0">
-                          <a:solidFill>
-                            <a:srgbClr val="000000"/>
-                          </a:solidFill>
-                          <a:latin typeface="Arial" pitchFamily="34" charset="0"/>
-                          <a:ea typeface="Arial" pitchFamily="34" charset="-122"/>
-                          <a:cs typeface="Arial" pitchFamily="34" charset="-120"/>
-                        </a:rPr>
-                        <a:t>17</a:t>
-                      </a:r>
-                      <a:endParaRPr lang="en-US" sz="800" dirty="0">
-                        <a:latin typeface="Arial" charset="0"/>
-                        <a:ea typeface="Arial" charset="0"/>
-                        <a:cs typeface="Arial" charset="0"/>
-                      </a:endParaRPr>
-                    </a:p>
-                  </a:txBody>
-                  <a:tcPr marL="91440" marR="91440" marT="45720" marB="45720">
-                    <a:lnL w="6350" cap="flat" cmpd="sng" algn="ctr">
-                      <a:solidFill>
-                        <a:srgbClr val="CCCCCC"/>
-                      </a:solidFill>
-                      <a:prstDash val="solid"/>
-                      <a:round/>
-                      <a:headEnd type="none" w="med" len="med"/>
-                      <a:tailEnd type="none" w="med" len="med"/>
-                    </a:lnL>
-                    <a:lnR w="6350" cap="flat" cmpd="sng" algn="ctr">
-                      <a:solidFill>
-                        <a:srgbClr val="CCCCCC"/>
-                      </a:solidFill>
-                      <a:prstDash val="solid"/>
-                      <a:round/>
-                      <a:headEnd type="none" w="med" len="med"/>
-                      <a:tailEnd type="none" w="med" len="med"/>
-                    </a:lnR>
-                    <a:lnT w="6350" cap="flat" cmpd="sng" algn="ctr">
-                      <a:solidFill>
-                        <a:srgbClr val="CCCCCC"/>
-                      </a:solidFill>
-                      <a:prstDash val="solid"/>
-                      <a:round/>
-                      <a:headEnd type="none" w="med" len="med"/>
-                      <a:tailEnd type="none" w="med" len="med"/>
-                    </a:lnT>
-                    <a:lnB w="6350" cap="flat" cmpd="sng" algn="ctr">
-                      <a:solidFill>
-                        <a:srgbClr val="CCCCCC"/>
-                      </a:solidFill>
-                      <a:prstDash val="solid"/>
-                      <a:round/>
-                      <a:headEnd type="none" w="med" len="med"/>
-                      <a:tailEnd type="none" w="med" len="med"/>
-                    </a:lnB>
-                    <a:solidFill>
-                      <a:srgbClr val="FFFFFF"/>
-                    </a:solidFill>
-                  </a:tcPr>
-                </a:tc>
-                <a:tc>
-                  <a:txBody>
-                    <a:bodyPr/>
-                    <a:lstStyle/>
-                    <a:p>
-                      <a:pPr algn="ctr" indent="0" marL="0">
-                        <a:buNone/>
-                      </a:pPr>
-                      <a:r>
-                        <a:rPr lang="en-US" sz="800" dirty="0">
-                          <a:solidFill>
-                            <a:srgbClr val="000000"/>
-                          </a:solidFill>
-                          <a:latin typeface="Arial" pitchFamily="34" charset="0"/>
-                          <a:ea typeface="Arial" pitchFamily="34" charset="-122"/>
-                          <a:cs typeface="Arial" pitchFamily="34" charset="-120"/>
-                        </a:rPr>
-                        <a:t>7.47/10</a:t>
-                      </a:r>
-                      <a:endParaRPr lang="en-US" sz="800" dirty="0">
-                        <a:latin typeface="Arial" charset="0"/>
-                        <a:ea typeface="Arial" charset="0"/>
-                        <a:cs typeface="Arial" charset="0"/>
-                      </a:endParaRPr>
-                    </a:p>
-                  </a:txBody>
-                  <a:tcPr marL="91440" marR="91440" marT="45720" marB="45720">
-                    <a:lnL w="6350" cap="flat" cmpd="sng" algn="ctr">
-                      <a:solidFill>
-                        <a:srgbClr val="CCCCCC"/>
-                      </a:solidFill>
-                      <a:prstDash val="solid"/>
-                      <a:round/>
-                      <a:headEnd type="none" w="med" len="med"/>
-                      <a:tailEnd type="none" w="med" len="med"/>
-                    </a:lnL>
-                    <a:lnR w="6350" cap="flat" cmpd="sng" algn="ctr">
-                      <a:solidFill>
-                        <a:srgbClr val="CCCCCC"/>
-                      </a:solidFill>
-                      <a:prstDash val="solid"/>
-                      <a:round/>
-                      <a:headEnd type="none" w="med" len="med"/>
-                      <a:tailEnd type="none" w="med" len="med"/>
-                    </a:lnR>
-                    <a:lnT w="6350" cap="flat" cmpd="sng" algn="ctr">
-                      <a:solidFill>
-                        <a:srgbClr val="CCCCCC"/>
-                      </a:solidFill>
-                      <a:prstDash val="solid"/>
-                      <a:round/>
-                      <a:headEnd type="none" w="med" len="med"/>
-                      <a:tailEnd type="none" w="med" len="med"/>
-                    </a:lnT>
-                    <a:lnB w="6350" cap="flat" cmpd="sng" algn="ctr">
-                      <a:solidFill>
-                        <a:srgbClr val="CCCCCC"/>
-                      </a:solidFill>
-                      <a:prstDash val="solid"/>
-                      <a:round/>
-                      <a:headEnd type="none" w="med" len="med"/>
-                      <a:tailEnd type="none" w="med" len="med"/>
-                    </a:lnB>
-                    <a:solidFill>
-                      <a:srgbClr val="FFFFFF"/>
-                    </a:solidFill>
-                  </a:tcPr>
-                </a:tc>
-                <a:tc>
-                  <a:txBody>
-                    <a:bodyPr/>
-                    <a:lstStyle/>
-                    <a:p>
-                      <a:pPr algn="ctr" indent="0" marL="0">
-                        <a:buNone/>
-                      </a:pPr>
-                      <a:r>
-                        <a:rPr lang="en-US" sz="800" dirty="0">
-                          <a:solidFill>
-                            <a:srgbClr val="000000"/>
-                          </a:solidFill>
-                          <a:latin typeface="Arial" pitchFamily="34" charset="0"/>
-                          <a:ea typeface="Arial" pitchFamily="34" charset="-122"/>
-                          <a:cs typeface="Arial" pitchFamily="34" charset="-120"/>
-                        </a:rPr>
-                        <a:t>7.47</a:t>
                       </a:r>
                       <a:endParaRPr lang="en-US" sz="800" dirty="0">
                         <a:latin typeface="Arial" charset="0"/>
@@ -6304,7 +6304,7 @@
                 <a:ea typeface="Arial" pitchFamily="34" charset="-122"/>
                 <a:cs typeface="Arial" pitchFamily="34" charset="-120"/>
               </a:rPr>
-              <a:t>36件（62.1%）</a:t>
+              <a:t>37件（62.7%）</a:t>
             </a:r>
             <a:endParaRPr lang="en-US" sz="1600" dirty="0"/>
           </a:p>
@@ -6402,7 +6402,7 @@
                 <a:ea typeface="Arial" pitchFamily="34" charset="-122"/>
                 <a:cs typeface="Arial" pitchFamily="34" charset="-120"/>
               </a:rPr>
-              <a:t>16件（27.6%）</a:t>
+              <a:t>16件（27.1%）</a:t>
             </a:r>
             <a:endParaRPr lang="en-US" sz="1600" dirty="0"/>
           </a:p>
@@ -6500,7 +6500,7 @@
                 <a:ea typeface="Arial" pitchFamily="34" charset="-122"/>
                 <a:cs typeface="Arial" pitchFamily="34" charset="-120"/>
               </a:rPr>
-              <a:t>6件（10.3%）</a:t>
+              <a:t>6件（10.2%）</a:t>
             </a:r>
             <a:endParaRPr lang="en-US" sz="1600" dirty="0"/>
           </a:p>
@@ -6662,7 +6662,7 @@
                 <a:ea typeface="Arial" pitchFamily="34" charset="-122"/>
                 <a:cs typeface="Arial" pitchFamily="34" charset="-120"/>
               </a:rPr>
-              <a:t>高評価レビュー（8-10点: 36件）の分析から、主要な強みテーマを抽出しています。立地・アクセス、客室清潔感、スタッフ対応が高評価の中心的テーマです。</a:t>
+              <a:t>高評価レビュー（8-10点: 37件）の分析から、主要な強みテーマを抽出しています。立地・アクセス、客室清潔感、スタッフ対応が高評価の中心的テーマです。</a:t>
             </a:r>
             <a:endParaRPr lang="en-US" sz="1200" dirty="0"/>
           </a:p>
@@ -7702,7 +7702,7 @@
                 <a:ea typeface="Arial" pitchFamily="34" charset="-122"/>
                 <a:cs typeface="Arial" pitchFamily="34" charset="-120"/>
               </a:rPr>
-              <a:t>全体平均 7.34点 → 目標 7.84点</a:t>
+              <a:t>全体平均 7.37点 → 目標 7.87点</a:t>
             </a:r>
             <a:endParaRPr lang="en-US" sz="1200" dirty="0"/>
           </a:p>
@@ -7719,7 +7719,7 @@
                 <a:ea typeface="Arial" pitchFamily="34" charset="-122"/>
                 <a:cs typeface="Arial" pitchFamily="34" charset="-120"/>
               </a:rPr>
-              <a:t>高評価率 62.1% → 目標 67.1%</a:t>
+              <a:t>高評価率 62.7% → 目標 67.7%</a:t>
             </a:r>
             <a:endParaRPr lang="en-US" sz="1200" dirty="0"/>
           </a:p>
@@ -7736,7 +7736,7 @@
                 <a:ea typeface="Arial" pitchFamily="34" charset="-122"/>
                 <a:cs typeface="Arial" pitchFamily="34" charset="-120"/>
               </a:rPr>
-              <a:t>低評価率 10.3% → 目標 8.3%</a:t>
+              <a:t>低評価率 10.2% → 目標 8.2%</a:t>
             </a:r>
             <a:endParaRPr lang="en-US" sz="1200" dirty="0"/>
           </a:p>

--- a/納品レポート/ホテル別レポート/apa_kamata_口コミ分析レポート.pptx
+++ b/納品レポート/ホテル別レポート/apa_kamata_口コミ分析レポート.pptx
@@ -263,7 +263,7 @@
                   <c:v>7.88</c:v>
                 </c:pt>
                 <c:pt idx="1">
-                  <c:v>7.56</c:v>
+                  <c:v>7.58</c:v>
                 </c:pt>
                 <c:pt idx="2">
                   <c:v>7.5</c:v>
@@ -631,7 +631,7 @@
                   <c:v>4</c:v>
                 </c:pt>
                 <c:pt idx="2">
-                  <c:v>25</c:v>
+                  <c:v>26</c:v>
                 </c:pt>
                 <c:pt idx="3">
                   <c:v>5</c:v>
@@ -2537,7 +2537,7 @@
                 <a:ea typeface="Arial" pitchFamily="34" charset="-122"/>
                 <a:cs typeface="Arial" pitchFamily="34" charset="-120"/>
               </a:rPr>
-              <a:t>レビュー総数：59件</a:t>
+              <a:t>レビュー総数：60件</a:t>
             </a:r>
             <a:endParaRPr lang="en-US" sz="1000" dirty="0"/>
           </a:p>
@@ -2817,7 +2817,7 @@
                 <a:ea typeface="Arial" pitchFamily="34" charset="-122"/>
                 <a:cs typeface="Arial" pitchFamily="34" charset="-120"/>
               </a:rPr>
-              <a:t>アパホテル蒲田駅東は全体平均7.37点（10pt換算）、高評価率62.7%を達成しています。本レポートで示した改善施策を段階的に実施することで、さらなる顧客満足度向上が期待できます。</a:t>
+              <a:t>アパホテル蒲田駅東は全体平均7.38点（10pt換算）、高評価率63.3%を達成しています。本レポートで示した改善施策を段階的に実施することで、さらなる顧客満足度向上が期待できます。</a:t>
             </a:r>
             <a:endParaRPr lang="en-US" sz="1200" dirty="0"/>
           </a:p>
@@ -3254,7 +3254,7 @@
                 <a:ea typeface="Arial" pitchFamily="34" charset="-122"/>
                 <a:cs typeface="Arial" pitchFamily="34" charset="-120"/>
               </a:rPr>
-              <a:t>7.37</a:t>
+              <a:t>7.38</a:t>
             </a:r>
             <a:endParaRPr lang="en-US" sz="2800" dirty="0"/>
           </a:p>
@@ -3372,7 +3372,7 @@
                 <a:ea typeface="Arial" pitchFamily="34" charset="-122"/>
                 <a:cs typeface="Arial" pitchFamily="34" charset="-120"/>
               </a:rPr>
-              <a:t>62.7%</a:t>
+              <a:t>63.3%</a:t>
             </a:r>
             <a:endParaRPr lang="en-US" sz="2800" dirty="0"/>
           </a:p>
@@ -3490,7 +3490,7 @@
                 <a:ea typeface="Arial" pitchFamily="34" charset="-122"/>
                 <a:cs typeface="Arial" pitchFamily="34" charset="-120"/>
               </a:rPr>
-              <a:t>10.2%</a:t>
+              <a:t>10.0%</a:t>
             </a:r>
             <a:endParaRPr lang="en-US" sz="2800" dirty="0"/>
           </a:p>
@@ -3608,7 +3608,7 @@
                 <a:ea typeface="Arial" pitchFamily="34" charset="-122"/>
                 <a:cs typeface="Arial" pitchFamily="34" charset="-120"/>
               </a:rPr>
-              <a:t>59件</a:t>
+              <a:t>60件</a:t>
             </a:r>
             <a:endParaRPr lang="en-US" sz="2800" dirty="0"/>
           </a:p>
@@ -4689,7 +4689,7 @@
                           <a:ea typeface="Arial" pitchFamily="34" charset="-122"/>
                           <a:cs typeface="Arial" pitchFamily="34" charset="-120"/>
                         </a:rPr>
-                        <a:t>18</a:t>
+                        <a:t>19</a:t>
                       </a:r>
                       <a:endParaRPr lang="en-US" sz="800" dirty="0">
                         <a:latin typeface="Arial" charset="0"/>
@@ -4757,7 +4757,7 @@
                           <a:ea typeface="Arial" pitchFamily="34" charset="-122"/>
                           <a:cs typeface="Arial" pitchFamily="34" charset="-120"/>
                         </a:rPr>
-                        <a:t>7.56/10</a:t>
+                        <a:t>7.58/10</a:t>
                       </a:r>
                       <a:endParaRPr lang="en-US" sz="800" dirty="0">
                         <a:latin typeface="Arial" charset="0"/>
@@ -4825,7 +4825,7 @@
                           <a:ea typeface="Arial" pitchFamily="34" charset="-122"/>
                           <a:cs typeface="Arial" pitchFamily="34" charset="-120"/>
                         </a:rPr>
-                        <a:t>7.56</a:t>
+                        <a:t>7.58</a:t>
                       </a:r>
                       <a:endParaRPr lang="en-US" sz="800" dirty="0">
                         <a:latin typeface="Arial" charset="0"/>
@@ -6304,7 +6304,7 @@
                 <a:ea typeface="Arial" pitchFamily="34" charset="-122"/>
                 <a:cs typeface="Arial" pitchFamily="34" charset="-120"/>
               </a:rPr>
-              <a:t>37件（62.7%）</a:t>
+              <a:t>38件（63.3%）</a:t>
             </a:r>
             <a:endParaRPr lang="en-US" sz="1600" dirty="0"/>
           </a:p>
@@ -6402,7 +6402,7 @@
                 <a:ea typeface="Arial" pitchFamily="34" charset="-122"/>
                 <a:cs typeface="Arial" pitchFamily="34" charset="-120"/>
               </a:rPr>
-              <a:t>16件（27.1%）</a:t>
+              <a:t>16件（26.7%）</a:t>
             </a:r>
             <a:endParaRPr lang="en-US" sz="1600" dirty="0"/>
           </a:p>
@@ -6500,7 +6500,7 @@
                 <a:ea typeface="Arial" pitchFamily="34" charset="-122"/>
                 <a:cs typeface="Arial" pitchFamily="34" charset="-120"/>
               </a:rPr>
-              <a:t>6件（10.2%）</a:t>
+              <a:t>6件（10.0%）</a:t>
             </a:r>
             <a:endParaRPr lang="en-US" sz="1600" dirty="0"/>
           </a:p>
@@ -6662,7 +6662,7 @@
                 <a:ea typeface="Arial" pitchFamily="34" charset="-122"/>
                 <a:cs typeface="Arial" pitchFamily="34" charset="-120"/>
               </a:rPr>
-              <a:t>高評価レビュー（8-10点: 37件）の分析から、主要な強みテーマを抽出しています。立地・アクセス、客室清潔感、スタッフ対応が高評価の中心的テーマです。</a:t>
+              <a:t>高評価レビュー（8-10点: 38件）の分析から、主要な強みテーマを抽出しています。立地・アクセス、客室清潔感、スタッフ対応が高評価の中心的テーマです。</a:t>
             </a:r>
             <a:endParaRPr lang="en-US" sz="1200" dirty="0"/>
           </a:p>
@@ -7702,7 +7702,7 @@
                 <a:ea typeface="Arial" pitchFamily="34" charset="-122"/>
                 <a:cs typeface="Arial" pitchFamily="34" charset="-120"/>
               </a:rPr>
-              <a:t>全体平均 7.37点 → 目標 7.87点</a:t>
+              <a:t>全体平均 7.38点 → 目標 7.88点</a:t>
             </a:r>
             <a:endParaRPr lang="en-US" sz="1200" dirty="0"/>
           </a:p>
@@ -7719,7 +7719,7 @@
                 <a:ea typeface="Arial" pitchFamily="34" charset="-122"/>
                 <a:cs typeface="Arial" pitchFamily="34" charset="-120"/>
               </a:rPr>
-              <a:t>高評価率 62.7% → 目標 67.7%</a:t>
+              <a:t>高評価率 63.3% → 目標 68.3%</a:t>
             </a:r>
             <a:endParaRPr lang="en-US" sz="1200" dirty="0"/>
           </a:p>
@@ -7736,7 +7736,7 @@
                 <a:ea typeface="Arial" pitchFamily="34" charset="-122"/>
                 <a:cs typeface="Arial" pitchFamily="34" charset="-120"/>
               </a:rPr>
-              <a:t>低評価率 10.2% → 目標 8.2%</a:t>
+              <a:t>低評価率 10.0% → 目標 8.0%</a:t>
             </a:r>
             <a:endParaRPr lang="en-US" sz="1200" dirty="0"/>
           </a:p>

--- a/納品レポート/ホテル別レポート/apa_kamata_口コミ分析レポート.pptx
+++ b/納品レポート/ホテル別レポート/apa_kamata_口コミ分析レポート.pptx
@@ -2812,7 +2812,7 @@
                 <a:ea typeface="Arial" pitchFamily="34" charset="-122"/>
                 <a:cs typeface="Arial" pitchFamily="34" charset="-120"/>
               </a:rPr>
-              <a:t>作成日：2026年4月2日</a:t>
+              <a:t>作成日：2026年4月5日</a:t>
             </a:r>
             <a:endParaRPr lang="en-US" sz="1000" dirty="0"/>
           </a:p>

--- a/納品レポート/ホテル別レポート/apa_kamata_口コミ分析レポート.pptx
+++ b/納品レポート/ホテル別レポート/apa_kamata_口コミ分析レポート.pptx
@@ -175,23 +175,20 @@
           </c:dLbls>
           <c:cat>
             <c:multiLvlStrRef>
-              <c:f>Sheet1!$A$2:$A$6</c:f>
+              <c:f>Sheet1!$A$2:$A$5</c:f>
               <c:multiLvlStrCache>
-                <c:ptCount val="5"/>
+                <c:ptCount val="4"/>
                 <c:lvl>
                   <c:pt idx="0">
-                    <c:v>Google</c:v>
+                    <c:v>Booking.com</c:v>
                   </c:pt>
                   <c:pt idx="1">
-                    <c:v>Booking.com</c:v>
+                    <c:v>Google</c:v>
                   </c:pt>
                   <c:pt idx="2">
                     <c:v>じゃらん</c:v>
                   </c:pt>
                   <c:pt idx="3">
-                    <c:v>楽天トラベル</c:v>
-                  </c:pt>
-                  <c:pt idx="4">
                     <c:v>Agoda</c:v>
                   </c:pt>
                 </c:lvl>
@@ -200,24 +197,21 @@
           </c:cat>
           <c:val>
             <c:numRef>
-              <c:f>Sheet1!$B$2:$B$6</c:f>
+              <c:f>Sheet1!$B$2:$B$5</c:f>
               <c:numCache>
                 <c:formatCode>General</c:formatCode>
-                <c:ptCount val="5"/>
+                <c:ptCount val="4"/>
                 <c:pt idx="0">
-                  <c:v>7.88</c:v>
+                  <c:v>8</c:v>
                 </c:pt>
                 <c:pt idx="1">
-                  <c:v>7.58</c:v>
+                  <c:v>8</c:v>
                 </c:pt>
                 <c:pt idx="2">
-                  <c:v>7.5</c:v>
+                  <c:v>7.33</c:v>
                 </c:pt>
                 <c:pt idx="3">
-                  <c:v>7</c:v>
-                </c:pt>
-                <c:pt idx="4">
-                  <c:v>6.69</c:v>
+                  <c:v>6.67</c:v>
                 </c:pt>
               </c:numCache>
             </c:numRef>
@@ -560,13 +554,13 @@
               <c:numCache>
                 <c:ptCount val="3"/>
                 <c:pt idx="0">
-                  <c:v>38</c:v>
+                  <c:v>18</c:v>
                 </c:pt>
                 <c:pt idx="1">
-                  <c:v>16</c:v>
+                  <c:v>8</c:v>
                 </c:pt>
                 <c:pt idx="2">
-                  <c:v>6</c:v>
+                  <c:v>2</c:v>
                 </c:pt>
               </c:numCache>
             </c:numRef>
@@ -762,22 +756,11 @@
               <a:effectLst/>
             </c:spPr>
           </c:dPt>
-          <c:dPt>
-            <c:idx val="8"/>
-            <c:invertIfNegative val="0"/>
-            <c:bubble3D val="0"/>
-            <c:spPr>
-              <a:solidFill>
-                <a:srgbClr val="DC2626"/>
-              </a:solidFill>
-              <a:effectLst/>
-            </c:spPr>
-          </c:dPt>
           <c:cat>
             <c:multiLvlStrRef>
-              <c:f>Sheet1!$A$2:$A$10</c:f>
+              <c:f>Sheet1!$A$2:$A$9</c:f>
               <c:multiLvlStrCache>
-                <c:ptCount val="9"/>
+                <c:ptCount val="8"/>
                 <c:lvl>
                   <c:pt idx="0">
                     <c:v>10点</c:v>
@@ -803,44 +786,38 @@
                   <c:pt idx="7">
                     <c:v>3点</c:v>
                   </c:pt>
-                  <c:pt idx="8">
-                    <c:v>2点</c:v>
-                  </c:pt>
                 </c:lvl>
               </c:multiLvlStrCache>
             </c:multiLvlStrRef>
           </c:cat>
           <c:val>
             <c:numRef>
-              <c:f>Sheet1!$B$2:$B$10</c:f>
+              <c:f>Sheet1!$B$2:$B$9</c:f>
               <c:numCache>
                 <c:formatCode>General</c:formatCode>
-                <c:ptCount val="9"/>
+                <c:ptCount val="8"/>
                 <c:pt idx="0">
-                  <c:v>8</c:v>
+                  <c:v>5</c:v>
                 </c:pt>
                 <c:pt idx="1">
-                  <c:v>4</c:v>
+                  <c:v>2</c:v>
                 </c:pt>
                 <c:pt idx="2">
-                  <c:v>26</c:v>
+                  <c:v>11</c:v>
                 </c:pt>
                 <c:pt idx="3">
+                  <c:v>1</c:v>
+                </c:pt>
+                <c:pt idx="4">
                   <c:v>5</c:v>
                 </c:pt>
-                <c:pt idx="4">
-                  <c:v>8</c:v>
-                </c:pt>
                 <c:pt idx="5">
-                  <c:v>3</c:v>
+                  <c:v>2</c:v>
                 </c:pt>
                 <c:pt idx="6">
-                  <c:v>4</c:v>
+                  <c:v>1</c:v>
                 </c:pt>
                 <c:pt idx="7">
-                  <c:v>1</c:v>
-                </c:pt>
-                <c:pt idx="8">
                   <c:v>1</c:v>
                 </c:pt>
               </c:numCache>
@@ -2772,7 +2749,7 @@
                 <a:ea typeface="Arial" pitchFamily="34" charset="-122"/>
                 <a:cs typeface="Arial" pitchFamily="34" charset="-120"/>
               </a:rPr>
-              <a:t>分析対象期間：2026年2月〜3月</a:t>
+              <a:t>分析対象期間：2026年3月</a:t>
             </a:r>
             <a:endParaRPr lang="en-US" sz="1000" dirty="0"/>
           </a:p>
@@ -2792,7 +2769,7 @@
                 <a:ea typeface="Arial" pitchFamily="34" charset="-122"/>
                 <a:cs typeface="Arial" pitchFamily="34" charset="-120"/>
               </a:rPr>
-              <a:t>レビュー総数：60件（5サイト）</a:t>
+              <a:t>レビュー総数：28件（4サイト）</a:t>
             </a:r>
             <a:endParaRPr lang="en-US" sz="1000" dirty="0"/>
           </a:p>
@@ -3358,7 +3335,7 @@
                           <a:ea typeface="Arial" pitchFamily="34" charset="-122"/>
                           <a:cs typeface="Arial" pitchFamily="34" charset="-120"/>
                         </a:rPr>
-                        <a:t>7.38点</a:t>
+                        <a:t>7.50点</a:t>
                       </a:r>
                       <a:endParaRPr lang="en-US" sz="1000" dirty="0">
                         <a:latin typeface="Arial" charset="0"/>
@@ -3426,7 +3403,7 @@
                           <a:ea typeface="Arial" pitchFamily="34" charset="-122"/>
                           <a:cs typeface="Arial" pitchFamily="34" charset="-120"/>
                         </a:rPr>
-                        <a:t>7.9点以上</a:t>
+                        <a:t>8.0点以上</a:t>
                       </a:r>
                       <a:endParaRPr lang="en-US" sz="1000" dirty="0">
                         <a:latin typeface="Arial" charset="0"/>
@@ -3632,7 +3609,7 @@
                           <a:ea typeface="Arial" pitchFamily="34" charset="-122"/>
                           <a:cs typeface="Arial" pitchFamily="34" charset="-120"/>
                         </a:rPr>
-                        <a:t>63.3%</a:t>
+                        <a:t>64.3%</a:t>
                       </a:r>
                       <a:endParaRPr lang="en-US" sz="1000" dirty="0">
                         <a:latin typeface="Arial" charset="0"/>
@@ -3700,7 +3677,7 @@
                           <a:ea typeface="Arial" pitchFamily="34" charset="-122"/>
                           <a:cs typeface="Arial" pitchFamily="34" charset="-120"/>
                         </a:rPr>
-                        <a:t>73%以上</a:t>
+                        <a:t>74%以上</a:t>
                       </a:r>
                       <a:endParaRPr lang="en-US" sz="1000" dirty="0">
                         <a:latin typeface="Arial" charset="0"/>
@@ -3906,7 +3883,7 @@
                           <a:ea typeface="Arial" pitchFamily="34" charset="-122"/>
                           <a:cs typeface="Arial" pitchFamily="34" charset="-120"/>
                         </a:rPr>
-                        <a:t>10.0%</a:t>
+                        <a:t>7.1%</a:t>
                       </a:r>
                       <a:endParaRPr lang="en-US" sz="1000" dirty="0">
                         <a:latin typeface="Arial" charset="0"/>
@@ -3974,7 +3951,7 @@
                           <a:ea typeface="Arial" pitchFamily="34" charset="-122"/>
                           <a:cs typeface="Arial" pitchFamily="34" charset="-120"/>
                         </a:rPr>
-                        <a:t>7%以下</a:t>
+                        <a:t>4%以下</a:t>
                       </a:r>
                       <a:endParaRPr lang="en-US" sz="1000" dirty="0">
                         <a:latin typeface="Arial" charset="0"/>
@@ -4728,7 +4705,7 @@
                           <a:ea typeface="Arial" pitchFamily="34" charset="-122"/>
                           <a:cs typeface="Arial" pitchFamily="34" charset="-120"/>
                         </a:rPr>
-                        <a:t>約6件/期間</a:t>
+                        <a:t>約3件/期間</a:t>
                       </a:r>
                       <a:endParaRPr lang="en-US" sz="1000" dirty="0">
                         <a:latin typeface="Arial" charset="0"/>
@@ -4796,7 +4773,7 @@
                           <a:ea typeface="Arial" pitchFamily="34" charset="-122"/>
                           <a:cs typeface="Arial" pitchFamily="34" charset="-120"/>
                         </a:rPr>
-                        <a:t>3件以下</a:t>
+                        <a:t>1件以下</a:t>
                       </a:r>
                       <a:endParaRPr lang="en-US" sz="1000" dirty="0">
                         <a:latin typeface="Arial" charset="0"/>
@@ -5367,7 +5344,7 @@
                 <a:ea typeface="Arial" pitchFamily="34" charset="-122"/>
                 <a:cs typeface="Arial" pitchFamily="34" charset="-120"/>
               </a:rPr>
-              <a:t>7.38</a:t>
+              <a:t>7.50</a:t>
             </a:r>
             <a:endParaRPr lang="en-US" sz="3200" dirty="0"/>
           </a:p>
@@ -5492,7 +5469,7 @@
                 <a:ea typeface="Arial" pitchFamily="34" charset="-122"/>
                 <a:cs typeface="Arial" pitchFamily="34" charset="-120"/>
               </a:rPr>
-              <a:t>63.3%</a:t>
+              <a:t>64.3%</a:t>
             </a:r>
             <a:endParaRPr lang="en-US" sz="3200" dirty="0"/>
           </a:p>
@@ -5617,7 +5594,7 @@
                 <a:ea typeface="Arial" pitchFamily="34" charset="-122"/>
                 <a:cs typeface="Arial" pitchFamily="34" charset="-120"/>
               </a:rPr>
-              <a:t>10.0%</a:t>
+              <a:t>7.1%</a:t>
             </a:r>
             <a:endParaRPr lang="en-US" sz="3200" dirty="0"/>
           </a:p>
@@ -5742,7 +5719,7 @@
                 <a:ea typeface="Arial" pitchFamily="34" charset="-122"/>
                 <a:cs typeface="Arial" pitchFamily="34" charset="-120"/>
               </a:rPr>
-              <a:t>60件</a:t>
+              <a:t>28件</a:t>
             </a:r>
             <a:endParaRPr lang="en-US" sz="3200" dirty="0"/>
           </a:p>
@@ -6178,7 +6155,7 @@
                 <a:ea typeface="Arial" pitchFamily="34" charset="-122"/>
                 <a:cs typeface="Arial" pitchFamily="34" charset="-120"/>
               </a:rPr>
-              <a:t>エアコン・空調 </a:t>
+              <a:t>防音性能 </a:t>
             </a:r>
             <a:endParaRPr lang="en-US" sz="1100" dirty="0"/>
           </a:p>
@@ -6198,7 +6175,7 @@
                 <a:ea typeface="Arial" pitchFamily="34" charset="-122"/>
                 <a:cs typeface="Arial" pitchFamily="34" charset="-120"/>
               </a:rPr>
-              <a:t>  Coming from Keikyu-Kamata there was a shoutengai giving p...</a:t>
+              <a:t>  道路沿いだったけど防音がしっかりされていて外の音は聞こえない</a:t>
             </a:r>
             <a:endParaRPr lang="en-US" sz="1100" dirty="0"/>
           </a:p>
@@ -6551,7 +6528,7 @@
                 <a:ea typeface="Arial" pitchFamily="34" charset="-122"/>
                 <a:cs typeface="Arial" pitchFamily="34" charset="-120"/>
               </a:rPr>
-              <a:t>7.38</a:t>
+              <a:t>7.50</a:t>
             </a:r>
             <a:endParaRPr lang="en-US" sz="3200" dirty="0"/>
           </a:p>
@@ -6676,7 +6653,7 @@
                 <a:ea typeface="Arial" pitchFamily="34" charset="-122"/>
                 <a:cs typeface="Arial" pitchFamily="34" charset="-120"/>
               </a:rPr>
-              <a:t>63.3%</a:t>
+              <a:t>64.3%</a:t>
             </a:r>
             <a:endParaRPr lang="en-US" sz="3200" dirty="0"/>
           </a:p>
@@ -6801,7 +6778,7 @@
                 <a:ea typeface="Arial" pitchFamily="34" charset="-122"/>
                 <a:cs typeface="Arial" pitchFamily="34" charset="-120"/>
               </a:rPr>
-              <a:t>10.0%</a:t>
+              <a:t>7.1%</a:t>
             </a:r>
             <a:endParaRPr lang="en-US" sz="3200" dirty="0"/>
           </a:p>
@@ -6926,7 +6903,7 @@
                 <a:ea typeface="Arial" pitchFamily="34" charset="-122"/>
                 <a:cs typeface="Arial" pitchFamily="34" charset="-120"/>
               </a:rPr>
-              <a:t>60件</a:t>
+              <a:t>28件</a:t>
             </a:r>
             <a:endParaRPr lang="en-US" sz="3200" dirty="0"/>
           </a:p>
@@ -7347,7 +7324,7 @@
                 <a:ea typeface="Arial" pitchFamily="34" charset="-122"/>
                 <a:cs typeface="Arial" pitchFamily="34" charset="-120"/>
               </a:rPr>
-              <a:t>Google(7.88)が最高スコア。</a:t>
+              <a:t>Google(8.00)が最高スコア。</a:t>
             </a:r>
             <a:endParaRPr lang="en-US" sz="1100" dirty="0"/>
           </a:p>
@@ -7837,7 +7814,7 @@
                           <a:ea typeface="Arial" pitchFamily="34" charset="-122"/>
                           <a:cs typeface="Arial" pitchFamily="34" charset="-120"/>
                         </a:rPr>
-                        <a:t>Google</a:t>
+                        <a:t>Booking.com</a:t>
                       </a:r>
                       <a:endParaRPr lang="en-US" sz="900" dirty="0">
                         <a:latin typeface="Arial" charset="0"/>
@@ -7905,7 +7882,7 @@
                           <a:ea typeface="Arial" pitchFamily="34" charset="-122"/>
                           <a:cs typeface="Arial" pitchFamily="34" charset="-120"/>
                         </a:rPr>
-                        <a:t>17</a:t>
+                        <a:t>10</a:t>
                       </a:r>
                       <a:endParaRPr lang="en-US" sz="900" dirty="0">
                         <a:latin typeface="Arial" charset="0"/>
@@ -7973,7 +7950,7 @@
                           <a:ea typeface="Arial" pitchFamily="34" charset="-122"/>
                           <a:cs typeface="Arial" pitchFamily="34" charset="-120"/>
                         </a:rPr>
-                        <a:t>3.94</a:t>
+                        <a:t>8</a:t>
                       </a:r>
                       <a:endParaRPr lang="en-US" sz="900" dirty="0">
                         <a:latin typeface="Arial" charset="0"/>
@@ -8021,6 +7998,348 @@
                     </a:lnB>
                     <a:solidFill>
                       <a:srgbClr val="E8EFF8"/>
+                    </a:solidFill>
+                  </a:tcPr>
+                </a:tc>
+                <a:tc>
+                  <a:txBody>
+                    <a:bodyPr/>
+                    <a:lstStyle/>
+                    <a:p>
+                      <a:pPr algn="ctr" indent="0" marL="0">
+                        <a:buNone/>
+                      </a:pPr>
+                      <a:r>
+                        <a:rPr lang="en-US" sz="900" dirty="0">
+                          <a:solidFill>
+                            <a:srgbClr val="000000"/>
+                          </a:solidFill>
+                          <a:latin typeface="Arial" pitchFamily="34" charset="0"/>
+                          <a:ea typeface="Arial" pitchFamily="34" charset="-122"/>
+                          <a:cs typeface="Arial" pitchFamily="34" charset="-120"/>
+                        </a:rPr>
+                        <a:t>/10</a:t>
+                      </a:r>
+                      <a:endParaRPr lang="en-US" sz="900" dirty="0">
+                        <a:latin typeface="Arial" charset="0"/>
+                        <a:ea typeface="Arial" charset="0"/>
+                        <a:cs typeface="Arial" charset="0"/>
+                      </a:endParaRPr>
+                    </a:p>
+                  </a:txBody>
+                  <a:tcPr marL="91440" marR="91440" marT="45720" marB="45720">
+                    <a:lnL w="6350" cap="flat" cmpd="sng" algn="ctr">
+                      <a:solidFill>
+                        <a:srgbClr val="CBD5E1"/>
+                      </a:solidFill>
+                      <a:prstDash val="solid"/>
+                      <a:round/>
+                      <a:headEnd type="none" w="med" len="med"/>
+                      <a:tailEnd type="none" w="med" len="med"/>
+                    </a:lnL>
+                    <a:lnR w="6350" cap="flat" cmpd="sng" algn="ctr">
+                      <a:solidFill>
+                        <a:srgbClr val="CBD5E1"/>
+                      </a:solidFill>
+                      <a:prstDash val="solid"/>
+                      <a:round/>
+                      <a:headEnd type="none" w="med" len="med"/>
+                      <a:tailEnd type="none" w="med" len="med"/>
+                    </a:lnR>
+                    <a:lnT w="6350" cap="flat" cmpd="sng" algn="ctr">
+                      <a:solidFill>
+                        <a:srgbClr val="CBD5E1"/>
+                      </a:solidFill>
+                      <a:prstDash val="solid"/>
+                      <a:round/>
+                      <a:headEnd type="none" w="med" len="med"/>
+                      <a:tailEnd type="none" w="med" len="med"/>
+                    </a:lnT>
+                    <a:lnB w="6350" cap="flat" cmpd="sng" algn="ctr">
+                      <a:solidFill>
+                        <a:srgbClr val="CBD5E1"/>
+                      </a:solidFill>
+                      <a:prstDash val="solid"/>
+                      <a:round/>
+                      <a:headEnd type="none" w="med" len="med"/>
+                      <a:tailEnd type="none" w="med" len="med"/>
+                    </a:lnB>
+                    <a:solidFill>
+                      <a:srgbClr val="E8EFF8"/>
+                    </a:solidFill>
+                  </a:tcPr>
+                </a:tc>
+                <a:tc>
+                  <a:txBody>
+                    <a:bodyPr/>
+                    <a:lstStyle/>
+                    <a:p>
+                      <a:pPr algn="ctr" indent="0" marL="0">
+                        <a:buNone/>
+                      </a:pPr>
+                      <a:r>
+                        <a:rPr lang="en-US" sz="900" dirty="0">
+                          <a:solidFill>
+                            <a:srgbClr val="000000"/>
+                          </a:solidFill>
+                          <a:latin typeface="Arial" pitchFamily="34" charset="0"/>
+                          <a:ea typeface="Arial" pitchFamily="34" charset="-122"/>
+                          <a:cs typeface="Arial" pitchFamily="34" charset="-120"/>
+                        </a:rPr>
+                        <a:t>8</a:t>
+                      </a:r>
+                      <a:endParaRPr lang="en-US" sz="900" dirty="0">
+                        <a:latin typeface="Arial" charset="0"/>
+                        <a:ea typeface="Arial" charset="0"/>
+                        <a:cs typeface="Arial" charset="0"/>
+                      </a:endParaRPr>
+                    </a:p>
+                  </a:txBody>
+                  <a:tcPr marL="91440" marR="91440" marT="45720" marB="45720">
+                    <a:lnL w="6350" cap="flat" cmpd="sng" algn="ctr">
+                      <a:solidFill>
+                        <a:srgbClr val="CBD5E1"/>
+                      </a:solidFill>
+                      <a:prstDash val="solid"/>
+                      <a:round/>
+                      <a:headEnd type="none" w="med" len="med"/>
+                      <a:tailEnd type="none" w="med" len="med"/>
+                    </a:lnL>
+                    <a:lnR w="6350" cap="flat" cmpd="sng" algn="ctr">
+                      <a:solidFill>
+                        <a:srgbClr val="CBD5E1"/>
+                      </a:solidFill>
+                      <a:prstDash val="solid"/>
+                      <a:round/>
+                      <a:headEnd type="none" w="med" len="med"/>
+                      <a:tailEnd type="none" w="med" len="med"/>
+                    </a:lnR>
+                    <a:lnT w="6350" cap="flat" cmpd="sng" algn="ctr">
+                      <a:solidFill>
+                        <a:srgbClr val="CBD5E1"/>
+                      </a:solidFill>
+                      <a:prstDash val="solid"/>
+                      <a:round/>
+                      <a:headEnd type="none" w="med" len="med"/>
+                      <a:tailEnd type="none" w="med" len="med"/>
+                    </a:lnT>
+                    <a:lnB w="6350" cap="flat" cmpd="sng" algn="ctr">
+                      <a:solidFill>
+                        <a:srgbClr val="CBD5E1"/>
+                      </a:solidFill>
+                      <a:prstDash val="solid"/>
+                      <a:round/>
+                      <a:headEnd type="none" w="med" len="med"/>
+                      <a:tailEnd type="none" w="med" len="med"/>
+                    </a:lnB>
+                    <a:solidFill>
+                      <a:srgbClr val="E8EFF8"/>
+                    </a:solidFill>
+                  </a:tcPr>
+                </a:tc>
+              </a:tr>
+              <a:tr h="201168">
+                <a:tc>
+                  <a:txBody>
+                    <a:bodyPr/>
+                    <a:lstStyle/>
+                    <a:p>
+                      <a:pPr algn="ctr" indent="0" marL="0">
+                        <a:buNone/>
+                      </a:pPr>
+                      <a:r>
+                        <a:rPr lang="en-US" sz="900" dirty="0">
+                          <a:solidFill>
+                            <a:srgbClr val="000000"/>
+                          </a:solidFill>
+                          <a:latin typeface="Arial" pitchFamily="34" charset="0"/>
+                          <a:ea typeface="Arial" pitchFamily="34" charset="-122"/>
+                          <a:cs typeface="Arial" pitchFamily="34" charset="-120"/>
+                        </a:rPr>
+                        <a:t>Google</a:t>
+                      </a:r>
+                      <a:endParaRPr lang="en-US" sz="900" dirty="0">
+                        <a:latin typeface="Arial" charset="0"/>
+                        <a:ea typeface="Arial" charset="0"/>
+                        <a:cs typeface="Arial" charset="0"/>
+                      </a:endParaRPr>
+                    </a:p>
+                  </a:txBody>
+                  <a:tcPr marL="91440" marR="91440" marT="45720" marB="45720">
+                    <a:lnL w="6350" cap="flat" cmpd="sng" algn="ctr">
+                      <a:solidFill>
+                        <a:srgbClr val="CBD5E1"/>
+                      </a:solidFill>
+                      <a:prstDash val="solid"/>
+                      <a:round/>
+                      <a:headEnd type="none" w="med" len="med"/>
+                      <a:tailEnd type="none" w="med" len="med"/>
+                    </a:lnL>
+                    <a:lnR w="6350" cap="flat" cmpd="sng" algn="ctr">
+                      <a:solidFill>
+                        <a:srgbClr val="CBD5E1"/>
+                      </a:solidFill>
+                      <a:prstDash val="solid"/>
+                      <a:round/>
+                      <a:headEnd type="none" w="med" len="med"/>
+                      <a:tailEnd type="none" w="med" len="med"/>
+                    </a:lnR>
+                    <a:lnT w="6350" cap="flat" cmpd="sng" algn="ctr">
+                      <a:solidFill>
+                        <a:srgbClr val="CBD5E1"/>
+                      </a:solidFill>
+                      <a:prstDash val="solid"/>
+                      <a:round/>
+                      <a:headEnd type="none" w="med" len="med"/>
+                      <a:tailEnd type="none" w="med" len="med"/>
+                    </a:lnT>
+                    <a:lnB w="6350" cap="flat" cmpd="sng" algn="ctr">
+                      <a:solidFill>
+                        <a:srgbClr val="CBD5E1"/>
+                      </a:solidFill>
+                      <a:prstDash val="solid"/>
+                      <a:round/>
+                      <a:headEnd type="none" w="med" len="med"/>
+                      <a:tailEnd type="none" w="med" len="med"/>
+                    </a:lnB>
+                    <a:solidFill>
+                      <a:srgbClr val="FFFFFF"/>
+                    </a:solidFill>
+                  </a:tcPr>
+                </a:tc>
+                <a:tc>
+                  <a:txBody>
+                    <a:bodyPr/>
+                    <a:lstStyle/>
+                    <a:p>
+                      <a:pPr algn="ctr" indent="0" marL="0">
+                        <a:buNone/>
+                      </a:pPr>
+                      <a:r>
+                        <a:rPr lang="en-US" sz="900" dirty="0">
+                          <a:solidFill>
+                            <a:srgbClr val="000000"/>
+                          </a:solidFill>
+                          <a:latin typeface="Arial" pitchFamily="34" charset="0"/>
+                          <a:ea typeface="Arial" pitchFamily="34" charset="-122"/>
+                          <a:cs typeface="Arial" pitchFamily="34" charset="-120"/>
+                        </a:rPr>
+                        <a:t>6</a:t>
+                      </a:r>
+                      <a:endParaRPr lang="en-US" sz="900" dirty="0">
+                        <a:latin typeface="Arial" charset="0"/>
+                        <a:ea typeface="Arial" charset="0"/>
+                        <a:cs typeface="Arial" charset="0"/>
+                      </a:endParaRPr>
+                    </a:p>
+                  </a:txBody>
+                  <a:tcPr marL="91440" marR="91440" marT="45720" marB="45720">
+                    <a:lnL w="6350" cap="flat" cmpd="sng" algn="ctr">
+                      <a:solidFill>
+                        <a:srgbClr val="CBD5E1"/>
+                      </a:solidFill>
+                      <a:prstDash val="solid"/>
+                      <a:round/>
+                      <a:headEnd type="none" w="med" len="med"/>
+                      <a:tailEnd type="none" w="med" len="med"/>
+                    </a:lnL>
+                    <a:lnR w="6350" cap="flat" cmpd="sng" algn="ctr">
+                      <a:solidFill>
+                        <a:srgbClr val="CBD5E1"/>
+                      </a:solidFill>
+                      <a:prstDash val="solid"/>
+                      <a:round/>
+                      <a:headEnd type="none" w="med" len="med"/>
+                      <a:tailEnd type="none" w="med" len="med"/>
+                    </a:lnR>
+                    <a:lnT w="6350" cap="flat" cmpd="sng" algn="ctr">
+                      <a:solidFill>
+                        <a:srgbClr val="CBD5E1"/>
+                      </a:solidFill>
+                      <a:prstDash val="solid"/>
+                      <a:round/>
+                      <a:headEnd type="none" w="med" len="med"/>
+                      <a:tailEnd type="none" w="med" len="med"/>
+                    </a:lnT>
+                    <a:lnB w="6350" cap="flat" cmpd="sng" algn="ctr">
+                      <a:solidFill>
+                        <a:srgbClr val="CBD5E1"/>
+                      </a:solidFill>
+                      <a:prstDash val="solid"/>
+                      <a:round/>
+                      <a:headEnd type="none" w="med" len="med"/>
+                      <a:tailEnd type="none" w="med" len="med"/>
+                    </a:lnB>
+                    <a:solidFill>
+                      <a:srgbClr val="FFFFFF"/>
+                    </a:solidFill>
+                  </a:tcPr>
+                </a:tc>
+                <a:tc>
+                  <a:txBody>
+                    <a:bodyPr/>
+                    <a:lstStyle/>
+                    <a:p>
+                      <a:pPr algn="ctr" indent="0" marL="0">
+                        <a:buNone/>
+                      </a:pPr>
+                      <a:r>
+                        <a:rPr lang="en-US" sz="900" dirty="0">
+                          <a:solidFill>
+                            <a:srgbClr val="000000"/>
+                          </a:solidFill>
+                          <a:latin typeface="Arial" pitchFamily="34" charset="0"/>
+                          <a:ea typeface="Arial" pitchFamily="34" charset="-122"/>
+                          <a:cs typeface="Arial" pitchFamily="34" charset="-120"/>
+                        </a:rPr>
+                        <a:t>4</a:t>
+                      </a:r>
+                      <a:endParaRPr lang="en-US" sz="900" dirty="0">
+                        <a:latin typeface="Arial" charset="0"/>
+                        <a:ea typeface="Arial" charset="0"/>
+                        <a:cs typeface="Arial" charset="0"/>
+                      </a:endParaRPr>
+                    </a:p>
+                  </a:txBody>
+                  <a:tcPr marL="91440" marR="91440" marT="45720" marB="45720">
+                    <a:lnL w="6350" cap="flat" cmpd="sng" algn="ctr">
+                      <a:solidFill>
+                        <a:srgbClr val="CBD5E1"/>
+                      </a:solidFill>
+                      <a:prstDash val="solid"/>
+                      <a:round/>
+                      <a:headEnd type="none" w="med" len="med"/>
+                      <a:tailEnd type="none" w="med" len="med"/>
+                    </a:lnL>
+                    <a:lnR w="6350" cap="flat" cmpd="sng" algn="ctr">
+                      <a:solidFill>
+                        <a:srgbClr val="CBD5E1"/>
+                      </a:solidFill>
+                      <a:prstDash val="solid"/>
+                      <a:round/>
+                      <a:headEnd type="none" w="med" len="med"/>
+                      <a:tailEnd type="none" w="med" len="med"/>
+                    </a:lnR>
+                    <a:lnT w="6350" cap="flat" cmpd="sng" algn="ctr">
+                      <a:solidFill>
+                        <a:srgbClr val="CBD5E1"/>
+                      </a:solidFill>
+                      <a:prstDash val="solid"/>
+                      <a:round/>
+                      <a:headEnd type="none" w="med" len="med"/>
+                      <a:tailEnd type="none" w="med" len="med"/>
+                    </a:lnT>
+                    <a:lnB w="6350" cap="flat" cmpd="sng" algn="ctr">
+                      <a:solidFill>
+                        <a:srgbClr val="CBD5E1"/>
+                      </a:solidFill>
+                      <a:prstDash val="solid"/>
+                      <a:round/>
+                      <a:headEnd type="none" w="med" len="med"/>
+                      <a:tailEnd type="none" w="med" len="med"/>
+                    </a:lnB>
+                    <a:solidFill>
+                      <a:srgbClr val="FFFFFF"/>
                     </a:solidFill>
                   </a:tcPr>
                 </a:tc>
@@ -8088,144 +8407,6 @@
                       <a:tailEnd type="none" w="med" len="med"/>
                     </a:lnB>
                     <a:solidFill>
-                      <a:srgbClr val="E8EFF8"/>
-                    </a:solidFill>
-                  </a:tcPr>
-                </a:tc>
-                <a:tc>
-                  <a:txBody>
-                    <a:bodyPr/>
-                    <a:lstStyle/>
-                    <a:p>
-                      <a:pPr algn="ctr" indent="0" marL="0">
-                        <a:buNone/>
-                      </a:pPr>
-                      <a:r>
-                        <a:rPr lang="en-US" sz="900" dirty="0">
-                          <a:solidFill>
-                            <a:srgbClr val="000000"/>
-                          </a:solidFill>
-                          <a:latin typeface="Arial" pitchFamily="34" charset="0"/>
-                          <a:ea typeface="Arial" pitchFamily="34" charset="-122"/>
-                          <a:cs typeface="Arial" pitchFamily="34" charset="-120"/>
-                        </a:rPr>
-                        <a:t>7.88</a:t>
-                      </a:r>
-                      <a:endParaRPr lang="en-US" sz="900" dirty="0">
-                        <a:latin typeface="Arial" charset="0"/>
-                        <a:ea typeface="Arial" charset="0"/>
-                        <a:cs typeface="Arial" charset="0"/>
-                      </a:endParaRPr>
-                    </a:p>
-                  </a:txBody>
-                  <a:tcPr marL="91440" marR="91440" marT="45720" marB="45720">
-                    <a:lnL w="6350" cap="flat" cmpd="sng" algn="ctr">
-                      <a:solidFill>
-                        <a:srgbClr val="CBD5E1"/>
-                      </a:solidFill>
-                      <a:prstDash val="solid"/>
-                      <a:round/>
-                      <a:headEnd type="none" w="med" len="med"/>
-                      <a:tailEnd type="none" w="med" len="med"/>
-                    </a:lnL>
-                    <a:lnR w="6350" cap="flat" cmpd="sng" algn="ctr">
-                      <a:solidFill>
-                        <a:srgbClr val="CBD5E1"/>
-                      </a:solidFill>
-                      <a:prstDash val="solid"/>
-                      <a:round/>
-                      <a:headEnd type="none" w="med" len="med"/>
-                      <a:tailEnd type="none" w="med" len="med"/>
-                    </a:lnR>
-                    <a:lnT w="6350" cap="flat" cmpd="sng" algn="ctr">
-                      <a:solidFill>
-                        <a:srgbClr val="CBD5E1"/>
-                      </a:solidFill>
-                      <a:prstDash val="solid"/>
-                      <a:round/>
-                      <a:headEnd type="none" w="med" len="med"/>
-                      <a:tailEnd type="none" w="med" len="med"/>
-                    </a:lnT>
-                    <a:lnB w="6350" cap="flat" cmpd="sng" algn="ctr">
-                      <a:solidFill>
-                        <a:srgbClr val="CBD5E1"/>
-                      </a:solidFill>
-                      <a:prstDash val="solid"/>
-                      <a:round/>
-                      <a:headEnd type="none" w="med" len="med"/>
-                      <a:tailEnd type="none" w="med" len="med"/>
-                    </a:lnB>
-                    <a:solidFill>
-                      <a:srgbClr val="E8EFF8"/>
-                    </a:solidFill>
-                  </a:tcPr>
-                </a:tc>
-              </a:tr>
-              <a:tr h="201168">
-                <a:tc>
-                  <a:txBody>
-                    <a:bodyPr/>
-                    <a:lstStyle/>
-                    <a:p>
-                      <a:pPr algn="ctr" indent="0" marL="0">
-                        <a:buNone/>
-                      </a:pPr>
-                      <a:r>
-                        <a:rPr lang="en-US" sz="900" dirty="0">
-                          <a:solidFill>
-                            <a:srgbClr val="000000"/>
-                          </a:solidFill>
-                          <a:latin typeface="Arial" pitchFamily="34" charset="0"/>
-                          <a:ea typeface="Arial" pitchFamily="34" charset="-122"/>
-                          <a:cs typeface="Arial" pitchFamily="34" charset="-120"/>
-                        </a:rPr>
-                        <a:t>Booking.com</a:t>
-                      </a:r>
-                      <a:endParaRPr lang="en-US" sz="900" dirty="0">
-                        <a:latin typeface="Arial" charset="0"/>
-                        <a:ea typeface="Arial" charset="0"/>
-                        <a:cs typeface="Arial" charset="0"/>
-                      </a:endParaRPr>
-                    </a:p>
-                  </a:txBody>
-                  <a:tcPr marL="91440" marR="91440" marT="45720" marB="45720">
-                    <a:lnL w="6350" cap="flat" cmpd="sng" algn="ctr">
-                      <a:solidFill>
-                        <a:srgbClr val="CBD5E1"/>
-                      </a:solidFill>
-                      <a:prstDash val="solid"/>
-                      <a:round/>
-                      <a:headEnd type="none" w="med" len="med"/>
-                      <a:tailEnd type="none" w="med" len="med"/>
-                    </a:lnL>
-                    <a:lnR w="6350" cap="flat" cmpd="sng" algn="ctr">
-                      <a:solidFill>
-                        <a:srgbClr val="CBD5E1"/>
-                      </a:solidFill>
-                      <a:prstDash val="solid"/>
-                      <a:round/>
-                      <a:headEnd type="none" w="med" len="med"/>
-                      <a:tailEnd type="none" w="med" len="med"/>
-                    </a:lnR>
-                    <a:lnT w="6350" cap="flat" cmpd="sng" algn="ctr">
-                      <a:solidFill>
-                        <a:srgbClr val="CBD5E1"/>
-                      </a:solidFill>
-                      <a:prstDash val="solid"/>
-                      <a:round/>
-                      <a:headEnd type="none" w="med" len="med"/>
-                      <a:tailEnd type="none" w="med" len="med"/>
-                    </a:lnT>
-                    <a:lnB w="6350" cap="flat" cmpd="sng" algn="ctr">
-                      <a:solidFill>
-                        <a:srgbClr val="CBD5E1"/>
-                      </a:solidFill>
-                      <a:prstDash val="solid"/>
-                      <a:round/>
-                      <a:headEnd type="none" w="med" len="med"/>
-                      <a:tailEnd type="none" w="med" len="med"/>
-                    </a:lnB>
-                    <a:solidFill>
                       <a:srgbClr val="FFFFFF"/>
                     </a:solidFill>
                   </a:tcPr>
@@ -8247,211 +8428,7 @@
                           <a:ea typeface="Arial" pitchFamily="34" charset="-122"/>
                           <a:cs typeface="Arial" pitchFamily="34" charset="-120"/>
                         </a:rPr>
-                        <a:t>19</a:t>
-                      </a:r>
-                      <a:endParaRPr lang="en-US" sz="900" dirty="0">
-                        <a:latin typeface="Arial" charset="0"/>
-                        <a:ea typeface="Arial" charset="0"/>
-                        <a:cs typeface="Arial" charset="0"/>
-                      </a:endParaRPr>
-                    </a:p>
-                  </a:txBody>
-                  <a:tcPr marL="91440" marR="91440" marT="45720" marB="45720">
-                    <a:lnL w="6350" cap="flat" cmpd="sng" algn="ctr">
-                      <a:solidFill>
-                        <a:srgbClr val="CBD5E1"/>
-                      </a:solidFill>
-                      <a:prstDash val="solid"/>
-                      <a:round/>
-                      <a:headEnd type="none" w="med" len="med"/>
-                      <a:tailEnd type="none" w="med" len="med"/>
-                    </a:lnL>
-                    <a:lnR w="6350" cap="flat" cmpd="sng" algn="ctr">
-                      <a:solidFill>
-                        <a:srgbClr val="CBD5E1"/>
-                      </a:solidFill>
-                      <a:prstDash val="solid"/>
-                      <a:round/>
-                      <a:headEnd type="none" w="med" len="med"/>
-                      <a:tailEnd type="none" w="med" len="med"/>
-                    </a:lnR>
-                    <a:lnT w="6350" cap="flat" cmpd="sng" algn="ctr">
-                      <a:solidFill>
-                        <a:srgbClr val="CBD5E1"/>
-                      </a:solidFill>
-                      <a:prstDash val="solid"/>
-                      <a:round/>
-                      <a:headEnd type="none" w="med" len="med"/>
-                      <a:tailEnd type="none" w="med" len="med"/>
-                    </a:lnT>
-                    <a:lnB w="6350" cap="flat" cmpd="sng" algn="ctr">
-                      <a:solidFill>
-                        <a:srgbClr val="CBD5E1"/>
-                      </a:solidFill>
-                      <a:prstDash val="solid"/>
-                      <a:round/>
-                      <a:headEnd type="none" w="med" len="med"/>
-                      <a:tailEnd type="none" w="med" len="med"/>
-                    </a:lnB>
-                    <a:solidFill>
-                      <a:srgbClr val="FFFFFF"/>
-                    </a:solidFill>
-                  </a:tcPr>
-                </a:tc>
-                <a:tc>
-                  <a:txBody>
-                    <a:bodyPr/>
-                    <a:lstStyle/>
-                    <a:p>
-                      <a:pPr algn="ctr" indent="0" marL="0">
-                        <a:buNone/>
-                      </a:pPr>
-                      <a:r>
-                        <a:rPr lang="en-US" sz="900" dirty="0">
-                          <a:solidFill>
-                            <a:srgbClr val="000000"/>
-                          </a:solidFill>
-                          <a:latin typeface="Arial" pitchFamily="34" charset="0"/>
-                          <a:ea typeface="Arial" pitchFamily="34" charset="-122"/>
-                          <a:cs typeface="Arial" pitchFamily="34" charset="-120"/>
-                        </a:rPr>
-                        <a:t>7.58</a:t>
-                      </a:r>
-                      <a:endParaRPr lang="en-US" sz="900" dirty="0">
-                        <a:latin typeface="Arial" charset="0"/>
-                        <a:ea typeface="Arial" charset="0"/>
-                        <a:cs typeface="Arial" charset="0"/>
-                      </a:endParaRPr>
-                    </a:p>
-                  </a:txBody>
-                  <a:tcPr marL="91440" marR="91440" marT="45720" marB="45720">
-                    <a:lnL w="6350" cap="flat" cmpd="sng" algn="ctr">
-                      <a:solidFill>
-                        <a:srgbClr val="CBD5E1"/>
-                      </a:solidFill>
-                      <a:prstDash val="solid"/>
-                      <a:round/>
-                      <a:headEnd type="none" w="med" len="med"/>
-                      <a:tailEnd type="none" w="med" len="med"/>
-                    </a:lnL>
-                    <a:lnR w="6350" cap="flat" cmpd="sng" algn="ctr">
-                      <a:solidFill>
-                        <a:srgbClr val="CBD5E1"/>
-                      </a:solidFill>
-                      <a:prstDash val="solid"/>
-                      <a:round/>
-                      <a:headEnd type="none" w="med" len="med"/>
-                      <a:tailEnd type="none" w="med" len="med"/>
-                    </a:lnR>
-                    <a:lnT w="6350" cap="flat" cmpd="sng" algn="ctr">
-                      <a:solidFill>
-                        <a:srgbClr val="CBD5E1"/>
-                      </a:solidFill>
-                      <a:prstDash val="solid"/>
-                      <a:round/>
-                      <a:headEnd type="none" w="med" len="med"/>
-                      <a:tailEnd type="none" w="med" len="med"/>
-                    </a:lnT>
-                    <a:lnB w="6350" cap="flat" cmpd="sng" algn="ctr">
-                      <a:solidFill>
-                        <a:srgbClr val="CBD5E1"/>
-                      </a:solidFill>
-                      <a:prstDash val="solid"/>
-                      <a:round/>
-                      <a:headEnd type="none" w="med" len="med"/>
-                      <a:tailEnd type="none" w="med" len="med"/>
-                    </a:lnB>
-                    <a:solidFill>
-                      <a:srgbClr val="FFFFFF"/>
-                    </a:solidFill>
-                  </a:tcPr>
-                </a:tc>
-                <a:tc>
-                  <a:txBody>
-                    <a:bodyPr/>
-                    <a:lstStyle/>
-                    <a:p>
-                      <a:pPr algn="ctr" indent="0" marL="0">
-                        <a:buNone/>
-                      </a:pPr>
-                      <a:r>
-                        <a:rPr lang="en-US" sz="900" dirty="0">
-                          <a:solidFill>
-                            <a:srgbClr val="000000"/>
-                          </a:solidFill>
-                          <a:latin typeface="Arial" pitchFamily="34" charset="0"/>
-                          <a:ea typeface="Arial" pitchFamily="34" charset="-122"/>
-                          <a:cs typeface="Arial" pitchFamily="34" charset="-120"/>
-                        </a:rPr>
-                        <a:t>/10</a:t>
-                      </a:r>
-                      <a:endParaRPr lang="en-US" sz="900" dirty="0">
-                        <a:latin typeface="Arial" charset="0"/>
-                        <a:ea typeface="Arial" charset="0"/>
-                        <a:cs typeface="Arial" charset="0"/>
-                      </a:endParaRPr>
-                    </a:p>
-                  </a:txBody>
-                  <a:tcPr marL="91440" marR="91440" marT="45720" marB="45720">
-                    <a:lnL w="6350" cap="flat" cmpd="sng" algn="ctr">
-                      <a:solidFill>
-                        <a:srgbClr val="CBD5E1"/>
-                      </a:solidFill>
-                      <a:prstDash val="solid"/>
-                      <a:round/>
-                      <a:headEnd type="none" w="med" len="med"/>
-                      <a:tailEnd type="none" w="med" len="med"/>
-                    </a:lnL>
-                    <a:lnR w="6350" cap="flat" cmpd="sng" algn="ctr">
-                      <a:solidFill>
-                        <a:srgbClr val="CBD5E1"/>
-                      </a:solidFill>
-                      <a:prstDash val="solid"/>
-                      <a:round/>
-                      <a:headEnd type="none" w="med" len="med"/>
-                      <a:tailEnd type="none" w="med" len="med"/>
-                    </a:lnR>
-                    <a:lnT w="6350" cap="flat" cmpd="sng" algn="ctr">
-                      <a:solidFill>
-                        <a:srgbClr val="CBD5E1"/>
-                      </a:solidFill>
-                      <a:prstDash val="solid"/>
-                      <a:round/>
-                      <a:headEnd type="none" w="med" len="med"/>
-                      <a:tailEnd type="none" w="med" len="med"/>
-                    </a:lnT>
-                    <a:lnB w="6350" cap="flat" cmpd="sng" algn="ctr">
-                      <a:solidFill>
-                        <a:srgbClr val="CBD5E1"/>
-                      </a:solidFill>
-                      <a:prstDash val="solid"/>
-                      <a:round/>
-                      <a:headEnd type="none" w="med" len="med"/>
-                      <a:tailEnd type="none" w="med" len="med"/>
-                    </a:lnB>
-                    <a:solidFill>
-                      <a:srgbClr val="FFFFFF"/>
-                    </a:solidFill>
-                  </a:tcPr>
-                </a:tc>
-                <a:tc>
-                  <a:txBody>
-                    <a:bodyPr/>
-                    <a:lstStyle/>
-                    <a:p>
-                      <a:pPr algn="ctr" indent="0" marL="0">
-                        <a:buNone/>
-                      </a:pPr>
-                      <a:r>
-                        <a:rPr lang="en-US" sz="900" dirty="0">
-                          <a:solidFill>
-                            <a:srgbClr val="000000"/>
-                          </a:solidFill>
-                          <a:latin typeface="Arial" pitchFamily="34" charset="0"/>
-                          <a:ea typeface="Arial" pitchFamily="34" charset="-122"/>
-                          <a:cs typeface="Arial" pitchFamily="34" charset="-120"/>
-                        </a:rPr>
-                        <a:t>7.58</a:t>
+                        <a:t>8</a:t>
                       </a:r>
                       <a:endParaRPr lang="en-US" sz="900" dirty="0">
                         <a:latin typeface="Arial" charset="0"/>
@@ -8589,7 +8566,7 @@
                           <a:ea typeface="Arial" pitchFamily="34" charset="-122"/>
                           <a:cs typeface="Arial" pitchFamily="34" charset="-120"/>
                         </a:rPr>
-                        <a:t>4</a:t>
+                        <a:t>3</a:t>
                       </a:r>
                       <a:endParaRPr lang="en-US" sz="900" dirty="0">
                         <a:latin typeface="Arial" charset="0"/>
@@ -8657,7 +8634,7 @@
                           <a:ea typeface="Arial" pitchFamily="34" charset="-122"/>
                           <a:cs typeface="Arial" pitchFamily="34" charset="-120"/>
                         </a:rPr>
-                        <a:t>3.75</a:t>
+                        <a:t>3.67</a:t>
                       </a:r>
                       <a:endParaRPr lang="en-US" sz="900" dirty="0">
                         <a:latin typeface="Arial" charset="0"/>
@@ -8793,7 +8770,7 @@
                           <a:ea typeface="Arial" pitchFamily="34" charset="-122"/>
                           <a:cs typeface="Arial" pitchFamily="34" charset="-120"/>
                         </a:rPr>
-                        <a:t>7.5</a:t>
+                        <a:t>7.33</a:t>
                       </a:r>
                       <a:endParaRPr lang="en-US" sz="900" dirty="0">
                         <a:latin typeface="Arial" charset="0"/>
@@ -8841,348 +8818,6 @@
                     </a:lnB>
                     <a:solidFill>
                       <a:srgbClr val="E8EFF8"/>
-                    </a:solidFill>
-                  </a:tcPr>
-                </a:tc>
-              </a:tr>
-              <a:tr h="201168">
-                <a:tc>
-                  <a:txBody>
-                    <a:bodyPr/>
-                    <a:lstStyle/>
-                    <a:p>
-                      <a:pPr algn="ctr" indent="0" marL="0">
-                        <a:buNone/>
-                      </a:pPr>
-                      <a:r>
-                        <a:rPr lang="en-US" sz="900" dirty="0">
-                          <a:solidFill>
-                            <a:srgbClr val="000000"/>
-                          </a:solidFill>
-                          <a:latin typeface="Arial" pitchFamily="34" charset="0"/>
-                          <a:ea typeface="Arial" pitchFamily="34" charset="-122"/>
-                          <a:cs typeface="Arial" pitchFamily="34" charset="-120"/>
-                        </a:rPr>
-                        <a:t>楽天トラベル</a:t>
-                      </a:r>
-                      <a:endParaRPr lang="en-US" sz="900" dirty="0">
-                        <a:latin typeface="Arial" charset="0"/>
-                        <a:ea typeface="Arial" charset="0"/>
-                        <a:cs typeface="Arial" charset="0"/>
-                      </a:endParaRPr>
-                    </a:p>
-                  </a:txBody>
-                  <a:tcPr marL="91440" marR="91440" marT="45720" marB="45720">
-                    <a:lnL w="6350" cap="flat" cmpd="sng" algn="ctr">
-                      <a:solidFill>
-                        <a:srgbClr val="CBD5E1"/>
-                      </a:solidFill>
-                      <a:prstDash val="solid"/>
-                      <a:round/>
-                      <a:headEnd type="none" w="med" len="med"/>
-                      <a:tailEnd type="none" w="med" len="med"/>
-                    </a:lnL>
-                    <a:lnR w="6350" cap="flat" cmpd="sng" algn="ctr">
-                      <a:solidFill>
-                        <a:srgbClr val="CBD5E1"/>
-                      </a:solidFill>
-                      <a:prstDash val="solid"/>
-                      <a:round/>
-                      <a:headEnd type="none" w="med" len="med"/>
-                      <a:tailEnd type="none" w="med" len="med"/>
-                    </a:lnR>
-                    <a:lnT w="6350" cap="flat" cmpd="sng" algn="ctr">
-                      <a:solidFill>
-                        <a:srgbClr val="CBD5E1"/>
-                      </a:solidFill>
-                      <a:prstDash val="solid"/>
-                      <a:round/>
-                      <a:headEnd type="none" w="med" len="med"/>
-                      <a:tailEnd type="none" w="med" len="med"/>
-                    </a:lnT>
-                    <a:lnB w="6350" cap="flat" cmpd="sng" algn="ctr">
-                      <a:solidFill>
-                        <a:srgbClr val="CBD5E1"/>
-                      </a:solidFill>
-                      <a:prstDash val="solid"/>
-                      <a:round/>
-                      <a:headEnd type="none" w="med" len="med"/>
-                      <a:tailEnd type="none" w="med" len="med"/>
-                    </a:lnB>
-                    <a:solidFill>
-                      <a:srgbClr val="FFFFFF"/>
-                    </a:solidFill>
-                  </a:tcPr>
-                </a:tc>
-                <a:tc>
-                  <a:txBody>
-                    <a:bodyPr/>
-                    <a:lstStyle/>
-                    <a:p>
-                      <a:pPr algn="ctr" indent="0" marL="0">
-                        <a:buNone/>
-                      </a:pPr>
-                      <a:r>
-                        <a:rPr lang="en-US" sz="900" dirty="0">
-                          <a:solidFill>
-                            <a:srgbClr val="000000"/>
-                          </a:solidFill>
-                          <a:latin typeface="Arial" pitchFamily="34" charset="0"/>
-                          <a:ea typeface="Arial" pitchFamily="34" charset="-122"/>
-                          <a:cs typeface="Arial" pitchFamily="34" charset="-120"/>
-                        </a:rPr>
-                        <a:t>4</a:t>
-                      </a:r>
-                      <a:endParaRPr lang="en-US" sz="900" dirty="0">
-                        <a:latin typeface="Arial" charset="0"/>
-                        <a:ea typeface="Arial" charset="0"/>
-                        <a:cs typeface="Arial" charset="0"/>
-                      </a:endParaRPr>
-                    </a:p>
-                  </a:txBody>
-                  <a:tcPr marL="91440" marR="91440" marT="45720" marB="45720">
-                    <a:lnL w="6350" cap="flat" cmpd="sng" algn="ctr">
-                      <a:solidFill>
-                        <a:srgbClr val="CBD5E1"/>
-                      </a:solidFill>
-                      <a:prstDash val="solid"/>
-                      <a:round/>
-                      <a:headEnd type="none" w="med" len="med"/>
-                      <a:tailEnd type="none" w="med" len="med"/>
-                    </a:lnL>
-                    <a:lnR w="6350" cap="flat" cmpd="sng" algn="ctr">
-                      <a:solidFill>
-                        <a:srgbClr val="CBD5E1"/>
-                      </a:solidFill>
-                      <a:prstDash val="solid"/>
-                      <a:round/>
-                      <a:headEnd type="none" w="med" len="med"/>
-                      <a:tailEnd type="none" w="med" len="med"/>
-                    </a:lnR>
-                    <a:lnT w="6350" cap="flat" cmpd="sng" algn="ctr">
-                      <a:solidFill>
-                        <a:srgbClr val="CBD5E1"/>
-                      </a:solidFill>
-                      <a:prstDash val="solid"/>
-                      <a:round/>
-                      <a:headEnd type="none" w="med" len="med"/>
-                      <a:tailEnd type="none" w="med" len="med"/>
-                    </a:lnT>
-                    <a:lnB w="6350" cap="flat" cmpd="sng" algn="ctr">
-                      <a:solidFill>
-                        <a:srgbClr val="CBD5E1"/>
-                      </a:solidFill>
-                      <a:prstDash val="solid"/>
-                      <a:round/>
-                      <a:headEnd type="none" w="med" len="med"/>
-                      <a:tailEnd type="none" w="med" len="med"/>
-                    </a:lnB>
-                    <a:solidFill>
-                      <a:srgbClr val="FFFFFF"/>
-                    </a:solidFill>
-                  </a:tcPr>
-                </a:tc>
-                <a:tc>
-                  <a:txBody>
-                    <a:bodyPr/>
-                    <a:lstStyle/>
-                    <a:p>
-                      <a:pPr algn="ctr" indent="0" marL="0">
-                        <a:buNone/>
-                      </a:pPr>
-                      <a:r>
-                        <a:rPr lang="en-US" sz="900" dirty="0">
-                          <a:solidFill>
-                            <a:srgbClr val="000000"/>
-                          </a:solidFill>
-                          <a:latin typeface="Arial" pitchFamily="34" charset="0"/>
-                          <a:ea typeface="Arial" pitchFamily="34" charset="-122"/>
-                          <a:cs typeface="Arial" pitchFamily="34" charset="-120"/>
-                        </a:rPr>
-                        <a:t>3.5</a:t>
-                      </a:r>
-                      <a:endParaRPr lang="en-US" sz="900" dirty="0">
-                        <a:latin typeface="Arial" charset="0"/>
-                        <a:ea typeface="Arial" charset="0"/>
-                        <a:cs typeface="Arial" charset="0"/>
-                      </a:endParaRPr>
-                    </a:p>
-                  </a:txBody>
-                  <a:tcPr marL="91440" marR="91440" marT="45720" marB="45720">
-                    <a:lnL w="6350" cap="flat" cmpd="sng" algn="ctr">
-                      <a:solidFill>
-                        <a:srgbClr val="CBD5E1"/>
-                      </a:solidFill>
-                      <a:prstDash val="solid"/>
-                      <a:round/>
-                      <a:headEnd type="none" w="med" len="med"/>
-                      <a:tailEnd type="none" w="med" len="med"/>
-                    </a:lnL>
-                    <a:lnR w="6350" cap="flat" cmpd="sng" algn="ctr">
-                      <a:solidFill>
-                        <a:srgbClr val="CBD5E1"/>
-                      </a:solidFill>
-                      <a:prstDash val="solid"/>
-                      <a:round/>
-                      <a:headEnd type="none" w="med" len="med"/>
-                      <a:tailEnd type="none" w="med" len="med"/>
-                    </a:lnR>
-                    <a:lnT w="6350" cap="flat" cmpd="sng" algn="ctr">
-                      <a:solidFill>
-                        <a:srgbClr val="CBD5E1"/>
-                      </a:solidFill>
-                      <a:prstDash val="solid"/>
-                      <a:round/>
-                      <a:headEnd type="none" w="med" len="med"/>
-                      <a:tailEnd type="none" w="med" len="med"/>
-                    </a:lnT>
-                    <a:lnB w="6350" cap="flat" cmpd="sng" algn="ctr">
-                      <a:solidFill>
-                        <a:srgbClr val="CBD5E1"/>
-                      </a:solidFill>
-                      <a:prstDash val="solid"/>
-                      <a:round/>
-                      <a:headEnd type="none" w="med" len="med"/>
-                      <a:tailEnd type="none" w="med" len="med"/>
-                    </a:lnB>
-                    <a:solidFill>
-                      <a:srgbClr val="FFFFFF"/>
-                    </a:solidFill>
-                  </a:tcPr>
-                </a:tc>
-                <a:tc>
-                  <a:txBody>
-                    <a:bodyPr/>
-                    <a:lstStyle/>
-                    <a:p>
-                      <a:pPr algn="ctr" indent="0" marL="0">
-                        <a:buNone/>
-                      </a:pPr>
-                      <a:r>
-                        <a:rPr lang="en-US" sz="900" dirty="0">
-                          <a:solidFill>
-                            <a:srgbClr val="000000"/>
-                          </a:solidFill>
-                          <a:latin typeface="Arial" pitchFamily="34" charset="0"/>
-                          <a:ea typeface="Arial" pitchFamily="34" charset="-122"/>
-                          <a:cs typeface="Arial" pitchFamily="34" charset="-120"/>
-                        </a:rPr>
-                        <a:t>/5 (×2)</a:t>
-                      </a:r>
-                      <a:endParaRPr lang="en-US" sz="900" dirty="0">
-                        <a:latin typeface="Arial" charset="0"/>
-                        <a:ea typeface="Arial" charset="0"/>
-                        <a:cs typeface="Arial" charset="0"/>
-                      </a:endParaRPr>
-                    </a:p>
-                  </a:txBody>
-                  <a:tcPr marL="91440" marR="91440" marT="45720" marB="45720">
-                    <a:lnL w="6350" cap="flat" cmpd="sng" algn="ctr">
-                      <a:solidFill>
-                        <a:srgbClr val="CBD5E1"/>
-                      </a:solidFill>
-                      <a:prstDash val="solid"/>
-                      <a:round/>
-                      <a:headEnd type="none" w="med" len="med"/>
-                      <a:tailEnd type="none" w="med" len="med"/>
-                    </a:lnL>
-                    <a:lnR w="6350" cap="flat" cmpd="sng" algn="ctr">
-                      <a:solidFill>
-                        <a:srgbClr val="CBD5E1"/>
-                      </a:solidFill>
-                      <a:prstDash val="solid"/>
-                      <a:round/>
-                      <a:headEnd type="none" w="med" len="med"/>
-                      <a:tailEnd type="none" w="med" len="med"/>
-                    </a:lnR>
-                    <a:lnT w="6350" cap="flat" cmpd="sng" algn="ctr">
-                      <a:solidFill>
-                        <a:srgbClr val="CBD5E1"/>
-                      </a:solidFill>
-                      <a:prstDash val="solid"/>
-                      <a:round/>
-                      <a:headEnd type="none" w="med" len="med"/>
-                      <a:tailEnd type="none" w="med" len="med"/>
-                    </a:lnT>
-                    <a:lnB w="6350" cap="flat" cmpd="sng" algn="ctr">
-                      <a:solidFill>
-                        <a:srgbClr val="CBD5E1"/>
-                      </a:solidFill>
-                      <a:prstDash val="solid"/>
-                      <a:round/>
-                      <a:headEnd type="none" w="med" len="med"/>
-                      <a:tailEnd type="none" w="med" len="med"/>
-                    </a:lnB>
-                    <a:solidFill>
-                      <a:srgbClr val="FFFFFF"/>
-                    </a:solidFill>
-                  </a:tcPr>
-                </a:tc>
-                <a:tc>
-                  <a:txBody>
-                    <a:bodyPr/>
-                    <a:lstStyle/>
-                    <a:p>
-                      <a:pPr algn="ctr" indent="0" marL="0">
-                        <a:buNone/>
-                      </a:pPr>
-                      <a:r>
-                        <a:rPr lang="en-US" sz="900" dirty="0">
-                          <a:solidFill>
-                            <a:srgbClr val="000000"/>
-                          </a:solidFill>
-                          <a:latin typeface="Arial" pitchFamily="34" charset="0"/>
-                          <a:ea typeface="Arial" pitchFamily="34" charset="-122"/>
-                          <a:cs typeface="Arial" pitchFamily="34" charset="-120"/>
-                        </a:rPr>
-                        <a:t>7</a:t>
-                      </a:r>
-                      <a:endParaRPr lang="en-US" sz="900" dirty="0">
-                        <a:latin typeface="Arial" charset="0"/>
-                        <a:ea typeface="Arial" charset="0"/>
-                        <a:cs typeface="Arial" charset="0"/>
-                      </a:endParaRPr>
-                    </a:p>
-                  </a:txBody>
-                  <a:tcPr marL="91440" marR="91440" marT="45720" marB="45720">
-                    <a:lnL w="6350" cap="flat" cmpd="sng" algn="ctr">
-                      <a:solidFill>
-                        <a:srgbClr val="CBD5E1"/>
-                      </a:solidFill>
-                      <a:prstDash val="solid"/>
-                      <a:round/>
-                      <a:headEnd type="none" w="med" len="med"/>
-                      <a:tailEnd type="none" w="med" len="med"/>
-                    </a:lnL>
-                    <a:lnR w="6350" cap="flat" cmpd="sng" algn="ctr">
-                      <a:solidFill>
-                        <a:srgbClr val="CBD5E1"/>
-                      </a:solidFill>
-                      <a:prstDash val="solid"/>
-                      <a:round/>
-                      <a:headEnd type="none" w="med" len="med"/>
-                      <a:tailEnd type="none" w="med" len="med"/>
-                    </a:lnR>
-                    <a:lnT w="6350" cap="flat" cmpd="sng" algn="ctr">
-                      <a:solidFill>
-                        <a:srgbClr val="CBD5E1"/>
-                      </a:solidFill>
-                      <a:prstDash val="solid"/>
-                      <a:round/>
-                      <a:headEnd type="none" w="med" len="med"/>
-                      <a:tailEnd type="none" w="med" len="med"/>
-                    </a:lnT>
-                    <a:lnB w="6350" cap="flat" cmpd="sng" algn="ctr">
-                      <a:solidFill>
-                        <a:srgbClr val="CBD5E1"/>
-                      </a:solidFill>
-                      <a:prstDash val="solid"/>
-                      <a:round/>
-                      <a:headEnd type="none" w="med" len="med"/>
-                      <a:tailEnd type="none" w="med" len="med"/>
-                    </a:lnB>
-                    <a:solidFill>
-                      <a:srgbClr val="FFFFFF"/>
                     </a:solidFill>
                   </a:tcPr>
                 </a:tc>
@@ -9252,7 +8887,7 @@
                       <a:tailEnd type="none" w="med" len="med"/>
                     </a:lnB>
                     <a:solidFill>
-                      <a:srgbClr val="E8EFF8"/>
+                      <a:srgbClr val="FFFFFF"/>
                     </a:solidFill>
                   </a:tcPr>
                 </a:tc>
@@ -9273,7 +8908,7 @@
                           <a:ea typeface="Arial" pitchFamily="34" charset="-122"/>
                           <a:cs typeface="Arial" pitchFamily="34" charset="-120"/>
                         </a:rPr>
-                        <a:t>16</a:t>
+                        <a:t>9</a:t>
                       </a:r>
                       <a:endParaRPr lang="en-US" sz="900" dirty="0">
                         <a:latin typeface="Arial" charset="0"/>
@@ -9320,7 +8955,7 @@
                       <a:tailEnd type="none" w="med" len="med"/>
                     </a:lnB>
                     <a:solidFill>
-                      <a:srgbClr val="E8EFF8"/>
+                      <a:srgbClr val="FFFFFF"/>
                     </a:solidFill>
                   </a:tcPr>
                 </a:tc>
@@ -9341,7 +8976,7 @@
                           <a:ea typeface="Arial" pitchFamily="34" charset="-122"/>
                           <a:cs typeface="Arial" pitchFamily="34" charset="-120"/>
                         </a:rPr>
-                        <a:t>6.69</a:t>
+                        <a:t>6.67</a:t>
                       </a:r>
                       <a:endParaRPr lang="en-US" sz="900" dirty="0">
                         <a:latin typeface="Arial" charset="0"/>
@@ -9388,7 +9023,7 @@
                       <a:tailEnd type="none" w="med" len="med"/>
                     </a:lnB>
                     <a:solidFill>
-                      <a:srgbClr val="E8EFF8"/>
+                      <a:srgbClr val="FFFFFF"/>
                     </a:solidFill>
                   </a:tcPr>
                 </a:tc>
@@ -9456,7 +9091,7 @@
                       <a:tailEnd type="none" w="med" len="med"/>
                     </a:lnB>
                     <a:solidFill>
-                      <a:srgbClr val="E8EFF8"/>
+                      <a:srgbClr val="FFFFFF"/>
                     </a:solidFill>
                   </a:tcPr>
                 </a:tc>
@@ -9477,7 +9112,7 @@
                           <a:ea typeface="Arial" pitchFamily="34" charset="-122"/>
                           <a:cs typeface="Arial" pitchFamily="34" charset="-120"/>
                         </a:rPr>
-                        <a:t>6.69</a:t>
+                        <a:t>6.67</a:t>
                       </a:r>
                       <a:endParaRPr lang="en-US" sz="900" dirty="0">
                         <a:latin typeface="Arial" charset="0"/>
@@ -9524,7 +9159,7 @@
                       <a:tailEnd type="none" w="med" len="med"/>
                     </a:lnB>
                     <a:solidFill>
-                      <a:srgbClr val="E8EFF8"/>
+                      <a:srgbClr val="FFFFFF"/>
                     </a:solidFill>
                   </a:tcPr>
                 </a:tc>
@@ -9885,7 +9520,7 @@
                 <a:ea typeface="Arial" pitchFamily="34" charset="-122"/>
                 <a:cs typeface="Arial" pitchFamily="34" charset="-120"/>
               </a:rPr>
-              <a:t>38件（63.3%）</a:t>
+              <a:t>18件（64.3%）</a:t>
             </a:r>
             <a:endParaRPr lang="en-US" sz="1100" dirty="0"/>
           </a:p>
@@ -9983,7 +9618,7 @@
                 <a:ea typeface="Arial" pitchFamily="34" charset="-122"/>
                 <a:cs typeface="Arial" pitchFamily="34" charset="-120"/>
               </a:rPr>
-              <a:t>16件（26.7%）</a:t>
+              <a:t>8件（28.6%）</a:t>
             </a:r>
             <a:endParaRPr lang="en-US" sz="1100" dirty="0"/>
           </a:p>
@@ -10081,7 +9716,7 @@
                 <a:ea typeface="Arial" pitchFamily="34" charset="-122"/>
                 <a:cs typeface="Arial" pitchFamily="34" charset="-120"/>
               </a:rPr>
-              <a:t>6件（10.0%）</a:t>
+              <a:t>2件（7.1%）</a:t>
             </a:r>
             <a:endParaRPr lang="en-US" sz="1100" dirty="0"/>
           </a:p>
@@ -10638,7 +10273,7 @@
                 <a:ea typeface="Arial" pitchFamily="34" charset="-122"/>
                 <a:cs typeface="Arial" pitchFamily="34" charset="-120"/>
               </a:rPr>
-              <a:t>10件+</a:t>
+              <a:t>8件</a:t>
             </a:r>
             <a:endParaRPr lang="en-US" sz="900" dirty="0"/>
           </a:p>
@@ -10861,7 +10496,7 @@
                 <a:ea typeface="Arial" pitchFamily="34" charset="-122"/>
                 <a:cs typeface="Arial" pitchFamily="34" charset="-120"/>
               </a:rPr>
-              <a:t>10件+</a:t>
+              <a:t>6件</a:t>
             </a:r>
             <a:endParaRPr lang="en-US" sz="900" dirty="0"/>
           </a:p>
@@ -11084,7 +10719,7 @@
                 <a:ea typeface="Arial" pitchFamily="34" charset="-122"/>
                 <a:cs typeface="Arial" pitchFamily="34" charset="-120"/>
               </a:rPr>
-              <a:t>8件</a:t>
+              <a:t>6件</a:t>
             </a:r>
             <a:endParaRPr lang="en-US" sz="900" dirty="0"/>
           </a:p>
@@ -11346,7 +10981,7 @@
                 <a:ea typeface="Arial" pitchFamily="34" charset="-122"/>
                 <a:cs typeface="Arial" pitchFamily="34" charset="-120"/>
               </a:rPr>
-              <a:t>コストパフォーマンス</a:t>
+              <a:t>コンビニ・周辺施設</a:t>
             </a:r>
             <a:endParaRPr lang="en-US" sz="1300" dirty="0"/>
           </a:p>
@@ -11385,7 +11020,7 @@
                 <a:ea typeface="Arial" pitchFamily="34" charset="-122"/>
                 <a:cs typeface="Arial" pitchFamily="34" charset="-120"/>
               </a:rPr>
-              <a:t>他のアバよりも狭い 駅からは遠いが、その分比較的安い 羽田空港の乗り継ぎに利用するなら十分か 他のアバよりも狭い ...</a:t>
+              <a:t>ビュッフェ式の朝食は1日あたり12～16カナダドルも追加料金がかかるので、近くにスーパーやコンビニがあることを考え...</a:t>
             </a:r>
             <a:endParaRPr lang="en-US" sz="900" dirty="0"/>
           </a:p>
@@ -11424,7 +11059,7 @@
                 <a:ea typeface="Arial" pitchFamily="34" charset="-122"/>
                 <a:cs typeface="Arial" pitchFamily="34" charset="-120"/>
               </a:rPr>
-              <a:t>「何と言ってもお値段がお手頃なのでねるだけなら充分です チェックアウトスムーズに出来るのも良い」</a:t>
+              <a:t>「駅近で周りにスーパー、コンビニがあるところ」</a:t>
             </a:r>
             <a:endParaRPr lang="en-US" sz="900" dirty="0"/>
           </a:p>
@@ -11530,7 +11165,7 @@
                 <a:ea typeface="Arial" pitchFamily="34" charset="-122"/>
                 <a:cs typeface="Arial" pitchFamily="34" charset="-120"/>
               </a:rPr>
-              <a:t>2件</a:t>
+              <a:t>1件</a:t>
             </a:r>
             <a:endParaRPr lang="en-US" sz="900" dirty="0"/>
           </a:p>
@@ -11569,7 +11204,7 @@
                 <a:ea typeface="Arial" pitchFamily="34" charset="-122"/>
                 <a:cs typeface="Arial" pitchFamily="34" charset="-120"/>
               </a:rPr>
-              <a:t>朝食</a:t>
+              <a:t>コストパフォーマンス</a:t>
             </a:r>
             <a:endParaRPr lang="en-US" sz="1300" dirty="0"/>
           </a:p>
@@ -11608,7 +11243,7 @@
                 <a:ea typeface="Arial" pitchFamily="34" charset="-122"/>
                 <a:cs typeface="Arial" pitchFamily="34" charset="-120"/>
               </a:rPr>
-              <a:t>ビュッフェ式の朝食は1日あたり12～16カナダドルも追加料金がかかるので、近くにスーパーやコンビニがあることを考え...</a:t>
+              <a:t>他のアバよりも狭い 駅からは遠いが、その分比較的安い 羽田空港の乗り継ぎに利用するなら十分か 他のアバよりも狭い ...</a:t>
             </a:r>
             <a:endParaRPr lang="en-US" sz="900" dirty="0"/>
           </a:p>
@@ -11647,7 +11282,7 @@
                 <a:ea typeface="Arial" pitchFamily="34" charset="-122"/>
                 <a:cs typeface="Arial" pitchFamily="34" charset="-120"/>
               </a:rPr>
-              <a:t>「食事の値段も当日に朝食券を買うと1800円になって結構割高なのですが、クオリティとしては個人的にはお値段に見合った...」</a:t>
+              <a:t>「他のアバよりも狭い 駅からは遠いが、その分比較的安い 羽田空港の乗り継ぎに利用するなら十分か 他のアバよりも狭い ...」</a:t>
             </a:r>
             <a:endParaRPr lang="en-US" sz="900" dirty="0"/>
           </a:p>
@@ -12405,7 +12040,7 @@
                           <a:ea typeface="Arial" pitchFamily="34" charset="-122"/>
                           <a:cs typeface="Arial" pitchFamily="34" charset="-120"/>
                         </a:rPr>
-                        <a:t>6件</a:t>
+                        <a:t>3件</a:t>
                       </a:r>
                       <a:endParaRPr lang="en-US" sz="900" dirty="0">
                         <a:latin typeface="Arial" charset="0"/>
@@ -12679,7 +12314,7 @@
                           <a:ea typeface="Arial" pitchFamily="34" charset="-122"/>
                           <a:cs typeface="Arial" pitchFamily="34" charset="-120"/>
                         </a:rPr>
-                        <a:t>4件</a:t>
+                        <a:t>2件</a:t>
                       </a:r>
                       <a:endParaRPr lang="en-US" sz="900" dirty="0">
                         <a:latin typeface="Arial" charset="0"/>
@@ -12817,7 +12452,7 @@
                           <a:ea typeface="Arial" pitchFamily="34" charset="-122"/>
                           <a:cs typeface="Arial" pitchFamily="34" charset="-120"/>
                         </a:rPr>
-                        <a:t>エアコン・空調</a:t>
+                        <a:t>防音性能</a:t>
                       </a:r>
                       <a:endParaRPr lang="en-US" sz="900" dirty="0">
                         <a:latin typeface="Arial" charset="0"/>
@@ -12885,7 +12520,7 @@
                           <a:ea typeface="Arial" pitchFamily="34" charset="-122"/>
                           <a:cs typeface="Arial" pitchFamily="34" charset="-120"/>
                         </a:rPr>
-                        <a:t>Coming from Keikyu-Kamata there was a shoutengai giving p...</a:t>
+                        <a:t>道路沿いだったけど防音がしっかりされていて外の音は聞こえない</a:t>
                       </a:r>
                       <a:endParaRPr lang="en-US" sz="900" dirty="0">
                         <a:latin typeface="Arial" charset="0"/>
@@ -12953,7 +12588,7 @@
                           <a:ea typeface="Arial" pitchFamily="34" charset="-122"/>
                           <a:cs typeface="Arial" pitchFamily="34" charset="-120"/>
                         </a:rPr>
-                        <a:t>2件</a:t>
+                        <a:t>1件</a:t>
                       </a:r>
                       <a:endParaRPr lang="en-US" sz="900" dirty="0">
                         <a:latin typeface="Arial" charset="0"/>
@@ -13091,7 +12726,7 @@
                           <a:ea typeface="Arial" pitchFamily="34" charset="-122"/>
                           <a:cs typeface="Arial" pitchFamily="34" charset="-120"/>
                         </a:rPr>
-                        <a:t>清掃不備</a:t>
+                        <a:t>エアコン・空調</a:t>
                       </a:r>
                       <a:endParaRPr lang="en-US" sz="900" dirty="0">
                         <a:latin typeface="Arial" charset="0"/>
@@ -13159,7 +12794,7 @@
                           <a:ea typeface="Arial" pitchFamily="34" charset="-122"/>
                           <a:cs typeface="Arial" pitchFamily="34" charset="-120"/>
                         </a:rPr>
-                        <a:t>そこは汚くて埃っぽく、以前の訪問時の残骸も散乱していた</a:t>
+                        <a:t>Coming from Keikyu-Kamata there was a shoutengai giving p...</a:t>
                       </a:r>
                       <a:endParaRPr lang="en-US" sz="900" dirty="0">
                         <a:latin typeface="Arial" charset="0"/>
@@ -13227,7 +12862,7 @@
                           <a:ea typeface="Arial" pitchFamily="34" charset="-122"/>
                           <a:cs typeface="Arial" pitchFamily="34" charset="-120"/>
                         </a:rPr>
-                        <a:t>2件</a:t>
+                        <a:t>1件</a:t>
                       </a:r>
                       <a:endParaRPr lang="en-US" sz="900" dirty="0">
                         <a:latin typeface="Arial" charset="0"/>
@@ -13365,7 +13000,7 @@
                           <a:ea typeface="Arial" pitchFamily="34" charset="-122"/>
                           <a:cs typeface="Arial" pitchFamily="34" charset="-120"/>
                         </a:rPr>
-                        <a:t>防音性能</a:t>
+                        <a:t>対応・サービスの不満</a:t>
                       </a:r>
                       <a:endParaRPr lang="en-US" sz="900" dirty="0">
                         <a:latin typeface="Arial" charset="0"/>
@@ -13433,7 +13068,7 @@
                           <a:ea typeface="Arial" pitchFamily="34" charset="-122"/>
                           <a:cs typeface="Arial" pitchFamily="34" charset="-120"/>
                         </a:rPr>
-                        <a:t>道路沿いだったけど防音がしっかりされていて外の音は聞こえない</a:t>
+                        <a:t>歯ブラシでこすれば、パッと見はもっときれいになりそうなので、ちょっと残念なところ</a:t>
                       </a:r>
                       <a:endParaRPr lang="en-US" sz="900" dirty="0">
                         <a:latin typeface="Arial" charset="0"/>
@@ -13639,7 +13274,7 @@
                           <a:ea typeface="Arial" pitchFamily="34" charset="-122"/>
                           <a:cs typeface="Arial" pitchFamily="34" charset="-120"/>
                         </a:rPr>
-                        <a:t>臭い・匂い</a:t>
+                        <a:t>清掃不備</a:t>
                       </a:r>
                       <a:endParaRPr lang="en-US" sz="900" dirty="0">
                         <a:latin typeface="Arial" charset="0"/>
@@ -13707,7 +13342,7 @@
                           <a:ea typeface="Arial" pitchFamily="34" charset="-122"/>
                           <a:cs typeface="Arial" pitchFamily="34" charset="-120"/>
                         </a:rPr>
-                        <a:t>禁煙の部屋を予約しましたが、かなり強いタバコの匂いがしました</a:t>
+                        <a:t>そこは汚くて埃っぽく、以前の訪問時の残骸も散乱していた</a:t>
                       </a:r>
                       <a:endParaRPr lang="en-US" sz="900" dirty="0">
                         <a:latin typeface="Arial" charset="0"/>
@@ -13827,280 +13462,6 @@
                   </a:tcPr>
                 </a:tc>
               </a:tr>
-              <a:tr h="320040">
-                <a:tc>
-                  <a:txBody>
-                    <a:bodyPr/>
-                    <a:lstStyle/>
-                    <a:p>
-                      <a:pPr algn="ctr" indent="0" marL="0">
-                        <a:buNone/>
-                      </a:pPr>
-                      <a:r>
-                        <a:rPr lang="en-US" sz="1200" b="1" dirty="0">
-                          <a:solidFill>
-                            <a:srgbClr val="94A3B8"/>
-                          </a:solidFill>
-                          <a:latin typeface="Arial" pitchFamily="34" charset="0"/>
-                          <a:ea typeface="Arial" pitchFamily="34" charset="-122"/>
-                          <a:cs typeface="Arial" pitchFamily="34" charset="-120"/>
-                        </a:rPr>
-                        <a:t>C</a:t>
-                      </a:r>
-                      <a:endParaRPr lang="en-US" sz="1200" dirty="0">
-                        <a:latin typeface="Arial" charset="0"/>
-                        <a:ea typeface="Arial" charset="0"/>
-                        <a:cs typeface="Arial" charset="0"/>
-                      </a:endParaRPr>
-                    </a:p>
-                  </a:txBody>
-                  <a:tcPr marL="91440" marR="91440" marT="45720" marB="45720">
-                    <a:lnL w="6350" cap="flat" cmpd="sng" algn="ctr">
-                      <a:solidFill>
-                        <a:srgbClr val="CBD5E1"/>
-                      </a:solidFill>
-                      <a:prstDash val="solid"/>
-                      <a:round/>
-                      <a:headEnd type="none" w="med" len="med"/>
-                      <a:tailEnd type="none" w="med" len="med"/>
-                    </a:lnL>
-                    <a:lnR w="6350" cap="flat" cmpd="sng" algn="ctr">
-                      <a:solidFill>
-                        <a:srgbClr val="CBD5E1"/>
-                      </a:solidFill>
-                      <a:prstDash val="solid"/>
-                      <a:round/>
-                      <a:headEnd type="none" w="med" len="med"/>
-                      <a:tailEnd type="none" w="med" len="med"/>
-                    </a:lnR>
-                    <a:lnT w="6350" cap="flat" cmpd="sng" algn="ctr">
-                      <a:solidFill>
-                        <a:srgbClr val="CBD5E1"/>
-                      </a:solidFill>
-                      <a:prstDash val="solid"/>
-                      <a:round/>
-                      <a:headEnd type="none" w="med" len="med"/>
-                      <a:tailEnd type="none" w="med" len="med"/>
-                    </a:lnT>
-                    <a:lnB w="6350" cap="flat" cmpd="sng" algn="ctr">
-                      <a:solidFill>
-                        <a:srgbClr val="CBD5E1"/>
-                      </a:solidFill>
-                      <a:prstDash val="solid"/>
-                      <a:round/>
-                      <a:headEnd type="none" w="med" len="med"/>
-                      <a:tailEnd type="none" w="med" len="med"/>
-                    </a:lnB>
-                    <a:solidFill>
-                      <a:srgbClr val="E8EFF8"/>
-                    </a:solidFill>
-                  </a:tcPr>
-                </a:tc>
-                <a:tc>
-                  <a:txBody>
-                    <a:bodyPr/>
-                    <a:lstStyle/>
-                    <a:p>
-                      <a:pPr indent="0" marL="0">
-                        <a:buNone/>
-                      </a:pPr>
-                      <a:r>
-                        <a:rPr lang="en-US" sz="900" b="1" dirty="0">
-                          <a:solidFill>
-                            <a:srgbClr val="334155"/>
-                          </a:solidFill>
-                          <a:latin typeface="Arial" pitchFamily="34" charset="0"/>
-                          <a:ea typeface="Arial" pitchFamily="34" charset="-122"/>
-                          <a:cs typeface="Arial" pitchFamily="34" charset="-120"/>
-                        </a:rPr>
-                        <a:t>対応・サービスの不満</a:t>
-                      </a:r>
-                      <a:endParaRPr lang="en-US" sz="900" dirty="0">
-                        <a:latin typeface="Arial" charset="0"/>
-                        <a:ea typeface="Arial" charset="0"/>
-                        <a:cs typeface="Arial" charset="0"/>
-                      </a:endParaRPr>
-                    </a:p>
-                  </a:txBody>
-                  <a:tcPr marL="91440" marR="91440" marT="45720" marB="45720">
-                    <a:lnL w="6350" cap="flat" cmpd="sng" algn="ctr">
-                      <a:solidFill>
-                        <a:srgbClr val="CBD5E1"/>
-                      </a:solidFill>
-                      <a:prstDash val="solid"/>
-                      <a:round/>
-                      <a:headEnd type="none" w="med" len="med"/>
-                      <a:tailEnd type="none" w="med" len="med"/>
-                    </a:lnL>
-                    <a:lnR w="6350" cap="flat" cmpd="sng" algn="ctr">
-                      <a:solidFill>
-                        <a:srgbClr val="CBD5E1"/>
-                      </a:solidFill>
-                      <a:prstDash val="solid"/>
-                      <a:round/>
-                      <a:headEnd type="none" w="med" len="med"/>
-                      <a:tailEnd type="none" w="med" len="med"/>
-                    </a:lnR>
-                    <a:lnT w="6350" cap="flat" cmpd="sng" algn="ctr">
-                      <a:solidFill>
-                        <a:srgbClr val="CBD5E1"/>
-                      </a:solidFill>
-                      <a:prstDash val="solid"/>
-                      <a:round/>
-                      <a:headEnd type="none" w="med" len="med"/>
-                      <a:tailEnd type="none" w="med" len="med"/>
-                    </a:lnT>
-                    <a:lnB w="6350" cap="flat" cmpd="sng" algn="ctr">
-                      <a:solidFill>
-                        <a:srgbClr val="CBD5E1"/>
-                      </a:solidFill>
-                      <a:prstDash val="solid"/>
-                      <a:round/>
-                      <a:headEnd type="none" w="med" len="med"/>
-                      <a:tailEnd type="none" w="med" len="med"/>
-                    </a:lnB>
-                    <a:solidFill>
-                      <a:srgbClr val="E8EFF8"/>
-                    </a:solidFill>
-                  </a:tcPr>
-                </a:tc>
-                <a:tc>
-                  <a:txBody>
-                    <a:bodyPr/>
-                    <a:lstStyle/>
-                    <a:p>
-                      <a:pPr indent="0" marL="0">
-                        <a:buNone/>
-                      </a:pPr>
-                      <a:r>
-                        <a:rPr lang="en-US" sz="900" dirty="0">
-                          <a:solidFill>
-                            <a:srgbClr val="64748B"/>
-                          </a:solidFill>
-                          <a:latin typeface="Arial" pitchFamily="34" charset="0"/>
-                          <a:ea typeface="Arial" pitchFamily="34" charset="-122"/>
-                          <a:cs typeface="Arial" pitchFamily="34" charset="-120"/>
-                        </a:rPr>
-                        <a:t>歯ブラシでこすれば、パッと見はもっときれいになりそうなので、ちょっと残念なところ</a:t>
-                      </a:r>
-                      <a:endParaRPr lang="en-US" sz="900" dirty="0">
-                        <a:latin typeface="Arial" charset="0"/>
-                        <a:ea typeface="Arial" charset="0"/>
-                        <a:cs typeface="Arial" charset="0"/>
-                      </a:endParaRPr>
-                    </a:p>
-                  </a:txBody>
-                  <a:tcPr marL="91440" marR="91440" marT="45720" marB="45720">
-                    <a:lnL w="6350" cap="flat" cmpd="sng" algn="ctr">
-                      <a:solidFill>
-                        <a:srgbClr val="CBD5E1"/>
-                      </a:solidFill>
-                      <a:prstDash val="solid"/>
-                      <a:round/>
-                      <a:headEnd type="none" w="med" len="med"/>
-                      <a:tailEnd type="none" w="med" len="med"/>
-                    </a:lnL>
-                    <a:lnR w="6350" cap="flat" cmpd="sng" algn="ctr">
-                      <a:solidFill>
-                        <a:srgbClr val="CBD5E1"/>
-                      </a:solidFill>
-                      <a:prstDash val="solid"/>
-                      <a:round/>
-                      <a:headEnd type="none" w="med" len="med"/>
-                      <a:tailEnd type="none" w="med" len="med"/>
-                    </a:lnR>
-                    <a:lnT w="6350" cap="flat" cmpd="sng" algn="ctr">
-                      <a:solidFill>
-                        <a:srgbClr val="CBD5E1"/>
-                      </a:solidFill>
-                      <a:prstDash val="solid"/>
-                      <a:round/>
-                      <a:headEnd type="none" w="med" len="med"/>
-                      <a:tailEnd type="none" w="med" len="med"/>
-                    </a:lnT>
-                    <a:lnB w="6350" cap="flat" cmpd="sng" algn="ctr">
-                      <a:solidFill>
-                        <a:srgbClr val="CBD5E1"/>
-                      </a:solidFill>
-                      <a:prstDash val="solid"/>
-                      <a:round/>
-                      <a:headEnd type="none" w="med" len="med"/>
-                      <a:tailEnd type="none" w="med" len="med"/>
-                    </a:lnB>
-                    <a:solidFill>
-                      <a:srgbClr val="E8EFF8"/>
-                    </a:solidFill>
-                  </a:tcPr>
-                </a:tc>
-                <a:tc>
-                  <a:txBody>
-                    <a:bodyPr/>
-                    <a:lstStyle/>
-                    <a:p>
-                      <a:pPr algn="ctr" indent="0" marL="0">
-                        <a:buNone/>
-                      </a:pPr>
-                      <a:r>
-                        <a:rPr lang="en-US" sz="900" dirty="0">
-                          <a:solidFill>
-                            <a:srgbClr val="334155"/>
-                          </a:solidFill>
-                          <a:latin typeface="Arial" pitchFamily="34" charset="0"/>
-                          <a:ea typeface="Arial" pitchFamily="34" charset="-122"/>
-                          <a:cs typeface="Arial" pitchFamily="34" charset="-120"/>
-                        </a:rPr>
-                        <a:t>1件</a:t>
-                      </a:r>
-                      <a:endParaRPr lang="en-US" sz="900" dirty="0">
-                        <a:latin typeface="Arial" charset="0"/>
-                        <a:ea typeface="Arial" charset="0"/>
-                        <a:cs typeface="Arial" charset="0"/>
-                      </a:endParaRPr>
-                    </a:p>
-                  </a:txBody>
-                  <a:tcPr marL="91440" marR="91440" marT="45720" marB="45720">
-                    <a:lnL w="6350" cap="flat" cmpd="sng" algn="ctr">
-                      <a:solidFill>
-                        <a:srgbClr val="CBD5E1"/>
-                      </a:solidFill>
-                      <a:prstDash val="solid"/>
-                      <a:round/>
-                      <a:headEnd type="none" w="med" len="med"/>
-                      <a:tailEnd type="none" w="med" len="med"/>
-                    </a:lnL>
-                    <a:lnR w="6350" cap="flat" cmpd="sng" algn="ctr">
-                      <a:solidFill>
-                        <a:srgbClr val="CBD5E1"/>
-                      </a:solidFill>
-                      <a:prstDash val="solid"/>
-                      <a:round/>
-                      <a:headEnd type="none" w="med" len="med"/>
-                      <a:tailEnd type="none" w="med" len="med"/>
-                    </a:lnR>
-                    <a:lnT w="6350" cap="flat" cmpd="sng" algn="ctr">
-                      <a:solidFill>
-                        <a:srgbClr val="CBD5E1"/>
-                      </a:solidFill>
-                      <a:prstDash val="solid"/>
-                      <a:round/>
-                      <a:headEnd type="none" w="med" len="med"/>
-                      <a:tailEnd type="none" w="med" len="med"/>
-                    </a:lnT>
-                    <a:lnB w="6350" cap="flat" cmpd="sng" algn="ctr">
-                      <a:solidFill>
-                        <a:srgbClr val="CBD5E1"/>
-                      </a:solidFill>
-                      <a:prstDash val="solid"/>
-                      <a:round/>
-                      <a:headEnd type="none" w="med" len="med"/>
-                      <a:tailEnd type="none" w="med" len="med"/>
-                    </a:lnB>
-                    <a:solidFill>
-                      <a:srgbClr val="E8EFF8"/>
-                    </a:solidFill>
-                  </a:tcPr>
-                </a:tc>
-              </a:tr>
             </a:tbl>
           </a:graphicData>
         </a:graphic>
@@ -14589,7 +13950,7 @@
                 <a:ea typeface="Arial" pitchFamily="34" charset="-122"/>
                 <a:cs typeface="Arial" pitchFamily="34" charset="-120"/>
               </a:rPr>
-              <a:t>客室の消臭対策の強化</a:t>
+              <a:t>清掃品質の向上</a:t>
             </a:r>
             <a:endParaRPr lang="en-US" sz="1200" dirty="0"/>
           </a:p>
@@ -14632,7 +13993,7 @@
                 <a:ea typeface="Arial" pitchFamily="34" charset="-122"/>
                 <a:cs typeface="Arial" pitchFamily="34" charset="-120"/>
               </a:rPr>
-              <a:t>チェックアウト後の換気・消臭スプレー処理の徹底</a:t>
+              <a:t>清掃チェックリストの見直しと強化（ベッド下・隅の重点確認）</a:t>
             </a:r>
             <a:endParaRPr lang="en-US" sz="900" dirty="0"/>
           </a:p>
@@ -14653,7 +14014,7 @@
                 <a:ea typeface="Arial" pitchFamily="34" charset="-122"/>
                 <a:cs typeface="Arial" pitchFamily="34" charset="-120"/>
               </a:rPr>
-              <a:t>定期的な脱臭剤の設置と交換フローの確立</a:t>
+              <a:t>清掃後のダブルチェック体制の導入</a:t>
             </a:r>
             <a:endParaRPr lang="en-US" sz="900" dirty="0"/>
           </a:p>
@@ -14674,7 +14035,7 @@
                 <a:ea typeface="Arial" pitchFamily="34" charset="-122"/>
                 <a:cs typeface="Arial" pitchFamily="34" charset="-120"/>
               </a:rPr>
-              <a:t>喫煙・臭いに関するクレーム発生時の即座対応マニュアル作成</a:t>
+              <a:t>清掃スタッフへの再研修実施</a:t>
             </a:r>
             <a:endParaRPr lang="en-US" sz="900" dirty="0"/>
           </a:p>
@@ -14760,7 +14121,7 @@
                 <a:ea typeface="Arial" pitchFamily="34" charset="-122"/>
                 <a:cs typeface="Arial" pitchFamily="34" charset="-120"/>
               </a:rPr>
-              <a:t>清掃品質の向上</a:t>
+              <a:t>エアコン・空調の定期点検強化</a:t>
             </a:r>
             <a:endParaRPr lang="en-US" sz="1200" dirty="0"/>
           </a:p>
@@ -14803,7 +14164,7 @@
                 <a:ea typeface="Arial" pitchFamily="34" charset="-122"/>
                 <a:cs typeface="Arial" pitchFamily="34" charset="-120"/>
               </a:rPr>
-              <a:t>清掃チェックリストの見直しと強化（ベッド下・隅の重点確認）</a:t>
+              <a:t>全室のエアコン設定を季節に応じてデフォルト確認する運用フロー導入</a:t>
             </a:r>
             <a:endParaRPr lang="en-US" sz="900" dirty="0"/>
           </a:p>
@@ -14824,7 +14185,7 @@
                 <a:ea typeface="Arial" pitchFamily="34" charset="-122"/>
                 <a:cs typeface="Arial" pitchFamily="34" charset="-120"/>
               </a:rPr>
-              <a:t>清掃後のダブルチェック体制の導入</a:t>
+              <a:t>冷暖房の正常動作を定期チェックリストに追加</a:t>
             </a:r>
             <a:endParaRPr lang="en-US" sz="900" dirty="0"/>
           </a:p>
@@ -14845,7 +14206,7 @@
                 <a:ea typeface="Arial" pitchFamily="34" charset="-122"/>
                 <a:cs typeface="Arial" pitchFamily="34" charset="-120"/>
               </a:rPr>
-              <a:t>清掃スタッフへの再研修実施</a:t>
+              <a:t>異常報告があった客室の優先メンテナンス実施</a:t>
             </a:r>
             <a:endParaRPr lang="en-US" sz="900" dirty="0"/>
           </a:p>
@@ -14931,7 +14292,7 @@
                 <a:ea typeface="Arial" pitchFamily="34" charset="-122"/>
                 <a:cs typeface="Arial" pitchFamily="34" charset="-120"/>
               </a:rPr>
-              <a:t>エアコン・空調の定期点検強化</a:t>
+              <a:t>スタッフ対応品質の統一</a:t>
             </a:r>
             <a:endParaRPr lang="en-US" sz="1200" dirty="0"/>
           </a:p>
@@ -14974,7 +14335,7 @@
                 <a:ea typeface="Arial" pitchFamily="34" charset="-122"/>
                 <a:cs typeface="Arial" pitchFamily="34" charset="-120"/>
               </a:rPr>
-              <a:t>全室のエアコン設定を季節に応じてデフォルト確認する運用フロー導入</a:t>
+              <a:t>接客マニュアルの見直しと全スタッフへの周知</a:t>
             </a:r>
             <a:endParaRPr lang="en-US" sz="900" dirty="0"/>
           </a:p>
@@ -14995,7 +14356,7 @@
                 <a:ea typeface="Arial" pitchFamily="34" charset="-122"/>
                 <a:cs typeface="Arial" pitchFamily="34" charset="-120"/>
               </a:rPr>
-              <a:t>冷暖房の正常動作を定期チェックリストに追加</a:t>
+              <a:t>ゲストからのクレーム対応フローの明確化</a:t>
             </a:r>
             <a:endParaRPr lang="en-US" sz="900" dirty="0"/>
           </a:p>
@@ -15016,7 +14377,7 @@
                 <a:ea typeface="Arial" pitchFamily="34" charset="-122"/>
                 <a:cs typeface="Arial" pitchFamily="34" charset="-120"/>
               </a:rPr>
-              <a:t>異常報告があった客室の優先メンテナンス実施</a:t>
+              <a:t>定期的なCS研修の実施</a:t>
             </a:r>
             <a:endParaRPr lang="en-US" sz="900" dirty="0"/>
           </a:p>
@@ -15025,177 +14386,6 @@
       <p:sp>
         <p:nvSpPr>
           <p:cNvPr id="18" name="Shape 16"/>
-          <p:cNvSpPr/>
-          <p:nvPr/>
-        </p:nvSpPr>
-        <p:spPr>
-          <a:xfrm>
-            <a:off x="4663440" y="3017520"/>
-            <a:ext cx="3977640" cy="1600200"/>
-          </a:xfrm>
-          <a:prstGeom prst="rect">
-            <a:avLst/>
-          </a:prstGeom>
-          <a:solidFill>
-            <a:srgbClr val="FFFFFF"/>
-          </a:solidFill>
-          <a:ln/>
-          <a:effectLst>
-            <a:outerShdw sx="100000" sy="100000" kx="0" ky="0" algn="bl" rotWithShape="0" blurRad="50800" dist="25400" dir="8100000">
-              <a:srgbClr val="000000">
-                <a:alpha val="10000"/>
-              </a:srgbClr>
-            </a:outerShdw>
-          </a:effectLst>
-        </p:spPr>
-      </p:sp>
-      <p:sp>
-        <p:nvSpPr>
-          <p:cNvPr id="19" name="Shape 17"/>
-          <p:cNvSpPr/>
-          <p:nvPr/>
-        </p:nvSpPr>
-        <p:spPr>
-          <a:xfrm>
-            <a:off x="4663440" y="3017520"/>
-            <a:ext cx="54864" cy="1600200"/>
-          </a:xfrm>
-          <a:prstGeom prst="rect">
-            <a:avLst/>
-          </a:prstGeom>
-          <a:solidFill>
-            <a:srgbClr val="3B7DD8"/>
-          </a:solidFill>
-          <a:ln/>
-        </p:spPr>
-      </p:sp>
-      <p:sp>
-        <p:nvSpPr>
-          <p:cNvPr id="20" name="Text 18"/>
-          <p:cNvSpPr/>
-          <p:nvPr/>
-        </p:nvSpPr>
-        <p:spPr>
-          <a:xfrm>
-            <a:off x="4800600" y="3063240"/>
-            <a:ext cx="3657600" cy="320040"/>
-          </a:xfrm>
-          <a:prstGeom prst="rect">
-            <a:avLst/>
-          </a:prstGeom>
-          <a:noFill/>
-          <a:ln/>
-        </p:spPr>
-        <p:txBody>
-          <a:bodyPr wrap="square" lIns="0" tIns="0" rIns="0" bIns="0" rtlCol="0" anchor="ctr"/>
-          <a:lstStyle/>
-          <a:p>
-            <a:pPr indent="0" marL="0">
-              <a:buNone/>
-            </a:pPr>
-            <a:r>
-              <a:rPr lang="en-US" sz="1200" b="1" dirty="0">
-                <a:solidFill>
-                  <a:srgbClr val="1A2744"/>
-                </a:solidFill>
-                <a:latin typeface="Arial" pitchFamily="34" charset="0"/>
-                <a:ea typeface="Arial" pitchFamily="34" charset="-122"/>
-                <a:cs typeface="Arial" pitchFamily="34" charset="-120"/>
-              </a:rPr>
-              <a:t>スタッフ対応品質の統一</a:t>
-            </a:r>
-            <a:endParaRPr lang="en-US" sz="1200" dirty="0"/>
-          </a:p>
-        </p:txBody>
-      </p:sp>
-      <p:sp>
-        <p:nvSpPr>
-          <p:cNvPr id="21" name="Text 19"/>
-          <p:cNvSpPr/>
-          <p:nvPr/>
-        </p:nvSpPr>
-        <p:spPr>
-          <a:xfrm>
-            <a:off x="4800600" y="3383280"/>
-            <a:ext cx="3657600" cy="1188720"/>
-          </a:xfrm>
-          <a:prstGeom prst="rect">
-            <a:avLst/>
-          </a:prstGeom>
-          <a:noFill/>
-          <a:ln/>
-        </p:spPr>
-        <p:txBody>
-          <a:bodyPr wrap="square" lIns="0" tIns="0" rIns="0" bIns="0" rtlCol="0" anchor="ctr"/>
-          <a:lstStyle/>
-          <a:p>
-            <a:pPr marL="342900" indent="-342900">
-              <a:spcAft>
-                <a:spcPts val="300"/>
-              </a:spcAft>
-              <a:buSzPct val="100000"/>
-              <a:buChar char="•"/>
-            </a:pPr>
-            <a:r>
-              <a:rPr lang="en-US" sz="900" dirty="0">
-                <a:solidFill>
-                  <a:srgbClr val="334155"/>
-                </a:solidFill>
-                <a:latin typeface="Arial" pitchFamily="34" charset="0"/>
-                <a:ea typeface="Arial" pitchFamily="34" charset="-122"/>
-                <a:cs typeface="Arial" pitchFamily="34" charset="-120"/>
-              </a:rPr>
-              <a:t>接客マニュアルの見直しと全スタッフへの周知</a:t>
-            </a:r>
-            <a:endParaRPr lang="en-US" sz="900" dirty="0"/>
-          </a:p>
-          <a:p>
-            <a:pPr marL="342900" indent="-342900">
-              <a:spcAft>
-                <a:spcPts val="300"/>
-              </a:spcAft>
-              <a:buSzPct val="100000"/>
-              <a:buChar char="•"/>
-            </a:pPr>
-            <a:r>
-              <a:rPr lang="en-US" sz="900" dirty="0">
-                <a:solidFill>
-                  <a:srgbClr val="334155"/>
-                </a:solidFill>
-                <a:latin typeface="Arial" pitchFamily="34" charset="0"/>
-                <a:ea typeface="Arial" pitchFamily="34" charset="-122"/>
-                <a:cs typeface="Arial" pitchFamily="34" charset="-120"/>
-              </a:rPr>
-              <a:t>ゲストからのクレーム対応フローの明確化</a:t>
-            </a:r>
-            <a:endParaRPr lang="en-US" sz="900" dirty="0"/>
-          </a:p>
-          <a:p>
-            <a:pPr marL="342900" indent="-342900">
-              <a:spcAft>
-                <a:spcPts val="300"/>
-              </a:spcAft>
-              <a:buSzPct val="100000"/>
-              <a:buChar char="•"/>
-            </a:pPr>
-            <a:r>
-              <a:rPr lang="en-US" sz="900" dirty="0">
-                <a:solidFill>
-                  <a:srgbClr val="334155"/>
-                </a:solidFill>
-                <a:latin typeface="Arial" pitchFamily="34" charset="0"/>
-                <a:ea typeface="Arial" pitchFamily="34" charset="-122"/>
-                <a:cs typeface="Arial" pitchFamily="34" charset="-120"/>
-              </a:rPr>
-              <a:t>定期的なCS研修の実施</a:t>
-            </a:r>
-            <a:endParaRPr lang="en-US" sz="900" dirty="0"/>
-          </a:p>
-        </p:txBody>
-      </p:sp>
-      <p:sp>
-        <p:nvSpPr>
-          <p:cNvPr id="22" name="Shape 20"/>
           <p:cNvSpPr/>
           <p:nvPr/>
         </p:nvSpPr>
@@ -15215,7 +14405,7 @@
       </p:sp>
       <p:sp>
         <p:nvSpPr>
-          <p:cNvPr id="23" name="Text 21"/>
+          <p:cNvPr id="19" name="Text 17"/>
           <p:cNvSpPr/>
           <p:nvPr/>
         </p:nvSpPr>
@@ -15254,7 +14444,7 @@
       </p:sp>
       <p:sp>
         <p:nvSpPr>
-          <p:cNvPr id="24" name="Text 22"/>
+          <p:cNvPr id="20" name="Text 18"/>
           <p:cNvSpPr/>
           <p:nvPr/>
         </p:nvSpPr>

--- a/納品レポート/ホテル別レポート/apa_kamata_口コミ分析レポート.pptx
+++ b/納品レポート/ホテル別レポート/apa_kamata_口コミ分析レポート.pptx
@@ -175,20 +175,23 @@
           </c:dLbls>
           <c:cat>
             <c:multiLvlStrRef>
-              <c:f>Sheet1!$A$2:$A$5</c:f>
+              <c:f>Sheet1!$A$2:$A$6</c:f>
               <c:multiLvlStrCache>
-                <c:ptCount val="4"/>
+                <c:ptCount val="5"/>
                 <c:lvl>
                   <c:pt idx="0">
-                    <c:v>Booking.com</c:v>
+                    <c:v>Google</c:v>
                   </c:pt>
                   <c:pt idx="1">
-                    <c:v>Google</c:v>
+                    <c:v>Booking.com</c:v>
                   </c:pt>
                   <c:pt idx="2">
                     <c:v>じゃらん</c:v>
                   </c:pt>
                   <c:pt idx="3">
+                    <c:v>楽天トラベル</c:v>
+                  </c:pt>
+                  <c:pt idx="4">
                     <c:v>Agoda</c:v>
                   </c:pt>
                 </c:lvl>
@@ -197,21 +200,24 @@
           </c:cat>
           <c:val>
             <c:numRef>
-              <c:f>Sheet1!$B$2:$B$5</c:f>
+              <c:f>Sheet1!$B$2:$B$6</c:f>
               <c:numCache>
                 <c:formatCode>General</c:formatCode>
-                <c:ptCount val="4"/>
+                <c:ptCount val="5"/>
                 <c:pt idx="0">
-                  <c:v>8</c:v>
+                  <c:v>7.88</c:v>
                 </c:pt>
                 <c:pt idx="1">
-                  <c:v>8</c:v>
+                  <c:v>7.58</c:v>
                 </c:pt>
                 <c:pt idx="2">
-                  <c:v>7.33</c:v>
+                  <c:v>7.5</c:v>
                 </c:pt>
                 <c:pt idx="3">
-                  <c:v>6.67</c:v>
+                  <c:v>7</c:v>
+                </c:pt>
+                <c:pt idx="4">
+                  <c:v>6.69</c:v>
                 </c:pt>
               </c:numCache>
             </c:numRef>
@@ -554,13 +560,13 @@
               <c:numCache>
                 <c:ptCount val="3"/>
                 <c:pt idx="0">
-                  <c:v>18</c:v>
+                  <c:v>38</c:v>
                 </c:pt>
                 <c:pt idx="1">
-                  <c:v>8</c:v>
+                  <c:v>16</c:v>
                 </c:pt>
                 <c:pt idx="2">
-                  <c:v>2</c:v>
+                  <c:v>6</c:v>
                 </c:pt>
               </c:numCache>
             </c:numRef>
@@ -756,11 +762,22 @@
               <a:effectLst/>
             </c:spPr>
           </c:dPt>
+          <c:dPt>
+            <c:idx val="8"/>
+            <c:invertIfNegative val="0"/>
+            <c:bubble3D val="0"/>
+            <c:spPr>
+              <a:solidFill>
+                <a:srgbClr val="DC2626"/>
+              </a:solidFill>
+              <a:effectLst/>
+            </c:spPr>
+          </c:dPt>
           <c:cat>
             <c:multiLvlStrRef>
-              <c:f>Sheet1!$A$2:$A$9</c:f>
+              <c:f>Sheet1!$A$2:$A$10</c:f>
               <c:multiLvlStrCache>
-                <c:ptCount val="8"/>
+                <c:ptCount val="9"/>
                 <c:lvl>
                   <c:pt idx="0">
                     <c:v>10点</c:v>
@@ -786,38 +803,44 @@
                   <c:pt idx="7">
                     <c:v>3点</c:v>
                   </c:pt>
+                  <c:pt idx="8">
+                    <c:v>2点</c:v>
+                  </c:pt>
                 </c:lvl>
               </c:multiLvlStrCache>
             </c:multiLvlStrRef>
           </c:cat>
           <c:val>
             <c:numRef>
-              <c:f>Sheet1!$B$2:$B$9</c:f>
+              <c:f>Sheet1!$B$2:$B$10</c:f>
               <c:numCache>
                 <c:formatCode>General</c:formatCode>
-                <c:ptCount val="8"/>
+                <c:ptCount val="9"/>
                 <c:pt idx="0">
+                  <c:v>8</c:v>
+                </c:pt>
+                <c:pt idx="1">
+                  <c:v>4</c:v>
+                </c:pt>
+                <c:pt idx="2">
+                  <c:v>26</c:v>
+                </c:pt>
+                <c:pt idx="3">
                   <c:v>5</c:v>
                 </c:pt>
-                <c:pt idx="1">
-                  <c:v>2</c:v>
+                <c:pt idx="4">
+                  <c:v>8</c:v>
                 </c:pt>
-                <c:pt idx="2">
-                  <c:v>11</c:v>
+                <c:pt idx="5">
+                  <c:v>3</c:v>
                 </c:pt>
-                <c:pt idx="3">
+                <c:pt idx="6">
+                  <c:v>4</c:v>
+                </c:pt>
+                <c:pt idx="7">
                   <c:v>1</c:v>
                 </c:pt>
-                <c:pt idx="4">
-                  <c:v>5</c:v>
-                </c:pt>
-                <c:pt idx="5">
-                  <c:v>2</c:v>
-                </c:pt>
-                <c:pt idx="6">
-                  <c:v>1</c:v>
-                </c:pt>
-                <c:pt idx="7">
+                <c:pt idx="8">
                   <c:v>1</c:v>
                 </c:pt>
               </c:numCache>
@@ -2749,7 +2772,7 @@
                 <a:ea typeface="Arial" pitchFamily="34" charset="-122"/>
                 <a:cs typeface="Arial" pitchFamily="34" charset="-120"/>
               </a:rPr>
-              <a:t>分析対象期間：2026年3月</a:t>
+              <a:t>分析対象期間：2026年2月〜3月</a:t>
             </a:r>
             <a:endParaRPr lang="en-US" sz="1000" dirty="0"/>
           </a:p>
@@ -2769,7 +2792,7 @@
                 <a:ea typeface="Arial" pitchFamily="34" charset="-122"/>
                 <a:cs typeface="Arial" pitchFamily="34" charset="-120"/>
               </a:rPr>
-              <a:t>レビュー総数：28件（4サイト）</a:t>
+              <a:t>レビュー総数：60件（5サイト）</a:t>
             </a:r>
             <a:endParaRPr lang="en-US" sz="1000" dirty="0"/>
           </a:p>
@@ -3335,7 +3358,7 @@
                           <a:ea typeface="Arial" pitchFamily="34" charset="-122"/>
                           <a:cs typeface="Arial" pitchFamily="34" charset="-120"/>
                         </a:rPr>
-                        <a:t>7.50点</a:t>
+                        <a:t>7.38点</a:t>
                       </a:r>
                       <a:endParaRPr lang="en-US" sz="1000" dirty="0">
                         <a:latin typeface="Arial" charset="0"/>
@@ -3403,7 +3426,7 @@
                           <a:ea typeface="Arial" pitchFamily="34" charset="-122"/>
                           <a:cs typeface="Arial" pitchFamily="34" charset="-120"/>
                         </a:rPr>
-                        <a:t>8.0点以上</a:t>
+                        <a:t>7.9点以上</a:t>
                       </a:r>
                       <a:endParaRPr lang="en-US" sz="1000" dirty="0">
                         <a:latin typeface="Arial" charset="0"/>
@@ -3609,7 +3632,7 @@
                           <a:ea typeface="Arial" pitchFamily="34" charset="-122"/>
                           <a:cs typeface="Arial" pitchFamily="34" charset="-120"/>
                         </a:rPr>
-                        <a:t>64.3%</a:t>
+                        <a:t>63.3%</a:t>
                       </a:r>
                       <a:endParaRPr lang="en-US" sz="1000" dirty="0">
                         <a:latin typeface="Arial" charset="0"/>
@@ -3677,7 +3700,7 @@
                           <a:ea typeface="Arial" pitchFamily="34" charset="-122"/>
                           <a:cs typeface="Arial" pitchFamily="34" charset="-120"/>
                         </a:rPr>
-                        <a:t>74%以上</a:t>
+                        <a:t>73%以上</a:t>
                       </a:r>
                       <a:endParaRPr lang="en-US" sz="1000" dirty="0">
                         <a:latin typeface="Arial" charset="0"/>
@@ -3883,7 +3906,7 @@
                           <a:ea typeface="Arial" pitchFamily="34" charset="-122"/>
                           <a:cs typeface="Arial" pitchFamily="34" charset="-120"/>
                         </a:rPr>
-                        <a:t>7.1%</a:t>
+                        <a:t>10.0%</a:t>
                       </a:r>
                       <a:endParaRPr lang="en-US" sz="1000" dirty="0">
                         <a:latin typeface="Arial" charset="0"/>
@@ -3951,7 +3974,7 @@
                           <a:ea typeface="Arial" pitchFamily="34" charset="-122"/>
                           <a:cs typeface="Arial" pitchFamily="34" charset="-120"/>
                         </a:rPr>
-                        <a:t>4%以下</a:t>
+                        <a:t>7%以下</a:t>
                       </a:r>
                       <a:endParaRPr lang="en-US" sz="1000" dirty="0">
                         <a:latin typeface="Arial" charset="0"/>
@@ -4705,7 +4728,7 @@
                           <a:ea typeface="Arial" pitchFamily="34" charset="-122"/>
                           <a:cs typeface="Arial" pitchFamily="34" charset="-120"/>
                         </a:rPr>
-                        <a:t>約3件/期間</a:t>
+                        <a:t>約6件/期間</a:t>
                       </a:r>
                       <a:endParaRPr lang="en-US" sz="1000" dirty="0">
                         <a:latin typeface="Arial" charset="0"/>
@@ -4773,7 +4796,7 @@
                           <a:ea typeface="Arial" pitchFamily="34" charset="-122"/>
                           <a:cs typeface="Arial" pitchFamily="34" charset="-120"/>
                         </a:rPr>
-                        <a:t>1件以下</a:t>
+                        <a:t>3件以下</a:t>
                       </a:r>
                       <a:endParaRPr lang="en-US" sz="1000" dirty="0">
                         <a:latin typeface="Arial" charset="0"/>
@@ -5344,7 +5367,7 @@
                 <a:ea typeface="Arial" pitchFamily="34" charset="-122"/>
                 <a:cs typeface="Arial" pitchFamily="34" charset="-120"/>
               </a:rPr>
-              <a:t>7.50</a:t>
+              <a:t>7.38</a:t>
             </a:r>
             <a:endParaRPr lang="en-US" sz="3200" dirty="0"/>
           </a:p>
@@ -5469,7 +5492,7 @@
                 <a:ea typeface="Arial" pitchFamily="34" charset="-122"/>
                 <a:cs typeface="Arial" pitchFamily="34" charset="-120"/>
               </a:rPr>
-              <a:t>64.3%</a:t>
+              <a:t>63.3%</a:t>
             </a:r>
             <a:endParaRPr lang="en-US" sz="3200" dirty="0"/>
           </a:p>
@@ -5594,7 +5617,7 @@
                 <a:ea typeface="Arial" pitchFamily="34" charset="-122"/>
                 <a:cs typeface="Arial" pitchFamily="34" charset="-120"/>
               </a:rPr>
-              <a:t>7.1%</a:t>
+              <a:t>10.0%</a:t>
             </a:r>
             <a:endParaRPr lang="en-US" sz="3200" dirty="0"/>
           </a:p>
@@ -5719,7 +5742,7 @@
                 <a:ea typeface="Arial" pitchFamily="34" charset="-122"/>
                 <a:cs typeface="Arial" pitchFamily="34" charset="-120"/>
               </a:rPr>
-              <a:t>28件</a:t>
+              <a:t>60件</a:t>
             </a:r>
             <a:endParaRPr lang="en-US" sz="3200" dirty="0"/>
           </a:p>
@@ -6155,7 +6178,7 @@
                 <a:ea typeface="Arial" pitchFamily="34" charset="-122"/>
                 <a:cs typeface="Arial" pitchFamily="34" charset="-120"/>
               </a:rPr>
-              <a:t>防音性能 </a:t>
+              <a:t>エアコン・空調 </a:t>
             </a:r>
             <a:endParaRPr lang="en-US" sz="1100" dirty="0"/>
           </a:p>
@@ -6175,7 +6198,7 @@
                 <a:ea typeface="Arial" pitchFamily="34" charset="-122"/>
                 <a:cs typeface="Arial" pitchFamily="34" charset="-120"/>
               </a:rPr>
-              <a:t>  道路沿いだったけど防音がしっかりされていて外の音は聞こえない</a:t>
+              <a:t>  Coming from Keikyu-Kamata there was a shoutengai giving p...</a:t>
             </a:r>
             <a:endParaRPr lang="en-US" sz="1100" dirty="0"/>
           </a:p>
@@ -6528,7 +6551,7 @@
                 <a:ea typeface="Arial" pitchFamily="34" charset="-122"/>
                 <a:cs typeface="Arial" pitchFamily="34" charset="-120"/>
               </a:rPr>
-              <a:t>7.50</a:t>
+              <a:t>7.38</a:t>
             </a:r>
             <a:endParaRPr lang="en-US" sz="3200" dirty="0"/>
           </a:p>
@@ -6653,7 +6676,7 @@
                 <a:ea typeface="Arial" pitchFamily="34" charset="-122"/>
                 <a:cs typeface="Arial" pitchFamily="34" charset="-120"/>
               </a:rPr>
-              <a:t>64.3%</a:t>
+              <a:t>63.3%</a:t>
             </a:r>
             <a:endParaRPr lang="en-US" sz="3200" dirty="0"/>
           </a:p>
@@ -6778,7 +6801,7 @@
                 <a:ea typeface="Arial" pitchFamily="34" charset="-122"/>
                 <a:cs typeface="Arial" pitchFamily="34" charset="-120"/>
               </a:rPr>
-              <a:t>7.1%</a:t>
+              <a:t>10.0%</a:t>
             </a:r>
             <a:endParaRPr lang="en-US" sz="3200" dirty="0"/>
           </a:p>
@@ -6903,7 +6926,7 @@
                 <a:ea typeface="Arial" pitchFamily="34" charset="-122"/>
                 <a:cs typeface="Arial" pitchFamily="34" charset="-120"/>
               </a:rPr>
-              <a:t>28件</a:t>
+              <a:t>60件</a:t>
             </a:r>
             <a:endParaRPr lang="en-US" sz="3200" dirty="0"/>
           </a:p>
@@ -7324,7 +7347,7 @@
                 <a:ea typeface="Arial" pitchFamily="34" charset="-122"/>
                 <a:cs typeface="Arial" pitchFamily="34" charset="-120"/>
               </a:rPr>
-              <a:t>Google(8.00)が最高スコア。</a:t>
+              <a:t>Google(7.88)が最高スコア。</a:t>
             </a:r>
             <a:endParaRPr lang="en-US" sz="1100" dirty="0"/>
           </a:p>
@@ -7814,7 +7837,7 @@
                           <a:ea typeface="Arial" pitchFamily="34" charset="-122"/>
                           <a:cs typeface="Arial" pitchFamily="34" charset="-120"/>
                         </a:rPr>
-                        <a:t>Booking.com</a:t>
+                        <a:t>Google</a:t>
                       </a:r>
                       <a:endParaRPr lang="en-US" sz="900" dirty="0">
                         <a:latin typeface="Arial" charset="0"/>
@@ -7882,7 +7905,7 @@
                           <a:ea typeface="Arial" pitchFamily="34" charset="-122"/>
                           <a:cs typeface="Arial" pitchFamily="34" charset="-120"/>
                         </a:rPr>
-                        <a:t>10</a:t>
+                        <a:t>17</a:t>
                       </a:r>
                       <a:endParaRPr lang="en-US" sz="900" dirty="0">
                         <a:latin typeface="Arial" charset="0"/>
@@ -7950,7 +7973,7 @@
                           <a:ea typeface="Arial" pitchFamily="34" charset="-122"/>
                           <a:cs typeface="Arial" pitchFamily="34" charset="-120"/>
                         </a:rPr>
-                        <a:t>8</a:t>
+                        <a:t>3.94</a:t>
                       </a:r>
                       <a:endParaRPr lang="en-US" sz="900" dirty="0">
                         <a:latin typeface="Arial" charset="0"/>
@@ -7998,6 +8021,348 @@
                     </a:lnB>
                     <a:solidFill>
                       <a:srgbClr val="E8EFF8"/>
+                    </a:solidFill>
+                  </a:tcPr>
+                </a:tc>
+                <a:tc>
+                  <a:txBody>
+                    <a:bodyPr/>
+                    <a:lstStyle/>
+                    <a:p>
+                      <a:pPr algn="ctr" indent="0" marL="0">
+                        <a:buNone/>
+                      </a:pPr>
+                      <a:r>
+                        <a:rPr lang="en-US" sz="900" dirty="0">
+                          <a:solidFill>
+                            <a:srgbClr val="000000"/>
+                          </a:solidFill>
+                          <a:latin typeface="Arial" pitchFamily="34" charset="0"/>
+                          <a:ea typeface="Arial" pitchFamily="34" charset="-122"/>
+                          <a:cs typeface="Arial" pitchFamily="34" charset="-120"/>
+                        </a:rPr>
+                        <a:t>/5 (×2)</a:t>
+                      </a:r>
+                      <a:endParaRPr lang="en-US" sz="900" dirty="0">
+                        <a:latin typeface="Arial" charset="0"/>
+                        <a:ea typeface="Arial" charset="0"/>
+                        <a:cs typeface="Arial" charset="0"/>
+                      </a:endParaRPr>
+                    </a:p>
+                  </a:txBody>
+                  <a:tcPr marL="91440" marR="91440" marT="45720" marB="45720">
+                    <a:lnL w="6350" cap="flat" cmpd="sng" algn="ctr">
+                      <a:solidFill>
+                        <a:srgbClr val="CBD5E1"/>
+                      </a:solidFill>
+                      <a:prstDash val="solid"/>
+                      <a:round/>
+                      <a:headEnd type="none" w="med" len="med"/>
+                      <a:tailEnd type="none" w="med" len="med"/>
+                    </a:lnL>
+                    <a:lnR w="6350" cap="flat" cmpd="sng" algn="ctr">
+                      <a:solidFill>
+                        <a:srgbClr val="CBD5E1"/>
+                      </a:solidFill>
+                      <a:prstDash val="solid"/>
+                      <a:round/>
+                      <a:headEnd type="none" w="med" len="med"/>
+                      <a:tailEnd type="none" w="med" len="med"/>
+                    </a:lnR>
+                    <a:lnT w="6350" cap="flat" cmpd="sng" algn="ctr">
+                      <a:solidFill>
+                        <a:srgbClr val="CBD5E1"/>
+                      </a:solidFill>
+                      <a:prstDash val="solid"/>
+                      <a:round/>
+                      <a:headEnd type="none" w="med" len="med"/>
+                      <a:tailEnd type="none" w="med" len="med"/>
+                    </a:lnT>
+                    <a:lnB w="6350" cap="flat" cmpd="sng" algn="ctr">
+                      <a:solidFill>
+                        <a:srgbClr val="CBD5E1"/>
+                      </a:solidFill>
+                      <a:prstDash val="solid"/>
+                      <a:round/>
+                      <a:headEnd type="none" w="med" len="med"/>
+                      <a:tailEnd type="none" w="med" len="med"/>
+                    </a:lnB>
+                    <a:solidFill>
+                      <a:srgbClr val="E8EFF8"/>
+                    </a:solidFill>
+                  </a:tcPr>
+                </a:tc>
+                <a:tc>
+                  <a:txBody>
+                    <a:bodyPr/>
+                    <a:lstStyle/>
+                    <a:p>
+                      <a:pPr algn="ctr" indent="0" marL="0">
+                        <a:buNone/>
+                      </a:pPr>
+                      <a:r>
+                        <a:rPr lang="en-US" sz="900" dirty="0">
+                          <a:solidFill>
+                            <a:srgbClr val="000000"/>
+                          </a:solidFill>
+                          <a:latin typeface="Arial" pitchFamily="34" charset="0"/>
+                          <a:ea typeface="Arial" pitchFamily="34" charset="-122"/>
+                          <a:cs typeface="Arial" pitchFamily="34" charset="-120"/>
+                        </a:rPr>
+                        <a:t>7.88</a:t>
+                      </a:r>
+                      <a:endParaRPr lang="en-US" sz="900" dirty="0">
+                        <a:latin typeface="Arial" charset="0"/>
+                        <a:ea typeface="Arial" charset="0"/>
+                        <a:cs typeface="Arial" charset="0"/>
+                      </a:endParaRPr>
+                    </a:p>
+                  </a:txBody>
+                  <a:tcPr marL="91440" marR="91440" marT="45720" marB="45720">
+                    <a:lnL w="6350" cap="flat" cmpd="sng" algn="ctr">
+                      <a:solidFill>
+                        <a:srgbClr val="CBD5E1"/>
+                      </a:solidFill>
+                      <a:prstDash val="solid"/>
+                      <a:round/>
+                      <a:headEnd type="none" w="med" len="med"/>
+                      <a:tailEnd type="none" w="med" len="med"/>
+                    </a:lnL>
+                    <a:lnR w="6350" cap="flat" cmpd="sng" algn="ctr">
+                      <a:solidFill>
+                        <a:srgbClr val="CBD5E1"/>
+                      </a:solidFill>
+                      <a:prstDash val="solid"/>
+                      <a:round/>
+                      <a:headEnd type="none" w="med" len="med"/>
+                      <a:tailEnd type="none" w="med" len="med"/>
+                    </a:lnR>
+                    <a:lnT w="6350" cap="flat" cmpd="sng" algn="ctr">
+                      <a:solidFill>
+                        <a:srgbClr val="CBD5E1"/>
+                      </a:solidFill>
+                      <a:prstDash val="solid"/>
+                      <a:round/>
+                      <a:headEnd type="none" w="med" len="med"/>
+                      <a:tailEnd type="none" w="med" len="med"/>
+                    </a:lnT>
+                    <a:lnB w="6350" cap="flat" cmpd="sng" algn="ctr">
+                      <a:solidFill>
+                        <a:srgbClr val="CBD5E1"/>
+                      </a:solidFill>
+                      <a:prstDash val="solid"/>
+                      <a:round/>
+                      <a:headEnd type="none" w="med" len="med"/>
+                      <a:tailEnd type="none" w="med" len="med"/>
+                    </a:lnB>
+                    <a:solidFill>
+                      <a:srgbClr val="E8EFF8"/>
+                    </a:solidFill>
+                  </a:tcPr>
+                </a:tc>
+              </a:tr>
+              <a:tr h="201168">
+                <a:tc>
+                  <a:txBody>
+                    <a:bodyPr/>
+                    <a:lstStyle/>
+                    <a:p>
+                      <a:pPr algn="ctr" indent="0" marL="0">
+                        <a:buNone/>
+                      </a:pPr>
+                      <a:r>
+                        <a:rPr lang="en-US" sz="900" dirty="0">
+                          <a:solidFill>
+                            <a:srgbClr val="000000"/>
+                          </a:solidFill>
+                          <a:latin typeface="Arial" pitchFamily="34" charset="0"/>
+                          <a:ea typeface="Arial" pitchFamily="34" charset="-122"/>
+                          <a:cs typeface="Arial" pitchFamily="34" charset="-120"/>
+                        </a:rPr>
+                        <a:t>Booking.com</a:t>
+                      </a:r>
+                      <a:endParaRPr lang="en-US" sz="900" dirty="0">
+                        <a:latin typeface="Arial" charset="0"/>
+                        <a:ea typeface="Arial" charset="0"/>
+                        <a:cs typeface="Arial" charset="0"/>
+                      </a:endParaRPr>
+                    </a:p>
+                  </a:txBody>
+                  <a:tcPr marL="91440" marR="91440" marT="45720" marB="45720">
+                    <a:lnL w="6350" cap="flat" cmpd="sng" algn="ctr">
+                      <a:solidFill>
+                        <a:srgbClr val="CBD5E1"/>
+                      </a:solidFill>
+                      <a:prstDash val="solid"/>
+                      <a:round/>
+                      <a:headEnd type="none" w="med" len="med"/>
+                      <a:tailEnd type="none" w="med" len="med"/>
+                    </a:lnL>
+                    <a:lnR w="6350" cap="flat" cmpd="sng" algn="ctr">
+                      <a:solidFill>
+                        <a:srgbClr val="CBD5E1"/>
+                      </a:solidFill>
+                      <a:prstDash val="solid"/>
+                      <a:round/>
+                      <a:headEnd type="none" w="med" len="med"/>
+                      <a:tailEnd type="none" w="med" len="med"/>
+                    </a:lnR>
+                    <a:lnT w="6350" cap="flat" cmpd="sng" algn="ctr">
+                      <a:solidFill>
+                        <a:srgbClr val="CBD5E1"/>
+                      </a:solidFill>
+                      <a:prstDash val="solid"/>
+                      <a:round/>
+                      <a:headEnd type="none" w="med" len="med"/>
+                      <a:tailEnd type="none" w="med" len="med"/>
+                    </a:lnT>
+                    <a:lnB w="6350" cap="flat" cmpd="sng" algn="ctr">
+                      <a:solidFill>
+                        <a:srgbClr val="CBD5E1"/>
+                      </a:solidFill>
+                      <a:prstDash val="solid"/>
+                      <a:round/>
+                      <a:headEnd type="none" w="med" len="med"/>
+                      <a:tailEnd type="none" w="med" len="med"/>
+                    </a:lnB>
+                    <a:solidFill>
+                      <a:srgbClr val="FFFFFF"/>
+                    </a:solidFill>
+                  </a:tcPr>
+                </a:tc>
+                <a:tc>
+                  <a:txBody>
+                    <a:bodyPr/>
+                    <a:lstStyle/>
+                    <a:p>
+                      <a:pPr algn="ctr" indent="0" marL="0">
+                        <a:buNone/>
+                      </a:pPr>
+                      <a:r>
+                        <a:rPr lang="en-US" sz="900" dirty="0">
+                          <a:solidFill>
+                            <a:srgbClr val="000000"/>
+                          </a:solidFill>
+                          <a:latin typeface="Arial" pitchFamily="34" charset="0"/>
+                          <a:ea typeface="Arial" pitchFamily="34" charset="-122"/>
+                          <a:cs typeface="Arial" pitchFamily="34" charset="-120"/>
+                        </a:rPr>
+                        <a:t>19</a:t>
+                      </a:r>
+                      <a:endParaRPr lang="en-US" sz="900" dirty="0">
+                        <a:latin typeface="Arial" charset="0"/>
+                        <a:ea typeface="Arial" charset="0"/>
+                        <a:cs typeface="Arial" charset="0"/>
+                      </a:endParaRPr>
+                    </a:p>
+                  </a:txBody>
+                  <a:tcPr marL="91440" marR="91440" marT="45720" marB="45720">
+                    <a:lnL w="6350" cap="flat" cmpd="sng" algn="ctr">
+                      <a:solidFill>
+                        <a:srgbClr val="CBD5E1"/>
+                      </a:solidFill>
+                      <a:prstDash val="solid"/>
+                      <a:round/>
+                      <a:headEnd type="none" w="med" len="med"/>
+                      <a:tailEnd type="none" w="med" len="med"/>
+                    </a:lnL>
+                    <a:lnR w="6350" cap="flat" cmpd="sng" algn="ctr">
+                      <a:solidFill>
+                        <a:srgbClr val="CBD5E1"/>
+                      </a:solidFill>
+                      <a:prstDash val="solid"/>
+                      <a:round/>
+                      <a:headEnd type="none" w="med" len="med"/>
+                      <a:tailEnd type="none" w="med" len="med"/>
+                    </a:lnR>
+                    <a:lnT w="6350" cap="flat" cmpd="sng" algn="ctr">
+                      <a:solidFill>
+                        <a:srgbClr val="CBD5E1"/>
+                      </a:solidFill>
+                      <a:prstDash val="solid"/>
+                      <a:round/>
+                      <a:headEnd type="none" w="med" len="med"/>
+                      <a:tailEnd type="none" w="med" len="med"/>
+                    </a:lnT>
+                    <a:lnB w="6350" cap="flat" cmpd="sng" algn="ctr">
+                      <a:solidFill>
+                        <a:srgbClr val="CBD5E1"/>
+                      </a:solidFill>
+                      <a:prstDash val="solid"/>
+                      <a:round/>
+                      <a:headEnd type="none" w="med" len="med"/>
+                      <a:tailEnd type="none" w="med" len="med"/>
+                    </a:lnB>
+                    <a:solidFill>
+                      <a:srgbClr val="FFFFFF"/>
+                    </a:solidFill>
+                  </a:tcPr>
+                </a:tc>
+                <a:tc>
+                  <a:txBody>
+                    <a:bodyPr/>
+                    <a:lstStyle/>
+                    <a:p>
+                      <a:pPr algn="ctr" indent="0" marL="0">
+                        <a:buNone/>
+                      </a:pPr>
+                      <a:r>
+                        <a:rPr lang="en-US" sz="900" dirty="0">
+                          <a:solidFill>
+                            <a:srgbClr val="000000"/>
+                          </a:solidFill>
+                          <a:latin typeface="Arial" pitchFamily="34" charset="0"/>
+                          <a:ea typeface="Arial" pitchFamily="34" charset="-122"/>
+                          <a:cs typeface="Arial" pitchFamily="34" charset="-120"/>
+                        </a:rPr>
+                        <a:t>7.58</a:t>
+                      </a:r>
+                      <a:endParaRPr lang="en-US" sz="900" dirty="0">
+                        <a:latin typeface="Arial" charset="0"/>
+                        <a:ea typeface="Arial" charset="0"/>
+                        <a:cs typeface="Arial" charset="0"/>
+                      </a:endParaRPr>
+                    </a:p>
+                  </a:txBody>
+                  <a:tcPr marL="91440" marR="91440" marT="45720" marB="45720">
+                    <a:lnL w="6350" cap="flat" cmpd="sng" algn="ctr">
+                      <a:solidFill>
+                        <a:srgbClr val="CBD5E1"/>
+                      </a:solidFill>
+                      <a:prstDash val="solid"/>
+                      <a:round/>
+                      <a:headEnd type="none" w="med" len="med"/>
+                      <a:tailEnd type="none" w="med" len="med"/>
+                    </a:lnL>
+                    <a:lnR w="6350" cap="flat" cmpd="sng" algn="ctr">
+                      <a:solidFill>
+                        <a:srgbClr val="CBD5E1"/>
+                      </a:solidFill>
+                      <a:prstDash val="solid"/>
+                      <a:round/>
+                      <a:headEnd type="none" w="med" len="med"/>
+                      <a:tailEnd type="none" w="med" len="med"/>
+                    </a:lnR>
+                    <a:lnT w="6350" cap="flat" cmpd="sng" algn="ctr">
+                      <a:solidFill>
+                        <a:srgbClr val="CBD5E1"/>
+                      </a:solidFill>
+                      <a:prstDash val="solid"/>
+                      <a:round/>
+                      <a:headEnd type="none" w="med" len="med"/>
+                      <a:tailEnd type="none" w="med" len="med"/>
+                    </a:lnT>
+                    <a:lnB w="6350" cap="flat" cmpd="sng" algn="ctr">
+                      <a:solidFill>
+                        <a:srgbClr val="CBD5E1"/>
+                      </a:solidFill>
+                      <a:prstDash val="solid"/>
+                      <a:round/>
+                      <a:headEnd type="none" w="med" len="med"/>
+                      <a:tailEnd type="none" w="med" len="med"/>
+                    </a:lnB>
+                    <a:solidFill>
+                      <a:srgbClr val="FFFFFF"/>
                     </a:solidFill>
                   </a:tcPr>
                 </a:tc>
@@ -8065,144 +8430,6 @@
                       <a:tailEnd type="none" w="med" len="med"/>
                     </a:lnB>
                     <a:solidFill>
-                      <a:srgbClr val="E8EFF8"/>
-                    </a:solidFill>
-                  </a:tcPr>
-                </a:tc>
-                <a:tc>
-                  <a:txBody>
-                    <a:bodyPr/>
-                    <a:lstStyle/>
-                    <a:p>
-                      <a:pPr algn="ctr" indent="0" marL="0">
-                        <a:buNone/>
-                      </a:pPr>
-                      <a:r>
-                        <a:rPr lang="en-US" sz="900" dirty="0">
-                          <a:solidFill>
-                            <a:srgbClr val="000000"/>
-                          </a:solidFill>
-                          <a:latin typeface="Arial" pitchFamily="34" charset="0"/>
-                          <a:ea typeface="Arial" pitchFamily="34" charset="-122"/>
-                          <a:cs typeface="Arial" pitchFamily="34" charset="-120"/>
-                        </a:rPr>
-                        <a:t>8</a:t>
-                      </a:r>
-                      <a:endParaRPr lang="en-US" sz="900" dirty="0">
-                        <a:latin typeface="Arial" charset="0"/>
-                        <a:ea typeface="Arial" charset="0"/>
-                        <a:cs typeface="Arial" charset="0"/>
-                      </a:endParaRPr>
-                    </a:p>
-                  </a:txBody>
-                  <a:tcPr marL="91440" marR="91440" marT="45720" marB="45720">
-                    <a:lnL w="6350" cap="flat" cmpd="sng" algn="ctr">
-                      <a:solidFill>
-                        <a:srgbClr val="CBD5E1"/>
-                      </a:solidFill>
-                      <a:prstDash val="solid"/>
-                      <a:round/>
-                      <a:headEnd type="none" w="med" len="med"/>
-                      <a:tailEnd type="none" w="med" len="med"/>
-                    </a:lnL>
-                    <a:lnR w="6350" cap="flat" cmpd="sng" algn="ctr">
-                      <a:solidFill>
-                        <a:srgbClr val="CBD5E1"/>
-                      </a:solidFill>
-                      <a:prstDash val="solid"/>
-                      <a:round/>
-                      <a:headEnd type="none" w="med" len="med"/>
-                      <a:tailEnd type="none" w="med" len="med"/>
-                    </a:lnR>
-                    <a:lnT w="6350" cap="flat" cmpd="sng" algn="ctr">
-                      <a:solidFill>
-                        <a:srgbClr val="CBD5E1"/>
-                      </a:solidFill>
-                      <a:prstDash val="solid"/>
-                      <a:round/>
-                      <a:headEnd type="none" w="med" len="med"/>
-                      <a:tailEnd type="none" w="med" len="med"/>
-                    </a:lnT>
-                    <a:lnB w="6350" cap="flat" cmpd="sng" algn="ctr">
-                      <a:solidFill>
-                        <a:srgbClr val="CBD5E1"/>
-                      </a:solidFill>
-                      <a:prstDash val="solid"/>
-                      <a:round/>
-                      <a:headEnd type="none" w="med" len="med"/>
-                      <a:tailEnd type="none" w="med" len="med"/>
-                    </a:lnB>
-                    <a:solidFill>
-                      <a:srgbClr val="E8EFF8"/>
-                    </a:solidFill>
-                  </a:tcPr>
-                </a:tc>
-              </a:tr>
-              <a:tr h="201168">
-                <a:tc>
-                  <a:txBody>
-                    <a:bodyPr/>
-                    <a:lstStyle/>
-                    <a:p>
-                      <a:pPr algn="ctr" indent="0" marL="0">
-                        <a:buNone/>
-                      </a:pPr>
-                      <a:r>
-                        <a:rPr lang="en-US" sz="900" dirty="0">
-                          <a:solidFill>
-                            <a:srgbClr val="000000"/>
-                          </a:solidFill>
-                          <a:latin typeface="Arial" pitchFamily="34" charset="0"/>
-                          <a:ea typeface="Arial" pitchFamily="34" charset="-122"/>
-                          <a:cs typeface="Arial" pitchFamily="34" charset="-120"/>
-                        </a:rPr>
-                        <a:t>Google</a:t>
-                      </a:r>
-                      <a:endParaRPr lang="en-US" sz="900" dirty="0">
-                        <a:latin typeface="Arial" charset="0"/>
-                        <a:ea typeface="Arial" charset="0"/>
-                        <a:cs typeface="Arial" charset="0"/>
-                      </a:endParaRPr>
-                    </a:p>
-                  </a:txBody>
-                  <a:tcPr marL="91440" marR="91440" marT="45720" marB="45720">
-                    <a:lnL w="6350" cap="flat" cmpd="sng" algn="ctr">
-                      <a:solidFill>
-                        <a:srgbClr val="CBD5E1"/>
-                      </a:solidFill>
-                      <a:prstDash val="solid"/>
-                      <a:round/>
-                      <a:headEnd type="none" w="med" len="med"/>
-                      <a:tailEnd type="none" w="med" len="med"/>
-                    </a:lnL>
-                    <a:lnR w="6350" cap="flat" cmpd="sng" algn="ctr">
-                      <a:solidFill>
-                        <a:srgbClr val="CBD5E1"/>
-                      </a:solidFill>
-                      <a:prstDash val="solid"/>
-                      <a:round/>
-                      <a:headEnd type="none" w="med" len="med"/>
-                      <a:tailEnd type="none" w="med" len="med"/>
-                    </a:lnR>
-                    <a:lnT w="6350" cap="flat" cmpd="sng" algn="ctr">
-                      <a:solidFill>
-                        <a:srgbClr val="CBD5E1"/>
-                      </a:solidFill>
-                      <a:prstDash val="solid"/>
-                      <a:round/>
-                      <a:headEnd type="none" w="med" len="med"/>
-                      <a:tailEnd type="none" w="med" len="med"/>
-                    </a:lnT>
-                    <a:lnB w="6350" cap="flat" cmpd="sng" algn="ctr">
-                      <a:solidFill>
-                        <a:srgbClr val="CBD5E1"/>
-                      </a:solidFill>
-                      <a:prstDash val="solid"/>
-                      <a:round/>
-                      <a:headEnd type="none" w="med" len="med"/>
-                      <a:tailEnd type="none" w="med" len="med"/>
-                    </a:lnB>
-                    <a:solidFill>
                       <a:srgbClr val="FFFFFF"/>
                     </a:solidFill>
                   </a:tcPr>
@@ -8224,211 +8451,7 @@
                           <a:ea typeface="Arial" pitchFamily="34" charset="-122"/>
                           <a:cs typeface="Arial" pitchFamily="34" charset="-120"/>
                         </a:rPr>
-                        <a:t>6</a:t>
-                      </a:r>
-                      <a:endParaRPr lang="en-US" sz="900" dirty="0">
-                        <a:latin typeface="Arial" charset="0"/>
-                        <a:ea typeface="Arial" charset="0"/>
-                        <a:cs typeface="Arial" charset="0"/>
-                      </a:endParaRPr>
-                    </a:p>
-                  </a:txBody>
-                  <a:tcPr marL="91440" marR="91440" marT="45720" marB="45720">
-                    <a:lnL w="6350" cap="flat" cmpd="sng" algn="ctr">
-                      <a:solidFill>
-                        <a:srgbClr val="CBD5E1"/>
-                      </a:solidFill>
-                      <a:prstDash val="solid"/>
-                      <a:round/>
-                      <a:headEnd type="none" w="med" len="med"/>
-                      <a:tailEnd type="none" w="med" len="med"/>
-                    </a:lnL>
-                    <a:lnR w="6350" cap="flat" cmpd="sng" algn="ctr">
-                      <a:solidFill>
-                        <a:srgbClr val="CBD5E1"/>
-                      </a:solidFill>
-                      <a:prstDash val="solid"/>
-                      <a:round/>
-                      <a:headEnd type="none" w="med" len="med"/>
-                      <a:tailEnd type="none" w="med" len="med"/>
-                    </a:lnR>
-                    <a:lnT w="6350" cap="flat" cmpd="sng" algn="ctr">
-                      <a:solidFill>
-                        <a:srgbClr val="CBD5E1"/>
-                      </a:solidFill>
-                      <a:prstDash val="solid"/>
-                      <a:round/>
-                      <a:headEnd type="none" w="med" len="med"/>
-                      <a:tailEnd type="none" w="med" len="med"/>
-                    </a:lnT>
-                    <a:lnB w="6350" cap="flat" cmpd="sng" algn="ctr">
-                      <a:solidFill>
-                        <a:srgbClr val="CBD5E1"/>
-                      </a:solidFill>
-                      <a:prstDash val="solid"/>
-                      <a:round/>
-                      <a:headEnd type="none" w="med" len="med"/>
-                      <a:tailEnd type="none" w="med" len="med"/>
-                    </a:lnB>
-                    <a:solidFill>
-                      <a:srgbClr val="FFFFFF"/>
-                    </a:solidFill>
-                  </a:tcPr>
-                </a:tc>
-                <a:tc>
-                  <a:txBody>
-                    <a:bodyPr/>
-                    <a:lstStyle/>
-                    <a:p>
-                      <a:pPr algn="ctr" indent="0" marL="0">
-                        <a:buNone/>
-                      </a:pPr>
-                      <a:r>
-                        <a:rPr lang="en-US" sz="900" dirty="0">
-                          <a:solidFill>
-                            <a:srgbClr val="000000"/>
-                          </a:solidFill>
-                          <a:latin typeface="Arial" pitchFamily="34" charset="0"/>
-                          <a:ea typeface="Arial" pitchFamily="34" charset="-122"/>
-                          <a:cs typeface="Arial" pitchFamily="34" charset="-120"/>
-                        </a:rPr>
-                        <a:t>4</a:t>
-                      </a:r>
-                      <a:endParaRPr lang="en-US" sz="900" dirty="0">
-                        <a:latin typeface="Arial" charset="0"/>
-                        <a:ea typeface="Arial" charset="0"/>
-                        <a:cs typeface="Arial" charset="0"/>
-                      </a:endParaRPr>
-                    </a:p>
-                  </a:txBody>
-                  <a:tcPr marL="91440" marR="91440" marT="45720" marB="45720">
-                    <a:lnL w="6350" cap="flat" cmpd="sng" algn="ctr">
-                      <a:solidFill>
-                        <a:srgbClr val="CBD5E1"/>
-                      </a:solidFill>
-                      <a:prstDash val="solid"/>
-                      <a:round/>
-                      <a:headEnd type="none" w="med" len="med"/>
-                      <a:tailEnd type="none" w="med" len="med"/>
-                    </a:lnL>
-                    <a:lnR w="6350" cap="flat" cmpd="sng" algn="ctr">
-                      <a:solidFill>
-                        <a:srgbClr val="CBD5E1"/>
-                      </a:solidFill>
-                      <a:prstDash val="solid"/>
-                      <a:round/>
-                      <a:headEnd type="none" w="med" len="med"/>
-                      <a:tailEnd type="none" w="med" len="med"/>
-                    </a:lnR>
-                    <a:lnT w="6350" cap="flat" cmpd="sng" algn="ctr">
-                      <a:solidFill>
-                        <a:srgbClr val="CBD5E1"/>
-                      </a:solidFill>
-                      <a:prstDash val="solid"/>
-                      <a:round/>
-                      <a:headEnd type="none" w="med" len="med"/>
-                      <a:tailEnd type="none" w="med" len="med"/>
-                    </a:lnT>
-                    <a:lnB w="6350" cap="flat" cmpd="sng" algn="ctr">
-                      <a:solidFill>
-                        <a:srgbClr val="CBD5E1"/>
-                      </a:solidFill>
-                      <a:prstDash val="solid"/>
-                      <a:round/>
-                      <a:headEnd type="none" w="med" len="med"/>
-                      <a:tailEnd type="none" w="med" len="med"/>
-                    </a:lnB>
-                    <a:solidFill>
-                      <a:srgbClr val="FFFFFF"/>
-                    </a:solidFill>
-                  </a:tcPr>
-                </a:tc>
-                <a:tc>
-                  <a:txBody>
-                    <a:bodyPr/>
-                    <a:lstStyle/>
-                    <a:p>
-                      <a:pPr algn="ctr" indent="0" marL="0">
-                        <a:buNone/>
-                      </a:pPr>
-                      <a:r>
-                        <a:rPr lang="en-US" sz="900" dirty="0">
-                          <a:solidFill>
-                            <a:srgbClr val="000000"/>
-                          </a:solidFill>
-                          <a:latin typeface="Arial" pitchFamily="34" charset="0"/>
-                          <a:ea typeface="Arial" pitchFamily="34" charset="-122"/>
-                          <a:cs typeface="Arial" pitchFamily="34" charset="-120"/>
-                        </a:rPr>
-                        <a:t>/5 (×2)</a:t>
-                      </a:r>
-                      <a:endParaRPr lang="en-US" sz="900" dirty="0">
-                        <a:latin typeface="Arial" charset="0"/>
-                        <a:ea typeface="Arial" charset="0"/>
-                        <a:cs typeface="Arial" charset="0"/>
-                      </a:endParaRPr>
-                    </a:p>
-                  </a:txBody>
-                  <a:tcPr marL="91440" marR="91440" marT="45720" marB="45720">
-                    <a:lnL w="6350" cap="flat" cmpd="sng" algn="ctr">
-                      <a:solidFill>
-                        <a:srgbClr val="CBD5E1"/>
-                      </a:solidFill>
-                      <a:prstDash val="solid"/>
-                      <a:round/>
-                      <a:headEnd type="none" w="med" len="med"/>
-                      <a:tailEnd type="none" w="med" len="med"/>
-                    </a:lnL>
-                    <a:lnR w="6350" cap="flat" cmpd="sng" algn="ctr">
-                      <a:solidFill>
-                        <a:srgbClr val="CBD5E1"/>
-                      </a:solidFill>
-                      <a:prstDash val="solid"/>
-                      <a:round/>
-                      <a:headEnd type="none" w="med" len="med"/>
-                      <a:tailEnd type="none" w="med" len="med"/>
-                    </a:lnR>
-                    <a:lnT w="6350" cap="flat" cmpd="sng" algn="ctr">
-                      <a:solidFill>
-                        <a:srgbClr val="CBD5E1"/>
-                      </a:solidFill>
-                      <a:prstDash val="solid"/>
-                      <a:round/>
-                      <a:headEnd type="none" w="med" len="med"/>
-                      <a:tailEnd type="none" w="med" len="med"/>
-                    </a:lnT>
-                    <a:lnB w="6350" cap="flat" cmpd="sng" algn="ctr">
-                      <a:solidFill>
-                        <a:srgbClr val="CBD5E1"/>
-                      </a:solidFill>
-                      <a:prstDash val="solid"/>
-                      <a:round/>
-                      <a:headEnd type="none" w="med" len="med"/>
-                      <a:tailEnd type="none" w="med" len="med"/>
-                    </a:lnB>
-                    <a:solidFill>
-                      <a:srgbClr val="FFFFFF"/>
-                    </a:solidFill>
-                  </a:tcPr>
-                </a:tc>
-                <a:tc>
-                  <a:txBody>
-                    <a:bodyPr/>
-                    <a:lstStyle/>
-                    <a:p>
-                      <a:pPr algn="ctr" indent="0" marL="0">
-                        <a:buNone/>
-                      </a:pPr>
-                      <a:r>
-                        <a:rPr lang="en-US" sz="900" dirty="0">
-                          <a:solidFill>
-                            <a:srgbClr val="000000"/>
-                          </a:solidFill>
-                          <a:latin typeface="Arial" pitchFamily="34" charset="0"/>
-                          <a:ea typeface="Arial" pitchFamily="34" charset="-122"/>
-                          <a:cs typeface="Arial" pitchFamily="34" charset="-120"/>
-                        </a:rPr>
-                        <a:t>8</a:t>
+                        <a:t>7.58</a:t>
                       </a:r>
                       <a:endParaRPr lang="en-US" sz="900" dirty="0">
                         <a:latin typeface="Arial" charset="0"/>
@@ -8566,7 +8589,7 @@
                           <a:ea typeface="Arial" pitchFamily="34" charset="-122"/>
                           <a:cs typeface="Arial" pitchFamily="34" charset="-120"/>
                         </a:rPr>
-                        <a:t>3</a:t>
+                        <a:t>4</a:t>
                       </a:r>
                       <a:endParaRPr lang="en-US" sz="900" dirty="0">
                         <a:latin typeface="Arial" charset="0"/>
@@ -8634,7 +8657,7 @@
                           <a:ea typeface="Arial" pitchFamily="34" charset="-122"/>
                           <a:cs typeface="Arial" pitchFamily="34" charset="-120"/>
                         </a:rPr>
-                        <a:t>3.67</a:t>
+                        <a:t>3.75</a:t>
                       </a:r>
                       <a:endParaRPr lang="en-US" sz="900" dirty="0">
                         <a:latin typeface="Arial" charset="0"/>
@@ -8770,7 +8793,7 @@
                           <a:ea typeface="Arial" pitchFamily="34" charset="-122"/>
                           <a:cs typeface="Arial" pitchFamily="34" charset="-120"/>
                         </a:rPr>
-                        <a:t>7.33</a:t>
+                        <a:t>7.5</a:t>
                       </a:r>
                       <a:endParaRPr lang="en-US" sz="900" dirty="0">
                         <a:latin typeface="Arial" charset="0"/>
@@ -8818,6 +8841,348 @@
                     </a:lnB>
                     <a:solidFill>
                       <a:srgbClr val="E8EFF8"/>
+                    </a:solidFill>
+                  </a:tcPr>
+                </a:tc>
+              </a:tr>
+              <a:tr h="201168">
+                <a:tc>
+                  <a:txBody>
+                    <a:bodyPr/>
+                    <a:lstStyle/>
+                    <a:p>
+                      <a:pPr algn="ctr" indent="0" marL="0">
+                        <a:buNone/>
+                      </a:pPr>
+                      <a:r>
+                        <a:rPr lang="en-US" sz="900" dirty="0">
+                          <a:solidFill>
+                            <a:srgbClr val="000000"/>
+                          </a:solidFill>
+                          <a:latin typeface="Arial" pitchFamily="34" charset="0"/>
+                          <a:ea typeface="Arial" pitchFamily="34" charset="-122"/>
+                          <a:cs typeface="Arial" pitchFamily="34" charset="-120"/>
+                        </a:rPr>
+                        <a:t>楽天トラベル</a:t>
+                      </a:r>
+                      <a:endParaRPr lang="en-US" sz="900" dirty="0">
+                        <a:latin typeface="Arial" charset="0"/>
+                        <a:ea typeface="Arial" charset="0"/>
+                        <a:cs typeface="Arial" charset="0"/>
+                      </a:endParaRPr>
+                    </a:p>
+                  </a:txBody>
+                  <a:tcPr marL="91440" marR="91440" marT="45720" marB="45720">
+                    <a:lnL w="6350" cap="flat" cmpd="sng" algn="ctr">
+                      <a:solidFill>
+                        <a:srgbClr val="CBD5E1"/>
+                      </a:solidFill>
+                      <a:prstDash val="solid"/>
+                      <a:round/>
+                      <a:headEnd type="none" w="med" len="med"/>
+                      <a:tailEnd type="none" w="med" len="med"/>
+                    </a:lnL>
+                    <a:lnR w="6350" cap="flat" cmpd="sng" algn="ctr">
+                      <a:solidFill>
+                        <a:srgbClr val="CBD5E1"/>
+                      </a:solidFill>
+                      <a:prstDash val="solid"/>
+                      <a:round/>
+                      <a:headEnd type="none" w="med" len="med"/>
+                      <a:tailEnd type="none" w="med" len="med"/>
+                    </a:lnR>
+                    <a:lnT w="6350" cap="flat" cmpd="sng" algn="ctr">
+                      <a:solidFill>
+                        <a:srgbClr val="CBD5E1"/>
+                      </a:solidFill>
+                      <a:prstDash val="solid"/>
+                      <a:round/>
+                      <a:headEnd type="none" w="med" len="med"/>
+                      <a:tailEnd type="none" w="med" len="med"/>
+                    </a:lnT>
+                    <a:lnB w="6350" cap="flat" cmpd="sng" algn="ctr">
+                      <a:solidFill>
+                        <a:srgbClr val="CBD5E1"/>
+                      </a:solidFill>
+                      <a:prstDash val="solid"/>
+                      <a:round/>
+                      <a:headEnd type="none" w="med" len="med"/>
+                      <a:tailEnd type="none" w="med" len="med"/>
+                    </a:lnB>
+                    <a:solidFill>
+                      <a:srgbClr val="FFFFFF"/>
+                    </a:solidFill>
+                  </a:tcPr>
+                </a:tc>
+                <a:tc>
+                  <a:txBody>
+                    <a:bodyPr/>
+                    <a:lstStyle/>
+                    <a:p>
+                      <a:pPr algn="ctr" indent="0" marL="0">
+                        <a:buNone/>
+                      </a:pPr>
+                      <a:r>
+                        <a:rPr lang="en-US" sz="900" dirty="0">
+                          <a:solidFill>
+                            <a:srgbClr val="000000"/>
+                          </a:solidFill>
+                          <a:latin typeface="Arial" pitchFamily="34" charset="0"/>
+                          <a:ea typeface="Arial" pitchFamily="34" charset="-122"/>
+                          <a:cs typeface="Arial" pitchFamily="34" charset="-120"/>
+                        </a:rPr>
+                        <a:t>4</a:t>
+                      </a:r>
+                      <a:endParaRPr lang="en-US" sz="900" dirty="0">
+                        <a:latin typeface="Arial" charset="0"/>
+                        <a:ea typeface="Arial" charset="0"/>
+                        <a:cs typeface="Arial" charset="0"/>
+                      </a:endParaRPr>
+                    </a:p>
+                  </a:txBody>
+                  <a:tcPr marL="91440" marR="91440" marT="45720" marB="45720">
+                    <a:lnL w="6350" cap="flat" cmpd="sng" algn="ctr">
+                      <a:solidFill>
+                        <a:srgbClr val="CBD5E1"/>
+                      </a:solidFill>
+                      <a:prstDash val="solid"/>
+                      <a:round/>
+                      <a:headEnd type="none" w="med" len="med"/>
+                      <a:tailEnd type="none" w="med" len="med"/>
+                    </a:lnL>
+                    <a:lnR w="6350" cap="flat" cmpd="sng" algn="ctr">
+                      <a:solidFill>
+                        <a:srgbClr val="CBD5E1"/>
+                      </a:solidFill>
+                      <a:prstDash val="solid"/>
+                      <a:round/>
+                      <a:headEnd type="none" w="med" len="med"/>
+                      <a:tailEnd type="none" w="med" len="med"/>
+                    </a:lnR>
+                    <a:lnT w="6350" cap="flat" cmpd="sng" algn="ctr">
+                      <a:solidFill>
+                        <a:srgbClr val="CBD5E1"/>
+                      </a:solidFill>
+                      <a:prstDash val="solid"/>
+                      <a:round/>
+                      <a:headEnd type="none" w="med" len="med"/>
+                      <a:tailEnd type="none" w="med" len="med"/>
+                    </a:lnT>
+                    <a:lnB w="6350" cap="flat" cmpd="sng" algn="ctr">
+                      <a:solidFill>
+                        <a:srgbClr val="CBD5E1"/>
+                      </a:solidFill>
+                      <a:prstDash val="solid"/>
+                      <a:round/>
+                      <a:headEnd type="none" w="med" len="med"/>
+                      <a:tailEnd type="none" w="med" len="med"/>
+                    </a:lnB>
+                    <a:solidFill>
+                      <a:srgbClr val="FFFFFF"/>
+                    </a:solidFill>
+                  </a:tcPr>
+                </a:tc>
+                <a:tc>
+                  <a:txBody>
+                    <a:bodyPr/>
+                    <a:lstStyle/>
+                    <a:p>
+                      <a:pPr algn="ctr" indent="0" marL="0">
+                        <a:buNone/>
+                      </a:pPr>
+                      <a:r>
+                        <a:rPr lang="en-US" sz="900" dirty="0">
+                          <a:solidFill>
+                            <a:srgbClr val="000000"/>
+                          </a:solidFill>
+                          <a:latin typeface="Arial" pitchFamily="34" charset="0"/>
+                          <a:ea typeface="Arial" pitchFamily="34" charset="-122"/>
+                          <a:cs typeface="Arial" pitchFamily="34" charset="-120"/>
+                        </a:rPr>
+                        <a:t>3.5</a:t>
+                      </a:r>
+                      <a:endParaRPr lang="en-US" sz="900" dirty="0">
+                        <a:latin typeface="Arial" charset="0"/>
+                        <a:ea typeface="Arial" charset="0"/>
+                        <a:cs typeface="Arial" charset="0"/>
+                      </a:endParaRPr>
+                    </a:p>
+                  </a:txBody>
+                  <a:tcPr marL="91440" marR="91440" marT="45720" marB="45720">
+                    <a:lnL w="6350" cap="flat" cmpd="sng" algn="ctr">
+                      <a:solidFill>
+                        <a:srgbClr val="CBD5E1"/>
+                      </a:solidFill>
+                      <a:prstDash val="solid"/>
+                      <a:round/>
+                      <a:headEnd type="none" w="med" len="med"/>
+                      <a:tailEnd type="none" w="med" len="med"/>
+                    </a:lnL>
+                    <a:lnR w="6350" cap="flat" cmpd="sng" algn="ctr">
+                      <a:solidFill>
+                        <a:srgbClr val="CBD5E1"/>
+                      </a:solidFill>
+                      <a:prstDash val="solid"/>
+                      <a:round/>
+                      <a:headEnd type="none" w="med" len="med"/>
+                      <a:tailEnd type="none" w="med" len="med"/>
+                    </a:lnR>
+                    <a:lnT w="6350" cap="flat" cmpd="sng" algn="ctr">
+                      <a:solidFill>
+                        <a:srgbClr val="CBD5E1"/>
+                      </a:solidFill>
+                      <a:prstDash val="solid"/>
+                      <a:round/>
+                      <a:headEnd type="none" w="med" len="med"/>
+                      <a:tailEnd type="none" w="med" len="med"/>
+                    </a:lnT>
+                    <a:lnB w="6350" cap="flat" cmpd="sng" algn="ctr">
+                      <a:solidFill>
+                        <a:srgbClr val="CBD5E1"/>
+                      </a:solidFill>
+                      <a:prstDash val="solid"/>
+                      <a:round/>
+                      <a:headEnd type="none" w="med" len="med"/>
+                      <a:tailEnd type="none" w="med" len="med"/>
+                    </a:lnB>
+                    <a:solidFill>
+                      <a:srgbClr val="FFFFFF"/>
+                    </a:solidFill>
+                  </a:tcPr>
+                </a:tc>
+                <a:tc>
+                  <a:txBody>
+                    <a:bodyPr/>
+                    <a:lstStyle/>
+                    <a:p>
+                      <a:pPr algn="ctr" indent="0" marL="0">
+                        <a:buNone/>
+                      </a:pPr>
+                      <a:r>
+                        <a:rPr lang="en-US" sz="900" dirty="0">
+                          <a:solidFill>
+                            <a:srgbClr val="000000"/>
+                          </a:solidFill>
+                          <a:latin typeface="Arial" pitchFamily="34" charset="0"/>
+                          <a:ea typeface="Arial" pitchFamily="34" charset="-122"/>
+                          <a:cs typeface="Arial" pitchFamily="34" charset="-120"/>
+                        </a:rPr>
+                        <a:t>/5 (×2)</a:t>
+                      </a:r>
+                      <a:endParaRPr lang="en-US" sz="900" dirty="0">
+                        <a:latin typeface="Arial" charset="0"/>
+                        <a:ea typeface="Arial" charset="0"/>
+                        <a:cs typeface="Arial" charset="0"/>
+                      </a:endParaRPr>
+                    </a:p>
+                  </a:txBody>
+                  <a:tcPr marL="91440" marR="91440" marT="45720" marB="45720">
+                    <a:lnL w="6350" cap="flat" cmpd="sng" algn="ctr">
+                      <a:solidFill>
+                        <a:srgbClr val="CBD5E1"/>
+                      </a:solidFill>
+                      <a:prstDash val="solid"/>
+                      <a:round/>
+                      <a:headEnd type="none" w="med" len="med"/>
+                      <a:tailEnd type="none" w="med" len="med"/>
+                    </a:lnL>
+                    <a:lnR w="6350" cap="flat" cmpd="sng" algn="ctr">
+                      <a:solidFill>
+                        <a:srgbClr val="CBD5E1"/>
+                      </a:solidFill>
+                      <a:prstDash val="solid"/>
+                      <a:round/>
+                      <a:headEnd type="none" w="med" len="med"/>
+                      <a:tailEnd type="none" w="med" len="med"/>
+                    </a:lnR>
+                    <a:lnT w="6350" cap="flat" cmpd="sng" algn="ctr">
+                      <a:solidFill>
+                        <a:srgbClr val="CBD5E1"/>
+                      </a:solidFill>
+                      <a:prstDash val="solid"/>
+                      <a:round/>
+                      <a:headEnd type="none" w="med" len="med"/>
+                      <a:tailEnd type="none" w="med" len="med"/>
+                    </a:lnT>
+                    <a:lnB w="6350" cap="flat" cmpd="sng" algn="ctr">
+                      <a:solidFill>
+                        <a:srgbClr val="CBD5E1"/>
+                      </a:solidFill>
+                      <a:prstDash val="solid"/>
+                      <a:round/>
+                      <a:headEnd type="none" w="med" len="med"/>
+                      <a:tailEnd type="none" w="med" len="med"/>
+                    </a:lnB>
+                    <a:solidFill>
+                      <a:srgbClr val="FFFFFF"/>
+                    </a:solidFill>
+                  </a:tcPr>
+                </a:tc>
+                <a:tc>
+                  <a:txBody>
+                    <a:bodyPr/>
+                    <a:lstStyle/>
+                    <a:p>
+                      <a:pPr algn="ctr" indent="0" marL="0">
+                        <a:buNone/>
+                      </a:pPr>
+                      <a:r>
+                        <a:rPr lang="en-US" sz="900" dirty="0">
+                          <a:solidFill>
+                            <a:srgbClr val="000000"/>
+                          </a:solidFill>
+                          <a:latin typeface="Arial" pitchFamily="34" charset="0"/>
+                          <a:ea typeface="Arial" pitchFamily="34" charset="-122"/>
+                          <a:cs typeface="Arial" pitchFamily="34" charset="-120"/>
+                        </a:rPr>
+                        <a:t>7</a:t>
+                      </a:r>
+                      <a:endParaRPr lang="en-US" sz="900" dirty="0">
+                        <a:latin typeface="Arial" charset="0"/>
+                        <a:ea typeface="Arial" charset="0"/>
+                        <a:cs typeface="Arial" charset="0"/>
+                      </a:endParaRPr>
+                    </a:p>
+                  </a:txBody>
+                  <a:tcPr marL="91440" marR="91440" marT="45720" marB="45720">
+                    <a:lnL w="6350" cap="flat" cmpd="sng" algn="ctr">
+                      <a:solidFill>
+                        <a:srgbClr val="CBD5E1"/>
+                      </a:solidFill>
+                      <a:prstDash val="solid"/>
+                      <a:round/>
+                      <a:headEnd type="none" w="med" len="med"/>
+                      <a:tailEnd type="none" w="med" len="med"/>
+                    </a:lnL>
+                    <a:lnR w="6350" cap="flat" cmpd="sng" algn="ctr">
+                      <a:solidFill>
+                        <a:srgbClr val="CBD5E1"/>
+                      </a:solidFill>
+                      <a:prstDash val="solid"/>
+                      <a:round/>
+                      <a:headEnd type="none" w="med" len="med"/>
+                      <a:tailEnd type="none" w="med" len="med"/>
+                    </a:lnR>
+                    <a:lnT w="6350" cap="flat" cmpd="sng" algn="ctr">
+                      <a:solidFill>
+                        <a:srgbClr val="CBD5E1"/>
+                      </a:solidFill>
+                      <a:prstDash val="solid"/>
+                      <a:round/>
+                      <a:headEnd type="none" w="med" len="med"/>
+                      <a:tailEnd type="none" w="med" len="med"/>
+                    </a:lnT>
+                    <a:lnB w="6350" cap="flat" cmpd="sng" algn="ctr">
+                      <a:solidFill>
+                        <a:srgbClr val="CBD5E1"/>
+                      </a:solidFill>
+                      <a:prstDash val="solid"/>
+                      <a:round/>
+                      <a:headEnd type="none" w="med" len="med"/>
+                      <a:tailEnd type="none" w="med" len="med"/>
+                    </a:lnB>
+                    <a:solidFill>
+                      <a:srgbClr val="FFFFFF"/>
                     </a:solidFill>
                   </a:tcPr>
                 </a:tc>
@@ -8887,7 +9252,7 @@
                       <a:tailEnd type="none" w="med" len="med"/>
                     </a:lnB>
                     <a:solidFill>
-                      <a:srgbClr val="FFFFFF"/>
+                      <a:srgbClr val="E8EFF8"/>
                     </a:solidFill>
                   </a:tcPr>
                 </a:tc>
@@ -8908,7 +9273,7 @@
                           <a:ea typeface="Arial" pitchFamily="34" charset="-122"/>
                           <a:cs typeface="Arial" pitchFamily="34" charset="-120"/>
                         </a:rPr>
-                        <a:t>9</a:t>
+                        <a:t>16</a:t>
                       </a:r>
                       <a:endParaRPr lang="en-US" sz="900" dirty="0">
                         <a:latin typeface="Arial" charset="0"/>
@@ -8955,7 +9320,7 @@
                       <a:tailEnd type="none" w="med" len="med"/>
                     </a:lnB>
                     <a:solidFill>
-                      <a:srgbClr val="FFFFFF"/>
+                      <a:srgbClr val="E8EFF8"/>
                     </a:solidFill>
                   </a:tcPr>
                 </a:tc>
@@ -8976,7 +9341,7 @@
                           <a:ea typeface="Arial" pitchFamily="34" charset="-122"/>
                           <a:cs typeface="Arial" pitchFamily="34" charset="-120"/>
                         </a:rPr>
-                        <a:t>6.67</a:t>
+                        <a:t>6.69</a:t>
                       </a:r>
                       <a:endParaRPr lang="en-US" sz="900" dirty="0">
                         <a:latin typeface="Arial" charset="0"/>
@@ -9023,7 +9388,7 @@
                       <a:tailEnd type="none" w="med" len="med"/>
                     </a:lnB>
                     <a:solidFill>
-                      <a:srgbClr val="FFFFFF"/>
+                      <a:srgbClr val="E8EFF8"/>
                     </a:solidFill>
                   </a:tcPr>
                 </a:tc>
@@ -9091,7 +9456,7 @@
                       <a:tailEnd type="none" w="med" len="med"/>
                     </a:lnB>
                     <a:solidFill>
-                      <a:srgbClr val="FFFFFF"/>
+                      <a:srgbClr val="E8EFF8"/>
                     </a:solidFill>
                   </a:tcPr>
                 </a:tc>
@@ -9112,7 +9477,7 @@
                           <a:ea typeface="Arial" pitchFamily="34" charset="-122"/>
                           <a:cs typeface="Arial" pitchFamily="34" charset="-120"/>
                         </a:rPr>
-                        <a:t>6.67</a:t>
+                        <a:t>6.69</a:t>
                       </a:r>
                       <a:endParaRPr lang="en-US" sz="900" dirty="0">
                         <a:latin typeface="Arial" charset="0"/>
@@ -9159,7 +9524,7 @@
                       <a:tailEnd type="none" w="med" len="med"/>
                     </a:lnB>
                     <a:solidFill>
-                      <a:srgbClr val="FFFFFF"/>
+                      <a:srgbClr val="E8EFF8"/>
                     </a:solidFill>
                   </a:tcPr>
                 </a:tc>
@@ -9520,7 +9885,7 @@
                 <a:ea typeface="Arial" pitchFamily="34" charset="-122"/>
                 <a:cs typeface="Arial" pitchFamily="34" charset="-120"/>
               </a:rPr>
-              <a:t>18件（64.3%）</a:t>
+              <a:t>38件（63.3%）</a:t>
             </a:r>
             <a:endParaRPr lang="en-US" sz="1100" dirty="0"/>
           </a:p>
@@ -9618,7 +9983,7 @@
                 <a:ea typeface="Arial" pitchFamily="34" charset="-122"/>
                 <a:cs typeface="Arial" pitchFamily="34" charset="-120"/>
               </a:rPr>
-              <a:t>8件（28.6%）</a:t>
+              <a:t>16件（26.7%）</a:t>
             </a:r>
             <a:endParaRPr lang="en-US" sz="1100" dirty="0"/>
           </a:p>
@@ -9716,7 +10081,7 @@
                 <a:ea typeface="Arial" pitchFamily="34" charset="-122"/>
                 <a:cs typeface="Arial" pitchFamily="34" charset="-120"/>
               </a:rPr>
-              <a:t>2件（7.1%）</a:t>
+              <a:t>6件（10.0%）</a:t>
             </a:r>
             <a:endParaRPr lang="en-US" sz="1100" dirty="0"/>
           </a:p>
@@ -10273,7 +10638,7 @@
                 <a:ea typeface="Arial" pitchFamily="34" charset="-122"/>
                 <a:cs typeface="Arial" pitchFamily="34" charset="-120"/>
               </a:rPr>
-              <a:t>8件</a:t>
+              <a:t>10件+</a:t>
             </a:r>
             <a:endParaRPr lang="en-US" sz="900" dirty="0"/>
           </a:p>
@@ -10496,7 +10861,7 @@
                 <a:ea typeface="Arial" pitchFamily="34" charset="-122"/>
                 <a:cs typeface="Arial" pitchFamily="34" charset="-120"/>
               </a:rPr>
-              <a:t>6件</a:t>
+              <a:t>10件+</a:t>
             </a:r>
             <a:endParaRPr lang="en-US" sz="900" dirty="0"/>
           </a:p>
@@ -10719,7 +11084,7 @@
                 <a:ea typeface="Arial" pitchFamily="34" charset="-122"/>
                 <a:cs typeface="Arial" pitchFamily="34" charset="-120"/>
               </a:rPr>
-              <a:t>6件</a:t>
+              <a:t>8件</a:t>
             </a:r>
             <a:endParaRPr lang="en-US" sz="900" dirty="0"/>
           </a:p>
@@ -10981,7 +11346,7 @@
                 <a:ea typeface="Arial" pitchFamily="34" charset="-122"/>
                 <a:cs typeface="Arial" pitchFamily="34" charset="-120"/>
               </a:rPr>
-              <a:t>コンビニ・周辺施設</a:t>
+              <a:t>コストパフォーマンス</a:t>
             </a:r>
             <a:endParaRPr lang="en-US" sz="1300" dirty="0"/>
           </a:p>
@@ -10996,6 +11361,229 @@
         <p:spPr>
           <a:xfrm>
             <a:off x="3429000" y="3246120"/>
+            <a:ext cx="2377440" cy="365760"/>
+          </a:xfrm>
+          <a:prstGeom prst="rect">
+            <a:avLst/>
+          </a:prstGeom>
+          <a:noFill/>
+          <a:ln/>
+        </p:spPr>
+        <p:txBody>
+          <a:bodyPr wrap="square" lIns="0" tIns="0" rIns="0" bIns="0" rtlCol="0" anchor="ctr"/>
+          <a:lstStyle/>
+          <a:p>
+            <a:pPr indent="0" marL="0">
+              <a:buNone/>
+            </a:pPr>
+            <a:r>
+              <a:rPr lang="en-US" sz="900" dirty="0">
+                <a:solidFill>
+                  <a:srgbClr val="64748B"/>
+                </a:solidFill>
+                <a:latin typeface="Arial" pitchFamily="34" charset="0"/>
+                <a:ea typeface="Arial" pitchFamily="34" charset="-122"/>
+                <a:cs typeface="Arial" pitchFamily="34" charset="-120"/>
+              </a:rPr>
+              <a:t>他のアバよりも狭い 駅からは遠いが、その分比較的安い 羽田空港の乗り継ぎに利用するなら十分か 他のアバよりも狭い ...</a:t>
+            </a:r>
+            <a:endParaRPr lang="en-US" sz="900" dirty="0"/>
+          </a:p>
+        </p:txBody>
+      </p:sp>
+      <p:sp>
+        <p:nvSpPr>
+          <p:cNvPr id="39" name="Text 37"/>
+          <p:cNvSpPr/>
+          <p:nvPr/>
+        </p:nvSpPr>
+        <p:spPr>
+          <a:xfrm>
+            <a:off x="3429000" y="3657600"/>
+            <a:ext cx="2377440" cy="640080"/>
+          </a:xfrm>
+          <a:prstGeom prst="rect">
+            <a:avLst/>
+          </a:prstGeom>
+          <a:noFill/>
+          <a:ln/>
+        </p:spPr>
+        <p:txBody>
+          <a:bodyPr wrap="square" lIns="0" tIns="0" rIns="0" bIns="0" rtlCol="0" anchor="ctr"/>
+          <a:lstStyle/>
+          <a:p>
+            <a:pPr indent="0" marL="0">
+              <a:buNone/>
+            </a:pPr>
+            <a:r>
+              <a:rPr lang="en-US" sz="900" i="1" dirty="0">
+                <a:solidFill>
+                  <a:srgbClr val="3B7DD8"/>
+                </a:solidFill>
+                <a:latin typeface="Arial" pitchFamily="34" charset="0"/>
+                <a:ea typeface="Arial" pitchFamily="34" charset="-122"/>
+                <a:cs typeface="Arial" pitchFamily="34" charset="-120"/>
+              </a:rPr>
+              <a:t>「何と言ってもお値段がお手頃なのでねるだけなら充分です チェックアウトスムーズに出来るのも良い」</a:t>
+            </a:r>
+            <a:endParaRPr lang="en-US" sz="900" dirty="0"/>
+          </a:p>
+        </p:txBody>
+      </p:sp>
+      <p:sp>
+        <p:nvSpPr>
+          <p:cNvPr id="40" name="Shape 38"/>
+          <p:cNvSpPr/>
+          <p:nvPr/>
+        </p:nvSpPr>
+        <p:spPr>
+          <a:xfrm>
+            <a:off x="6126480" y="2880360"/>
+            <a:ext cx="2651760" cy="1600200"/>
+          </a:xfrm>
+          <a:prstGeom prst="rect">
+            <a:avLst/>
+          </a:prstGeom>
+          <a:solidFill>
+            <a:srgbClr val="FFFFFF"/>
+          </a:solidFill>
+          <a:ln/>
+          <a:effectLst>
+            <a:outerShdw sx="100000" sy="100000" kx="0" ky="0" algn="bl" rotWithShape="0" blurRad="50800" dist="25400" dir="8100000">
+              <a:srgbClr val="000000">
+                <a:alpha val="10000"/>
+              </a:srgbClr>
+            </a:outerShdw>
+          </a:effectLst>
+        </p:spPr>
+      </p:sp>
+      <p:sp>
+        <p:nvSpPr>
+          <p:cNvPr id="41" name="Shape 39"/>
+          <p:cNvSpPr/>
+          <p:nvPr/>
+        </p:nvSpPr>
+        <p:spPr>
+          <a:xfrm>
+            <a:off x="6126480" y="2880360"/>
+            <a:ext cx="54864" cy="1600200"/>
+          </a:xfrm>
+          <a:prstGeom prst="rect">
+            <a:avLst/>
+          </a:prstGeom>
+          <a:solidFill>
+            <a:srgbClr val="16A34A"/>
+          </a:solidFill>
+          <a:ln/>
+        </p:spPr>
+      </p:sp>
+      <p:sp>
+        <p:nvSpPr>
+          <p:cNvPr id="42" name="Shape 40"/>
+          <p:cNvSpPr/>
+          <p:nvPr/>
+        </p:nvSpPr>
+        <p:spPr>
+          <a:xfrm>
+            <a:off x="7955280" y="2953512"/>
+            <a:ext cx="658368" cy="228600"/>
+          </a:xfrm>
+          <a:prstGeom prst="rect">
+            <a:avLst/>
+          </a:prstGeom>
+          <a:solidFill>
+            <a:srgbClr val="DCFCE7"/>
+          </a:solidFill>
+          <a:ln/>
+        </p:spPr>
+      </p:sp>
+      <p:sp>
+        <p:nvSpPr>
+          <p:cNvPr id="43" name="Text 41"/>
+          <p:cNvSpPr/>
+          <p:nvPr/>
+        </p:nvSpPr>
+        <p:spPr>
+          <a:xfrm>
+            <a:off x="7955280" y="2953512"/>
+            <a:ext cx="658368" cy="228600"/>
+          </a:xfrm>
+          <a:prstGeom prst="rect">
+            <a:avLst/>
+          </a:prstGeom>
+          <a:noFill/>
+          <a:ln/>
+        </p:spPr>
+        <p:txBody>
+          <a:bodyPr wrap="square" lIns="0" tIns="0" rIns="0" bIns="0" rtlCol="0" anchor="ctr"/>
+          <a:lstStyle/>
+          <a:p>
+            <a:pPr algn="ctr" indent="0" marL="0">
+              <a:buNone/>
+            </a:pPr>
+            <a:r>
+              <a:rPr lang="en-US" sz="900" b="1" dirty="0">
+                <a:solidFill>
+                  <a:srgbClr val="16A34A"/>
+                </a:solidFill>
+                <a:latin typeface="Arial" pitchFamily="34" charset="0"/>
+                <a:ea typeface="Arial" pitchFamily="34" charset="-122"/>
+                <a:cs typeface="Arial" pitchFamily="34" charset="-120"/>
+              </a:rPr>
+              <a:t>2件</a:t>
+            </a:r>
+            <a:endParaRPr lang="en-US" sz="900" dirty="0"/>
+          </a:p>
+        </p:txBody>
+      </p:sp>
+      <p:sp>
+        <p:nvSpPr>
+          <p:cNvPr id="44" name="Text 42"/>
+          <p:cNvSpPr/>
+          <p:nvPr/>
+        </p:nvSpPr>
+        <p:spPr>
+          <a:xfrm>
+            <a:off x="6263640" y="2953512"/>
+            <a:ext cx="1645920" cy="274320"/>
+          </a:xfrm>
+          <a:prstGeom prst="rect">
+            <a:avLst/>
+          </a:prstGeom>
+          <a:noFill/>
+          <a:ln/>
+        </p:spPr>
+        <p:txBody>
+          <a:bodyPr wrap="square" lIns="0" tIns="0" rIns="0" bIns="0" rtlCol="0" anchor="ctr"/>
+          <a:lstStyle/>
+          <a:p>
+            <a:pPr indent="0" marL="0">
+              <a:buNone/>
+            </a:pPr>
+            <a:r>
+              <a:rPr lang="en-US" sz="1300" b="1" dirty="0">
+                <a:solidFill>
+                  <a:srgbClr val="1A2744"/>
+                </a:solidFill>
+                <a:latin typeface="Arial" pitchFamily="34" charset="0"/>
+                <a:ea typeface="Arial" pitchFamily="34" charset="-122"/>
+                <a:cs typeface="Arial" pitchFamily="34" charset="-120"/>
+              </a:rPr>
+              <a:t>朝食</a:t>
+            </a:r>
+            <a:endParaRPr lang="en-US" sz="1300" dirty="0"/>
+          </a:p>
+        </p:txBody>
+      </p:sp>
+      <p:sp>
+        <p:nvSpPr>
+          <p:cNvPr id="45" name="Text 43"/>
+          <p:cNvSpPr/>
+          <p:nvPr/>
+        </p:nvSpPr>
+        <p:spPr>
+          <a:xfrm>
+            <a:off x="6263640" y="3246120"/>
             <a:ext cx="2377440" cy="365760"/>
           </a:xfrm>
           <a:prstGeom prst="rect">
@@ -11028,13 +11616,13 @@
       </p:sp>
       <p:sp>
         <p:nvSpPr>
-          <p:cNvPr id="39" name="Text 37"/>
-          <p:cNvSpPr/>
-          <p:nvPr/>
-        </p:nvSpPr>
-        <p:spPr>
-          <a:xfrm>
-            <a:off x="3429000" y="3657600"/>
+          <p:cNvPr id="46" name="Text 44"/>
+          <p:cNvSpPr/>
+          <p:nvPr/>
+        </p:nvSpPr>
+        <p:spPr>
+          <a:xfrm>
+            <a:off x="6263640" y="3657600"/>
             <a:ext cx="2377440" cy="640080"/>
           </a:xfrm>
           <a:prstGeom prst="rect">
@@ -11059,230 +11647,7 @@
                 <a:ea typeface="Arial" pitchFamily="34" charset="-122"/>
                 <a:cs typeface="Arial" pitchFamily="34" charset="-120"/>
               </a:rPr>
-              <a:t>「駅近で周りにスーパー、コンビニがあるところ」</a:t>
-            </a:r>
-            <a:endParaRPr lang="en-US" sz="900" dirty="0"/>
-          </a:p>
-        </p:txBody>
-      </p:sp>
-      <p:sp>
-        <p:nvSpPr>
-          <p:cNvPr id="40" name="Shape 38"/>
-          <p:cNvSpPr/>
-          <p:nvPr/>
-        </p:nvSpPr>
-        <p:spPr>
-          <a:xfrm>
-            <a:off x="6126480" y="2880360"/>
-            <a:ext cx="2651760" cy="1600200"/>
-          </a:xfrm>
-          <a:prstGeom prst="rect">
-            <a:avLst/>
-          </a:prstGeom>
-          <a:solidFill>
-            <a:srgbClr val="FFFFFF"/>
-          </a:solidFill>
-          <a:ln/>
-          <a:effectLst>
-            <a:outerShdw sx="100000" sy="100000" kx="0" ky="0" algn="bl" rotWithShape="0" blurRad="50800" dist="25400" dir="8100000">
-              <a:srgbClr val="000000">
-                <a:alpha val="10000"/>
-              </a:srgbClr>
-            </a:outerShdw>
-          </a:effectLst>
-        </p:spPr>
-      </p:sp>
-      <p:sp>
-        <p:nvSpPr>
-          <p:cNvPr id="41" name="Shape 39"/>
-          <p:cNvSpPr/>
-          <p:nvPr/>
-        </p:nvSpPr>
-        <p:spPr>
-          <a:xfrm>
-            <a:off x="6126480" y="2880360"/>
-            <a:ext cx="54864" cy="1600200"/>
-          </a:xfrm>
-          <a:prstGeom prst="rect">
-            <a:avLst/>
-          </a:prstGeom>
-          <a:solidFill>
-            <a:srgbClr val="16A34A"/>
-          </a:solidFill>
-          <a:ln/>
-        </p:spPr>
-      </p:sp>
-      <p:sp>
-        <p:nvSpPr>
-          <p:cNvPr id="42" name="Shape 40"/>
-          <p:cNvSpPr/>
-          <p:nvPr/>
-        </p:nvSpPr>
-        <p:spPr>
-          <a:xfrm>
-            <a:off x="7955280" y="2953512"/>
-            <a:ext cx="658368" cy="228600"/>
-          </a:xfrm>
-          <a:prstGeom prst="rect">
-            <a:avLst/>
-          </a:prstGeom>
-          <a:solidFill>
-            <a:srgbClr val="DCFCE7"/>
-          </a:solidFill>
-          <a:ln/>
-        </p:spPr>
-      </p:sp>
-      <p:sp>
-        <p:nvSpPr>
-          <p:cNvPr id="43" name="Text 41"/>
-          <p:cNvSpPr/>
-          <p:nvPr/>
-        </p:nvSpPr>
-        <p:spPr>
-          <a:xfrm>
-            <a:off x="7955280" y="2953512"/>
-            <a:ext cx="658368" cy="228600"/>
-          </a:xfrm>
-          <a:prstGeom prst="rect">
-            <a:avLst/>
-          </a:prstGeom>
-          <a:noFill/>
-          <a:ln/>
-        </p:spPr>
-        <p:txBody>
-          <a:bodyPr wrap="square" lIns="0" tIns="0" rIns="0" bIns="0" rtlCol="0" anchor="ctr"/>
-          <a:lstStyle/>
-          <a:p>
-            <a:pPr algn="ctr" indent="0" marL="0">
-              <a:buNone/>
-            </a:pPr>
-            <a:r>
-              <a:rPr lang="en-US" sz="900" b="1" dirty="0">
-                <a:solidFill>
-                  <a:srgbClr val="16A34A"/>
-                </a:solidFill>
-                <a:latin typeface="Arial" pitchFamily="34" charset="0"/>
-                <a:ea typeface="Arial" pitchFamily="34" charset="-122"/>
-                <a:cs typeface="Arial" pitchFamily="34" charset="-120"/>
-              </a:rPr>
-              <a:t>1件</a:t>
-            </a:r>
-            <a:endParaRPr lang="en-US" sz="900" dirty="0"/>
-          </a:p>
-        </p:txBody>
-      </p:sp>
-      <p:sp>
-        <p:nvSpPr>
-          <p:cNvPr id="44" name="Text 42"/>
-          <p:cNvSpPr/>
-          <p:nvPr/>
-        </p:nvSpPr>
-        <p:spPr>
-          <a:xfrm>
-            <a:off x="6263640" y="2953512"/>
-            <a:ext cx="1645920" cy="274320"/>
-          </a:xfrm>
-          <a:prstGeom prst="rect">
-            <a:avLst/>
-          </a:prstGeom>
-          <a:noFill/>
-          <a:ln/>
-        </p:spPr>
-        <p:txBody>
-          <a:bodyPr wrap="square" lIns="0" tIns="0" rIns="0" bIns="0" rtlCol="0" anchor="ctr"/>
-          <a:lstStyle/>
-          <a:p>
-            <a:pPr indent="0" marL="0">
-              <a:buNone/>
-            </a:pPr>
-            <a:r>
-              <a:rPr lang="en-US" sz="1300" b="1" dirty="0">
-                <a:solidFill>
-                  <a:srgbClr val="1A2744"/>
-                </a:solidFill>
-                <a:latin typeface="Arial" pitchFamily="34" charset="0"/>
-                <a:ea typeface="Arial" pitchFamily="34" charset="-122"/>
-                <a:cs typeface="Arial" pitchFamily="34" charset="-120"/>
-              </a:rPr>
-              <a:t>コストパフォーマンス</a:t>
-            </a:r>
-            <a:endParaRPr lang="en-US" sz="1300" dirty="0"/>
-          </a:p>
-        </p:txBody>
-      </p:sp>
-      <p:sp>
-        <p:nvSpPr>
-          <p:cNvPr id="45" name="Text 43"/>
-          <p:cNvSpPr/>
-          <p:nvPr/>
-        </p:nvSpPr>
-        <p:spPr>
-          <a:xfrm>
-            <a:off x="6263640" y="3246120"/>
-            <a:ext cx="2377440" cy="365760"/>
-          </a:xfrm>
-          <a:prstGeom prst="rect">
-            <a:avLst/>
-          </a:prstGeom>
-          <a:noFill/>
-          <a:ln/>
-        </p:spPr>
-        <p:txBody>
-          <a:bodyPr wrap="square" lIns="0" tIns="0" rIns="0" bIns="0" rtlCol="0" anchor="ctr"/>
-          <a:lstStyle/>
-          <a:p>
-            <a:pPr indent="0" marL="0">
-              <a:buNone/>
-            </a:pPr>
-            <a:r>
-              <a:rPr lang="en-US" sz="900" dirty="0">
-                <a:solidFill>
-                  <a:srgbClr val="64748B"/>
-                </a:solidFill>
-                <a:latin typeface="Arial" pitchFamily="34" charset="0"/>
-                <a:ea typeface="Arial" pitchFamily="34" charset="-122"/>
-                <a:cs typeface="Arial" pitchFamily="34" charset="-120"/>
-              </a:rPr>
-              <a:t>他のアバよりも狭い 駅からは遠いが、その分比較的安い 羽田空港の乗り継ぎに利用するなら十分か 他のアバよりも狭い ...</a:t>
-            </a:r>
-            <a:endParaRPr lang="en-US" sz="900" dirty="0"/>
-          </a:p>
-        </p:txBody>
-      </p:sp>
-      <p:sp>
-        <p:nvSpPr>
-          <p:cNvPr id="46" name="Text 44"/>
-          <p:cNvSpPr/>
-          <p:nvPr/>
-        </p:nvSpPr>
-        <p:spPr>
-          <a:xfrm>
-            <a:off x="6263640" y="3657600"/>
-            <a:ext cx="2377440" cy="640080"/>
-          </a:xfrm>
-          <a:prstGeom prst="rect">
-            <a:avLst/>
-          </a:prstGeom>
-          <a:noFill/>
-          <a:ln/>
-        </p:spPr>
-        <p:txBody>
-          <a:bodyPr wrap="square" lIns="0" tIns="0" rIns="0" bIns="0" rtlCol="0" anchor="ctr"/>
-          <a:lstStyle/>
-          <a:p>
-            <a:pPr indent="0" marL="0">
-              <a:buNone/>
-            </a:pPr>
-            <a:r>
-              <a:rPr lang="en-US" sz="900" i="1" dirty="0">
-                <a:solidFill>
-                  <a:srgbClr val="3B7DD8"/>
-                </a:solidFill>
-                <a:latin typeface="Arial" pitchFamily="34" charset="0"/>
-                <a:ea typeface="Arial" pitchFamily="34" charset="-122"/>
-                <a:cs typeface="Arial" pitchFamily="34" charset="-120"/>
-              </a:rPr>
-              <a:t>「他のアバよりも狭い 駅からは遠いが、その分比較的安い 羽田空港の乗り継ぎに利用するなら十分か 他のアバよりも狭い ...」</a:t>
+              <a:t>「食事の値段も当日に朝食券を買うと1800円になって結構割高なのですが、クオリティとしては個人的にはお値段に見合った...」</a:t>
             </a:r>
             <a:endParaRPr lang="en-US" sz="900" dirty="0"/>
           </a:p>
@@ -12040,7 +12405,7 @@
                           <a:ea typeface="Arial" pitchFamily="34" charset="-122"/>
                           <a:cs typeface="Arial" pitchFamily="34" charset="-120"/>
                         </a:rPr>
-                        <a:t>3件</a:t>
+                        <a:t>6件</a:t>
                       </a:r>
                       <a:endParaRPr lang="en-US" sz="900" dirty="0">
                         <a:latin typeface="Arial" charset="0"/>
@@ -12314,7 +12679,7 @@
                           <a:ea typeface="Arial" pitchFamily="34" charset="-122"/>
                           <a:cs typeface="Arial" pitchFamily="34" charset="-120"/>
                         </a:rPr>
-                        <a:t>2件</a:t>
+                        <a:t>4件</a:t>
                       </a:r>
                       <a:endParaRPr lang="en-US" sz="900" dirty="0">
                         <a:latin typeface="Arial" charset="0"/>
@@ -12452,7 +12817,7 @@
                           <a:ea typeface="Arial" pitchFamily="34" charset="-122"/>
                           <a:cs typeface="Arial" pitchFamily="34" charset="-120"/>
                         </a:rPr>
-                        <a:t>防音性能</a:t>
+                        <a:t>エアコン・空調</a:t>
                       </a:r>
                       <a:endParaRPr lang="en-US" sz="900" dirty="0">
                         <a:latin typeface="Arial" charset="0"/>
@@ -12520,7 +12885,7 @@
                           <a:ea typeface="Arial" pitchFamily="34" charset="-122"/>
                           <a:cs typeface="Arial" pitchFamily="34" charset="-120"/>
                         </a:rPr>
-                        <a:t>道路沿いだったけど防音がしっかりされていて外の音は聞こえない</a:t>
+                        <a:t>Coming from Keikyu-Kamata there was a shoutengai giving p...</a:t>
                       </a:r>
                       <a:endParaRPr lang="en-US" sz="900" dirty="0">
                         <a:latin typeface="Arial" charset="0"/>
@@ -12588,7 +12953,7 @@
                           <a:ea typeface="Arial" pitchFamily="34" charset="-122"/>
                           <a:cs typeface="Arial" pitchFamily="34" charset="-120"/>
                         </a:rPr>
-                        <a:t>1件</a:t>
+                        <a:t>2件</a:t>
                       </a:r>
                       <a:endParaRPr lang="en-US" sz="900" dirty="0">
                         <a:latin typeface="Arial" charset="0"/>
@@ -12726,7 +13091,7 @@
                           <a:ea typeface="Arial" pitchFamily="34" charset="-122"/>
                           <a:cs typeface="Arial" pitchFamily="34" charset="-120"/>
                         </a:rPr>
-                        <a:t>エアコン・空調</a:t>
+                        <a:t>清掃不備</a:t>
                       </a:r>
                       <a:endParaRPr lang="en-US" sz="900" dirty="0">
                         <a:latin typeface="Arial" charset="0"/>
@@ -12794,7 +13159,7 @@
                           <a:ea typeface="Arial" pitchFamily="34" charset="-122"/>
                           <a:cs typeface="Arial" pitchFamily="34" charset="-120"/>
                         </a:rPr>
-                        <a:t>Coming from Keikyu-Kamata there was a shoutengai giving p...</a:t>
+                        <a:t>そこは汚くて埃っぽく、以前の訪問時の残骸も散乱していた</a:t>
                       </a:r>
                       <a:endParaRPr lang="en-US" sz="900" dirty="0">
                         <a:latin typeface="Arial" charset="0"/>
@@ -12862,7 +13227,7 @@
                           <a:ea typeface="Arial" pitchFamily="34" charset="-122"/>
                           <a:cs typeface="Arial" pitchFamily="34" charset="-120"/>
                         </a:rPr>
-                        <a:t>1件</a:t>
+                        <a:t>2件</a:t>
                       </a:r>
                       <a:endParaRPr lang="en-US" sz="900" dirty="0">
                         <a:latin typeface="Arial" charset="0"/>
@@ -13000,7 +13365,7 @@
                           <a:ea typeface="Arial" pitchFamily="34" charset="-122"/>
                           <a:cs typeface="Arial" pitchFamily="34" charset="-120"/>
                         </a:rPr>
-                        <a:t>対応・サービスの不満</a:t>
+                        <a:t>防音性能</a:t>
                       </a:r>
                       <a:endParaRPr lang="en-US" sz="900" dirty="0">
                         <a:latin typeface="Arial" charset="0"/>
@@ -13068,7 +13433,7 @@
                           <a:ea typeface="Arial" pitchFamily="34" charset="-122"/>
                           <a:cs typeface="Arial" pitchFamily="34" charset="-120"/>
                         </a:rPr>
-                        <a:t>歯ブラシでこすれば、パッと見はもっときれいになりそうなので、ちょっと残念なところ</a:t>
+                        <a:t>道路沿いだったけど防音がしっかりされていて外の音は聞こえない</a:t>
                       </a:r>
                       <a:endParaRPr lang="en-US" sz="900" dirty="0">
                         <a:latin typeface="Arial" charset="0"/>
@@ -13274,7 +13639,7 @@
                           <a:ea typeface="Arial" pitchFamily="34" charset="-122"/>
                           <a:cs typeface="Arial" pitchFamily="34" charset="-120"/>
                         </a:rPr>
-                        <a:t>清掃不備</a:t>
+                        <a:t>臭い・匂い</a:t>
                       </a:r>
                       <a:endParaRPr lang="en-US" sz="900" dirty="0">
                         <a:latin typeface="Arial" charset="0"/>
@@ -13342,7 +13707,7 @@
                           <a:ea typeface="Arial" pitchFamily="34" charset="-122"/>
                           <a:cs typeface="Arial" pitchFamily="34" charset="-120"/>
                         </a:rPr>
-                        <a:t>そこは汚くて埃っぽく、以前の訪問時の残骸も散乱していた</a:t>
+                        <a:t>禁煙の部屋を予約しましたが、かなり強いタバコの匂いがしました</a:t>
                       </a:r>
                       <a:endParaRPr lang="en-US" sz="900" dirty="0">
                         <a:latin typeface="Arial" charset="0"/>
@@ -13462,6 +13827,280 @@
                   </a:tcPr>
                 </a:tc>
               </a:tr>
+              <a:tr h="320040">
+                <a:tc>
+                  <a:txBody>
+                    <a:bodyPr/>
+                    <a:lstStyle/>
+                    <a:p>
+                      <a:pPr algn="ctr" indent="0" marL="0">
+                        <a:buNone/>
+                      </a:pPr>
+                      <a:r>
+                        <a:rPr lang="en-US" sz="1200" b="1" dirty="0">
+                          <a:solidFill>
+                            <a:srgbClr val="94A3B8"/>
+                          </a:solidFill>
+                          <a:latin typeface="Arial" pitchFamily="34" charset="0"/>
+                          <a:ea typeface="Arial" pitchFamily="34" charset="-122"/>
+                          <a:cs typeface="Arial" pitchFamily="34" charset="-120"/>
+                        </a:rPr>
+                        <a:t>C</a:t>
+                      </a:r>
+                      <a:endParaRPr lang="en-US" sz="1200" dirty="0">
+                        <a:latin typeface="Arial" charset="0"/>
+                        <a:ea typeface="Arial" charset="0"/>
+                        <a:cs typeface="Arial" charset="0"/>
+                      </a:endParaRPr>
+                    </a:p>
+                  </a:txBody>
+                  <a:tcPr marL="91440" marR="91440" marT="45720" marB="45720">
+                    <a:lnL w="6350" cap="flat" cmpd="sng" algn="ctr">
+                      <a:solidFill>
+                        <a:srgbClr val="CBD5E1"/>
+                      </a:solidFill>
+                      <a:prstDash val="solid"/>
+                      <a:round/>
+                      <a:headEnd type="none" w="med" len="med"/>
+                      <a:tailEnd type="none" w="med" len="med"/>
+                    </a:lnL>
+                    <a:lnR w="6350" cap="flat" cmpd="sng" algn="ctr">
+                      <a:solidFill>
+                        <a:srgbClr val="CBD5E1"/>
+                      </a:solidFill>
+                      <a:prstDash val="solid"/>
+                      <a:round/>
+                      <a:headEnd type="none" w="med" len="med"/>
+                      <a:tailEnd type="none" w="med" len="med"/>
+                    </a:lnR>
+                    <a:lnT w="6350" cap="flat" cmpd="sng" algn="ctr">
+                      <a:solidFill>
+                        <a:srgbClr val="CBD5E1"/>
+                      </a:solidFill>
+                      <a:prstDash val="solid"/>
+                      <a:round/>
+                      <a:headEnd type="none" w="med" len="med"/>
+                      <a:tailEnd type="none" w="med" len="med"/>
+                    </a:lnT>
+                    <a:lnB w="6350" cap="flat" cmpd="sng" algn="ctr">
+                      <a:solidFill>
+                        <a:srgbClr val="CBD5E1"/>
+                      </a:solidFill>
+                      <a:prstDash val="solid"/>
+                      <a:round/>
+                      <a:headEnd type="none" w="med" len="med"/>
+                      <a:tailEnd type="none" w="med" len="med"/>
+                    </a:lnB>
+                    <a:solidFill>
+                      <a:srgbClr val="E8EFF8"/>
+                    </a:solidFill>
+                  </a:tcPr>
+                </a:tc>
+                <a:tc>
+                  <a:txBody>
+                    <a:bodyPr/>
+                    <a:lstStyle/>
+                    <a:p>
+                      <a:pPr indent="0" marL="0">
+                        <a:buNone/>
+                      </a:pPr>
+                      <a:r>
+                        <a:rPr lang="en-US" sz="900" b="1" dirty="0">
+                          <a:solidFill>
+                            <a:srgbClr val="334155"/>
+                          </a:solidFill>
+                          <a:latin typeface="Arial" pitchFamily="34" charset="0"/>
+                          <a:ea typeface="Arial" pitchFamily="34" charset="-122"/>
+                          <a:cs typeface="Arial" pitchFamily="34" charset="-120"/>
+                        </a:rPr>
+                        <a:t>対応・サービスの不満</a:t>
+                      </a:r>
+                      <a:endParaRPr lang="en-US" sz="900" dirty="0">
+                        <a:latin typeface="Arial" charset="0"/>
+                        <a:ea typeface="Arial" charset="0"/>
+                        <a:cs typeface="Arial" charset="0"/>
+                      </a:endParaRPr>
+                    </a:p>
+                  </a:txBody>
+                  <a:tcPr marL="91440" marR="91440" marT="45720" marB="45720">
+                    <a:lnL w="6350" cap="flat" cmpd="sng" algn="ctr">
+                      <a:solidFill>
+                        <a:srgbClr val="CBD5E1"/>
+                      </a:solidFill>
+                      <a:prstDash val="solid"/>
+                      <a:round/>
+                      <a:headEnd type="none" w="med" len="med"/>
+                      <a:tailEnd type="none" w="med" len="med"/>
+                    </a:lnL>
+                    <a:lnR w="6350" cap="flat" cmpd="sng" algn="ctr">
+                      <a:solidFill>
+                        <a:srgbClr val="CBD5E1"/>
+                      </a:solidFill>
+                      <a:prstDash val="solid"/>
+                      <a:round/>
+                      <a:headEnd type="none" w="med" len="med"/>
+                      <a:tailEnd type="none" w="med" len="med"/>
+                    </a:lnR>
+                    <a:lnT w="6350" cap="flat" cmpd="sng" algn="ctr">
+                      <a:solidFill>
+                        <a:srgbClr val="CBD5E1"/>
+                      </a:solidFill>
+                      <a:prstDash val="solid"/>
+                      <a:round/>
+                      <a:headEnd type="none" w="med" len="med"/>
+                      <a:tailEnd type="none" w="med" len="med"/>
+                    </a:lnT>
+                    <a:lnB w="6350" cap="flat" cmpd="sng" algn="ctr">
+                      <a:solidFill>
+                        <a:srgbClr val="CBD5E1"/>
+                      </a:solidFill>
+                      <a:prstDash val="solid"/>
+                      <a:round/>
+                      <a:headEnd type="none" w="med" len="med"/>
+                      <a:tailEnd type="none" w="med" len="med"/>
+                    </a:lnB>
+                    <a:solidFill>
+                      <a:srgbClr val="E8EFF8"/>
+                    </a:solidFill>
+                  </a:tcPr>
+                </a:tc>
+                <a:tc>
+                  <a:txBody>
+                    <a:bodyPr/>
+                    <a:lstStyle/>
+                    <a:p>
+                      <a:pPr indent="0" marL="0">
+                        <a:buNone/>
+                      </a:pPr>
+                      <a:r>
+                        <a:rPr lang="en-US" sz="900" dirty="0">
+                          <a:solidFill>
+                            <a:srgbClr val="64748B"/>
+                          </a:solidFill>
+                          <a:latin typeface="Arial" pitchFamily="34" charset="0"/>
+                          <a:ea typeface="Arial" pitchFamily="34" charset="-122"/>
+                          <a:cs typeface="Arial" pitchFamily="34" charset="-120"/>
+                        </a:rPr>
+                        <a:t>歯ブラシでこすれば、パッと見はもっときれいになりそうなので、ちょっと残念なところ</a:t>
+                      </a:r>
+                      <a:endParaRPr lang="en-US" sz="900" dirty="0">
+                        <a:latin typeface="Arial" charset="0"/>
+                        <a:ea typeface="Arial" charset="0"/>
+                        <a:cs typeface="Arial" charset="0"/>
+                      </a:endParaRPr>
+                    </a:p>
+                  </a:txBody>
+                  <a:tcPr marL="91440" marR="91440" marT="45720" marB="45720">
+                    <a:lnL w="6350" cap="flat" cmpd="sng" algn="ctr">
+                      <a:solidFill>
+                        <a:srgbClr val="CBD5E1"/>
+                      </a:solidFill>
+                      <a:prstDash val="solid"/>
+                      <a:round/>
+                      <a:headEnd type="none" w="med" len="med"/>
+                      <a:tailEnd type="none" w="med" len="med"/>
+                    </a:lnL>
+                    <a:lnR w="6350" cap="flat" cmpd="sng" algn="ctr">
+                      <a:solidFill>
+                        <a:srgbClr val="CBD5E1"/>
+                      </a:solidFill>
+                      <a:prstDash val="solid"/>
+                      <a:round/>
+                      <a:headEnd type="none" w="med" len="med"/>
+                      <a:tailEnd type="none" w="med" len="med"/>
+                    </a:lnR>
+                    <a:lnT w="6350" cap="flat" cmpd="sng" algn="ctr">
+                      <a:solidFill>
+                        <a:srgbClr val="CBD5E1"/>
+                      </a:solidFill>
+                      <a:prstDash val="solid"/>
+                      <a:round/>
+                      <a:headEnd type="none" w="med" len="med"/>
+                      <a:tailEnd type="none" w="med" len="med"/>
+                    </a:lnT>
+                    <a:lnB w="6350" cap="flat" cmpd="sng" algn="ctr">
+                      <a:solidFill>
+                        <a:srgbClr val="CBD5E1"/>
+                      </a:solidFill>
+                      <a:prstDash val="solid"/>
+                      <a:round/>
+                      <a:headEnd type="none" w="med" len="med"/>
+                      <a:tailEnd type="none" w="med" len="med"/>
+                    </a:lnB>
+                    <a:solidFill>
+                      <a:srgbClr val="E8EFF8"/>
+                    </a:solidFill>
+                  </a:tcPr>
+                </a:tc>
+                <a:tc>
+                  <a:txBody>
+                    <a:bodyPr/>
+                    <a:lstStyle/>
+                    <a:p>
+                      <a:pPr algn="ctr" indent="0" marL="0">
+                        <a:buNone/>
+                      </a:pPr>
+                      <a:r>
+                        <a:rPr lang="en-US" sz="900" dirty="0">
+                          <a:solidFill>
+                            <a:srgbClr val="334155"/>
+                          </a:solidFill>
+                          <a:latin typeface="Arial" pitchFamily="34" charset="0"/>
+                          <a:ea typeface="Arial" pitchFamily="34" charset="-122"/>
+                          <a:cs typeface="Arial" pitchFamily="34" charset="-120"/>
+                        </a:rPr>
+                        <a:t>1件</a:t>
+                      </a:r>
+                      <a:endParaRPr lang="en-US" sz="900" dirty="0">
+                        <a:latin typeface="Arial" charset="0"/>
+                        <a:ea typeface="Arial" charset="0"/>
+                        <a:cs typeface="Arial" charset="0"/>
+                      </a:endParaRPr>
+                    </a:p>
+                  </a:txBody>
+                  <a:tcPr marL="91440" marR="91440" marT="45720" marB="45720">
+                    <a:lnL w="6350" cap="flat" cmpd="sng" algn="ctr">
+                      <a:solidFill>
+                        <a:srgbClr val="CBD5E1"/>
+                      </a:solidFill>
+                      <a:prstDash val="solid"/>
+                      <a:round/>
+                      <a:headEnd type="none" w="med" len="med"/>
+                      <a:tailEnd type="none" w="med" len="med"/>
+                    </a:lnL>
+                    <a:lnR w="6350" cap="flat" cmpd="sng" algn="ctr">
+                      <a:solidFill>
+                        <a:srgbClr val="CBD5E1"/>
+                      </a:solidFill>
+                      <a:prstDash val="solid"/>
+                      <a:round/>
+                      <a:headEnd type="none" w="med" len="med"/>
+                      <a:tailEnd type="none" w="med" len="med"/>
+                    </a:lnR>
+                    <a:lnT w="6350" cap="flat" cmpd="sng" algn="ctr">
+                      <a:solidFill>
+                        <a:srgbClr val="CBD5E1"/>
+                      </a:solidFill>
+                      <a:prstDash val="solid"/>
+                      <a:round/>
+                      <a:headEnd type="none" w="med" len="med"/>
+                      <a:tailEnd type="none" w="med" len="med"/>
+                    </a:lnT>
+                    <a:lnB w="6350" cap="flat" cmpd="sng" algn="ctr">
+                      <a:solidFill>
+                        <a:srgbClr val="CBD5E1"/>
+                      </a:solidFill>
+                      <a:prstDash val="solid"/>
+                      <a:round/>
+                      <a:headEnd type="none" w="med" len="med"/>
+                      <a:tailEnd type="none" w="med" len="med"/>
+                    </a:lnB>
+                    <a:solidFill>
+                      <a:srgbClr val="E8EFF8"/>
+                    </a:solidFill>
+                  </a:tcPr>
+                </a:tc>
+              </a:tr>
             </a:tbl>
           </a:graphicData>
         </a:graphic>
@@ -13950,6 +14589,177 @@
                 <a:ea typeface="Arial" pitchFamily="34" charset="-122"/>
                 <a:cs typeface="Arial" pitchFamily="34" charset="-120"/>
               </a:rPr>
+              <a:t>客室の消臭対策の強化</a:t>
+            </a:r>
+            <a:endParaRPr lang="en-US" sz="1200" dirty="0"/>
+          </a:p>
+        </p:txBody>
+      </p:sp>
+      <p:sp>
+        <p:nvSpPr>
+          <p:cNvPr id="9" name="Text 7"/>
+          <p:cNvSpPr/>
+          <p:nvPr/>
+        </p:nvSpPr>
+        <p:spPr>
+          <a:xfrm>
+            <a:off x="594360" y="1600200"/>
+            <a:ext cx="3657600" cy="1188720"/>
+          </a:xfrm>
+          <a:prstGeom prst="rect">
+            <a:avLst/>
+          </a:prstGeom>
+          <a:noFill/>
+          <a:ln/>
+        </p:spPr>
+        <p:txBody>
+          <a:bodyPr wrap="square" lIns="0" tIns="0" rIns="0" bIns="0" rtlCol="0" anchor="ctr"/>
+          <a:lstStyle/>
+          <a:p>
+            <a:pPr marL="342900" indent="-342900">
+              <a:spcAft>
+                <a:spcPts val="300"/>
+              </a:spcAft>
+              <a:buSzPct val="100000"/>
+              <a:buChar char="•"/>
+            </a:pPr>
+            <a:r>
+              <a:rPr lang="en-US" sz="900" dirty="0">
+                <a:solidFill>
+                  <a:srgbClr val="334155"/>
+                </a:solidFill>
+                <a:latin typeface="Arial" pitchFamily="34" charset="0"/>
+                <a:ea typeface="Arial" pitchFamily="34" charset="-122"/>
+                <a:cs typeface="Arial" pitchFamily="34" charset="-120"/>
+              </a:rPr>
+              <a:t>チェックアウト後の換気・消臭スプレー処理の徹底</a:t>
+            </a:r>
+            <a:endParaRPr lang="en-US" sz="900" dirty="0"/>
+          </a:p>
+          <a:p>
+            <a:pPr marL="342900" indent="-342900">
+              <a:spcAft>
+                <a:spcPts val="300"/>
+              </a:spcAft>
+              <a:buSzPct val="100000"/>
+              <a:buChar char="•"/>
+            </a:pPr>
+            <a:r>
+              <a:rPr lang="en-US" sz="900" dirty="0">
+                <a:solidFill>
+                  <a:srgbClr val="334155"/>
+                </a:solidFill>
+                <a:latin typeface="Arial" pitchFamily="34" charset="0"/>
+                <a:ea typeface="Arial" pitchFamily="34" charset="-122"/>
+                <a:cs typeface="Arial" pitchFamily="34" charset="-120"/>
+              </a:rPr>
+              <a:t>定期的な脱臭剤の設置と交換フローの確立</a:t>
+            </a:r>
+            <a:endParaRPr lang="en-US" sz="900" dirty="0"/>
+          </a:p>
+          <a:p>
+            <a:pPr marL="342900" indent="-342900">
+              <a:spcAft>
+                <a:spcPts val="300"/>
+              </a:spcAft>
+              <a:buSzPct val="100000"/>
+              <a:buChar char="•"/>
+            </a:pPr>
+            <a:r>
+              <a:rPr lang="en-US" sz="900" dirty="0">
+                <a:solidFill>
+                  <a:srgbClr val="334155"/>
+                </a:solidFill>
+                <a:latin typeface="Arial" pitchFamily="34" charset="0"/>
+                <a:ea typeface="Arial" pitchFamily="34" charset="-122"/>
+                <a:cs typeface="Arial" pitchFamily="34" charset="-120"/>
+              </a:rPr>
+              <a:t>喫煙・臭いに関するクレーム発生時の即座対応マニュアル作成</a:t>
+            </a:r>
+            <a:endParaRPr lang="en-US" sz="900" dirty="0"/>
+          </a:p>
+        </p:txBody>
+      </p:sp>
+      <p:sp>
+        <p:nvSpPr>
+          <p:cNvPr id="10" name="Shape 8"/>
+          <p:cNvSpPr/>
+          <p:nvPr/>
+        </p:nvSpPr>
+        <p:spPr>
+          <a:xfrm>
+            <a:off x="4663440" y="1234440"/>
+            <a:ext cx="3977640" cy="1600200"/>
+          </a:xfrm>
+          <a:prstGeom prst="rect">
+            <a:avLst/>
+          </a:prstGeom>
+          <a:solidFill>
+            <a:srgbClr val="FFFFFF"/>
+          </a:solidFill>
+          <a:ln/>
+          <a:effectLst>
+            <a:outerShdw sx="100000" sy="100000" kx="0" ky="0" algn="bl" rotWithShape="0" blurRad="50800" dist="25400" dir="8100000">
+              <a:srgbClr val="000000">
+                <a:alpha val="10000"/>
+              </a:srgbClr>
+            </a:outerShdw>
+          </a:effectLst>
+        </p:spPr>
+      </p:sp>
+      <p:sp>
+        <p:nvSpPr>
+          <p:cNvPr id="11" name="Shape 9"/>
+          <p:cNvSpPr/>
+          <p:nvPr/>
+        </p:nvSpPr>
+        <p:spPr>
+          <a:xfrm>
+            <a:off x="4663440" y="1234440"/>
+            <a:ext cx="54864" cy="1600200"/>
+          </a:xfrm>
+          <a:prstGeom prst="rect">
+            <a:avLst/>
+          </a:prstGeom>
+          <a:solidFill>
+            <a:srgbClr val="3B7DD8"/>
+          </a:solidFill>
+          <a:ln/>
+        </p:spPr>
+      </p:sp>
+      <p:sp>
+        <p:nvSpPr>
+          <p:cNvPr id="12" name="Text 10"/>
+          <p:cNvSpPr/>
+          <p:nvPr/>
+        </p:nvSpPr>
+        <p:spPr>
+          <a:xfrm>
+            <a:off x="4800600" y="1280160"/>
+            <a:ext cx="3657600" cy="320040"/>
+          </a:xfrm>
+          <a:prstGeom prst="rect">
+            <a:avLst/>
+          </a:prstGeom>
+          <a:noFill/>
+          <a:ln/>
+        </p:spPr>
+        <p:txBody>
+          <a:bodyPr wrap="square" lIns="0" tIns="0" rIns="0" bIns="0" rtlCol="0" anchor="ctr"/>
+          <a:lstStyle/>
+          <a:p>
+            <a:pPr indent="0" marL="0">
+              <a:buNone/>
+            </a:pPr>
+            <a:r>
+              <a:rPr lang="en-US" sz="1200" b="1" dirty="0">
+                <a:solidFill>
+                  <a:srgbClr val="1A2744"/>
+                </a:solidFill>
+                <a:latin typeface="Arial" pitchFamily="34" charset="0"/>
+                <a:ea typeface="Arial" pitchFamily="34" charset="-122"/>
+                <a:cs typeface="Arial" pitchFamily="34" charset="-120"/>
+              </a:rPr>
               <a:t>清掃品質の向上</a:t>
             </a:r>
             <a:endParaRPr lang="en-US" sz="1200" dirty="0"/>
@@ -13958,13 +14768,13 @@
       </p:sp>
       <p:sp>
         <p:nvSpPr>
-          <p:cNvPr id="9" name="Text 7"/>
-          <p:cNvSpPr/>
-          <p:nvPr/>
-        </p:nvSpPr>
-        <p:spPr>
-          <a:xfrm>
-            <a:off x="594360" y="1600200"/>
+          <p:cNvPr id="13" name="Text 11"/>
+          <p:cNvSpPr/>
+          <p:nvPr/>
+        </p:nvSpPr>
+        <p:spPr>
+          <a:xfrm>
+            <a:off x="4800600" y="1600200"/>
             <a:ext cx="3657600" cy="1188720"/>
           </a:xfrm>
           <a:prstGeom prst="rect">
@@ -14043,13 +14853,13 @@
       </p:sp>
       <p:sp>
         <p:nvSpPr>
-          <p:cNvPr id="10" name="Shape 8"/>
-          <p:cNvSpPr/>
-          <p:nvPr/>
-        </p:nvSpPr>
-        <p:spPr>
-          <a:xfrm>
-            <a:off x="4663440" y="1234440"/>
+          <p:cNvPr id="14" name="Shape 12"/>
+          <p:cNvSpPr/>
+          <p:nvPr/>
+        </p:nvSpPr>
+        <p:spPr>
+          <a:xfrm>
+            <a:off x="457200" y="3017520"/>
             <a:ext cx="3977640" cy="1600200"/>
           </a:xfrm>
           <a:prstGeom prst="rect">
@@ -14070,13 +14880,13 @@
       </p:sp>
       <p:sp>
         <p:nvSpPr>
-          <p:cNvPr id="11" name="Shape 9"/>
-          <p:cNvSpPr/>
-          <p:nvPr/>
-        </p:nvSpPr>
-        <p:spPr>
-          <a:xfrm>
-            <a:off x="4663440" y="1234440"/>
+          <p:cNvPr id="15" name="Shape 13"/>
+          <p:cNvSpPr/>
+          <p:nvPr/>
+        </p:nvSpPr>
+        <p:spPr>
+          <a:xfrm>
+            <a:off x="457200" y="3017520"/>
             <a:ext cx="54864" cy="1600200"/>
           </a:xfrm>
           <a:prstGeom prst="rect">
@@ -14090,13 +14900,13 @@
       </p:sp>
       <p:sp>
         <p:nvSpPr>
-          <p:cNvPr id="12" name="Text 10"/>
-          <p:cNvSpPr/>
-          <p:nvPr/>
-        </p:nvSpPr>
-        <p:spPr>
-          <a:xfrm>
-            <a:off x="4800600" y="1280160"/>
+          <p:cNvPr id="16" name="Text 14"/>
+          <p:cNvSpPr/>
+          <p:nvPr/>
+        </p:nvSpPr>
+        <p:spPr>
+          <a:xfrm>
+            <a:off x="594360" y="3063240"/>
             <a:ext cx="3657600" cy="320040"/>
           </a:xfrm>
           <a:prstGeom prst="rect">
@@ -14129,13 +14939,13 @@
       </p:sp>
       <p:sp>
         <p:nvSpPr>
-          <p:cNvPr id="13" name="Text 11"/>
-          <p:cNvSpPr/>
-          <p:nvPr/>
-        </p:nvSpPr>
-        <p:spPr>
-          <a:xfrm>
-            <a:off x="4800600" y="1600200"/>
+          <p:cNvPr id="17" name="Text 15"/>
+          <p:cNvSpPr/>
+          <p:nvPr/>
+        </p:nvSpPr>
+        <p:spPr>
+          <a:xfrm>
+            <a:off x="594360" y="3383280"/>
             <a:ext cx="3657600" cy="1188720"/>
           </a:xfrm>
           <a:prstGeom prst="rect">
@@ -14214,13 +15024,13 @@
       </p:sp>
       <p:sp>
         <p:nvSpPr>
-          <p:cNvPr id="14" name="Shape 12"/>
-          <p:cNvSpPr/>
-          <p:nvPr/>
-        </p:nvSpPr>
-        <p:spPr>
-          <a:xfrm>
-            <a:off x="457200" y="3017520"/>
+          <p:cNvPr id="18" name="Shape 16"/>
+          <p:cNvSpPr/>
+          <p:nvPr/>
+        </p:nvSpPr>
+        <p:spPr>
+          <a:xfrm>
+            <a:off x="4663440" y="3017520"/>
             <a:ext cx="3977640" cy="1600200"/>
           </a:xfrm>
           <a:prstGeom prst="rect">
@@ -14241,13 +15051,13 @@
       </p:sp>
       <p:sp>
         <p:nvSpPr>
-          <p:cNvPr id="15" name="Shape 13"/>
-          <p:cNvSpPr/>
-          <p:nvPr/>
-        </p:nvSpPr>
-        <p:spPr>
-          <a:xfrm>
-            <a:off x="457200" y="3017520"/>
+          <p:cNvPr id="19" name="Shape 17"/>
+          <p:cNvSpPr/>
+          <p:nvPr/>
+        </p:nvSpPr>
+        <p:spPr>
+          <a:xfrm>
+            <a:off x="4663440" y="3017520"/>
             <a:ext cx="54864" cy="1600200"/>
           </a:xfrm>
           <a:prstGeom prst="rect">
@@ -14261,13 +15071,13 @@
       </p:sp>
       <p:sp>
         <p:nvSpPr>
-          <p:cNvPr id="16" name="Text 14"/>
-          <p:cNvSpPr/>
-          <p:nvPr/>
-        </p:nvSpPr>
-        <p:spPr>
-          <a:xfrm>
-            <a:off x="594360" y="3063240"/>
+          <p:cNvPr id="20" name="Text 18"/>
+          <p:cNvSpPr/>
+          <p:nvPr/>
+        </p:nvSpPr>
+        <p:spPr>
+          <a:xfrm>
+            <a:off x="4800600" y="3063240"/>
             <a:ext cx="3657600" cy="320040"/>
           </a:xfrm>
           <a:prstGeom prst="rect">
@@ -14300,13 +15110,13 @@
       </p:sp>
       <p:sp>
         <p:nvSpPr>
-          <p:cNvPr id="17" name="Text 15"/>
-          <p:cNvSpPr/>
-          <p:nvPr/>
-        </p:nvSpPr>
-        <p:spPr>
-          <a:xfrm>
-            <a:off x="594360" y="3383280"/>
+          <p:cNvPr id="21" name="Text 19"/>
+          <p:cNvSpPr/>
+          <p:nvPr/>
+        </p:nvSpPr>
+        <p:spPr>
+          <a:xfrm>
+            <a:off x="4800600" y="3383280"/>
             <a:ext cx="3657600" cy="1188720"/>
           </a:xfrm>
           <a:prstGeom prst="rect">
@@ -14385,7 +15195,7 @@
       </p:sp>
       <p:sp>
         <p:nvSpPr>
-          <p:cNvPr id="18" name="Shape 16"/>
+          <p:cNvPr id="22" name="Shape 20"/>
           <p:cNvSpPr/>
           <p:nvPr/>
         </p:nvSpPr>
@@ -14405,7 +15215,7 @@
       </p:sp>
       <p:sp>
         <p:nvSpPr>
-          <p:cNvPr id="19" name="Text 17"/>
+          <p:cNvPr id="23" name="Text 21"/>
           <p:cNvSpPr/>
           <p:nvPr/>
         </p:nvSpPr>
@@ -14444,7 +15254,7 @@
       </p:sp>
       <p:sp>
         <p:nvSpPr>
-          <p:cNvPr id="20" name="Text 18"/>
+          <p:cNvPr id="24" name="Text 22"/>
           <p:cNvSpPr/>
           <p:nvPr/>
         </p:nvSpPr>

--- a/納品レポート/ホテル別レポート/apa_kamata_口コミ分析レポート.pptx
+++ b/納品レポート/ホテル別レポート/apa_kamata_口コミ分析レポート.pptx
@@ -2812,7 +2812,7 @@
                 <a:ea typeface="Arial" pitchFamily="34" charset="-122"/>
                 <a:cs typeface="Arial" pitchFamily="34" charset="-120"/>
               </a:rPr>
-              <a:t>作成日：2026年4月6日</a:t>
+              <a:t>作成日：2026年4月7日</a:t>
             </a:r>
             <a:endParaRPr lang="en-US" sz="1000" dirty="0"/>
           </a:p>

--- a/納品レポート/ホテル別レポート/apa_kamata_口コミ分析レポート.pptx
+++ b/納品レポート/ホテル別レポート/apa_kamata_口コミ分析レポート.pptx
@@ -2812,7 +2812,7 @@
                 <a:ea typeface="Arial" pitchFamily="34" charset="-122"/>
                 <a:cs typeface="Arial" pitchFamily="34" charset="-120"/>
               </a:rPr>
-              <a:t>作成日：2026年4月7日</a:t>
+              <a:t>作成日：2026年4月8日</a:t>
             </a:r>
             <a:endParaRPr lang="en-US" sz="1000" dirty="0"/>
           </a:p>

--- a/納品レポート/ホテル別レポート/apa_kamata_口コミ分析レポート.pptx
+++ b/納品レポート/ホテル別レポート/apa_kamata_口コミ分析レポート.pptx
@@ -2812,7 +2812,7 @@
                 <a:ea typeface="Arial" pitchFamily="34" charset="-122"/>
                 <a:cs typeface="Arial" pitchFamily="34" charset="-120"/>
               </a:rPr>
-              <a:t>作成日：2026年4月10日</a:t>
+              <a:t>作成日：2026年4月11日</a:t>
             </a:r>
             <a:endParaRPr lang="en-US" sz="1000" dirty="0"/>
           </a:p>

--- a/納品レポート/ホテル別レポート/apa_kamata_口コミ分析レポート.pptx
+++ b/納品レポート/ホテル別レポート/apa_kamata_口コミ分析レポート.pptx
@@ -175,23 +175,20 @@
           </c:dLbls>
           <c:cat>
             <c:multiLvlStrRef>
-              <c:f>Sheet1!$A$2:$A$6</c:f>
+              <c:f>Sheet1!$A$2:$A$5</c:f>
               <c:multiLvlStrCache>
-                <c:ptCount val="5"/>
+                <c:ptCount val="4"/>
                 <c:lvl>
                   <c:pt idx="0">
-                    <c:v>Google</c:v>
+                    <c:v>Booking.com</c:v>
                   </c:pt>
                   <c:pt idx="1">
-                    <c:v>Booking.com</c:v>
+                    <c:v>Google</c:v>
                   </c:pt>
                   <c:pt idx="2">
                     <c:v>じゃらん</c:v>
                   </c:pt>
                   <c:pt idx="3">
-                    <c:v>楽天トラベル</c:v>
-                  </c:pt>
-                  <c:pt idx="4">
                     <c:v>Agoda</c:v>
                   </c:pt>
                 </c:lvl>
@@ -200,24 +197,21 @@
           </c:cat>
           <c:val>
             <c:numRef>
-              <c:f>Sheet1!$B$2:$B$6</c:f>
+              <c:f>Sheet1!$B$2:$B$5</c:f>
               <c:numCache>
                 <c:formatCode>General</c:formatCode>
-                <c:ptCount val="5"/>
+                <c:ptCount val="4"/>
                 <c:pt idx="0">
-                  <c:v>7.88</c:v>
+                  <c:v>8</c:v>
                 </c:pt>
                 <c:pt idx="1">
-                  <c:v>7.58</c:v>
+                  <c:v>8</c:v>
                 </c:pt>
                 <c:pt idx="2">
-                  <c:v>7.5</c:v>
+                  <c:v>7.33</c:v>
                 </c:pt>
                 <c:pt idx="3">
-                  <c:v>7</c:v>
-                </c:pt>
-                <c:pt idx="4">
-                  <c:v>6.69</c:v>
+                  <c:v>6.67</c:v>
                 </c:pt>
               </c:numCache>
             </c:numRef>
@@ -560,13 +554,13 @@
               <c:numCache>
                 <c:ptCount val="3"/>
                 <c:pt idx="0">
-                  <c:v>38</c:v>
+                  <c:v>18</c:v>
                 </c:pt>
                 <c:pt idx="1">
-                  <c:v>16</c:v>
+                  <c:v>8</c:v>
                 </c:pt>
                 <c:pt idx="2">
-                  <c:v>6</c:v>
+                  <c:v>2</c:v>
                 </c:pt>
               </c:numCache>
             </c:numRef>
@@ -762,22 +756,11 @@
               <a:effectLst/>
             </c:spPr>
           </c:dPt>
-          <c:dPt>
-            <c:idx val="8"/>
-            <c:invertIfNegative val="0"/>
-            <c:bubble3D val="0"/>
-            <c:spPr>
-              <a:solidFill>
-                <a:srgbClr val="DC2626"/>
-              </a:solidFill>
-              <a:effectLst/>
-            </c:spPr>
-          </c:dPt>
           <c:cat>
             <c:multiLvlStrRef>
-              <c:f>Sheet1!$A$2:$A$10</c:f>
+              <c:f>Sheet1!$A$2:$A$9</c:f>
               <c:multiLvlStrCache>
-                <c:ptCount val="9"/>
+                <c:ptCount val="8"/>
                 <c:lvl>
                   <c:pt idx="0">
                     <c:v>10点</c:v>
@@ -803,44 +786,38 @@
                   <c:pt idx="7">
                     <c:v>3点</c:v>
                   </c:pt>
-                  <c:pt idx="8">
-                    <c:v>2点</c:v>
-                  </c:pt>
                 </c:lvl>
               </c:multiLvlStrCache>
             </c:multiLvlStrRef>
           </c:cat>
           <c:val>
             <c:numRef>
-              <c:f>Sheet1!$B$2:$B$10</c:f>
+              <c:f>Sheet1!$B$2:$B$9</c:f>
               <c:numCache>
                 <c:formatCode>General</c:formatCode>
-                <c:ptCount val="9"/>
+                <c:ptCount val="8"/>
                 <c:pt idx="0">
-                  <c:v>8</c:v>
+                  <c:v>5</c:v>
                 </c:pt>
                 <c:pt idx="1">
-                  <c:v>4</c:v>
+                  <c:v>2</c:v>
                 </c:pt>
                 <c:pt idx="2">
-                  <c:v>26</c:v>
+                  <c:v>11</c:v>
                 </c:pt>
                 <c:pt idx="3">
+                  <c:v>1</c:v>
+                </c:pt>
+                <c:pt idx="4">
                   <c:v>5</c:v>
                 </c:pt>
-                <c:pt idx="4">
-                  <c:v>8</c:v>
-                </c:pt>
                 <c:pt idx="5">
-                  <c:v>3</c:v>
+                  <c:v>2</c:v>
                 </c:pt>
                 <c:pt idx="6">
-                  <c:v>4</c:v>
+                  <c:v>1</c:v>
                 </c:pt>
                 <c:pt idx="7">
-                  <c:v>1</c:v>
-                </c:pt>
-                <c:pt idx="8">
                   <c:v>1</c:v>
                 </c:pt>
               </c:numCache>
@@ -2772,7 +2749,7 @@
                 <a:ea typeface="Arial" pitchFamily="34" charset="-122"/>
                 <a:cs typeface="Arial" pitchFamily="34" charset="-120"/>
               </a:rPr>
-              <a:t>分析対象期間：2026年2月〜3月</a:t>
+              <a:t>分析対象期間：2026年3月</a:t>
             </a:r>
             <a:endParaRPr lang="en-US" sz="1000" dirty="0"/>
           </a:p>
@@ -2792,7 +2769,7 @@
                 <a:ea typeface="Arial" pitchFamily="34" charset="-122"/>
                 <a:cs typeface="Arial" pitchFamily="34" charset="-120"/>
               </a:rPr>
-              <a:t>レビュー総数：60件（5サイト）</a:t>
+              <a:t>レビュー総数：28件（4サイト）</a:t>
             </a:r>
             <a:endParaRPr lang="en-US" sz="1000" dirty="0"/>
           </a:p>
@@ -2812,7 +2789,7 @@
                 <a:ea typeface="Arial" pitchFamily="34" charset="-122"/>
                 <a:cs typeface="Arial" pitchFamily="34" charset="-120"/>
               </a:rPr>
-              <a:t>作成日：2026年4月11日</a:t>
+              <a:t>作成日：2026年4月13日</a:t>
             </a:r>
             <a:endParaRPr lang="en-US" sz="1000" dirty="0"/>
           </a:p>
@@ -3358,7 +3335,7 @@
                           <a:ea typeface="Arial" pitchFamily="34" charset="-122"/>
                           <a:cs typeface="Arial" pitchFamily="34" charset="-120"/>
                         </a:rPr>
-                        <a:t>7.38点</a:t>
+                        <a:t>7.50点</a:t>
                       </a:r>
                       <a:endParaRPr lang="en-US" sz="1000" dirty="0">
                         <a:latin typeface="Arial" charset="0"/>
@@ -3426,7 +3403,7 @@
                           <a:ea typeface="Arial" pitchFamily="34" charset="-122"/>
                           <a:cs typeface="Arial" pitchFamily="34" charset="-120"/>
                         </a:rPr>
-                        <a:t>7.9点以上</a:t>
+                        <a:t>8.0点以上</a:t>
                       </a:r>
                       <a:endParaRPr lang="en-US" sz="1000" dirty="0">
                         <a:latin typeface="Arial" charset="0"/>
@@ -3632,7 +3609,7 @@
                           <a:ea typeface="Arial" pitchFamily="34" charset="-122"/>
                           <a:cs typeface="Arial" pitchFamily="34" charset="-120"/>
                         </a:rPr>
-                        <a:t>63.3%</a:t>
+                        <a:t>64.3%</a:t>
                       </a:r>
                       <a:endParaRPr lang="en-US" sz="1000" dirty="0">
                         <a:latin typeface="Arial" charset="0"/>
@@ -3700,7 +3677,7 @@
                           <a:ea typeface="Arial" pitchFamily="34" charset="-122"/>
                           <a:cs typeface="Arial" pitchFamily="34" charset="-120"/>
                         </a:rPr>
-                        <a:t>73%以上</a:t>
+                        <a:t>74%以上</a:t>
                       </a:r>
                       <a:endParaRPr lang="en-US" sz="1000" dirty="0">
                         <a:latin typeface="Arial" charset="0"/>
@@ -3906,7 +3883,7 @@
                           <a:ea typeface="Arial" pitchFamily="34" charset="-122"/>
                           <a:cs typeface="Arial" pitchFamily="34" charset="-120"/>
                         </a:rPr>
-                        <a:t>10.0%</a:t>
+                        <a:t>7.1%</a:t>
                       </a:r>
                       <a:endParaRPr lang="en-US" sz="1000" dirty="0">
                         <a:latin typeface="Arial" charset="0"/>
@@ -3974,7 +3951,7 @@
                           <a:ea typeface="Arial" pitchFamily="34" charset="-122"/>
                           <a:cs typeface="Arial" pitchFamily="34" charset="-120"/>
                         </a:rPr>
-                        <a:t>7%以下</a:t>
+                        <a:t>4%以下</a:t>
                       </a:r>
                       <a:endParaRPr lang="en-US" sz="1000" dirty="0">
                         <a:latin typeface="Arial" charset="0"/>
@@ -4728,7 +4705,7 @@
                           <a:ea typeface="Arial" pitchFamily="34" charset="-122"/>
                           <a:cs typeface="Arial" pitchFamily="34" charset="-120"/>
                         </a:rPr>
-                        <a:t>約6件/期間</a:t>
+                        <a:t>約3件/期間</a:t>
                       </a:r>
                       <a:endParaRPr lang="en-US" sz="1000" dirty="0">
                         <a:latin typeface="Arial" charset="0"/>
@@ -4796,7 +4773,7 @@
                           <a:ea typeface="Arial" pitchFamily="34" charset="-122"/>
                           <a:cs typeface="Arial" pitchFamily="34" charset="-120"/>
                         </a:rPr>
-                        <a:t>3件以下</a:t>
+                        <a:t>1件以下</a:t>
                       </a:r>
                       <a:endParaRPr lang="en-US" sz="1000" dirty="0">
                         <a:latin typeface="Arial" charset="0"/>
@@ -5367,7 +5344,7 @@
                 <a:ea typeface="Arial" pitchFamily="34" charset="-122"/>
                 <a:cs typeface="Arial" pitchFamily="34" charset="-120"/>
               </a:rPr>
-              <a:t>7.38</a:t>
+              <a:t>7.50</a:t>
             </a:r>
             <a:endParaRPr lang="en-US" sz="3200" dirty="0"/>
           </a:p>
@@ -5492,7 +5469,7 @@
                 <a:ea typeface="Arial" pitchFamily="34" charset="-122"/>
                 <a:cs typeface="Arial" pitchFamily="34" charset="-120"/>
               </a:rPr>
-              <a:t>63.3%</a:t>
+              <a:t>64.3%</a:t>
             </a:r>
             <a:endParaRPr lang="en-US" sz="3200" dirty="0"/>
           </a:p>
@@ -5617,7 +5594,7 @@
                 <a:ea typeface="Arial" pitchFamily="34" charset="-122"/>
                 <a:cs typeface="Arial" pitchFamily="34" charset="-120"/>
               </a:rPr>
-              <a:t>10.0%</a:t>
+              <a:t>7.1%</a:t>
             </a:r>
             <a:endParaRPr lang="en-US" sz="3200" dirty="0"/>
           </a:p>
@@ -5742,7 +5719,7 @@
                 <a:ea typeface="Arial" pitchFamily="34" charset="-122"/>
                 <a:cs typeface="Arial" pitchFamily="34" charset="-120"/>
               </a:rPr>
-              <a:t>60件</a:t>
+              <a:t>28件</a:t>
             </a:r>
             <a:endParaRPr lang="en-US" sz="3200" dirty="0"/>
           </a:p>
@@ -6178,7 +6155,7 @@
                 <a:ea typeface="Arial" pitchFamily="34" charset="-122"/>
                 <a:cs typeface="Arial" pitchFamily="34" charset="-120"/>
               </a:rPr>
-              <a:t>エアコン・空調 </a:t>
+              <a:t>防音性能 </a:t>
             </a:r>
             <a:endParaRPr lang="en-US" sz="1100" dirty="0"/>
           </a:p>
@@ -6198,7 +6175,7 @@
                 <a:ea typeface="Arial" pitchFamily="34" charset="-122"/>
                 <a:cs typeface="Arial" pitchFamily="34" charset="-120"/>
               </a:rPr>
-              <a:t>  Coming from Keikyu-Kamata there was a shoutengai giving p...</a:t>
+              <a:t>  道路沿いだったけど防音がしっかりされていて外の音は聞こえない</a:t>
             </a:r>
             <a:endParaRPr lang="en-US" sz="1100" dirty="0"/>
           </a:p>
@@ -6551,7 +6528,7 @@
                 <a:ea typeface="Arial" pitchFamily="34" charset="-122"/>
                 <a:cs typeface="Arial" pitchFamily="34" charset="-120"/>
               </a:rPr>
-              <a:t>7.38</a:t>
+              <a:t>7.50</a:t>
             </a:r>
             <a:endParaRPr lang="en-US" sz="3200" dirty="0"/>
           </a:p>
@@ -6676,7 +6653,7 @@
                 <a:ea typeface="Arial" pitchFamily="34" charset="-122"/>
                 <a:cs typeface="Arial" pitchFamily="34" charset="-120"/>
               </a:rPr>
-              <a:t>63.3%</a:t>
+              <a:t>64.3%</a:t>
             </a:r>
             <a:endParaRPr lang="en-US" sz="3200" dirty="0"/>
           </a:p>
@@ -6801,7 +6778,7 @@
                 <a:ea typeface="Arial" pitchFamily="34" charset="-122"/>
                 <a:cs typeface="Arial" pitchFamily="34" charset="-120"/>
               </a:rPr>
-              <a:t>10.0%</a:t>
+              <a:t>7.1%</a:t>
             </a:r>
             <a:endParaRPr lang="en-US" sz="3200" dirty="0"/>
           </a:p>
@@ -6926,7 +6903,7 @@
                 <a:ea typeface="Arial" pitchFamily="34" charset="-122"/>
                 <a:cs typeface="Arial" pitchFamily="34" charset="-120"/>
               </a:rPr>
-              <a:t>60件</a:t>
+              <a:t>28件</a:t>
             </a:r>
             <a:endParaRPr lang="en-US" sz="3200" dirty="0"/>
           </a:p>
@@ -7347,7 +7324,7 @@
                 <a:ea typeface="Arial" pitchFamily="34" charset="-122"/>
                 <a:cs typeface="Arial" pitchFamily="34" charset="-120"/>
               </a:rPr>
-              <a:t>Google(7.88)が最高スコア。</a:t>
+              <a:t>Google(8.00)が最高スコア。</a:t>
             </a:r>
             <a:endParaRPr lang="en-US" sz="1100" dirty="0"/>
           </a:p>
@@ -7837,7 +7814,7 @@
                           <a:ea typeface="Arial" pitchFamily="34" charset="-122"/>
                           <a:cs typeface="Arial" pitchFamily="34" charset="-120"/>
                         </a:rPr>
-                        <a:t>Google</a:t>
+                        <a:t>Booking.com</a:t>
                       </a:r>
                       <a:endParaRPr lang="en-US" sz="900" dirty="0">
                         <a:latin typeface="Arial" charset="0"/>
@@ -7905,7 +7882,7 @@
                           <a:ea typeface="Arial" pitchFamily="34" charset="-122"/>
                           <a:cs typeface="Arial" pitchFamily="34" charset="-120"/>
                         </a:rPr>
-                        <a:t>17</a:t>
+                        <a:t>10</a:t>
                       </a:r>
                       <a:endParaRPr lang="en-US" sz="900" dirty="0">
                         <a:latin typeface="Arial" charset="0"/>
@@ -7973,7 +7950,7 @@
                           <a:ea typeface="Arial" pitchFamily="34" charset="-122"/>
                           <a:cs typeface="Arial" pitchFamily="34" charset="-120"/>
                         </a:rPr>
-                        <a:t>3.94</a:t>
+                        <a:t>8</a:t>
                       </a:r>
                       <a:endParaRPr lang="en-US" sz="900" dirty="0">
                         <a:latin typeface="Arial" charset="0"/>
@@ -8021,6 +7998,348 @@
                     </a:lnB>
                     <a:solidFill>
                       <a:srgbClr val="E8EFF8"/>
+                    </a:solidFill>
+                  </a:tcPr>
+                </a:tc>
+                <a:tc>
+                  <a:txBody>
+                    <a:bodyPr/>
+                    <a:lstStyle/>
+                    <a:p>
+                      <a:pPr algn="ctr" indent="0" marL="0">
+                        <a:buNone/>
+                      </a:pPr>
+                      <a:r>
+                        <a:rPr lang="en-US" sz="900" dirty="0">
+                          <a:solidFill>
+                            <a:srgbClr val="000000"/>
+                          </a:solidFill>
+                          <a:latin typeface="Arial" pitchFamily="34" charset="0"/>
+                          <a:ea typeface="Arial" pitchFamily="34" charset="-122"/>
+                          <a:cs typeface="Arial" pitchFamily="34" charset="-120"/>
+                        </a:rPr>
+                        <a:t>/10</a:t>
+                      </a:r>
+                      <a:endParaRPr lang="en-US" sz="900" dirty="0">
+                        <a:latin typeface="Arial" charset="0"/>
+                        <a:ea typeface="Arial" charset="0"/>
+                        <a:cs typeface="Arial" charset="0"/>
+                      </a:endParaRPr>
+                    </a:p>
+                  </a:txBody>
+                  <a:tcPr marL="91440" marR="91440" marT="45720" marB="45720">
+                    <a:lnL w="6350" cap="flat" cmpd="sng" algn="ctr">
+                      <a:solidFill>
+                        <a:srgbClr val="CBD5E1"/>
+                      </a:solidFill>
+                      <a:prstDash val="solid"/>
+                      <a:round/>
+                      <a:headEnd type="none" w="med" len="med"/>
+                      <a:tailEnd type="none" w="med" len="med"/>
+                    </a:lnL>
+                    <a:lnR w="6350" cap="flat" cmpd="sng" algn="ctr">
+                      <a:solidFill>
+                        <a:srgbClr val="CBD5E1"/>
+                      </a:solidFill>
+                      <a:prstDash val="solid"/>
+                      <a:round/>
+                      <a:headEnd type="none" w="med" len="med"/>
+                      <a:tailEnd type="none" w="med" len="med"/>
+                    </a:lnR>
+                    <a:lnT w="6350" cap="flat" cmpd="sng" algn="ctr">
+                      <a:solidFill>
+                        <a:srgbClr val="CBD5E1"/>
+                      </a:solidFill>
+                      <a:prstDash val="solid"/>
+                      <a:round/>
+                      <a:headEnd type="none" w="med" len="med"/>
+                      <a:tailEnd type="none" w="med" len="med"/>
+                    </a:lnT>
+                    <a:lnB w="6350" cap="flat" cmpd="sng" algn="ctr">
+                      <a:solidFill>
+                        <a:srgbClr val="CBD5E1"/>
+                      </a:solidFill>
+                      <a:prstDash val="solid"/>
+                      <a:round/>
+                      <a:headEnd type="none" w="med" len="med"/>
+                      <a:tailEnd type="none" w="med" len="med"/>
+                    </a:lnB>
+                    <a:solidFill>
+                      <a:srgbClr val="E8EFF8"/>
+                    </a:solidFill>
+                  </a:tcPr>
+                </a:tc>
+                <a:tc>
+                  <a:txBody>
+                    <a:bodyPr/>
+                    <a:lstStyle/>
+                    <a:p>
+                      <a:pPr algn="ctr" indent="0" marL="0">
+                        <a:buNone/>
+                      </a:pPr>
+                      <a:r>
+                        <a:rPr lang="en-US" sz="900" dirty="0">
+                          <a:solidFill>
+                            <a:srgbClr val="000000"/>
+                          </a:solidFill>
+                          <a:latin typeface="Arial" pitchFamily="34" charset="0"/>
+                          <a:ea typeface="Arial" pitchFamily="34" charset="-122"/>
+                          <a:cs typeface="Arial" pitchFamily="34" charset="-120"/>
+                        </a:rPr>
+                        <a:t>8</a:t>
+                      </a:r>
+                      <a:endParaRPr lang="en-US" sz="900" dirty="0">
+                        <a:latin typeface="Arial" charset="0"/>
+                        <a:ea typeface="Arial" charset="0"/>
+                        <a:cs typeface="Arial" charset="0"/>
+                      </a:endParaRPr>
+                    </a:p>
+                  </a:txBody>
+                  <a:tcPr marL="91440" marR="91440" marT="45720" marB="45720">
+                    <a:lnL w="6350" cap="flat" cmpd="sng" algn="ctr">
+                      <a:solidFill>
+                        <a:srgbClr val="CBD5E1"/>
+                      </a:solidFill>
+                      <a:prstDash val="solid"/>
+                      <a:round/>
+                      <a:headEnd type="none" w="med" len="med"/>
+                      <a:tailEnd type="none" w="med" len="med"/>
+                    </a:lnL>
+                    <a:lnR w="6350" cap="flat" cmpd="sng" algn="ctr">
+                      <a:solidFill>
+                        <a:srgbClr val="CBD5E1"/>
+                      </a:solidFill>
+                      <a:prstDash val="solid"/>
+                      <a:round/>
+                      <a:headEnd type="none" w="med" len="med"/>
+                      <a:tailEnd type="none" w="med" len="med"/>
+                    </a:lnR>
+                    <a:lnT w="6350" cap="flat" cmpd="sng" algn="ctr">
+                      <a:solidFill>
+                        <a:srgbClr val="CBD5E1"/>
+                      </a:solidFill>
+                      <a:prstDash val="solid"/>
+                      <a:round/>
+                      <a:headEnd type="none" w="med" len="med"/>
+                      <a:tailEnd type="none" w="med" len="med"/>
+                    </a:lnT>
+                    <a:lnB w="6350" cap="flat" cmpd="sng" algn="ctr">
+                      <a:solidFill>
+                        <a:srgbClr val="CBD5E1"/>
+                      </a:solidFill>
+                      <a:prstDash val="solid"/>
+                      <a:round/>
+                      <a:headEnd type="none" w="med" len="med"/>
+                      <a:tailEnd type="none" w="med" len="med"/>
+                    </a:lnB>
+                    <a:solidFill>
+                      <a:srgbClr val="E8EFF8"/>
+                    </a:solidFill>
+                  </a:tcPr>
+                </a:tc>
+              </a:tr>
+              <a:tr h="201168">
+                <a:tc>
+                  <a:txBody>
+                    <a:bodyPr/>
+                    <a:lstStyle/>
+                    <a:p>
+                      <a:pPr algn="ctr" indent="0" marL="0">
+                        <a:buNone/>
+                      </a:pPr>
+                      <a:r>
+                        <a:rPr lang="en-US" sz="900" dirty="0">
+                          <a:solidFill>
+                            <a:srgbClr val="000000"/>
+                          </a:solidFill>
+                          <a:latin typeface="Arial" pitchFamily="34" charset="0"/>
+                          <a:ea typeface="Arial" pitchFamily="34" charset="-122"/>
+                          <a:cs typeface="Arial" pitchFamily="34" charset="-120"/>
+                        </a:rPr>
+                        <a:t>Google</a:t>
+                      </a:r>
+                      <a:endParaRPr lang="en-US" sz="900" dirty="0">
+                        <a:latin typeface="Arial" charset="0"/>
+                        <a:ea typeface="Arial" charset="0"/>
+                        <a:cs typeface="Arial" charset="0"/>
+                      </a:endParaRPr>
+                    </a:p>
+                  </a:txBody>
+                  <a:tcPr marL="91440" marR="91440" marT="45720" marB="45720">
+                    <a:lnL w="6350" cap="flat" cmpd="sng" algn="ctr">
+                      <a:solidFill>
+                        <a:srgbClr val="CBD5E1"/>
+                      </a:solidFill>
+                      <a:prstDash val="solid"/>
+                      <a:round/>
+                      <a:headEnd type="none" w="med" len="med"/>
+                      <a:tailEnd type="none" w="med" len="med"/>
+                    </a:lnL>
+                    <a:lnR w="6350" cap="flat" cmpd="sng" algn="ctr">
+                      <a:solidFill>
+                        <a:srgbClr val="CBD5E1"/>
+                      </a:solidFill>
+                      <a:prstDash val="solid"/>
+                      <a:round/>
+                      <a:headEnd type="none" w="med" len="med"/>
+                      <a:tailEnd type="none" w="med" len="med"/>
+                    </a:lnR>
+                    <a:lnT w="6350" cap="flat" cmpd="sng" algn="ctr">
+                      <a:solidFill>
+                        <a:srgbClr val="CBD5E1"/>
+                      </a:solidFill>
+                      <a:prstDash val="solid"/>
+                      <a:round/>
+                      <a:headEnd type="none" w="med" len="med"/>
+                      <a:tailEnd type="none" w="med" len="med"/>
+                    </a:lnT>
+                    <a:lnB w="6350" cap="flat" cmpd="sng" algn="ctr">
+                      <a:solidFill>
+                        <a:srgbClr val="CBD5E1"/>
+                      </a:solidFill>
+                      <a:prstDash val="solid"/>
+                      <a:round/>
+                      <a:headEnd type="none" w="med" len="med"/>
+                      <a:tailEnd type="none" w="med" len="med"/>
+                    </a:lnB>
+                    <a:solidFill>
+                      <a:srgbClr val="FFFFFF"/>
+                    </a:solidFill>
+                  </a:tcPr>
+                </a:tc>
+                <a:tc>
+                  <a:txBody>
+                    <a:bodyPr/>
+                    <a:lstStyle/>
+                    <a:p>
+                      <a:pPr algn="ctr" indent="0" marL="0">
+                        <a:buNone/>
+                      </a:pPr>
+                      <a:r>
+                        <a:rPr lang="en-US" sz="900" dirty="0">
+                          <a:solidFill>
+                            <a:srgbClr val="000000"/>
+                          </a:solidFill>
+                          <a:latin typeface="Arial" pitchFamily="34" charset="0"/>
+                          <a:ea typeface="Arial" pitchFamily="34" charset="-122"/>
+                          <a:cs typeface="Arial" pitchFamily="34" charset="-120"/>
+                        </a:rPr>
+                        <a:t>6</a:t>
+                      </a:r>
+                      <a:endParaRPr lang="en-US" sz="900" dirty="0">
+                        <a:latin typeface="Arial" charset="0"/>
+                        <a:ea typeface="Arial" charset="0"/>
+                        <a:cs typeface="Arial" charset="0"/>
+                      </a:endParaRPr>
+                    </a:p>
+                  </a:txBody>
+                  <a:tcPr marL="91440" marR="91440" marT="45720" marB="45720">
+                    <a:lnL w="6350" cap="flat" cmpd="sng" algn="ctr">
+                      <a:solidFill>
+                        <a:srgbClr val="CBD5E1"/>
+                      </a:solidFill>
+                      <a:prstDash val="solid"/>
+                      <a:round/>
+                      <a:headEnd type="none" w="med" len="med"/>
+                      <a:tailEnd type="none" w="med" len="med"/>
+                    </a:lnL>
+                    <a:lnR w="6350" cap="flat" cmpd="sng" algn="ctr">
+                      <a:solidFill>
+                        <a:srgbClr val="CBD5E1"/>
+                      </a:solidFill>
+                      <a:prstDash val="solid"/>
+                      <a:round/>
+                      <a:headEnd type="none" w="med" len="med"/>
+                      <a:tailEnd type="none" w="med" len="med"/>
+                    </a:lnR>
+                    <a:lnT w="6350" cap="flat" cmpd="sng" algn="ctr">
+                      <a:solidFill>
+                        <a:srgbClr val="CBD5E1"/>
+                      </a:solidFill>
+                      <a:prstDash val="solid"/>
+                      <a:round/>
+                      <a:headEnd type="none" w="med" len="med"/>
+                      <a:tailEnd type="none" w="med" len="med"/>
+                    </a:lnT>
+                    <a:lnB w="6350" cap="flat" cmpd="sng" algn="ctr">
+                      <a:solidFill>
+                        <a:srgbClr val="CBD5E1"/>
+                      </a:solidFill>
+                      <a:prstDash val="solid"/>
+                      <a:round/>
+                      <a:headEnd type="none" w="med" len="med"/>
+                      <a:tailEnd type="none" w="med" len="med"/>
+                    </a:lnB>
+                    <a:solidFill>
+                      <a:srgbClr val="FFFFFF"/>
+                    </a:solidFill>
+                  </a:tcPr>
+                </a:tc>
+                <a:tc>
+                  <a:txBody>
+                    <a:bodyPr/>
+                    <a:lstStyle/>
+                    <a:p>
+                      <a:pPr algn="ctr" indent="0" marL="0">
+                        <a:buNone/>
+                      </a:pPr>
+                      <a:r>
+                        <a:rPr lang="en-US" sz="900" dirty="0">
+                          <a:solidFill>
+                            <a:srgbClr val="000000"/>
+                          </a:solidFill>
+                          <a:latin typeface="Arial" pitchFamily="34" charset="0"/>
+                          <a:ea typeface="Arial" pitchFamily="34" charset="-122"/>
+                          <a:cs typeface="Arial" pitchFamily="34" charset="-120"/>
+                        </a:rPr>
+                        <a:t>4</a:t>
+                      </a:r>
+                      <a:endParaRPr lang="en-US" sz="900" dirty="0">
+                        <a:latin typeface="Arial" charset="0"/>
+                        <a:ea typeface="Arial" charset="0"/>
+                        <a:cs typeface="Arial" charset="0"/>
+                      </a:endParaRPr>
+                    </a:p>
+                  </a:txBody>
+                  <a:tcPr marL="91440" marR="91440" marT="45720" marB="45720">
+                    <a:lnL w="6350" cap="flat" cmpd="sng" algn="ctr">
+                      <a:solidFill>
+                        <a:srgbClr val="CBD5E1"/>
+                      </a:solidFill>
+                      <a:prstDash val="solid"/>
+                      <a:round/>
+                      <a:headEnd type="none" w="med" len="med"/>
+                      <a:tailEnd type="none" w="med" len="med"/>
+                    </a:lnL>
+                    <a:lnR w="6350" cap="flat" cmpd="sng" algn="ctr">
+                      <a:solidFill>
+                        <a:srgbClr val="CBD5E1"/>
+                      </a:solidFill>
+                      <a:prstDash val="solid"/>
+                      <a:round/>
+                      <a:headEnd type="none" w="med" len="med"/>
+                      <a:tailEnd type="none" w="med" len="med"/>
+                    </a:lnR>
+                    <a:lnT w="6350" cap="flat" cmpd="sng" algn="ctr">
+                      <a:solidFill>
+                        <a:srgbClr val="CBD5E1"/>
+                      </a:solidFill>
+                      <a:prstDash val="solid"/>
+                      <a:round/>
+                      <a:headEnd type="none" w="med" len="med"/>
+                      <a:tailEnd type="none" w="med" len="med"/>
+                    </a:lnT>
+                    <a:lnB w="6350" cap="flat" cmpd="sng" algn="ctr">
+                      <a:solidFill>
+                        <a:srgbClr val="CBD5E1"/>
+                      </a:solidFill>
+                      <a:prstDash val="solid"/>
+                      <a:round/>
+                      <a:headEnd type="none" w="med" len="med"/>
+                      <a:tailEnd type="none" w="med" len="med"/>
+                    </a:lnB>
+                    <a:solidFill>
+                      <a:srgbClr val="FFFFFF"/>
                     </a:solidFill>
                   </a:tcPr>
                 </a:tc>
@@ -8088,144 +8407,6 @@
                       <a:tailEnd type="none" w="med" len="med"/>
                     </a:lnB>
                     <a:solidFill>
-                      <a:srgbClr val="E8EFF8"/>
-                    </a:solidFill>
-                  </a:tcPr>
-                </a:tc>
-                <a:tc>
-                  <a:txBody>
-                    <a:bodyPr/>
-                    <a:lstStyle/>
-                    <a:p>
-                      <a:pPr algn="ctr" indent="0" marL="0">
-                        <a:buNone/>
-                      </a:pPr>
-                      <a:r>
-                        <a:rPr lang="en-US" sz="900" dirty="0">
-                          <a:solidFill>
-                            <a:srgbClr val="000000"/>
-                          </a:solidFill>
-                          <a:latin typeface="Arial" pitchFamily="34" charset="0"/>
-                          <a:ea typeface="Arial" pitchFamily="34" charset="-122"/>
-                          <a:cs typeface="Arial" pitchFamily="34" charset="-120"/>
-                        </a:rPr>
-                        <a:t>7.88</a:t>
-                      </a:r>
-                      <a:endParaRPr lang="en-US" sz="900" dirty="0">
-                        <a:latin typeface="Arial" charset="0"/>
-                        <a:ea typeface="Arial" charset="0"/>
-                        <a:cs typeface="Arial" charset="0"/>
-                      </a:endParaRPr>
-                    </a:p>
-                  </a:txBody>
-                  <a:tcPr marL="91440" marR="91440" marT="45720" marB="45720">
-                    <a:lnL w="6350" cap="flat" cmpd="sng" algn="ctr">
-                      <a:solidFill>
-                        <a:srgbClr val="CBD5E1"/>
-                      </a:solidFill>
-                      <a:prstDash val="solid"/>
-                      <a:round/>
-                      <a:headEnd type="none" w="med" len="med"/>
-                      <a:tailEnd type="none" w="med" len="med"/>
-                    </a:lnL>
-                    <a:lnR w="6350" cap="flat" cmpd="sng" algn="ctr">
-                      <a:solidFill>
-                        <a:srgbClr val="CBD5E1"/>
-                      </a:solidFill>
-                      <a:prstDash val="solid"/>
-                      <a:round/>
-                      <a:headEnd type="none" w="med" len="med"/>
-                      <a:tailEnd type="none" w="med" len="med"/>
-                    </a:lnR>
-                    <a:lnT w="6350" cap="flat" cmpd="sng" algn="ctr">
-                      <a:solidFill>
-                        <a:srgbClr val="CBD5E1"/>
-                      </a:solidFill>
-                      <a:prstDash val="solid"/>
-                      <a:round/>
-                      <a:headEnd type="none" w="med" len="med"/>
-                      <a:tailEnd type="none" w="med" len="med"/>
-                    </a:lnT>
-                    <a:lnB w="6350" cap="flat" cmpd="sng" algn="ctr">
-                      <a:solidFill>
-                        <a:srgbClr val="CBD5E1"/>
-                      </a:solidFill>
-                      <a:prstDash val="solid"/>
-                      <a:round/>
-                      <a:headEnd type="none" w="med" len="med"/>
-                      <a:tailEnd type="none" w="med" len="med"/>
-                    </a:lnB>
-                    <a:solidFill>
-                      <a:srgbClr val="E8EFF8"/>
-                    </a:solidFill>
-                  </a:tcPr>
-                </a:tc>
-              </a:tr>
-              <a:tr h="201168">
-                <a:tc>
-                  <a:txBody>
-                    <a:bodyPr/>
-                    <a:lstStyle/>
-                    <a:p>
-                      <a:pPr algn="ctr" indent="0" marL="0">
-                        <a:buNone/>
-                      </a:pPr>
-                      <a:r>
-                        <a:rPr lang="en-US" sz="900" dirty="0">
-                          <a:solidFill>
-                            <a:srgbClr val="000000"/>
-                          </a:solidFill>
-                          <a:latin typeface="Arial" pitchFamily="34" charset="0"/>
-                          <a:ea typeface="Arial" pitchFamily="34" charset="-122"/>
-                          <a:cs typeface="Arial" pitchFamily="34" charset="-120"/>
-                        </a:rPr>
-                        <a:t>Booking.com</a:t>
-                      </a:r>
-                      <a:endParaRPr lang="en-US" sz="900" dirty="0">
-                        <a:latin typeface="Arial" charset="0"/>
-                        <a:ea typeface="Arial" charset="0"/>
-                        <a:cs typeface="Arial" charset="0"/>
-                      </a:endParaRPr>
-                    </a:p>
-                  </a:txBody>
-                  <a:tcPr marL="91440" marR="91440" marT="45720" marB="45720">
-                    <a:lnL w="6350" cap="flat" cmpd="sng" algn="ctr">
-                      <a:solidFill>
-                        <a:srgbClr val="CBD5E1"/>
-                      </a:solidFill>
-                      <a:prstDash val="solid"/>
-                      <a:round/>
-                      <a:headEnd type="none" w="med" len="med"/>
-                      <a:tailEnd type="none" w="med" len="med"/>
-                    </a:lnL>
-                    <a:lnR w="6350" cap="flat" cmpd="sng" algn="ctr">
-                      <a:solidFill>
-                        <a:srgbClr val="CBD5E1"/>
-                      </a:solidFill>
-                      <a:prstDash val="solid"/>
-                      <a:round/>
-                      <a:headEnd type="none" w="med" len="med"/>
-                      <a:tailEnd type="none" w="med" len="med"/>
-                    </a:lnR>
-                    <a:lnT w="6350" cap="flat" cmpd="sng" algn="ctr">
-                      <a:solidFill>
-                        <a:srgbClr val="CBD5E1"/>
-                      </a:solidFill>
-                      <a:prstDash val="solid"/>
-                      <a:round/>
-                      <a:headEnd type="none" w="med" len="med"/>
-                      <a:tailEnd type="none" w="med" len="med"/>
-                    </a:lnT>
-                    <a:lnB w="6350" cap="flat" cmpd="sng" algn="ctr">
-                      <a:solidFill>
-                        <a:srgbClr val="CBD5E1"/>
-                      </a:solidFill>
-                      <a:prstDash val="solid"/>
-                      <a:round/>
-                      <a:headEnd type="none" w="med" len="med"/>
-                      <a:tailEnd type="none" w="med" len="med"/>
-                    </a:lnB>
-                    <a:solidFill>
                       <a:srgbClr val="FFFFFF"/>
                     </a:solidFill>
                   </a:tcPr>
@@ -8247,211 +8428,7 @@
                           <a:ea typeface="Arial" pitchFamily="34" charset="-122"/>
                           <a:cs typeface="Arial" pitchFamily="34" charset="-120"/>
                         </a:rPr>
-                        <a:t>19</a:t>
-                      </a:r>
-                      <a:endParaRPr lang="en-US" sz="900" dirty="0">
-                        <a:latin typeface="Arial" charset="0"/>
-                        <a:ea typeface="Arial" charset="0"/>
-                        <a:cs typeface="Arial" charset="0"/>
-                      </a:endParaRPr>
-                    </a:p>
-                  </a:txBody>
-                  <a:tcPr marL="91440" marR="91440" marT="45720" marB="45720">
-                    <a:lnL w="6350" cap="flat" cmpd="sng" algn="ctr">
-                      <a:solidFill>
-                        <a:srgbClr val="CBD5E1"/>
-                      </a:solidFill>
-                      <a:prstDash val="solid"/>
-                      <a:round/>
-                      <a:headEnd type="none" w="med" len="med"/>
-                      <a:tailEnd type="none" w="med" len="med"/>
-                    </a:lnL>
-                    <a:lnR w="6350" cap="flat" cmpd="sng" algn="ctr">
-                      <a:solidFill>
-                        <a:srgbClr val="CBD5E1"/>
-                      </a:solidFill>
-                      <a:prstDash val="solid"/>
-                      <a:round/>
-                      <a:headEnd type="none" w="med" len="med"/>
-                      <a:tailEnd type="none" w="med" len="med"/>
-                    </a:lnR>
-                    <a:lnT w="6350" cap="flat" cmpd="sng" algn="ctr">
-                      <a:solidFill>
-                        <a:srgbClr val="CBD5E1"/>
-                      </a:solidFill>
-                      <a:prstDash val="solid"/>
-                      <a:round/>
-                      <a:headEnd type="none" w="med" len="med"/>
-                      <a:tailEnd type="none" w="med" len="med"/>
-                    </a:lnT>
-                    <a:lnB w="6350" cap="flat" cmpd="sng" algn="ctr">
-                      <a:solidFill>
-                        <a:srgbClr val="CBD5E1"/>
-                      </a:solidFill>
-                      <a:prstDash val="solid"/>
-                      <a:round/>
-                      <a:headEnd type="none" w="med" len="med"/>
-                      <a:tailEnd type="none" w="med" len="med"/>
-                    </a:lnB>
-                    <a:solidFill>
-                      <a:srgbClr val="FFFFFF"/>
-                    </a:solidFill>
-                  </a:tcPr>
-                </a:tc>
-                <a:tc>
-                  <a:txBody>
-                    <a:bodyPr/>
-                    <a:lstStyle/>
-                    <a:p>
-                      <a:pPr algn="ctr" indent="0" marL="0">
-                        <a:buNone/>
-                      </a:pPr>
-                      <a:r>
-                        <a:rPr lang="en-US" sz="900" dirty="0">
-                          <a:solidFill>
-                            <a:srgbClr val="000000"/>
-                          </a:solidFill>
-                          <a:latin typeface="Arial" pitchFamily="34" charset="0"/>
-                          <a:ea typeface="Arial" pitchFamily="34" charset="-122"/>
-                          <a:cs typeface="Arial" pitchFamily="34" charset="-120"/>
-                        </a:rPr>
-                        <a:t>7.58</a:t>
-                      </a:r>
-                      <a:endParaRPr lang="en-US" sz="900" dirty="0">
-                        <a:latin typeface="Arial" charset="0"/>
-                        <a:ea typeface="Arial" charset="0"/>
-                        <a:cs typeface="Arial" charset="0"/>
-                      </a:endParaRPr>
-                    </a:p>
-                  </a:txBody>
-                  <a:tcPr marL="91440" marR="91440" marT="45720" marB="45720">
-                    <a:lnL w="6350" cap="flat" cmpd="sng" algn="ctr">
-                      <a:solidFill>
-                        <a:srgbClr val="CBD5E1"/>
-                      </a:solidFill>
-                      <a:prstDash val="solid"/>
-                      <a:round/>
-                      <a:headEnd type="none" w="med" len="med"/>
-                      <a:tailEnd type="none" w="med" len="med"/>
-                    </a:lnL>
-                    <a:lnR w="6350" cap="flat" cmpd="sng" algn="ctr">
-                      <a:solidFill>
-                        <a:srgbClr val="CBD5E1"/>
-                      </a:solidFill>
-                      <a:prstDash val="solid"/>
-                      <a:round/>
-                      <a:headEnd type="none" w="med" len="med"/>
-                      <a:tailEnd type="none" w="med" len="med"/>
-                    </a:lnR>
-                    <a:lnT w="6350" cap="flat" cmpd="sng" algn="ctr">
-                      <a:solidFill>
-                        <a:srgbClr val="CBD5E1"/>
-                      </a:solidFill>
-                      <a:prstDash val="solid"/>
-                      <a:round/>
-                      <a:headEnd type="none" w="med" len="med"/>
-                      <a:tailEnd type="none" w="med" len="med"/>
-                    </a:lnT>
-                    <a:lnB w="6350" cap="flat" cmpd="sng" algn="ctr">
-                      <a:solidFill>
-                        <a:srgbClr val="CBD5E1"/>
-                      </a:solidFill>
-                      <a:prstDash val="solid"/>
-                      <a:round/>
-                      <a:headEnd type="none" w="med" len="med"/>
-                      <a:tailEnd type="none" w="med" len="med"/>
-                    </a:lnB>
-                    <a:solidFill>
-                      <a:srgbClr val="FFFFFF"/>
-                    </a:solidFill>
-                  </a:tcPr>
-                </a:tc>
-                <a:tc>
-                  <a:txBody>
-                    <a:bodyPr/>
-                    <a:lstStyle/>
-                    <a:p>
-                      <a:pPr algn="ctr" indent="0" marL="0">
-                        <a:buNone/>
-                      </a:pPr>
-                      <a:r>
-                        <a:rPr lang="en-US" sz="900" dirty="0">
-                          <a:solidFill>
-                            <a:srgbClr val="000000"/>
-                          </a:solidFill>
-                          <a:latin typeface="Arial" pitchFamily="34" charset="0"/>
-                          <a:ea typeface="Arial" pitchFamily="34" charset="-122"/>
-                          <a:cs typeface="Arial" pitchFamily="34" charset="-120"/>
-                        </a:rPr>
-                        <a:t>/10</a:t>
-                      </a:r>
-                      <a:endParaRPr lang="en-US" sz="900" dirty="0">
-                        <a:latin typeface="Arial" charset="0"/>
-                        <a:ea typeface="Arial" charset="0"/>
-                        <a:cs typeface="Arial" charset="0"/>
-                      </a:endParaRPr>
-                    </a:p>
-                  </a:txBody>
-                  <a:tcPr marL="91440" marR="91440" marT="45720" marB="45720">
-                    <a:lnL w="6350" cap="flat" cmpd="sng" algn="ctr">
-                      <a:solidFill>
-                        <a:srgbClr val="CBD5E1"/>
-                      </a:solidFill>
-                      <a:prstDash val="solid"/>
-                      <a:round/>
-                      <a:headEnd type="none" w="med" len="med"/>
-                      <a:tailEnd type="none" w="med" len="med"/>
-                    </a:lnL>
-                    <a:lnR w="6350" cap="flat" cmpd="sng" algn="ctr">
-                      <a:solidFill>
-                        <a:srgbClr val="CBD5E1"/>
-                      </a:solidFill>
-                      <a:prstDash val="solid"/>
-                      <a:round/>
-                      <a:headEnd type="none" w="med" len="med"/>
-                      <a:tailEnd type="none" w="med" len="med"/>
-                    </a:lnR>
-                    <a:lnT w="6350" cap="flat" cmpd="sng" algn="ctr">
-                      <a:solidFill>
-                        <a:srgbClr val="CBD5E1"/>
-                      </a:solidFill>
-                      <a:prstDash val="solid"/>
-                      <a:round/>
-                      <a:headEnd type="none" w="med" len="med"/>
-                      <a:tailEnd type="none" w="med" len="med"/>
-                    </a:lnT>
-                    <a:lnB w="6350" cap="flat" cmpd="sng" algn="ctr">
-                      <a:solidFill>
-                        <a:srgbClr val="CBD5E1"/>
-                      </a:solidFill>
-                      <a:prstDash val="solid"/>
-                      <a:round/>
-                      <a:headEnd type="none" w="med" len="med"/>
-                      <a:tailEnd type="none" w="med" len="med"/>
-                    </a:lnB>
-                    <a:solidFill>
-                      <a:srgbClr val="FFFFFF"/>
-                    </a:solidFill>
-                  </a:tcPr>
-                </a:tc>
-                <a:tc>
-                  <a:txBody>
-                    <a:bodyPr/>
-                    <a:lstStyle/>
-                    <a:p>
-                      <a:pPr algn="ctr" indent="0" marL="0">
-                        <a:buNone/>
-                      </a:pPr>
-                      <a:r>
-                        <a:rPr lang="en-US" sz="900" dirty="0">
-                          <a:solidFill>
-                            <a:srgbClr val="000000"/>
-                          </a:solidFill>
-                          <a:latin typeface="Arial" pitchFamily="34" charset="0"/>
-                          <a:ea typeface="Arial" pitchFamily="34" charset="-122"/>
-                          <a:cs typeface="Arial" pitchFamily="34" charset="-120"/>
-                        </a:rPr>
-                        <a:t>7.58</a:t>
+                        <a:t>8</a:t>
                       </a:r>
                       <a:endParaRPr lang="en-US" sz="900" dirty="0">
                         <a:latin typeface="Arial" charset="0"/>
@@ -8589,7 +8566,7 @@
                           <a:ea typeface="Arial" pitchFamily="34" charset="-122"/>
                           <a:cs typeface="Arial" pitchFamily="34" charset="-120"/>
                         </a:rPr>
-                        <a:t>4</a:t>
+                        <a:t>3</a:t>
                       </a:r>
                       <a:endParaRPr lang="en-US" sz="900" dirty="0">
                         <a:latin typeface="Arial" charset="0"/>
@@ -8657,7 +8634,7 @@
                           <a:ea typeface="Arial" pitchFamily="34" charset="-122"/>
                           <a:cs typeface="Arial" pitchFamily="34" charset="-120"/>
                         </a:rPr>
-                        <a:t>3.75</a:t>
+                        <a:t>3.67</a:t>
                       </a:r>
                       <a:endParaRPr lang="en-US" sz="900" dirty="0">
                         <a:latin typeface="Arial" charset="0"/>
@@ -8793,7 +8770,7 @@
                           <a:ea typeface="Arial" pitchFamily="34" charset="-122"/>
                           <a:cs typeface="Arial" pitchFamily="34" charset="-120"/>
                         </a:rPr>
-                        <a:t>7.5</a:t>
+                        <a:t>7.33</a:t>
                       </a:r>
                       <a:endParaRPr lang="en-US" sz="900" dirty="0">
                         <a:latin typeface="Arial" charset="0"/>
@@ -8841,348 +8818,6 @@
                     </a:lnB>
                     <a:solidFill>
                       <a:srgbClr val="E8EFF8"/>
-                    </a:solidFill>
-                  </a:tcPr>
-                </a:tc>
-              </a:tr>
-              <a:tr h="201168">
-                <a:tc>
-                  <a:txBody>
-                    <a:bodyPr/>
-                    <a:lstStyle/>
-                    <a:p>
-                      <a:pPr algn="ctr" indent="0" marL="0">
-                        <a:buNone/>
-                      </a:pPr>
-                      <a:r>
-                        <a:rPr lang="en-US" sz="900" dirty="0">
-                          <a:solidFill>
-                            <a:srgbClr val="000000"/>
-                          </a:solidFill>
-                          <a:latin typeface="Arial" pitchFamily="34" charset="0"/>
-                          <a:ea typeface="Arial" pitchFamily="34" charset="-122"/>
-                          <a:cs typeface="Arial" pitchFamily="34" charset="-120"/>
-                        </a:rPr>
-                        <a:t>楽天トラベル</a:t>
-                      </a:r>
-                      <a:endParaRPr lang="en-US" sz="900" dirty="0">
-                        <a:latin typeface="Arial" charset="0"/>
-                        <a:ea typeface="Arial" charset="0"/>
-                        <a:cs typeface="Arial" charset="0"/>
-                      </a:endParaRPr>
-                    </a:p>
-                  </a:txBody>
-                  <a:tcPr marL="91440" marR="91440" marT="45720" marB="45720">
-                    <a:lnL w="6350" cap="flat" cmpd="sng" algn="ctr">
-                      <a:solidFill>
-                        <a:srgbClr val="CBD5E1"/>
-                      </a:solidFill>
-                      <a:prstDash val="solid"/>
-                      <a:round/>
-                      <a:headEnd type="none" w="med" len="med"/>
-                      <a:tailEnd type="none" w="med" len="med"/>
-                    </a:lnL>
-                    <a:lnR w="6350" cap="flat" cmpd="sng" algn="ctr">
-                      <a:solidFill>
-                        <a:srgbClr val="CBD5E1"/>
-                      </a:solidFill>
-                      <a:prstDash val="solid"/>
-                      <a:round/>
-                      <a:headEnd type="none" w="med" len="med"/>
-                      <a:tailEnd type="none" w="med" len="med"/>
-                    </a:lnR>
-                    <a:lnT w="6350" cap="flat" cmpd="sng" algn="ctr">
-                      <a:solidFill>
-                        <a:srgbClr val="CBD5E1"/>
-                      </a:solidFill>
-                      <a:prstDash val="solid"/>
-                      <a:round/>
-                      <a:headEnd type="none" w="med" len="med"/>
-                      <a:tailEnd type="none" w="med" len="med"/>
-                    </a:lnT>
-                    <a:lnB w="6350" cap="flat" cmpd="sng" algn="ctr">
-                      <a:solidFill>
-                        <a:srgbClr val="CBD5E1"/>
-                      </a:solidFill>
-                      <a:prstDash val="solid"/>
-                      <a:round/>
-                      <a:headEnd type="none" w="med" len="med"/>
-                      <a:tailEnd type="none" w="med" len="med"/>
-                    </a:lnB>
-                    <a:solidFill>
-                      <a:srgbClr val="FFFFFF"/>
-                    </a:solidFill>
-                  </a:tcPr>
-                </a:tc>
-                <a:tc>
-                  <a:txBody>
-                    <a:bodyPr/>
-                    <a:lstStyle/>
-                    <a:p>
-                      <a:pPr algn="ctr" indent="0" marL="0">
-                        <a:buNone/>
-                      </a:pPr>
-                      <a:r>
-                        <a:rPr lang="en-US" sz="900" dirty="0">
-                          <a:solidFill>
-                            <a:srgbClr val="000000"/>
-                          </a:solidFill>
-                          <a:latin typeface="Arial" pitchFamily="34" charset="0"/>
-                          <a:ea typeface="Arial" pitchFamily="34" charset="-122"/>
-                          <a:cs typeface="Arial" pitchFamily="34" charset="-120"/>
-                        </a:rPr>
-                        <a:t>4</a:t>
-                      </a:r>
-                      <a:endParaRPr lang="en-US" sz="900" dirty="0">
-                        <a:latin typeface="Arial" charset="0"/>
-                        <a:ea typeface="Arial" charset="0"/>
-                        <a:cs typeface="Arial" charset="0"/>
-                      </a:endParaRPr>
-                    </a:p>
-                  </a:txBody>
-                  <a:tcPr marL="91440" marR="91440" marT="45720" marB="45720">
-                    <a:lnL w="6350" cap="flat" cmpd="sng" algn="ctr">
-                      <a:solidFill>
-                        <a:srgbClr val="CBD5E1"/>
-                      </a:solidFill>
-                      <a:prstDash val="solid"/>
-                      <a:round/>
-                      <a:headEnd type="none" w="med" len="med"/>
-                      <a:tailEnd type="none" w="med" len="med"/>
-                    </a:lnL>
-                    <a:lnR w="6350" cap="flat" cmpd="sng" algn="ctr">
-                      <a:solidFill>
-                        <a:srgbClr val="CBD5E1"/>
-                      </a:solidFill>
-                      <a:prstDash val="solid"/>
-                      <a:round/>
-                      <a:headEnd type="none" w="med" len="med"/>
-                      <a:tailEnd type="none" w="med" len="med"/>
-                    </a:lnR>
-                    <a:lnT w="6350" cap="flat" cmpd="sng" algn="ctr">
-                      <a:solidFill>
-                        <a:srgbClr val="CBD5E1"/>
-                      </a:solidFill>
-                      <a:prstDash val="solid"/>
-                      <a:round/>
-                      <a:headEnd type="none" w="med" len="med"/>
-                      <a:tailEnd type="none" w="med" len="med"/>
-                    </a:lnT>
-                    <a:lnB w="6350" cap="flat" cmpd="sng" algn="ctr">
-                      <a:solidFill>
-                        <a:srgbClr val="CBD5E1"/>
-                      </a:solidFill>
-                      <a:prstDash val="solid"/>
-                      <a:round/>
-                      <a:headEnd type="none" w="med" len="med"/>
-                      <a:tailEnd type="none" w="med" len="med"/>
-                    </a:lnB>
-                    <a:solidFill>
-                      <a:srgbClr val="FFFFFF"/>
-                    </a:solidFill>
-                  </a:tcPr>
-                </a:tc>
-                <a:tc>
-                  <a:txBody>
-                    <a:bodyPr/>
-                    <a:lstStyle/>
-                    <a:p>
-                      <a:pPr algn="ctr" indent="0" marL="0">
-                        <a:buNone/>
-                      </a:pPr>
-                      <a:r>
-                        <a:rPr lang="en-US" sz="900" dirty="0">
-                          <a:solidFill>
-                            <a:srgbClr val="000000"/>
-                          </a:solidFill>
-                          <a:latin typeface="Arial" pitchFamily="34" charset="0"/>
-                          <a:ea typeface="Arial" pitchFamily="34" charset="-122"/>
-                          <a:cs typeface="Arial" pitchFamily="34" charset="-120"/>
-                        </a:rPr>
-                        <a:t>3.5</a:t>
-                      </a:r>
-                      <a:endParaRPr lang="en-US" sz="900" dirty="0">
-                        <a:latin typeface="Arial" charset="0"/>
-                        <a:ea typeface="Arial" charset="0"/>
-                        <a:cs typeface="Arial" charset="0"/>
-                      </a:endParaRPr>
-                    </a:p>
-                  </a:txBody>
-                  <a:tcPr marL="91440" marR="91440" marT="45720" marB="45720">
-                    <a:lnL w="6350" cap="flat" cmpd="sng" algn="ctr">
-                      <a:solidFill>
-                        <a:srgbClr val="CBD5E1"/>
-                      </a:solidFill>
-                      <a:prstDash val="solid"/>
-                      <a:round/>
-                      <a:headEnd type="none" w="med" len="med"/>
-                      <a:tailEnd type="none" w="med" len="med"/>
-                    </a:lnL>
-                    <a:lnR w="6350" cap="flat" cmpd="sng" algn="ctr">
-                      <a:solidFill>
-                        <a:srgbClr val="CBD5E1"/>
-                      </a:solidFill>
-                      <a:prstDash val="solid"/>
-                      <a:round/>
-                      <a:headEnd type="none" w="med" len="med"/>
-                      <a:tailEnd type="none" w="med" len="med"/>
-                    </a:lnR>
-                    <a:lnT w="6350" cap="flat" cmpd="sng" algn="ctr">
-                      <a:solidFill>
-                        <a:srgbClr val="CBD5E1"/>
-                      </a:solidFill>
-                      <a:prstDash val="solid"/>
-                      <a:round/>
-                      <a:headEnd type="none" w="med" len="med"/>
-                      <a:tailEnd type="none" w="med" len="med"/>
-                    </a:lnT>
-                    <a:lnB w="6350" cap="flat" cmpd="sng" algn="ctr">
-                      <a:solidFill>
-                        <a:srgbClr val="CBD5E1"/>
-                      </a:solidFill>
-                      <a:prstDash val="solid"/>
-                      <a:round/>
-                      <a:headEnd type="none" w="med" len="med"/>
-                      <a:tailEnd type="none" w="med" len="med"/>
-                    </a:lnB>
-                    <a:solidFill>
-                      <a:srgbClr val="FFFFFF"/>
-                    </a:solidFill>
-                  </a:tcPr>
-                </a:tc>
-                <a:tc>
-                  <a:txBody>
-                    <a:bodyPr/>
-                    <a:lstStyle/>
-                    <a:p>
-                      <a:pPr algn="ctr" indent="0" marL="0">
-                        <a:buNone/>
-                      </a:pPr>
-                      <a:r>
-                        <a:rPr lang="en-US" sz="900" dirty="0">
-                          <a:solidFill>
-                            <a:srgbClr val="000000"/>
-                          </a:solidFill>
-                          <a:latin typeface="Arial" pitchFamily="34" charset="0"/>
-                          <a:ea typeface="Arial" pitchFamily="34" charset="-122"/>
-                          <a:cs typeface="Arial" pitchFamily="34" charset="-120"/>
-                        </a:rPr>
-                        <a:t>/5 (×2)</a:t>
-                      </a:r>
-                      <a:endParaRPr lang="en-US" sz="900" dirty="0">
-                        <a:latin typeface="Arial" charset="0"/>
-                        <a:ea typeface="Arial" charset="0"/>
-                        <a:cs typeface="Arial" charset="0"/>
-                      </a:endParaRPr>
-                    </a:p>
-                  </a:txBody>
-                  <a:tcPr marL="91440" marR="91440" marT="45720" marB="45720">
-                    <a:lnL w="6350" cap="flat" cmpd="sng" algn="ctr">
-                      <a:solidFill>
-                        <a:srgbClr val="CBD5E1"/>
-                      </a:solidFill>
-                      <a:prstDash val="solid"/>
-                      <a:round/>
-                      <a:headEnd type="none" w="med" len="med"/>
-                      <a:tailEnd type="none" w="med" len="med"/>
-                    </a:lnL>
-                    <a:lnR w="6350" cap="flat" cmpd="sng" algn="ctr">
-                      <a:solidFill>
-                        <a:srgbClr val="CBD5E1"/>
-                      </a:solidFill>
-                      <a:prstDash val="solid"/>
-                      <a:round/>
-                      <a:headEnd type="none" w="med" len="med"/>
-                      <a:tailEnd type="none" w="med" len="med"/>
-                    </a:lnR>
-                    <a:lnT w="6350" cap="flat" cmpd="sng" algn="ctr">
-                      <a:solidFill>
-                        <a:srgbClr val="CBD5E1"/>
-                      </a:solidFill>
-                      <a:prstDash val="solid"/>
-                      <a:round/>
-                      <a:headEnd type="none" w="med" len="med"/>
-                      <a:tailEnd type="none" w="med" len="med"/>
-                    </a:lnT>
-                    <a:lnB w="6350" cap="flat" cmpd="sng" algn="ctr">
-                      <a:solidFill>
-                        <a:srgbClr val="CBD5E1"/>
-                      </a:solidFill>
-                      <a:prstDash val="solid"/>
-                      <a:round/>
-                      <a:headEnd type="none" w="med" len="med"/>
-                      <a:tailEnd type="none" w="med" len="med"/>
-                    </a:lnB>
-                    <a:solidFill>
-                      <a:srgbClr val="FFFFFF"/>
-                    </a:solidFill>
-                  </a:tcPr>
-                </a:tc>
-                <a:tc>
-                  <a:txBody>
-                    <a:bodyPr/>
-                    <a:lstStyle/>
-                    <a:p>
-                      <a:pPr algn="ctr" indent="0" marL="0">
-                        <a:buNone/>
-                      </a:pPr>
-                      <a:r>
-                        <a:rPr lang="en-US" sz="900" dirty="0">
-                          <a:solidFill>
-                            <a:srgbClr val="000000"/>
-                          </a:solidFill>
-                          <a:latin typeface="Arial" pitchFamily="34" charset="0"/>
-                          <a:ea typeface="Arial" pitchFamily="34" charset="-122"/>
-                          <a:cs typeface="Arial" pitchFamily="34" charset="-120"/>
-                        </a:rPr>
-                        <a:t>7</a:t>
-                      </a:r>
-                      <a:endParaRPr lang="en-US" sz="900" dirty="0">
-                        <a:latin typeface="Arial" charset="0"/>
-                        <a:ea typeface="Arial" charset="0"/>
-                        <a:cs typeface="Arial" charset="0"/>
-                      </a:endParaRPr>
-                    </a:p>
-                  </a:txBody>
-                  <a:tcPr marL="91440" marR="91440" marT="45720" marB="45720">
-                    <a:lnL w="6350" cap="flat" cmpd="sng" algn="ctr">
-                      <a:solidFill>
-                        <a:srgbClr val="CBD5E1"/>
-                      </a:solidFill>
-                      <a:prstDash val="solid"/>
-                      <a:round/>
-                      <a:headEnd type="none" w="med" len="med"/>
-                      <a:tailEnd type="none" w="med" len="med"/>
-                    </a:lnL>
-                    <a:lnR w="6350" cap="flat" cmpd="sng" algn="ctr">
-                      <a:solidFill>
-                        <a:srgbClr val="CBD5E1"/>
-                      </a:solidFill>
-                      <a:prstDash val="solid"/>
-                      <a:round/>
-                      <a:headEnd type="none" w="med" len="med"/>
-                      <a:tailEnd type="none" w="med" len="med"/>
-                    </a:lnR>
-                    <a:lnT w="6350" cap="flat" cmpd="sng" algn="ctr">
-                      <a:solidFill>
-                        <a:srgbClr val="CBD5E1"/>
-                      </a:solidFill>
-                      <a:prstDash val="solid"/>
-                      <a:round/>
-                      <a:headEnd type="none" w="med" len="med"/>
-                      <a:tailEnd type="none" w="med" len="med"/>
-                    </a:lnT>
-                    <a:lnB w="6350" cap="flat" cmpd="sng" algn="ctr">
-                      <a:solidFill>
-                        <a:srgbClr val="CBD5E1"/>
-                      </a:solidFill>
-                      <a:prstDash val="solid"/>
-                      <a:round/>
-                      <a:headEnd type="none" w="med" len="med"/>
-                      <a:tailEnd type="none" w="med" len="med"/>
-                    </a:lnB>
-                    <a:solidFill>
-                      <a:srgbClr val="FFFFFF"/>
                     </a:solidFill>
                   </a:tcPr>
                 </a:tc>
@@ -9252,7 +8887,7 @@
                       <a:tailEnd type="none" w="med" len="med"/>
                     </a:lnB>
                     <a:solidFill>
-                      <a:srgbClr val="E8EFF8"/>
+                      <a:srgbClr val="FFFFFF"/>
                     </a:solidFill>
                   </a:tcPr>
                 </a:tc>
@@ -9273,7 +8908,7 @@
                           <a:ea typeface="Arial" pitchFamily="34" charset="-122"/>
                           <a:cs typeface="Arial" pitchFamily="34" charset="-120"/>
                         </a:rPr>
-                        <a:t>16</a:t>
+                        <a:t>9</a:t>
                       </a:r>
                       <a:endParaRPr lang="en-US" sz="900" dirty="0">
                         <a:latin typeface="Arial" charset="0"/>
@@ -9320,7 +8955,7 @@
                       <a:tailEnd type="none" w="med" len="med"/>
                     </a:lnB>
                     <a:solidFill>
-                      <a:srgbClr val="E8EFF8"/>
+                      <a:srgbClr val="FFFFFF"/>
                     </a:solidFill>
                   </a:tcPr>
                 </a:tc>
@@ -9341,7 +8976,7 @@
                           <a:ea typeface="Arial" pitchFamily="34" charset="-122"/>
                           <a:cs typeface="Arial" pitchFamily="34" charset="-120"/>
                         </a:rPr>
-                        <a:t>6.69</a:t>
+                        <a:t>6.67</a:t>
                       </a:r>
                       <a:endParaRPr lang="en-US" sz="900" dirty="0">
                         <a:latin typeface="Arial" charset="0"/>
@@ -9388,7 +9023,7 @@
                       <a:tailEnd type="none" w="med" len="med"/>
                     </a:lnB>
                     <a:solidFill>
-                      <a:srgbClr val="E8EFF8"/>
+                      <a:srgbClr val="FFFFFF"/>
                     </a:solidFill>
                   </a:tcPr>
                 </a:tc>
@@ -9456,7 +9091,7 @@
                       <a:tailEnd type="none" w="med" len="med"/>
                     </a:lnB>
                     <a:solidFill>
-                      <a:srgbClr val="E8EFF8"/>
+                      <a:srgbClr val="FFFFFF"/>
                     </a:solidFill>
                   </a:tcPr>
                 </a:tc>
@@ -9477,7 +9112,7 @@
                           <a:ea typeface="Arial" pitchFamily="34" charset="-122"/>
                           <a:cs typeface="Arial" pitchFamily="34" charset="-120"/>
                         </a:rPr>
-                        <a:t>6.69</a:t>
+                        <a:t>6.67</a:t>
                       </a:r>
                       <a:endParaRPr lang="en-US" sz="900" dirty="0">
                         <a:latin typeface="Arial" charset="0"/>
@@ -9524,7 +9159,7 @@
                       <a:tailEnd type="none" w="med" len="med"/>
                     </a:lnB>
                     <a:solidFill>
-                      <a:srgbClr val="E8EFF8"/>
+                      <a:srgbClr val="FFFFFF"/>
                     </a:solidFill>
                   </a:tcPr>
                 </a:tc>
@@ -9885,7 +9520,7 @@
                 <a:ea typeface="Arial" pitchFamily="34" charset="-122"/>
                 <a:cs typeface="Arial" pitchFamily="34" charset="-120"/>
               </a:rPr>
-              <a:t>38件（63.3%）</a:t>
+              <a:t>18件（64.3%）</a:t>
             </a:r>
             <a:endParaRPr lang="en-US" sz="1100" dirty="0"/>
           </a:p>
@@ -9983,7 +9618,7 @@
                 <a:ea typeface="Arial" pitchFamily="34" charset="-122"/>
                 <a:cs typeface="Arial" pitchFamily="34" charset="-120"/>
               </a:rPr>
-              <a:t>16件（26.7%）</a:t>
+              <a:t>8件（28.6%）</a:t>
             </a:r>
             <a:endParaRPr lang="en-US" sz="1100" dirty="0"/>
           </a:p>
@@ -10081,7 +9716,7 @@
                 <a:ea typeface="Arial" pitchFamily="34" charset="-122"/>
                 <a:cs typeface="Arial" pitchFamily="34" charset="-120"/>
               </a:rPr>
-              <a:t>6件（10.0%）</a:t>
+              <a:t>2件（7.1%）</a:t>
             </a:r>
             <a:endParaRPr lang="en-US" sz="1100" dirty="0"/>
           </a:p>
@@ -10638,7 +10273,7 @@
                 <a:ea typeface="Arial" pitchFamily="34" charset="-122"/>
                 <a:cs typeface="Arial" pitchFamily="34" charset="-120"/>
               </a:rPr>
-              <a:t>10件+</a:t>
+              <a:t>8件</a:t>
             </a:r>
             <a:endParaRPr lang="en-US" sz="900" dirty="0"/>
           </a:p>
@@ -10861,7 +10496,7 @@
                 <a:ea typeface="Arial" pitchFamily="34" charset="-122"/>
                 <a:cs typeface="Arial" pitchFamily="34" charset="-120"/>
               </a:rPr>
-              <a:t>10件+</a:t>
+              <a:t>6件</a:t>
             </a:r>
             <a:endParaRPr lang="en-US" sz="900" dirty="0"/>
           </a:p>
@@ -11084,7 +10719,7 @@
                 <a:ea typeface="Arial" pitchFamily="34" charset="-122"/>
                 <a:cs typeface="Arial" pitchFamily="34" charset="-120"/>
               </a:rPr>
-              <a:t>8件</a:t>
+              <a:t>6件</a:t>
             </a:r>
             <a:endParaRPr lang="en-US" sz="900" dirty="0"/>
           </a:p>
@@ -11346,7 +10981,7 @@
                 <a:ea typeface="Arial" pitchFamily="34" charset="-122"/>
                 <a:cs typeface="Arial" pitchFamily="34" charset="-120"/>
               </a:rPr>
-              <a:t>コストパフォーマンス</a:t>
+              <a:t>コンビニ・周辺施設</a:t>
             </a:r>
             <a:endParaRPr lang="en-US" sz="1300" dirty="0"/>
           </a:p>
@@ -11385,7 +11020,7 @@
                 <a:ea typeface="Arial" pitchFamily="34" charset="-122"/>
                 <a:cs typeface="Arial" pitchFamily="34" charset="-120"/>
               </a:rPr>
-              <a:t>他のアバよりも狭い 駅からは遠いが、その分比較的安い 羽田空港の乗り継ぎに利用するなら十分か 他のアバよりも狭い ...</a:t>
+              <a:t>ビュッフェ式の朝食は1日あたり12～16カナダドルも追加料金がかかるので、近くにスーパーやコンビニがあることを考え...</a:t>
             </a:r>
             <a:endParaRPr lang="en-US" sz="900" dirty="0"/>
           </a:p>
@@ -11424,7 +11059,7 @@
                 <a:ea typeface="Arial" pitchFamily="34" charset="-122"/>
                 <a:cs typeface="Arial" pitchFamily="34" charset="-120"/>
               </a:rPr>
-              <a:t>「何と言ってもお値段がお手頃なのでねるだけなら充分です チェックアウトスムーズに出来るのも良い」</a:t>
+              <a:t>「駅近で周りにスーパー、コンビニがあるところ」</a:t>
             </a:r>
             <a:endParaRPr lang="en-US" sz="900" dirty="0"/>
           </a:p>
@@ -11530,7 +11165,7 @@
                 <a:ea typeface="Arial" pitchFamily="34" charset="-122"/>
                 <a:cs typeface="Arial" pitchFamily="34" charset="-120"/>
               </a:rPr>
-              <a:t>2件</a:t>
+              <a:t>1件</a:t>
             </a:r>
             <a:endParaRPr lang="en-US" sz="900" dirty="0"/>
           </a:p>
@@ -11569,7 +11204,7 @@
                 <a:ea typeface="Arial" pitchFamily="34" charset="-122"/>
                 <a:cs typeface="Arial" pitchFamily="34" charset="-120"/>
               </a:rPr>
-              <a:t>朝食</a:t>
+              <a:t>コストパフォーマンス</a:t>
             </a:r>
             <a:endParaRPr lang="en-US" sz="1300" dirty="0"/>
           </a:p>
@@ -11608,7 +11243,7 @@
                 <a:ea typeface="Arial" pitchFamily="34" charset="-122"/>
                 <a:cs typeface="Arial" pitchFamily="34" charset="-120"/>
               </a:rPr>
-              <a:t>ビュッフェ式の朝食は1日あたり12～16カナダドルも追加料金がかかるので、近くにスーパーやコンビニがあることを考え...</a:t>
+              <a:t>他のアバよりも狭い 駅からは遠いが、その分比較的安い 羽田空港の乗り継ぎに利用するなら十分か 他のアバよりも狭い ...</a:t>
             </a:r>
             <a:endParaRPr lang="en-US" sz="900" dirty="0"/>
           </a:p>
@@ -11647,7 +11282,7 @@
                 <a:ea typeface="Arial" pitchFamily="34" charset="-122"/>
                 <a:cs typeface="Arial" pitchFamily="34" charset="-120"/>
               </a:rPr>
-              <a:t>「食事の値段も当日に朝食券を買うと1800円になって結構割高なのですが、クオリティとしては個人的にはお値段に見合った...」</a:t>
+              <a:t>「他のアバよりも狭い 駅からは遠いが、その分比較的安い 羽田空港の乗り継ぎに利用するなら十分か 他のアバよりも狭い ...」</a:t>
             </a:r>
             <a:endParaRPr lang="en-US" sz="900" dirty="0"/>
           </a:p>
@@ -12405,7 +12040,7 @@
                           <a:ea typeface="Arial" pitchFamily="34" charset="-122"/>
                           <a:cs typeface="Arial" pitchFamily="34" charset="-120"/>
                         </a:rPr>
-                        <a:t>6件</a:t>
+                        <a:t>3件</a:t>
                       </a:r>
                       <a:endParaRPr lang="en-US" sz="900" dirty="0">
                         <a:latin typeface="Arial" charset="0"/>
@@ -12679,7 +12314,7 @@
                           <a:ea typeface="Arial" pitchFamily="34" charset="-122"/>
                           <a:cs typeface="Arial" pitchFamily="34" charset="-120"/>
                         </a:rPr>
-                        <a:t>4件</a:t>
+                        <a:t>2件</a:t>
                       </a:r>
                       <a:endParaRPr lang="en-US" sz="900" dirty="0">
                         <a:latin typeface="Arial" charset="0"/>
@@ -12817,7 +12452,7 @@
                           <a:ea typeface="Arial" pitchFamily="34" charset="-122"/>
                           <a:cs typeface="Arial" pitchFamily="34" charset="-120"/>
                         </a:rPr>
-                        <a:t>エアコン・空調</a:t>
+                        <a:t>防音性能</a:t>
                       </a:r>
                       <a:endParaRPr lang="en-US" sz="900" dirty="0">
                         <a:latin typeface="Arial" charset="0"/>
@@ -12885,7 +12520,7 @@
                           <a:ea typeface="Arial" pitchFamily="34" charset="-122"/>
                           <a:cs typeface="Arial" pitchFamily="34" charset="-120"/>
                         </a:rPr>
-                        <a:t>Coming from Keikyu-Kamata there was a shoutengai giving p...</a:t>
+                        <a:t>道路沿いだったけど防音がしっかりされていて外の音は聞こえない</a:t>
                       </a:r>
                       <a:endParaRPr lang="en-US" sz="900" dirty="0">
                         <a:latin typeface="Arial" charset="0"/>
@@ -12953,7 +12588,7 @@
                           <a:ea typeface="Arial" pitchFamily="34" charset="-122"/>
                           <a:cs typeface="Arial" pitchFamily="34" charset="-120"/>
                         </a:rPr>
-                        <a:t>2件</a:t>
+                        <a:t>1件</a:t>
                       </a:r>
                       <a:endParaRPr lang="en-US" sz="900" dirty="0">
                         <a:latin typeface="Arial" charset="0"/>
@@ -13091,7 +12726,7 @@
                           <a:ea typeface="Arial" pitchFamily="34" charset="-122"/>
                           <a:cs typeface="Arial" pitchFamily="34" charset="-120"/>
                         </a:rPr>
-                        <a:t>清掃不備</a:t>
+                        <a:t>エアコン・空調</a:t>
                       </a:r>
                       <a:endParaRPr lang="en-US" sz="900" dirty="0">
                         <a:latin typeface="Arial" charset="0"/>
@@ -13159,7 +12794,7 @@
                           <a:ea typeface="Arial" pitchFamily="34" charset="-122"/>
                           <a:cs typeface="Arial" pitchFamily="34" charset="-120"/>
                         </a:rPr>
-                        <a:t>そこは汚くて埃っぽく、以前の訪問時の残骸も散乱していた</a:t>
+                        <a:t>Coming from Keikyu-Kamata there was a shoutengai giving p...</a:t>
                       </a:r>
                       <a:endParaRPr lang="en-US" sz="900" dirty="0">
                         <a:latin typeface="Arial" charset="0"/>
@@ -13227,7 +12862,7 @@
                           <a:ea typeface="Arial" pitchFamily="34" charset="-122"/>
                           <a:cs typeface="Arial" pitchFamily="34" charset="-120"/>
                         </a:rPr>
-                        <a:t>2件</a:t>
+                        <a:t>1件</a:t>
                       </a:r>
                       <a:endParaRPr lang="en-US" sz="900" dirty="0">
                         <a:latin typeface="Arial" charset="0"/>
@@ -13365,7 +13000,7 @@
                           <a:ea typeface="Arial" pitchFamily="34" charset="-122"/>
                           <a:cs typeface="Arial" pitchFamily="34" charset="-120"/>
                         </a:rPr>
-                        <a:t>防音性能</a:t>
+                        <a:t>対応・サービスの不満</a:t>
                       </a:r>
                       <a:endParaRPr lang="en-US" sz="900" dirty="0">
                         <a:latin typeface="Arial" charset="0"/>
@@ -13433,7 +13068,7 @@
                           <a:ea typeface="Arial" pitchFamily="34" charset="-122"/>
                           <a:cs typeface="Arial" pitchFamily="34" charset="-120"/>
                         </a:rPr>
-                        <a:t>道路沿いだったけど防音がしっかりされていて外の音は聞こえない</a:t>
+                        <a:t>歯ブラシでこすれば、パッと見はもっときれいになりそうなので、ちょっと残念なところ</a:t>
                       </a:r>
                       <a:endParaRPr lang="en-US" sz="900" dirty="0">
                         <a:latin typeface="Arial" charset="0"/>
@@ -13639,7 +13274,7 @@
                           <a:ea typeface="Arial" pitchFamily="34" charset="-122"/>
                           <a:cs typeface="Arial" pitchFamily="34" charset="-120"/>
                         </a:rPr>
-                        <a:t>臭い・匂い</a:t>
+                        <a:t>清掃不備</a:t>
                       </a:r>
                       <a:endParaRPr lang="en-US" sz="900" dirty="0">
                         <a:latin typeface="Arial" charset="0"/>
@@ -13707,7 +13342,7 @@
                           <a:ea typeface="Arial" pitchFamily="34" charset="-122"/>
                           <a:cs typeface="Arial" pitchFamily="34" charset="-120"/>
                         </a:rPr>
-                        <a:t>禁煙の部屋を予約しましたが、かなり強いタバコの匂いがしました</a:t>
+                        <a:t>そこは汚くて埃っぽく、以前の訪問時の残骸も散乱していた</a:t>
                       </a:r>
                       <a:endParaRPr lang="en-US" sz="900" dirty="0">
                         <a:latin typeface="Arial" charset="0"/>
@@ -13827,280 +13462,6 @@
                   </a:tcPr>
                 </a:tc>
               </a:tr>
-              <a:tr h="320040">
-                <a:tc>
-                  <a:txBody>
-                    <a:bodyPr/>
-                    <a:lstStyle/>
-                    <a:p>
-                      <a:pPr algn="ctr" indent="0" marL="0">
-                        <a:buNone/>
-                      </a:pPr>
-                      <a:r>
-                        <a:rPr lang="en-US" sz="1200" b="1" dirty="0">
-                          <a:solidFill>
-                            <a:srgbClr val="94A3B8"/>
-                          </a:solidFill>
-                          <a:latin typeface="Arial" pitchFamily="34" charset="0"/>
-                          <a:ea typeface="Arial" pitchFamily="34" charset="-122"/>
-                          <a:cs typeface="Arial" pitchFamily="34" charset="-120"/>
-                        </a:rPr>
-                        <a:t>C</a:t>
-                      </a:r>
-                      <a:endParaRPr lang="en-US" sz="1200" dirty="0">
-                        <a:latin typeface="Arial" charset="0"/>
-                        <a:ea typeface="Arial" charset="0"/>
-                        <a:cs typeface="Arial" charset="0"/>
-                      </a:endParaRPr>
-                    </a:p>
-                  </a:txBody>
-                  <a:tcPr marL="91440" marR="91440" marT="45720" marB="45720">
-                    <a:lnL w="6350" cap="flat" cmpd="sng" algn="ctr">
-                      <a:solidFill>
-                        <a:srgbClr val="CBD5E1"/>
-                      </a:solidFill>
-                      <a:prstDash val="solid"/>
-                      <a:round/>
-                      <a:headEnd type="none" w="med" len="med"/>
-                      <a:tailEnd type="none" w="med" len="med"/>
-                    </a:lnL>
-                    <a:lnR w="6350" cap="flat" cmpd="sng" algn="ctr">
-                      <a:solidFill>
-                        <a:srgbClr val="CBD5E1"/>
-                      </a:solidFill>
-                      <a:prstDash val="solid"/>
-                      <a:round/>
-                      <a:headEnd type="none" w="med" len="med"/>
-                      <a:tailEnd type="none" w="med" len="med"/>
-                    </a:lnR>
-                    <a:lnT w="6350" cap="flat" cmpd="sng" algn="ctr">
-                      <a:solidFill>
-                        <a:srgbClr val="CBD5E1"/>
-                      </a:solidFill>
-                      <a:prstDash val="solid"/>
-                      <a:round/>
-                      <a:headEnd type="none" w="med" len="med"/>
-                      <a:tailEnd type="none" w="med" len="med"/>
-                    </a:lnT>
-                    <a:lnB w="6350" cap="flat" cmpd="sng" algn="ctr">
-                      <a:solidFill>
-                        <a:srgbClr val="CBD5E1"/>
-                      </a:solidFill>
-                      <a:prstDash val="solid"/>
-                      <a:round/>
-                      <a:headEnd type="none" w="med" len="med"/>
-                      <a:tailEnd type="none" w="med" len="med"/>
-                    </a:lnB>
-                    <a:solidFill>
-                      <a:srgbClr val="E8EFF8"/>
-                    </a:solidFill>
-                  </a:tcPr>
-                </a:tc>
-                <a:tc>
-                  <a:txBody>
-                    <a:bodyPr/>
-                    <a:lstStyle/>
-                    <a:p>
-                      <a:pPr indent="0" marL="0">
-                        <a:buNone/>
-                      </a:pPr>
-                      <a:r>
-                        <a:rPr lang="en-US" sz="900" b="1" dirty="0">
-                          <a:solidFill>
-                            <a:srgbClr val="334155"/>
-                          </a:solidFill>
-                          <a:latin typeface="Arial" pitchFamily="34" charset="0"/>
-                          <a:ea typeface="Arial" pitchFamily="34" charset="-122"/>
-                          <a:cs typeface="Arial" pitchFamily="34" charset="-120"/>
-                        </a:rPr>
-                        <a:t>対応・サービスの不満</a:t>
-                      </a:r>
-                      <a:endParaRPr lang="en-US" sz="900" dirty="0">
-                        <a:latin typeface="Arial" charset="0"/>
-                        <a:ea typeface="Arial" charset="0"/>
-                        <a:cs typeface="Arial" charset="0"/>
-                      </a:endParaRPr>
-                    </a:p>
-                  </a:txBody>
-                  <a:tcPr marL="91440" marR="91440" marT="45720" marB="45720">
-                    <a:lnL w="6350" cap="flat" cmpd="sng" algn="ctr">
-                      <a:solidFill>
-                        <a:srgbClr val="CBD5E1"/>
-                      </a:solidFill>
-                      <a:prstDash val="solid"/>
-                      <a:round/>
-                      <a:headEnd type="none" w="med" len="med"/>
-                      <a:tailEnd type="none" w="med" len="med"/>
-                    </a:lnL>
-                    <a:lnR w="6350" cap="flat" cmpd="sng" algn="ctr">
-                      <a:solidFill>
-                        <a:srgbClr val="CBD5E1"/>
-                      </a:solidFill>
-                      <a:prstDash val="solid"/>
-                      <a:round/>
-                      <a:headEnd type="none" w="med" len="med"/>
-                      <a:tailEnd type="none" w="med" len="med"/>
-                    </a:lnR>
-                    <a:lnT w="6350" cap="flat" cmpd="sng" algn="ctr">
-                      <a:solidFill>
-                        <a:srgbClr val="CBD5E1"/>
-                      </a:solidFill>
-                      <a:prstDash val="solid"/>
-                      <a:round/>
-                      <a:headEnd type="none" w="med" len="med"/>
-                      <a:tailEnd type="none" w="med" len="med"/>
-                    </a:lnT>
-                    <a:lnB w="6350" cap="flat" cmpd="sng" algn="ctr">
-                      <a:solidFill>
-                        <a:srgbClr val="CBD5E1"/>
-                      </a:solidFill>
-                      <a:prstDash val="solid"/>
-                      <a:round/>
-                      <a:headEnd type="none" w="med" len="med"/>
-                      <a:tailEnd type="none" w="med" len="med"/>
-                    </a:lnB>
-                    <a:solidFill>
-                      <a:srgbClr val="E8EFF8"/>
-                    </a:solidFill>
-                  </a:tcPr>
-                </a:tc>
-                <a:tc>
-                  <a:txBody>
-                    <a:bodyPr/>
-                    <a:lstStyle/>
-                    <a:p>
-                      <a:pPr indent="0" marL="0">
-                        <a:buNone/>
-                      </a:pPr>
-                      <a:r>
-                        <a:rPr lang="en-US" sz="900" dirty="0">
-                          <a:solidFill>
-                            <a:srgbClr val="64748B"/>
-                          </a:solidFill>
-                          <a:latin typeface="Arial" pitchFamily="34" charset="0"/>
-                          <a:ea typeface="Arial" pitchFamily="34" charset="-122"/>
-                          <a:cs typeface="Arial" pitchFamily="34" charset="-120"/>
-                        </a:rPr>
-                        <a:t>歯ブラシでこすれば、パッと見はもっときれいになりそうなので、ちょっと残念なところ</a:t>
-                      </a:r>
-                      <a:endParaRPr lang="en-US" sz="900" dirty="0">
-                        <a:latin typeface="Arial" charset="0"/>
-                        <a:ea typeface="Arial" charset="0"/>
-                        <a:cs typeface="Arial" charset="0"/>
-                      </a:endParaRPr>
-                    </a:p>
-                  </a:txBody>
-                  <a:tcPr marL="91440" marR="91440" marT="45720" marB="45720">
-                    <a:lnL w="6350" cap="flat" cmpd="sng" algn="ctr">
-                      <a:solidFill>
-                        <a:srgbClr val="CBD5E1"/>
-                      </a:solidFill>
-                      <a:prstDash val="solid"/>
-                      <a:round/>
-                      <a:headEnd type="none" w="med" len="med"/>
-                      <a:tailEnd type="none" w="med" len="med"/>
-                    </a:lnL>
-                    <a:lnR w="6350" cap="flat" cmpd="sng" algn="ctr">
-                      <a:solidFill>
-                        <a:srgbClr val="CBD5E1"/>
-                      </a:solidFill>
-                      <a:prstDash val="solid"/>
-                      <a:round/>
-                      <a:headEnd type="none" w="med" len="med"/>
-                      <a:tailEnd type="none" w="med" len="med"/>
-                    </a:lnR>
-                    <a:lnT w="6350" cap="flat" cmpd="sng" algn="ctr">
-                      <a:solidFill>
-                        <a:srgbClr val="CBD5E1"/>
-                      </a:solidFill>
-                      <a:prstDash val="solid"/>
-                      <a:round/>
-                      <a:headEnd type="none" w="med" len="med"/>
-                      <a:tailEnd type="none" w="med" len="med"/>
-                    </a:lnT>
-                    <a:lnB w="6350" cap="flat" cmpd="sng" algn="ctr">
-                      <a:solidFill>
-                        <a:srgbClr val="CBD5E1"/>
-                      </a:solidFill>
-                      <a:prstDash val="solid"/>
-                      <a:round/>
-                      <a:headEnd type="none" w="med" len="med"/>
-                      <a:tailEnd type="none" w="med" len="med"/>
-                    </a:lnB>
-                    <a:solidFill>
-                      <a:srgbClr val="E8EFF8"/>
-                    </a:solidFill>
-                  </a:tcPr>
-                </a:tc>
-                <a:tc>
-                  <a:txBody>
-                    <a:bodyPr/>
-                    <a:lstStyle/>
-                    <a:p>
-                      <a:pPr algn="ctr" indent="0" marL="0">
-                        <a:buNone/>
-                      </a:pPr>
-                      <a:r>
-                        <a:rPr lang="en-US" sz="900" dirty="0">
-                          <a:solidFill>
-                            <a:srgbClr val="334155"/>
-                          </a:solidFill>
-                          <a:latin typeface="Arial" pitchFamily="34" charset="0"/>
-                          <a:ea typeface="Arial" pitchFamily="34" charset="-122"/>
-                          <a:cs typeface="Arial" pitchFamily="34" charset="-120"/>
-                        </a:rPr>
-                        <a:t>1件</a:t>
-                      </a:r>
-                      <a:endParaRPr lang="en-US" sz="900" dirty="0">
-                        <a:latin typeface="Arial" charset="0"/>
-                        <a:ea typeface="Arial" charset="0"/>
-                        <a:cs typeface="Arial" charset="0"/>
-                      </a:endParaRPr>
-                    </a:p>
-                  </a:txBody>
-                  <a:tcPr marL="91440" marR="91440" marT="45720" marB="45720">
-                    <a:lnL w="6350" cap="flat" cmpd="sng" algn="ctr">
-                      <a:solidFill>
-                        <a:srgbClr val="CBD5E1"/>
-                      </a:solidFill>
-                      <a:prstDash val="solid"/>
-                      <a:round/>
-                      <a:headEnd type="none" w="med" len="med"/>
-                      <a:tailEnd type="none" w="med" len="med"/>
-                    </a:lnL>
-                    <a:lnR w="6350" cap="flat" cmpd="sng" algn="ctr">
-                      <a:solidFill>
-                        <a:srgbClr val="CBD5E1"/>
-                      </a:solidFill>
-                      <a:prstDash val="solid"/>
-                      <a:round/>
-                      <a:headEnd type="none" w="med" len="med"/>
-                      <a:tailEnd type="none" w="med" len="med"/>
-                    </a:lnR>
-                    <a:lnT w="6350" cap="flat" cmpd="sng" algn="ctr">
-                      <a:solidFill>
-                        <a:srgbClr val="CBD5E1"/>
-                      </a:solidFill>
-                      <a:prstDash val="solid"/>
-                      <a:round/>
-                      <a:headEnd type="none" w="med" len="med"/>
-                      <a:tailEnd type="none" w="med" len="med"/>
-                    </a:lnT>
-                    <a:lnB w="6350" cap="flat" cmpd="sng" algn="ctr">
-                      <a:solidFill>
-                        <a:srgbClr val="CBD5E1"/>
-                      </a:solidFill>
-                      <a:prstDash val="solid"/>
-                      <a:round/>
-                      <a:headEnd type="none" w="med" len="med"/>
-                      <a:tailEnd type="none" w="med" len="med"/>
-                    </a:lnB>
-                    <a:solidFill>
-                      <a:srgbClr val="E8EFF8"/>
-                    </a:solidFill>
-                  </a:tcPr>
-                </a:tc>
-              </a:tr>
             </a:tbl>
           </a:graphicData>
         </a:graphic>
@@ -14589,7 +13950,7 @@
                 <a:ea typeface="Arial" pitchFamily="34" charset="-122"/>
                 <a:cs typeface="Arial" pitchFamily="34" charset="-120"/>
               </a:rPr>
-              <a:t>客室の消臭対策の強化</a:t>
+              <a:t>清掃品質の向上</a:t>
             </a:r>
             <a:endParaRPr lang="en-US" sz="1200" dirty="0"/>
           </a:p>
@@ -14632,7 +13993,7 @@
                 <a:ea typeface="Arial" pitchFamily="34" charset="-122"/>
                 <a:cs typeface="Arial" pitchFamily="34" charset="-120"/>
               </a:rPr>
-              <a:t>チェックアウト後の換気・消臭スプレー処理の徹底</a:t>
+              <a:t>清掃チェックリストの見直しと強化（ベッド下・隅の重点確認）</a:t>
             </a:r>
             <a:endParaRPr lang="en-US" sz="900" dirty="0"/>
           </a:p>
@@ -14653,7 +14014,7 @@
                 <a:ea typeface="Arial" pitchFamily="34" charset="-122"/>
                 <a:cs typeface="Arial" pitchFamily="34" charset="-120"/>
               </a:rPr>
-              <a:t>定期的な脱臭剤の設置と交換フローの確立</a:t>
+              <a:t>清掃後のダブルチェック体制の導入</a:t>
             </a:r>
             <a:endParaRPr lang="en-US" sz="900" dirty="0"/>
           </a:p>
@@ -14674,7 +14035,7 @@
                 <a:ea typeface="Arial" pitchFamily="34" charset="-122"/>
                 <a:cs typeface="Arial" pitchFamily="34" charset="-120"/>
               </a:rPr>
-              <a:t>喫煙・臭いに関するクレーム発生時の即座対応マニュアル作成</a:t>
+              <a:t>清掃スタッフへの再研修実施</a:t>
             </a:r>
             <a:endParaRPr lang="en-US" sz="900" dirty="0"/>
           </a:p>
@@ -14760,7 +14121,7 @@
                 <a:ea typeface="Arial" pitchFamily="34" charset="-122"/>
                 <a:cs typeface="Arial" pitchFamily="34" charset="-120"/>
               </a:rPr>
-              <a:t>清掃品質の向上</a:t>
+              <a:t>エアコン・空調の定期点検強化</a:t>
             </a:r>
             <a:endParaRPr lang="en-US" sz="1200" dirty="0"/>
           </a:p>
@@ -14803,7 +14164,7 @@
                 <a:ea typeface="Arial" pitchFamily="34" charset="-122"/>
                 <a:cs typeface="Arial" pitchFamily="34" charset="-120"/>
               </a:rPr>
-              <a:t>清掃チェックリストの見直しと強化（ベッド下・隅の重点確認）</a:t>
+              <a:t>全室のエアコン設定を季節に応じてデフォルト確認する運用フロー導入</a:t>
             </a:r>
             <a:endParaRPr lang="en-US" sz="900" dirty="0"/>
           </a:p>
@@ -14824,7 +14185,7 @@
                 <a:ea typeface="Arial" pitchFamily="34" charset="-122"/>
                 <a:cs typeface="Arial" pitchFamily="34" charset="-120"/>
               </a:rPr>
-              <a:t>清掃後のダブルチェック体制の導入</a:t>
+              <a:t>冷暖房の正常動作を定期チェックリストに追加</a:t>
             </a:r>
             <a:endParaRPr lang="en-US" sz="900" dirty="0"/>
           </a:p>
@@ -14845,7 +14206,7 @@
                 <a:ea typeface="Arial" pitchFamily="34" charset="-122"/>
                 <a:cs typeface="Arial" pitchFamily="34" charset="-120"/>
               </a:rPr>
-              <a:t>清掃スタッフへの再研修実施</a:t>
+              <a:t>異常報告があった客室の優先メンテナンス実施</a:t>
             </a:r>
             <a:endParaRPr lang="en-US" sz="900" dirty="0"/>
           </a:p>
@@ -14931,7 +14292,7 @@
                 <a:ea typeface="Arial" pitchFamily="34" charset="-122"/>
                 <a:cs typeface="Arial" pitchFamily="34" charset="-120"/>
               </a:rPr>
-              <a:t>エアコン・空調の定期点検強化</a:t>
+              <a:t>スタッフ対応品質の統一</a:t>
             </a:r>
             <a:endParaRPr lang="en-US" sz="1200" dirty="0"/>
           </a:p>
@@ -14974,7 +14335,7 @@
                 <a:ea typeface="Arial" pitchFamily="34" charset="-122"/>
                 <a:cs typeface="Arial" pitchFamily="34" charset="-120"/>
               </a:rPr>
-              <a:t>全室のエアコン設定を季節に応じてデフォルト確認する運用フロー導入</a:t>
+              <a:t>接客マニュアルの見直しと全スタッフへの周知</a:t>
             </a:r>
             <a:endParaRPr lang="en-US" sz="900" dirty="0"/>
           </a:p>
@@ -14995,7 +14356,7 @@
                 <a:ea typeface="Arial" pitchFamily="34" charset="-122"/>
                 <a:cs typeface="Arial" pitchFamily="34" charset="-120"/>
               </a:rPr>
-              <a:t>冷暖房の正常動作を定期チェックリストに追加</a:t>
+              <a:t>ゲストからのクレーム対応フローの明確化</a:t>
             </a:r>
             <a:endParaRPr lang="en-US" sz="900" dirty="0"/>
           </a:p>
@@ -15016,7 +14377,7 @@
                 <a:ea typeface="Arial" pitchFamily="34" charset="-122"/>
                 <a:cs typeface="Arial" pitchFamily="34" charset="-120"/>
               </a:rPr>
-              <a:t>異常報告があった客室の優先メンテナンス実施</a:t>
+              <a:t>定期的なCS研修の実施</a:t>
             </a:r>
             <a:endParaRPr lang="en-US" sz="900" dirty="0"/>
           </a:p>
@@ -15025,177 +14386,6 @@
       <p:sp>
         <p:nvSpPr>
           <p:cNvPr id="18" name="Shape 16"/>
-          <p:cNvSpPr/>
-          <p:nvPr/>
-        </p:nvSpPr>
-        <p:spPr>
-          <a:xfrm>
-            <a:off x="4663440" y="3017520"/>
-            <a:ext cx="3977640" cy="1600200"/>
-          </a:xfrm>
-          <a:prstGeom prst="rect">
-            <a:avLst/>
-          </a:prstGeom>
-          <a:solidFill>
-            <a:srgbClr val="FFFFFF"/>
-          </a:solidFill>
-          <a:ln/>
-          <a:effectLst>
-            <a:outerShdw sx="100000" sy="100000" kx="0" ky="0" algn="bl" rotWithShape="0" blurRad="50800" dist="25400" dir="8100000">
-              <a:srgbClr val="000000">
-                <a:alpha val="10000"/>
-              </a:srgbClr>
-            </a:outerShdw>
-          </a:effectLst>
-        </p:spPr>
-      </p:sp>
-      <p:sp>
-        <p:nvSpPr>
-          <p:cNvPr id="19" name="Shape 17"/>
-          <p:cNvSpPr/>
-          <p:nvPr/>
-        </p:nvSpPr>
-        <p:spPr>
-          <a:xfrm>
-            <a:off x="4663440" y="3017520"/>
-            <a:ext cx="54864" cy="1600200"/>
-          </a:xfrm>
-          <a:prstGeom prst="rect">
-            <a:avLst/>
-          </a:prstGeom>
-          <a:solidFill>
-            <a:srgbClr val="3B7DD8"/>
-          </a:solidFill>
-          <a:ln/>
-        </p:spPr>
-      </p:sp>
-      <p:sp>
-        <p:nvSpPr>
-          <p:cNvPr id="20" name="Text 18"/>
-          <p:cNvSpPr/>
-          <p:nvPr/>
-        </p:nvSpPr>
-        <p:spPr>
-          <a:xfrm>
-            <a:off x="4800600" y="3063240"/>
-            <a:ext cx="3657600" cy="320040"/>
-          </a:xfrm>
-          <a:prstGeom prst="rect">
-            <a:avLst/>
-          </a:prstGeom>
-          <a:noFill/>
-          <a:ln/>
-        </p:spPr>
-        <p:txBody>
-          <a:bodyPr wrap="square" lIns="0" tIns="0" rIns="0" bIns="0" rtlCol="0" anchor="ctr"/>
-          <a:lstStyle/>
-          <a:p>
-            <a:pPr indent="0" marL="0">
-              <a:buNone/>
-            </a:pPr>
-            <a:r>
-              <a:rPr lang="en-US" sz="1200" b="1" dirty="0">
-                <a:solidFill>
-                  <a:srgbClr val="1A2744"/>
-                </a:solidFill>
-                <a:latin typeface="Arial" pitchFamily="34" charset="0"/>
-                <a:ea typeface="Arial" pitchFamily="34" charset="-122"/>
-                <a:cs typeface="Arial" pitchFamily="34" charset="-120"/>
-              </a:rPr>
-              <a:t>スタッフ対応品質の統一</a:t>
-            </a:r>
-            <a:endParaRPr lang="en-US" sz="1200" dirty="0"/>
-          </a:p>
-        </p:txBody>
-      </p:sp>
-      <p:sp>
-        <p:nvSpPr>
-          <p:cNvPr id="21" name="Text 19"/>
-          <p:cNvSpPr/>
-          <p:nvPr/>
-        </p:nvSpPr>
-        <p:spPr>
-          <a:xfrm>
-            <a:off x="4800600" y="3383280"/>
-            <a:ext cx="3657600" cy="1188720"/>
-          </a:xfrm>
-          <a:prstGeom prst="rect">
-            <a:avLst/>
-          </a:prstGeom>
-          <a:noFill/>
-          <a:ln/>
-        </p:spPr>
-        <p:txBody>
-          <a:bodyPr wrap="square" lIns="0" tIns="0" rIns="0" bIns="0" rtlCol="0" anchor="ctr"/>
-          <a:lstStyle/>
-          <a:p>
-            <a:pPr marL="342900" indent="-342900">
-              <a:spcAft>
-                <a:spcPts val="300"/>
-              </a:spcAft>
-              <a:buSzPct val="100000"/>
-              <a:buChar char="•"/>
-            </a:pPr>
-            <a:r>
-              <a:rPr lang="en-US" sz="900" dirty="0">
-                <a:solidFill>
-                  <a:srgbClr val="334155"/>
-                </a:solidFill>
-                <a:latin typeface="Arial" pitchFamily="34" charset="0"/>
-                <a:ea typeface="Arial" pitchFamily="34" charset="-122"/>
-                <a:cs typeface="Arial" pitchFamily="34" charset="-120"/>
-              </a:rPr>
-              <a:t>接客マニュアルの見直しと全スタッフへの周知</a:t>
-            </a:r>
-            <a:endParaRPr lang="en-US" sz="900" dirty="0"/>
-          </a:p>
-          <a:p>
-            <a:pPr marL="342900" indent="-342900">
-              <a:spcAft>
-                <a:spcPts val="300"/>
-              </a:spcAft>
-              <a:buSzPct val="100000"/>
-              <a:buChar char="•"/>
-            </a:pPr>
-            <a:r>
-              <a:rPr lang="en-US" sz="900" dirty="0">
-                <a:solidFill>
-                  <a:srgbClr val="334155"/>
-                </a:solidFill>
-                <a:latin typeface="Arial" pitchFamily="34" charset="0"/>
-                <a:ea typeface="Arial" pitchFamily="34" charset="-122"/>
-                <a:cs typeface="Arial" pitchFamily="34" charset="-120"/>
-              </a:rPr>
-              <a:t>ゲストからのクレーム対応フローの明確化</a:t>
-            </a:r>
-            <a:endParaRPr lang="en-US" sz="900" dirty="0"/>
-          </a:p>
-          <a:p>
-            <a:pPr marL="342900" indent="-342900">
-              <a:spcAft>
-                <a:spcPts val="300"/>
-              </a:spcAft>
-              <a:buSzPct val="100000"/>
-              <a:buChar char="•"/>
-            </a:pPr>
-            <a:r>
-              <a:rPr lang="en-US" sz="900" dirty="0">
-                <a:solidFill>
-                  <a:srgbClr val="334155"/>
-                </a:solidFill>
-                <a:latin typeface="Arial" pitchFamily="34" charset="0"/>
-                <a:ea typeface="Arial" pitchFamily="34" charset="-122"/>
-                <a:cs typeface="Arial" pitchFamily="34" charset="-120"/>
-              </a:rPr>
-              <a:t>定期的なCS研修の実施</a:t>
-            </a:r>
-            <a:endParaRPr lang="en-US" sz="900" dirty="0"/>
-          </a:p>
-        </p:txBody>
-      </p:sp>
-      <p:sp>
-        <p:nvSpPr>
-          <p:cNvPr id="22" name="Shape 20"/>
           <p:cNvSpPr/>
           <p:nvPr/>
         </p:nvSpPr>
@@ -15215,7 +14405,7 @@
       </p:sp>
       <p:sp>
         <p:nvSpPr>
-          <p:cNvPr id="23" name="Text 21"/>
+          <p:cNvPr id="19" name="Text 17"/>
           <p:cNvSpPr/>
           <p:nvPr/>
         </p:nvSpPr>
@@ -15254,7 +14444,7 @@
       </p:sp>
       <p:sp>
         <p:nvSpPr>
-          <p:cNvPr id="24" name="Text 22"/>
+          <p:cNvPr id="20" name="Text 18"/>
           <p:cNvSpPr/>
           <p:nvPr/>
         </p:nvSpPr>

--- a/納品レポート/ホテル別レポート/apa_kamata_口コミ分析レポート.pptx
+++ b/納品レポート/ホテル別レポート/apa_kamata_口コミ分析レポート.pptx
@@ -2789,7 +2789,7 @@
                 <a:ea typeface="Arial" pitchFamily="34" charset="-122"/>
                 <a:cs typeface="Arial" pitchFamily="34" charset="-120"/>
               </a:rPr>
-              <a:t>作成日：2026年4月13日</a:t>
+              <a:t>作成日：2026年4月15日</a:t>
             </a:r>
             <a:endParaRPr lang="en-US" sz="1000" dirty="0"/>
           </a:p>

--- a/納品レポート/ホテル別レポート/apa_kamata_口コミ分析レポート.pptx
+++ b/納品レポート/ホテル別レポート/apa_kamata_口コミ分析レポート.pptx
@@ -175,23 +175,20 @@
           </c:dLbls>
           <c:cat>
             <c:multiLvlStrRef>
-              <c:f>Sheet1!$A$2:$A$6</c:f>
+              <c:f>Sheet1!$A$2:$A$5</c:f>
               <c:multiLvlStrCache>
-                <c:ptCount val="5"/>
+                <c:ptCount val="4"/>
                 <c:lvl>
                   <c:pt idx="0">
-                    <c:v>Google</c:v>
+                    <c:v>Booking.com</c:v>
                   </c:pt>
                   <c:pt idx="1">
-                    <c:v>Booking.com</c:v>
+                    <c:v>Google</c:v>
                   </c:pt>
                   <c:pt idx="2">
                     <c:v>じゃらん</c:v>
                   </c:pt>
                   <c:pt idx="3">
-                    <c:v>楽天トラベル</c:v>
-                  </c:pt>
-                  <c:pt idx="4">
                     <c:v>Agoda</c:v>
                   </c:pt>
                 </c:lvl>
@@ -200,24 +197,21 @@
           </c:cat>
           <c:val>
             <c:numRef>
-              <c:f>Sheet1!$B$2:$B$6</c:f>
+              <c:f>Sheet1!$B$2:$B$5</c:f>
               <c:numCache>
                 <c:formatCode>General</c:formatCode>
-                <c:ptCount val="5"/>
+                <c:ptCount val="4"/>
                 <c:pt idx="0">
-                  <c:v>7.88</c:v>
+                  <c:v>8</c:v>
                 </c:pt>
                 <c:pt idx="1">
-                  <c:v>7.58</c:v>
+                  <c:v>8</c:v>
                 </c:pt>
                 <c:pt idx="2">
-                  <c:v>7.5</c:v>
+                  <c:v>7.33</c:v>
                 </c:pt>
                 <c:pt idx="3">
-                  <c:v>7</c:v>
-                </c:pt>
-                <c:pt idx="4">
-                  <c:v>6.69</c:v>
+                  <c:v>6.67</c:v>
                 </c:pt>
               </c:numCache>
             </c:numRef>
@@ -560,13 +554,13 @@
               <c:numCache>
                 <c:ptCount val="3"/>
                 <c:pt idx="0">
-                  <c:v>38</c:v>
+                  <c:v>18</c:v>
                 </c:pt>
                 <c:pt idx="1">
-                  <c:v>16</c:v>
+                  <c:v>8</c:v>
                 </c:pt>
                 <c:pt idx="2">
-                  <c:v>6</c:v>
+                  <c:v>2</c:v>
                 </c:pt>
               </c:numCache>
             </c:numRef>
@@ -762,22 +756,11 @@
               <a:effectLst/>
             </c:spPr>
           </c:dPt>
-          <c:dPt>
-            <c:idx val="8"/>
-            <c:invertIfNegative val="0"/>
-            <c:bubble3D val="0"/>
-            <c:spPr>
-              <a:solidFill>
-                <a:srgbClr val="DC2626"/>
-              </a:solidFill>
-              <a:effectLst/>
-            </c:spPr>
-          </c:dPt>
           <c:cat>
             <c:multiLvlStrRef>
-              <c:f>Sheet1!$A$2:$A$10</c:f>
+              <c:f>Sheet1!$A$2:$A$9</c:f>
               <c:multiLvlStrCache>
-                <c:ptCount val="9"/>
+                <c:ptCount val="8"/>
                 <c:lvl>
                   <c:pt idx="0">
                     <c:v>10点</c:v>
@@ -803,44 +786,38 @@
                   <c:pt idx="7">
                     <c:v>3点</c:v>
                   </c:pt>
-                  <c:pt idx="8">
-                    <c:v>2点</c:v>
-                  </c:pt>
                 </c:lvl>
               </c:multiLvlStrCache>
             </c:multiLvlStrRef>
           </c:cat>
           <c:val>
             <c:numRef>
-              <c:f>Sheet1!$B$2:$B$10</c:f>
+              <c:f>Sheet1!$B$2:$B$9</c:f>
               <c:numCache>
                 <c:formatCode>General</c:formatCode>
-                <c:ptCount val="9"/>
+                <c:ptCount val="8"/>
                 <c:pt idx="0">
-                  <c:v>8</c:v>
+                  <c:v>5</c:v>
                 </c:pt>
                 <c:pt idx="1">
-                  <c:v>4</c:v>
+                  <c:v>2</c:v>
                 </c:pt>
                 <c:pt idx="2">
-                  <c:v>26</c:v>
+                  <c:v>11</c:v>
                 </c:pt>
                 <c:pt idx="3">
+                  <c:v>1</c:v>
+                </c:pt>
+                <c:pt idx="4">
                   <c:v>5</c:v>
                 </c:pt>
-                <c:pt idx="4">
-                  <c:v>8</c:v>
-                </c:pt>
                 <c:pt idx="5">
-                  <c:v>3</c:v>
+                  <c:v>2</c:v>
                 </c:pt>
                 <c:pt idx="6">
-                  <c:v>4</c:v>
+                  <c:v>1</c:v>
                 </c:pt>
                 <c:pt idx="7">
-                  <c:v>1</c:v>
-                </c:pt>
-                <c:pt idx="8">
                   <c:v>1</c:v>
                 </c:pt>
               </c:numCache>
@@ -2772,7 +2749,7 @@
                 <a:ea typeface="Arial" pitchFamily="34" charset="-122"/>
                 <a:cs typeface="Arial" pitchFamily="34" charset="-120"/>
               </a:rPr>
-              <a:t>分析対象期間：2026年2月〜3月</a:t>
+              <a:t>分析対象期間：2026年3月</a:t>
             </a:r>
             <a:endParaRPr lang="en-US" sz="1000" dirty="0"/>
           </a:p>
@@ -2792,7 +2769,7 @@
                 <a:ea typeface="Arial" pitchFamily="34" charset="-122"/>
                 <a:cs typeface="Arial" pitchFamily="34" charset="-120"/>
               </a:rPr>
-              <a:t>レビュー総数：60件（5サイト）</a:t>
+              <a:t>レビュー総数：28件（4サイト）</a:t>
             </a:r>
             <a:endParaRPr lang="en-US" sz="1000" dirty="0"/>
           </a:p>
@@ -2812,7 +2789,7 @@
                 <a:ea typeface="Arial" pitchFamily="34" charset="-122"/>
                 <a:cs typeface="Arial" pitchFamily="34" charset="-120"/>
               </a:rPr>
-              <a:t>作成日：2026年4月16日</a:t>
+              <a:t>作成日：2026年4月20日</a:t>
             </a:r>
             <a:endParaRPr lang="en-US" sz="1000" dirty="0"/>
           </a:p>
@@ -3358,7 +3335,7 @@
                           <a:ea typeface="Arial" pitchFamily="34" charset="-122"/>
                           <a:cs typeface="Arial" pitchFamily="34" charset="-120"/>
                         </a:rPr>
-                        <a:t>7.38点</a:t>
+                        <a:t>7.50点</a:t>
                       </a:r>
                       <a:endParaRPr lang="en-US" sz="1000" dirty="0">
                         <a:latin typeface="Arial" charset="0"/>
@@ -3426,7 +3403,7 @@
                           <a:ea typeface="Arial" pitchFamily="34" charset="-122"/>
                           <a:cs typeface="Arial" pitchFamily="34" charset="-120"/>
                         </a:rPr>
-                        <a:t>7.9点以上</a:t>
+                        <a:t>8.0点以上</a:t>
                       </a:r>
                       <a:endParaRPr lang="en-US" sz="1000" dirty="0">
                         <a:latin typeface="Arial" charset="0"/>
@@ -3632,7 +3609,7 @@
                           <a:ea typeface="Arial" pitchFamily="34" charset="-122"/>
                           <a:cs typeface="Arial" pitchFamily="34" charset="-120"/>
                         </a:rPr>
-                        <a:t>63.3%</a:t>
+                        <a:t>64.3%</a:t>
                       </a:r>
                       <a:endParaRPr lang="en-US" sz="1000" dirty="0">
                         <a:latin typeface="Arial" charset="0"/>
@@ -3700,7 +3677,7 @@
                           <a:ea typeface="Arial" pitchFamily="34" charset="-122"/>
                           <a:cs typeface="Arial" pitchFamily="34" charset="-120"/>
                         </a:rPr>
-                        <a:t>73%以上</a:t>
+                        <a:t>74%以上</a:t>
                       </a:r>
                       <a:endParaRPr lang="en-US" sz="1000" dirty="0">
                         <a:latin typeface="Arial" charset="0"/>
@@ -3906,7 +3883,7 @@
                           <a:ea typeface="Arial" pitchFamily="34" charset="-122"/>
                           <a:cs typeface="Arial" pitchFamily="34" charset="-120"/>
                         </a:rPr>
-                        <a:t>10.0%</a:t>
+                        <a:t>7.1%</a:t>
                       </a:r>
                       <a:endParaRPr lang="en-US" sz="1000" dirty="0">
                         <a:latin typeface="Arial" charset="0"/>
@@ -3974,7 +3951,7 @@
                           <a:ea typeface="Arial" pitchFamily="34" charset="-122"/>
                           <a:cs typeface="Arial" pitchFamily="34" charset="-120"/>
                         </a:rPr>
-                        <a:t>7%以下</a:t>
+                        <a:t>4%以下</a:t>
                       </a:r>
                       <a:endParaRPr lang="en-US" sz="1000" dirty="0">
                         <a:latin typeface="Arial" charset="0"/>
@@ -4728,7 +4705,7 @@
                           <a:ea typeface="Arial" pitchFamily="34" charset="-122"/>
                           <a:cs typeface="Arial" pitchFamily="34" charset="-120"/>
                         </a:rPr>
-                        <a:t>約6件/期間</a:t>
+                        <a:t>約3件/期間</a:t>
                       </a:r>
                       <a:endParaRPr lang="en-US" sz="1000" dirty="0">
                         <a:latin typeface="Arial" charset="0"/>
@@ -4796,7 +4773,7 @@
                           <a:ea typeface="Arial" pitchFamily="34" charset="-122"/>
                           <a:cs typeface="Arial" pitchFamily="34" charset="-120"/>
                         </a:rPr>
-                        <a:t>3件以下</a:t>
+                        <a:t>1件以下</a:t>
                       </a:r>
                       <a:endParaRPr lang="en-US" sz="1000" dirty="0">
                         <a:latin typeface="Arial" charset="0"/>
@@ -5367,7 +5344,7 @@
                 <a:ea typeface="Arial" pitchFamily="34" charset="-122"/>
                 <a:cs typeface="Arial" pitchFamily="34" charset="-120"/>
               </a:rPr>
-              <a:t>7.38</a:t>
+              <a:t>7.50</a:t>
             </a:r>
             <a:endParaRPr lang="en-US" sz="3200" dirty="0"/>
           </a:p>
@@ -5492,7 +5469,7 @@
                 <a:ea typeface="Arial" pitchFamily="34" charset="-122"/>
                 <a:cs typeface="Arial" pitchFamily="34" charset="-120"/>
               </a:rPr>
-              <a:t>63.3%</a:t>
+              <a:t>64.3%</a:t>
             </a:r>
             <a:endParaRPr lang="en-US" sz="3200" dirty="0"/>
           </a:p>
@@ -5617,7 +5594,7 @@
                 <a:ea typeface="Arial" pitchFamily="34" charset="-122"/>
                 <a:cs typeface="Arial" pitchFamily="34" charset="-120"/>
               </a:rPr>
-              <a:t>10.0%</a:t>
+              <a:t>7.1%</a:t>
             </a:r>
             <a:endParaRPr lang="en-US" sz="3200" dirty="0"/>
           </a:p>
@@ -5742,7 +5719,7 @@
                 <a:ea typeface="Arial" pitchFamily="34" charset="-122"/>
                 <a:cs typeface="Arial" pitchFamily="34" charset="-120"/>
               </a:rPr>
-              <a:t>60件</a:t>
+              <a:t>28件</a:t>
             </a:r>
             <a:endParaRPr lang="en-US" sz="3200" dirty="0"/>
           </a:p>
@@ -6178,7 +6155,7 @@
                 <a:ea typeface="Arial" pitchFamily="34" charset="-122"/>
                 <a:cs typeface="Arial" pitchFamily="34" charset="-120"/>
               </a:rPr>
-              <a:t>エアコン・空調 </a:t>
+              <a:t>防音性能 </a:t>
             </a:r>
             <a:endParaRPr lang="en-US" sz="1100" dirty="0"/>
           </a:p>
@@ -6198,7 +6175,7 @@
                 <a:ea typeface="Arial" pitchFamily="34" charset="-122"/>
                 <a:cs typeface="Arial" pitchFamily="34" charset="-120"/>
               </a:rPr>
-              <a:t>  Coming from Keikyu-Kamata there was a shoutengai giving p...</a:t>
+              <a:t>  道路沿いだったけど防音がしっかりされていて外の音は聞こえない</a:t>
             </a:r>
             <a:endParaRPr lang="en-US" sz="1100" dirty="0"/>
           </a:p>
@@ -6551,7 +6528,7 @@
                 <a:ea typeface="Arial" pitchFamily="34" charset="-122"/>
                 <a:cs typeface="Arial" pitchFamily="34" charset="-120"/>
               </a:rPr>
-              <a:t>7.38</a:t>
+              <a:t>7.50</a:t>
             </a:r>
             <a:endParaRPr lang="en-US" sz="3200" dirty="0"/>
           </a:p>
@@ -6676,7 +6653,7 @@
                 <a:ea typeface="Arial" pitchFamily="34" charset="-122"/>
                 <a:cs typeface="Arial" pitchFamily="34" charset="-120"/>
               </a:rPr>
-              <a:t>63.3%</a:t>
+              <a:t>64.3%</a:t>
             </a:r>
             <a:endParaRPr lang="en-US" sz="3200" dirty="0"/>
           </a:p>
@@ -6801,7 +6778,7 @@
                 <a:ea typeface="Arial" pitchFamily="34" charset="-122"/>
                 <a:cs typeface="Arial" pitchFamily="34" charset="-120"/>
               </a:rPr>
-              <a:t>10.0%</a:t>
+              <a:t>7.1%</a:t>
             </a:r>
             <a:endParaRPr lang="en-US" sz="3200" dirty="0"/>
           </a:p>
@@ -6926,7 +6903,7 @@
                 <a:ea typeface="Arial" pitchFamily="34" charset="-122"/>
                 <a:cs typeface="Arial" pitchFamily="34" charset="-120"/>
               </a:rPr>
-              <a:t>60件</a:t>
+              <a:t>28件</a:t>
             </a:r>
             <a:endParaRPr lang="en-US" sz="3200" dirty="0"/>
           </a:p>
@@ -7347,7 +7324,7 @@
                 <a:ea typeface="Arial" pitchFamily="34" charset="-122"/>
                 <a:cs typeface="Arial" pitchFamily="34" charset="-120"/>
               </a:rPr>
-              <a:t>Google(7.88)が最高スコア。</a:t>
+              <a:t>Google(8.00)が最高スコア。</a:t>
             </a:r>
             <a:endParaRPr lang="en-US" sz="1100" dirty="0"/>
           </a:p>
@@ -7837,7 +7814,7 @@
                           <a:ea typeface="Arial" pitchFamily="34" charset="-122"/>
                           <a:cs typeface="Arial" pitchFamily="34" charset="-120"/>
                         </a:rPr>
-                        <a:t>Google</a:t>
+                        <a:t>Booking.com</a:t>
                       </a:r>
                       <a:endParaRPr lang="en-US" sz="900" dirty="0">
                         <a:latin typeface="Arial" charset="0"/>
@@ -7905,7 +7882,7 @@
                           <a:ea typeface="Arial" pitchFamily="34" charset="-122"/>
                           <a:cs typeface="Arial" pitchFamily="34" charset="-120"/>
                         </a:rPr>
-                        <a:t>17</a:t>
+                        <a:t>10</a:t>
                       </a:r>
                       <a:endParaRPr lang="en-US" sz="900" dirty="0">
                         <a:latin typeface="Arial" charset="0"/>
@@ -7973,7 +7950,7 @@
                           <a:ea typeface="Arial" pitchFamily="34" charset="-122"/>
                           <a:cs typeface="Arial" pitchFamily="34" charset="-120"/>
                         </a:rPr>
-                        <a:t>3.94</a:t>
+                        <a:t>8</a:t>
                       </a:r>
                       <a:endParaRPr lang="en-US" sz="900" dirty="0">
                         <a:latin typeface="Arial" charset="0"/>
@@ -8021,6 +7998,348 @@
                     </a:lnB>
                     <a:solidFill>
                       <a:srgbClr val="E8EFF8"/>
+                    </a:solidFill>
+                  </a:tcPr>
+                </a:tc>
+                <a:tc>
+                  <a:txBody>
+                    <a:bodyPr/>
+                    <a:lstStyle/>
+                    <a:p>
+                      <a:pPr algn="ctr" indent="0" marL="0">
+                        <a:buNone/>
+                      </a:pPr>
+                      <a:r>
+                        <a:rPr lang="en-US" sz="900" dirty="0">
+                          <a:solidFill>
+                            <a:srgbClr val="000000"/>
+                          </a:solidFill>
+                          <a:latin typeface="Arial" pitchFamily="34" charset="0"/>
+                          <a:ea typeface="Arial" pitchFamily="34" charset="-122"/>
+                          <a:cs typeface="Arial" pitchFamily="34" charset="-120"/>
+                        </a:rPr>
+                        <a:t>/10</a:t>
+                      </a:r>
+                      <a:endParaRPr lang="en-US" sz="900" dirty="0">
+                        <a:latin typeface="Arial" charset="0"/>
+                        <a:ea typeface="Arial" charset="0"/>
+                        <a:cs typeface="Arial" charset="0"/>
+                      </a:endParaRPr>
+                    </a:p>
+                  </a:txBody>
+                  <a:tcPr marL="91440" marR="91440" marT="45720" marB="45720">
+                    <a:lnL w="6350" cap="flat" cmpd="sng" algn="ctr">
+                      <a:solidFill>
+                        <a:srgbClr val="CBD5E1"/>
+                      </a:solidFill>
+                      <a:prstDash val="solid"/>
+                      <a:round/>
+                      <a:headEnd type="none" w="med" len="med"/>
+                      <a:tailEnd type="none" w="med" len="med"/>
+                    </a:lnL>
+                    <a:lnR w="6350" cap="flat" cmpd="sng" algn="ctr">
+                      <a:solidFill>
+                        <a:srgbClr val="CBD5E1"/>
+                      </a:solidFill>
+                      <a:prstDash val="solid"/>
+                      <a:round/>
+                      <a:headEnd type="none" w="med" len="med"/>
+                      <a:tailEnd type="none" w="med" len="med"/>
+                    </a:lnR>
+                    <a:lnT w="6350" cap="flat" cmpd="sng" algn="ctr">
+                      <a:solidFill>
+                        <a:srgbClr val="CBD5E1"/>
+                      </a:solidFill>
+                      <a:prstDash val="solid"/>
+                      <a:round/>
+                      <a:headEnd type="none" w="med" len="med"/>
+                      <a:tailEnd type="none" w="med" len="med"/>
+                    </a:lnT>
+                    <a:lnB w="6350" cap="flat" cmpd="sng" algn="ctr">
+                      <a:solidFill>
+                        <a:srgbClr val="CBD5E1"/>
+                      </a:solidFill>
+                      <a:prstDash val="solid"/>
+                      <a:round/>
+                      <a:headEnd type="none" w="med" len="med"/>
+                      <a:tailEnd type="none" w="med" len="med"/>
+                    </a:lnB>
+                    <a:solidFill>
+                      <a:srgbClr val="E8EFF8"/>
+                    </a:solidFill>
+                  </a:tcPr>
+                </a:tc>
+                <a:tc>
+                  <a:txBody>
+                    <a:bodyPr/>
+                    <a:lstStyle/>
+                    <a:p>
+                      <a:pPr algn="ctr" indent="0" marL="0">
+                        <a:buNone/>
+                      </a:pPr>
+                      <a:r>
+                        <a:rPr lang="en-US" sz="900" dirty="0">
+                          <a:solidFill>
+                            <a:srgbClr val="000000"/>
+                          </a:solidFill>
+                          <a:latin typeface="Arial" pitchFamily="34" charset="0"/>
+                          <a:ea typeface="Arial" pitchFamily="34" charset="-122"/>
+                          <a:cs typeface="Arial" pitchFamily="34" charset="-120"/>
+                        </a:rPr>
+                        <a:t>8</a:t>
+                      </a:r>
+                      <a:endParaRPr lang="en-US" sz="900" dirty="0">
+                        <a:latin typeface="Arial" charset="0"/>
+                        <a:ea typeface="Arial" charset="0"/>
+                        <a:cs typeface="Arial" charset="0"/>
+                      </a:endParaRPr>
+                    </a:p>
+                  </a:txBody>
+                  <a:tcPr marL="91440" marR="91440" marT="45720" marB="45720">
+                    <a:lnL w="6350" cap="flat" cmpd="sng" algn="ctr">
+                      <a:solidFill>
+                        <a:srgbClr val="CBD5E1"/>
+                      </a:solidFill>
+                      <a:prstDash val="solid"/>
+                      <a:round/>
+                      <a:headEnd type="none" w="med" len="med"/>
+                      <a:tailEnd type="none" w="med" len="med"/>
+                    </a:lnL>
+                    <a:lnR w="6350" cap="flat" cmpd="sng" algn="ctr">
+                      <a:solidFill>
+                        <a:srgbClr val="CBD5E1"/>
+                      </a:solidFill>
+                      <a:prstDash val="solid"/>
+                      <a:round/>
+                      <a:headEnd type="none" w="med" len="med"/>
+                      <a:tailEnd type="none" w="med" len="med"/>
+                    </a:lnR>
+                    <a:lnT w="6350" cap="flat" cmpd="sng" algn="ctr">
+                      <a:solidFill>
+                        <a:srgbClr val="CBD5E1"/>
+                      </a:solidFill>
+                      <a:prstDash val="solid"/>
+                      <a:round/>
+                      <a:headEnd type="none" w="med" len="med"/>
+                      <a:tailEnd type="none" w="med" len="med"/>
+                    </a:lnT>
+                    <a:lnB w="6350" cap="flat" cmpd="sng" algn="ctr">
+                      <a:solidFill>
+                        <a:srgbClr val="CBD5E1"/>
+                      </a:solidFill>
+                      <a:prstDash val="solid"/>
+                      <a:round/>
+                      <a:headEnd type="none" w="med" len="med"/>
+                      <a:tailEnd type="none" w="med" len="med"/>
+                    </a:lnB>
+                    <a:solidFill>
+                      <a:srgbClr val="E8EFF8"/>
+                    </a:solidFill>
+                  </a:tcPr>
+                </a:tc>
+              </a:tr>
+              <a:tr h="201168">
+                <a:tc>
+                  <a:txBody>
+                    <a:bodyPr/>
+                    <a:lstStyle/>
+                    <a:p>
+                      <a:pPr algn="ctr" indent="0" marL="0">
+                        <a:buNone/>
+                      </a:pPr>
+                      <a:r>
+                        <a:rPr lang="en-US" sz="900" dirty="0">
+                          <a:solidFill>
+                            <a:srgbClr val="000000"/>
+                          </a:solidFill>
+                          <a:latin typeface="Arial" pitchFamily="34" charset="0"/>
+                          <a:ea typeface="Arial" pitchFamily="34" charset="-122"/>
+                          <a:cs typeface="Arial" pitchFamily="34" charset="-120"/>
+                        </a:rPr>
+                        <a:t>Google</a:t>
+                      </a:r>
+                      <a:endParaRPr lang="en-US" sz="900" dirty="0">
+                        <a:latin typeface="Arial" charset="0"/>
+                        <a:ea typeface="Arial" charset="0"/>
+                        <a:cs typeface="Arial" charset="0"/>
+                      </a:endParaRPr>
+                    </a:p>
+                  </a:txBody>
+                  <a:tcPr marL="91440" marR="91440" marT="45720" marB="45720">
+                    <a:lnL w="6350" cap="flat" cmpd="sng" algn="ctr">
+                      <a:solidFill>
+                        <a:srgbClr val="CBD5E1"/>
+                      </a:solidFill>
+                      <a:prstDash val="solid"/>
+                      <a:round/>
+                      <a:headEnd type="none" w="med" len="med"/>
+                      <a:tailEnd type="none" w="med" len="med"/>
+                    </a:lnL>
+                    <a:lnR w="6350" cap="flat" cmpd="sng" algn="ctr">
+                      <a:solidFill>
+                        <a:srgbClr val="CBD5E1"/>
+                      </a:solidFill>
+                      <a:prstDash val="solid"/>
+                      <a:round/>
+                      <a:headEnd type="none" w="med" len="med"/>
+                      <a:tailEnd type="none" w="med" len="med"/>
+                    </a:lnR>
+                    <a:lnT w="6350" cap="flat" cmpd="sng" algn="ctr">
+                      <a:solidFill>
+                        <a:srgbClr val="CBD5E1"/>
+                      </a:solidFill>
+                      <a:prstDash val="solid"/>
+                      <a:round/>
+                      <a:headEnd type="none" w="med" len="med"/>
+                      <a:tailEnd type="none" w="med" len="med"/>
+                    </a:lnT>
+                    <a:lnB w="6350" cap="flat" cmpd="sng" algn="ctr">
+                      <a:solidFill>
+                        <a:srgbClr val="CBD5E1"/>
+                      </a:solidFill>
+                      <a:prstDash val="solid"/>
+                      <a:round/>
+                      <a:headEnd type="none" w="med" len="med"/>
+                      <a:tailEnd type="none" w="med" len="med"/>
+                    </a:lnB>
+                    <a:solidFill>
+                      <a:srgbClr val="FFFFFF"/>
+                    </a:solidFill>
+                  </a:tcPr>
+                </a:tc>
+                <a:tc>
+                  <a:txBody>
+                    <a:bodyPr/>
+                    <a:lstStyle/>
+                    <a:p>
+                      <a:pPr algn="ctr" indent="0" marL="0">
+                        <a:buNone/>
+                      </a:pPr>
+                      <a:r>
+                        <a:rPr lang="en-US" sz="900" dirty="0">
+                          <a:solidFill>
+                            <a:srgbClr val="000000"/>
+                          </a:solidFill>
+                          <a:latin typeface="Arial" pitchFamily="34" charset="0"/>
+                          <a:ea typeface="Arial" pitchFamily="34" charset="-122"/>
+                          <a:cs typeface="Arial" pitchFamily="34" charset="-120"/>
+                        </a:rPr>
+                        <a:t>6</a:t>
+                      </a:r>
+                      <a:endParaRPr lang="en-US" sz="900" dirty="0">
+                        <a:latin typeface="Arial" charset="0"/>
+                        <a:ea typeface="Arial" charset="0"/>
+                        <a:cs typeface="Arial" charset="0"/>
+                      </a:endParaRPr>
+                    </a:p>
+                  </a:txBody>
+                  <a:tcPr marL="91440" marR="91440" marT="45720" marB="45720">
+                    <a:lnL w="6350" cap="flat" cmpd="sng" algn="ctr">
+                      <a:solidFill>
+                        <a:srgbClr val="CBD5E1"/>
+                      </a:solidFill>
+                      <a:prstDash val="solid"/>
+                      <a:round/>
+                      <a:headEnd type="none" w="med" len="med"/>
+                      <a:tailEnd type="none" w="med" len="med"/>
+                    </a:lnL>
+                    <a:lnR w="6350" cap="flat" cmpd="sng" algn="ctr">
+                      <a:solidFill>
+                        <a:srgbClr val="CBD5E1"/>
+                      </a:solidFill>
+                      <a:prstDash val="solid"/>
+                      <a:round/>
+                      <a:headEnd type="none" w="med" len="med"/>
+                      <a:tailEnd type="none" w="med" len="med"/>
+                    </a:lnR>
+                    <a:lnT w="6350" cap="flat" cmpd="sng" algn="ctr">
+                      <a:solidFill>
+                        <a:srgbClr val="CBD5E1"/>
+                      </a:solidFill>
+                      <a:prstDash val="solid"/>
+                      <a:round/>
+                      <a:headEnd type="none" w="med" len="med"/>
+                      <a:tailEnd type="none" w="med" len="med"/>
+                    </a:lnT>
+                    <a:lnB w="6350" cap="flat" cmpd="sng" algn="ctr">
+                      <a:solidFill>
+                        <a:srgbClr val="CBD5E1"/>
+                      </a:solidFill>
+                      <a:prstDash val="solid"/>
+                      <a:round/>
+                      <a:headEnd type="none" w="med" len="med"/>
+                      <a:tailEnd type="none" w="med" len="med"/>
+                    </a:lnB>
+                    <a:solidFill>
+                      <a:srgbClr val="FFFFFF"/>
+                    </a:solidFill>
+                  </a:tcPr>
+                </a:tc>
+                <a:tc>
+                  <a:txBody>
+                    <a:bodyPr/>
+                    <a:lstStyle/>
+                    <a:p>
+                      <a:pPr algn="ctr" indent="0" marL="0">
+                        <a:buNone/>
+                      </a:pPr>
+                      <a:r>
+                        <a:rPr lang="en-US" sz="900" dirty="0">
+                          <a:solidFill>
+                            <a:srgbClr val="000000"/>
+                          </a:solidFill>
+                          <a:latin typeface="Arial" pitchFamily="34" charset="0"/>
+                          <a:ea typeface="Arial" pitchFamily="34" charset="-122"/>
+                          <a:cs typeface="Arial" pitchFamily="34" charset="-120"/>
+                        </a:rPr>
+                        <a:t>4</a:t>
+                      </a:r>
+                      <a:endParaRPr lang="en-US" sz="900" dirty="0">
+                        <a:latin typeface="Arial" charset="0"/>
+                        <a:ea typeface="Arial" charset="0"/>
+                        <a:cs typeface="Arial" charset="0"/>
+                      </a:endParaRPr>
+                    </a:p>
+                  </a:txBody>
+                  <a:tcPr marL="91440" marR="91440" marT="45720" marB="45720">
+                    <a:lnL w="6350" cap="flat" cmpd="sng" algn="ctr">
+                      <a:solidFill>
+                        <a:srgbClr val="CBD5E1"/>
+                      </a:solidFill>
+                      <a:prstDash val="solid"/>
+                      <a:round/>
+                      <a:headEnd type="none" w="med" len="med"/>
+                      <a:tailEnd type="none" w="med" len="med"/>
+                    </a:lnL>
+                    <a:lnR w="6350" cap="flat" cmpd="sng" algn="ctr">
+                      <a:solidFill>
+                        <a:srgbClr val="CBD5E1"/>
+                      </a:solidFill>
+                      <a:prstDash val="solid"/>
+                      <a:round/>
+                      <a:headEnd type="none" w="med" len="med"/>
+                      <a:tailEnd type="none" w="med" len="med"/>
+                    </a:lnR>
+                    <a:lnT w="6350" cap="flat" cmpd="sng" algn="ctr">
+                      <a:solidFill>
+                        <a:srgbClr val="CBD5E1"/>
+                      </a:solidFill>
+                      <a:prstDash val="solid"/>
+                      <a:round/>
+                      <a:headEnd type="none" w="med" len="med"/>
+                      <a:tailEnd type="none" w="med" len="med"/>
+                    </a:lnT>
+                    <a:lnB w="6350" cap="flat" cmpd="sng" algn="ctr">
+                      <a:solidFill>
+                        <a:srgbClr val="CBD5E1"/>
+                      </a:solidFill>
+                      <a:prstDash val="solid"/>
+                      <a:round/>
+                      <a:headEnd type="none" w="med" len="med"/>
+                      <a:tailEnd type="none" w="med" len="med"/>
+                    </a:lnB>
+                    <a:solidFill>
+                      <a:srgbClr val="FFFFFF"/>
                     </a:solidFill>
                   </a:tcPr>
                 </a:tc>
@@ -8088,144 +8407,6 @@
                       <a:tailEnd type="none" w="med" len="med"/>
                     </a:lnB>
                     <a:solidFill>
-                      <a:srgbClr val="E8EFF8"/>
-                    </a:solidFill>
-                  </a:tcPr>
-                </a:tc>
-                <a:tc>
-                  <a:txBody>
-                    <a:bodyPr/>
-                    <a:lstStyle/>
-                    <a:p>
-                      <a:pPr algn="ctr" indent="0" marL="0">
-                        <a:buNone/>
-                      </a:pPr>
-                      <a:r>
-                        <a:rPr lang="en-US" sz="900" dirty="0">
-                          <a:solidFill>
-                            <a:srgbClr val="000000"/>
-                          </a:solidFill>
-                          <a:latin typeface="Arial" pitchFamily="34" charset="0"/>
-                          <a:ea typeface="Arial" pitchFamily="34" charset="-122"/>
-                          <a:cs typeface="Arial" pitchFamily="34" charset="-120"/>
-                        </a:rPr>
-                        <a:t>7.88</a:t>
-                      </a:r>
-                      <a:endParaRPr lang="en-US" sz="900" dirty="0">
-                        <a:latin typeface="Arial" charset="0"/>
-                        <a:ea typeface="Arial" charset="0"/>
-                        <a:cs typeface="Arial" charset="0"/>
-                      </a:endParaRPr>
-                    </a:p>
-                  </a:txBody>
-                  <a:tcPr marL="91440" marR="91440" marT="45720" marB="45720">
-                    <a:lnL w="6350" cap="flat" cmpd="sng" algn="ctr">
-                      <a:solidFill>
-                        <a:srgbClr val="CBD5E1"/>
-                      </a:solidFill>
-                      <a:prstDash val="solid"/>
-                      <a:round/>
-                      <a:headEnd type="none" w="med" len="med"/>
-                      <a:tailEnd type="none" w="med" len="med"/>
-                    </a:lnL>
-                    <a:lnR w="6350" cap="flat" cmpd="sng" algn="ctr">
-                      <a:solidFill>
-                        <a:srgbClr val="CBD5E1"/>
-                      </a:solidFill>
-                      <a:prstDash val="solid"/>
-                      <a:round/>
-                      <a:headEnd type="none" w="med" len="med"/>
-                      <a:tailEnd type="none" w="med" len="med"/>
-                    </a:lnR>
-                    <a:lnT w="6350" cap="flat" cmpd="sng" algn="ctr">
-                      <a:solidFill>
-                        <a:srgbClr val="CBD5E1"/>
-                      </a:solidFill>
-                      <a:prstDash val="solid"/>
-                      <a:round/>
-                      <a:headEnd type="none" w="med" len="med"/>
-                      <a:tailEnd type="none" w="med" len="med"/>
-                    </a:lnT>
-                    <a:lnB w="6350" cap="flat" cmpd="sng" algn="ctr">
-                      <a:solidFill>
-                        <a:srgbClr val="CBD5E1"/>
-                      </a:solidFill>
-                      <a:prstDash val="solid"/>
-                      <a:round/>
-                      <a:headEnd type="none" w="med" len="med"/>
-                      <a:tailEnd type="none" w="med" len="med"/>
-                    </a:lnB>
-                    <a:solidFill>
-                      <a:srgbClr val="E8EFF8"/>
-                    </a:solidFill>
-                  </a:tcPr>
-                </a:tc>
-              </a:tr>
-              <a:tr h="201168">
-                <a:tc>
-                  <a:txBody>
-                    <a:bodyPr/>
-                    <a:lstStyle/>
-                    <a:p>
-                      <a:pPr algn="ctr" indent="0" marL="0">
-                        <a:buNone/>
-                      </a:pPr>
-                      <a:r>
-                        <a:rPr lang="en-US" sz="900" dirty="0">
-                          <a:solidFill>
-                            <a:srgbClr val="000000"/>
-                          </a:solidFill>
-                          <a:latin typeface="Arial" pitchFamily="34" charset="0"/>
-                          <a:ea typeface="Arial" pitchFamily="34" charset="-122"/>
-                          <a:cs typeface="Arial" pitchFamily="34" charset="-120"/>
-                        </a:rPr>
-                        <a:t>Booking.com</a:t>
-                      </a:r>
-                      <a:endParaRPr lang="en-US" sz="900" dirty="0">
-                        <a:latin typeface="Arial" charset="0"/>
-                        <a:ea typeface="Arial" charset="0"/>
-                        <a:cs typeface="Arial" charset="0"/>
-                      </a:endParaRPr>
-                    </a:p>
-                  </a:txBody>
-                  <a:tcPr marL="91440" marR="91440" marT="45720" marB="45720">
-                    <a:lnL w="6350" cap="flat" cmpd="sng" algn="ctr">
-                      <a:solidFill>
-                        <a:srgbClr val="CBD5E1"/>
-                      </a:solidFill>
-                      <a:prstDash val="solid"/>
-                      <a:round/>
-                      <a:headEnd type="none" w="med" len="med"/>
-                      <a:tailEnd type="none" w="med" len="med"/>
-                    </a:lnL>
-                    <a:lnR w="6350" cap="flat" cmpd="sng" algn="ctr">
-                      <a:solidFill>
-                        <a:srgbClr val="CBD5E1"/>
-                      </a:solidFill>
-                      <a:prstDash val="solid"/>
-                      <a:round/>
-                      <a:headEnd type="none" w="med" len="med"/>
-                      <a:tailEnd type="none" w="med" len="med"/>
-                    </a:lnR>
-                    <a:lnT w="6350" cap="flat" cmpd="sng" algn="ctr">
-                      <a:solidFill>
-                        <a:srgbClr val="CBD5E1"/>
-                      </a:solidFill>
-                      <a:prstDash val="solid"/>
-                      <a:round/>
-                      <a:headEnd type="none" w="med" len="med"/>
-                      <a:tailEnd type="none" w="med" len="med"/>
-                    </a:lnT>
-                    <a:lnB w="6350" cap="flat" cmpd="sng" algn="ctr">
-                      <a:solidFill>
-                        <a:srgbClr val="CBD5E1"/>
-                      </a:solidFill>
-                      <a:prstDash val="solid"/>
-                      <a:round/>
-                      <a:headEnd type="none" w="med" len="med"/>
-                      <a:tailEnd type="none" w="med" len="med"/>
-                    </a:lnB>
-                    <a:solidFill>
                       <a:srgbClr val="FFFFFF"/>
                     </a:solidFill>
                   </a:tcPr>
@@ -8247,211 +8428,7 @@
                           <a:ea typeface="Arial" pitchFamily="34" charset="-122"/>
                           <a:cs typeface="Arial" pitchFamily="34" charset="-120"/>
                         </a:rPr>
-                        <a:t>19</a:t>
-                      </a:r>
-                      <a:endParaRPr lang="en-US" sz="900" dirty="0">
-                        <a:latin typeface="Arial" charset="0"/>
-                        <a:ea typeface="Arial" charset="0"/>
-                        <a:cs typeface="Arial" charset="0"/>
-                      </a:endParaRPr>
-                    </a:p>
-                  </a:txBody>
-                  <a:tcPr marL="91440" marR="91440" marT="45720" marB="45720">
-                    <a:lnL w="6350" cap="flat" cmpd="sng" algn="ctr">
-                      <a:solidFill>
-                        <a:srgbClr val="CBD5E1"/>
-                      </a:solidFill>
-                      <a:prstDash val="solid"/>
-                      <a:round/>
-                      <a:headEnd type="none" w="med" len="med"/>
-                      <a:tailEnd type="none" w="med" len="med"/>
-                    </a:lnL>
-                    <a:lnR w="6350" cap="flat" cmpd="sng" algn="ctr">
-                      <a:solidFill>
-                        <a:srgbClr val="CBD5E1"/>
-                      </a:solidFill>
-                      <a:prstDash val="solid"/>
-                      <a:round/>
-                      <a:headEnd type="none" w="med" len="med"/>
-                      <a:tailEnd type="none" w="med" len="med"/>
-                    </a:lnR>
-                    <a:lnT w="6350" cap="flat" cmpd="sng" algn="ctr">
-                      <a:solidFill>
-                        <a:srgbClr val="CBD5E1"/>
-                      </a:solidFill>
-                      <a:prstDash val="solid"/>
-                      <a:round/>
-                      <a:headEnd type="none" w="med" len="med"/>
-                      <a:tailEnd type="none" w="med" len="med"/>
-                    </a:lnT>
-                    <a:lnB w="6350" cap="flat" cmpd="sng" algn="ctr">
-                      <a:solidFill>
-                        <a:srgbClr val="CBD5E1"/>
-                      </a:solidFill>
-                      <a:prstDash val="solid"/>
-                      <a:round/>
-                      <a:headEnd type="none" w="med" len="med"/>
-                      <a:tailEnd type="none" w="med" len="med"/>
-                    </a:lnB>
-                    <a:solidFill>
-                      <a:srgbClr val="FFFFFF"/>
-                    </a:solidFill>
-                  </a:tcPr>
-                </a:tc>
-                <a:tc>
-                  <a:txBody>
-                    <a:bodyPr/>
-                    <a:lstStyle/>
-                    <a:p>
-                      <a:pPr algn="ctr" indent="0" marL="0">
-                        <a:buNone/>
-                      </a:pPr>
-                      <a:r>
-                        <a:rPr lang="en-US" sz="900" dirty="0">
-                          <a:solidFill>
-                            <a:srgbClr val="000000"/>
-                          </a:solidFill>
-                          <a:latin typeface="Arial" pitchFamily="34" charset="0"/>
-                          <a:ea typeface="Arial" pitchFamily="34" charset="-122"/>
-                          <a:cs typeface="Arial" pitchFamily="34" charset="-120"/>
-                        </a:rPr>
-                        <a:t>7.58</a:t>
-                      </a:r>
-                      <a:endParaRPr lang="en-US" sz="900" dirty="0">
-                        <a:latin typeface="Arial" charset="0"/>
-                        <a:ea typeface="Arial" charset="0"/>
-                        <a:cs typeface="Arial" charset="0"/>
-                      </a:endParaRPr>
-                    </a:p>
-                  </a:txBody>
-                  <a:tcPr marL="91440" marR="91440" marT="45720" marB="45720">
-                    <a:lnL w="6350" cap="flat" cmpd="sng" algn="ctr">
-                      <a:solidFill>
-                        <a:srgbClr val="CBD5E1"/>
-                      </a:solidFill>
-                      <a:prstDash val="solid"/>
-                      <a:round/>
-                      <a:headEnd type="none" w="med" len="med"/>
-                      <a:tailEnd type="none" w="med" len="med"/>
-                    </a:lnL>
-                    <a:lnR w="6350" cap="flat" cmpd="sng" algn="ctr">
-                      <a:solidFill>
-                        <a:srgbClr val="CBD5E1"/>
-                      </a:solidFill>
-                      <a:prstDash val="solid"/>
-                      <a:round/>
-                      <a:headEnd type="none" w="med" len="med"/>
-                      <a:tailEnd type="none" w="med" len="med"/>
-                    </a:lnR>
-                    <a:lnT w="6350" cap="flat" cmpd="sng" algn="ctr">
-                      <a:solidFill>
-                        <a:srgbClr val="CBD5E1"/>
-                      </a:solidFill>
-                      <a:prstDash val="solid"/>
-                      <a:round/>
-                      <a:headEnd type="none" w="med" len="med"/>
-                      <a:tailEnd type="none" w="med" len="med"/>
-                    </a:lnT>
-                    <a:lnB w="6350" cap="flat" cmpd="sng" algn="ctr">
-                      <a:solidFill>
-                        <a:srgbClr val="CBD5E1"/>
-                      </a:solidFill>
-                      <a:prstDash val="solid"/>
-                      <a:round/>
-                      <a:headEnd type="none" w="med" len="med"/>
-                      <a:tailEnd type="none" w="med" len="med"/>
-                    </a:lnB>
-                    <a:solidFill>
-                      <a:srgbClr val="FFFFFF"/>
-                    </a:solidFill>
-                  </a:tcPr>
-                </a:tc>
-                <a:tc>
-                  <a:txBody>
-                    <a:bodyPr/>
-                    <a:lstStyle/>
-                    <a:p>
-                      <a:pPr algn="ctr" indent="0" marL="0">
-                        <a:buNone/>
-                      </a:pPr>
-                      <a:r>
-                        <a:rPr lang="en-US" sz="900" dirty="0">
-                          <a:solidFill>
-                            <a:srgbClr val="000000"/>
-                          </a:solidFill>
-                          <a:latin typeface="Arial" pitchFamily="34" charset="0"/>
-                          <a:ea typeface="Arial" pitchFamily="34" charset="-122"/>
-                          <a:cs typeface="Arial" pitchFamily="34" charset="-120"/>
-                        </a:rPr>
-                        <a:t>/10</a:t>
-                      </a:r>
-                      <a:endParaRPr lang="en-US" sz="900" dirty="0">
-                        <a:latin typeface="Arial" charset="0"/>
-                        <a:ea typeface="Arial" charset="0"/>
-                        <a:cs typeface="Arial" charset="0"/>
-                      </a:endParaRPr>
-                    </a:p>
-                  </a:txBody>
-                  <a:tcPr marL="91440" marR="91440" marT="45720" marB="45720">
-                    <a:lnL w="6350" cap="flat" cmpd="sng" algn="ctr">
-                      <a:solidFill>
-                        <a:srgbClr val="CBD5E1"/>
-                      </a:solidFill>
-                      <a:prstDash val="solid"/>
-                      <a:round/>
-                      <a:headEnd type="none" w="med" len="med"/>
-                      <a:tailEnd type="none" w="med" len="med"/>
-                    </a:lnL>
-                    <a:lnR w="6350" cap="flat" cmpd="sng" algn="ctr">
-                      <a:solidFill>
-                        <a:srgbClr val="CBD5E1"/>
-                      </a:solidFill>
-                      <a:prstDash val="solid"/>
-                      <a:round/>
-                      <a:headEnd type="none" w="med" len="med"/>
-                      <a:tailEnd type="none" w="med" len="med"/>
-                    </a:lnR>
-                    <a:lnT w="6350" cap="flat" cmpd="sng" algn="ctr">
-                      <a:solidFill>
-                        <a:srgbClr val="CBD5E1"/>
-                      </a:solidFill>
-                      <a:prstDash val="solid"/>
-                      <a:round/>
-                      <a:headEnd type="none" w="med" len="med"/>
-                      <a:tailEnd type="none" w="med" len="med"/>
-                    </a:lnT>
-                    <a:lnB w="6350" cap="flat" cmpd="sng" algn="ctr">
-                      <a:solidFill>
-                        <a:srgbClr val="CBD5E1"/>
-                      </a:solidFill>
-                      <a:prstDash val="solid"/>
-                      <a:round/>
-                      <a:headEnd type="none" w="med" len="med"/>
-                      <a:tailEnd type="none" w="med" len="med"/>
-                    </a:lnB>
-                    <a:solidFill>
-                      <a:srgbClr val="FFFFFF"/>
-                    </a:solidFill>
-                  </a:tcPr>
-                </a:tc>
-                <a:tc>
-                  <a:txBody>
-                    <a:bodyPr/>
-                    <a:lstStyle/>
-                    <a:p>
-                      <a:pPr algn="ctr" indent="0" marL="0">
-                        <a:buNone/>
-                      </a:pPr>
-                      <a:r>
-                        <a:rPr lang="en-US" sz="900" dirty="0">
-                          <a:solidFill>
-                            <a:srgbClr val="000000"/>
-                          </a:solidFill>
-                          <a:latin typeface="Arial" pitchFamily="34" charset="0"/>
-                          <a:ea typeface="Arial" pitchFamily="34" charset="-122"/>
-                          <a:cs typeface="Arial" pitchFamily="34" charset="-120"/>
-                        </a:rPr>
-                        <a:t>7.58</a:t>
+                        <a:t>8</a:t>
                       </a:r>
                       <a:endParaRPr lang="en-US" sz="900" dirty="0">
                         <a:latin typeface="Arial" charset="0"/>
@@ -8589,7 +8566,7 @@
                           <a:ea typeface="Arial" pitchFamily="34" charset="-122"/>
                           <a:cs typeface="Arial" pitchFamily="34" charset="-120"/>
                         </a:rPr>
-                        <a:t>4</a:t>
+                        <a:t>3</a:t>
                       </a:r>
                       <a:endParaRPr lang="en-US" sz="900" dirty="0">
                         <a:latin typeface="Arial" charset="0"/>
@@ -8657,7 +8634,7 @@
                           <a:ea typeface="Arial" pitchFamily="34" charset="-122"/>
                           <a:cs typeface="Arial" pitchFamily="34" charset="-120"/>
                         </a:rPr>
-                        <a:t>3.75</a:t>
+                        <a:t>3.67</a:t>
                       </a:r>
                       <a:endParaRPr lang="en-US" sz="900" dirty="0">
                         <a:latin typeface="Arial" charset="0"/>
@@ -8793,7 +8770,7 @@
                           <a:ea typeface="Arial" pitchFamily="34" charset="-122"/>
                           <a:cs typeface="Arial" pitchFamily="34" charset="-120"/>
                         </a:rPr>
-                        <a:t>7.5</a:t>
+                        <a:t>7.33</a:t>
                       </a:r>
                       <a:endParaRPr lang="en-US" sz="900" dirty="0">
                         <a:latin typeface="Arial" charset="0"/>
@@ -8841,348 +8818,6 @@
                     </a:lnB>
                     <a:solidFill>
                       <a:srgbClr val="E8EFF8"/>
-                    </a:solidFill>
-                  </a:tcPr>
-                </a:tc>
-              </a:tr>
-              <a:tr h="201168">
-                <a:tc>
-                  <a:txBody>
-                    <a:bodyPr/>
-                    <a:lstStyle/>
-                    <a:p>
-                      <a:pPr algn="ctr" indent="0" marL="0">
-                        <a:buNone/>
-                      </a:pPr>
-                      <a:r>
-                        <a:rPr lang="en-US" sz="900" dirty="0">
-                          <a:solidFill>
-                            <a:srgbClr val="000000"/>
-                          </a:solidFill>
-                          <a:latin typeface="Arial" pitchFamily="34" charset="0"/>
-                          <a:ea typeface="Arial" pitchFamily="34" charset="-122"/>
-                          <a:cs typeface="Arial" pitchFamily="34" charset="-120"/>
-                        </a:rPr>
-                        <a:t>楽天トラベル</a:t>
-                      </a:r>
-                      <a:endParaRPr lang="en-US" sz="900" dirty="0">
-                        <a:latin typeface="Arial" charset="0"/>
-                        <a:ea typeface="Arial" charset="0"/>
-                        <a:cs typeface="Arial" charset="0"/>
-                      </a:endParaRPr>
-                    </a:p>
-                  </a:txBody>
-                  <a:tcPr marL="91440" marR="91440" marT="45720" marB="45720">
-                    <a:lnL w="6350" cap="flat" cmpd="sng" algn="ctr">
-                      <a:solidFill>
-                        <a:srgbClr val="CBD5E1"/>
-                      </a:solidFill>
-                      <a:prstDash val="solid"/>
-                      <a:round/>
-                      <a:headEnd type="none" w="med" len="med"/>
-                      <a:tailEnd type="none" w="med" len="med"/>
-                    </a:lnL>
-                    <a:lnR w="6350" cap="flat" cmpd="sng" algn="ctr">
-                      <a:solidFill>
-                        <a:srgbClr val="CBD5E1"/>
-                      </a:solidFill>
-                      <a:prstDash val="solid"/>
-                      <a:round/>
-                      <a:headEnd type="none" w="med" len="med"/>
-                      <a:tailEnd type="none" w="med" len="med"/>
-                    </a:lnR>
-                    <a:lnT w="6350" cap="flat" cmpd="sng" algn="ctr">
-                      <a:solidFill>
-                        <a:srgbClr val="CBD5E1"/>
-                      </a:solidFill>
-                      <a:prstDash val="solid"/>
-                      <a:round/>
-                      <a:headEnd type="none" w="med" len="med"/>
-                      <a:tailEnd type="none" w="med" len="med"/>
-                    </a:lnT>
-                    <a:lnB w="6350" cap="flat" cmpd="sng" algn="ctr">
-                      <a:solidFill>
-                        <a:srgbClr val="CBD5E1"/>
-                      </a:solidFill>
-                      <a:prstDash val="solid"/>
-                      <a:round/>
-                      <a:headEnd type="none" w="med" len="med"/>
-                      <a:tailEnd type="none" w="med" len="med"/>
-                    </a:lnB>
-                    <a:solidFill>
-                      <a:srgbClr val="FFFFFF"/>
-                    </a:solidFill>
-                  </a:tcPr>
-                </a:tc>
-                <a:tc>
-                  <a:txBody>
-                    <a:bodyPr/>
-                    <a:lstStyle/>
-                    <a:p>
-                      <a:pPr algn="ctr" indent="0" marL="0">
-                        <a:buNone/>
-                      </a:pPr>
-                      <a:r>
-                        <a:rPr lang="en-US" sz="900" dirty="0">
-                          <a:solidFill>
-                            <a:srgbClr val="000000"/>
-                          </a:solidFill>
-                          <a:latin typeface="Arial" pitchFamily="34" charset="0"/>
-                          <a:ea typeface="Arial" pitchFamily="34" charset="-122"/>
-                          <a:cs typeface="Arial" pitchFamily="34" charset="-120"/>
-                        </a:rPr>
-                        <a:t>4</a:t>
-                      </a:r>
-                      <a:endParaRPr lang="en-US" sz="900" dirty="0">
-                        <a:latin typeface="Arial" charset="0"/>
-                        <a:ea typeface="Arial" charset="0"/>
-                        <a:cs typeface="Arial" charset="0"/>
-                      </a:endParaRPr>
-                    </a:p>
-                  </a:txBody>
-                  <a:tcPr marL="91440" marR="91440" marT="45720" marB="45720">
-                    <a:lnL w="6350" cap="flat" cmpd="sng" algn="ctr">
-                      <a:solidFill>
-                        <a:srgbClr val="CBD5E1"/>
-                      </a:solidFill>
-                      <a:prstDash val="solid"/>
-                      <a:round/>
-                      <a:headEnd type="none" w="med" len="med"/>
-                      <a:tailEnd type="none" w="med" len="med"/>
-                    </a:lnL>
-                    <a:lnR w="6350" cap="flat" cmpd="sng" algn="ctr">
-                      <a:solidFill>
-                        <a:srgbClr val="CBD5E1"/>
-                      </a:solidFill>
-                      <a:prstDash val="solid"/>
-                      <a:round/>
-                      <a:headEnd type="none" w="med" len="med"/>
-                      <a:tailEnd type="none" w="med" len="med"/>
-                    </a:lnR>
-                    <a:lnT w="6350" cap="flat" cmpd="sng" algn="ctr">
-                      <a:solidFill>
-                        <a:srgbClr val="CBD5E1"/>
-                      </a:solidFill>
-                      <a:prstDash val="solid"/>
-                      <a:round/>
-                      <a:headEnd type="none" w="med" len="med"/>
-                      <a:tailEnd type="none" w="med" len="med"/>
-                    </a:lnT>
-                    <a:lnB w="6350" cap="flat" cmpd="sng" algn="ctr">
-                      <a:solidFill>
-                        <a:srgbClr val="CBD5E1"/>
-                      </a:solidFill>
-                      <a:prstDash val="solid"/>
-                      <a:round/>
-                      <a:headEnd type="none" w="med" len="med"/>
-                      <a:tailEnd type="none" w="med" len="med"/>
-                    </a:lnB>
-                    <a:solidFill>
-                      <a:srgbClr val="FFFFFF"/>
-                    </a:solidFill>
-                  </a:tcPr>
-                </a:tc>
-                <a:tc>
-                  <a:txBody>
-                    <a:bodyPr/>
-                    <a:lstStyle/>
-                    <a:p>
-                      <a:pPr algn="ctr" indent="0" marL="0">
-                        <a:buNone/>
-                      </a:pPr>
-                      <a:r>
-                        <a:rPr lang="en-US" sz="900" dirty="0">
-                          <a:solidFill>
-                            <a:srgbClr val="000000"/>
-                          </a:solidFill>
-                          <a:latin typeface="Arial" pitchFamily="34" charset="0"/>
-                          <a:ea typeface="Arial" pitchFamily="34" charset="-122"/>
-                          <a:cs typeface="Arial" pitchFamily="34" charset="-120"/>
-                        </a:rPr>
-                        <a:t>3.5</a:t>
-                      </a:r>
-                      <a:endParaRPr lang="en-US" sz="900" dirty="0">
-                        <a:latin typeface="Arial" charset="0"/>
-                        <a:ea typeface="Arial" charset="0"/>
-                        <a:cs typeface="Arial" charset="0"/>
-                      </a:endParaRPr>
-                    </a:p>
-                  </a:txBody>
-                  <a:tcPr marL="91440" marR="91440" marT="45720" marB="45720">
-                    <a:lnL w="6350" cap="flat" cmpd="sng" algn="ctr">
-                      <a:solidFill>
-                        <a:srgbClr val="CBD5E1"/>
-                      </a:solidFill>
-                      <a:prstDash val="solid"/>
-                      <a:round/>
-                      <a:headEnd type="none" w="med" len="med"/>
-                      <a:tailEnd type="none" w="med" len="med"/>
-                    </a:lnL>
-                    <a:lnR w="6350" cap="flat" cmpd="sng" algn="ctr">
-                      <a:solidFill>
-                        <a:srgbClr val="CBD5E1"/>
-                      </a:solidFill>
-                      <a:prstDash val="solid"/>
-                      <a:round/>
-                      <a:headEnd type="none" w="med" len="med"/>
-                      <a:tailEnd type="none" w="med" len="med"/>
-                    </a:lnR>
-                    <a:lnT w="6350" cap="flat" cmpd="sng" algn="ctr">
-                      <a:solidFill>
-                        <a:srgbClr val="CBD5E1"/>
-                      </a:solidFill>
-                      <a:prstDash val="solid"/>
-                      <a:round/>
-                      <a:headEnd type="none" w="med" len="med"/>
-                      <a:tailEnd type="none" w="med" len="med"/>
-                    </a:lnT>
-                    <a:lnB w="6350" cap="flat" cmpd="sng" algn="ctr">
-                      <a:solidFill>
-                        <a:srgbClr val="CBD5E1"/>
-                      </a:solidFill>
-                      <a:prstDash val="solid"/>
-                      <a:round/>
-                      <a:headEnd type="none" w="med" len="med"/>
-                      <a:tailEnd type="none" w="med" len="med"/>
-                    </a:lnB>
-                    <a:solidFill>
-                      <a:srgbClr val="FFFFFF"/>
-                    </a:solidFill>
-                  </a:tcPr>
-                </a:tc>
-                <a:tc>
-                  <a:txBody>
-                    <a:bodyPr/>
-                    <a:lstStyle/>
-                    <a:p>
-                      <a:pPr algn="ctr" indent="0" marL="0">
-                        <a:buNone/>
-                      </a:pPr>
-                      <a:r>
-                        <a:rPr lang="en-US" sz="900" dirty="0">
-                          <a:solidFill>
-                            <a:srgbClr val="000000"/>
-                          </a:solidFill>
-                          <a:latin typeface="Arial" pitchFamily="34" charset="0"/>
-                          <a:ea typeface="Arial" pitchFamily="34" charset="-122"/>
-                          <a:cs typeface="Arial" pitchFamily="34" charset="-120"/>
-                        </a:rPr>
-                        <a:t>/5 (×2)</a:t>
-                      </a:r>
-                      <a:endParaRPr lang="en-US" sz="900" dirty="0">
-                        <a:latin typeface="Arial" charset="0"/>
-                        <a:ea typeface="Arial" charset="0"/>
-                        <a:cs typeface="Arial" charset="0"/>
-                      </a:endParaRPr>
-                    </a:p>
-                  </a:txBody>
-                  <a:tcPr marL="91440" marR="91440" marT="45720" marB="45720">
-                    <a:lnL w="6350" cap="flat" cmpd="sng" algn="ctr">
-                      <a:solidFill>
-                        <a:srgbClr val="CBD5E1"/>
-                      </a:solidFill>
-                      <a:prstDash val="solid"/>
-                      <a:round/>
-                      <a:headEnd type="none" w="med" len="med"/>
-                      <a:tailEnd type="none" w="med" len="med"/>
-                    </a:lnL>
-                    <a:lnR w="6350" cap="flat" cmpd="sng" algn="ctr">
-                      <a:solidFill>
-                        <a:srgbClr val="CBD5E1"/>
-                      </a:solidFill>
-                      <a:prstDash val="solid"/>
-                      <a:round/>
-                      <a:headEnd type="none" w="med" len="med"/>
-                      <a:tailEnd type="none" w="med" len="med"/>
-                    </a:lnR>
-                    <a:lnT w="6350" cap="flat" cmpd="sng" algn="ctr">
-                      <a:solidFill>
-                        <a:srgbClr val="CBD5E1"/>
-                      </a:solidFill>
-                      <a:prstDash val="solid"/>
-                      <a:round/>
-                      <a:headEnd type="none" w="med" len="med"/>
-                      <a:tailEnd type="none" w="med" len="med"/>
-                    </a:lnT>
-                    <a:lnB w="6350" cap="flat" cmpd="sng" algn="ctr">
-                      <a:solidFill>
-                        <a:srgbClr val="CBD5E1"/>
-                      </a:solidFill>
-                      <a:prstDash val="solid"/>
-                      <a:round/>
-                      <a:headEnd type="none" w="med" len="med"/>
-                      <a:tailEnd type="none" w="med" len="med"/>
-                    </a:lnB>
-                    <a:solidFill>
-                      <a:srgbClr val="FFFFFF"/>
-                    </a:solidFill>
-                  </a:tcPr>
-                </a:tc>
-                <a:tc>
-                  <a:txBody>
-                    <a:bodyPr/>
-                    <a:lstStyle/>
-                    <a:p>
-                      <a:pPr algn="ctr" indent="0" marL="0">
-                        <a:buNone/>
-                      </a:pPr>
-                      <a:r>
-                        <a:rPr lang="en-US" sz="900" dirty="0">
-                          <a:solidFill>
-                            <a:srgbClr val="000000"/>
-                          </a:solidFill>
-                          <a:latin typeface="Arial" pitchFamily="34" charset="0"/>
-                          <a:ea typeface="Arial" pitchFamily="34" charset="-122"/>
-                          <a:cs typeface="Arial" pitchFamily="34" charset="-120"/>
-                        </a:rPr>
-                        <a:t>7</a:t>
-                      </a:r>
-                      <a:endParaRPr lang="en-US" sz="900" dirty="0">
-                        <a:latin typeface="Arial" charset="0"/>
-                        <a:ea typeface="Arial" charset="0"/>
-                        <a:cs typeface="Arial" charset="0"/>
-                      </a:endParaRPr>
-                    </a:p>
-                  </a:txBody>
-                  <a:tcPr marL="91440" marR="91440" marT="45720" marB="45720">
-                    <a:lnL w="6350" cap="flat" cmpd="sng" algn="ctr">
-                      <a:solidFill>
-                        <a:srgbClr val="CBD5E1"/>
-                      </a:solidFill>
-                      <a:prstDash val="solid"/>
-                      <a:round/>
-                      <a:headEnd type="none" w="med" len="med"/>
-                      <a:tailEnd type="none" w="med" len="med"/>
-                    </a:lnL>
-                    <a:lnR w="6350" cap="flat" cmpd="sng" algn="ctr">
-                      <a:solidFill>
-                        <a:srgbClr val="CBD5E1"/>
-                      </a:solidFill>
-                      <a:prstDash val="solid"/>
-                      <a:round/>
-                      <a:headEnd type="none" w="med" len="med"/>
-                      <a:tailEnd type="none" w="med" len="med"/>
-                    </a:lnR>
-                    <a:lnT w="6350" cap="flat" cmpd="sng" algn="ctr">
-                      <a:solidFill>
-                        <a:srgbClr val="CBD5E1"/>
-                      </a:solidFill>
-                      <a:prstDash val="solid"/>
-                      <a:round/>
-                      <a:headEnd type="none" w="med" len="med"/>
-                      <a:tailEnd type="none" w="med" len="med"/>
-                    </a:lnT>
-                    <a:lnB w="6350" cap="flat" cmpd="sng" algn="ctr">
-                      <a:solidFill>
-                        <a:srgbClr val="CBD5E1"/>
-                      </a:solidFill>
-                      <a:prstDash val="solid"/>
-                      <a:round/>
-                      <a:headEnd type="none" w="med" len="med"/>
-                      <a:tailEnd type="none" w="med" len="med"/>
-                    </a:lnB>
-                    <a:solidFill>
-                      <a:srgbClr val="FFFFFF"/>
                     </a:solidFill>
                   </a:tcPr>
                 </a:tc>
@@ -9252,7 +8887,7 @@
                       <a:tailEnd type="none" w="med" len="med"/>
                     </a:lnB>
                     <a:solidFill>
-                      <a:srgbClr val="E8EFF8"/>
+                      <a:srgbClr val="FFFFFF"/>
                     </a:solidFill>
                   </a:tcPr>
                 </a:tc>
@@ -9273,7 +8908,7 @@
                           <a:ea typeface="Arial" pitchFamily="34" charset="-122"/>
                           <a:cs typeface="Arial" pitchFamily="34" charset="-120"/>
                         </a:rPr>
-                        <a:t>16</a:t>
+                        <a:t>9</a:t>
                       </a:r>
                       <a:endParaRPr lang="en-US" sz="900" dirty="0">
                         <a:latin typeface="Arial" charset="0"/>
@@ -9320,7 +8955,7 @@
                       <a:tailEnd type="none" w="med" len="med"/>
                     </a:lnB>
                     <a:solidFill>
-                      <a:srgbClr val="E8EFF8"/>
+                      <a:srgbClr val="FFFFFF"/>
                     </a:solidFill>
                   </a:tcPr>
                 </a:tc>
@@ -9341,7 +8976,7 @@
                           <a:ea typeface="Arial" pitchFamily="34" charset="-122"/>
                           <a:cs typeface="Arial" pitchFamily="34" charset="-120"/>
                         </a:rPr>
-                        <a:t>6.69</a:t>
+                        <a:t>6.67</a:t>
                       </a:r>
                       <a:endParaRPr lang="en-US" sz="900" dirty="0">
                         <a:latin typeface="Arial" charset="0"/>
@@ -9388,7 +9023,7 @@
                       <a:tailEnd type="none" w="med" len="med"/>
                     </a:lnB>
                     <a:solidFill>
-                      <a:srgbClr val="E8EFF8"/>
+                      <a:srgbClr val="FFFFFF"/>
                     </a:solidFill>
                   </a:tcPr>
                 </a:tc>
@@ -9456,7 +9091,7 @@
                       <a:tailEnd type="none" w="med" len="med"/>
                     </a:lnB>
                     <a:solidFill>
-                      <a:srgbClr val="E8EFF8"/>
+                      <a:srgbClr val="FFFFFF"/>
                     </a:solidFill>
                   </a:tcPr>
                 </a:tc>
@@ -9477,7 +9112,7 @@
                           <a:ea typeface="Arial" pitchFamily="34" charset="-122"/>
                           <a:cs typeface="Arial" pitchFamily="34" charset="-120"/>
                         </a:rPr>
-                        <a:t>6.69</a:t>
+                        <a:t>6.67</a:t>
                       </a:r>
                       <a:endParaRPr lang="en-US" sz="900" dirty="0">
                         <a:latin typeface="Arial" charset="0"/>
@@ -9524,7 +9159,7 @@
                       <a:tailEnd type="none" w="med" len="med"/>
                     </a:lnB>
                     <a:solidFill>
-                      <a:srgbClr val="E8EFF8"/>
+                      <a:srgbClr val="FFFFFF"/>
                     </a:solidFill>
                   </a:tcPr>
                 </a:tc>
@@ -9885,7 +9520,7 @@
                 <a:ea typeface="Arial" pitchFamily="34" charset="-122"/>
                 <a:cs typeface="Arial" pitchFamily="34" charset="-120"/>
               </a:rPr>
-              <a:t>38件（63.3%）</a:t>
+              <a:t>18件（64.3%）</a:t>
             </a:r>
             <a:endParaRPr lang="en-US" sz="1100" dirty="0"/>
           </a:p>
@@ -9983,7 +9618,7 @@
                 <a:ea typeface="Arial" pitchFamily="34" charset="-122"/>
                 <a:cs typeface="Arial" pitchFamily="34" charset="-120"/>
               </a:rPr>
-              <a:t>16件（26.7%）</a:t>
+              <a:t>8件（28.6%）</a:t>
             </a:r>
             <a:endParaRPr lang="en-US" sz="1100" dirty="0"/>
           </a:p>
@@ -10081,7 +9716,7 @@
                 <a:ea typeface="Arial" pitchFamily="34" charset="-122"/>
                 <a:cs typeface="Arial" pitchFamily="34" charset="-120"/>
               </a:rPr>
-              <a:t>6件（10.0%）</a:t>
+              <a:t>2件（7.1%）</a:t>
             </a:r>
             <a:endParaRPr lang="en-US" sz="1100" dirty="0"/>
           </a:p>
@@ -10638,7 +10273,7 @@
                 <a:ea typeface="Arial" pitchFamily="34" charset="-122"/>
                 <a:cs typeface="Arial" pitchFamily="34" charset="-120"/>
               </a:rPr>
-              <a:t>10件+</a:t>
+              <a:t>8件</a:t>
             </a:r>
             <a:endParaRPr lang="en-US" sz="900" dirty="0"/>
           </a:p>
@@ -10861,7 +10496,7 @@
                 <a:ea typeface="Arial" pitchFamily="34" charset="-122"/>
                 <a:cs typeface="Arial" pitchFamily="34" charset="-120"/>
               </a:rPr>
-              <a:t>10件+</a:t>
+              <a:t>6件</a:t>
             </a:r>
             <a:endParaRPr lang="en-US" sz="900" dirty="0"/>
           </a:p>
@@ -11084,7 +10719,7 @@
                 <a:ea typeface="Arial" pitchFamily="34" charset="-122"/>
                 <a:cs typeface="Arial" pitchFamily="34" charset="-120"/>
               </a:rPr>
-              <a:t>8件</a:t>
+              <a:t>6件</a:t>
             </a:r>
             <a:endParaRPr lang="en-US" sz="900" dirty="0"/>
           </a:p>
@@ -11346,7 +10981,7 @@
                 <a:ea typeface="Arial" pitchFamily="34" charset="-122"/>
                 <a:cs typeface="Arial" pitchFamily="34" charset="-120"/>
               </a:rPr>
-              <a:t>コストパフォーマンス</a:t>
+              <a:t>コンビニ・周辺施設</a:t>
             </a:r>
             <a:endParaRPr lang="en-US" sz="1300" dirty="0"/>
           </a:p>
@@ -11385,7 +11020,7 @@
                 <a:ea typeface="Arial" pitchFamily="34" charset="-122"/>
                 <a:cs typeface="Arial" pitchFamily="34" charset="-120"/>
               </a:rPr>
-              <a:t>他のアバよりも狭い 駅からは遠いが、その分比較的安い 羽田空港の乗り継ぎに利用するなら十分か 他のアバよりも狭い ...</a:t>
+              <a:t>ビュッフェ式の朝食は1日あたり12～16カナダドルも追加料金がかかるので、近くにスーパーやコンビニがあることを考え...</a:t>
             </a:r>
             <a:endParaRPr lang="en-US" sz="900" dirty="0"/>
           </a:p>
@@ -11424,7 +11059,7 @@
                 <a:ea typeface="Arial" pitchFamily="34" charset="-122"/>
                 <a:cs typeface="Arial" pitchFamily="34" charset="-120"/>
               </a:rPr>
-              <a:t>「何と言ってもお値段がお手頃なのでねるだけなら充分です チェックアウトスムーズに出来るのも良い」</a:t>
+              <a:t>「駅近で周りにスーパー、コンビニがあるところ」</a:t>
             </a:r>
             <a:endParaRPr lang="en-US" sz="900" dirty="0"/>
           </a:p>
@@ -11530,7 +11165,7 @@
                 <a:ea typeface="Arial" pitchFamily="34" charset="-122"/>
                 <a:cs typeface="Arial" pitchFamily="34" charset="-120"/>
               </a:rPr>
-              <a:t>2件</a:t>
+              <a:t>1件</a:t>
             </a:r>
             <a:endParaRPr lang="en-US" sz="900" dirty="0"/>
           </a:p>
@@ -11569,7 +11204,7 @@
                 <a:ea typeface="Arial" pitchFamily="34" charset="-122"/>
                 <a:cs typeface="Arial" pitchFamily="34" charset="-120"/>
               </a:rPr>
-              <a:t>朝食</a:t>
+              <a:t>コストパフォーマンス</a:t>
             </a:r>
             <a:endParaRPr lang="en-US" sz="1300" dirty="0"/>
           </a:p>
@@ -11608,7 +11243,7 @@
                 <a:ea typeface="Arial" pitchFamily="34" charset="-122"/>
                 <a:cs typeface="Arial" pitchFamily="34" charset="-120"/>
               </a:rPr>
-              <a:t>ビュッフェ式の朝食は1日あたり12～16カナダドルも追加料金がかかるので、近くにスーパーやコンビニがあることを考え...</a:t>
+              <a:t>他のアバよりも狭い 駅からは遠いが、その分比較的安い 羽田空港の乗り継ぎに利用するなら十分か 他のアバよりも狭い ...</a:t>
             </a:r>
             <a:endParaRPr lang="en-US" sz="900" dirty="0"/>
           </a:p>
@@ -11647,7 +11282,7 @@
                 <a:ea typeface="Arial" pitchFamily="34" charset="-122"/>
                 <a:cs typeface="Arial" pitchFamily="34" charset="-120"/>
               </a:rPr>
-              <a:t>「食事の値段も当日に朝食券を買うと1800円になって結構割高なのですが、クオリティとしては個人的にはお値段に見合った...」</a:t>
+              <a:t>「他のアバよりも狭い 駅からは遠いが、その分比較的安い 羽田空港の乗り継ぎに利用するなら十分か 他のアバよりも狭い ...」</a:t>
             </a:r>
             <a:endParaRPr lang="en-US" sz="900" dirty="0"/>
           </a:p>
@@ -12405,7 +12040,7 @@
                           <a:ea typeface="Arial" pitchFamily="34" charset="-122"/>
                           <a:cs typeface="Arial" pitchFamily="34" charset="-120"/>
                         </a:rPr>
-                        <a:t>6件</a:t>
+                        <a:t>3件</a:t>
                       </a:r>
                       <a:endParaRPr lang="en-US" sz="900" dirty="0">
                         <a:latin typeface="Arial" charset="0"/>
@@ -12679,7 +12314,7 @@
                           <a:ea typeface="Arial" pitchFamily="34" charset="-122"/>
                           <a:cs typeface="Arial" pitchFamily="34" charset="-120"/>
                         </a:rPr>
-                        <a:t>4件</a:t>
+                        <a:t>2件</a:t>
                       </a:r>
                       <a:endParaRPr lang="en-US" sz="900" dirty="0">
                         <a:latin typeface="Arial" charset="0"/>
@@ -12817,7 +12452,7 @@
                           <a:ea typeface="Arial" pitchFamily="34" charset="-122"/>
                           <a:cs typeface="Arial" pitchFamily="34" charset="-120"/>
                         </a:rPr>
-                        <a:t>エアコン・空調</a:t>
+                        <a:t>防音性能</a:t>
                       </a:r>
                       <a:endParaRPr lang="en-US" sz="900" dirty="0">
                         <a:latin typeface="Arial" charset="0"/>
@@ -12885,7 +12520,7 @@
                           <a:ea typeface="Arial" pitchFamily="34" charset="-122"/>
                           <a:cs typeface="Arial" pitchFamily="34" charset="-120"/>
                         </a:rPr>
-                        <a:t>Coming from Keikyu-Kamata there was a shoutengai giving p...</a:t>
+                        <a:t>道路沿いだったけど防音がしっかりされていて外の音は聞こえない</a:t>
                       </a:r>
                       <a:endParaRPr lang="en-US" sz="900" dirty="0">
                         <a:latin typeface="Arial" charset="0"/>
@@ -12953,7 +12588,7 @@
                           <a:ea typeface="Arial" pitchFamily="34" charset="-122"/>
                           <a:cs typeface="Arial" pitchFamily="34" charset="-120"/>
                         </a:rPr>
-                        <a:t>2件</a:t>
+                        <a:t>1件</a:t>
                       </a:r>
                       <a:endParaRPr lang="en-US" sz="900" dirty="0">
                         <a:latin typeface="Arial" charset="0"/>
@@ -13091,7 +12726,7 @@
                           <a:ea typeface="Arial" pitchFamily="34" charset="-122"/>
                           <a:cs typeface="Arial" pitchFamily="34" charset="-120"/>
                         </a:rPr>
-                        <a:t>清掃不備</a:t>
+                        <a:t>エアコン・空調</a:t>
                       </a:r>
                       <a:endParaRPr lang="en-US" sz="900" dirty="0">
                         <a:latin typeface="Arial" charset="0"/>
@@ -13159,7 +12794,7 @@
                           <a:ea typeface="Arial" pitchFamily="34" charset="-122"/>
                           <a:cs typeface="Arial" pitchFamily="34" charset="-120"/>
                         </a:rPr>
-                        <a:t>そこは汚くて埃っぽく、以前の訪問時の残骸も散乱していた</a:t>
+                        <a:t>Coming from Keikyu-Kamata there was a shoutengai giving p...</a:t>
                       </a:r>
                       <a:endParaRPr lang="en-US" sz="900" dirty="0">
                         <a:latin typeface="Arial" charset="0"/>
@@ -13227,7 +12862,7 @@
                           <a:ea typeface="Arial" pitchFamily="34" charset="-122"/>
                           <a:cs typeface="Arial" pitchFamily="34" charset="-120"/>
                         </a:rPr>
-                        <a:t>2件</a:t>
+                        <a:t>1件</a:t>
                       </a:r>
                       <a:endParaRPr lang="en-US" sz="900" dirty="0">
                         <a:latin typeface="Arial" charset="0"/>
@@ -13365,7 +13000,7 @@
                           <a:ea typeface="Arial" pitchFamily="34" charset="-122"/>
                           <a:cs typeface="Arial" pitchFamily="34" charset="-120"/>
                         </a:rPr>
-                        <a:t>防音性能</a:t>
+                        <a:t>対応・サービスの不満</a:t>
                       </a:r>
                       <a:endParaRPr lang="en-US" sz="900" dirty="0">
                         <a:latin typeface="Arial" charset="0"/>
@@ -13433,7 +13068,7 @@
                           <a:ea typeface="Arial" pitchFamily="34" charset="-122"/>
                           <a:cs typeface="Arial" pitchFamily="34" charset="-120"/>
                         </a:rPr>
-                        <a:t>道路沿いだったけど防音がしっかりされていて外の音は聞こえない</a:t>
+                        <a:t>歯ブラシでこすれば、パッと見はもっときれいになりそうなので、ちょっと残念なところ</a:t>
                       </a:r>
                       <a:endParaRPr lang="en-US" sz="900" dirty="0">
                         <a:latin typeface="Arial" charset="0"/>
@@ -13639,7 +13274,7 @@
                           <a:ea typeface="Arial" pitchFamily="34" charset="-122"/>
                           <a:cs typeface="Arial" pitchFamily="34" charset="-120"/>
                         </a:rPr>
-                        <a:t>臭い・匂い</a:t>
+                        <a:t>清掃不備</a:t>
                       </a:r>
                       <a:endParaRPr lang="en-US" sz="900" dirty="0">
                         <a:latin typeface="Arial" charset="0"/>
@@ -13707,7 +13342,7 @@
                           <a:ea typeface="Arial" pitchFamily="34" charset="-122"/>
                           <a:cs typeface="Arial" pitchFamily="34" charset="-120"/>
                         </a:rPr>
-                        <a:t>禁煙の部屋を予約しましたが、かなり強いタバコの匂いがしました</a:t>
+                        <a:t>そこは汚くて埃っぽく、以前の訪問時の残骸も散乱していた</a:t>
                       </a:r>
                       <a:endParaRPr lang="en-US" sz="900" dirty="0">
                         <a:latin typeface="Arial" charset="0"/>
@@ -13827,280 +13462,6 @@
                   </a:tcPr>
                 </a:tc>
               </a:tr>
-              <a:tr h="320040">
-                <a:tc>
-                  <a:txBody>
-                    <a:bodyPr/>
-                    <a:lstStyle/>
-                    <a:p>
-                      <a:pPr algn="ctr" indent="0" marL="0">
-                        <a:buNone/>
-                      </a:pPr>
-                      <a:r>
-                        <a:rPr lang="en-US" sz="1200" b="1" dirty="0">
-                          <a:solidFill>
-                            <a:srgbClr val="94A3B8"/>
-                          </a:solidFill>
-                          <a:latin typeface="Arial" pitchFamily="34" charset="0"/>
-                          <a:ea typeface="Arial" pitchFamily="34" charset="-122"/>
-                          <a:cs typeface="Arial" pitchFamily="34" charset="-120"/>
-                        </a:rPr>
-                        <a:t>C</a:t>
-                      </a:r>
-                      <a:endParaRPr lang="en-US" sz="1200" dirty="0">
-                        <a:latin typeface="Arial" charset="0"/>
-                        <a:ea typeface="Arial" charset="0"/>
-                        <a:cs typeface="Arial" charset="0"/>
-                      </a:endParaRPr>
-                    </a:p>
-                  </a:txBody>
-                  <a:tcPr marL="91440" marR="91440" marT="45720" marB="45720">
-                    <a:lnL w="6350" cap="flat" cmpd="sng" algn="ctr">
-                      <a:solidFill>
-                        <a:srgbClr val="CBD5E1"/>
-                      </a:solidFill>
-                      <a:prstDash val="solid"/>
-                      <a:round/>
-                      <a:headEnd type="none" w="med" len="med"/>
-                      <a:tailEnd type="none" w="med" len="med"/>
-                    </a:lnL>
-                    <a:lnR w="6350" cap="flat" cmpd="sng" algn="ctr">
-                      <a:solidFill>
-                        <a:srgbClr val="CBD5E1"/>
-                      </a:solidFill>
-                      <a:prstDash val="solid"/>
-                      <a:round/>
-                      <a:headEnd type="none" w="med" len="med"/>
-                      <a:tailEnd type="none" w="med" len="med"/>
-                    </a:lnR>
-                    <a:lnT w="6350" cap="flat" cmpd="sng" algn="ctr">
-                      <a:solidFill>
-                        <a:srgbClr val="CBD5E1"/>
-                      </a:solidFill>
-                      <a:prstDash val="solid"/>
-                      <a:round/>
-                      <a:headEnd type="none" w="med" len="med"/>
-                      <a:tailEnd type="none" w="med" len="med"/>
-                    </a:lnT>
-                    <a:lnB w="6350" cap="flat" cmpd="sng" algn="ctr">
-                      <a:solidFill>
-                        <a:srgbClr val="CBD5E1"/>
-                      </a:solidFill>
-                      <a:prstDash val="solid"/>
-                      <a:round/>
-                      <a:headEnd type="none" w="med" len="med"/>
-                      <a:tailEnd type="none" w="med" len="med"/>
-                    </a:lnB>
-                    <a:solidFill>
-                      <a:srgbClr val="E8EFF8"/>
-                    </a:solidFill>
-                  </a:tcPr>
-                </a:tc>
-                <a:tc>
-                  <a:txBody>
-                    <a:bodyPr/>
-                    <a:lstStyle/>
-                    <a:p>
-                      <a:pPr indent="0" marL="0">
-                        <a:buNone/>
-                      </a:pPr>
-                      <a:r>
-                        <a:rPr lang="en-US" sz="900" b="1" dirty="0">
-                          <a:solidFill>
-                            <a:srgbClr val="334155"/>
-                          </a:solidFill>
-                          <a:latin typeface="Arial" pitchFamily="34" charset="0"/>
-                          <a:ea typeface="Arial" pitchFamily="34" charset="-122"/>
-                          <a:cs typeface="Arial" pitchFamily="34" charset="-120"/>
-                        </a:rPr>
-                        <a:t>対応・サービスの不満</a:t>
-                      </a:r>
-                      <a:endParaRPr lang="en-US" sz="900" dirty="0">
-                        <a:latin typeface="Arial" charset="0"/>
-                        <a:ea typeface="Arial" charset="0"/>
-                        <a:cs typeface="Arial" charset="0"/>
-                      </a:endParaRPr>
-                    </a:p>
-                  </a:txBody>
-                  <a:tcPr marL="91440" marR="91440" marT="45720" marB="45720">
-                    <a:lnL w="6350" cap="flat" cmpd="sng" algn="ctr">
-                      <a:solidFill>
-                        <a:srgbClr val="CBD5E1"/>
-                      </a:solidFill>
-                      <a:prstDash val="solid"/>
-                      <a:round/>
-                      <a:headEnd type="none" w="med" len="med"/>
-                      <a:tailEnd type="none" w="med" len="med"/>
-                    </a:lnL>
-                    <a:lnR w="6350" cap="flat" cmpd="sng" algn="ctr">
-                      <a:solidFill>
-                        <a:srgbClr val="CBD5E1"/>
-                      </a:solidFill>
-                      <a:prstDash val="solid"/>
-                      <a:round/>
-                      <a:headEnd type="none" w="med" len="med"/>
-                      <a:tailEnd type="none" w="med" len="med"/>
-                    </a:lnR>
-                    <a:lnT w="6350" cap="flat" cmpd="sng" algn="ctr">
-                      <a:solidFill>
-                        <a:srgbClr val="CBD5E1"/>
-                      </a:solidFill>
-                      <a:prstDash val="solid"/>
-                      <a:round/>
-                      <a:headEnd type="none" w="med" len="med"/>
-                      <a:tailEnd type="none" w="med" len="med"/>
-                    </a:lnT>
-                    <a:lnB w="6350" cap="flat" cmpd="sng" algn="ctr">
-                      <a:solidFill>
-                        <a:srgbClr val="CBD5E1"/>
-                      </a:solidFill>
-                      <a:prstDash val="solid"/>
-                      <a:round/>
-                      <a:headEnd type="none" w="med" len="med"/>
-                      <a:tailEnd type="none" w="med" len="med"/>
-                    </a:lnB>
-                    <a:solidFill>
-                      <a:srgbClr val="E8EFF8"/>
-                    </a:solidFill>
-                  </a:tcPr>
-                </a:tc>
-                <a:tc>
-                  <a:txBody>
-                    <a:bodyPr/>
-                    <a:lstStyle/>
-                    <a:p>
-                      <a:pPr indent="0" marL="0">
-                        <a:buNone/>
-                      </a:pPr>
-                      <a:r>
-                        <a:rPr lang="en-US" sz="900" dirty="0">
-                          <a:solidFill>
-                            <a:srgbClr val="64748B"/>
-                          </a:solidFill>
-                          <a:latin typeface="Arial" pitchFamily="34" charset="0"/>
-                          <a:ea typeface="Arial" pitchFamily="34" charset="-122"/>
-                          <a:cs typeface="Arial" pitchFamily="34" charset="-120"/>
-                        </a:rPr>
-                        <a:t>歯ブラシでこすれば、パッと見はもっときれいになりそうなので、ちょっと残念なところ</a:t>
-                      </a:r>
-                      <a:endParaRPr lang="en-US" sz="900" dirty="0">
-                        <a:latin typeface="Arial" charset="0"/>
-                        <a:ea typeface="Arial" charset="0"/>
-                        <a:cs typeface="Arial" charset="0"/>
-                      </a:endParaRPr>
-                    </a:p>
-                  </a:txBody>
-                  <a:tcPr marL="91440" marR="91440" marT="45720" marB="45720">
-                    <a:lnL w="6350" cap="flat" cmpd="sng" algn="ctr">
-                      <a:solidFill>
-                        <a:srgbClr val="CBD5E1"/>
-                      </a:solidFill>
-                      <a:prstDash val="solid"/>
-                      <a:round/>
-                      <a:headEnd type="none" w="med" len="med"/>
-                      <a:tailEnd type="none" w="med" len="med"/>
-                    </a:lnL>
-                    <a:lnR w="6350" cap="flat" cmpd="sng" algn="ctr">
-                      <a:solidFill>
-                        <a:srgbClr val="CBD5E1"/>
-                      </a:solidFill>
-                      <a:prstDash val="solid"/>
-                      <a:round/>
-                      <a:headEnd type="none" w="med" len="med"/>
-                      <a:tailEnd type="none" w="med" len="med"/>
-                    </a:lnR>
-                    <a:lnT w="6350" cap="flat" cmpd="sng" algn="ctr">
-                      <a:solidFill>
-                        <a:srgbClr val="CBD5E1"/>
-                      </a:solidFill>
-                      <a:prstDash val="solid"/>
-                      <a:round/>
-                      <a:headEnd type="none" w="med" len="med"/>
-                      <a:tailEnd type="none" w="med" len="med"/>
-                    </a:lnT>
-                    <a:lnB w="6350" cap="flat" cmpd="sng" algn="ctr">
-                      <a:solidFill>
-                        <a:srgbClr val="CBD5E1"/>
-                      </a:solidFill>
-                      <a:prstDash val="solid"/>
-                      <a:round/>
-                      <a:headEnd type="none" w="med" len="med"/>
-                      <a:tailEnd type="none" w="med" len="med"/>
-                    </a:lnB>
-                    <a:solidFill>
-                      <a:srgbClr val="E8EFF8"/>
-                    </a:solidFill>
-                  </a:tcPr>
-                </a:tc>
-                <a:tc>
-                  <a:txBody>
-                    <a:bodyPr/>
-                    <a:lstStyle/>
-                    <a:p>
-                      <a:pPr algn="ctr" indent="0" marL="0">
-                        <a:buNone/>
-                      </a:pPr>
-                      <a:r>
-                        <a:rPr lang="en-US" sz="900" dirty="0">
-                          <a:solidFill>
-                            <a:srgbClr val="334155"/>
-                          </a:solidFill>
-                          <a:latin typeface="Arial" pitchFamily="34" charset="0"/>
-                          <a:ea typeface="Arial" pitchFamily="34" charset="-122"/>
-                          <a:cs typeface="Arial" pitchFamily="34" charset="-120"/>
-                        </a:rPr>
-                        <a:t>1件</a:t>
-                      </a:r>
-                      <a:endParaRPr lang="en-US" sz="900" dirty="0">
-                        <a:latin typeface="Arial" charset="0"/>
-                        <a:ea typeface="Arial" charset="0"/>
-                        <a:cs typeface="Arial" charset="0"/>
-                      </a:endParaRPr>
-                    </a:p>
-                  </a:txBody>
-                  <a:tcPr marL="91440" marR="91440" marT="45720" marB="45720">
-                    <a:lnL w="6350" cap="flat" cmpd="sng" algn="ctr">
-                      <a:solidFill>
-                        <a:srgbClr val="CBD5E1"/>
-                      </a:solidFill>
-                      <a:prstDash val="solid"/>
-                      <a:round/>
-                      <a:headEnd type="none" w="med" len="med"/>
-                      <a:tailEnd type="none" w="med" len="med"/>
-                    </a:lnL>
-                    <a:lnR w="6350" cap="flat" cmpd="sng" algn="ctr">
-                      <a:solidFill>
-                        <a:srgbClr val="CBD5E1"/>
-                      </a:solidFill>
-                      <a:prstDash val="solid"/>
-                      <a:round/>
-                      <a:headEnd type="none" w="med" len="med"/>
-                      <a:tailEnd type="none" w="med" len="med"/>
-                    </a:lnR>
-                    <a:lnT w="6350" cap="flat" cmpd="sng" algn="ctr">
-                      <a:solidFill>
-                        <a:srgbClr val="CBD5E1"/>
-                      </a:solidFill>
-                      <a:prstDash val="solid"/>
-                      <a:round/>
-                      <a:headEnd type="none" w="med" len="med"/>
-                      <a:tailEnd type="none" w="med" len="med"/>
-                    </a:lnT>
-                    <a:lnB w="6350" cap="flat" cmpd="sng" algn="ctr">
-                      <a:solidFill>
-                        <a:srgbClr val="CBD5E1"/>
-                      </a:solidFill>
-                      <a:prstDash val="solid"/>
-                      <a:round/>
-                      <a:headEnd type="none" w="med" len="med"/>
-                      <a:tailEnd type="none" w="med" len="med"/>
-                    </a:lnB>
-                    <a:solidFill>
-                      <a:srgbClr val="E8EFF8"/>
-                    </a:solidFill>
-                  </a:tcPr>
-                </a:tc>
-              </a:tr>
             </a:tbl>
           </a:graphicData>
         </a:graphic>
@@ -14589,7 +13950,7 @@
                 <a:ea typeface="Arial" pitchFamily="34" charset="-122"/>
                 <a:cs typeface="Arial" pitchFamily="34" charset="-120"/>
               </a:rPr>
-              <a:t>客室の消臭対策の強化</a:t>
+              <a:t>清掃品質の向上</a:t>
             </a:r>
             <a:endParaRPr lang="en-US" sz="1200" dirty="0"/>
           </a:p>
@@ -14632,7 +13993,7 @@
                 <a:ea typeface="Arial" pitchFamily="34" charset="-122"/>
                 <a:cs typeface="Arial" pitchFamily="34" charset="-120"/>
               </a:rPr>
-              <a:t>チェックアウト後の換気・消臭スプレー処理の徹底</a:t>
+              <a:t>清掃チェックリストの見直しと強化（ベッド下・隅の重点確認）</a:t>
             </a:r>
             <a:endParaRPr lang="en-US" sz="900" dirty="0"/>
           </a:p>
@@ -14653,7 +14014,7 @@
                 <a:ea typeface="Arial" pitchFamily="34" charset="-122"/>
                 <a:cs typeface="Arial" pitchFamily="34" charset="-120"/>
               </a:rPr>
-              <a:t>定期的な脱臭剤の設置と交換フローの確立</a:t>
+              <a:t>清掃後のダブルチェック体制の導入</a:t>
             </a:r>
             <a:endParaRPr lang="en-US" sz="900" dirty="0"/>
           </a:p>
@@ -14674,7 +14035,7 @@
                 <a:ea typeface="Arial" pitchFamily="34" charset="-122"/>
                 <a:cs typeface="Arial" pitchFamily="34" charset="-120"/>
               </a:rPr>
-              <a:t>喫煙・臭いに関するクレーム発生時の即座対応マニュアル作成</a:t>
+              <a:t>清掃スタッフへの再研修実施</a:t>
             </a:r>
             <a:endParaRPr lang="en-US" sz="900" dirty="0"/>
           </a:p>
@@ -14760,7 +14121,7 @@
                 <a:ea typeface="Arial" pitchFamily="34" charset="-122"/>
                 <a:cs typeface="Arial" pitchFamily="34" charset="-120"/>
               </a:rPr>
-              <a:t>清掃品質の向上</a:t>
+              <a:t>エアコン・空調の定期点検強化</a:t>
             </a:r>
             <a:endParaRPr lang="en-US" sz="1200" dirty="0"/>
           </a:p>
@@ -14803,7 +14164,7 @@
                 <a:ea typeface="Arial" pitchFamily="34" charset="-122"/>
                 <a:cs typeface="Arial" pitchFamily="34" charset="-120"/>
               </a:rPr>
-              <a:t>清掃チェックリストの見直しと強化（ベッド下・隅の重点確認）</a:t>
+              <a:t>全室のエアコン設定を季節に応じてデフォルト確認する運用フロー導入</a:t>
             </a:r>
             <a:endParaRPr lang="en-US" sz="900" dirty="0"/>
           </a:p>
@@ -14824,7 +14185,7 @@
                 <a:ea typeface="Arial" pitchFamily="34" charset="-122"/>
                 <a:cs typeface="Arial" pitchFamily="34" charset="-120"/>
               </a:rPr>
-              <a:t>清掃後のダブルチェック体制の導入</a:t>
+              <a:t>冷暖房の正常動作を定期チェックリストに追加</a:t>
             </a:r>
             <a:endParaRPr lang="en-US" sz="900" dirty="0"/>
           </a:p>
@@ -14845,7 +14206,7 @@
                 <a:ea typeface="Arial" pitchFamily="34" charset="-122"/>
                 <a:cs typeface="Arial" pitchFamily="34" charset="-120"/>
               </a:rPr>
-              <a:t>清掃スタッフへの再研修実施</a:t>
+              <a:t>異常報告があった客室の優先メンテナンス実施</a:t>
             </a:r>
             <a:endParaRPr lang="en-US" sz="900" dirty="0"/>
           </a:p>
@@ -14931,7 +14292,7 @@
                 <a:ea typeface="Arial" pitchFamily="34" charset="-122"/>
                 <a:cs typeface="Arial" pitchFamily="34" charset="-120"/>
               </a:rPr>
-              <a:t>エアコン・空調の定期点検強化</a:t>
+              <a:t>スタッフ対応品質の統一</a:t>
             </a:r>
             <a:endParaRPr lang="en-US" sz="1200" dirty="0"/>
           </a:p>
@@ -14974,7 +14335,7 @@
                 <a:ea typeface="Arial" pitchFamily="34" charset="-122"/>
                 <a:cs typeface="Arial" pitchFamily="34" charset="-120"/>
               </a:rPr>
-              <a:t>全室のエアコン設定を季節に応じてデフォルト確認する運用フロー導入</a:t>
+              <a:t>接客マニュアルの見直しと全スタッフへの周知</a:t>
             </a:r>
             <a:endParaRPr lang="en-US" sz="900" dirty="0"/>
           </a:p>
@@ -14995,7 +14356,7 @@
                 <a:ea typeface="Arial" pitchFamily="34" charset="-122"/>
                 <a:cs typeface="Arial" pitchFamily="34" charset="-120"/>
               </a:rPr>
-              <a:t>冷暖房の正常動作を定期チェックリストに追加</a:t>
+              <a:t>ゲストからのクレーム対応フローの明確化</a:t>
             </a:r>
             <a:endParaRPr lang="en-US" sz="900" dirty="0"/>
           </a:p>
@@ -15016,7 +14377,7 @@
                 <a:ea typeface="Arial" pitchFamily="34" charset="-122"/>
                 <a:cs typeface="Arial" pitchFamily="34" charset="-120"/>
               </a:rPr>
-              <a:t>異常報告があった客室の優先メンテナンス実施</a:t>
+              <a:t>定期的なCS研修の実施</a:t>
             </a:r>
             <a:endParaRPr lang="en-US" sz="900" dirty="0"/>
           </a:p>
@@ -15025,177 +14386,6 @@
       <p:sp>
         <p:nvSpPr>
           <p:cNvPr id="18" name="Shape 16"/>
-          <p:cNvSpPr/>
-          <p:nvPr/>
-        </p:nvSpPr>
-        <p:spPr>
-          <a:xfrm>
-            <a:off x="4663440" y="3017520"/>
-            <a:ext cx="3977640" cy="1600200"/>
-          </a:xfrm>
-          <a:prstGeom prst="rect">
-            <a:avLst/>
-          </a:prstGeom>
-          <a:solidFill>
-            <a:srgbClr val="FFFFFF"/>
-          </a:solidFill>
-          <a:ln/>
-          <a:effectLst>
-            <a:outerShdw sx="100000" sy="100000" kx="0" ky="0" algn="bl" rotWithShape="0" blurRad="50800" dist="25400" dir="8100000">
-              <a:srgbClr val="000000">
-                <a:alpha val="10000"/>
-              </a:srgbClr>
-            </a:outerShdw>
-          </a:effectLst>
-        </p:spPr>
-      </p:sp>
-      <p:sp>
-        <p:nvSpPr>
-          <p:cNvPr id="19" name="Shape 17"/>
-          <p:cNvSpPr/>
-          <p:nvPr/>
-        </p:nvSpPr>
-        <p:spPr>
-          <a:xfrm>
-            <a:off x="4663440" y="3017520"/>
-            <a:ext cx="54864" cy="1600200"/>
-          </a:xfrm>
-          <a:prstGeom prst="rect">
-            <a:avLst/>
-          </a:prstGeom>
-          <a:solidFill>
-            <a:srgbClr val="3B7DD8"/>
-          </a:solidFill>
-          <a:ln/>
-        </p:spPr>
-      </p:sp>
-      <p:sp>
-        <p:nvSpPr>
-          <p:cNvPr id="20" name="Text 18"/>
-          <p:cNvSpPr/>
-          <p:nvPr/>
-        </p:nvSpPr>
-        <p:spPr>
-          <a:xfrm>
-            <a:off x="4800600" y="3063240"/>
-            <a:ext cx="3657600" cy="320040"/>
-          </a:xfrm>
-          <a:prstGeom prst="rect">
-            <a:avLst/>
-          </a:prstGeom>
-          <a:noFill/>
-          <a:ln/>
-        </p:spPr>
-        <p:txBody>
-          <a:bodyPr wrap="square" lIns="0" tIns="0" rIns="0" bIns="0" rtlCol="0" anchor="ctr"/>
-          <a:lstStyle/>
-          <a:p>
-            <a:pPr indent="0" marL="0">
-              <a:buNone/>
-            </a:pPr>
-            <a:r>
-              <a:rPr lang="en-US" sz="1200" b="1" dirty="0">
-                <a:solidFill>
-                  <a:srgbClr val="1A2744"/>
-                </a:solidFill>
-                <a:latin typeface="Arial" pitchFamily="34" charset="0"/>
-                <a:ea typeface="Arial" pitchFamily="34" charset="-122"/>
-                <a:cs typeface="Arial" pitchFamily="34" charset="-120"/>
-              </a:rPr>
-              <a:t>スタッフ対応品質の統一</a:t>
-            </a:r>
-            <a:endParaRPr lang="en-US" sz="1200" dirty="0"/>
-          </a:p>
-        </p:txBody>
-      </p:sp>
-      <p:sp>
-        <p:nvSpPr>
-          <p:cNvPr id="21" name="Text 19"/>
-          <p:cNvSpPr/>
-          <p:nvPr/>
-        </p:nvSpPr>
-        <p:spPr>
-          <a:xfrm>
-            <a:off x="4800600" y="3383280"/>
-            <a:ext cx="3657600" cy="1188720"/>
-          </a:xfrm>
-          <a:prstGeom prst="rect">
-            <a:avLst/>
-          </a:prstGeom>
-          <a:noFill/>
-          <a:ln/>
-        </p:spPr>
-        <p:txBody>
-          <a:bodyPr wrap="square" lIns="0" tIns="0" rIns="0" bIns="0" rtlCol="0" anchor="ctr"/>
-          <a:lstStyle/>
-          <a:p>
-            <a:pPr marL="342900" indent="-342900">
-              <a:spcAft>
-                <a:spcPts val="300"/>
-              </a:spcAft>
-              <a:buSzPct val="100000"/>
-              <a:buChar char="•"/>
-            </a:pPr>
-            <a:r>
-              <a:rPr lang="en-US" sz="900" dirty="0">
-                <a:solidFill>
-                  <a:srgbClr val="334155"/>
-                </a:solidFill>
-                <a:latin typeface="Arial" pitchFamily="34" charset="0"/>
-                <a:ea typeface="Arial" pitchFamily="34" charset="-122"/>
-                <a:cs typeface="Arial" pitchFamily="34" charset="-120"/>
-              </a:rPr>
-              <a:t>接客マニュアルの見直しと全スタッフへの周知</a:t>
-            </a:r>
-            <a:endParaRPr lang="en-US" sz="900" dirty="0"/>
-          </a:p>
-          <a:p>
-            <a:pPr marL="342900" indent="-342900">
-              <a:spcAft>
-                <a:spcPts val="300"/>
-              </a:spcAft>
-              <a:buSzPct val="100000"/>
-              <a:buChar char="•"/>
-            </a:pPr>
-            <a:r>
-              <a:rPr lang="en-US" sz="900" dirty="0">
-                <a:solidFill>
-                  <a:srgbClr val="334155"/>
-                </a:solidFill>
-                <a:latin typeface="Arial" pitchFamily="34" charset="0"/>
-                <a:ea typeface="Arial" pitchFamily="34" charset="-122"/>
-                <a:cs typeface="Arial" pitchFamily="34" charset="-120"/>
-              </a:rPr>
-              <a:t>ゲストからのクレーム対応フローの明確化</a:t>
-            </a:r>
-            <a:endParaRPr lang="en-US" sz="900" dirty="0"/>
-          </a:p>
-          <a:p>
-            <a:pPr marL="342900" indent="-342900">
-              <a:spcAft>
-                <a:spcPts val="300"/>
-              </a:spcAft>
-              <a:buSzPct val="100000"/>
-              <a:buChar char="•"/>
-            </a:pPr>
-            <a:r>
-              <a:rPr lang="en-US" sz="900" dirty="0">
-                <a:solidFill>
-                  <a:srgbClr val="334155"/>
-                </a:solidFill>
-                <a:latin typeface="Arial" pitchFamily="34" charset="0"/>
-                <a:ea typeface="Arial" pitchFamily="34" charset="-122"/>
-                <a:cs typeface="Arial" pitchFamily="34" charset="-120"/>
-              </a:rPr>
-              <a:t>定期的なCS研修の実施</a:t>
-            </a:r>
-            <a:endParaRPr lang="en-US" sz="900" dirty="0"/>
-          </a:p>
-        </p:txBody>
-      </p:sp>
-      <p:sp>
-        <p:nvSpPr>
-          <p:cNvPr id="22" name="Shape 20"/>
           <p:cNvSpPr/>
           <p:nvPr/>
         </p:nvSpPr>
@@ -15215,7 +14405,7 @@
       </p:sp>
       <p:sp>
         <p:nvSpPr>
-          <p:cNvPr id="23" name="Text 21"/>
+          <p:cNvPr id="19" name="Text 17"/>
           <p:cNvSpPr/>
           <p:nvPr/>
         </p:nvSpPr>
@@ -15254,7 +14444,7 @@
       </p:sp>
       <p:sp>
         <p:nvSpPr>
-          <p:cNvPr id="24" name="Text 22"/>
+          <p:cNvPr id="20" name="Text 18"/>
           <p:cNvSpPr/>
           <p:nvPr/>
         </p:nvSpPr>

--- a/納品レポート/ホテル別レポート/apa_kamata_口コミ分析レポート.pptx
+++ b/納品レポート/ホテル別レポート/apa_kamata_口コミ分析レポート.pptx
@@ -2707,7 +2707,7 @@
                 <a:ea typeface="Arial" pitchFamily="34" charset="-122"/>
                 <a:cs typeface="Arial" pitchFamily="34" charset="-120"/>
               </a:rPr>
-              <a:t>アパホテル蒲田駅東</a:t>
+              <a:t>アパホテル蒲田</a:t>
             </a:r>
             <a:endParaRPr lang="en-US" sz="1600" dirty="0"/>
           </a:p>
@@ -2789,7 +2789,7 @@
                 <a:ea typeface="Arial" pitchFamily="34" charset="-122"/>
                 <a:cs typeface="Arial" pitchFamily="34" charset="-120"/>
               </a:rPr>
-              <a:t>作成日：2026年4月20日</a:t>
+              <a:t>作成日：2026年4月21日</a:t>
             </a:r>
             <a:endParaRPr lang="en-US" sz="1000" dirty="0"/>
           </a:p>

--- a/納品レポート/ホテル別レポート/apa_kamata_口コミ分析レポート.pptx
+++ b/納品レポート/ホテル別レポート/apa_kamata_口コミ分析レポート.pptx
@@ -2707,7 +2707,7 @@
                 <a:ea typeface="Arial" pitchFamily="34" charset="-122"/>
                 <a:cs typeface="Arial" pitchFamily="34" charset="-120"/>
               </a:rPr>
-              <a:t>アパホテル蒲田</a:t>
+              <a:t>アパホテル蒲田駅東</a:t>
             </a:r>
             <a:endParaRPr lang="en-US" sz="1600" dirty="0"/>
           </a:p>
@@ -2789,7 +2789,7 @@
                 <a:ea typeface="Arial" pitchFamily="34" charset="-122"/>
                 <a:cs typeface="Arial" pitchFamily="34" charset="-120"/>
               </a:rPr>
-              <a:t>作成日：2026年4月21日</a:t>
+              <a:t>作成日：2026年4月22日</a:t>
             </a:r>
             <a:endParaRPr lang="en-US" sz="1000" dirty="0"/>
           </a:p>
